--- a/downloads/presentations/modules/anl-240.pptx
+++ b/downloads/presentations/modules/anl-240.pptx
@@ -615,7 +615,8 @@
               <a:t>Technical Deep Dive
 Baseline selection is one of the most important technical decisions. A baseline may use several prior weeks, several prior years, a regression model, seasonal decomposition, or more complex algorithms. The baseline should match the public health question. A short baseline may adapt quickly but miss seasonal context. A long baseline may capture seasonality but fail when underlying systems change.
 Time-series data often require preprocessing. Analysts may need to address missing days, duplicate submissions, delayed reporting, facility onboarding, outliers, and known holidays. Data corrections can appear as sudden spikes or drops. AI tools should distinguish between raw signals and quality-adjusted signals whenever possible.
-Thresholds control alert volume and sensitivity. A very sensitive threshold may detect early signals but generate many false alarms. A conservative threshold may reduce workload but delay detection. Thresholds should be chosen with input from epidemiologists, program staff, and emergency response leads because operational capacity and consequences matter.</a:t>
+Thresholds control alert volume and sensitivity. A very sensitive threshold may detect early signals but generate many false alarms. A conservative threshold may reduce workload but delay detection. Thresholds should be chosen with input from epidemiologists, program staff, and emergency response leads because operational capacity and consequences matter.
+Application guidance: Connect the concept to public health purpose, responsible use, required safeguards, documentation, and the next action a department should take.</a:t>
             </a:r>
             <a:endParaRPr lang="en-US" dirty="0"/>
           </a:p>
@@ -705,7 +706,8 @@
               <a:rPr lang="en-US" dirty="0"/>
               <a:t>Technical Deep Dive
 Anomaly detection methods vary in complexity. Simple methods may compare counts to moving averages or standard deviations. More advanced methods may use regression, Bayesian approaches, control charts, machine learning, or ensemble models. More complex methods are not automatically better. In public health practice, interpretability, stability, transparency, and workflow fit often matter as much as statistical sophistication.
-Alert review should be documented. Staff should record what signal occurred, what data were reviewed, what explanation was considered, what action was taken, and whether the alert was useful. Over time, these review notes can improve thresholds, reduce alert fatigue, and support accountability.</a:t>
+Alert review should be documented. Staff should record what signal occurred, what data were reviewed, what explanation was considered, what action was taken, and whether the alert was useful. Over time, these review notes can improve thresholds, reduce alert fatigue, and support accountability.
+Application guidance: Connect the concept to public health purpose, responsible use, required safeguards, documentation, and the next action a department should take.</a:t>
             </a:r>
             <a:endParaRPr lang="en-US" dirty="0"/>
           </a:p>
@@ -796,7 +798,8 @@
               <a:t>Risks, Failure Modes, and Guardrails
 Reporting artifacts. Feed failures, delayed batches, or coding changes can trigger false alerts. Guardrails include data quality checks, feed monitoring, and partner change logs.
 Alert fatigue. Too many alerts can reduce attention. Guardrails include threshold tuning, tiered alerting, user feedback, and periodic alert review.
-Overreaction to signals. A statistical signal may be mistaken for a confirmed outbreak. Guardrails include defined review protocols and communication approval.</a:t>
+Overreaction to signals. A statistical signal may be mistaken for a confirmed outbreak. Guardrails include defined review protocols and communication approval.
+Application guidance: Identify what could go wrong, who could be affected, what safeguards are needed, and what evidence should be reviewed before use expands.</a:t>
             </a:r>
             <a:endParaRPr lang="en-US" dirty="0"/>
           </a:p>
@@ -885,7 +888,8 @@
             <a:r>
               <a:rPr lang="en-US" dirty="0"/>
               <a:t>Risks, Failure Modes, and Guardrails
-Missed emerging events. Overly conservative thresholds may miss early signals. Guardrails include multiple indicators, sensitivity review, and escalation pathways for staff concerns.</a:t>
+Missed emerging events. Overly conservative thresholds may miss early signals. Guardrails include multiple indicators, sensitivity review, and escalation pathways for staff concerns.
+Application guidance: Identify what could go wrong, who could be affected, what safeguards are needed, and what evidence should be reviewed before use expands.</a:t>
             </a:r>
             <a:endParaRPr lang="en-US" dirty="0"/>
           </a:p>
@@ -975,7 +979,8 @@
               <a:rPr lang="en-US" dirty="0"/>
               <a:t>Application to AI-Supported Workflows
 Time-series and anomaly detection methods can support predictive dashboards, syndromic surveillance, wastewater monitoring, outbreak intelligence, and emergency preparedness. Generative AI may summarize signal review, but it should include uncertainty and source indicators. Agentic workflows may route alerts or create tasks, but those actions should be limited to defined protocols and human review.
-The best AI-supported surveillance workflows combine automation with epidemiologic judgment. AI can help detect changes, but humans determine whether the signal is meaningful, what additional evidence is needed, and what public health action is appropriate.</a:t>
+The best AI-supported surveillance workflows combine automation with epidemiologic judgment. AI can help detect changes, but humans determine whether the signal is meaningful, what additional evidence is needed, and what public health action is appropriate.
+Application guidance: Use the concept to clarify workflow changes, dependencies, staffing, procurement requirements, training needs, and implementation checkpoints.</a:t>
             </a:r>
             <a:endParaRPr lang="en-US" dirty="0"/>
           </a:p>
@@ -1066,7 +1071,8 @@
               <a:t>Reflection Questions
 What time-series data stream would benefit from automated signal review?
 What baseline is appropriate for the condition, data source, and decision?
-Which reporting artifacts could create false signals?</a:t>
+Which reporting artifacts could create false signals?
+Application guidance: Connect the concept to public health purpose, responsible use, required safeguards, documentation, and the next action a department should take.</a:t>
             </a:r>
             <a:endParaRPr lang="en-US" dirty="0"/>
           </a:p>
@@ -1156,7 +1162,8 @@
               <a:rPr lang="en-US" dirty="0"/>
               <a:t>Reflection Questions
 What threshold balances early detection and alert fatigue?
-How will staff document review, decisions, and lessons learned?</a:t>
+How will staff document review, decisions, and lessons learned?
+Application guidance: Connect the concept to public health purpose, responsible use, required safeguards, documentation, and the next action a department should take.</a:t>
             </a:r>
             <a:endParaRPr lang="en-US" dirty="0"/>
           </a:p>
@@ -1246,7 +1253,8 @@
               <a:rPr lang="en-US" dirty="0"/>
               <a:t>Practical Exercise
 Create an anomaly detection review plan for one public health data stream. Include the monitored indicator, data source, update frequency, baseline approach, known reporting patterns, threshold rationale, alert tiers, review steps, related indicators, documentation expectations, and escalation criteria.
-The plan should identify how staff will distinguish statistical anomalies from data quality issues and public health events.</a:t>
+The plan should identify how staff will distinguish statistical anomalies from data quality issues and public health events.
+Application guidance: Use the assignment to test whether you can explain the concept, apply it to a realistic public health situation, and identify what would need review before the work moves forward.</a:t>
             </a:r>
             <a:endParaRPr lang="en-US" dirty="0"/>
           </a:p>
@@ -1337,7 +1345,8 @@
               <a:t>Expected Artifact or Evidence
 Anomaly detection review plan
 Baseline and threshold rationale
-Alert review protocol</a:t>
+Alert review protocol
+Application guidance: Connect the concept to public health purpose, responsible use, required safeguards, documentation, and the next action a department should take.</a:t>
             </a:r>
             <a:endParaRPr lang="en-US" dirty="0"/>
           </a:p>
@@ -1426,7 +1435,8 @@
             <a:r>
               <a:rPr lang="en-US" dirty="0"/>
               <a:t>Expected Artifact or Evidence
-Signal documentation template</a:t>
+Signal documentation template
+Application guidance: Connect the concept to public health purpose, responsible use, required safeguards, documentation, and the next action a department should take.</a:t>
             </a:r>
             <a:endParaRPr lang="en-US" dirty="0"/>
           </a:p>
@@ -1610,7 +1620,8 @@
 Anomaly detection review plan
 Baseline and threshold rationale
 Alert review protocol
-Signal documentation template</a:t>
+Signal documentation template
+Application guidance: Use the assignment to test whether you can explain the concept, apply it to a realistic public health situation, and identify what would need review before the work moves forward.</a:t>
             </a:r>
             <a:endParaRPr lang="en-US" dirty="0"/>
           </a:p>
@@ -1703,7 +1714,8 @@
 2. Why does seasonality matter?
 3. What is a common risk of too many low-value alerts?
 4. Which statement is most accurate?
-5. What is strong completion evidence for this module?</a:t>
+5. What is strong completion evidence for this module?
+Application guidance: Use the assignment to test whether you can explain the concept, apply it to a realistic public health situation, and identify what would need review before the work moves forward.</a:t>
             </a:r>
             <a:endParaRPr lang="en-US" dirty="0"/>
           </a:p>
@@ -1795,7 +1807,8 @@
 CDC National Syndromic Surveillance Program: https://www.cdc.gov/nssp/
 CDC Evaluation Framework: https://www.cdc.gov/evaluation/
 NIST Artificial Intelligence Risk Management Framework: https://www.nist.gov/itl/ai-risk-management-framework
-CDC Public Health Data Strategy: https://www.cdc.gov/public-health-data-strategy/php/about/index.html</a:t>
+CDC Public Health Data Strategy: https://www.cdc.gov/public-health-data-strategy/php/about/index.html
+Application guidance: Connect the concept to public health purpose, responsible use, required safeguards, documentation, and the next action a department should take.</a:t>
             </a:r>
             <a:endParaRPr lang="en-US" dirty="0"/>
           </a:p>
@@ -2074,7 +2087,8 @@
 Explain baselines, seasonality, trends, reporting delays, and thresholds.
 Distinguish statistical signals from confirmed outbreaks or public health events.
 Identify risks from alert fatigue, data artifacts, delayed reporting, and model drift.
-Design guardrails for AI-supported surveillance alerts.</a:t>
+Design guardrails for AI-supported surveillance alerts.
+Application guidance: Use the assignment to test whether you can explain the concept, apply it to a realistic public health situation, and identify what would need review before the work moves forward.</a:t>
             </a:r>
             <a:endParaRPr lang="en-US" dirty="0"/>
           </a:p>
@@ -2163,7 +2177,8 @@
             <a:r>
               <a:rPr lang="en-US" dirty="0"/>
               <a:t>Learning Objectives
-Produce an anomaly detection review plan for one public health data stream.</a:t>
+Produce an anomaly detection review plan for one public health data stream.
+Application guidance: Use the assignment to test whether you can explain the concept, apply it to a realistic public health situation, and identify what would need review before the work moves forward.</a:t>
             </a:r>
             <a:endParaRPr lang="en-US" dirty="0"/>
           </a:p>
@@ -2254,7 +2269,8 @@
               <a:t>Module Overview
 Time-series analysis examines data collected over time. In public health, time patterns are central to surveillance, outbreak detection, syndromic monitoring, wastewater analysis, emergency response, seasonal planning, and program performance. AI-supported anomaly detection can help identify unusual increases, decreases, or pattern changes that may require investigation.
 This module explains how time-series and anomaly detection methods can support public health without replacing epidemiologic interpretation. Automated alerts may identify signals faster, but signals are not diagnoses or confirmed events. Staff need to understand baselines, seasonality, reporting delays, thresholds, alert fatigue, and the difference between statistical anomalies and public health significance.
-Learners will practice designing an anomaly detection review plan that includes data quality checks, baseline selection, threshold rationale, human review, and escalation procedures.</a:t>
+Learners will practice designing an anomaly detection review plan that includes data quality checks, baseline selection, threshold rationale, human review, and escalation procedures.
+Application guidance: Connect the concept to public health purpose, responsible use, required safeguards, documentation, and the next action a department should take.</a:t>
             </a:r>
             <a:endParaRPr lang="en-US" dirty="0"/>
           </a:p>
@@ -2345,7 +2361,8 @@
               <a:t>Why This Topic Matters for Public Health AI
 Time-series methods matter because public health surveillance is often about change. A single count may be difficult to interpret without knowing whether it is higher than expected for that time, place, population, reporting source, and condition. AI-supported anomaly detection can help staff review large volumes of data and prioritize signals that deserve attention.
 However, public health time-series data are shaped by reporting systems as much as disease patterns. Weekends, holidays, provider onboarding, lab code changes, EHR outages, weather events, testing availability, and public attention can all change observed data. An anomaly may indicate an outbreak, but it may also indicate a data feed problem or behavior change.
-Responsible use requires a workflow that treats alerts as starting points for investigation. Staff must know what data are being monitored, how the baseline was selected, what triggers an alert, what review steps follow, and when a signal becomes an incident, outbreak investigation, or communication issue.</a:t>
+Responsible use requires a workflow that treats alerts as starting points for investigation. Staff must know what data are being monitored, how the baseline was selected, what triggers an alert, what review steps follow, and when a signal becomes an incident, outbreak investigation, or communication issue.
+Application guidance: Connect the concept to public health purpose, responsible use, required safeguards, documentation, and the next action a department should take.</a:t>
             </a:r>
             <a:endParaRPr lang="en-US" dirty="0"/>
           </a:p>
@@ -2435,7 +2452,8 @@
               <a:rPr lang="en-US" dirty="0"/>
               <a:t>Public Health Example
 A syndromic surveillance team may use anomaly detection to monitor emergency department visits for respiratory symptoms. The system may flag a county when visits exceed the expected range for that day and season. The alert could prompt review of age groups, facilities, diagnosis text, lab data, school absenteeism, and local context.
-The alert is valuable only if it enters a disciplined review process. A sudden increase may reflect a true outbreak, a coding change, a new facility feed, a holiday effect, or a backlog. The analyst should review data quality, compare related indicators, assess geography and populations, and document whether the signal requires action or continued monitoring.</a:t>
+The alert is valuable only if it enters a disciplined review process. A sudden increase may reflect a true outbreak, a coding change, a new facility feed, a holiday effect, or a backlog. The analyst should review data quality, compare related indicators, assess geography and populations, and document whether the signal requires action or continued monitoring.
+Application guidance: Connect the concept to public health purpose, responsible use, required safeguards, documentation, and the next action a department should take.</a:t>
             </a:r>
             <a:endParaRPr lang="en-US" dirty="0"/>
           </a:p>
@@ -3206,8 +3224,8 @@
         </p:nvSpPr>
         <p:spPr>
           <a:xfrm>
-            <a:off x="9966960" y="6537960"/>
-            <a:ext cx="1645920" cy="201168"/>
+            <a:off x="9646920" y="6537960"/>
+            <a:ext cx="1965960" cy="201168"/>
           </a:xfrm>
           <a:prstGeom prst="rect">
             <a:avLst/>
@@ -3231,7 +3249,7 @@
                 <a:ea typeface="Aptos" pitchFamily="34" charset="-122"/>
                 <a:cs typeface="Aptos" pitchFamily="34" charset="-120"/>
               </a:rPr>
-              <a:t>Â© Paula Soper</a:t>
+              <a:t>Copyright Paula Soper</a:t>
             </a:r>
             <a:endParaRPr lang="en-US" sz="800" dirty="0"/>
           </a:p>
@@ -3278,77 +3296,13 @@
       </p:sp>
       <p:sp>
         <p:nvSpPr>
-          <p:cNvPr id="8" name="Shape 6"/>
+          <p:cNvPr id="8" name="Text 6"/>
           <p:cNvSpPr/>
           <p:nvPr/>
         </p:nvSpPr>
         <p:spPr>
           <a:xfrm>
             <a:off x="640080" y="658368"/>
-            <a:ext cx="420624" cy="420624"/>
-          </a:xfrm>
-          <a:prstGeom prst="ellipse">
-            <a:avLst/>
-          </a:prstGeom>
-          <a:solidFill>
-            <a:srgbClr val="0068B7"/>
-          </a:solidFill>
-          <a:ln w="12700">
-            <a:solidFill>
-              <a:srgbClr val="0068B7"/>
-            </a:solidFill>
-            <a:prstDash val="solid"/>
-          </a:ln>
-        </p:spPr>
-      </p:sp>
-      <p:sp>
-        <p:nvSpPr>
-          <p:cNvPr id="9" name="Text 7"/>
-          <p:cNvSpPr/>
-          <p:nvPr/>
-        </p:nvSpPr>
-        <p:spPr>
-          <a:xfrm>
-            <a:off x="640080" y="731520"/>
-            <a:ext cx="420624" cy="164592"/>
-          </a:xfrm>
-          <a:prstGeom prst="rect">
-            <a:avLst/>
-          </a:prstGeom>
-          <a:noFill/>
-          <a:ln/>
-        </p:spPr>
-        <p:txBody>
-          <a:bodyPr wrap="square" lIns="0" tIns="0" rIns="0" bIns="0" rtlCol="0" anchor="ctr"/>
-          <a:lstStyle/>
-          <a:p>
-            <a:pPr algn="ctr" indent="0" marL="0">
-              <a:buNone/>
-            </a:pPr>
-            <a:r>
-              <a:rPr lang="en-US" sz="1100" b="1" dirty="0">
-                <a:solidFill>
-                  <a:srgbClr val="FFFFFF"/>
-                </a:solidFill>
-                <a:latin typeface="Aptos" pitchFamily="34" charset="0"/>
-                <a:ea typeface="Aptos" pitchFamily="34" charset="-122"/>
-                <a:cs typeface="Aptos" pitchFamily="34" charset="-120"/>
-              </a:rPr>
-              <a:t>5</a:t>
-            </a:r>
-            <a:endParaRPr lang="en-US" sz="1100" dirty="0"/>
-          </a:p>
-        </p:txBody>
-      </p:sp>
-      <p:sp>
-        <p:nvSpPr>
-          <p:cNvPr id="10" name="Text 8"/>
-          <p:cNvSpPr/>
-          <p:nvPr/>
-        </p:nvSpPr>
-        <p:spPr>
-          <a:xfrm>
-            <a:off x="640080" y="621792"/>
             <a:ext cx="10881360" cy="713232"/>
           </a:xfrm>
           <a:prstGeom prst="rect">
@@ -3383,14 +3337,14 @@
       </p:sp>
       <p:sp>
         <p:nvSpPr>
-          <p:cNvPr id="11" name="Text 9"/>
+          <p:cNvPr id="9" name="Text 7"/>
           <p:cNvSpPr/>
           <p:nvPr/>
         </p:nvSpPr>
         <p:spPr>
           <a:xfrm>
             <a:off x="868680" y="1508760"/>
-            <a:ext cx="6537960" cy="4160520"/>
+            <a:ext cx="6309360" cy="4160520"/>
           </a:xfrm>
           <a:prstGeom prst="rect">
             <a:avLst/>
@@ -3449,18 +3403,18 @@
       </p:sp>
       <p:sp>
         <p:nvSpPr>
-          <p:cNvPr id="12" name="Shape 10"/>
-          <p:cNvSpPr/>
-          <p:nvPr/>
-        </p:nvSpPr>
-        <p:spPr>
-          <a:xfrm>
-            <a:off x="7909560" y="1417320"/>
-            <a:ext cx="3154680" cy="1828800"/>
+          <p:cNvPr id="10" name="Shape 8"/>
+          <p:cNvSpPr/>
+          <p:nvPr/>
+        </p:nvSpPr>
+        <p:spPr>
+          <a:xfrm>
+            <a:off x="7635240" y="1325880"/>
+            <a:ext cx="3474720" cy="1325880"/>
           </a:xfrm>
           <a:prstGeom prst="roundRect">
             <a:avLst>
-              <a:gd name="adj" fmla="val 6000"/>
+              <a:gd name="adj" fmla="val 8276"/>
             </a:avLst>
           </a:prstGeom>
           <a:solidFill>
@@ -3476,14 +3430,14 @@
       </p:sp>
       <p:sp>
         <p:nvSpPr>
-          <p:cNvPr id="13" name="Text 11"/>
-          <p:cNvSpPr/>
-          <p:nvPr/>
-        </p:nvSpPr>
-        <p:spPr>
-          <a:xfrm>
-            <a:off x="8074152" y="1563624"/>
-            <a:ext cx="2825496" cy="256032"/>
+          <p:cNvPr id="11" name="Text 9"/>
+          <p:cNvSpPr/>
+          <p:nvPr/>
+        </p:nvSpPr>
+        <p:spPr>
+          <a:xfrm>
+            <a:off x="7799832" y="1472184"/>
+            <a:ext cx="3145536" cy="256032"/>
           </a:xfrm>
           <a:prstGeom prst="rect">
             <a:avLst/>
@@ -3507,7 +3461,7 @@
                 <a:ea typeface="Aptos" pitchFamily="34" charset="-122"/>
                 <a:cs typeface="Aptos" pitchFamily="34" charset="-120"/>
               </a:rPr>
-              <a:t>Key idea</a:t>
+              <a:t>Core concept</a:t>
             </a:r>
             <a:endParaRPr lang="en-US" sz="1300" dirty="0"/>
           </a:p>
@@ -3515,14 +3469,14 @@
       </p:sp>
       <p:sp>
         <p:nvSpPr>
-          <p:cNvPr id="14" name="Text 12"/>
-          <p:cNvSpPr/>
-          <p:nvPr/>
-        </p:nvSpPr>
-        <p:spPr>
-          <a:xfrm>
-            <a:off x="8074152" y="1920240"/>
-            <a:ext cx="2825496" cy="1188720"/>
+          <p:cNvPr id="12" name="Text 10"/>
+          <p:cNvSpPr/>
+          <p:nvPr/>
+        </p:nvSpPr>
+        <p:spPr>
+          <a:xfrm>
+            <a:off x="7799832" y="1828800"/>
+            <a:ext cx="3145536" cy="685800"/>
           </a:xfrm>
           <a:prstGeom prst="rect">
             <a:avLst/>
@@ -3556,18 +3510,159 @@
       </p:sp>
       <p:sp>
         <p:nvSpPr>
-          <p:cNvPr id="15" name="Shape 13"/>
-          <p:cNvSpPr/>
-          <p:nvPr/>
-        </p:nvSpPr>
-        <p:spPr>
-          <a:xfrm>
-            <a:off x="7909560" y="3520440"/>
-            <a:ext cx="3154680" cy="1737360"/>
+          <p:cNvPr id="13" name="Shape 11"/>
+          <p:cNvSpPr/>
+          <p:nvPr/>
+        </p:nvSpPr>
+        <p:spPr>
+          <a:xfrm>
+            <a:off x="7635240" y="2788920"/>
+            <a:ext cx="3474720" cy="1536192"/>
           </a:xfrm>
           <a:prstGeom prst="roundRect">
             <a:avLst>
-              <a:gd name="adj" fmla="val 6316"/>
+              <a:gd name="adj" fmla="val 7143"/>
+            </a:avLst>
+          </a:prstGeom>
+          <a:solidFill>
+            <a:srgbClr val="FFFFFF">
+              <a:alpha val="88000"/>
+            </a:srgbClr>
+          </a:solidFill>
+          <a:ln w="12700">
+            <a:solidFill>
+              <a:srgbClr val="D6E8F2"/>
+            </a:solidFill>
+            <a:prstDash val="solid"/>
+          </a:ln>
+        </p:spPr>
+      </p:sp>
+      <p:sp>
+        <p:nvSpPr>
+          <p:cNvPr id="14" name="Shape 12"/>
+          <p:cNvSpPr/>
+          <p:nvPr/>
+        </p:nvSpPr>
+        <p:spPr>
+          <a:xfrm>
+            <a:off x="8074152" y="3291840"/>
+            <a:ext cx="2596896" cy="749808"/>
+          </a:xfrm>
+          <a:prstGeom prst="rect">
+            <a:avLst/>
+          </a:prstGeom>
+          <a:solidFill>
+            <a:srgbClr val="EAF6F8"/>
+          </a:solidFill>
+          <a:ln w="12700">
+            <a:solidFill>
+              <a:srgbClr val="8ABBD8"/>
+            </a:solidFill>
+            <a:prstDash val="solid"/>
+          </a:ln>
+        </p:spPr>
+      </p:sp>
+      <p:sp>
+        <p:nvSpPr>
+          <p:cNvPr id="15" name="Shape 13"/>
+          <p:cNvSpPr/>
+          <p:nvPr/>
+        </p:nvSpPr>
+        <p:spPr>
+          <a:xfrm>
+            <a:off x="8202168" y="3721608"/>
+            <a:ext cx="2340864" cy="0"/>
+          </a:xfrm>
+          <a:prstGeom prst="line">
+            <a:avLst/>
+          </a:prstGeom>
+          <a:noFill/>
+          <a:ln w="19050">
+            <a:solidFill>
+              <a:srgbClr val="0068B7"/>
+            </a:solidFill>
+            <a:prstDash val="solid"/>
+          </a:ln>
+        </p:spPr>
+      </p:sp>
+      <p:sp>
+        <p:nvSpPr>
+          <p:cNvPr id="16" name="Shape 14"/>
+          <p:cNvSpPr/>
+          <p:nvPr/>
+        </p:nvSpPr>
+        <p:spPr>
+          <a:xfrm>
+            <a:off x="9198864" y="4206240"/>
+            <a:ext cx="347472" cy="347472"/>
+          </a:xfrm>
+          <a:prstGeom prst="ellipse">
+            <a:avLst/>
+          </a:prstGeom>
+          <a:solidFill>
+            <a:srgbClr val="2F8A28"/>
+          </a:solidFill>
+          <a:ln w="12700">
+            <a:solidFill>
+              <a:srgbClr val="2F8A28"/>
+            </a:solidFill>
+            <a:prstDash val="solid"/>
+          </a:ln>
+        </p:spPr>
+      </p:sp>
+      <p:sp>
+        <p:nvSpPr>
+          <p:cNvPr id="17" name="Text 15"/>
+          <p:cNvSpPr/>
+          <p:nvPr/>
+        </p:nvSpPr>
+        <p:spPr>
+          <a:xfrm>
+            <a:off x="7909560" y="3977640"/>
+            <a:ext cx="2926080" cy="182880"/>
+          </a:xfrm>
+          <a:prstGeom prst="rect">
+            <a:avLst/>
+          </a:prstGeom>
+          <a:noFill/>
+          <a:ln/>
+        </p:spPr>
+        <p:txBody>
+          <a:bodyPr wrap="square" lIns="0" tIns="0" rIns="0" bIns="0" rtlCol="0" anchor="ctr"/>
+          <a:lstStyle/>
+          <a:p>
+            <a:pPr algn="ctr" indent="0" marL="0">
+              <a:buNone/>
+            </a:pPr>
+            <a:r>
+              <a:rPr lang="en-US" sz="1000" dirty="0">
+                <a:solidFill>
+                  <a:srgbClr val="003A63"/>
+                </a:solidFill>
+                <a:latin typeface="Aptos" pitchFamily="34" charset="0"/>
+                <a:ea typeface="Aptos" pitchFamily="34" charset="-122"/>
+                <a:cs typeface="Aptos" pitchFamily="34" charset="-120"/>
+              </a:rPr>
+              <a:t>Concept to action</a:t>
+            </a:r>
+            <a:endParaRPr lang="en-US" sz="1000" dirty="0"/>
+          </a:p>
+        </p:txBody>
+      </p:sp>
+      <p:sp>
+        <p:nvSpPr>
+          <p:cNvPr id="18" name="Shape 16"/>
+          <p:cNvSpPr/>
+          <p:nvPr/>
+        </p:nvSpPr>
+        <p:spPr>
+          <a:xfrm>
+            <a:off x="7635240" y="4498848"/>
+            <a:ext cx="3474720" cy="1143000"/>
+          </a:xfrm>
+          <a:prstGeom prst="roundRect">
+            <a:avLst>
+              <a:gd name="adj" fmla="val 9600"/>
             </a:avLst>
           </a:prstGeom>
           <a:solidFill>
@@ -3583,14 +3678,14 @@
       </p:sp>
       <p:sp>
         <p:nvSpPr>
-          <p:cNvPr id="16" name="Text 14"/>
-          <p:cNvSpPr/>
-          <p:nvPr/>
-        </p:nvSpPr>
-        <p:spPr>
-          <a:xfrm>
-            <a:off x="8074152" y="3666744"/>
-            <a:ext cx="2825496" cy="256032"/>
+          <p:cNvPr id="19" name="Text 17"/>
+          <p:cNvSpPr/>
+          <p:nvPr/>
+        </p:nvSpPr>
+        <p:spPr>
+          <a:xfrm>
+            <a:off x="7799832" y="4645152"/>
+            <a:ext cx="3145536" cy="256032"/>
           </a:xfrm>
           <a:prstGeom prst="rect">
             <a:avLst/>
@@ -3614,7 +3709,7 @@
                 <a:ea typeface="Aptos" pitchFamily="34" charset="-122"/>
                 <a:cs typeface="Aptos" pitchFamily="34" charset="-120"/>
               </a:rPr>
-              <a:t>Use this for</a:t>
+              <a:t>Apply it</a:t>
             </a:r>
             <a:endParaRPr lang="en-US" sz="1300" dirty="0"/>
           </a:p>
@@ -3622,14 +3717,14 @@
       </p:sp>
       <p:sp>
         <p:nvSpPr>
-          <p:cNvPr id="17" name="Text 15"/>
-          <p:cNvSpPr/>
-          <p:nvPr/>
-        </p:nvSpPr>
-        <p:spPr>
-          <a:xfrm>
-            <a:off x="8074152" y="4023360"/>
-            <a:ext cx="2825496" cy="1097280"/>
+          <p:cNvPr id="20" name="Text 18"/>
+          <p:cNvSpPr/>
+          <p:nvPr/>
+        </p:nvSpPr>
+        <p:spPr>
+          <a:xfrm>
+            <a:off x="7799832" y="5001768"/>
+            <a:ext cx="3145536" cy="502920"/>
           </a:xfrm>
           <a:prstGeom prst="rect">
             <a:avLst/>
@@ -3655,7 +3750,7 @@
                 <a:ea typeface="Aptos" pitchFamily="34" charset="-122"/>
                 <a:cs typeface="Aptos" pitchFamily="34" charset="-120"/>
               </a:rPr>
-              <a:t>Connect the concept to public health decisions, safeguards, documentation, or implementation work.</a:t>
+              <a:t>Connect the concept to public health purpose, responsible use, required safeguards, documentation, and the next action a department should take.</a:t>
             </a:r>
             <a:endParaRPr lang="en-US" sz="1550" dirty="0"/>
           </a:p>
@@ -3829,8 +3924,8 @@
         </p:nvSpPr>
         <p:spPr>
           <a:xfrm>
-            <a:off x="9966960" y="6537960"/>
-            <a:ext cx="1645920" cy="201168"/>
+            <a:off x="9646920" y="6537960"/>
+            <a:ext cx="1965960" cy="201168"/>
           </a:xfrm>
           <a:prstGeom prst="rect">
             <a:avLst/>
@@ -3854,7 +3949,7 @@
                 <a:ea typeface="Aptos" pitchFamily="34" charset="-122"/>
                 <a:cs typeface="Aptos" pitchFamily="34" charset="-120"/>
               </a:rPr>
-              <a:t>Â© Paula Soper</a:t>
+              <a:t>Copyright Paula Soper</a:t>
             </a:r>
             <a:endParaRPr lang="en-US" sz="800" dirty="0"/>
           </a:p>
@@ -3949,7 +4044,7 @@
         <p:spPr>
           <a:xfrm>
             <a:off x="868680" y="1508760"/>
-            <a:ext cx="6537960" cy="4160520"/>
+            <a:ext cx="6309360" cy="4160520"/>
           </a:xfrm>
           <a:prstGeom prst="rect">
             <a:avLst/>
@@ -4014,12 +4109,12 @@
         </p:nvSpPr>
         <p:spPr>
           <a:xfrm>
-            <a:off x="7909560" y="1417320"/>
-            <a:ext cx="3154680" cy="1828800"/>
+            <a:off x="7635240" y="1325880"/>
+            <a:ext cx="3474720" cy="1325880"/>
           </a:xfrm>
           <a:prstGeom prst="roundRect">
             <a:avLst>
-              <a:gd name="adj" fmla="val 6000"/>
+              <a:gd name="adj" fmla="val 8276"/>
             </a:avLst>
           </a:prstGeom>
           <a:solidFill>
@@ -4041,8 +4136,8 @@
         </p:nvSpPr>
         <p:spPr>
           <a:xfrm>
-            <a:off x="8074152" y="1563624"/>
-            <a:ext cx="2825496" cy="256032"/>
+            <a:off x="7799832" y="1472184"/>
+            <a:ext cx="3145536" cy="256032"/>
           </a:xfrm>
           <a:prstGeom prst="rect">
             <a:avLst/>
@@ -4066,7 +4161,7 @@
                 <a:ea typeface="Aptos" pitchFamily="34" charset="-122"/>
                 <a:cs typeface="Aptos" pitchFamily="34" charset="-120"/>
               </a:rPr>
-              <a:t>Key idea</a:t>
+              <a:t>Core concept</a:t>
             </a:r>
             <a:endParaRPr lang="en-US" sz="1300" dirty="0"/>
           </a:p>
@@ -4080,8 +4175,8 @@
         </p:nvSpPr>
         <p:spPr>
           <a:xfrm>
-            <a:off x="8074152" y="1920240"/>
-            <a:ext cx="2825496" cy="1188720"/>
+            <a:off x="7799832" y="1828800"/>
+            <a:ext cx="3145536" cy="685800"/>
           </a:xfrm>
           <a:prstGeom prst="rect">
             <a:avLst/>
@@ -4121,12 +4216,153 @@
         </p:nvSpPr>
         <p:spPr>
           <a:xfrm>
-            <a:off x="7909560" y="3520440"/>
-            <a:ext cx="3154680" cy="1737360"/>
+            <a:off x="7635240" y="2788920"/>
+            <a:ext cx="3474720" cy="1536192"/>
           </a:xfrm>
           <a:prstGeom prst="roundRect">
             <a:avLst>
-              <a:gd name="adj" fmla="val 6316"/>
+              <a:gd name="adj" fmla="val 7143"/>
+            </a:avLst>
+          </a:prstGeom>
+          <a:solidFill>
+            <a:srgbClr val="FFFFFF">
+              <a:alpha val="88000"/>
+            </a:srgbClr>
+          </a:solidFill>
+          <a:ln w="12700">
+            <a:solidFill>
+              <a:srgbClr val="D6E8F2"/>
+            </a:solidFill>
+            <a:prstDash val="solid"/>
+          </a:ln>
+        </p:spPr>
+      </p:sp>
+      <p:sp>
+        <p:nvSpPr>
+          <p:cNvPr id="14" name="Shape 12"/>
+          <p:cNvSpPr/>
+          <p:nvPr/>
+        </p:nvSpPr>
+        <p:spPr>
+          <a:xfrm>
+            <a:off x="8074152" y="3291840"/>
+            <a:ext cx="2596896" cy="749808"/>
+          </a:xfrm>
+          <a:prstGeom prst="rect">
+            <a:avLst/>
+          </a:prstGeom>
+          <a:solidFill>
+            <a:srgbClr val="EAF6F8"/>
+          </a:solidFill>
+          <a:ln w="12700">
+            <a:solidFill>
+              <a:srgbClr val="8ABBD8"/>
+            </a:solidFill>
+            <a:prstDash val="solid"/>
+          </a:ln>
+        </p:spPr>
+      </p:sp>
+      <p:sp>
+        <p:nvSpPr>
+          <p:cNvPr id="15" name="Shape 13"/>
+          <p:cNvSpPr/>
+          <p:nvPr/>
+        </p:nvSpPr>
+        <p:spPr>
+          <a:xfrm>
+            <a:off x="8202168" y="3721608"/>
+            <a:ext cx="2340864" cy="0"/>
+          </a:xfrm>
+          <a:prstGeom prst="line">
+            <a:avLst/>
+          </a:prstGeom>
+          <a:noFill/>
+          <a:ln w="19050">
+            <a:solidFill>
+              <a:srgbClr val="0068B7"/>
+            </a:solidFill>
+            <a:prstDash val="solid"/>
+          </a:ln>
+        </p:spPr>
+      </p:sp>
+      <p:sp>
+        <p:nvSpPr>
+          <p:cNvPr id="16" name="Shape 14"/>
+          <p:cNvSpPr/>
+          <p:nvPr/>
+        </p:nvSpPr>
+        <p:spPr>
+          <a:xfrm>
+            <a:off x="9198864" y="4206240"/>
+            <a:ext cx="347472" cy="347472"/>
+          </a:xfrm>
+          <a:prstGeom prst="ellipse">
+            <a:avLst/>
+          </a:prstGeom>
+          <a:solidFill>
+            <a:srgbClr val="2F8A28"/>
+          </a:solidFill>
+          <a:ln w="12700">
+            <a:solidFill>
+              <a:srgbClr val="2F8A28"/>
+            </a:solidFill>
+            <a:prstDash val="solid"/>
+          </a:ln>
+        </p:spPr>
+      </p:sp>
+      <p:sp>
+        <p:nvSpPr>
+          <p:cNvPr id="17" name="Text 15"/>
+          <p:cNvSpPr/>
+          <p:nvPr/>
+        </p:nvSpPr>
+        <p:spPr>
+          <a:xfrm>
+            <a:off x="7909560" y="3977640"/>
+            <a:ext cx="2926080" cy="182880"/>
+          </a:xfrm>
+          <a:prstGeom prst="rect">
+            <a:avLst/>
+          </a:prstGeom>
+          <a:noFill/>
+          <a:ln/>
+        </p:spPr>
+        <p:txBody>
+          <a:bodyPr wrap="square" lIns="0" tIns="0" rIns="0" bIns="0" rtlCol="0" anchor="ctr"/>
+          <a:lstStyle/>
+          <a:p>
+            <a:pPr algn="ctr" indent="0" marL="0">
+              <a:buNone/>
+            </a:pPr>
+            <a:r>
+              <a:rPr lang="en-US" sz="1000" dirty="0">
+                <a:solidFill>
+                  <a:srgbClr val="003A63"/>
+                </a:solidFill>
+                <a:latin typeface="Aptos" pitchFamily="34" charset="0"/>
+                <a:ea typeface="Aptos" pitchFamily="34" charset="-122"/>
+                <a:cs typeface="Aptos" pitchFamily="34" charset="-120"/>
+              </a:rPr>
+              <a:t>Concept to action</a:t>
+            </a:r>
+            <a:endParaRPr lang="en-US" sz="1000" dirty="0"/>
+          </a:p>
+        </p:txBody>
+      </p:sp>
+      <p:sp>
+        <p:nvSpPr>
+          <p:cNvPr id="18" name="Shape 16"/>
+          <p:cNvSpPr/>
+          <p:nvPr/>
+        </p:nvSpPr>
+        <p:spPr>
+          <a:xfrm>
+            <a:off x="7635240" y="4498848"/>
+            <a:ext cx="3474720" cy="1143000"/>
+          </a:xfrm>
+          <a:prstGeom prst="roundRect">
+            <a:avLst>
+              <a:gd name="adj" fmla="val 9600"/>
             </a:avLst>
           </a:prstGeom>
           <a:solidFill>
@@ -4142,14 +4378,14 @@
       </p:sp>
       <p:sp>
         <p:nvSpPr>
-          <p:cNvPr id="14" name="Text 12"/>
-          <p:cNvSpPr/>
-          <p:nvPr/>
-        </p:nvSpPr>
-        <p:spPr>
-          <a:xfrm>
-            <a:off x="8074152" y="3666744"/>
-            <a:ext cx="2825496" cy="256032"/>
+          <p:cNvPr id="19" name="Text 17"/>
+          <p:cNvSpPr/>
+          <p:nvPr/>
+        </p:nvSpPr>
+        <p:spPr>
+          <a:xfrm>
+            <a:off x="7799832" y="4645152"/>
+            <a:ext cx="3145536" cy="256032"/>
           </a:xfrm>
           <a:prstGeom prst="rect">
             <a:avLst/>
@@ -4173,7 +4409,7 @@
                 <a:ea typeface="Aptos" pitchFamily="34" charset="-122"/>
                 <a:cs typeface="Aptos" pitchFamily="34" charset="-120"/>
               </a:rPr>
-              <a:t>Use this for</a:t>
+              <a:t>Apply it</a:t>
             </a:r>
             <a:endParaRPr lang="en-US" sz="1300" dirty="0"/>
           </a:p>
@@ -4181,14 +4417,14 @@
       </p:sp>
       <p:sp>
         <p:nvSpPr>
-          <p:cNvPr id="15" name="Text 13"/>
-          <p:cNvSpPr/>
-          <p:nvPr/>
-        </p:nvSpPr>
-        <p:spPr>
-          <a:xfrm>
-            <a:off x="8074152" y="4023360"/>
-            <a:ext cx="2825496" cy="1097280"/>
+          <p:cNvPr id="20" name="Text 18"/>
+          <p:cNvSpPr/>
+          <p:nvPr/>
+        </p:nvSpPr>
+        <p:spPr>
+          <a:xfrm>
+            <a:off x="7799832" y="5001768"/>
+            <a:ext cx="3145536" cy="502920"/>
           </a:xfrm>
           <a:prstGeom prst="rect">
             <a:avLst/>
@@ -4214,7 +4450,7 @@
                 <a:ea typeface="Aptos" pitchFamily="34" charset="-122"/>
                 <a:cs typeface="Aptos" pitchFamily="34" charset="-120"/>
               </a:rPr>
-              <a:t>Connect the concept to public health decisions, safeguards, documentation, or implementation work.</a:t>
+              <a:t>Connect the concept to public health purpose, responsible use, required safeguards, documentation, and the next action a department should take.</a:t>
             </a:r>
             <a:endParaRPr lang="en-US" sz="1550" dirty="0"/>
           </a:p>
@@ -4388,8 +4624,8 @@
         </p:nvSpPr>
         <p:spPr>
           <a:xfrm>
-            <a:off x="9966960" y="6537960"/>
-            <a:ext cx="1645920" cy="201168"/>
+            <a:off x="9646920" y="6537960"/>
+            <a:ext cx="1965960" cy="201168"/>
           </a:xfrm>
           <a:prstGeom prst="rect">
             <a:avLst/>
@@ -4413,7 +4649,7 @@
                 <a:ea typeface="Aptos" pitchFamily="34" charset="-122"/>
                 <a:cs typeface="Aptos" pitchFamily="34" charset="-120"/>
               </a:rPr>
-              <a:t>Â© Paula Soper</a:t>
+              <a:t>Copyright Paula Soper</a:t>
             </a:r>
             <a:endParaRPr lang="en-US" sz="800" dirty="0"/>
           </a:p>
@@ -4460,77 +4696,13 @@
       </p:sp>
       <p:sp>
         <p:nvSpPr>
-          <p:cNvPr id="8" name="Shape 6"/>
+          <p:cNvPr id="8" name="Text 6"/>
           <p:cNvSpPr/>
           <p:nvPr/>
         </p:nvSpPr>
         <p:spPr>
           <a:xfrm>
             <a:off x="640080" y="658368"/>
-            <a:ext cx="420624" cy="420624"/>
-          </a:xfrm>
-          <a:prstGeom prst="ellipse">
-            <a:avLst/>
-          </a:prstGeom>
-          <a:solidFill>
-            <a:srgbClr val="0068B7"/>
-          </a:solidFill>
-          <a:ln w="12700">
-            <a:solidFill>
-              <a:srgbClr val="0068B7"/>
-            </a:solidFill>
-            <a:prstDash val="solid"/>
-          </a:ln>
-        </p:spPr>
-      </p:sp>
-      <p:sp>
-        <p:nvSpPr>
-          <p:cNvPr id="9" name="Text 7"/>
-          <p:cNvSpPr/>
-          <p:nvPr/>
-        </p:nvSpPr>
-        <p:spPr>
-          <a:xfrm>
-            <a:off x="640080" y="731520"/>
-            <a:ext cx="420624" cy="164592"/>
-          </a:xfrm>
-          <a:prstGeom prst="rect">
-            <a:avLst/>
-          </a:prstGeom>
-          <a:noFill/>
-          <a:ln/>
-        </p:spPr>
-        <p:txBody>
-          <a:bodyPr wrap="square" lIns="0" tIns="0" rIns="0" bIns="0" rtlCol="0" anchor="ctr"/>
-          <a:lstStyle/>
-          <a:p>
-            <a:pPr algn="ctr" indent="0" marL="0">
-              <a:buNone/>
-            </a:pPr>
-            <a:r>
-              <a:rPr lang="en-US" sz="1100" b="1" dirty="0">
-                <a:solidFill>
-                  <a:srgbClr val="FFFFFF"/>
-                </a:solidFill>
-                <a:latin typeface="Aptos" pitchFamily="34" charset="0"/>
-                <a:ea typeface="Aptos" pitchFamily="34" charset="-122"/>
-                <a:cs typeface="Aptos" pitchFamily="34" charset="-120"/>
-              </a:rPr>
-              <a:t>6</a:t>
-            </a:r>
-            <a:endParaRPr lang="en-US" sz="1100" dirty="0"/>
-          </a:p>
-        </p:txBody>
-      </p:sp>
-      <p:sp>
-        <p:nvSpPr>
-          <p:cNvPr id="10" name="Text 8"/>
-          <p:cNvSpPr/>
-          <p:nvPr/>
-        </p:nvSpPr>
-        <p:spPr>
-          <a:xfrm>
-            <a:off x="640080" y="621792"/>
             <a:ext cx="10881360" cy="713232"/>
           </a:xfrm>
           <a:prstGeom prst="rect">
@@ -4565,14 +4737,14 @@
       </p:sp>
       <p:sp>
         <p:nvSpPr>
-          <p:cNvPr id="11" name="Text 9"/>
+          <p:cNvPr id="9" name="Text 7"/>
           <p:cNvSpPr/>
           <p:nvPr/>
         </p:nvSpPr>
         <p:spPr>
           <a:xfrm>
             <a:off x="868680" y="1508760"/>
-            <a:ext cx="6537960" cy="4160520"/>
+            <a:ext cx="6309360" cy="4160520"/>
           </a:xfrm>
           <a:prstGeom prst="rect">
             <a:avLst/>
@@ -4631,18 +4803,18 @@
       </p:sp>
       <p:sp>
         <p:nvSpPr>
-          <p:cNvPr id="12" name="Shape 10"/>
-          <p:cNvSpPr/>
-          <p:nvPr/>
-        </p:nvSpPr>
-        <p:spPr>
-          <a:xfrm>
-            <a:off x="7909560" y="1417320"/>
-            <a:ext cx="3154680" cy="1828800"/>
+          <p:cNvPr id="10" name="Shape 8"/>
+          <p:cNvSpPr/>
+          <p:nvPr/>
+        </p:nvSpPr>
+        <p:spPr>
+          <a:xfrm>
+            <a:off x="7635240" y="1325880"/>
+            <a:ext cx="3474720" cy="1325880"/>
           </a:xfrm>
           <a:prstGeom prst="roundRect">
             <a:avLst>
-              <a:gd name="adj" fmla="val 6000"/>
+              <a:gd name="adj" fmla="val 8276"/>
             </a:avLst>
           </a:prstGeom>
           <a:solidFill>
@@ -4658,14 +4830,14 @@
       </p:sp>
       <p:sp>
         <p:nvSpPr>
-          <p:cNvPr id="13" name="Text 11"/>
-          <p:cNvSpPr/>
-          <p:nvPr/>
-        </p:nvSpPr>
-        <p:spPr>
-          <a:xfrm>
-            <a:off x="8074152" y="1563624"/>
-            <a:ext cx="2825496" cy="256032"/>
+          <p:cNvPr id="11" name="Text 9"/>
+          <p:cNvSpPr/>
+          <p:nvPr/>
+        </p:nvSpPr>
+        <p:spPr>
+          <a:xfrm>
+            <a:off x="7799832" y="1472184"/>
+            <a:ext cx="3145536" cy="256032"/>
           </a:xfrm>
           <a:prstGeom prst="rect">
             <a:avLst/>
@@ -4689,7 +4861,7 @@
                 <a:ea typeface="Aptos" pitchFamily="34" charset="-122"/>
                 <a:cs typeface="Aptos" pitchFamily="34" charset="-120"/>
               </a:rPr>
-              <a:t>Key idea</a:t>
+              <a:t>Risk check</a:t>
             </a:r>
             <a:endParaRPr lang="en-US" sz="1300" dirty="0"/>
           </a:p>
@@ -4697,14 +4869,14 @@
       </p:sp>
       <p:sp>
         <p:nvSpPr>
-          <p:cNvPr id="14" name="Text 12"/>
-          <p:cNvSpPr/>
-          <p:nvPr/>
-        </p:nvSpPr>
-        <p:spPr>
-          <a:xfrm>
-            <a:off x="8074152" y="1920240"/>
-            <a:ext cx="2825496" cy="1188720"/>
+          <p:cNvPr id="12" name="Text 10"/>
+          <p:cNvSpPr/>
+          <p:nvPr/>
+        </p:nvSpPr>
+        <p:spPr>
+          <a:xfrm>
+            <a:off x="7799832" y="1828800"/>
+            <a:ext cx="3145536" cy="685800"/>
           </a:xfrm>
           <a:prstGeom prst="rect">
             <a:avLst/>
@@ -4738,18 +4910,171 @@
       </p:sp>
       <p:sp>
         <p:nvSpPr>
-          <p:cNvPr id="15" name="Shape 13"/>
-          <p:cNvSpPr/>
-          <p:nvPr/>
-        </p:nvSpPr>
-        <p:spPr>
-          <a:xfrm>
-            <a:off x="7909560" y="3520440"/>
-            <a:ext cx="3154680" cy="1737360"/>
+          <p:cNvPr id="13" name="Shape 11"/>
+          <p:cNvSpPr/>
+          <p:nvPr/>
+        </p:nvSpPr>
+        <p:spPr>
+          <a:xfrm>
+            <a:off x="7635240" y="2788920"/>
+            <a:ext cx="3474720" cy="1536192"/>
           </a:xfrm>
           <a:prstGeom prst="roundRect">
             <a:avLst>
-              <a:gd name="adj" fmla="val 6316"/>
+              <a:gd name="adj" fmla="val 7143"/>
+            </a:avLst>
+          </a:prstGeom>
+          <a:solidFill>
+            <a:srgbClr val="FFFFFF">
+              <a:alpha val="88000"/>
+            </a:srgbClr>
+          </a:solidFill>
+          <a:ln w="12700">
+            <a:solidFill>
+              <a:srgbClr val="D6E8F2"/>
+            </a:solidFill>
+            <a:prstDash val="solid"/>
+          </a:ln>
+        </p:spPr>
+      </p:sp>
+      <p:sp>
+        <p:nvSpPr>
+          <p:cNvPr id="14" name="Shape 12"/>
+          <p:cNvSpPr/>
+          <p:nvPr/>
+        </p:nvSpPr>
+        <p:spPr>
+          <a:xfrm>
+            <a:off x="8046720" y="3108960"/>
+            <a:ext cx="2651760" cy="896112"/>
+          </a:xfrm>
+          <a:prstGeom prst="arc">
+            <a:avLst/>
+          </a:prstGeom>
+          <a:noFill/>
+          <a:ln w="25400">
+            <a:solidFill>
+              <a:srgbClr val="0068B7"/>
+            </a:solidFill>
+            <a:prstDash val="solid"/>
+          </a:ln>
+        </p:spPr>
+      </p:sp>
+      <p:sp>
+        <p:nvSpPr>
+          <p:cNvPr id="15" name="Text 13"/>
+          <p:cNvSpPr/>
+          <p:nvPr/>
+        </p:nvSpPr>
+        <p:spPr>
+          <a:xfrm>
+            <a:off x="7909560" y="3099816"/>
+            <a:ext cx="2926080" cy="256032"/>
+          </a:xfrm>
+          <a:prstGeom prst="rect">
+            <a:avLst/>
+          </a:prstGeom>
+          <a:noFill/>
+          <a:ln/>
+        </p:spPr>
+        <p:txBody>
+          <a:bodyPr wrap="square" lIns="0" tIns="0" rIns="0" bIns="0" rtlCol="0" anchor="ctr"/>
+          <a:lstStyle/>
+          <a:p>
+            <a:pPr algn="ctr" indent="0" marL="0">
+              <a:buNone/>
+            </a:pPr>
+            <a:r>
+              <a:rPr lang="en-US" sz="1500" b="1" dirty="0">
+                <a:solidFill>
+                  <a:srgbClr val="003A63"/>
+                </a:solidFill>
+                <a:latin typeface="Aptos" pitchFamily="34" charset="0"/>
+                <a:ea typeface="Aptos" pitchFamily="34" charset="-122"/>
+                <a:cs typeface="Aptos" pitchFamily="34" charset="-120"/>
+              </a:rPr>
+              <a:t>Risk</a:t>
+            </a:r>
+            <a:endParaRPr lang="en-US" sz="1500" dirty="0"/>
+          </a:p>
+        </p:txBody>
+      </p:sp>
+      <p:sp>
+        <p:nvSpPr>
+          <p:cNvPr id="16" name="Shape 14"/>
+          <p:cNvSpPr/>
+          <p:nvPr/>
+        </p:nvSpPr>
+        <p:spPr>
+          <a:xfrm>
+            <a:off x="8366760" y="3639312"/>
+            <a:ext cx="2011680" cy="0"/>
+          </a:xfrm>
+          <a:prstGeom prst="line">
+            <a:avLst/>
+          </a:prstGeom>
+          <a:noFill/>
+          <a:ln w="63500">
+            <a:solidFill>
+              <a:srgbClr val="2F8A28"/>
+            </a:solidFill>
+            <a:prstDash val="solid"/>
+          </a:ln>
+        </p:spPr>
+      </p:sp>
+      <p:sp>
+        <p:nvSpPr>
+          <p:cNvPr id="17" name="Text 15"/>
+          <p:cNvSpPr/>
+          <p:nvPr/>
+        </p:nvSpPr>
+        <p:spPr>
+          <a:xfrm>
+            <a:off x="7909560" y="3849624"/>
+            <a:ext cx="2926080" cy="164592"/>
+          </a:xfrm>
+          <a:prstGeom prst="rect">
+            <a:avLst/>
+          </a:prstGeom>
+          <a:noFill/>
+          <a:ln/>
+        </p:spPr>
+        <p:txBody>
+          <a:bodyPr wrap="square" lIns="0" tIns="0" rIns="0" bIns="0" rtlCol="0" anchor="ctr"/>
+          <a:lstStyle/>
+          <a:p>
+            <a:pPr algn="ctr" indent="0" marL="0">
+              <a:buNone/>
+            </a:pPr>
+            <a:r>
+              <a:rPr lang="en-US" sz="900" dirty="0">
+                <a:solidFill>
+                  <a:srgbClr val="003A63"/>
+                </a:solidFill>
+                <a:latin typeface="Aptos" pitchFamily="34" charset="0"/>
+                <a:ea typeface="Aptos" pitchFamily="34" charset="-122"/>
+                <a:cs typeface="Aptos" pitchFamily="34" charset="-120"/>
+              </a:rPr>
+              <a:t>Human review</a:t>
+            </a:r>
+            <a:endParaRPr lang="en-US" sz="900" dirty="0"/>
+          </a:p>
+        </p:txBody>
+      </p:sp>
+      <p:sp>
+        <p:nvSpPr>
+          <p:cNvPr id="18" name="Shape 16"/>
+          <p:cNvSpPr/>
+          <p:nvPr/>
+        </p:nvSpPr>
+        <p:spPr>
+          <a:xfrm>
+            <a:off x="7635240" y="4498848"/>
+            <a:ext cx="3474720" cy="1143000"/>
+          </a:xfrm>
+          <a:prstGeom prst="roundRect">
+            <a:avLst>
+              <a:gd name="adj" fmla="val 9600"/>
             </a:avLst>
           </a:prstGeom>
           <a:solidFill>
@@ -4765,14 +5090,14 @@
       </p:sp>
       <p:sp>
         <p:nvSpPr>
-          <p:cNvPr id="16" name="Text 14"/>
-          <p:cNvSpPr/>
-          <p:nvPr/>
-        </p:nvSpPr>
-        <p:spPr>
-          <a:xfrm>
-            <a:off x="8074152" y="3666744"/>
-            <a:ext cx="2825496" cy="256032"/>
+          <p:cNvPr id="19" name="Text 17"/>
+          <p:cNvSpPr/>
+          <p:nvPr/>
+        </p:nvSpPr>
+        <p:spPr>
+          <a:xfrm>
+            <a:off x="7799832" y="4645152"/>
+            <a:ext cx="3145536" cy="256032"/>
           </a:xfrm>
           <a:prstGeom prst="rect">
             <a:avLst/>
@@ -4796,7 +5121,7 @@
                 <a:ea typeface="Aptos" pitchFamily="34" charset="-122"/>
                 <a:cs typeface="Aptos" pitchFamily="34" charset="-120"/>
               </a:rPr>
-              <a:t>Use this for</a:t>
+              <a:t>Safeguard to plan</a:t>
             </a:r>
             <a:endParaRPr lang="en-US" sz="1300" dirty="0"/>
           </a:p>
@@ -4804,14 +5129,14 @@
       </p:sp>
       <p:sp>
         <p:nvSpPr>
-          <p:cNvPr id="17" name="Text 15"/>
-          <p:cNvSpPr/>
-          <p:nvPr/>
-        </p:nvSpPr>
-        <p:spPr>
-          <a:xfrm>
-            <a:off x="8074152" y="4023360"/>
-            <a:ext cx="2825496" cy="1097280"/>
+          <p:cNvPr id="20" name="Text 18"/>
+          <p:cNvSpPr/>
+          <p:nvPr/>
+        </p:nvSpPr>
+        <p:spPr>
+          <a:xfrm>
+            <a:off x="7799832" y="5001768"/>
+            <a:ext cx="3145536" cy="502920"/>
           </a:xfrm>
           <a:prstGeom prst="rect">
             <a:avLst/>
@@ -4837,7 +5162,7 @@
                 <a:ea typeface="Aptos" pitchFamily="34" charset="-122"/>
                 <a:cs typeface="Aptos" pitchFamily="34" charset="-120"/>
               </a:rPr>
-              <a:t>Connect the concept to public health decisions, safeguards, documentation, or implementation work.</a:t>
+              <a:t>Identify what could go wrong, who could be affected, what safeguards are needed, and what evidence should be reviewed before use expands.</a:t>
             </a:r>
             <a:endParaRPr lang="en-US" sz="1550" dirty="0"/>
           </a:p>
@@ -5011,8 +5336,8 @@
         </p:nvSpPr>
         <p:spPr>
           <a:xfrm>
-            <a:off x="9966960" y="6537960"/>
-            <a:ext cx="1645920" cy="201168"/>
+            <a:off x="9646920" y="6537960"/>
+            <a:ext cx="1965960" cy="201168"/>
           </a:xfrm>
           <a:prstGeom prst="rect">
             <a:avLst/>
@@ -5036,7 +5361,7 @@
                 <a:ea typeface="Aptos" pitchFamily="34" charset="-122"/>
                 <a:cs typeface="Aptos" pitchFamily="34" charset="-120"/>
               </a:rPr>
-              <a:t>Â© Paula Soper</a:t>
+              <a:t>Copyright Paula Soper</a:t>
             </a:r>
             <a:endParaRPr lang="en-US" sz="800" dirty="0"/>
           </a:p>
@@ -5131,7 +5456,7 @@
         <p:spPr>
           <a:xfrm>
             <a:off x="868680" y="1508760"/>
-            <a:ext cx="6537960" cy="4160520"/>
+            <a:ext cx="6309360" cy="4160520"/>
           </a:xfrm>
           <a:prstGeom prst="rect">
             <a:avLst/>
@@ -5196,12 +5521,12 @@
         </p:nvSpPr>
         <p:spPr>
           <a:xfrm>
-            <a:off x="7909560" y="1417320"/>
-            <a:ext cx="3154680" cy="1828800"/>
+            <a:off x="7635240" y="1325880"/>
+            <a:ext cx="3474720" cy="1325880"/>
           </a:xfrm>
           <a:prstGeom prst="roundRect">
             <a:avLst>
-              <a:gd name="adj" fmla="val 6000"/>
+              <a:gd name="adj" fmla="val 8276"/>
             </a:avLst>
           </a:prstGeom>
           <a:solidFill>
@@ -5223,8 +5548,8 @@
         </p:nvSpPr>
         <p:spPr>
           <a:xfrm>
-            <a:off x="8074152" y="1563624"/>
-            <a:ext cx="2825496" cy="256032"/>
+            <a:off x="7799832" y="1472184"/>
+            <a:ext cx="3145536" cy="256032"/>
           </a:xfrm>
           <a:prstGeom prst="rect">
             <a:avLst/>
@@ -5248,7 +5573,7 @@
                 <a:ea typeface="Aptos" pitchFamily="34" charset="-122"/>
                 <a:cs typeface="Aptos" pitchFamily="34" charset="-120"/>
               </a:rPr>
-              <a:t>Key idea</a:t>
+              <a:t>Risk check</a:t>
             </a:r>
             <a:endParaRPr lang="en-US" sz="1300" dirty="0"/>
           </a:p>
@@ -5262,8 +5587,8 @@
         </p:nvSpPr>
         <p:spPr>
           <a:xfrm>
-            <a:off x="8074152" y="1920240"/>
-            <a:ext cx="2825496" cy="1188720"/>
+            <a:off x="7799832" y="1828800"/>
+            <a:ext cx="3145536" cy="685800"/>
           </a:xfrm>
           <a:prstGeom prst="rect">
             <a:avLst/>
@@ -5303,12 +5628,165 @@
         </p:nvSpPr>
         <p:spPr>
           <a:xfrm>
-            <a:off x="7909560" y="3520440"/>
-            <a:ext cx="3154680" cy="1737360"/>
+            <a:off x="7635240" y="2788920"/>
+            <a:ext cx="3474720" cy="1536192"/>
           </a:xfrm>
           <a:prstGeom prst="roundRect">
             <a:avLst>
-              <a:gd name="adj" fmla="val 6316"/>
+              <a:gd name="adj" fmla="val 7143"/>
+            </a:avLst>
+          </a:prstGeom>
+          <a:solidFill>
+            <a:srgbClr val="FFFFFF">
+              <a:alpha val="88000"/>
+            </a:srgbClr>
+          </a:solidFill>
+          <a:ln w="12700">
+            <a:solidFill>
+              <a:srgbClr val="D6E8F2"/>
+            </a:solidFill>
+            <a:prstDash val="solid"/>
+          </a:ln>
+        </p:spPr>
+      </p:sp>
+      <p:sp>
+        <p:nvSpPr>
+          <p:cNvPr id="14" name="Shape 12"/>
+          <p:cNvSpPr/>
+          <p:nvPr/>
+        </p:nvSpPr>
+        <p:spPr>
+          <a:xfrm>
+            <a:off x="8046720" y="3108960"/>
+            <a:ext cx="2651760" cy="896112"/>
+          </a:xfrm>
+          <a:prstGeom prst="arc">
+            <a:avLst/>
+          </a:prstGeom>
+          <a:noFill/>
+          <a:ln w="25400">
+            <a:solidFill>
+              <a:srgbClr val="0068B7"/>
+            </a:solidFill>
+            <a:prstDash val="solid"/>
+          </a:ln>
+        </p:spPr>
+      </p:sp>
+      <p:sp>
+        <p:nvSpPr>
+          <p:cNvPr id="15" name="Text 13"/>
+          <p:cNvSpPr/>
+          <p:nvPr/>
+        </p:nvSpPr>
+        <p:spPr>
+          <a:xfrm>
+            <a:off x="7909560" y="3099816"/>
+            <a:ext cx="2926080" cy="256032"/>
+          </a:xfrm>
+          <a:prstGeom prst="rect">
+            <a:avLst/>
+          </a:prstGeom>
+          <a:noFill/>
+          <a:ln/>
+        </p:spPr>
+        <p:txBody>
+          <a:bodyPr wrap="square" lIns="0" tIns="0" rIns="0" bIns="0" rtlCol="0" anchor="ctr"/>
+          <a:lstStyle/>
+          <a:p>
+            <a:pPr algn="ctr" indent="0" marL="0">
+              <a:buNone/>
+            </a:pPr>
+            <a:r>
+              <a:rPr lang="en-US" sz="1500" b="1" dirty="0">
+                <a:solidFill>
+                  <a:srgbClr val="003A63"/>
+                </a:solidFill>
+                <a:latin typeface="Aptos" pitchFamily="34" charset="0"/>
+                <a:ea typeface="Aptos" pitchFamily="34" charset="-122"/>
+                <a:cs typeface="Aptos" pitchFamily="34" charset="-120"/>
+              </a:rPr>
+              <a:t>Risk</a:t>
+            </a:r>
+            <a:endParaRPr lang="en-US" sz="1500" dirty="0"/>
+          </a:p>
+        </p:txBody>
+      </p:sp>
+      <p:sp>
+        <p:nvSpPr>
+          <p:cNvPr id="16" name="Shape 14"/>
+          <p:cNvSpPr/>
+          <p:nvPr/>
+        </p:nvSpPr>
+        <p:spPr>
+          <a:xfrm>
+            <a:off x="8366760" y="3639312"/>
+            <a:ext cx="2011680" cy="0"/>
+          </a:xfrm>
+          <a:prstGeom prst="line">
+            <a:avLst/>
+          </a:prstGeom>
+          <a:noFill/>
+          <a:ln w="63500">
+            <a:solidFill>
+              <a:srgbClr val="2F8A28"/>
+            </a:solidFill>
+            <a:prstDash val="solid"/>
+          </a:ln>
+        </p:spPr>
+      </p:sp>
+      <p:sp>
+        <p:nvSpPr>
+          <p:cNvPr id="17" name="Text 15"/>
+          <p:cNvSpPr/>
+          <p:nvPr/>
+        </p:nvSpPr>
+        <p:spPr>
+          <a:xfrm>
+            <a:off x="7909560" y="3849624"/>
+            <a:ext cx="2926080" cy="164592"/>
+          </a:xfrm>
+          <a:prstGeom prst="rect">
+            <a:avLst/>
+          </a:prstGeom>
+          <a:noFill/>
+          <a:ln/>
+        </p:spPr>
+        <p:txBody>
+          <a:bodyPr wrap="square" lIns="0" tIns="0" rIns="0" bIns="0" rtlCol="0" anchor="ctr"/>
+          <a:lstStyle/>
+          <a:p>
+            <a:pPr algn="ctr" indent="0" marL="0">
+              <a:buNone/>
+            </a:pPr>
+            <a:r>
+              <a:rPr lang="en-US" sz="900" dirty="0">
+                <a:solidFill>
+                  <a:srgbClr val="003A63"/>
+                </a:solidFill>
+                <a:latin typeface="Aptos" pitchFamily="34" charset="0"/>
+                <a:ea typeface="Aptos" pitchFamily="34" charset="-122"/>
+                <a:cs typeface="Aptos" pitchFamily="34" charset="-120"/>
+              </a:rPr>
+              <a:t>Human review</a:t>
+            </a:r>
+            <a:endParaRPr lang="en-US" sz="900" dirty="0"/>
+          </a:p>
+        </p:txBody>
+      </p:sp>
+      <p:sp>
+        <p:nvSpPr>
+          <p:cNvPr id="18" name="Shape 16"/>
+          <p:cNvSpPr/>
+          <p:nvPr/>
+        </p:nvSpPr>
+        <p:spPr>
+          <a:xfrm>
+            <a:off x="7635240" y="4498848"/>
+            <a:ext cx="3474720" cy="1143000"/>
+          </a:xfrm>
+          <a:prstGeom prst="roundRect">
+            <a:avLst>
+              <a:gd name="adj" fmla="val 9600"/>
             </a:avLst>
           </a:prstGeom>
           <a:solidFill>
@@ -5324,14 +5802,14 @@
       </p:sp>
       <p:sp>
         <p:nvSpPr>
-          <p:cNvPr id="14" name="Text 12"/>
-          <p:cNvSpPr/>
-          <p:nvPr/>
-        </p:nvSpPr>
-        <p:spPr>
-          <a:xfrm>
-            <a:off x="8074152" y="3666744"/>
-            <a:ext cx="2825496" cy="256032"/>
+          <p:cNvPr id="19" name="Text 17"/>
+          <p:cNvSpPr/>
+          <p:nvPr/>
+        </p:nvSpPr>
+        <p:spPr>
+          <a:xfrm>
+            <a:off x="7799832" y="4645152"/>
+            <a:ext cx="3145536" cy="256032"/>
           </a:xfrm>
           <a:prstGeom prst="rect">
             <a:avLst/>
@@ -5355,7 +5833,7 @@
                 <a:ea typeface="Aptos" pitchFamily="34" charset="-122"/>
                 <a:cs typeface="Aptos" pitchFamily="34" charset="-120"/>
               </a:rPr>
-              <a:t>Use this for</a:t>
+              <a:t>Safeguard to plan</a:t>
             </a:r>
             <a:endParaRPr lang="en-US" sz="1300" dirty="0"/>
           </a:p>
@@ -5363,14 +5841,14 @@
       </p:sp>
       <p:sp>
         <p:nvSpPr>
-          <p:cNvPr id="15" name="Text 13"/>
-          <p:cNvSpPr/>
-          <p:nvPr/>
-        </p:nvSpPr>
-        <p:spPr>
-          <a:xfrm>
-            <a:off x="8074152" y="4023360"/>
-            <a:ext cx="2825496" cy="1097280"/>
+          <p:cNvPr id="20" name="Text 18"/>
+          <p:cNvSpPr/>
+          <p:nvPr/>
+        </p:nvSpPr>
+        <p:spPr>
+          <a:xfrm>
+            <a:off x="7799832" y="5001768"/>
+            <a:ext cx="3145536" cy="502920"/>
           </a:xfrm>
           <a:prstGeom prst="rect">
             <a:avLst/>
@@ -5396,7 +5874,7 @@
                 <a:ea typeface="Aptos" pitchFamily="34" charset="-122"/>
                 <a:cs typeface="Aptos" pitchFamily="34" charset="-120"/>
               </a:rPr>
-              <a:t>Connect the concept to public health decisions, safeguards, documentation, or implementation work.</a:t>
+              <a:t>Identify what could go wrong, who could be affected, what safeguards are needed, and what evidence should be reviewed before use expands.</a:t>
             </a:r>
             <a:endParaRPr lang="en-US" sz="1550" dirty="0"/>
           </a:p>
@@ -5570,8 +6048,8 @@
         </p:nvSpPr>
         <p:spPr>
           <a:xfrm>
-            <a:off x="9966960" y="6537960"/>
-            <a:ext cx="1645920" cy="201168"/>
+            <a:off x="9646920" y="6537960"/>
+            <a:ext cx="1965960" cy="201168"/>
           </a:xfrm>
           <a:prstGeom prst="rect">
             <a:avLst/>
@@ -5595,7 +6073,7 @@
                 <a:ea typeface="Aptos" pitchFamily="34" charset="-122"/>
                 <a:cs typeface="Aptos" pitchFamily="34" charset="-120"/>
               </a:rPr>
-              <a:t>Â© Paula Soper</a:t>
+              <a:t>Copyright Paula Soper</a:t>
             </a:r>
             <a:endParaRPr lang="en-US" sz="800" dirty="0"/>
           </a:p>
@@ -5642,17 +6120,262 @@
       </p:sp>
       <p:sp>
         <p:nvSpPr>
-          <p:cNvPr id="8" name="Shape 6"/>
+          <p:cNvPr id="8" name="Text 6"/>
           <p:cNvSpPr/>
           <p:nvPr/>
         </p:nvSpPr>
         <p:spPr>
           <a:xfrm>
             <a:off x="640080" y="658368"/>
-            <a:ext cx="420624" cy="420624"/>
-          </a:xfrm>
-          <a:prstGeom prst="ellipse">
-            <a:avLst/>
+            <a:ext cx="10881360" cy="713232"/>
+          </a:xfrm>
+          <a:prstGeom prst="rect">
+            <a:avLst/>
+          </a:prstGeom>
+          <a:noFill/>
+          <a:ln/>
+        </p:spPr>
+        <p:txBody>
+          <a:bodyPr wrap="square" lIns="0" tIns="0" rIns="0" bIns="0" rtlCol="0" anchor="ctr">
+            <a:normAutofit/>
+          </a:bodyPr>
+          <a:lstStyle/>
+          <a:p>
+            <a:pPr indent="0" marL="0">
+              <a:buNone/>
+            </a:pPr>
+            <a:r>
+              <a:rPr lang="en-US" sz="3400" b="1" dirty="0">
+                <a:solidFill>
+                  <a:srgbClr val="003A63"/>
+                </a:solidFill>
+                <a:latin typeface="Aptos Display" pitchFamily="34" charset="0"/>
+                <a:ea typeface="Aptos Display" pitchFamily="34" charset="-122"/>
+                <a:cs typeface="Aptos Display" pitchFamily="34" charset="-120"/>
+              </a:rPr>
+              <a:t>Application to AI-Supported Workflows</a:t>
+            </a:r>
+            <a:endParaRPr lang="en-US" sz="3400" dirty="0"/>
+          </a:p>
+        </p:txBody>
+      </p:sp>
+      <p:sp>
+        <p:nvSpPr>
+          <p:cNvPr id="9" name="Text 7"/>
+          <p:cNvSpPr/>
+          <p:nvPr/>
+        </p:nvSpPr>
+        <p:spPr>
+          <a:xfrm>
+            <a:off x="868680" y="1508760"/>
+            <a:ext cx="6309360" cy="4160520"/>
+          </a:xfrm>
+          <a:prstGeom prst="rect">
+            <a:avLst/>
+          </a:prstGeom>
+          <a:noFill/>
+          <a:ln/>
+        </p:spPr>
+        <p:txBody>
+          <a:bodyPr wrap="square" lIns="635" tIns="635" rIns="635" bIns="635" rtlCol="0" anchor="t">
+            <a:normAutofit/>
+          </a:bodyPr>
+          <a:lstStyle/>
+          <a:p>
+            <a:r>
+              <a:rPr lang="en-US" sz="2100" dirty="0">
+                <a:solidFill>
+                  <a:srgbClr val="17364A"/>
+                </a:solidFill>
+                <a:latin typeface="Aptos" pitchFamily="34" charset="0"/>
+                <a:ea typeface="Aptos" pitchFamily="34" charset="-122"/>
+                <a:cs typeface="Aptos" pitchFamily="34" charset="-120"/>
+              </a:rPr>
+              <a:t>Time-series and anomaly detection methods can support predictive dashboards, syndromic surveillance,.</a:t>
+            </a:r>
+            <a:endParaRPr lang="en-US" sz="2100" dirty="0"/>
+          </a:p>
+          <a:p>
+            <a:r>
+              <a:rPr lang="en-US" sz="2100" dirty="0">
+                <a:solidFill>
+                  <a:srgbClr val="17364A"/>
+                </a:solidFill>
+                <a:latin typeface="Aptos" pitchFamily="34" charset="0"/>
+                <a:ea typeface="Aptos" pitchFamily="34" charset="-122"/>
+                <a:cs typeface="Aptos" pitchFamily="34" charset="-120"/>
+              </a:rPr>
+              <a:t>Generative AI may summarize signal review, but it should include uncertainty and source indicators.</a:t>
+            </a:r>
+            <a:endParaRPr lang="en-US" sz="2100" dirty="0"/>
+          </a:p>
+          <a:p>
+            <a:r>
+              <a:rPr lang="en-US" sz="2100" dirty="0">
+                <a:solidFill>
+                  <a:srgbClr val="17364A"/>
+                </a:solidFill>
+                <a:latin typeface="Aptos" pitchFamily="34" charset="0"/>
+                <a:ea typeface="Aptos" pitchFamily="34" charset="-122"/>
+                <a:cs typeface="Aptos" pitchFamily="34" charset="-120"/>
+              </a:rPr>
+              <a:t>Agentic workflows may route alerts or create tasks, but those actions should be limited to defined.</a:t>
+            </a:r>
+            <a:endParaRPr lang="en-US" sz="2100" dirty="0"/>
+          </a:p>
+        </p:txBody>
+      </p:sp>
+      <p:sp>
+        <p:nvSpPr>
+          <p:cNvPr id="10" name="Shape 8"/>
+          <p:cNvSpPr/>
+          <p:nvPr/>
+        </p:nvSpPr>
+        <p:spPr>
+          <a:xfrm>
+            <a:off x="7635240" y="1325880"/>
+            <a:ext cx="3474720" cy="1325880"/>
+          </a:xfrm>
+          <a:prstGeom prst="roundRect">
+            <a:avLst>
+              <a:gd name="adj" fmla="val 8276"/>
+            </a:avLst>
+          </a:prstGeom>
+          <a:solidFill>
+            <a:srgbClr val="EEF8ED"/>
+          </a:solidFill>
+          <a:ln w="12700">
+            <a:solidFill>
+              <a:srgbClr val="B9D7E6"/>
+            </a:solidFill>
+            <a:prstDash val="solid"/>
+          </a:ln>
+        </p:spPr>
+      </p:sp>
+      <p:sp>
+        <p:nvSpPr>
+          <p:cNvPr id="11" name="Text 9"/>
+          <p:cNvSpPr/>
+          <p:nvPr/>
+        </p:nvSpPr>
+        <p:spPr>
+          <a:xfrm>
+            <a:off x="7799832" y="1472184"/>
+            <a:ext cx="3145536" cy="256032"/>
+          </a:xfrm>
+          <a:prstGeom prst="rect">
+            <a:avLst/>
+          </a:prstGeom>
+          <a:noFill/>
+          <a:ln/>
+        </p:spPr>
+        <p:txBody>
+          <a:bodyPr wrap="square" lIns="0" tIns="0" rIns="0" bIns="0" rtlCol="0" anchor="ctr"/>
+          <a:lstStyle/>
+          <a:p>
+            <a:pPr indent="0" marL="0">
+              <a:buNone/>
+            </a:pPr>
+            <a:r>
+              <a:rPr lang="en-US" sz="1300" b="1" dirty="0">
+                <a:solidFill>
+                  <a:srgbClr val="0068B7"/>
+                </a:solidFill>
+                <a:latin typeface="Aptos" pitchFamily="34" charset="0"/>
+                <a:ea typeface="Aptos" pitchFamily="34" charset="-122"/>
+                <a:cs typeface="Aptos" pitchFamily="34" charset="-120"/>
+              </a:rPr>
+              <a:t>Implementation cue</a:t>
+            </a:r>
+            <a:endParaRPr lang="en-US" sz="1300" dirty="0"/>
+          </a:p>
+        </p:txBody>
+      </p:sp>
+      <p:sp>
+        <p:nvSpPr>
+          <p:cNvPr id="12" name="Text 10"/>
+          <p:cNvSpPr/>
+          <p:nvPr/>
+        </p:nvSpPr>
+        <p:spPr>
+          <a:xfrm>
+            <a:off x="7799832" y="1828800"/>
+            <a:ext cx="3145536" cy="685800"/>
+          </a:xfrm>
+          <a:prstGeom prst="rect">
+            <a:avLst/>
+          </a:prstGeom>
+          <a:noFill/>
+          <a:ln/>
+        </p:spPr>
+        <p:txBody>
+          <a:bodyPr wrap="square" lIns="0" tIns="0" rIns="0" bIns="0" rtlCol="0" anchor="t">
+            <a:normAutofit/>
+          </a:bodyPr>
+          <a:lstStyle/>
+          <a:p>
+            <a:pPr indent="0" marL="0">
+              <a:buNone/>
+            </a:pPr>
+            <a:r>
+              <a:rPr lang="en-US" sz="1550" dirty="0">
+                <a:solidFill>
+                  <a:srgbClr val="17364A"/>
+                </a:solidFill>
+                <a:latin typeface="Aptos" pitchFamily="34" charset="0"/>
+                <a:ea typeface="Aptos" pitchFamily="34" charset="-122"/>
+                <a:cs typeface="Aptos" pitchFamily="34" charset="-120"/>
+              </a:rPr>
+              <a:t>Time-series and anomaly detection methods can support predictive dashboards, syndromic surveillance,.</a:t>
+            </a:r>
+            <a:endParaRPr lang="en-US" sz="1550" dirty="0"/>
+          </a:p>
+        </p:txBody>
+      </p:sp>
+      <p:sp>
+        <p:nvSpPr>
+          <p:cNvPr id="13" name="Shape 11"/>
+          <p:cNvSpPr/>
+          <p:nvPr/>
+        </p:nvSpPr>
+        <p:spPr>
+          <a:xfrm>
+            <a:off x="7635240" y="2788920"/>
+            <a:ext cx="3474720" cy="1536192"/>
+          </a:xfrm>
+          <a:prstGeom prst="roundRect">
+            <a:avLst>
+              <a:gd name="adj" fmla="val 7143"/>
+            </a:avLst>
+          </a:prstGeom>
+          <a:solidFill>
+            <a:srgbClr val="FFFFFF">
+              <a:alpha val="88000"/>
+            </a:srgbClr>
+          </a:solidFill>
+          <a:ln w="12700">
+            <a:solidFill>
+              <a:srgbClr val="D6E8F2"/>
+            </a:solidFill>
+            <a:prstDash val="solid"/>
+          </a:ln>
+        </p:spPr>
+      </p:sp>
+      <p:sp>
+        <p:nvSpPr>
+          <p:cNvPr id="14" name="Shape 12"/>
+          <p:cNvSpPr/>
+          <p:nvPr/>
+        </p:nvSpPr>
+        <p:spPr>
+          <a:xfrm>
+            <a:off x="7927848" y="3319272"/>
+            <a:ext cx="792480" cy="749808"/>
+          </a:xfrm>
+          <a:prstGeom prst="roundRect">
+            <a:avLst>
+              <a:gd name="adj" fmla="val 14634"/>
+            </a:avLst>
           </a:prstGeom>
           <a:solidFill>
             <a:srgbClr val="0068B7"/>
@@ -5667,53 +6390,14 @@
       </p:sp>
       <p:sp>
         <p:nvSpPr>
-          <p:cNvPr id="9" name="Text 7"/>
-          <p:cNvSpPr/>
-          <p:nvPr/>
-        </p:nvSpPr>
-        <p:spPr>
-          <a:xfrm>
-            <a:off x="640080" y="731520"/>
-            <a:ext cx="420624" cy="164592"/>
-          </a:xfrm>
-          <a:prstGeom prst="rect">
-            <a:avLst/>
-          </a:prstGeom>
-          <a:noFill/>
-          <a:ln/>
-        </p:spPr>
-        <p:txBody>
-          <a:bodyPr wrap="square" lIns="0" tIns="0" rIns="0" bIns="0" rtlCol="0" anchor="ctr"/>
-          <a:lstStyle/>
-          <a:p>
-            <a:pPr algn="ctr" indent="0" marL="0">
-              <a:buNone/>
-            </a:pPr>
-            <a:r>
-              <a:rPr lang="en-US" sz="1100" b="1" dirty="0">
-                <a:solidFill>
-                  <a:srgbClr val="FFFFFF"/>
-                </a:solidFill>
-                <a:latin typeface="Aptos" pitchFamily="34" charset="0"/>
-                <a:ea typeface="Aptos" pitchFamily="34" charset="-122"/>
-                <a:cs typeface="Aptos" pitchFamily="34" charset="-120"/>
-              </a:rPr>
-              <a:t>7</a:t>
-            </a:r>
-            <a:endParaRPr lang="en-US" sz="1100" dirty="0"/>
-          </a:p>
-        </p:txBody>
-      </p:sp>
-      <p:sp>
-        <p:nvSpPr>
-          <p:cNvPr id="10" name="Text 8"/>
-          <p:cNvSpPr/>
-          <p:nvPr/>
-        </p:nvSpPr>
-        <p:spPr>
-          <a:xfrm>
-            <a:off x="640080" y="621792"/>
-            <a:ext cx="10881360" cy="713232"/>
+          <p:cNvPr id="15" name="Text 13"/>
+          <p:cNvSpPr/>
+          <p:nvPr/>
+        </p:nvSpPr>
+        <p:spPr>
+          <a:xfrm>
+            <a:off x="8001000" y="3511296"/>
+            <a:ext cx="646176" cy="310896"/>
           </a:xfrm>
           <a:prstGeom prst="rect">
             <a:avLst/>
@@ -5727,112 +6411,46 @@
           </a:bodyPr>
           <a:lstStyle/>
           <a:p>
-            <a:pPr indent="0" marL="0">
-              <a:buNone/>
-            </a:pPr>
-            <a:r>
-              <a:rPr lang="en-US" sz="3400" b="1" dirty="0">
-                <a:solidFill>
-                  <a:srgbClr val="003A63"/>
-                </a:solidFill>
-                <a:latin typeface="Aptos Display" pitchFamily="34" charset="0"/>
-                <a:ea typeface="Aptos Display" pitchFamily="34" charset="-122"/>
-                <a:cs typeface="Aptos Display" pitchFamily="34" charset="-120"/>
-              </a:rPr>
-              <a:t>Application to AI-Supported Workflows</a:t>
-            </a:r>
-            <a:endParaRPr lang="en-US" sz="3400" dirty="0"/>
-          </a:p>
-        </p:txBody>
-      </p:sp>
-      <p:sp>
-        <p:nvSpPr>
-          <p:cNvPr id="11" name="Text 9"/>
-          <p:cNvSpPr/>
-          <p:nvPr/>
-        </p:nvSpPr>
-        <p:spPr>
-          <a:xfrm>
-            <a:off x="868680" y="1508760"/>
-            <a:ext cx="6537960" cy="4160520"/>
-          </a:xfrm>
-          <a:prstGeom prst="rect">
-            <a:avLst/>
-          </a:prstGeom>
-          <a:noFill/>
-          <a:ln/>
-        </p:spPr>
-        <p:txBody>
-          <a:bodyPr wrap="square" lIns="635" tIns="635" rIns="635" bIns="635" rtlCol="0" anchor="t">
-            <a:normAutofit/>
-          </a:bodyPr>
-          <a:lstStyle/>
-          <a:p>
-            <a:r>
-              <a:rPr lang="en-US" sz="2100" dirty="0">
-                <a:solidFill>
-                  <a:srgbClr val="17364A"/>
-                </a:solidFill>
-                <a:latin typeface="Aptos" pitchFamily="34" charset="0"/>
-                <a:ea typeface="Aptos" pitchFamily="34" charset="-122"/>
-                <a:cs typeface="Aptos" pitchFamily="34" charset="-120"/>
-              </a:rPr>
-              <a:t>Time-series and anomaly detection methods can support predictive dashboards, syndromic surveillance,.</a:t>
-            </a:r>
-            <a:endParaRPr lang="en-US" sz="2100" dirty="0"/>
-          </a:p>
-          <a:p>
-            <a:r>
-              <a:rPr lang="en-US" sz="2100" dirty="0">
-                <a:solidFill>
-                  <a:srgbClr val="17364A"/>
-                </a:solidFill>
-                <a:latin typeface="Aptos" pitchFamily="34" charset="0"/>
-                <a:ea typeface="Aptos" pitchFamily="34" charset="-122"/>
-                <a:cs typeface="Aptos" pitchFamily="34" charset="-120"/>
-              </a:rPr>
-              <a:t>Generative AI may summarize signal review, but it should include uncertainty and source indicators.</a:t>
-            </a:r>
-            <a:endParaRPr lang="en-US" sz="2100" dirty="0"/>
-          </a:p>
-          <a:p>
-            <a:r>
-              <a:rPr lang="en-US" sz="2100" dirty="0">
-                <a:solidFill>
-                  <a:srgbClr val="17364A"/>
-                </a:solidFill>
-                <a:latin typeface="Aptos" pitchFamily="34" charset="0"/>
-                <a:ea typeface="Aptos" pitchFamily="34" charset="-122"/>
-                <a:cs typeface="Aptos" pitchFamily="34" charset="-120"/>
-              </a:rPr>
-              <a:t>Agentic workflows may route alerts or create tasks, but those actions should be limited to defined.</a:t>
-            </a:r>
-            <a:endParaRPr lang="en-US" sz="2100" dirty="0"/>
-          </a:p>
-        </p:txBody>
-      </p:sp>
-      <p:sp>
-        <p:nvSpPr>
-          <p:cNvPr id="12" name="Shape 10"/>
-          <p:cNvSpPr/>
-          <p:nvPr/>
-        </p:nvSpPr>
-        <p:spPr>
-          <a:xfrm>
-            <a:off x="7909560" y="1417320"/>
-            <a:ext cx="3154680" cy="1828800"/>
+            <a:pPr algn="ctr" indent="0" marL="0">
+              <a:buNone/>
+            </a:pPr>
+            <a:r>
+              <a:rPr lang="en-US" sz="1500" b="1" dirty="0">
+                <a:solidFill>
+                  <a:srgbClr val="FFFFFF"/>
+                </a:solidFill>
+                <a:latin typeface="Aptos" pitchFamily="34" charset="0"/>
+                <a:ea typeface="Aptos" pitchFamily="34" charset="-122"/>
+                <a:cs typeface="Aptos" pitchFamily="34" charset="-120"/>
+              </a:rPr>
+              <a:t>Plan</a:t>
+            </a:r>
+            <a:endParaRPr lang="en-US" sz="1500" dirty="0"/>
+          </a:p>
+        </p:txBody>
+      </p:sp>
+      <p:sp>
+        <p:nvSpPr>
+          <p:cNvPr id="16" name="Shape 14"/>
+          <p:cNvSpPr/>
+          <p:nvPr/>
+        </p:nvSpPr>
+        <p:spPr>
+          <a:xfrm>
+            <a:off x="8976360" y="3319272"/>
+            <a:ext cx="792480" cy="749808"/>
           </a:xfrm>
           <a:prstGeom prst="roundRect">
             <a:avLst>
-              <a:gd name="adj" fmla="val 6000"/>
+              <a:gd name="adj" fmla="val 14634"/>
             </a:avLst>
           </a:prstGeom>
           <a:solidFill>
-            <a:srgbClr val="EEF8ED"/>
+            <a:srgbClr val="2F8A28"/>
           </a:solidFill>
           <a:ln w="12700">
             <a:solidFill>
-              <a:srgbClr val="B9D7E6"/>
+              <a:srgbClr val="2F8A28"/>
             </a:solidFill>
             <a:prstDash val="solid"/>
           </a:ln>
@@ -5840,98 +6458,189 @@
       </p:sp>
       <p:sp>
         <p:nvSpPr>
-          <p:cNvPr id="13" name="Text 11"/>
-          <p:cNvSpPr/>
-          <p:nvPr/>
-        </p:nvSpPr>
-        <p:spPr>
-          <a:xfrm>
-            <a:off x="8074152" y="1563624"/>
-            <a:ext cx="2825496" cy="256032"/>
-          </a:xfrm>
-          <a:prstGeom prst="rect">
-            <a:avLst/>
-          </a:prstGeom>
-          <a:noFill/>
-          <a:ln/>
-        </p:spPr>
-        <p:txBody>
-          <a:bodyPr wrap="square" lIns="0" tIns="0" rIns="0" bIns="0" rtlCol="0" anchor="ctr"/>
-          <a:lstStyle/>
-          <a:p>
-            <a:pPr indent="0" marL="0">
-              <a:buNone/>
-            </a:pPr>
-            <a:r>
-              <a:rPr lang="en-US" sz="1300" b="1" dirty="0">
-                <a:solidFill>
-                  <a:srgbClr val="0068B7"/>
-                </a:solidFill>
-                <a:latin typeface="Aptos" pitchFamily="34" charset="0"/>
-                <a:ea typeface="Aptos" pitchFamily="34" charset="-122"/>
-                <a:cs typeface="Aptos" pitchFamily="34" charset="-120"/>
-              </a:rPr>
-              <a:t>Key idea</a:t>
-            </a:r>
-            <a:endParaRPr lang="en-US" sz="1300" dirty="0"/>
-          </a:p>
-        </p:txBody>
-      </p:sp>
-      <p:sp>
-        <p:nvSpPr>
-          <p:cNvPr id="14" name="Text 12"/>
-          <p:cNvSpPr/>
-          <p:nvPr/>
-        </p:nvSpPr>
-        <p:spPr>
-          <a:xfrm>
-            <a:off x="8074152" y="1920240"/>
-            <a:ext cx="2825496" cy="1188720"/>
-          </a:xfrm>
-          <a:prstGeom prst="rect">
-            <a:avLst/>
-          </a:prstGeom>
-          <a:noFill/>
-          <a:ln/>
-        </p:spPr>
-        <p:txBody>
-          <a:bodyPr wrap="square" lIns="0" tIns="0" rIns="0" bIns="0" rtlCol="0" anchor="t">
+          <p:cNvPr id="17" name="Text 15"/>
+          <p:cNvSpPr/>
+          <p:nvPr/>
+        </p:nvSpPr>
+        <p:spPr>
+          <a:xfrm>
+            <a:off x="9049512" y="3511296"/>
+            <a:ext cx="646176" cy="310896"/>
+          </a:xfrm>
+          <a:prstGeom prst="rect">
+            <a:avLst/>
+          </a:prstGeom>
+          <a:noFill/>
+          <a:ln/>
+        </p:spPr>
+        <p:txBody>
+          <a:bodyPr wrap="square" lIns="0" tIns="0" rIns="0" bIns="0" rtlCol="0" anchor="ctr">
             <a:normAutofit/>
           </a:bodyPr>
           <a:lstStyle/>
           <a:p>
-            <a:pPr indent="0" marL="0">
-              <a:buNone/>
-            </a:pPr>
-            <a:r>
-              <a:rPr lang="en-US" sz="1550" dirty="0">
-                <a:solidFill>
-                  <a:srgbClr val="17364A"/>
-                </a:solidFill>
-                <a:latin typeface="Aptos" pitchFamily="34" charset="0"/>
-                <a:ea typeface="Aptos" pitchFamily="34" charset="-122"/>
-                <a:cs typeface="Aptos" pitchFamily="34" charset="-120"/>
-              </a:rPr>
-              <a:t>Time-series and anomaly detection methods can support predictive dashboards, syndromic surveillance,.</a:t>
-            </a:r>
-            <a:endParaRPr lang="en-US" sz="1550" dirty="0"/>
-          </a:p>
-        </p:txBody>
-      </p:sp>
-      <p:sp>
-        <p:nvSpPr>
-          <p:cNvPr id="15" name="Shape 13"/>
-          <p:cNvSpPr/>
-          <p:nvPr/>
-        </p:nvSpPr>
-        <p:spPr>
-          <a:xfrm>
-            <a:off x="7909560" y="3520440"/>
-            <a:ext cx="3154680" cy="1737360"/>
+            <a:pPr algn="ctr" indent="0" marL="0">
+              <a:buNone/>
+            </a:pPr>
+            <a:r>
+              <a:rPr lang="en-US" sz="1500" b="1" dirty="0">
+                <a:solidFill>
+                  <a:srgbClr val="FFFFFF"/>
+                </a:solidFill>
+                <a:latin typeface="Aptos" pitchFamily="34" charset="0"/>
+                <a:ea typeface="Aptos" pitchFamily="34" charset="-122"/>
+                <a:cs typeface="Aptos" pitchFamily="34" charset="-120"/>
+              </a:rPr>
+              <a:t>Do</a:t>
+            </a:r>
+            <a:endParaRPr lang="en-US" sz="1500" dirty="0"/>
+          </a:p>
+        </p:txBody>
+      </p:sp>
+      <p:sp>
+        <p:nvSpPr>
+          <p:cNvPr id="18" name="Shape 16"/>
+          <p:cNvSpPr/>
+          <p:nvPr/>
+        </p:nvSpPr>
+        <p:spPr>
+          <a:xfrm>
+            <a:off x="10024872" y="3319272"/>
+            <a:ext cx="792480" cy="749808"/>
           </a:xfrm>
           <a:prstGeom prst="roundRect">
             <a:avLst>
-              <a:gd name="adj" fmla="val 6316"/>
+              <a:gd name="adj" fmla="val 14634"/>
+            </a:avLst>
+          </a:prstGeom>
+          <a:solidFill>
+            <a:srgbClr val="D69A2D"/>
+          </a:solidFill>
+          <a:ln w="12700">
+            <a:solidFill>
+              <a:srgbClr val="D69A2D"/>
+            </a:solidFill>
+            <a:prstDash val="solid"/>
+          </a:ln>
+        </p:spPr>
+      </p:sp>
+      <p:sp>
+        <p:nvSpPr>
+          <p:cNvPr id="19" name="Text 17"/>
+          <p:cNvSpPr/>
+          <p:nvPr/>
+        </p:nvSpPr>
+        <p:spPr>
+          <a:xfrm>
+            <a:off x="10098024" y="3511296"/>
+            <a:ext cx="646176" cy="310896"/>
+          </a:xfrm>
+          <a:prstGeom prst="rect">
+            <a:avLst/>
+          </a:prstGeom>
+          <a:noFill/>
+          <a:ln/>
+        </p:spPr>
+        <p:txBody>
+          <a:bodyPr wrap="square" lIns="0" tIns="0" rIns="0" bIns="0" rtlCol="0" anchor="ctr">
+            <a:normAutofit/>
+          </a:bodyPr>
+          <a:lstStyle/>
+          <a:p>
+            <a:pPr algn="ctr" indent="0" marL="0">
+              <a:buNone/>
+            </a:pPr>
+            <a:r>
+              <a:rPr lang="en-US" sz="1500" b="1" dirty="0">
+                <a:solidFill>
+                  <a:srgbClr val="FFFFFF"/>
+                </a:solidFill>
+                <a:latin typeface="Aptos" pitchFamily="34" charset="0"/>
+                <a:ea typeface="Aptos" pitchFamily="34" charset="-122"/>
+                <a:cs typeface="Aptos" pitchFamily="34" charset="-120"/>
+              </a:rPr>
+              <a:t>Review</a:t>
+            </a:r>
+            <a:endParaRPr lang="en-US" sz="1500" dirty="0"/>
+          </a:p>
+        </p:txBody>
+      </p:sp>
+      <p:sp>
+        <p:nvSpPr>
+          <p:cNvPr id="20" name="Shape 18"/>
+          <p:cNvSpPr/>
+          <p:nvPr/>
+        </p:nvSpPr>
+        <p:spPr>
+          <a:xfrm>
+            <a:off x="8293608" y="4389120"/>
+            <a:ext cx="2157984" cy="0"/>
+          </a:xfrm>
+          <a:prstGeom prst="line">
+            <a:avLst/>
+          </a:prstGeom>
+          <a:noFill/>
+          <a:ln w="25400">
+            <a:solidFill>
+              <a:srgbClr val="8ABBD8"/>
+            </a:solidFill>
+            <a:prstDash val="solid"/>
+          </a:ln>
+        </p:spPr>
+      </p:sp>
+      <p:sp>
+        <p:nvSpPr>
+          <p:cNvPr id="21" name="Text 19"/>
+          <p:cNvSpPr/>
+          <p:nvPr/>
+        </p:nvSpPr>
+        <p:spPr>
+          <a:xfrm>
+            <a:off x="7909560" y="3977640"/>
+            <a:ext cx="2926080" cy="182880"/>
+          </a:xfrm>
+          <a:prstGeom prst="rect">
+            <a:avLst/>
+          </a:prstGeom>
+          <a:noFill/>
+          <a:ln/>
+        </p:spPr>
+        <p:txBody>
+          <a:bodyPr wrap="square" lIns="0" tIns="0" rIns="0" bIns="0" rtlCol="0" anchor="ctr"/>
+          <a:lstStyle/>
+          <a:p>
+            <a:pPr algn="ctr" indent="0" marL="0">
+              <a:buNone/>
+            </a:pPr>
+            <a:r>
+              <a:rPr lang="en-US" sz="1000" dirty="0">
+                <a:solidFill>
+                  <a:srgbClr val="003A63"/>
+                </a:solidFill>
+                <a:latin typeface="Aptos" pitchFamily="34" charset="0"/>
+                <a:ea typeface="Aptos" pitchFamily="34" charset="-122"/>
+                <a:cs typeface="Aptos" pitchFamily="34" charset="-120"/>
+              </a:rPr>
+              <a:t>Dependencies visible</a:t>
+            </a:r>
+            <a:endParaRPr lang="en-US" sz="1000" dirty="0"/>
+          </a:p>
+        </p:txBody>
+      </p:sp>
+      <p:sp>
+        <p:nvSpPr>
+          <p:cNvPr id="22" name="Shape 20"/>
+          <p:cNvSpPr/>
+          <p:nvPr/>
+        </p:nvSpPr>
+        <p:spPr>
+          <a:xfrm>
+            <a:off x="7635240" y="4498848"/>
+            <a:ext cx="3474720" cy="1143000"/>
+          </a:xfrm>
+          <a:prstGeom prst="roundRect">
+            <a:avLst>
+              <a:gd name="adj" fmla="val 9600"/>
             </a:avLst>
           </a:prstGeom>
           <a:solidFill>
@@ -5947,14 +6656,14 @@
       </p:sp>
       <p:sp>
         <p:nvSpPr>
-          <p:cNvPr id="16" name="Text 14"/>
-          <p:cNvSpPr/>
-          <p:nvPr/>
-        </p:nvSpPr>
-        <p:spPr>
-          <a:xfrm>
-            <a:off x="8074152" y="3666744"/>
-            <a:ext cx="2825496" cy="256032"/>
+          <p:cNvPr id="23" name="Text 21"/>
+          <p:cNvSpPr/>
+          <p:nvPr/>
+        </p:nvSpPr>
+        <p:spPr>
+          <a:xfrm>
+            <a:off x="7799832" y="4645152"/>
+            <a:ext cx="3145536" cy="256032"/>
           </a:xfrm>
           <a:prstGeom prst="rect">
             <a:avLst/>
@@ -5978,7 +6687,7 @@
                 <a:ea typeface="Aptos" pitchFamily="34" charset="-122"/>
                 <a:cs typeface="Aptos" pitchFamily="34" charset="-120"/>
               </a:rPr>
-              <a:t>Use this for</a:t>
+              <a:t>Next action</a:t>
             </a:r>
             <a:endParaRPr lang="en-US" sz="1300" dirty="0"/>
           </a:p>
@@ -5986,14 +6695,14 @@
       </p:sp>
       <p:sp>
         <p:nvSpPr>
-          <p:cNvPr id="17" name="Text 15"/>
-          <p:cNvSpPr/>
-          <p:nvPr/>
-        </p:nvSpPr>
-        <p:spPr>
-          <a:xfrm>
-            <a:off x="8074152" y="4023360"/>
-            <a:ext cx="2825496" cy="1097280"/>
+          <p:cNvPr id="24" name="Text 22"/>
+          <p:cNvSpPr/>
+          <p:nvPr/>
+        </p:nvSpPr>
+        <p:spPr>
+          <a:xfrm>
+            <a:off x="7799832" y="5001768"/>
+            <a:ext cx="3145536" cy="502920"/>
           </a:xfrm>
           <a:prstGeom prst="rect">
             <a:avLst/>
@@ -6019,7 +6728,7 @@
                 <a:ea typeface="Aptos" pitchFamily="34" charset="-122"/>
                 <a:cs typeface="Aptos" pitchFamily="34" charset="-120"/>
               </a:rPr>
-              <a:t>Connect the concept to public health decisions, safeguards, documentation, or implementation work.</a:t>
+              <a:t>Use the concept to clarify workflow changes, dependencies, staffing, procurement requirements, training needs, and implementation checkpoints.</a:t>
             </a:r>
             <a:endParaRPr lang="en-US" sz="1550" dirty="0"/>
           </a:p>
@@ -6193,8 +6902,8 @@
         </p:nvSpPr>
         <p:spPr>
           <a:xfrm>
-            <a:off x="9966960" y="6537960"/>
-            <a:ext cx="1645920" cy="201168"/>
+            <a:off x="9646920" y="6537960"/>
+            <a:ext cx="1965960" cy="201168"/>
           </a:xfrm>
           <a:prstGeom prst="rect">
             <a:avLst/>
@@ -6218,7 +6927,7 @@
                 <a:ea typeface="Aptos" pitchFamily="34" charset="-122"/>
                 <a:cs typeface="Aptos" pitchFamily="34" charset="-120"/>
               </a:rPr>
-              <a:t>Â© Paula Soper</a:t>
+              <a:t>Copyright Paula Soper</a:t>
             </a:r>
             <a:endParaRPr lang="en-US" sz="800" dirty="0"/>
           </a:p>
@@ -6265,77 +6974,13 @@
       </p:sp>
       <p:sp>
         <p:nvSpPr>
-          <p:cNvPr id="8" name="Shape 6"/>
+          <p:cNvPr id="8" name="Text 6"/>
           <p:cNvSpPr/>
           <p:nvPr/>
         </p:nvSpPr>
         <p:spPr>
           <a:xfrm>
             <a:off x="640080" y="658368"/>
-            <a:ext cx="420624" cy="420624"/>
-          </a:xfrm>
-          <a:prstGeom prst="ellipse">
-            <a:avLst/>
-          </a:prstGeom>
-          <a:solidFill>
-            <a:srgbClr val="0068B7"/>
-          </a:solidFill>
-          <a:ln w="12700">
-            <a:solidFill>
-              <a:srgbClr val="0068B7"/>
-            </a:solidFill>
-            <a:prstDash val="solid"/>
-          </a:ln>
-        </p:spPr>
-      </p:sp>
-      <p:sp>
-        <p:nvSpPr>
-          <p:cNvPr id="9" name="Text 7"/>
-          <p:cNvSpPr/>
-          <p:nvPr/>
-        </p:nvSpPr>
-        <p:spPr>
-          <a:xfrm>
-            <a:off x="640080" y="731520"/>
-            <a:ext cx="420624" cy="164592"/>
-          </a:xfrm>
-          <a:prstGeom prst="rect">
-            <a:avLst/>
-          </a:prstGeom>
-          <a:noFill/>
-          <a:ln/>
-        </p:spPr>
-        <p:txBody>
-          <a:bodyPr wrap="square" lIns="0" tIns="0" rIns="0" bIns="0" rtlCol="0" anchor="ctr"/>
-          <a:lstStyle/>
-          <a:p>
-            <a:pPr algn="ctr" indent="0" marL="0">
-              <a:buNone/>
-            </a:pPr>
-            <a:r>
-              <a:rPr lang="en-US" sz="1100" b="1" dirty="0">
-                <a:solidFill>
-                  <a:srgbClr val="FFFFFF"/>
-                </a:solidFill>
-                <a:latin typeface="Aptos" pitchFamily="34" charset="0"/>
-                <a:ea typeface="Aptos" pitchFamily="34" charset="-122"/>
-                <a:cs typeface="Aptos" pitchFamily="34" charset="-120"/>
-              </a:rPr>
-              <a:t>8</a:t>
-            </a:r>
-            <a:endParaRPr lang="en-US" sz="1100" dirty="0"/>
-          </a:p>
-        </p:txBody>
-      </p:sp>
-      <p:sp>
-        <p:nvSpPr>
-          <p:cNvPr id="10" name="Text 8"/>
-          <p:cNvSpPr/>
-          <p:nvPr/>
-        </p:nvSpPr>
-        <p:spPr>
-          <a:xfrm>
-            <a:off x="640080" y="621792"/>
             <a:ext cx="10881360" cy="713232"/>
           </a:xfrm>
           <a:prstGeom prst="rect">
@@ -6370,14 +7015,14 @@
       </p:sp>
       <p:sp>
         <p:nvSpPr>
-          <p:cNvPr id="11" name="Text 9"/>
+          <p:cNvPr id="9" name="Text 7"/>
           <p:cNvSpPr/>
           <p:nvPr/>
         </p:nvSpPr>
         <p:spPr>
           <a:xfrm>
             <a:off x="868680" y="1508760"/>
-            <a:ext cx="6537960" cy="4160520"/>
+            <a:ext cx="6309360" cy="4160520"/>
           </a:xfrm>
           <a:prstGeom prst="rect">
             <a:avLst/>
@@ -6436,18 +7081,18 @@
       </p:sp>
       <p:sp>
         <p:nvSpPr>
-          <p:cNvPr id="12" name="Shape 10"/>
-          <p:cNvSpPr/>
-          <p:nvPr/>
-        </p:nvSpPr>
-        <p:spPr>
-          <a:xfrm>
-            <a:off x="7909560" y="1417320"/>
-            <a:ext cx="3154680" cy="1828800"/>
+          <p:cNvPr id="10" name="Shape 8"/>
+          <p:cNvSpPr/>
+          <p:nvPr/>
+        </p:nvSpPr>
+        <p:spPr>
+          <a:xfrm>
+            <a:off x="7635240" y="1325880"/>
+            <a:ext cx="3474720" cy="1325880"/>
           </a:xfrm>
           <a:prstGeom prst="roundRect">
             <a:avLst>
-              <a:gd name="adj" fmla="val 6000"/>
+              <a:gd name="adj" fmla="val 8276"/>
             </a:avLst>
           </a:prstGeom>
           <a:solidFill>
@@ -6463,14 +7108,14 @@
       </p:sp>
       <p:sp>
         <p:nvSpPr>
-          <p:cNvPr id="13" name="Text 11"/>
-          <p:cNvSpPr/>
-          <p:nvPr/>
-        </p:nvSpPr>
-        <p:spPr>
-          <a:xfrm>
-            <a:off x="8074152" y="1563624"/>
-            <a:ext cx="2825496" cy="256032"/>
+          <p:cNvPr id="11" name="Text 9"/>
+          <p:cNvSpPr/>
+          <p:nvPr/>
+        </p:nvSpPr>
+        <p:spPr>
+          <a:xfrm>
+            <a:off x="7799832" y="1472184"/>
+            <a:ext cx="3145536" cy="256032"/>
           </a:xfrm>
           <a:prstGeom prst="rect">
             <a:avLst/>
@@ -6494,7 +7139,7 @@
                 <a:ea typeface="Aptos" pitchFamily="34" charset="-122"/>
                 <a:cs typeface="Aptos" pitchFamily="34" charset="-120"/>
               </a:rPr>
-              <a:t>Key idea</a:t>
+              <a:t>Core concept</a:t>
             </a:r>
             <a:endParaRPr lang="en-US" sz="1300" dirty="0"/>
           </a:p>
@@ -6502,14 +7147,14 @@
       </p:sp>
       <p:sp>
         <p:nvSpPr>
-          <p:cNvPr id="14" name="Text 12"/>
-          <p:cNvSpPr/>
-          <p:nvPr/>
-        </p:nvSpPr>
-        <p:spPr>
-          <a:xfrm>
-            <a:off x="8074152" y="1920240"/>
-            <a:ext cx="2825496" cy="1188720"/>
+          <p:cNvPr id="12" name="Text 10"/>
+          <p:cNvSpPr/>
+          <p:nvPr/>
+        </p:nvSpPr>
+        <p:spPr>
+          <a:xfrm>
+            <a:off x="7799832" y="1828800"/>
+            <a:ext cx="3145536" cy="685800"/>
           </a:xfrm>
           <a:prstGeom prst="rect">
             <a:avLst/>
@@ -6543,18 +7188,159 @@
       </p:sp>
       <p:sp>
         <p:nvSpPr>
-          <p:cNvPr id="15" name="Shape 13"/>
-          <p:cNvSpPr/>
-          <p:nvPr/>
-        </p:nvSpPr>
-        <p:spPr>
-          <a:xfrm>
-            <a:off x="7909560" y="3520440"/>
-            <a:ext cx="3154680" cy="1737360"/>
+          <p:cNvPr id="13" name="Shape 11"/>
+          <p:cNvSpPr/>
+          <p:nvPr/>
+        </p:nvSpPr>
+        <p:spPr>
+          <a:xfrm>
+            <a:off x="7635240" y="2788920"/>
+            <a:ext cx="3474720" cy="1536192"/>
           </a:xfrm>
           <a:prstGeom prst="roundRect">
             <a:avLst>
-              <a:gd name="adj" fmla="val 6316"/>
+              <a:gd name="adj" fmla="val 7143"/>
+            </a:avLst>
+          </a:prstGeom>
+          <a:solidFill>
+            <a:srgbClr val="FFFFFF">
+              <a:alpha val="88000"/>
+            </a:srgbClr>
+          </a:solidFill>
+          <a:ln w="12700">
+            <a:solidFill>
+              <a:srgbClr val="D6E8F2"/>
+            </a:solidFill>
+            <a:prstDash val="solid"/>
+          </a:ln>
+        </p:spPr>
+      </p:sp>
+      <p:sp>
+        <p:nvSpPr>
+          <p:cNvPr id="14" name="Shape 12"/>
+          <p:cNvSpPr/>
+          <p:nvPr/>
+        </p:nvSpPr>
+        <p:spPr>
+          <a:xfrm>
+            <a:off x="8074152" y="3291840"/>
+            <a:ext cx="2596896" cy="749808"/>
+          </a:xfrm>
+          <a:prstGeom prst="rect">
+            <a:avLst/>
+          </a:prstGeom>
+          <a:solidFill>
+            <a:srgbClr val="EAF6F8"/>
+          </a:solidFill>
+          <a:ln w="12700">
+            <a:solidFill>
+              <a:srgbClr val="8ABBD8"/>
+            </a:solidFill>
+            <a:prstDash val="solid"/>
+          </a:ln>
+        </p:spPr>
+      </p:sp>
+      <p:sp>
+        <p:nvSpPr>
+          <p:cNvPr id="15" name="Shape 13"/>
+          <p:cNvSpPr/>
+          <p:nvPr/>
+        </p:nvSpPr>
+        <p:spPr>
+          <a:xfrm>
+            <a:off x="8202168" y="3721608"/>
+            <a:ext cx="2340864" cy="0"/>
+          </a:xfrm>
+          <a:prstGeom prst="line">
+            <a:avLst/>
+          </a:prstGeom>
+          <a:noFill/>
+          <a:ln w="19050">
+            <a:solidFill>
+              <a:srgbClr val="0068B7"/>
+            </a:solidFill>
+            <a:prstDash val="solid"/>
+          </a:ln>
+        </p:spPr>
+      </p:sp>
+      <p:sp>
+        <p:nvSpPr>
+          <p:cNvPr id="16" name="Shape 14"/>
+          <p:cNvSpPr/>
+          <p:nvPr/>
+        </p:nvSpPr>
+        <p:spPr>
+          <a:xfrm>
+            <a:off x="9198864" y="4206240"/>
+            <a:ext cx="347472" cy="347472"/>
+          </a:xfrm>
+          <a:prstGeom prst="ellipse">
+            <a:avLst/>
+          </a:prstGeom>
+          <a:solidFill>
+            <a:srgbClr val="2F8A28"/>
+          </a:solidFill>
+          <a:ln w="12700">
+            <a:solidFill>
+              <a:srgbClr val="2F8A28"/>
+            </a:solidFill>
+            <a:prstDash val="solid"/>
+          </a:ln>
+        </p:spPr>
+      </p:sp>
+      <p:sp>
+        <p:nvSpPr>
+          <p:cNvPr id="17" name="Text 15"/>
+          <p:cNvSpPr/>
+          <p:nvPr/>
+        </p:nvSpPr>
+        <p:spPr>
+          <a:xfrm>
+            <a:off x="7909560" y="3977640"/>
+            <a:ext cx="2926080" cy="182880"/>
+          </a:xfrm>
+          <a:prstGeom prst="rect">
+            <a:avLst/>
+          </a:prstGeom>
+          <a:noFill/>
+          <a:ln/>
+        </p:spPr>
+        <p:txBody>
+          <a:bodyPr wrap="square" lIns="0" tIns="0" rIns="0" bIns="0" rtlCol="0" anchor="ctr"/>
+          <a:lstStyle/>
+          <a:p>
+            <a:pPr algn="ctr" indent="0" marL="0">
+              <a:buNone/>
+            </a:pPr>
+            <a:r>
+              <a:rPr lang="en-US" sz="1000" dirty="0">
+                <a:solidFill>
+                  <a:srgbClr val="003A63"/>
+                </a:solidFill>
+                <a:latin typeface="Aptos" pitchFamily="34" charset="0"/>
+                <a:ea typeface="Aptos" pitchFamily="34" charset="-122"/>
+                <a:cs typeface="Aptos" pitchFamily="34" charset="-120"/>
+              </a:rPr>
+              <a:t>Concept to action</a:t>
+            </a:r>
+            <a:endParaRPr lang="en-US" sz="1000" dirty="0"/>
+          </a:p>
+        </p:txBody>
+      </p:sp>
+      <p:sp>
+        <p:nvSpPr>
+          <p:cNvPr id="18" name="Shape 16"/>
+          <p:cNvSpPr/>
+          <p:nvPr/>
+        </p:nvSpPr>
+        <p:spPr>
+          <a:xfrm>
+            <a:off x="7635240" y="4498848"/>
+            <a:ext cx="3474720" cy="1143000"/>
+          </a:xfrm>
+          <a:prstGeom prst="roundRect">
+            <a:avLst>
+              <a:gd name="adj" fmla="val 9600"/>
             </a:avLst>
           </a:prstGeom>
           <a:solidFill>
@@ -6570,14 +7356,14 @@
       </p:sp>
       <p:sp>
         <p:nvSpPr>
-          <p:cNvPr id="16" name="Text 14"/>
-          <p:cNvSpPr/>
-          <p:nvPr/>
-        </p:nvSpPr>
-        <p:spPr>
-          <a:xfrm>
-            <a:off x="8074152" y="3666744"/>
-            <a:ext cx="2825496" cy="256032"/>
+          <p:cNvPr id="19" name="Text 17"/>
+          <p:cNvSpPr/>
+          <p:nvPr/>
+        </p:nvSpPr>
+        <p:spPr>
+          <a:xfrm>
+            <a:off x="7799832" y="4645152"/>
+            <a:ext cx="3145536" cy="256032"/>
           </a:xfrm>
           <a:prstGeom prst="rect">
             <a:avLst/>
@@ -6601,7 +7387,7 @@
                 <a:ea typeface="Aptos" pitchFamily="34" charset="-122"/>
                 <a:cs typeface="Aptos" pitchFamily="34" charset="-120"/>
               </a:rPr>
-              <a:t>Use this for</a:t>
+              <a:t>Apply it</a:t>
             </a:r>
             <a:endParaRPr lang="en-US" sz="1300" dirty="0"/>
           </a:p>
@@ -6609,14 +7395,14 @@
       </p:sp>
       <p:sp>
         <p:nvSpPr>
-          <p:cNvPr id="17" name="Text 15"/>
-          <p:cNvSpPr/>
-          <p:nvPr/>
-        </p:nvSpPr>
-        <p:spPr>
-          <a:xfrm>
-            <a:off x="8074152" y="4023360"/>
-            <a:ext cx="2825496" cy="1097280"/>
+          <p:cNvPr id="20" name="Text 18"/>
+          <p:cNvSpPr/>
+          <p:nvPr/>
+        </p:nvSpPr>
+        <p:spPr>
+          <a:xfrm>
+            <a:off x="7799832" y="5001768"/>
+            <a:ext cx="3145536" cy="502920"/>
           </a:xfrm>
           <a:prstGeom prst="rect">
             <a:avLst/>
@@ -6642,7 +7428,7 @@
                 <a:ea typeface="Aptos" pitchFamily="34" charset="-122"/>
                 <a:cs typeface="Aptos" pitchFamily="34" charset="-120"/>
               </a:rPr>
-              <a:t>Connect the concept to public health decisions, safeguards, documentation, or implementation work.</a:t>
+              <a:t>Connect the concept to public health purpose, responsible use, required safeguards, documentation, and the next action a department should take.</a:t>
             </a:r>
             <a:endParaRPr lang="en-US" sz="1550" dirty="0"/>
           </a:p>
@@ -6816,8 +7602,8 @@
         </p:nvSpPr>
         <p:spPr>
           <a:xfrm>
-            <a:off x="9966960" y="6537960"/>
-            <a:ext cx="1645920" cy="201168"/>
+            <a:off x="9646920" y="6537960"/>
+            <a:ext cx="1965960" cy="201168"/>
           </a:xfrm>
           <a:prstGeom prst="rect">
             <a:avLst/>
@@ -6841,7 +7627,7 @@
                 <a:ea typeface="Aptos" pitchFamily="34" charset="-122"/>
                 <a:cs typeface="Aptos" pitchFamily="34" charset="-120"/>
               </a:rPr>
-              <a:t>Â© Paula Soper</a:t>
+              <a:t>Copyright Paula Soper</a:t>
             </a:r>
             <a:endParaRPr lang="en-US" sz="800" dirty="0"/>
           </a:p>
@@ -6936,7 +7722,7 @@
         <p:spPr>
           <a:xfrm>
             <a:off x="868680" y="1508760"/>
-            <a:ext cx="6537960" cy="4160520"/>
+            <a:ext cx="6309360" cy="4160520"/>
           </a:xfrm>
           <a:prstGeom prst="rect">
             <a:avLst/>
@@ -6987,12 +7773,12 @@
         </p:nvSpPr>
         <p:spPr>
           <a:xfrm>
-            <a:off x="7909560" y="1417320"/>
-            <a:ext cx="3154680" cy="1828800"/>
+            <a:off x="7635240" y="1325880"/>
+            <a:ext cx="3474720" cy="1325880"/>
           </a:xfrm>
           <a:prstGeom prst="roundRect">
             <a:avLst>
-              <a:gd name="adj" fmla="val 6000"/>
+              <a:gd name="adj" fmla="val 8276"/>
             </a:avLst>
           </a:prstGeom>
           <a:solidFill>
@@ -7014,8 +7800,8 @@
         </p:nvSpPr>
         <p:spPr>
           <a:xfrm>
-            <a:off x="8074152" y="1563624"/>
-            <a:ext cx="2825496" cy="256032"/>
+            <a:off x="7799832" y="1472184"/>
+            <a:ext cx="3145536" cy="256032"/>
           </a:xfrm>
           <a:prstGeom prst="rect">
             <a:avLst/>
@@ -7039,7 +7825,7 @@
                 <a:ea typeface="Aptos" pitchFamily="34" charset="-122"/>
                 <a:cs typeface="Aptos" pitchFamily="34" charset="-120"/>
               </a:rPr>
-              <a:t>Key idea</a:t>
+              <a:t>Core concept</a:t>
             </a:r>
             <a:endParaRPr lang="en-US" sz="1300" dirty="0"/>
           </a:p>
@@ -7053,8 +7839,8 @@
         </p:nvSpPr>
         <p:spPr>
           <a:xfrm>
-            <a:off x="8074152" y="1920240"/>
-            <a:ext cx="2825496" cy="1188720"/>
+            <a:off x="7799832" y="1828800"/>
+            <a:ext cx="3145536" cy="685800"/>
           </a:xfrm>
           <a:prstGeom prst="rect">
             <a:avLst/>
@@ -7094,12 +7880,153 @@
         </p:nvSpPr>
         <p:spPr>
           <a:xfrm>
-            <a:off x="7909560" y="3520440"/>
-            <a:ext cx="3154680" cy="1737360"/>
+            <a:off x="7635240" y="2788920"/>
+            <a:ext cx="3474720" cy="1536192"/>
           </a:xfrm>
           <a:prstGeom prst="roundRect">
             <a:avLst>
-              <a:gd name="adj" fmla="val 6316"/>
+              <a:gd name="adj" fmla="val 7143"/>
+            </a:avLst>
+          </a:prstGeom>
+          <a:solidFill>
+            <a:srgbClr val="FFFFFF">
+              <a:alpha val="88000"/>
+            </a:srgbClr>
+          </a:solidFill>
+          <a:ln w="12700">
+            <a:solidFill>
+              <a:srgbClr val="D6E8F2"/>
+            </a:solidFill>
+            <a:prstDash val="solid"/>
+          </a:ln>
+        </p:spPr>
+      </p:sp>
+      <p:sp>
+        <p:nvSpPr>
+          <p:cNvPr id="14" name="Shape 12"/>
+          <p:cNvSpPr/>
+          <p:nvPr/>
+        </p:nvSpPr>
+        <p:spPr>
+          <a:xfrm>
+            <a:off x="8074152" y="3291840"/>
+            <a:ext cx="2596896" cy="749808"/>
+          </a:xfrm>
+          <a:prstGeom prst="rect">
+            <a:avLst/>
+          </a:prstGeom>
+          <a:solidFill>
+            <a:srgbClr val="EAF6F8"/>
+          </a:solidFill>
+          <a:ln w="12700">
+            <a:solidFill>
+              <a:srgbClr val="8ABBD8"/>
+            </a:solidFill>
+            <a:prstDash val="solid"/>
+          </a:ln>
+        </p:spPr>
+      </p:sp>
+      <p:sp>
+        <p:nvSpPr>
+          <p:cNvPr id="15" name="Shape 13"/>
+          <p:cNvSpPr/>
+          <p:nvPr/>
+        </p:nvSpPr>
+        <p:spPr>
+          <a:xfrm>
+            <a:off x="8202168" y="3721608"/>
+            <a:ext cx="2340864" cy="0"/>
+          </a:xfrm>
+          <a:prstGeom prst="line">
+            <a:avLst/>
+          </a:prstGeom>
+          <a:noFill/>
+          <a:ln w="19050">
+            <a:solidFill>
+              <a:srgbClr val="0068B7"/>
+            </a:solidFill>
+            <a:prstDash val="solid"/>
+          </a:ln>
+        </p:spPr>
+      </p:sp>
+      <p:sp>
+        <p:nvSpPr>
+          <p:cNvPr id="16" name="Shape 14"/>
+          <p:cNvSpPr/>
+          <p:nvPr/>
+        </p:nvSpPr>
+        <p:spPr>
+          <a:xfrm>
+            <a:off x="9198864" y="4206240"/>
+            <a:ext cx="347472" cy="347472"/>
+          </a:xfrm>
+          <a:prstGeom prst="ellipse">
+            <a:avLst/>
+          </a:prstGeom>
+          <a:solidFill>
+            <a:srgbClr val="2F8A28"/>
+          </a:solidFill>
+          <a:ln w="12700">
+            <a:solidFill>
+              <a:srgbClr val="2F8A28"/>
+            </a:solidFill>
+            <a:prstDash val="solid"/>
+          </a:ln>
+        </p:spPr>
+      </p:sp>
+      <p:sp>
+        <p:nvSpPr>
+          <p:cNvPr id="17" name="Text 15"/>
+          <p:cNvSpPr/>
+          <p:nvPr/>
+        </p:nvSpPr>
+        <p:spPr>
+          <a:xfrm>
+            <a:off x="7909560" y="3977640"/>
+            <a:ext cx="2926080" cy="182880"/>
+          </a:xfrm>
+          <a:prstGeom prst="rect">
+            <a:avLst/>
+          </a:prstGeom>
+          <a:noFill/>
+          <a:ln/>
+        </p:spPr>
+        <p:txBody>
+          <a:bodyPr wrap="square" lIns="0" tIns="0" rIns="0" bIns="0" rtlCol="0" anchor="ctr"/>
+          <a:lstStyle/>
+          <a:p>
+            <a:pPr algn="ctr" indent="0" marL="0">
+              <a:buNone/>
+            </a:pPr>
+            <a:r>
+              <a:rPr lang="en-US" sz="1000" dirty="0">
+                <a:solidFill>
+                  <a:srgbClr val="003A63"/>
+                </a:solidFill>
+                <a:latin typeface="Aptos" pitchFamily="34" charset="0"/>
+                <a:ea typeface="Aptos" pitchFamily="34" charset="-122"/>
+                <a:cs typeface="Aptos" pitchFamily="34" charset="-120"/>
+              </a:rPr>
+              <a:t>Concept to action</a:t>
+            </a:r>
+            <a:endParaRPr lang="en-US" sz="1000" dirty="0"/>
+          </a:p>
+        </p:txBody>
+      </p:sp>
+      <p:sp>
+        <p:nvSpPr>
+          <p:cNvPr id="18" name="Shape 16"/>
+          <p:cNvSpPr/>
+          <p:nvPr/>
+        </p:nvSpPr>
+        <p:spPr>
+          <a:xfrm>
+            <a:off x="7635240" y="4498848"/>
+            <a:ext cx="3474720" cy="1143000"/>
+          </a:xfrm>
+          <a:prstGeom prst="roundRect">
+            <a:avLst>
+              <a:gd name="adj" fmla="val 9600"/>
             </a:avLst>
           </a:prstGeom>
           <a:solidFill>
@@ -7115,14 +8042,14 @@
       </p:sp>
       <p:sp>
         <p:nvSpPr>
-          <p:cNvPr id="14" name="Text 12"/>
-          <p:cNvSpPr/>
-          <p:nvPr/>
-        </p:nvSpPr>
-        <p:spPr>
-          <a:xfrm>
-            <a:off x="8074152" y="3666744"/>
-            <a:ext cx="2825496" cy="256032"/>
+          <p:cNvPr id="19" name="Text 17"/>
+          <p:cNvSpPr/>
+          <p:nvPr/>
+        </p:nvSpPr>
+        <p:spPr>
+          <a:xfrm>
+            <a:off x="7799832" y="4645152"/>
+            <a:ext cx="3145536" cy="256032"/>
           </a:xfrm>
           <a:prstGeom prst="rect">
             <a:avLst/>
@@ -7146,7 +8073,7 @@
                 <a:ea typeface="Aptos" pitchFamily="34" charset="-122"/>
                 <a:cs typeface="Aptos" pitchFamily="34" charset="-120"/>
               </a:rPr>
-              <a:t>Use this for</a:t>
+              <a:t>Apply it</a:t>
             </a:r>
             <a:endParaRPr lang="en-US" sz="1300" dirty="0"/>
           </a:p>
@@ -7154,14 +8081,14 @@
       </p:sp>
       <p:sp>
         <p:nvSpPr>
-          <p:cNvPr id="15" name="Text 13"/>
-          <p:cNvSpPr/>
-          <p:nvPr/>
-        </p:nvSpPr>
-        <p:spPr>
-          <a:xfrm>
-            <a:off x="8074152" y="4023360"/>
-            <a:ext cx="2825496" cy="1097280"/>
+          <p:cNvPr id="20" name="Text 18"/>
+          <p:cNvSpPr/>
+          <p:nvPr/>
+        </p:nvSpPr>
+        <p:spPr>
+          <a:xfrm>
+            <a:off x="7799832" y="5001768"/>
+            <a:ext cx="3145536" cy="502920"/>
           </a:xfrm>
           <a:prstGeom prst="rect">
             <a:avLst/>
@@ -7187,7 +8114,7 @@
                 <a:ea typeface="Aptos" pitchFamily="34" charset="-122"/>
                 <a:cs typeface="Aptos" pitchFamily="34" charset="-120"/>
               </a:rPr>
-              <a:t>Connect the concept to public health decisions, safeguards, documentation, or implementation work.</a:t>
+              <a:t>Connect the concept to public health purpose, responsible use, required safeguards, documentation, and the next action a department should take.</a:t>
             </a:r>
             <a:endParaRPr lang="en-US" sz="1550" dirty="0"/>
           </a:p>
@@ -7361,8 +8288,8 @@
         </p:nvSpPr>
         <p:spPr>
           <a:xfrm>
-            <a:off x="9966960" y="6537960"/>
-            <a:ext cx="1645920" cy="201168"/>
+            <a:off x="9646920" y="6537960"/>
+            <a:ext cx="1965960" cy="201168"/>
           </a:xfrm>
           <a:prstGeom prst="rect">
             <a:avLst/>
@@ -7386,7 +8313,7 @@
                 <a:ea typeface="Aptos" pitchFamily="34" charset="-122"/>
                 <a:cs typeface="Aptos" pitchFamily="34" charset="-120"/>
               </a:rPr>
-              <a:t>Â© Paula Soper</a:t>
+              <a:t>Copyright Paula Soper</a:t>
             </a:r>
             <a:endParaRPr lang="en-US" sz="800" dirty="0"/>
           </a:p>
@@ -7433,77 +8360,13 @@
       </p:sp>
       <p:sp>
         <p:nvSpPr>
-          <p:cNvPr id="8" name="Shape 6"/>
+          <p:cNvPr id="8" name="Text 6"/>
           <p:cNvSpPr/>
           <p:nvPr/>
         </p:nvSpPr>
         <p:spPr>
           <a:xfrm>
             <a:off x="640080" y="658368"/>
-            <a:ext cx="420624" cy="420624"/>
-          </a:xfrm>
-          <a:prstGeom prst="ellipse">
-            <a:avLst/>
-          </a:prstGeom>
-          <a:solidFill>
-            <a:srgbClr val="0068B7"/>
-          </a:solidFill>
-          <a:ln w="12700">
-            <a:solidFill>
-              <a:srgbClr val="0068B7"/>
-            </a:solidFill>
-            <a:prstDash val="solid"/>
-          </a:ln>
-        </p:spPr>
-      </p:sp>
-      <p:sp>
-        <p:nvSpPr>
-          <p:cNvPr id="9" name="Text 7"/>
-          <p:cNvSpPr/>
-          <p:nvPr/>
-        </p:nvSpPr>
-        <p:spPr>
-          <a:xfrm>
-            <a:off x="640080" y="731520"/>
-            <a:ext cx="420624" cy="164592"/>
-          </a:xfrm>
-          <a:prstGeom prst="rect">
-            <a:avLst/>
-          </a:prstGeom>
-          <a:noFill/>
-          <a:ln/>
-        </p:spPr>
-        <p:txBody>
-          <a:bodyPr wrap="square" lIns="0" tIns="0" rIns="0" bIns="0" rtlCol="0" anchor="ctr"/>
-          <a:lstStyle/>
-          <a:p>
-            <a:pPr algn="ctr" indent="0" marL="0">
-              <a:buNone/>
-            </a:pPr>
-            <a:r>
-              <a:rPr lang="en-US" sz="1100" b="1" dirty="0">
-                <a:solidFill>
-                  <a:srgbClr val="FFFFFF"/>
-                </a:solidFill>
-                <a:latin typeface="Aptos" pitchFamily="34" charset="0"/>
-                <a:ea typeface="Aptos" pitchFamily="34" charset="-122"/>
-                <a:cs typeface="Aptos" pitchFamily="34" charset="-120"/>
-              </a:rPr>
-              <a:t>9</a:t>
-            </a:r>
-            <a:endParaRPr lang="en-US" sz="1100" dirty="0"/>
-          </a:p>
-        </p:txBody>
-      </p:sp>
-      <p:sp>
-        <p:nvSpPr>
-          <p:cNvPr id="10" name="Text 8"/>
-          <p:cNvSpPr/>
-          <p:nvPr/>
-        </p:nvSpPr>
-        <p:spPr>
-          <a:xfrm>
-            <a:off x="640080" y="621792"/>
             <a:ext cx="10881360" cy="713232"/>
           </a:xfrm>
           <a:prstGeom prst="rect">
@@ -7538,14 +8401,14 @@
       </p:sp>
       <p:sp>
         <p:nvSpPr>
-          <p:cNvPr id="11" name="Text 9"/>
+          <p:cNvPr id="9" name="Text 7"/>
           <p:cNvSpPr/>
           <p:nvPr/>
         </p:nvSpPr>
         <p:spPr>
           <a:xfrm>
             <a:off x="868680" y="1508760"/>
-            <a:ext cx="6537960" cy="4160520"/>
+            <a:ext cx="6309360" cy="4160520"/>
           </a:xfrm>
           <a:prstGeom prst="rect">
             <a:avLst/>
@@ -7604,18 +8467,18 @@
       </p:sp>
       <p:sp>
         <p:nvSpPr>
-          <p:cNvPr id="12" name="Shape 10"/>
-          <p:cNvSpPr/>
-          <p:nvPr/>
-        </p:nvSpPr>
-        <p:spPr>
-          <a:xfrm>
-            <a:off x="7909560" y="1417320"/>
-            <a:ext cx="3154680" cy="1828800"/>
+          <p:cNvPr id="10" name="Shape 8"/>
+          <p:cNvSpPr/>
+          <p:nvPr/>
+        </p:nvSpPr>
+        <p:spPr>
+          <a:xfrm>
+            <a:off x="7635240" y="1325880"/>
+            <a:ext cx="3474720" cy="1325880"/>
           </a:xfrm>
           <a:prstGeom prst="roundRect">
             <a:avLst>
-              <a:gd name="adj" fmla="val 6000"/>
+              <a:gd name="adj" fmla="val 8276"/>
             </a:avLst>
           </a:prstGeom>
           <a:solidFill>
@@ -7631,14 +8494,14 @@
       </p:sp>
       <p:sp>
         <p:nvSpPr>
-          <p:cNvPr id="13" name="Text 11"/>
-          <p:cNvSpPr/>
-          <p:nvPr/>
-        </p:nvSpPr>
-        <p:spPr>
-          <a:xfrm>
-            <a:off x="8074152" y="1563624"/>
-            <a:ext cx="2825496" cy="256032"/>
+          <p:cNvPr id="11" name="Text 9"/>
+          <p:cNvSpPr/>
+          <p:nvPr/>
+        </p:nvSpPr>
+        <p:spPr>
+          <a:xfrm>
+            <a:off x="7799832" y="1472184"/>
+            <a:ext cx="3145536" cy="256032"/>
           </a:xfrm>
           <a:prstGeom prst="rect">
             <a:avLst/>
@@ -7662,7 +8525,7 @@
                 <a:ea typeface="Aptos" pitchFamily="34" charset="-122"/>
                 <a:cs typeface="Aptos" pitchFamily="34" charset="-120"/>
               </a:rPr>
-              <a:t>Key idea</a:t>
+              <a:t>Practice focus</a:t>
             </a:r>
             <a:endParaRPr lang="en-US" sz="1300" dirty="0"/>
           </a:p>
@@ -7670,14 +8533,14 @@
       </p:sp>
       <p:sp>
         <p:nvSpPr>
-          <p:cNvPr id="14" name="Text 12"/>
-          <p:cNvSpPr/>
-          <p:nvPr/>
-        </p:nvSpPr>
-        <p:spPr>
-          <a:xfrm>
-            <a:off x="8074152" y="1920240"/>
-            <a:ext cx="2825496" cy="1188720"/>
+          <p:cNvPr id="12" name="Text 10"/>
+          <p:cNvSpPr/>
+          <p:nvPr/>
+        </p:nvSpPr>
+        <p:spPr>
+          <a:xfrm>
+            <a:off x="7799832" y="1828800"/>
+            <a:ext cx="3145536" cy="685800"/>
           </a:xfrm>
           <a:prstGeom prst="rect">
             <a:avLst/>
@@ -7711,18 +8574,159 @@
       </p:sp>
       <p:sp>
         <p:nvSpPr>
-          <p:cNvPr id="15" name="Shape 13"/>
-          <p:cNvSpPr/>
-          <p:nvPr/>
-        </p:nvSpPr>
-        <p:spPr>
-          <a:xfrm>
-            <a:off x="7909560" y="3520440"/>
-            <a:ext cx="3154680" cy="1737360"/>
+          <p:cNvPr id="13" name="Shape 11"/>
+          <p:cNvSpPr/>
+          <p:nvPr/>
+        </p:nvSpPr>
+        <p:spPr>
+          <a:xfrm>
+            <a:off x="7635240" y="2788920"/>
+            <a:ext cx="3474720" cy="1536192"/>
           </a:xfrm>
           <a:prstGeom prst="roundRect">
             <a:avLst>
-              <a:gd name="adj" fmla="val 6316"/>
+              <a:gd name="adj" fmla="val 7143"/>
+            </a:avLst>
+          </a:prstGeom>
+          <a:solidFill>
+            <a:srgbClr val="FFFFFF">
+              <a:alpha val="88000"/>
+            </a:srgbClr>
+          </a:solidFill>
+          <a:ln w="12700">
+            <a:solidFill>
+              <a:srgbClr val="D6E8F2"/>
+            </a:solidFill>
+            <a:prstDash val="solid"/>
+          </a:ln>
+        </p:spPr>
+      </p:sp>
+      <p:sp>
+        <p:nvSpPr>
+          <p:cNvPr id="14" name="Shape 12"/>
+          <p:cNvSpPr/>
+          <p:nvPr/>
+        </p:nvSpPr>
+        <p:spPr>
+          <a:xfrm>
+            <a:off x="8074152" y="3291840"/>
+            <a:ext cx="2596896" cy="749808"/>
+          </a:xfrm>
+          <a:prstGeom prst="rect">
+            <a:avLst/>
+          </a:prstGeom>
+          <a:solidFill>
+            <a:srgbClr val="EAF6F8"/>
+          </a:solidFill>
+          <a:ln w="12700">
+            <a:solidFill>
+              <a:srgbClr val="8ABBD8"/>
+            </a:solidFill>
+            <a:prstDash val="solid"/>
+          </a:ln>
+        </p:spPr>
+      </p:sp>
+      <p:sp>
+        <p:nvSpPr>
+          <p:cNvPr id="15" name="Shape 13"/>
+          <p:cNvSpPr/>
+          <p:nvPr/>
+        </p:nvSpPr>
+        <p:spPr>
+          <a:xfrm>
+            <a:off x="8202168" y="3721608"/>
+            <a:ext cx="2340864" cy="0"/>
+          </a:xfrm>
+          <a:prstGeom prst="line">
+            <a:avLst/>
+          </a:prstGeom>
+          <a:noFill/>
+          <a:ln w="19050">
+            <a:solidFill>
+              <a:srgbClr val="0068B7"/>
+            </a:solidFill>
+            <a:prstDash val="solid"/>
+          </a:ln>
+        </p:spPr>
+      </p:sp>
+      <p:sp>
+        <p:nvSpPr>
+          <p:cNvPr id="16" name="Shape 14"/>
+          <p:cNvSpPr/>
+          <p:nvPr/>
+        </p:nvSpPr>
+        <p:spPr>
+          <a:xfrm>
+            <a:off x="9198864" y="4206240"/>
+            <a:ext cx="347472" cy="347472"/>
+          </a:xfrm>
+          <a:prstGeom prst="ellipse">
+            <a:avLst/>
+          </a:prstGeom>
+          <a:solidFill>
+            <a:srgbClr val="2F8A28"/>
+          </a:solidFill>
+          <a:ln w="12700">
+            <a:solidFill>
+              <a:srgbClr val="2F8A28"/>
+            </a:solidFill>
+            <a:prstDash val="solid"/>
+          </a:ln>
+        </p:spPr>
+      </p:sp>
+      <p:sp>
+        <p:nvSpPr>
+          <p:cNvPr id="17" name="Text 15"/>
+          <p:cNvSpPr/>
+          <p:nvPr/>
+        </p:nvSpPr>
+        <p:spPr>
+          <a:xfrm>
+            <a:off x="7909560" y="3977640"/>
+            <a:ext cx="2926080" cy="182880"/>
+          </a:xfrm>
+          <a:prstGeom prst="rect">
+            <a:avLst/>
+          </a:prstGeom>
+          <a:noFill/>
+          <a:ln/>
+        </p:spPr>
+        <p:txBody>
+          <a:bodyPr wrap="square" lIns="0" tIns="0" rIns="0" bIns="0" rtlCol="0" anchor="ctr"/>
+          <a:lstStyle/>
+          <a:p>
+            <a:pPr algn="ctr" indent="0" marL="0">
+              <a:buNone/>
+            </a:pPr>
+            <a:r>
+              <a:rPr lang="en-US" sz="1000" dirty="0">
+                <a:solidFill>
+                  <a:srgbClr val="003A63"/>
+                </a:solidFill>
+                <a:latin typeface="Aptos" pitchFamily="34" charset="0"/>
+                <a:ea typeface="Aptos" pitchFamily="34" charset="-122"/>
+                <a:cs typeface="Aptos" pitchFamily="34" charset="-120"/>
+              </a:rPr>
+              <a:t>Concept to action</a:t>
+            </a:r>
+            <a:endParaRPr lang="en-US" sz="1000" dirty="0"/>
+          </a:p>
+        </p:txBody>
+      </p:sp>
+      <p:sp>
+        <p:nvSpPr>
+          <p:cNvPr id="18" name="Shape 16"/>
+          <p:cNvSpPr/>
+          <p:nvPr/>
+        </p:nvSpPr>
+        <p:spPr>
+          <a:xfrm>
+            <a:off x="7635240" y="4498848"/>
+            <a:ext cx="3474720" cy="1143000"/>
+          </a:xfrm>
+          <a:prstGeom prst="roundRect">
+            <a:avLst>
+              <a:gd name="adj" fmla="val 9600"/>
             </a:avLst>
           </a:prstGeom>
           <a:solidFill>
@@ -7738,14 +8742,14 @@
       </p:sp>
       <p:sp>
         <p:nvSpPr>
-          <p:cNvPr id="16" name="Text 14"/>
-          <p:cNvSpPr/>
-          <p:nvPr/>
-        </p:nvSpPr>
-        <p:spPr>
-          <a:xfrm>
-            <a:off x="8074152" y="3666744"/>
-            <a:ext cx="2825496" cy="256032"/>
+          <p:cNvPr id="19" name="Text 17"/>
+          <p:cNvSpPr/>
+          <p:nvPr/>
+        </p:nvSpPr>
+        <p:spPr>
+          <a:xfrm>
+            <a:off x="7799832" y="4645152"/>
+            <a:ext cx="3145536" cy="256032"/>
           </a:xfrm>
           <a:prstGeom prst="rect">
             <a:avLst/>
@@ -7769,7 +8773,7 @@
                 <a:ea typeface="Aptos" pitchFamily="34" charset="-122"/>
                 <a:cs typeface="Aptos" pitchFamily="34" charset="-120"/>
               </a:rPr>
-              <a:t>Use this for</a:t>
+              <a:t>What to produce</a:t>
             </a:r>
             <a:endParaRPr lang="en-US" sz="1300" dirty="0"/>
           </a:p>
@@ -7777,14 +8781,14 @@
       </p:sp>
       <p:sp>
         <p:nvSpPr>
-          <p:cNvPr id="17" name="Text 15"/>
-          <p:cNvSpPr/>
-          <p:nvPr/>
-        </p:nvSpPr>
-        <p:spPr>
-          <a:xfrm>
-            <a:off x="8074152" y="4023360"/>
-            <a:ext cx="2825496" cy="1097280"/>
+          <p:cNvPr id="20" name="Text 18"/>
+          <p:cNvSpPr/>
+          <p:nvPr/>
+        </p:nvSpPr>
+        <p:spPr>
+          <a:xfrm>
+            <a:off x="7799832" y="5001768"/>
+            <a:ext cx="3145536" cy="502920"/>
           </a:xfrm>
           <a:prstGeom prst="rect">
             <a:avLst/>
@@ -7810,7 +8814,7 @@
                 <a:ea typeface="Aptos" pitchFamily="34" charset="-122"/>
                 <a:cs typeface="Aptos" pitchFamily="34" charset="-120"/>
               </a:rPr>
-              <a:t>Connect the concept to public health decisions, safeguards, documentation, or implementation work.</a:t>
+              <a:t>Use the assignment to test whether you can explain the concept, apply it to a realistic public health situation, and identify what would need review before the work moves forward.</a:t>
             </a:r>
             <a:endParaRPr lang="en-US" sz="1550" dirty="0"/>
           </a:p>
@@ -7984,8 +8988,8 @@
         </p:nvSpPr>
         <p:spPr>
           <a:xfrm>
-            <a:off x="9966960" y="6537960"/>
-            <a:ext cx="1645920" cy="201168"/>
+            <a:off x="9646920" y="6537960"/>
+            <a:ext cx="1965960" cy="201168"/>
           </a:xfrm>
           <a:prstGeom prst="rect">
             <a:avLst/>
@@ -8009,7 +9013,7 @@
                 <a:ea typeface="Aptos" pitchFamily="34" charset="-122"/>
                 <a:cs typeface="Aptos" pitchFamily="34" charset="-120"/>
               </a:rPr>
-              <a:t>Â© Paula Soper</a:t>
+              <a:t>Copyright Paula Soper</a:t>
             </a:r>
             <a:endParaRPr lang="en-US" sz="800" dirty="0"/>
           </a:p>
@@ -8056,77 +9060,13 @@
       </p:sp>
       <p:sp>
         <p:nvSpPr>
-          <p:cNvPr id="8" name="Shape 6"/>
+          <p:cNvPr id="8" name="Text 6"/>
           <p:cNvSpPr/>
           <p:nvPr/>
         </p:nvSpPr>
         <p:spPr>
           <a:xfrm>
             <a:off x="640080" y="658368"/>
-            <a:ext cx="420624" cy="420624"/>
-          </a:xfrm>
-          <a:prstGeom prst="ellipse">
-            <a:avLst/>
-          </a:prstGeom>
-          <a:solidFill>
-            <a:srgbClr val="0068B7"/>
-          </a:solidFill>
-          <a:ln w="12700">
-            <a:solidFill>
-              <a:srgbClr val="0068B7"/>
-            </a:solidFill>
-            <a:prstDash val="solid"/>
-          </a:ln>
-        </p:spPr>
-      </p:sp>
-      <p:sp>
-        <p:nvSpPr>
-          <p:cNvPr id="9" name="Text 7"/>
-          <p:cNvSpPr/>
-          <p:nvPr/>
-        </p:nvSpPr>
-        <p:spPr>
-          <a:xfrm>
-            <a:off x="640080" y="731520"/>
-            <a:ext cx="420624" cy="164592"/>
-          </a:xfrm>
-          <a:prstGeom prst="rect">
-            <a:avLst/>
-          </a:prstGeom>
-          <a:noFill/>
-          <a:ln/>
-        </p:spPr>
-        <p:txBody>
-          <a:bodyPr wrap="square" lIns="0" tIns="0" rIns="0" bIns="0" rtlCol="0" anchor="ctr"/>
-          <a:lstStyle/>
-          <a:p>
-            <a:pPr algn="ctr" indent="0" marL="0">
-              <a:buNone/>
-            </a:pPr>
-            <a:r>
-              <a:rPr lang="en-US" sz="1100" b="1" dirty="0">
-                <a:solidFill>
-                  <a:srgbClr val="FFFFFF"/>
-                </a:solidFill>
-                <a:latin typeface="Aptos" pitchFamily="34" charset="0"/>
-                <a:ea typeface="Aptos" pitchFamily="34" charset="-122"/>
-                <a:cs typeface="Aptos" pitchFamily="34" charset="-120"/>
-              </a:rPr>
-              <a:t>10</a:t>
-            </a:r>
-            <a:endParaRPr lang="en-US" sz="1100" dirty="0"/>
-          </a:p>
-        </p:txBody>
-      </p:sp>
-      <p:sp>
-        <p:nvSpPr>
-          <p:cNvPr id="10" name="Text 8"/>
-          <p:cNvSpPr/>
-          <p:nvPr/>
-        </p:nvSpPr>
-        <p:spPr>
-          <a:xfrm>
-            <a:off x="640080" y="621792"/>
             <a:ext cx="10881360" cy="713232"/>
           </a:xfrm>
           <a:prstGeom prst="rect">
@@ -8161,14 +9101,14 @@
       </p:sp>
       <p:sp>
         <p:nvSpPr>
-          <p:cNvPr id="11" name="Text 9"/>
+          <p:cNvPr id="9" name="Text 7"/>
           <p:cNvSpPr/>
           <p:nvPr/>
         </p:nvSpPr>
         <p:spPr>
           <a:xfrm>
             <a:off x="868680" y="1508760"/>
-            <a:ext cx="6537960" cy="4160520"/>
+            <a:ext cx="6309360" cy="4160520"/>
           </a:xfrm>
           <a:prstGeom prst="rect">
             <a:avLst/>
@@ -8227,18 +9167,18 @@
       </p:sp>
       <p:sp>
         <p:nvSpPr>
-          <p:cNvPr id="12" name="Shape 10"/>
-          <p:cNvSpPr/>
-          <p:nvPr/>
-        </p:nvSpPr>
-        <p:spPr>
-          <a:xfrm>
-            <a:off x="7909560" y="1417320"/>
-            <a:ext cx="3154680" cy="1828800"/>
+          <p:cNvPr id="10" name="Shape 8"/>
+          <p:cNvSpPr/>
+          <p:nvPr/>
+        </p:nvSpPr>
+        <p:spPr>
+          <a:xfrm>
+            <a:off x="7635240" y="1325880"/>
+            <a:ext cx="3474720" cy="1325880"/>
           </a:xfrm>
           <a:prstGeom prst="roundRect">
             <a:avLst>
-              <a:gd name="adj" fmla="val 6000"/>
+              <a:gd name="adj" fmla="val 8276"/>
             </a:avLst>
           </a:prstGeom>
           <a:solidFill>
@@ -8254,14 +9194,14 @@
       </p:sp>
       <p:sp>
         <p:nvSpPr>
-          <p:cNvPr id="13" name="Text 11"/>
-          <p:cNvSpPr/>
-          <p:nvPr/>
-        </p:nvSpPr>
-        <p:spPr>
-          <a:xfrm>
-            <a:off x="8074152" y="1563624"/>
-            <a:ext cx="2825496" cy="256032"/>
+          <p:cNvPr id="11" name="Text 9"/>
+          <p:cNvSpPr/>
+          <p:nvPr/>
+        </p:nvSpPr>
+        <p:spPr>
+          <a:xfrm>
+            <a:off x="7799832" y="1472184"/>
+            <a:ext cx="3145536" cy="256032"/>
           </a:xfrm>
           <a:prstGeom prst="rect">
             <a:avLst/>
@@ -8285,7 +9225,7 @@
                 <a:ea typeface="Aptos" pitchFamily="34" charset="-122"/>
                 <a:cs typeface="Aptos" pitchFamily="34" charset="-120"/>
               </a:rPr>
-              <a:t>Key idea</a:t>
+              <a:t>Core concept</a:t>
             </a:r>
             <a:endParaRPr lang="en-US" sz="1300" dirty="0"/>
           </a:p>
@@ -8293,14 +9233,14 @@
       </p:sp>
       <p:sp>
         <p:nvSpPr>
-          <p:cNvPr id="14" name="Text 12"/>
-          <p:cNvSpPr/>
-          <p:nvPr/>
-        </p:nvSpPr>
-        <p:spPr>
-          <a:xfrm>
-            <a:off x="8074152" y="1920240"/>
-            <a:ext cx="2825496" cy="1188720"/>
+          <p:cNvPr id="12" name="Text 10"/>
+          <p:cNvSpPr/>
+          <p:nvPr/>
+        </p:nvSpPr>
+        <p:spPr>
+          <a:xfrm>
+            <a:off x="7799832" y="1828800"/>
+            <a:ext cx="3145536" cy="685800"/>
           </a:xfrm>
           <a:prstGeom prst="rect">
             <a:avLst/>
@@ -8334,18 +9274,159 @@
       </p:sp>
       <p:sp>
         <p:nvSpPr>
-          <p:cNvPr id="15" name="Shape 13"/>
-          <p:cNvSpPr/>
-          <p:nvPr/>
-        </p:nvSpPr>
-        <p:spPr>
-          <a:xfrm>
-            <a:off x="7909560" y="3520440"/>
-            <a:ext cx="3154680" cy="1737360"/>
+          <p:cNvPr id="13" name="Shape 11"/>
+          <p:cNvSpPr/>
+          <p:nvPr/>
+        </p:nvSpPr>
+        <p:spPr>
+          <a:xfrm>
+            <a:off x="7635240" y="2788920"/>
+            <a:ext cx="3474720" cy="1536192"/>
           </a:xfrm>
           <a:prstGeom prst="roundRect">
             <a:avLst>
-              <a:gd name="adj" fmla="val 6316"/>
+              <a:gd name="adj" fmla="val 7143"/>
+            </a:avLst>
+          </a:prstGeom>
+          <a:solidFill>
+            <a:srgbClr val="FFFFFF">
+              <a:alpha val="88000"/>
+            </a:srgbClr>
+          </a:solidFill>
+          <a:ln w="12700">
+            <a:solidFill>
+              <a:srgbClr val="D6E8F2"/>
+            </a:solidFill>
+            <a:prstDash val="solid"/>
+          </a:ln>
+        </p:spPr>
+      </p:sp>
+      <p:sp>
+        <p:nvSpPr>
+          <p:cNvPr id="14" name="Shape 12"/>
+          <p:cNvSpPr/>
+          <p:nvPr/>
+        </p:nvSpPr>
+        <p:spPr>
+          <a:xfrm>
+            <a:off x="8074152" y="3291840"/>
+            <a:ext cx="2596896" cy="749808"/>
+          </a:xfrm>
+          <a:prstGeom prst="rect">
+            <a:avLst/>
+          </a:prstGeom>
+          <a:solidFill>
+            <a:srgbClr val="EAF6F8"/>
+          </a:solidFill>
+          <a:ln w="12700">
+            <a:solidFill>
+              <a:srgbClr val="8ABBD8"/>
+            </a:solidFill>
+            <a:prstDash val="solid"/>
+          </a:ln>
+        </p:spPr>
+      </p:sp>
+      <p:sp>
+        <p:nvSpPr>
+          <p:cNvPr id="15" name="Shape 13"/>
+          <p:cNvSpPr/>
+          <p:nvPr/>
+        </p:nvSpPr>
+        <p:spPr>
+          <a:xfrm>
+            <a:off x="8202168" y="3721608"/>
+            <a:ext cx="2340864" cy="0"/>
+          </a:xfrm>
+          <a:prstGeom prst="line">
+            <a:avLst/>
+          </a:prstGeom>
+          <a:noFill/>
+          <a:ln w="19050">
+            <a:solidFill>
+              <a:srgbClr val="0068B7"/>
+            </a:solidFill>
+            <a:prstDash val="solid"/>
+          </a:ln>
+        </p:spPr>
+      </p:sp>
+      <p:sp>
+        <p:nvSpPr>
+          <p:cNvPr id="16" name="Shape 14"/>
+          <p:cNvSpPr/>
+          <p:nvPr/>
+        </p:nvSpPr>
+        <p:spPr>
+          <a:xfrm>
+            <a:off x="9198864" y="4206240"/>
+            <a:ext cx="347472" cy="347472"/>
+          </a:xfrm>
+          <a:prstGeom prst="ellipse">
+            <a:avLst/>
+          </a:prstGeom>
+          <a:solidFill>
+            <a:srgbClr val="2F8A28"/>
+          </a:solidFill>
+          <a:ln w="12700">
+            <a:solidFill>
+              <a:srgbClr val="2F8A28"/>
+            </a:solidFill>
+            <a:prstDash val="solid"/>
+          </a:ln>
+        </p:spPr>
+      </p:sp>
+      <p:sp>
+        <p:nvSpPr>
+          <p:cNvPr id="17" name="Text 15"/>
+          <p:cNvSpPr/>
+          <p:nvPr/>
+        </p:nvSpPr>
+        <p:spPr>
+          <a:xfrm>
+            <a:off x="7909560" y="3977640"/>
+            <a:ext cx="2926080" cy="182880"/>
+          </a:xfrm>
+          <a:prstGeom prst="rect">
+            <a:avLst/>
+          </a:prstGeom>
+          <a:noFill/>
+          <a:ln/>
+        </p:spPr>
+        <p:txBody>
+          <a:bodyPr wrap="square" lIns="0" tIns="0" rIns="0" bIns="0" rtlCol="0" anchor="ctr"/>
+          <a:lstStyle/>
+          <a:p>
+            <a:pPr algn="ctr" indent="0" marL="0">
+              <a:buNone/>
+            </a:pPr>
+            <a:r>
+              <a:rPr lang="en-US" sz="1000" dirty="0">
+                <a:solidFill>
+                  <a:srgbClr val="003A63"/>
+                </a:solidFill>
+                <a:latin typeface="Aptos" pitchFamily="34" charset="0"/>
+                <a:ea typeface="Aptos" pitchFamily="34" charset="-122"/>
+                <a:cs typeface="Aptos" pitchFamily="34" charset="-120"/>
+              </a:rPr>
+              <a:t>Concept to action</a:t>
+            </a:r>
+            <a:endParaRPr lang="en-US" sz="1000" dirty="0"/>
+          </a:p>
+        </p:txBody>
+      </p:sp>
+      <p:sp>
+        <p:nvSpPr>
+          <p:cNvPr id="18" name="Shape 16"/>
+          <p:cNvSpPr/>
+          <p:nvPr/>
+        </p:nvSpPr>
+        <p:spPr>
+          <a:xfrm>
+            <a:off x="7635240" y="4498848"/>
+            <a:ext cx="3474720" cy="1143000"/>
+          </a:xfrm>
+          <a:prstGeom prst="roundRect">
+            <a:avLst>
+              <a:gd name="adj" fmla="val 9600"/>
             </a:avLst>
           </a:prstGeom>
           <a:solidFill>
@@ -8361,14 +9442,14 @@
       </p:sp>
       <p:sp>
         <p:nvSpPr>
-          <p:cNvPr id="16" name="Text 14"/>
-          <p:cNvSpPr/>
-          <p:nvPr/>
-        </p:nvSpPr>
-        <p:spPr>
-          <a:xfrm>
-            <a:off x="8074152" y="3666744"/>
-            <a:ext cx="2825496" cy="256032"/>
+          <p:cNvPr id="19" name="Text 17"/>
+          <p:cNvSpPr/>
+          <p:nvPr/>
+        </p:nvSpPr>
+        <p:spPr>
+          <a:xfrm>
+            <a:off x="7799832" y="4645152"/>
+            <a:ext cx="3145536" cy="256032"/>
           </a:xfrm>
           <a:prstGeom prst="rect">
             <a:avLst/>
@@ -8392,7 +9473,7 @@
                 <a:ea typeface="Aptos" pitchFamily="34" charset="-122"/>
                 <a:cs typeface="Aptos" pitchFamily="34" charset="-120"/>
               </a:rPr>
-              <a:t>Use this for</a:t>
+              <a:t>Apply it</a:t>
             </a:r>
             <a:endParaRPr lang="en-US" sz="1300" dirty="0"/>
           </a:p>
@@ -8400,14 +9481,14 @@
       </p:sp>
       <p:sp>
         <p:nvSpPr>
-          <p:cNvPr id="17" name="Text 15"/>
-          <p:cNvSpPr/>
-          <p:nvPr/>
-        </p:nvSpPr>
-        <p:spPr>
-          <a:xfrm>
-            <a:off x="8074152" y="4023360"/>
-            <a:ext cx="2825496" cy="1097280"/>
+          <p:cNvPr id="20" name="Text 18"/>
+          <p:cNvSpPr/>
+          <p:nvPr/>
+        </p:nvSpPr>
+        <p:spPr>
+          <a:xfrm>
+            <a:off x="7799832" y="5001768"/>
+            <a:ext cx="3145536" cy="502920"/>
           </a:xfrm>
           <a:prstGeom prst="rect">
             <a:avLst/>
@@ -8433,7 +9514,7 @@
                 <a:ea typeface="Aptos" pitchFamily="34" charset="-122"/>
                 <a:cs typeface="Aptos" pitchFamily="34" charset="-120"/>
               </a:rPr>
-              <a:t>Connect the concept to public health decisions, safeguards, documentation, or implementation work.</a:t>
+              <a:t>Connect the concept to public health purpose, responsible use, required safeguards, documentation, and the next action a department should take.</a:t>
             </a:r>
             <a:endParaRPr lang="en-US" sz="1550" dirty="0"/>
           </a:p>
@@ -8607,8 +9688,8 @@
         </p:nvSpPr>
         <p:spPr>
           <a:xfrm>
-            <a:off x="9966960" y="6537960"/>
-            <a:ext cx="1645920" cy="201168"/>
+            <a:off x="9646920" y="6537960"/>
+            <a:ext cx="1965960" cy="201168"/>
           </a:xfrm>
           <a:prstGeom prst="rect">
             <a:avLst/>
@@ -8632,7 +9713,7 @@
                 <a:ea typeface="Aptos" pitchFamily="34" charset="-122"/>
                 <a:cs typeface="Aptos" pitchFamily="34" charset="-120"/>
               </a:rPr>
-              <a:t>Â© Paula Soper</a:t>
+              <a:t>Copyright Paula Soper</a:t>
             </a:r>
             <a:endParaRPr lang="en-US" sz="800" dirty="0"/>
           </a:p>
@@ -8727,7 +9808,7 @@
         <p:spPr>
           <a:xfrm>
             <a:off x="868680" y="1508760"/>
-            <a:ext cx="6537960" cy="4160520"/>
+            <a:ext cx="6309360" cy="4160520"/>
           </a:xfrm>
           <a:prstGeom prst="rect">
             <a:avLst/>
@@ -8764,12 +9845,12 @@
         </p:nvSpPr>
         <p:spPr>
           <a:xfrm>
-            <a:off x="7909560" y="1417320"/>
-            <a:ext cx="3154680" cy="1828800"/>
+            <a:off x="7635240" y="1325880"/>
+            <a:ext cx="3474720" cy="1325880"/>
           </a:xfrm>
           <a:prstGeom prst="roundRect">
             <a:avLst>
-              <a:gd name="adj" fmla="val 6000"/>
+              <a:gd name="adj" fmla="val 8276"/>
             </a:avLst>
           </a:prstGeom>
           <a:solidFill>
@@ -8791,8 +9872,8 @@
         </p:nvSpPr>
         <p:spPr>
           <a:xfrm>
-            <a:off x="8074152" y="1563624"/>
-            <a:ext cx="2825496" cy="256032"/>
+            <a:off x="7799832" y="1472184"/>
+            <a:ext cx="3145536" cy="256032"/>
           </a:xfrm>
           <a:prstGeom prst="rect">
             <a:avLst/>
@@ -8816,7 +9897,7 @@
                 <a:ea typeface="Aptos" pitchFamily="34" charset="-122"/>
                 <a:cs typeface="Aptos" pitchFamily="34" charset="-120"/>
               </a:rPr>
-              <a:t>Key idea</a:t>
+              <a:t>Core concept</a:t>
             </a:r>
             <a:endParaRPr lang="en-US" sz="1300" dirty="0"/>
           </a:p>
@@ -8830,8 +9911,8 @@
         </p:nvSpPr>
         <p:spPr>
           <a:xfrm>
-            <a:off x="8074152" y="1920240"/>
-            <a:ext cx="2825496" cy="1188720"/>
+            <a:off x="7799832" y="1828800"/>
+            <a:ext cx="3145536" cy="685800"/>
           </a:xfrm>
           <a:prstGeom prst="rect">
             <a:avLst/>
@@ -8871,12 +9952,153 @@
         </p:nvSpPr>
         <p:spPr>
           <a:xfrm>
-            <a:off x="7909560" y="3520440"/>
-            <a:ext cx="3154680" cy="1737360"/>
+            <a:off x="7635240" y="2788920"/>
+            <a:ext cx="3474720" cy="1536192"/>
           </a:xfrm>
           <a:prstGeom prst="roundRect">
             <a:avLst>
-              <a:gd name="adj" fmla="val 6316"/>
+              <a:gd name="adj" fmla="val 7143"/>
+            </a:avLst>
+          </a:prstGeom>
+          <a:solidFill>
+            <a:srgbClr val="FFFFFF">
+              <a:alpha val="88000"/>
+            </a:srgbClr>
+          </a:solidFill>
+          <a:ln w="12700">
+            <a:solidFill>
+              <a:srgbClr val="D6E8F2"/>
+            </a:solidFill>
+            <a:prstDash val="solid"/>
+          </a:ln>
+        </p:spPr>
+      </p:sp>
+      <p:sp>
+        <p:nvSpPr>
+          <p:cNvPr id="14" name="Shape 12"/>
+          <p:cNvSpPr/>
+          <p:nvPr/>
+        </p:nvSpPr>
+        <p:spPr>
+          <a:xfrm>
+            <a:off x="8074152" y="3291840"/>
+            <a:ext cx="2596896" cy="749808"/>
+          </a:xfrm>
+          <a:prstGeom prst="rect">
+            <a:avLst/>
+          </a:prstGeom>
+          <a:solidFill>
+            <a:srgbClr val="EAF6F8"/>
+          </a:solidFill>
+          <a:ln w="12700">
+            <a:solidFill>
+              <a:srgbClr val="8ABBD8"/>
+            </a:solidFill>
+            <a:prstDash val="solid"/>
+          </a:ln>
+        </p:spPr>
+      </p:sp>
+      <p:sp>
+        <p:nvSpPr>
+          <p:cNvPr id="15" name="Shape 13"/>
+          <p:cNvSpPr/>
+          <p:nvPr/>
+        </p:nvSpPr>
+        <p:spPr>
+          <a:xfrm>
+            <a:off x="8202168" y="3721608"/>
+            <a:ext cx="2340864" cy="0"/>
+          </a:xfrm>
+          <a:prstGeom prst="line">
+            <a:avLst/>
+          </a:prstGeom>
+          <a:noFill/>
+          <a:ln w="19050">
+            <a:solidFill>
+              <a:srgbClr val="0068B7"/>
+            </a:solidFill>
+            <a:prstDash val="solid"/>
+          </a:ln>
+        </p:spPr>
+      </p:sp>
+      <p:sp>
+        <p:nvSpPr>
+          <p:cNvPr id="16" name="Shape 14"/>
+          <p:cNvSpPr/>
+          <p:nvPr/>
+        </p:nvSpPr>
+        <p:spPr>
+          <a:xfrm>
+            <a:off x="9198864" y="4206240"/>
+            <a:ext cx="347472" cy="347472"/>
+          </a:xfrm>
+          <a:prstGeom prst="ellipse">
+            <a:avLst/>
+          </a:prstGeom>
+          <a:solidFill>
+            <a:srgbClr val="2F8A28"/>
+          </a:solidFill>
+          <a:ln w="12700">
+            <a:solidFill>
+              <a:srgbClr val="2F8A28"/>
+            </a:solidFill>
+            <a:prstDash val="solid"/>
+          </a:ln>
+        </p:spPr>
+      </p:sp>
+      <p:sp>
+        <p:nvSpPr>
+          <p:cNvPr id="17" name="Text 15"/>
+          <p:cNvSpPr/>
+          <p:nvPr/>
+        </p:nvSpPr>
+        <p:spPr>
+          <a:xfrm>
+            <a:off x="7909560" y="3977640"/>
+            <a:ext cx="2926080" cy="182880"/>
+          </a:xfrm>
+          <a:prstGeom prst="rect">
+            <a:avLst/>
+          </a:prstGeom>
+          <a:noFill/>
+          <a:ln/>
+        </p:spPr>
+        <p:txBody>
+          <a:bodyPr wrap="square" lIns="0" tIns="0" rIns="0" bIns="0" rtlCol="0" anchor="ctr"/>
+          <a:lstStyle/>
+          <a:p>
+            <a:pPr algn="ctr" indent="0" marL="0">
+              <a:buNone/>
+            </a:pPr>
+            <a:r>
+              <a:rPr lang="en-US" sz="1000" dirty="0">
+                <a:solidFill>
+                  <a:srgbClr val="003A63"/>
+                </a:solidFill>
+                <a:latin typeface="Aptos" pitchFamily="34" charset="0"/>
+                <a:ea typeface="Aptos" pitchFamily="34" charset="-122"/>
+                <a:cs typeface="Aptos" pitchFamily="34" charset="-120"/>
+              </a:rPr>
+              <a:t>Concept to action</a:t>
+            </a:r>
+            <a:endParaRPr lang="en-US" sz="1000" dirty="0"/>
+          </a:p>
+        </p:txBody>
+      </p:sp>
+      <p:sp>
+        <p:nvSpPr>
+          <p:cNvPr id="18" name="Shape 16"/>
+          <p:cNvSpPr/>
+          <p:nvPr/>
+        </p:nvSpPr>
+        <p:spPr>
+          <a:xfrm>
+            <a:off x="7635240" y="4498848"/>
+            <a:ext cx="3474720" cy="1143000"/>
+          </a:xfrm>
+          <a:prstGeom prst="roundRect">
+            <a:avLst>
+              <a:gd name="adj" fmla="val 9600"/>
             </a:avLst>
           </a:prstGeom>
           <a:solidFill>
@@ -8892,14 +10114,14 @@
       </p:sp>
       <p:sp>
         <p:nvSpPr>
-          <p:cNvPr id="14" name="Text 12"/>
-          <p:cNvSpPr/>
-          <p:nvPr/>
-        </p:nvSpPr>
-        <p:spPr>
-          <a:xfrm>
-            <a:off x="8074152" y="3666744"/>
-            <a:ext cx="2825496" cy="256032"/>
+          <p:cNvPr id="19" name="Text 17"/>
+          <p:cNvSpPr/>
+          <p:nvPr/>
+        </p:nvSpPr>
+        <p:spPr>
+          <a:xfrm>
+            <a:off x="7799832" y="4645152"/>
+            <a:ext cx="3145536" cy="256032"/>
           </a:xfrm>
           <a:prstGeom prst="rect">
             <a:avLst/>
@@ -8923,7 +10145,7 @@
                 <a:ea typeface="Aptos" pitchFamily="34" charset="-122"/>
                 <a:cs typeface="Aptos" pitchFamily="34" charset="-120"/>
               </a:rPr>
-              <a:t>Use this for</a:t>
+              <a:t>Apply it</a:t>
             </a:r>
             <a:endParaRPr lang="en-US" sz="1300" dirty="0"/>
           </a:p>
@@ -8931,14 +10153,14 @@
       </p:sp>
       <p:sp>
         <p:nvSpPr>
-          <p:cNvPr id="15" name="Text 13"/>
-          <p:cNvSpPr/>
-          <p:nvPr/>
-        </p:nvSpPr>
-        <p:spPr>
-          <a:xfrm>
-            <a:off x="8074152" y="4023360"/>
-            <a:ext cx="2825496" cy="1097280"/>
+          <p:cNvPr id="20" name="Text 18"/>
+          <p:cNvSpPr/>
+          <p:nvPr/>
+        </p:nvSpPr>
+        <p:spPr>
+          <a:xfrm>
+            <a:off x="7799832" y="5001768"/>
+            <a:ext cx="3145536" cy="502920"/>
           </a:xfrm>
           <a:prstGeom prst="rect">
             <a:avLst/>
@@ -8964,7 +10186,7 @@
                 <a:ea typeface="Aptos" pitchFamily="34" charset="-122"/>
                 <a:cs typeface="Aptos" pitchFamily="34" charset="-120"/>
               </a:rPr>
-              <a:t>Connect the concept to public health decisions, safeguards, documentation, or implementation work.</a:t>
+              <a:t>Connect the concept to public health purpose, responsible use, required safeguards, documentation, and the next action a department should take.</a:t>
             </a:r>
             <a:endParaRPr lang="en-US" sz="1550" dirty="0"/>
           </a:p>
@@ -9138,8 +10360,8 @@
         </p:nvSpPr>
         <p:spPr>
           <a:xfrm>
-            <a:off x="9966960" y="6537960"/>
-            <a:ext cx="1645920" cy="201168"/>
+            <a:off x="9646920" y="6537960"/>
+            <a:ext cx="1965960" cy="201168"/>
           </a:xfrm>
           <a:prstGeom prst="rect">
             <a:avLst/>
@@ -9163,7 +10385,7 @@
                 <a:ea typeface="Aptos" pitchFamily="34" charset="-122"/>
                 <a:cs typeface="Aptos" pitchFamily="34" charset="-120"/>
               </a:rPr>
-              <a:t>Â© Paula Soper</a:t>
+              <a:t>Copyright Paula Soper</a:t>
             </a:r>
             <a:endParaRPr lang="en-US" sz="800" dirty="0"/>
           </a:p>
@@ -9526,46 +10748,7 @@
       </p:sp>
       <p:sp>
         <p:nvSpPr>
-          <p:cNvPr id="15" name="Text 13"/>
-          <p:cNvSpPr/>
-          <p:nvPr/>
-        </p:nvSpPr>
-        <p:spPr>
-          <a:xfrm>
-            <a:off x="8695944" y="3941064"/>
-            <a:ext cx="201168" cy="256032"/>
-          </a:xfrm>
-          <a:prstGeom prst="rect">
-            <a:avLst/>
-          </a:prstGeom>
-          <a:noFill/>
-          <a:ln/>
-        </p:spPr>
-        <p:txBody>
-          <a:bodyPr wrap="square" lIns="0" tIns="0" rIns="0" bIns="0" rtlCol="0" anchor="ctr"/>
-          <a:lstStyle/>
-          <a:p>
-            <a:pPr algn="ctr" indent="0" marL="0">
-              <a:buNone/>
-            </a:pPr>
-            <a:r>
-              <a:rPr lang="en-US" sz="1800" b="1" dirty="0">
-                <a:solidFill>
-                  <a:srgbClr val="0068B7"/>
-                </a:solidFill>
-                <a:latin typeface="Aptos" pitchFamily="34" charset="0"/>
-                <a:ea typeface="Aptos" pitchFamily="34" charset="-122"/>
-                <a:cs typeface="Aptos" pitchFamily="34" charset="-120"/>
-              </a:rPr>
-              <a:t>â†’</a:t>
-            </a:r>
-            <a:endParaRPr lang="en-US" sz="1800" dirty="0"/>
-          </a:p>
-        </p:txBody>
-      </p:sp>
-      <p:sp>
-        <p:nvSpPr>
-          <p:cNvPr id="16" name="Shape 14"/>
+          <p:cNvPr id="15" name="Shape 13"/>
           <p:cNvSpPr/>
           <p:nvPr/>
         </p:nvSpPr>
@@ -9592,7 +10775,7 @@
       </p:sp>
       <p:sp>
         <p:nvSpPr>
-          <p:cNvPr id="17" name="Text 15"/>
+          <p:cNvPr id="16" name="Text 14"/>
           <p:cNvSpPr/>
           <p:nvPr/>
         </p:nvSpPr>
@@ -9633,46 +10816,7 @@
       </p:sp>
       <p:sp>
         <p:nvSpPr>
-          <p:cNvPr id="18" name="Text 16"/>
-          <p:cNvSpPr/>
-          <p:nvPr/>
-        </p:nvSpPr>
-        <p:spPr>
-          <a:xfrm>
-            <a:off x="9985248" y="3941064"/>
-            <a:ext cx="201168" cy="256032"/>
-          </a:xfrm>
-          <a:prstGeom prst="rect">
-            <a:avLst/>
-          </a:prstGeom>
-          <a:noFill/>
-          <a:ln/>
-        </p:spPr>
-        <p:txBody>
-          <a:bodyPr wrap="square" lIns="0" tIns="0" rIns="0" bIns="0" rtlCol="0" anchor="ctr"/>
-          <a:lstStyle/>
-          <a:p>
-            <a:pPr algn="ctr" indent="0" marL="0">
-              <a:buNone/>
-            </a:pPr>
-            <a:r>
-              <a:rPr lang="en-US" sz="1800" b="1" dirty="0">
-                <a:solidFill>
-                  <a:srgbClr val="0068B7"/>
-                </a:solidFill>
-                <a:latin typeface="Aptos" pitchFamily="34" charset="0"/>
-                <a:ea typeface="Aptos" pitchFamily="34" charset="-122"/>
-                <a:cs typeface="Aptos" pitchFamily="34" charset="-120"/>
-              </a:rPr>
-              <a:t>â†’</a:t>
-            </a:r>
-            <a:endParaRPr lang="en-US" sz="1800" dirty="0"/>
-          </a:p>
-        </p:txBody>
-      </p:sp>
-      <p:sp>
-        <p:nvSpPr>
-          <p:cNvPr id="19" name="Shape 17"/>
+          <p:cNvPr id="17" name="Shape 15"/>
           <p:cNvSpPr/>
           <p:nvPr/>
         </p:nvSpPr>
@@ -9699,7 +10843,7 @@
       </p:sp>
       <p:sp>
         <p:nvSpPr>
-          <p:cNvPr id="20" name="Text 18"/>
+          <p:cNvPr id="18" name="Text 16"/>
           <p:cNvSpPr/>
           <p:nvPr/>
         </p:nvSpPr>
@@ -9906,8 +11050,8 @@
         </p:nvSpPr>
         <p:spPr>
           <a:xfrm>
-            <a:off x="9966960" y="6537960"/>
-            <a:ext cx="1645920" cy="201168"/>
+            <a:off x="9646920" y="6537960"/>
+            <a:ext cx="1965960" cy="201168"/>
           </a:xfrm>
           <a:prstGeom prst="rect">
             <a:avLst/>
@@ -9931,7 +11075,7 @@
                 <a:ea typeface="Aptos" pitchFamily="34" charset="-122"/>
                 <a:cs typeface="Aptos" pitchFamily="34" charset="-120"/>
               </a:rPr>
-              <a:t>Â© Paula Soper</a:t>
+              <a:t>Copyright Paula Soper</a:t>
             </a:r>
             <a:endParaRPr lang="en-US" sz="800" dirty="0"/>
           </a:p>
@@ -9978,77 +11122,13 @@
       </p:sp>
       <p:sp>
         <p:nvSpPr>
-          <p:cNvPr id="8" name="Shape 6"/>
+          <p:cNvPr id="8" name="Text 6"/>
           <p:cNvSpPr/>
           <p:nvPr/>
         </p:nvSpPr>
         <p:spPr>
           <a:xfrm>
             <a:off x="640080" y="658368"/>
-            <a:ext cx="420624" cy="420624"/>
-          </a:xfrm>
-          <a:prstGeom prst="ellipse">
-            <a:avLst/>
-          </a:prstGeom>
-          <a:solidFill>
-            <a:srgbClr val="0068B7"/>
-          </a:solidFill>
-          <a:ln w="12700">
-            <a:solidFill>
-              <a:srgbClr val="0068B7"/>
-            </a:solidFill>
-            <a:prstDash val="solid"/>
-          </a:ln>
-        </p:spPr>
-      </p:sp>
-      <p:sp>
-        <p:nvSpPr>
-          <p:cNvPr id="9" name="Text 7"/>
-          <p:cNvSpPr/>
-          <p:nvPr/>
-        </p:nvSpPr>
-        <p:spPr>
-          <a:xfrm>
-            <a:off x="640080" y="731520"/>
-            <a:ext cx="420624" cy="164592"/>
-          </a:xfrm>
-          <a:prstGeom prst="rect">
-            <a:avLst/>
-          </a:prstGeom>
-          <a:noFill/>
-          <a:ln/>
-        </p:spPr>
-        <p:txBody>
-          <a:bodyPr wrap="square" lIns="0" tIns="0" rIns="0" bIns="0" rtlCol="0" anchor="ctr"/>
-          <a:lstStyle/>
-          <a:p>
-            <a:pPr algn="ctr" indent="0" marL="0">
-              <a:buNone/>
-            </a:pPr>
-            <a:r>
-              <a:rPr lang="en-US" sz="1100" b="1" dirty="0">
-                <a:solidFill>
-                  <a:srgbClr val="FFFFFF"/>
-                </a:solidFill>
-                <a:latin typeface="Aptos" pitchFamily="34" charset="0"/>
-                <a:ea typeface="Aptos" pitchFamily="34" charset="-122"/>
-                <a:cs typeface="Aptos" pitchFamily="34" charset="-120"/>
-              </a:rPr>
-              <a:t>11</a:t>
-            </a:r>
-            <a:endParaRPr lang="en-US" sz="1100" dirty="0"/>
-          </a:p>
-        </p:txBody>
-      </p:sp>
-      <p:sp>
-        <p:nvSpPr>
-          <p:cNvPr id="10" name="Text 8"/>
-          <p:cNvSpPr/>
-          <p:nvPr/>
-        </p:nvSpPr>
-        <p:spPr>
-          <a:xfrm>
-            <a:off x="640080" y="621792"/>
             <a:ext cx="10881360" cy="713232"/>
           </a:xfrm>
           <a:prstGeom prst="rect">
@@ -10083,14 +11163,14 @@
       </p:sp>
       <p:sp>
         <p:nvSpPr>
-          <p:cNvPr id="11" name="Text 9"/>
+          <p:cNvPr id="9" name="Text 7"/>
           <p:cNvSpPr/>
           <p:nvPr/>
         </p:nvSpPr>
         <p:spPr>
           <a:xfrm>
             <a:off x="868680" y="1508760"/>
-            <a:ext cx="6537960" cy="4160520"/>
+            <a:ext cx="6309360" cy="4160520"/>
           </a:xfrm>
           <a:prstGeom prst="rect">
             <a:avLst/>
@@ -10149,18 +11229,18 @@
       </p:sp>
       <p:sp>
         <p:nvSpPr>
-          <p:cNvPr id="12" name="Shape 10"/>
-          <p:cNvSpPr/>
-          <p:nvPr/>
-        </p:nvSpPr>
-        <p:spPr>
-          <a:xfrm>
-            <a:off x="7909560" y="1417320"/>
-            <a:ext cx="3154680" cy="1828800"/>
+          <p:cNvPr id="10" name="Shape 8"/>
+          <p:cNvSpPr/>
+          <p:nvPr/>
+        </p:nvSpPr>
+        <p:spPr>
+          <a:xfrm>
+            <a:off x="7635240" y="1325880"/>
+            <a:ext cx="3474720" cy="1325880"/>
           </a:xfrm>
           <a:prstGeom prst="roundRect">
             <a:avLst>
-              <a:gd name="adj" fmla="val 6000"/>
+              <a:gd name="adj" fmla="val 8276"/>
             </a:avLst>
           </a:prstGeom>
           <a:solidFill>
@@ -10176,14 +11256,14 @@
       </p:sp>
       <p:sp>
         <p:nvSpPr>
-          <p:cNvPr id="13" name="Text 11"/>
-          <p:cNvSpPr/>
-          <p:nvPr/>
-        </p:nvSpPr>
-        <p:spPr>
-          <a:xfrm>
-            <a:off x="8074152" y="1563624"/>
-            <a:ext cx="2825496" cy="256032"/>
+          <p:cNvPr id="11" name="Text 9"/>
+          <p:cNvSpPr/>
+          <p:nvPr/>
+        </p:nvSpPr>
+        <p:spPr>
+          <a:xfrm>
+            <a:off x="7799832" y="1472184"/>
+            <a:ext cx="3145536" cy="256032"/>
           </a:xfrm>
           <a:prstGeom prst="rect">
             <a:avLst/>
@@ -10207,7 +11287,7 @@
                 <a:ea typeface="Aptos" pitchFamily="34" charset="-122"/>
                 <a:cs typeface="Aptos" pitchFamily="34" charset="-120"/>
               </a:rPr>
-              <a:t>Key idea</a:t>
+              <a:t>Practice focus</a:t>
             </a:r>
             <a:endParaRPr lang="en-US" sz="1300" dirty="0"/>
           </a:p>
@@ -10215,14 +11295,14 @@
       </p:sp>
       <p:sp>
         <p:nvSpPr>
-          <p:cNvPr id="14" name="Text 12"/>
-          <p:cNvSpPr/>
-          <p:nvPr/>
-        </p:nvSpPr>
-        <p:spPr>
-          <a:xfrm>
-            <a:off x="8074152" y="1920240"/>
-            <a:ext cx="2825496" cy="1188720"/>
+          <p:cNvPr id="12" name="Text 10"/>
+          <p:cNvSpPr/>
+          <p:nvPr/>
+        </p:nvSpPr>
+        <p:spPr>
+          <a:xfrm>
+            <a:off x="7799832" y="1828800"/>
+            <a:ext cx="3145536" cy="685800"/>
           </a:xfrm>
           <a:prstGeom prst="rect">
             <a:avLst/>
@@ -10256,18 +11336,159 @@
       </p:sp>
       <p:sp>
         <p:nvSpPr>
-          <p:cNvPr id="15" name="Shape 13"/>
-          <p:cNvSpPr/>
-          <p:nvPr/>
-        </p:nvSpPr>
-        <p:spPr>
-          <a:xfrm>
-            <a:off x="7909560" y="3520440"/>
-            <a:ext cx="3154680" cy="1737360"/>
+          <p:cNvPr id="13" name="Shape 11"/>
+          <p:cNvSpPr/>
+          <p:nvPr/>
+        </p:nvSpPr>
+        <p:spPr>
+          <a:xfrm>
+            <a:off x="7635240" y="2788920"/>
+            <a:ext cx="3474720" cy="1536192"/>
           </a:xfrm>
           <a:prstGeom prst="roundRect">
             <a:avLst>
-              <a:gd name="adj" fmla="val 6316"/>
+              <a:gd name="adj" fmla="val 7143"/>
+            </a:avLst>
+          </a:prstGeom>
+          <a:solidFill>
+            <a:srgbClr val="FFFFFF">
+              <a:alpha val="88000"/>
+            </a:srgbClr>
+          </a:solidFill>
+          <a:ln w="12700">
+            <a:solidFill>
+              <a:srgbClr val="D6E8F2"/>
+            </a:solidFill>
+            <a:prstDash val="solid"/>
+          </a:ln>
+        </p:spPr>
+      </p:sp>
+      <p:sp>
+        <p:nvSpPr>
+          <p:cNvPr id="14" name="Shape 12"/>
+          <p:cNvSpPr/>
+          <p:nvPr/>
+        </p:nvSpPr>
+        <p:spPr>
+          <a:xfrm>
+            <a:off x="8074152" y="3291840"/>
+            <a:ext cx="2596896" cy="749808"/>
+          </a:xfrm>
+          <a:prstGeom prst="rect">
+            <a:avLst/>
+          </a:prstGeom>
+          <a:solidFill>
+            <a:srgbClr val="EAF6F8"/>
+          </a:solidFill>
+          <a:ln w="12700">
+            <a:solidFill>
+              <a:srgbClr val="8ABBD8"/>
+            </a:solidFill>
+            <a:prstDash val="solid"/>
+          </a:ln>
+        </p:spPr>
+      </p:sp>
+      <p:sp>
+        <p:nvSpPr>
+          <p:cNvPr id="15" name="Shape 13"/>
+          <p:cNvSpPr/>
+          <p:nvPr/>
+        </p:nvSpPr>
+        <p:spPr>
+          <a:xfrm>
+            <a:off x="8202168" y="3721608"/>
+            <a:ext cx="2340864" cy="0"/>
+          </a:xfrm>
+          <a:prstGeom prst="line">
+            <a:avLst/>
+          </a:prstGeom>
+          <a:noFill/>
+          <a:ln w="19050">
+            <a:solidFill>
+              <a:srgbClr val="0068B7"/>
+            </a:solidFill>
+            <a:prstDash val="solid"/>
+          </a:ln>
+        </p:spPr>
+      </p:sp>
+      <p:sp>
+        <p:nvSpPr>
+          <p:cNvPr id="16" name="Shape 14"/>
+          <p:cNvSpPr/>
+          <p:nvPr/>
+        </p:nvSpPr>
+        <p:spPr>
+          <a:xfrm>
+            <a:off x="9198864" y="4206240"/>
+            <a:ext cx="347472" cy="347472"/>
+          </a:xfrm>
+          <a:prstGeom prst="ellipse">
+            <a:avLst/>
+          </a:prstGeom>
+          <a:solidFill>
+            <a:srgbClr val="2F8A28"/>
+          </a:solidFill>
+          <a:ln w="12700">
+            <a:solidFill>
+              <a:srgbClr val="2F8A28"/>
+            </a:solidFill>
+            <a:prstDash val="solid"/>
+          </a:ln>
+        </p:spPr>
+      </p:sp>
+      <p:sp>
+        <p:nvSpPr>
+          <p:cNvPr id="17" name="Text 15"/>
+          <p:cNvSpPr/>
+          <p:nvPr/>
+        </p:nvSpPr>
+        <p:spPr>
+          <a:xfrm>
+            <a:off x="7909560" y="3977640"/>
+            <a:ext cx="2926080" cy="182880"/>
+          </a:xfrm>
+          <a:prstGeom prst="rect">
+            <a:avLst/>
+          </a:prstGeom>
+          <a:noFill/>
+          <a:ln/>
+        </p:spPr>
+        <p:txBody>
+          <a:bodyPr wrap="square" lIns="0" tIns="0" rIns="0" bIns="0" rtlCol="0" anchor="ctr"/>
+          <a:lstStyle/>
+          <a:p>
+            <a:pPr algn="ctr" indent="0" marL="0">
+              <a:buNone/>
+            </a:pPr>
+            <a:r>
+              <a:rPr lang="en-US" sz="1000" dirty="0">
+                <a:solidFill>
+                  <a:srgbClr val="003A63"/>
+                </a:solidFill>
+                <a:latin typeface="Aptos" pitchFamily="34" charset="0"/>
+                <a:ea typeface="Aptos" pitchFamily="34" charset="-122"/>
+                <a:cs typeface="Aptos" pitchFamily="34" charset="-120"/>
+              </a:rPr>
+              <a:t>Concept to action</a:t>
+            </a:r>
+            <a:endParaRPr lang="en-US" sz="1000" dirty="0"/>
+          </a:p>
+        </p:txBody>
+      </p:sp>
+      <p:sp>
+        <p:nvSpPr>
+          <p:cNvPr id="18" name="Shape 16"/>
+          <p:cNvSpPr/>
+          <p:nvPr/>
+        </p:nvSpPr>
+        <p:spPr>
+          <a:xfrm>
+            <a:off x="7635240" y="4498848"/>
+            <a:ext cx="3474720" cy="1143000"/>
+          </a:xfrm>
+          <a:prstGeom prst="roundRect">
+            <a:avLst>
+              <a:gd name="adj" fmla="val 9600"/>
             </a:avLst>
           </a:prstGeom>
           <a:solidFill>
@@ -10283,14 +11504,14 @@
       </p:sp>
       <p:sp>
         <p:nvSpPr>
-          <p:cNvPr id="16" name="Text 14"/>
-          <p:cNvSpPr/>
-          <p:nvPr/>
-        </p:nvSpPr>
-        <p:spPr>
-          <a:xfrm>
-            <a:off x="8074152" y="3666744"/>
-            <a:ext cx="2825496" cy="256032"/>
+          <p:cNvPr id="19" name="Text 17"/>
+          <p:cNvSpPr/>
+          <p:nvPr/>
+        </p:nvSpPr>
+        <p:spPr>
+          <a:xfrm>
+            <a:off x="7799832" y="4645152"/>
+            <a:ext cx="3145536" cy="256032"/>
           </a:xfrm>
           <a:prstGeom prst="rect">
             <a:avLst/>
@@ -10314,7 +11535,7 @@
                 <a:ea typeface="Aptos" pitchFamily="34" charset="-122"/>
                 <a:cs typeface="Aptos" pitchFamily="34" charset="-120"/>
               </a:rPr>
-              <a:t>Use this for</a:t>
+              <a:t>What to produce</a:t>
             </a:r>
             <a:endParaRPr lang="en-US" sz="1300" dirty="0"/>
           </a:p>
@@ -10322,14 +11543,14 @@
       </p:sp>
       <p:sp>
         <p:nvSpPr>
-          <p:cNvPr id="17" name="Text 15"/>
-          <p:cNvSpPr/>
-          <p:nvPr/>
-        </p:nvSpPr>
-        <p:spPr>
-          <a:xfrm>
-            <a:off x="8074152" y="4023360"/>
-            <a:ext cx="2825496" cy="1097280"/>
+          <p:cNvPr id="20" name="Text 18"/>
+          <p:cNvSpPr/>
+          <p:nvPr/>
+        </p:nvSpPr>
+        <p:spPr>
+          <a:xfrm>
+            <a:off x="7799832" y="5001768"/>
+            <a:ext cx="3145536" cy="502920"/>
           </a:xfrm>
           <a:prstGeom prst="rect">
             <a:avLst/>
@@ -10355,7 +11576,7 @@
                 <a:ea typeface="Aptos" pitchFamily="34" charset="-122"/>
                 <a:cs typeface="Aptos" pitchFamily="34" charset="-120"/>
               </a:rPr>
-              <a:t>Connect the concept to public health decisions, safeguards, documentation, or implementation work.</a:t>
+              <a:t>Use the assignment to test whether you can explain the concept, apply it to a realistic public health situation, and identify what would need review before the work moves forward.</a:t>
             </a:r>
             <a:endParaRPr lang="en-US" sz="1550" dirty="0"/>
           </a:p>
@@ -10529,8 +11750,8 @@
         </p:nvSpPr>
         <p:spPr>
           <a:xfrm>
-            <a:off x="9966960" y="6537960"/>
-            <a:ext cx="1645920" cy="201168"/>
+            <a:off x="9646920" y="6537960"/>
+            <a:ext cx="1965960" cy="201168"/>
           </a:xfrm>
           <a:prstGeom prst="rect">
             <a:avLst/>
@@ -10554,7 +11775,7 @@
                 <a:ea typeface="Aptos" pitchFamily="34" charset="-122"/>
                 <a:cs typeface="Aptos" pitchFamily="34" charset="-120"/>
               </a:rPr>
-              <a:t>Â© Paula Soper</a:t>
+              <a:t>Copyright Paula Soper</a:t>
             </a:r>
             <a:endParaRPr lang="en-US" sz="800" dirty="0"/>
           </a:p>
@@ -10601,77 +11822,13 @@
       </p:sp>
       <p:sp>
         <p:nvSpPr>
-          <p:cNvPr id="8" name="Shape 6"/>
+          <p:cNvPr id="8" name="Text 6"/>
           <p:cNvSpPr/>
           <p:nvPr/>
         </p:nvSpPr>
         <p:spPr>
           <a:xfrm>
             <a:off x="640080" y="658368"/>
-            <a:ext cx="420624" cy="420624"/>
-          </a:xfrm>
-          <a:prstGeom prst="ellipse">
-            <a:avLst/>
-          </a:prstGeom>
-          <a:solidFill>
-            <a:srgbClr val="0068B7"/>
-          </a:solidFill>
-          <a:ln w="12700">
-            <a:solidFill>
-              <a:srgbClr val="0068B7"/>
-            </a:solidFill>
-            <a:prstDash val="solid"/>
-          </a:ln>
-        </p:spPr>
-      </p:sp>
-      <p:sp>
-        <p:nvSpPr>
-          <p:cNvPr id="9" name="Text 7"/>
-          <p:cNvSpPr/>
-          <p:nvPr/>
-        </p:nvSpPr>
-        <p:spPr>
-          <a:xfrm>
-            <a:off x="640080" y="731520"/>
-            <a:ext cx="420624" cy="164592"/>
-          </a:xfrm>
-          <a:prstGeom prst="rect">
-            <a:avLst/>
-          </a:prstGeom>
-          <a:noFill/>
-          <a:ln/>
-        </p:spPr>
-        <p:txBody>
-          <a:bodyPr wrap="square" lIns="0" tIns="0" rIns="0" bIns="0" rtlCol="0" anchor="ctr"/>
-          <a:lstStyle/>
-          <a:p>
-            <a:pPr algn="ctr" indent="0" marL="0">
-              <a:buNone/>
-            </a:pPr>
-            <a:r>
-              <a:rPr lang="en-US" sz="1100" b="1" dirty="0">
-                <a:solidFill>
-                  <a:srgbClr val="FFFFFF"/>
-                </a:solidFill>
-                <a:latin typeface="Aptos" pitchFamily="34" charset="0"/>
-                <a:ea typeface="Aptos" pitchFamily="34" charset="-122"/>
-                <a:cs typeface="Aptos" pitchFamily="34" charset="-120"/>
-              </a:rPr>
-              <a:t>12</a:t>
-            </a:r>
-            <a:endParaRPr lang="en-US" sz="1100" dirty="0"/>
-          </a:p>
-        </p:txBody>
-      </p:sp>
-      <p:sp>
-        <p:nvSpPr>
-          <p:cNvPr id="10" name="Text 8"/>
-          <p:cNvSpPr/>
-          <p:nvPr/>
-        </p:nvSpPr>
-        <p:spPr>
-          <a:xfrm>
-            <a:off x="640080" y="621792"/>
             <a:ext cx="10881360" cy="713232"/>
           </a:xfrm>
           <a:prstGeom prst="rect">
@@ -10706,14 +11863,14 @@
       </p:sp>
       <p:sp>
         <p:nvSpPr>
-          <p:cNvPr id="11" name="Text 9"/>
+          <p:cNvPr id="9" name="Text 7"/>
           <p:cNvSpPr/>
           <p:nvPr/>
         </p:nvSpPr>
         <p:spPr>
           <a:xfrm>
             <a:off x="868680" y="1508760"/>
-            <a:ext cx="6537960" cy="4160520"/>
+            <a:ext cx="6309360" cy="4160520"/>
           </a:xfrm>
           <a:prstGeom prst="rect">
             <a:avLst/>
@@ -10772,18 +11929,18 @@
       </p:sp>
       <p:sp>
         <p:nvSpPr>
-          <p:cNvPr id="12" name="Shape 10"/>
-          <p:cNvSpPr/>
-          <p:nvPr/>
-        </p:nvSpPr>
-        <p:spPr>
-          <a:xfrm>
-            <a:off x="7909560" y="1417320"/>
-            <a:ext cx="3154680" cy="1828800"/>
+          <p:cNvPr id="10" name="Shape 8"/>
+          <p:cNvSpPr/>
+          <p:nvPr/>
+        </p:nvSpPr>
+        <p:spPr>
+          <a:xfrm>
+            <a:off x="7635240" y="1325880"/>
+            <a:ext cx="3474720" cy="1325880"/>
           </a:xfrm>
           <a:prstGeom prst="roundRect">
             <a:avLst>
-              <a:gd name="adj" fmla="val 6000"/>
+              <a:gd name="adj" fmla="val 8276"/>
             </a:avLst>
           </a:prstGeom>
           <a:solidFill>
@@ -10799,14 +11956,14 @@
       </p:sp>
       <p:sp>
         <p:nvSpPr>
-          <p:cNvPr id="13" name="Text 11"/>
-          <p:cNvSpPr/>
-          <p:nvPr/>
-        </p:nvSpPr>
-        <p:spPr>
-          <a:xfrm>
-            <a:off x="8074152" y="1563624"/>
-            <a:ext cx="2825496" cy="256032"/>
+          <p:cNvPr id="11" name="Text 9"/>
+          <p:cNvSpPr/>
+          <p:nvPr/>
+        </p:nvSpPr>
+        <p:spPr>
+          <a:xfrm>
+            <a:off x="7799832" y="1472184"/>
+            <a:ext cx="3145536" cy="256032"/>
           </a:xfrm>
           <a:prstGeom prst="rect">
             <a:avLst/>
@@ -10830,7 +11987,7 @@
                 <a:ea typeface="Aptos" pitchFamily="34" charset="-122"/>
                 <a:cs typeface="Aptos" pitchFamily="34" charset="-120"/>
               </a:rPr>
-              <a:t>Key idea</a:t>
+              <a:t>Practice focus</a:t>
             </a:r>
             <a:endParaRPr lang="en-US" sz="1300" dirty="0"/>
           </a:p>
@@ -10838,14 +11995,14 @@
       </p:sp>
       <p:sp>
         <p:nvSpPr>
-          <p:cNvPr id="14" name="Text 12"/>
-          <p:cNvSpPr/>
-          <p:nvPr/>
-        </p:nvSpPr>
-        <p:spPr>
-          <a:xfrm>
-            <a:off x="8074152" y="1920240"/>
-            <a:ext cx="2825496" cy="1188720"/>
+          <p:cNvPr id="12" name="Text 10"/>
+          <p:cNvSpPr/>
+          <p:nvPr/>
+        </p:nvSpPr>
+        <p:spPr>
+          <a:xfrm>
+            <a:off x="7799832" y="1828800"/>
+            <a:ext cx="3145536" cy="685800"/>
           </a:xfrm>
           <a:prstGeom prst="rect">
             <a:avLst/>
@@ -10879,18 +12036,159 @@
       </p:sp>
       <p:sp>
         <p:nvSpPr>
-          <p:cNvPr id="15" name="Shape 13"/>
-          <p:cNvSpPr/>
-          <p:nvPr/>
-        </p:nvSpPr>
-        <p:spPr>
-          <a:xfrm>
-            <a:off x="7909560" y="3520440"/>
-            <a:ext cx="3154680" cy="1737360"/>
+          <p:cNvPr id="13" name="Shape 11"/>
+          <p:cNvSpPr/>
+          <p:nvPr/>
+        </p:nvSpPr>
+        <p:spPr>
+          <a:xfrm>
+            <a:off x="7635240" y="2788920"/>
+            <a:ext cx="3474720" cy="1536192"/>
           </a:xfrm>
           <a:prstGeom prst="roundRect">
             <a:avLst>
-              <a:gd name="adj" fmla="val 6316"/>
+              <a:gd name="adj" fmla="val 7143"/>
+            </a:avLst>
+          </a:prstGeom>
+          <a:solidFill>
+            <a:srgbClr val="FFFFFF">
+              <a:alpha val="88000"/>
+            </a:srgbClr>
+          </a:solidFill>
+          <a:ln w="12700">
+            <a:solidFill>
+              <a:srgbClr val="D6E8F2"/>
+            </a:solidFill>
+            <a:prstDash val="solid"/>
+          </a:ln>
+        </p:spPr>
+      </p:sp>
+      <p:sp>
+        <p:nvSpPr>
+          <p:cNvPr id="14" name="Shape 12"/>
+          <p:cNvSpPr/>
+          <p:nvPr/>
+        </p:nvSpPr>
+        <p:spPr>
+          <a:xfrm>
+            <a:off x="8074152" y="3291840"/>
+            <a:ext cx="2596896" cy="749808"/>
+          </a:xfrm>
+          <a:prstGeom prst="rect">
+            <a:avLst/>
+          </a:prstGeom>
+          <a:solidFill>
+            <a:srgbClr val="EAF6F8"/>
+          </a:solidFill>
+          <a:ln w="12700">
+            <a:solidFill>
+              <a:srgbClr val="8ABBD8"/>
+            </a:solidFill>
+            <a:prstDash val="solid"/>
+          </a:ln>
+        </p:spPr>
+      </p:sp>
+      <p:sp>
+        <p:nvSpPr>
+          <p:cNvPr id="15" name="Shape 13"/>
+          <p:cNvSpPr/>
+          <p:nvPr/>
+        </p:nvSpPr>
+        <p:spPr>
+          <a:xfrm>
+            <a:off x="8202168" y="3721608"/>
+            <a:ext cx="2340864" cy="0"/>
+          </a:xfrm>
+          <a:prstGeom prst="line">
+            <a:avLst/>
+          </a:prstGeom>
+          <a:noFill/>
+          <a:ln w="19050">
+            <a:solidFill>
+              <a:srgbClr val="0068B7"/>
+            </a:solidFill>
+            <a:prstDash val="solid"/>
+          </a:ln>
+        </p:spPr>
+      </p:sp>
+      <p:sp>
+        <p:nvSpPr>
+          <p:cNvPr id="16" name="Shape 14"/>
+          <p:cNvSpPr/>
+          <p:nvPr/>
+        </p:nvSpPr>
+        <p:spPr>
+          <a:xfrm>
+            <a:off x="9198864" y="4206240"/>
+            <a:ext cx="347472" cy="347472"/>
+          </a:xfrm>
+          <a:prstGeom prst="ellipse">
+            <a:avLst/>
+          </a:prstGeom>
+          <a:solidFill>
+            <a:srgbClr val="2F8A28"/>
+          </a:solidFill>
+          <a:ln w="12700">
+            <a:solidFill>
+              <a:srgbClr val="2F8A28"/>
+            </a:solidFill>
+            <a:prstDash val="solid"/>
+          </a:ln>
+        </p:spPr>
+      </p:sp>
+      <p:sp>
+        <p:nvSpPr>
+          <p:cNvPr id="17" name="Text 15"/>
+          <p:cNvSpPr/>
+          <p:nvPr/>
+        </p:nvSpPr>
+        <p:spPr>
+          <a:xfrm>
+            <a:off x="7909560" y="3977640"/>
+            <a:ext cx="2926080" cy="182880"/>
+          </a:xfrm>
+          <a:prstGeom prst="rect">
+            <a:avLst/>
+          </a:prstGeom>
+          <a:noFill/>
+          <a:ln/>
+        </p:spPr>
+        <p:txBody>
+          <a:bodyPr wrap="square" lIns="0" tIns="0" rIns="0" bIns="0" rtlCol="0" anchor="ctr"/>
+          <a:lstStyle/>
+          <a:p>
+            <a:pPr algn="ctr" indent="0" marL="0">
+              <a:buNone/>
+            </a:pPr>
+            <a:r>
+              <a:rPr lang="en-US" sz="1000" dirty="0">
+                <a:solidFill>
+                  <a:srgbClr val="003A63"/>
+                </a:solidFill>
+                <a:latin typeface="Aptos" pitchFamily="34" charset="0"/>
+                <a:ea typeface="Aptos" pitchFamily="34" charset="-122"/>
+                <a:cs typeface="Aptos" pitchFamily="34" charset="-120"/>
+              </a:rPr>
+              <a:t>Concept to action</a:t>
+            </a:r>
+            <a:endParaRPr lang="en-US" sz="1000" dirty="0"/>
+          </a:p>
+        </p:txBody>
+      </p:sp>
+      <p:sp>
+        <p:nvSpPr>
+          <p:cNvPr id="18" name="Shape 16"/>
+          <p:cNvSpPr/>
+          <p:nvPr/>
+        </p:nvSpPr>
+        <p:spPr>
+          <a:xfrm>
+            <a:off x="7635240" y="4498848"/>
+            <a:ext cx="3474720" cy="1143000"/>
+          </a:xfrm>
+          <a:prstGeom prst="roundRect">
+            <a:avLst>
+              <a:gd name="adj" fmla="val 9600"/>
             </a:avLst>
           </a:prstGeom>
           <a:solidFill>
@@ -10906,14 +12204,14 @@
       </p:sp>
       <p:sp>
         <p:nvSpPr>
-          <p:cNvPr id="16" name="Text 14"/>
-          <p:cNvSpPr/>
-          <p:nvPr/>
-        </p:nvSpPr>
-        <p:spPr>
-          <a:xfrm>
-            <a:off x="8074152" y="3666744"/>
-            <a:ext cx="2825496" cy="256032"/>
+          <p:cNvPr id="19" name="Text 17"/>
+          <p:cNvSpPr/>
+          <p:nvPr/>
+        </p:nvSpPr>
+        <p:spPr>
+          <a:xfrm>
+            <a:off x="7799832" y="4645152"/>
+            <a:ext cx="3145536" cy="256032"/>
           </a:xfrm>
           <a:prstGeom prst="rect">
             <a:avLst/>
@@ -10937,7 +12235,7 @@
                 <a:ea typeface="Aptos" pitchFamily="34" charset="-122"/>
                 <a:cs typeface="Aptos" pitchFamily="34" charset="-120"/>
               </a:rPr>
-              <a:t>Use this for</a:t>
+              <a:t>What to produce</a:t>
             </a:r>
             <a:endParaRPr lang="en-US" sz="1300" dirty="0"/>
           </a:p>
@@ -10945,14 +12243,14 @@
       </p:sp>
       <p:sp>
         <p:nvSpPr>
-          <p:cNvPr id="17" name="Text 15"/>
-          <p:cNvSpPr/>
-          <p:nvPr/>
-        </p:nvSpPr>
-        <p:spPr>
-          <a:xfrm>
-            <a:off x="8074152" y="4023360"/>
-            <a:ext cx="2825496" cy="1097280"/>
+          <p:cNvPr id="20" name="Text 18"/>
+          <p:cNvSpPr/>
+          <p:nvPr/>
+        </p:nvSpPr>
+        <p:spPr>
+          <a:xfrm>
+            <a:off x="7799832" y="5001768"/>
+            <a:ext cx="3145536" cy="502920"/>
           </a:xfrm>
           <a:prstGeom prst="rect">
             <a:avLst/>
@@ -10978,7 +12276,7 @@
                 <a:ea typeface="Aptos" pitchFamily="34" charset="-122"/>
                 <a:cs typeface="Aptos" pitchFamily="34" charset="-120"/>
               </a:rPr>
-              <a:t>Connect the concept to public health decisions, safeguards, documentation, or implementation work.</a:t>
+              <a:t>Use the assignment to test whether you can explain the concept, apply it to a realistic public health situation, and identify what would need review before the work moves forward.</a:t>
             </a:r>
             <a:endParaRPr lang="en-US" sz="1550" dirty="0"/>
           </a:p>
@@ -11152,8 +12450,8 @@
         </p:nvSpPr>
         <p:spPr>
           <a:xfrm>
-            <a:off x="9966960" y="6537960"/>
-            <a:ext cx="1645920" cy="201168"/>
+            <a:off x="9646920" y="6537960"/>
+            <a:ext cx="1965960" cy="201168"/>
           </a:xfrm>
           <a:prstGeom prst="rect">
             <a:avLst/>
@@ -11177,7 +12475,7 @@
                 <a:ea typeface="Aptos" pitchFamily="34" charset="-122"/>
                 <a:cs typeface="Aptos" pitchFamily="34" charset="-120"/>
               </a:rPr>
-              <a:t>Â© Paula Soper</a:t>
+              <a:t>Copyright Paula Soper</a:t>
             </a:r>
             <a:endParaRPr lang="en-US" sz="800" dirty="0"/>
           </a:p>
@@ -11224,77 +12522,13 @@
       </p:sp>
       <p:sp>
         <p:nvSpPr>
-          <p:cNvPr id="8" name="Shape 6"/>
+          <p:cNvPr id="8" name="Text 6"/>
           <p:cNvSpPr/>
           <p:nvPr/>
         </p:nvSpPr>
         <p:spPr>
           <a:xfrm>
             <a:off x="640080" y="658368"/>
-            <a:ext cx="420624" cy="420624"/>
-          </a:xfrm>
-          <a:prstGeom prst="ellipse">
-            <a:avLst/>
-          </a:prstGeom>
-          <a:solidFill>
-            <a:srgbClr val="0068B7"/>
-          </a:solidFill>
-          <a:ln w="12700">
-            <a:solidFill>
-              <a:srgbClr val="0068B7"/>
-            </a:solidFill>
-            <a:prstDash val="solid"/>
-          </a:ln>
-        </p:spPr>
-      </p:sp>
-      <p:sp>
-        <p:nvSpPr>
-          <p:cNvPr id="9" name="Text 7"/>
-          <p:cNvSpPr/>
-          <p:nvPr/>
-        </p:nvSpPr>
-        <p:spPr>
-          <a:xfrm>
-            <a:off x="640080" y="731520"/>
-            <a:ext cx="420624" cy="164592"/>
-          </a:xfrm>
-          <a:prstGeom prst="rect">
-            <a:avLst/>
-          </a:prstGeom>
-          <a:noFill/>
-          <a:ln/>
-        </p:spPr>
-        <p:txBody>
-          <a:bodyPr wrap="square" lIns="0" tIns="0" rIns="0" bIns="0" rtlCol="0" anchor="ctr"/>
-          <a:lstStyle/>
-          <a:p>
-            <a:pPr algn="ctr" indent="0" marL="0">
-              <a:buNone/>
-            </a:pPr>
-            <a:r>
-              <a:rPr lang="en-US" sz="1100" b="1" dirty="0">
-                <a:solidFill>
-                  <a:srgbClr val="FFFFFF"/>
-                </a:solidFill>
-                <a:latin typeface="Aptos" pitchFamily="34" charset="0"/>
-                <a:ea typeface="Aptos" pitchFamily="34" charset="-122"/>
-                <a:cs typeface="Aptos" pitchFamily="34" charset="-120"/>
-              </a:rPr>
-              <a:t>13</a:t>
-            </a:r>
-            <a:endParaRPr lang="en-US" sz="1100" dirty="0"/>
-          </a:p>
-        </p:txBody>
-      </p:sp>
-      <p:sp>
-        <p:nvSpPr>
-          <p:cNvPr id="10" name="Text 8"/>
-          <p:cNvSpPr/>
-          <p:nvPr/>
-        </p:nvSpPr>
-        <p:spPr>
-          <a:xfrm>
-            <a:off x="640080" y="621792"/>
             <a:ext cx="10881360" cy="713232"/>
           </a:xfrm>
           <a:prstGeom prst="rect">
@@ -11329,14 +12563,14 @@
       </p:sp>
       <p:sp>
         <p:nvSpPr>
-          <p:cNvPr id="11" name="Text 9"/>
+          <p:cNvPr id="9" name="Text 7"/>
           <p:cNvSpPr/>
           <p:nvPr/>
         </p:nvSpPr>
         <p:spPr>
           <a:xfrm>
             <a:off x="868680" y="1508760"/>
-            <a:ext cx="6537960" cy="4160520"/>
+            <a:ext cx="6309360" cy="4160520"/>
           </a:xfrm>
           <a:prstGeom prst="rect">
             <a:avLst/>
@@ -11395,18 +12629,18 @@
       </p:sp>
       <p:sp>
         <p:nvSpPr>
-          <p:cNvPr id="12" name="Shape 10"/>
-          <p:cNvSpPr/>
-          <p:nvPr/>
-        </p:nvSpPr>
-        <p:spPr>
-          <a:xfrm>
-            <a:off x="7909560" y="1417320"/>
-            <a:ext cx="3154680" cy="1828800"/>
+          <p:cNvPr id="10" name="Shape 8"/>
+          <p:cNvSpPr/>
+          <p:nvPr/>
+        </p:nvSpPr>
+        <p:spPr>
+          <a:xfrm>
+            <a:off x="7635240" y="1325880"/>
+            <a:ext cx="3474720" cy="1325880"/>
           </a:xfrm>
           <a:prstGeom prst="roundRect">
             <a:avLst>
-              <a:gd name="adj" fmla="val 6000"/>
+              <a:gd name="adj" fmla="val 8276"/>
             </a:avLst>
           </a:prstGeom>
           <a:solidFill>
@@ -11422,14 +12656,14 @@
       </p:sp>
       <p:sp>
         <p:nvSpPr>
-          <p:cNvPr id="13" name="Text 11"/>
-          <p:cNvSpPr/>
-          <p:nvPr/>
-        </p:nvSpPr>
-        <p:spPr>
-          <a:xfrm>
-            <a:off x="8074152" y="1563624"/>
-            <a:ext cx="2825496" cy="256032"/>
+          <p:cNvPr id="11" name="Text 9"/>
+          <p:cNvSpPr/>
+          <p:nvPr/>
+        </p:nvSpPr>
+        <p:spPr>
+          <a:xfrm>
+            <a:off x="7799832" y="1472184"/>
+            <a:ext cx="3145536" cy="256032"/>
           </a:xfrm>
           <a:prstGeom prst="rect">
             <a:avLst/>
@@ -11453,7 +12687,7 @@
                 <a:ea typeface="Aptos" pitchFamily="34" charset="-122"/>
                 <a:cs typeface="Aptos" pitchFamily="34" charset="-120"/>
               </a:rPr>
-              <a:t>Key idea</a:t>
+              <a:t>Core concept</a:t>
             </a:r>
             <a:endParaRPr lang="en-US" sz="1300" dirty="0"/>
           </a:p>
@@ -11461,14 +12695,14 @@
       </p:sp>
       <p:sp>
         <p:nvSpPr>
-          <p:cNvPr id="14" name="Text 12"/>
-          <p:cNvSpPr/>
-          <p:nvPr/>
-        </p:nvSpPr>
-        <p:spPr>
-          <a:xfrm>
-            <a:off x="8074152" y="1920240"/>
-            <a:ext cx="2825496" cy="1188720"/>
+          <p:cNvPr id="12" name="Text 10"/>
+          <p:cNvSpPr/>
+          <p:nvPr/>
+        </p:nvSpPr>
+        <p:spPr>
+          <a:xfrm>
+            <a:off x="7799832" y="1828800"/>
+            <a:ext cx="3145536" cy="685800"/>
           </a:xfrm>
           <a:prstGeom prst="rect">
             <a:avLst/>
@@ -11502,18 +12736,159 @@
       </p:sp>
       <p:sp>
         <p:nvSpPr>
-          <p:cNvPr id="15" name="Shape 13"/>
-          <p:cNvSpPr/>
-          <p:nvPr/>
-        </p:nvSpPr>
-        <p:spPr>
-          <a:xfrm>
-            <a:off x="7909560" y="3520440"/>
-            <a:ext cx="3154680" cy="1737360"/>
+          <p:cNvPr id="13" name="Shape 11"/>
+          <p:cNvSpPr/>
+          <p:nvPr/>
+        </p:nvSpPr>
+        <p:spPr>
+          <a:xfrm>
+            <a:off x="7635240" y="2788920"/>
+            <a:ext cx="3474720" cy="1536192"/>
           </a:xfrm>
           <a:prstGeom prst="roundRect">
             <a:avLst>
-              <a:gd name="adj" fmla="val 6316"/>
+              <a:gd name="adj" fmla="val 7143"/>
+            </a:avLst>
+          </a:prstGeom>
+          <a:solidFill>
+            <a:srgbClr val="FFFFFF">
+              <a:alpha val="88000"/>
+            </a:srgbClr>
+          </a:solidFill>
+          <a:ln w="12700">
+            <a:solidFill>
+              <a:srgbClr val="D6E8F2"/>
+            </a:solidFill>
+            <a:prstDash val="solid"/>
+          </a:ln>
+        </p:spPr>
+      </p:sp>
+      <p:sp>
+        <p:nvSpPr>
+          <p:cNvPr id="14" name="Shape 12"/>
+          <p:cNvSpPr/>
+          <p:nvPr/>
+        </p:nvSpPr>
+        <p:spPr>
+          <a:xfrm>
+            <a:off x="8074152" y="3291840"/>
+            <a:ext cx="2596896" cy="749808"/>
+          </a:xfrm>
+          <a:prstGeom prst="rect">
+            <a:avLst/>
+          </a:prstGeom>
+          <a:solidFill>
+            <a:srgbClr val="EAF6F8"/>
+          </a:solidFill>
+          <a:ln w="12700">
+            <a:solidFill>
+              <a:srgbClr val="8ABBD8"/>
+            </a:solidFill>
+            <a:prstDash val="solid"/>
+          </a:ln>
+        </p:spPr>
+      </p:sp>
+      <p:sp>
+        <p:nvSpPr>
+          <p:cNvPr id="15" name="Shape 13"/>
+          <p:cNvSpPr/>
+          <p:nvPr/>
+        </p:nvSpPr>
+        <p:spPr>
+          <a:xfrm>
+            <a:off x="8202168" y="3721608"/>
+            <a:ext cx="2340864" cy="0"/>
+          </a:xfrm>
+          <a:prstGeom prst="line">
+            <a:avLst/>
+          </a:prstGeom>
+          <a:noFill/>
+          <a:ln w="19050">
+            <a:solidFill>
+              <a:srgbClr val="0068B7"/>
+            </a:solidFill>
+            <a:prstDash val="solid"/>
+          </a:ln>
+        </p:spPr>
+      </p:sp>
+      <p:sp>
+        <p:nvSpPr>
+          <p:cNvPr id="16" name="Shape 14"/>
+          <p:cNvSpPr/>
+          <p:nvPr/>
+        </p:nvSpPr>
+        <p:spPr>
+          <a:xfrm>
+            <a:off x="9198864" y="4206240"/>
+            <a:ext cx="347472" cy="347472"/>
+          </a:xfrm>
+          <a:prstGeom prst="ellipse">
+            <a:avLst/>
+          </a:prstGeom>
+          <a:solidFill>
+            <a:srgbClr val="2F8A28"/>
+          </a:solidFill>
+          <a:ln w="12700">
+            <a:solidFill>
+              <a:srgbClr val="2F8A28"/>
+            </a:solidFill>
+            <a:prstDash val="solid"/>
+          </a:ln>
+        </p:spPr>
+      </p:sp>
+      <p:sp>
+        <p:nvSpPr>
+          <p:cNvPr id="17" name="Text 15"/>
+          <p:cNvSpPr/>
+          <p:nvPr/>
+        </p:nvSpPr>
+        <p:spPr>
+          <a:xfrm>
+            <a:off x="7909560" y="3977640"/>
+            <a:ext cx="2926080" cy="182880"/>
+          </a:xfrm>
+          <a:prstGeom prst="rect">
+            <a:avLst/>
+          </a:prstGeom>
+          <a:noFill/>
+          <a:ln/>
+        </p:spPr>
+        <p:txBody>
+          <a:bodyPr wrap="square" lIns="0" tIns="0" rIns="0" bIns="0" rtlCol="0" anchor="ctr"/>
+          <a:lstStyle/>
+          <a:p>
+            <a:pPr algn="ctr" indent="0" marL="0">
+              <a:buNone/>
+            </a:pPr>
+            <a:r>
+              <a:rPr lang="en-US" sz="1000" dirty="0">
+                <a:solidFill>
+                  <a:srgbClr val="003A63"/>
+                </a:solidFill>
+                <a:latin typeface="Aptos" pitchFamily="34" charset="0"/>
+                <a:ea typeface="Aptos" pitchFamily="34" charset="-122"/>
+                <a:cs typeface="Aptos" pitchFamily="34" charset="-120"/>
+              </a:rPr>
+              <a:t>Concept to action</a:t>
+            </a:r>
+            <a:endParaRPr lang="en-US" sz="1000" dirty="0"/>
+          </a:p>
+        </p:txBody>
+      </p:sp>
+      <p:sp>
+        <p:nvSpPr>
+          <p:cNvPr id="18" name="Shape 16"/>
+          <p:cNvSpPr/>
+          <p:nvPr/>
+        </p:nvSpPr>
+        <p:spPr>
+          <a:xfrm>
+            <a:off x="7635240" y="4498848"/>
+            <a:ext cx="3474720" cy="1143000"/>
+          </a:xfrm>
+          <a:prstGeom prst="roundRect">
+            <a:avLst>
+              <a:gd name="adj" fmla="val 9600"/>
             </a:avLst>
           </a:prstGeom>
           <a:solidFill>
@@ -11529,14 +12904,14 @@
       </p:sp>
       <p:sp>
         <p:nvSpPr>
-          <p:cNvPr id="16" name="Text 14"/>
-          <p:cNvSpPr/>
-          <p:nvPr/>
-        </p:nvSpPr>
-        <p:spPr>
-          <a:xfrm>
-            <a:off x="8074152" y="3666744"/>
-            <a:ext cx="2825496" cy="256032"/>
+          <p:cNvPr id="19" name="Text 17"/>
+          <p:cNvSpPr/>
+          <p:nvPr/>
+        </p:nvSpPr>
+        <p:spPr>
+          <a:xfrm>
+            <a:off x="7799832" y="4645152"/>
+            <a:ext cx="3145536" cy="256032"/>
           </a:xfrm>
           <a:prstGeom prst="rect">
             <a:avLst/>
@@ -11560,7 +12935,7 @@
                 <a:ea typeface="Aptos" pitchFamily="34" charset="-122"/>
                 <a:cs typeface="Aptos" pitchFamily="34" charset="-120"/>
               </a:rPr>
-              <a:t>Use this for</a:t>
+              <a:t>Apply it</a:t>
             </a:r>
             <a:endParaRPr lang="en-US" sz="1300" dirty="0"/>
           </a:p>
@@ -11568,14 +12943,14 @@
       </p:sp>
       <p:sp>
         <p:nvSpPr>
-          <p:cNvPr id="17" name="Text 15"/>
-          <p:cNvSpPr/>
-          <p:nvPr/>
-        </p:nvSpPr>
-        <p:spPr>
-          <a:xfrm>
-            <a:off x="8074152" y="4023360"/>
-            <a:ext cx="2825496" cy="1097280"/>
+          <p:cNvPr id="20" name="Text 18"/>
+          <p:cNvSpPr/>
+          <p:nvPr/>
+        </p:nvSpPr>
+        <p:spPr>
+          <a:xfrm>
+            <a:off x="7799832" y="5001768"/>
+            <a:ext cx="3145536" cy="502920"/>
           </a:xfrm>
           <a:prstGeom prst="rect">
             <a:avLst/>
@@ -11601,7 +12976,7 @@
                 <a:ea typeface="Aptos" pitchFamily="34" charset="-122"/>
                 <a:cs typeface="Aptos" pitchFamily="34" charset="-120"/>
               </a:rPr>
-              <a:t>Connect the concept to public health decisions, safeguards, documentation, or implementation work.</a:t>
+              <a:t>Connect the concept to public health purpose, responsible use, required safeguards, documentation, and the next action a department should take.</a:t>
             </a:r>
             <a:endParaRPr lang="en-US" sz="1550" dirty="0"/>
           </a:p>
@@ -11775,8 +13150,8 @@
         </p:nvSpPr>
         <p:spPr>
           <a:xfrm>
-            <a:off x="9966960" y="6537960"/>
-            <a:ext cx="1645920" cy="201168"/>
+            <a:off x="9646920" y="6537960"/>
+            <a:ext cx="1965960" cy="201168"/>
           </a:xfrm>
           <a:prstGeom prst="rect">
             <a:avLst/>
@@ -11800,7 +13175,7 @@
                 <a:ea typeface="Aptos" pitchFamily="34" charset="-122"/>
                 <a:cs typeface="Aptos" pitchFamily="34" charset="-120"/>
               </a:rPr>
-              <a:t>Â© Paula Soper</a:t>
+              <a:t>Copyright Paula Soper</a:t>
             </a:r>
             <a:endParaRPr lang="en-US" sz="800" dirty="0"/>
           </a:p>
@@ -12143,46 +13518,7 @@
       </p:sp>
       <p:sp>
         <p:nvSpPr>
-          <p:cNvPr id="15" name="Text 13"/>
-          <p:cNvSpPr/>
-          <p:nvPr/>
-        </p:nvSpPr>
-        <p:spPr>
-          <a:xfrm>
-            <a:off x="8817864" y="4187952"/>
-            <a:ext cx="201168" cy="256032"/>
-          </a:xfrm>
-          <a:prstGeom prst="rect">
-            <a:avLst/>
-          </a:prstGeom>
-          <a:noFill/>
-          <a:ln/>
-        </p:spPr>
-        <p:txBody>
-          <a:bodyPr wrap="square" lIns="0" tIns="0" rIns="0" bIns="0" rtlCol="0" anchor="ctr"/>
-          <a:lstStyle/>
-          <a:p>
-            <a:pPr algn="ctr" indent="0" marL="0">
-              <a:buNone/>
-            </a:pPr>
-            <a:r>
-              <a:rPr lang="en-US" sz="1800" b="1" dirty="0">
-                <a:solidFill>
-                  <a:srgbClr val="0068B7"/>
-                </a:solidFill>
-                <a:latin typeface="Aptos" pitchFamily="34" charset="0"/>
-                <a:ea typeface="Aptos" pitchFamily="34" charset="-122"/>
-                <a:cs typeface="Aptos" pitchFamily="34" charset="-120"/>
-              </a:rPr>
-              <a:t>â†’</a:t>
-            </a:r>
-            <a:endParaRPr lang="en-US" sz="1800" dirty="0"/>
-          </a:p>
-        </p:txBody>
-      </p:sp>
-      <p:sp>
-        <p:nvSpPr>
-          <p:cNvPr id="16" name="Shape 14"/>
+          <p:cNvPr id="15" name="Shape 13"/>
           <p:cNvSpPr/>
           <p:nvPr/>
         </p:nvSpPr>
@@ -12209,7 +13545,7 @@
       </p:sp>
       <p:sp>
         <p:nvSpPr>
-          <p:cNvPr id="17" name="Text 15"/>
+          <p:cNvPr id="16" name="Text 14"/>
           <p:cNvSpPr/>
           <p:nvPr/>
         </p:nvSpPr>
@@ -12250,46 +13586,7 @@
       </p:sp>
       <p:sp>
         <p:nvSpPr>
-          <p:cNvPr id="18" name="Text 16"/>
-          <p:cNvSpPr/>
-          <p:nvPr/>
-        </p:nvSpPr>
-        <p:spPr>
-          <a:xfrm>
-            <a:off x="10046208" y="4187952"/>
-            <a:ext cx="201168" cy="256032"/>
-          </a:xfrm>
-          <a:prstGeom prst="rect">
-            <a:avLst/>
-          </a:prstGeom>
-          <a:noFill/>
-          <a:ln/>
-        </p:spPr>
-        <p:txBody>
-          <a:bodyPr wrap="square" lIns="0" tIns="0" rIns="0" bIns="0" rtlCol="0" anchor="ctr"/>
-          <a:lstStyle/>
-          <a:p>
-            <a:pPr algn="ctr" indent="0" marL="0">
-              <a:buNone/>
-            </a:pPr>
-            <a:r>
-              <a:rPr lang="en-US" sz="1800" b="1" dirty="0">
-                <a:solidFill>
-                  <a:srgbClr val="0068B7"/>
-                </a:solidFill>
-                <a:latin typeface="Aptos" pitchFamily="34" charset="0"/>
-                <a:ea typeface="Aptos" pitchFamily="34" charset="-122"/>
-                <a:cs typeface="Aptos" pitchFamily="34" charset="-120"/>
-              </a:rPr>
-              <a:t>â†’</a:t>
-            </a:r>
-            <a:endParaRPr lang="en-US" sz="1800" dirty="0"/>
-          </a:p>
-        </p:txBody>
-      </p:sp>
-      <p:sp>
-        <p:nvSpPr>
-          <p:cNvPr id="19" name="Shape 17"/>
+          <p:cNvPr id="17" name="Shape 15"/>
           <p:cNvSpPr/>
           <p:nvPr/>
         </p:nvSpPr>
@@ -12316,7 +13613,7 @@
       </p:sp>
       <p:sp>
         <p:nvSpPr>
-          <p:cNvPr id="20" name="Text 18"/>
+          <p:cNvPr id="18" name="Text 16"/>
           <p:cNvSpPr/>
           <p:nvPr/>
         </p:nvSpPr>
@@ -12523,8 +13820,8 @@
         </p:nvSpPr>
         <p:spPr>
           <a:xfrm>
-            <a:off x="9966960" y="6537960"/>
-            <a:ext cx="1645920" cy="201168"/>
+            <a:off x="9646920" y="6537960"/>
+            <a:ext cx="1965960" cy="201168"/>
           </a:xfrm>
           <a:prstGeom prst="rect">
             <a:avLst/>
@@ -12548,7 +13845,7 @@
                 <a:ea typeface="Aptos" pitchFamily="34" charset="-122"/>
                 <a:cs typeface="Aptos" pitchFamily="34" charset="-120"/>
               </a:rPr>
-              <a:t>Â© Paula Soper</a:t>
+              <a:t>Copyright Paula Soper</a:t>
             </a:r>
             <a:endParaRPr lang="en-US" sz="800" dirty="0"/>
           </a:p>
@@ -12891,46 +14188,7 @@
       </p:sp>
       <p:sp>
         <p:nvSpPr>
-          <p:cNvPr id="15" name="Text 13"/>
-          <p:cNvSpPr/>
-          <p:nvPr/>
-        </p:nvSpPr>
-        <p:spPr>
-          <a:xfrm>
-            <a:off x="8817864" y="4187952"/>
-            <a:ext cx="201168" cy="256032"/>
-          </a:xfrm>
-          <a:prstGeom prst="rect">
-            <a:avLst/>
-          </a:prstGeom>
-          <a:noFill/>
-          <a:ln/>
-        </p:spPr>
-        <p:txBody>
-          <a:bodyPr wrap="square" lIns="0" tIns="0" rIns="0" bIns="0" rtlCol="0" anchor="ctr"/>
-          <a:lstStyle/>
-          <a:p>
-            <a:pPr algn="ctr" indent="0" marL="0">
-              <a:buNone/>
-            </a:pPr>
-            <a:r>
-              <a:rPr lang="en-US" sz="1800" b="1" dirty="0">
-                <a:solidFill>
-                  <a:srgbClr val="0068B7"/>
-                </a:solidFill>
-                <a:latin typeface="Aptos" pitchFamily="34" charset="0"/>
-                <a:ea typeface="Aptos" pitchFamily="34" charset="-122"/>
-                <a:cs typeface="Aptos" pitchFamily="34" charset="-120"/>
-              </a:rPr>
-              <a:t>â†’</a:t>
-            </a:r>
-            <a:endParaRPr lang="en-US" sz="1800" dirty="0"/>
-          </a:p>
-        </p:txBody>
-      </p:sp>
-      <p:sp>
-        <p:nvSpPr>
-          <p:cNvPr id="16" name="Shape 14"/>
+          <p:cNvPr id="15" name="Shape 13"/>
           <p:cNvSpPr/>
           <p:nvPr/>
         </p:nvSpPr>
@@ -12957,7 +14215,7 @@
       </p:sp>
       <p:sp>
         <p:nvSpPr>
-          <p:cNvPr id="17" name="Text 15"/>
+          <p:cNvPr id="16" name="Text 14"/>
           <p:cNvSpPr/>
           <p:nvPr/>
         </p:nvSpPr>
@@ -12998,46 +14256,7 @@
       </p:sp>
       <p:sp>
         <p:nvSpPr>
-          <p:cNvPr id="18" name="Text 16"/>
-          <p:cNvSpPr/>
-          <p:nvPr/>
-        </p:nvSpPr>
-        <p:spPr>
-          <a:xfrm>
-            <a:off x="10046208" y="4187952"/>
-            <a:ext cx="201168" cy="256032"/>
-          </a:xfrm>
-          <a:prstGeom prst="rect">
-            <a:avLst/>
-          </a:prstGeom>
-          <a:noFill/>
-          <a:ln/>
-        </p:spPr>
-        <p:txBody>
-          <a:bodyPr wrap="square" lIns="0" tIns="0" rIns="0" bIns="0" rtlCol="0" anchor="ctr"/>
-          <a:lstStyle/>
-          <a:p>
-            <a:pPr algn="ctr" indent="0" marL="0">
-              <a:buNone/>
-            </a:pPr>
-            <a:r>
-              <a:rPr lang="en-US" sz="1800" b="1" dirty="0">
-                <a:solidFill>
-                  <a:srgbClr val="0068B7"/>
-                </a:solidFill>
-                <a:latin typeface="Aptos" pitchFamily="34" charset="0"/>
-                <a:ea typeface="Aptos" pitchFamily="34" charset="-122"/>
-                <a:cs typeface="Aptos" pitchFamily="34" charset="-120"/>
-              </a:rPr>
-              <a:t>â†’</a:t>
-            </a:r>
-            <a:endParaRPr lang="en-US" sz="1800" dirty="0"/>
-          </a:p>
-        </p:txBody>
-      </p:sp>
-      <p:sp>
-        <p:nvSpPr>
-          <p:cNvPr id="19" name="Shape 17"/>
+          <p:cNvPr id="17" name="Shape 15"/>
           <p:cNvSpPr/>
           <p:nvPr/>
         </p:nvSpPr>
@@ -13064,7 +14283,7 @@
       </p:sp>
       <p:sp>
         <p:nvSpPr>
-          <p:cNvPr id="20" name="Text 18"/>
+          <p:cNvPr id="18" name="Text 16"/>
           <p:cNvSpPr/>
           <p:nvPr/>
         </p:nvSpPr>
@@ -13271,8 +14490,8 @@
         </p:nvSpPr>
         <p:spPr>
           <a:xfrm>
-            <a:off x="9966960" y="6537960"/>
-            <a:ext cx="1645920" cy="201168"/>
+            <a:off x="9646920" y="6537960"/>
+            <a:ext cx="1965960" cy="201168"/>
           </a:xfrm>
           <a:prstGeom prst="rect">
             <a:avLst/>
@@ -13296,7 +14515,7 @@
                 <a:ea typeface="Aptos" pitchFamily="34" charset="-122"/>
                 <a:cs typeface="Aptos" pitchFamily="34" charset="-120"/>
               </a:rPr>
-              <a:t>Â© Paula Soper</a:t>
+              <a:t>Copyright Paula Soper</a:t>
             </a:r>
             <a:endParaRPr lang="en-US" sz="800" dirty="0"/>
           </a:p>
@@ -13343,77 +14562,13 @@
       </p:sp>
       <p:sp>
         <p:nvSpPr>
-          <p:cNvPr id="8" name="Shape 6"/>
+          <p:cNvPr id="8" name="Text 6"/>
           <p:cNvSpPr/>
           <p:nvPr/>
         </p:nvSpPr>
         <p:spPr>
           <a:xfrm>
             <a:off x="640080" y="658368"/>
-            <a:ext cx="420624" cy="420624"/>
-          </a:xfrm>
-          <a:prstGeom prst="ellipse">
-            <a:avLst/>
-          </a:prstGeom>
-          <a:solidFill>
-            <a:srgbClr val="0068B7"/>
-          </a:solidFill>
-          <a:ln w="12700">
-            <a:solidFill>
-              <a:srgbClr val="0068B7"/>
-            </a:solidFill>
-            <a:prstDash val="solid"/>
-          </a:ln>
-        </p:spPr>
-      </p:sp>
-      <p:sp>
-        <p:nvSpPr>
-          <p:cNvPr id="9" name="Text 7"/>
-          <p:cNvSpPr/>
-          <p:nvPr/>
-        </p:nvSpPr>
-        <p:spPr>
-          <a:xfrm>
-            <a:off x="640080" y="731520"/>
-            <a:ext cx="420624" cy="164592"/>
-          </a:xfrm>
-          <a:prstGeom prst="rect">
-            <a:avLst/>
-          </a:prstGeom>
-          <a:noFill/>
-          <a:ln/>
-        </p:spPr>
-        <p:txBody>
-          <a:bodyPr wrap="square" lIns="0" tIns="0" rIns="0" bIns="0" rtlCol="0" anchor="ctr"/>
-          <a:lstStyle/>
-          <a:p>
-            <a:pPr algn="ctr" indent="0" marL="0">
-              <a:buNone/>
-            </a:pPr>
-            <a:r>
-              <a:rPr lang="en-US" sz="1100" b="1" dirty="0">
-                <a:solidFill>
-                  <a:srgbClr val="FFFFFF"/>
-                </a:solidFill>
-                <a:latin typeface="Aptos" pitchFamily="34" charset="0"/>
-                <a:ea typeface="Aptos" pitchFamily="34" charset="-122"/>
-                <a:cs typeface="Aptos" pitchFamily="34" charset="-120"/>
-              </a:rPr>
-              <a:t>1</a:t>
-            </a:r>
-            <a:endParaRPr lang="en-US" sz="1100" dirty="0"/>
-          </a:p>
-        </p:txBody>
-      </p:sp>
-      <p:sp>
-        <p:nvSpPr>
-          <p:cNvPr id="10" name="Text 8"/>
-          <p:cNvSpPr/>
-          <p:nvPr/>
-        </p:nvSpPr>
-        <p:spPr>
-          <a:xfrm>
-            <a:off x="640080" y="621792"/>
             <a:ext cx="10881360" cy="713232"/>
           </a:xfrm>
           <a:prstGeom prst="rect">
@@ -13448,14 +14603,14 @@
       </p:sp>
       <p:sp>
         <p:nvSpPr>
-          <p:cNvPr id="11" name="Text 9"/>
+          <p:cNvPr id="9" name="Text 7"/>
           <p:cNvSpPr/>
           <p:nvPr/>
         </p:nvSpPr>
         <p:spPr>
           <a:xfrm>
             <a:off x="868680" y="1508760"/>
-            <a:ext cx="6537960" cy="4160520"/>
+            <a:ext cx="6309360" cy="4160520"/>
           </a:xfrm>
           <a:prstGeom prst="rect">
             <a:avLst/>
@@ -13514,18 +14669,18 @@
       </p:sp>
       <p:sp>
         <p:nvSpPr>
-          <p:cNvPr id="12" name="Shape 10"/>
-          <p:cNvSpPr/>
-          <p:nvPr/>
-        </p:nvSpPr>
-        <p:spPr>
-          <a:xfrm>
-            <a:off x="7909560" y="1417320"/>
-            <a:ext cx="3154680" cy="1828800"/>
+          <p:cNvPr id="10" name="Shape 8"/>
+          <p:cNvSpPr/>
+          <p:nvPr/>
+        </p:nvSpPr>
+        <p:spPr>
+          <a:xfrm>
+            <a:off x="7635240" y="1325880"/>
+            <a:ext cx="3474720" cy="1325880"/>
           </a:xfrm>
           <a:prstGeom prst="roundRect">
             <a:avLst>
-              <a:gd name="adj" fmla="val 6000"/>
+              <a:gd name="adj" fmla="val 8276"/>
             </a:avLst>
           </a:prstGeom>
           <a:solidFill>
@@ -13541,14 +14696,14 @@
       </p:sp>
       <p:sp>
         <p:nvSpPr>
-          <p:cNvPr id="13" name="Text 11"/>
-          <p:cNvSpPr/>
-          <p:nvPr/>
-        </p:nvSpPr>
-        <p:spPr>
-          <a:xfrm>
-            <a:off x="8074152" y="1563624"/>
-            <a:ext cx="2825496" cy="256032"/>
+          <p:cNvPr id="11" name="Text 9"/>
+          <p:cNvSpPr/>
+          <p:nvPr/>
+        </p:nvSpPr>
+        <p:spPr>
+          <a:xfrm>
+            <a:off x="7799832" y="1472184"/>
+            <a:ext cx="3145536" cy="256032"/>
           </a:xfrm>
           <a:prstGeom prst="rect">
             <a:avLst/>
@@ -13572,7 +14727,7 @@
                 <a:ea typeface="Aptos" pitchFamily="34" charset="-122"/>
                 <a:cs typeface="Aptos" pitchFamily="34" charset="-120"/>
               </a:rPr>
-              <a:t>Key idea</a:t>
+              <a:t>Practice focus</a:t>
             </a:r>
             <a:endParaRPr lang="en-US" sz="1300" dirty="0"/>
           </a:p>
@@ -13580,14 +14735,14 @@
       </p:sp>
       <p:sp>
         <p:nvSpPr>
-          <p:cNvPr id="14" name="Text 12"/>
-          <p:cNvSpPr/>
-          <p:nvPr/>
-        </p:nvSpPr>
-        <p:spPr>
-          <a:xfrm>
-            <a:off x="8074152" y="1920240"/>
-            <a:ext cx="2825496" cy="1188720"/>
+          <p:cNvPr id="12" name="Text 10"/>
+          <p:cNvSpPr/>
+          <p:nvPr/>
+        </p:nvSpPr>
+        <p:spPr>
+          <a:xfrm>
+            <a:off x="7799832" y="1828800"/>
+            <a:ext cx="3145536" cy="685800"/>
           </a:xfrm>
           <a:prstGeom prst="rect">
             <a:avLst/>
@@ -13621,18 +14776,159 @@
       </p:sp>
       <p:sp>
         <p:nvSpPr>
-          <p:cNvPr id="15" name="Shape 13"/>
-          <p:cNvSpPr/>
-          <p:nvPr/>
-        </p:nvSpPr>
-        <p:spPr>
-          <a:xfrm>
-            <a:off x="7909560" y="3520440"/>
-            <a:ext cx="3154680" cy="1737360"/>
+          <p:cNvPr id="13" name="Shape 11"/>
+          <p:cNvSpPr/>
+          <p:nvPr/>
+        </p:nvSpPr>
+        <p:spPr>
+          <a:xfrm>
+            <a:off x="7635240" y="2788920"/>
+            <a:ext cx="3474720" cy="1536192"/>
           </a:xfrm>
           <a:prstGeom prst="roundRect">
             <a:avLst>
-              <a:gd name="adj" fmla="val 6316"/>
+              <a:gd name="adj" fmla="val 7143"/>
+            </a:avLst>
+          </a:prstGeom>
+          <a:solidFill>
+            <a:srgbClr val="FFFFFF">
+              <a:alpha val="88000"/>
+            </a:srgbClr>
+          </a:solidFill>
+          <a:ln w="12700">
+            <a:solidFill>
+              <a:srgbClr val="D6E8F2"/>
+            </a:solidFill>
+            <a:prstDash val="solid"/>
+          </a:ln>
+        </p:spPr>
+      </p:sp>
+      <p:sp>
+        <p:nvSpPr>
+          <p:cNvPr id="14" name="Shape 12"/>
+          <p:cNvSpPr/>
+          <p:nvPr/>
+        </p:nvSpPr>
+        <p:spPr>
+          <a:xfrm>
+            <a:off x="8074152" y="3291840"/>
+            <a:ext cx="2596896" cy="749808"/>
+          </a:xfrm>
+          <a:prstGeom prst="rect">
+            <a:avLst/>
+          </a:prstGeom>
+          <a:solidFill>
+            <a:srgbClr val="EAF6F8"/>
+          </a:solidFill>
+          <a:ln w="12700">
+            <a:solidFill>
+              <a:srgbClr val="8ABBD8"/>
+            </a:solidFill>
+            <a:prstDash val="solid"/>
+          </a:ln>
+        </p:spPr>
+      </p:sp>
+      <p:sp>
+        <p:nvSpPr>
+          <p:cNvPr id="15" name="Shape 13"/>
+          <p:cNvSpPr/>
+          <p:nvPr/>
+        </p:nvSpPr>
+        <p:spPr>
+          <a:xfrm>
+            <a:off x="8202168" y="3721608"/>
+            <a:ext cx="2340864" cy="0"/>
+          </a:xfrm>
+          <a:prstGeom prst="line">
+            <a:avLst/>
+          </a:prstGeom>
+          <a:noFill/>
+          <a:ln w="19050">
+            <a:solidFill>
+              <a:srgbClr val="0068B7"/>
+            </a:solidFill>
+            <a:prstDash val="solid"/>
+          </a:ln>
+        </p:spPr>
+      </p:sp>
+      <p:sp>
+        <p:nvSpPr>
+          <p:cNvPr id="16" name="Shape 14"/>
+          <p:cNvSpPr/>
+          <p:nvPr/>
+        </p:nvSpPr>
+        <p:spPr>
+          <a:xfrm>
+            <a:off x="9198864" y="4206240"/>
+            <a:ext cx="347472" cy="347472"/>
+          </a:xfrm>
+          <a:prstGeom prst="ellipse">
+            <a:avLst/>
+          </a:prstGeom>
+          <a:solidFill>
+            <a:srgbClr val="2F8A28"/>
+          </a:solidFill>
+          <a:ln w="12700">
+            <a:solidFill>
+              <a:srgbClr val="2F8A28"/>
+            </a:solidFill>
+            <a:prstDash val="solid"/>
+          </a:ln>
+        </p:spPr>
+      </p:sp>
+      <p:sp>
+        <p:nvSpPr>
+          <p:cNvPr id="17" name="Text 15"/>
+          <p:cNvSpPr/>
+          <p:nvPr/>
+        </p:nvSpPr>
+        <p:spPr>
+          <a:xfrm>
+            <a:off x="7909560" y="3977640"/>
+            <a:ext cx="2926080" cy="182880"/>
+          </a:xfrm>
+          <a:prstGeom prst="rect">
+            <a:avLst/>
+          </a:prstGeom>
+          <a:noFill/>
+          <a:ln/>
+        </p:spPr>
+        <p:txBody>
+          <a:bodyPr wrap="square" lIns="0" tIns="0" rIns="0" bIns="0" rtlCol="0" anchor="ctr"/>
+          <a:lstStyle/>
+          <a:p>
+            <a:pPr algn="ctr" indent="0" marL="0">
+              <a:buNone/>
+            </a:pPr>
+            <a:r>
+              <a:rPr lang="en-US" sz="1000" dirty="0">
+                <a:solidFill>
+                  <a:srgbClr val="003A63"/>
+                </a:solidFill>
+                <a:latin typeface="Aptos" pitchFamily="34" charset="0"/>
+                <a:ea typeface="Aptos" pitchFamily="34" charset="-122"/>
+                <a:cs typeface="Aptos" pitchFamily="34" charset="-120"/>
+              </a:rPr>
+              <a:t>Concept to action</a:t>
+            </a:r>
+            <a:endParaRPr lang="en-US" sz="1000" dirty="0"/>
+          </a:p>
+        </p:txBody>
+      </p:sp>
+      <p:sp>
+        <p:nvSpPr>
+          <p:cNvPr id="18" name="Shape 16"/>
+          <p:cNvSpPr/>
+          <p:nvPr/>
+        </p:nvSpPr>
+        <p:spPr>
+          <a:xfrm>
+            <a:off x="7635240" y="4498848"/>
+            <a:ext cx="3474720" cy="1143000"/>
+          </a:xfrm>
+          <a:prstGeom prst="roundRect">
+            <a:avLst>
+              <a:gd name="adj" fmla="val 9600"/>
             </a:avLst>
           </a:prstGeom>
           <a:solidFill>
@@ -13648,14 +14944,14 @@
       </p:sp>
       <p:sp>
         <p:nvSpPr>
-          <p:cNvPr id="16" name="Text 14"/>
-          <p:cNvSpPr/>
-          <p:nvPr/>
-        </p:nvSpPr>
-        <p:spPr>
-          <a:xfrm>
-            <a:off x="8074152" y="3666744"/>
-            <a:ext cx="2825496" cy="256032"/>
+          <p:cNvPr id="19" name="Text 17"/>
+          <p:cNvSpPr/>
+          <p:nvPr/>
+        </p:nvSpPr>
+        <p:spPr>
+          <a:xfrm>
+            <a:off x="7799832" y="4645152"/>
+            <a:ext cx="3145536" cy="256032"/>
           </a:xfrm>
           <a:prstGeom prst="rect">
             <a:avLst/>
@@ -13679,7 +14975,7 @@
                 <a:ea typeface="Aptos" pitchFamily="34" charset="-122"/>
                 <a:cs typeface="Aptos" pitchFamily="34" charset="-120"/>
               </a:rPr>
-              <a:t>Use this for</a:t>
+              <a:t>What to produce</a:t>
             </a:r>
             <a:endParaRPr lang="en-US" sz="1300" dirty="0"/>
           </a:p>
@@ -13687,14 +14983,14 @@
       </p:sp>
       <p:sp>
         <p:nvSpPr>
-          <p:cNvPr id="17" name="Text 15"/>
-          <p:cNvSpPr/>
-          <p:nvPr/>
-        </p:nvSpPr>
-        <p:spPr>
-          <a:xfrm>
-            <a:off x="8074152" y="4023360"/>
-            <a:ext cx="2825496" cy="1097280"/>
+          <p:cNvPr id="20" name="Text 18"/>
+          <p:cNvSpPr/>
+          <p:nvPr/>
+        </p:nvSpPr>
+        <p:spPr>
+          <a:xfrm>
+            <a:off x="7799832" y="5001768"/>
+            <a:ext cx="3145536" cy="502920"/>
           </a:xfrm>
           <a:prstGeom prst="rect">
             <a:avLst/>
@@ -13720,7 +15016,7 @@
                 <a:ea typeface="Aptos" pitchFamily="34" charset="-122"/>
                 <a:cs typeface="Aptos" pitchFamily="34" charset="-120"/>
               </a:rPr>
-              <a:t>Connect the concept to public health decisions, safeguards, documentation, or implementation work.</a:t>
+              <a:t>Use the assignment to test whether you can explain the concept, apply it to a realistic public health situation, and identify what would need review before the work moves forward.</a:t>
             </a:r>
             <a:endParaRPr lang="en-US" sz="1550" dirty="0"/>
           </a:p>
@@ -13894,8 +15190,8 @@
         </p:nvSpPr>
         <p:spPr>
           <a:xfrm>
-            <a:off x="9966960" y="6537960"/>
-            <a:ext cx="1645920" cy="201168"/>
+            <a:off x="9646920" y="6537960"/>
+            <a:ext cx="1965960" cy="201168"/>
           </a:xfrm>
           <a:prstGeom prst="rect">
             <a:avLst/>
@@ -13919,7 +15215,7 @@
                 <a:ea typeface="Aptos" pitchFamily="34" charset="-122"/>
                 <a:cs typeface="Aptos" pitchFamily="34" charset="-120"/>
               </a:rPr>
-              <a:t>Â© Paula Soper</a:t>
+              <a:t>Copyright Paula Soper</a:t>
             </a:r>
             <a:endParaRPr lang="en-US" sz="800" dirty="0"/>
           </a:p>
@@ -14014,7 +15310,7 @@
         <p:spPr>
           <a:xfrm>
             <a:off x="868680" y="1508760"/>
-            <a:ext cx="6537960" cy="4160520"/>
+            <a:ext cx="6309360" cy="4160520"/>
           </a:xfrm>
           <a:prstGeom prst="rect">
             <a:avLst/>
@@ -14051,12 +15347,12 @@
         </p:nvSpPr>
         <p:spPr>
           <a:xfrm>
-            <a:off x="7909560" y="1417320"/>
-            <a:ext cx="3154680" cy="1828800"/>
+            <a:off x="7635240" y="1325880"/>
+            <a:ext cx="3474720" cy="1325880"/>
           </a:xfrm>
           <a:prstGeom prst="roundRect">
             <a:avLst>
-              <a:gd name="adj" fmla="val 6000"/>
+              <a:gd name="adj" fmla="val 8276"/>
             </a:avLst>
           </a:prstGeom>
           <a:solidFill>
@@ -14078,8 +15374,8 @@
         </p:nvSpPr>
         <p:spPr>
           <a:xfrm>
-            <a:off x="8074152" y="1563624"/>
-            <a:ext cx="2825496" cy="256032"/>
+            <a:off x="7799832" y="1472184"/>
+            <a:ext cx="3145536" cy="256032"/>
           </a:xfrm>
           <a:prstGeom prst="rect">
             <a:avLst/>
@@ -14103,7 +15399,7 @@
                 <a:ea typeface="Aptos" pitchFamily="34" charset="-122"/>
                 <a:cs typeface="Aptos" pitchFamily="34" charset="-120"/>
               </a:rPr>
-              <a:t>Key idea</a:t>
+              <a:t>Practice focus</a:t>
             </a:r>
             <a:endParaRPr lang="en-US" sz="1300" dirty="0"/>
           </a:p>
@@ -14117,8 +15413,8 @@
         </p:nvSpPr>
         <p:spPr>
           <a:xfrm>
-            <a:off x="8074152" y="1920240"/>
-            <a:ext cx="2825496" cy="1188720"/>
+            <a:off x="7799832" y="1828800"/>
+            <a:ext cx="3145536" cy="685800"/>
           </a:xfrm>
           <a:prstGeom prst="rect">
             <a:avLst/>
@@ -14158,12 +15454,153 @@
         </p:nvSpPr>
         <p:spPr>
           <a:xfrm>
-            <a:off x="7909560" y="3520440"/>
-            <a:ext cx="3154680" cy="1737360"/>
+            <a:off x="7635240" y="2788920"/>
+            <a:ext cx="3474720" cy="1536192"/>
           </a:xfrm>
           <a:prstGeom prst="roundRect">
             <a:avLst>
-              <a:gd name="adj" fmla="val 6316"/>
+              <a:gd name="adj" fmla="val 7143"/>
+            </a:avLst>
+          </a:prstGeom>
+          <a:solidFill>
+            <a:srgbClr val="FFFFFF">
+              <a:alpha val="88000"/>
+            </a:srgbClr>
+          </a:solidFill>
+          <a:ln w="12700">
+            <a:solidFill>
+              <a:srgbClr val="D6E8F2"/>
+            </a:solidFill>
+            <a:prstDash val="solid"/>
+          </a:ln>
+        </p:spPr>
+      </p:sp>
+      <p:sp>
+        <p:nvSpPr>
+          <p:cNvPr id="14" name="Shape 12"/>
+          <p:cNvSpPr/>
+          <p:nvPr/>
+        </p:nvSpPr>
+        <p:spPr>
+          <a:xfrm>
+            <a:off x="8074152" y="3291840"/>
+            <a:ext cx="2596896" cy="749808"/>
+          </a:xfrm>
+          <a:prstGeom prst="rect">
+            <a:avLst/>
+          </a:prstGeom>
+          <a:solidFill>
+            <a:srgbClr val="EAF6F8"/>
+          </a:solidFill>
+          <a:ln w="12700">
+            <a:solidFill>
+              <a:srgbClr val="8ABBD8"/>
+            </a:solidFill>
+            <a:prstDash val="solid"/>
+          </a:ln>
+        </p:spPr>
+      </p:sp>
+      <p:sp>
+        <p:nvSpPr>
+          <p:cNvPr id="15" name="Shape 13"/>
+          <p:cNvSpPr/>
+          <p:nvPr/>
+        </p:nvSpPr>
+        <p:spPr>
+          <a:xfrm>
+            <a:off x="8202168" y="3721608"/>
+            <a:ext cx="2340864" cy="0"/>
+          </a:xfrm>
+          <a:prstGeom prst="line">
+            <a:avLst/>
+          </a:prstGeom>
+          <a:noFill/>
+          <a:ln w="19050">
+            <a:solidFill>
+              <a:srgbClr val="0068B7"/>
+            </a:solidFill>
+            <a:prstDash val="solid"/>
+          </a:ln>
+        </p:spPr>
+      </p:sp>
+      <p:sp>
+        <p:nvSpPr>
+          <p:cNvPr id="16" name="Shape 14"/>
+          <p:cNvSpPr/>
+          <p:nvPr/>
+        </p:nvSpPr>
+        <p:spPr>
+          <a:xfrm>
+            <a:off x="9198864" y="4206240"/>
+            <a:ext cx="347472" cy="347472"/>
+          </a:xfrm>
+          <a:prstGeom prst="ellipse">
+            <a:avLst/>
+          </a:prstGeom>
+          <a:solidFill>
+            <a:srgbClr val="2F8A28"/>
+          </a:solidFill>
+          <a:ln w="12700">
+            <a:solidFill>
+              <a:srgbClr val="2F8A28"/>
+            </a:solidFill>
+            <a:prstDash val="solid"/>
+          </a:ln>
+        </p:spPr>
+      </p:sp>
+      <p:sp>
+        <p:nvSpPr>
+          <p:cNvPr id="17" name="Text 15"/>
+          <p:cNvSpPr/>
+          <p:nvPr/>
+        </p:nvSpPr>
+        <p:spPr>
+          <a:xfrm>
+            <a:off x="7909560" y="3977640"/>
+            <a:ext cx="2926080" cy="182880"/>
+          </a:xfrm>
+          <a:prstGeom prst="rect">
+            <a:avLst/>
+          </a:prstGeom>
+          <a:noFill/>
+          <a:ln/>
+        </p:spPr>
+        <p:txBody>
+          <a:bodyPr wrap="square" lIns="0" tIns="0" rIns="0" bIns="0" rtlCol="0" anchor="ctr"/>
+          <a:lstStyle/>
+          <a:p>
+            <a:pPr algn="ctr" indent="0" marL="0">
+              <a:buNone/>
+            </a:pPr>
+            <a:r>
+              <a:rPr lang="en-US" sz="1000" dirty="0">
+                <a:solidFill>
+                  <a:srgbClr val="003A63"/>
+                </a:solidFill>
+                <a:latin typeface="Aptos" pitchFamily="34" charset="0"/>
+                <a:ea typeface="Aptos" pitchFamily="34" charset="-122"/>
+                <a:cs typeface="Aptos" pitchFamily="34" charset="-120"/>
+              </a:rPr>
+              <a:t>Concept to action</a:t>
+            </a:r>
+            <a:endParaRPr lang="en-US" sz="1000" dirty="0"/>
+          </a:p>
+        </p:txBody>
+      </p:sp>
+      <p:sp>
+        <p:nvSpPr>
+          <p:cNvPr id="18" name="Shape 16"/>
+          <p:cNvSpPr/>
+          <p:nvPr/>
+        </p:nvSpPr>
+        <p:spPr>
+          <a:xfrm>
+            <a:off x="7635240" y="4498848"/>
+            <a:ext cx="3474720" cy="1143000"/>
+          </a:xfrm>
+          <a:prstGeom prst="roundRect">
+            <a:avLst>
+              <a:gd name="adj" fmla="val 9600"/>
             </a:avLst>
           </a:prstGeom>
           <a:solidFill>
@@ -14179,14 +15616,14 @@
       </p:sp>
       <p:sp>
         <p:nvSpPr>
-          <p:cNvPr id="14" name="Text 12"/>
-          <p:cNvSpPr/>
-          <p:nvPr/>
-        </p:nvSpPr>
-        <p:spPr>
-          <a:xfrm>
-            <a:off x="8074152" y="3666744"/>
-            <a:ext cx="2825496" cy="256032"/>
+          <p:cNvPr id="19" name="Text 17"/>
+          <p:cNvSpPr/>
+          <p:nvPr/>
+        </p:nvSpPr>
+        <p:spPr>
+          <a:xfrm>
+            <a:off x="7799832" y="4645152"/>
+            <a:ext cx="3145536" cy="256032"/>
           </a:xfrm>
           <a:prstGeom prst="rect">
             <a:avLst/>
@@ -14210,7 +15647,7 @@
                 <a:ea typeface="Aptos" pitchFamily="34" charset="-122"/>
                 <a:cs typeface="Aptos" pitchFamily="34" charset="-120"/>
               </a:rPr>
-              <a:t>Use this for</a:t>
+              <a:t>What to produce</a:t>
             </a:r>
             <a:endParaRPr lang="en-US" sz="1300" dirty="0"/>
           </a:p>
@@ -14218,14 +15655,14 @@
       </p:sp>
       <p:sp>
         <p:nvSpPr>
-          <p:cNvPr id="15" name="Text 13"/>
-          <p:cNvSpPr/>
-          <p:nvPr/>
-        </p:nvSpPr>
-        <p:spPr>
-          <a:xfrm>
-            <a:off x="8074152" y="4023360"/>
-            <a:ext cx="2825496" cy="1097280"/>
+          <p:cNvPr id="20" name="Text 18"/>
+          <p:cNvSpPr/>
+          <p:nvPr/>
+        </p:nvSpPr>
+        <p:spPr>
+          <a:xfrm>
+            <a:off x="7799832" y="5001768"/>
+            <a:ext cx="3145536" cy="502920"/>
           </a:xfrm>
           <a:prstGeom prst="rect">
             <a:avLst/>
@@ -14251,7 +15688,7 @@
                 <a:ea typeface="Aptos" pitchFamily="34" charset="-122"/>
                 <a:cs typeface="Aptos" pitchFamily="34" charset="-120"/>
               </a:rPr>
-              <a:t>Connect the concept to public health decisions, safeguards, documentation, or implementation work.</a:t>
+              <a:t>Use the assignment to test whether you can explain the concept, apply it to a realistic public health situation, and identify what would need review before the work moves forward.</a:t>
             </a:r>
             <a:endParaRPr lang="en-US" sz="1550" dirty="0"/>
           </a:p>
@@ -14425,8 +15862,8 @@
         </p:nvSpPr>
         <p:spPr>
           <a:xfrm>
-            <a:off x="9966960" y="6537960"/>
-            <a:ext cx="1645920" cy="201168"/>
+            <a:off x="9646920" y="6537960"/>
+            <a:ext cx="1965960" cy="201168"/>
           </a:xfrm>
           <a:prstGeom prst="rect">
             <a:avLst/>
@@ -14450,7 +15887,7 @@
                 <a:ea typeface="Aptos" pitchFamily="34" charset="-122"/>
                 <a:cs typeface="Aptos" pitchFamily="34" charset="-120"/>
               </a:rPr>
-              <a:t>Â© Paula Soper</a:t>
+              <a:t>Copyright Paula Soper</a:t>
             </a:r>
             <a:endParaRPr lang="en-US" sz="800" dirty="0"/>
           </a:p>
@@ -14497,77 +15934,13 @@
       </p:sp>
       <p:sp>
         <p:nvSpPr>
-          <p:cNvPr id="8" name="Shape 6"/>
+          <p:cNvPr id="8" name="Text 6"/>
           <p:cNvSpPr/>
           <p:nvPr/>
         </p:nvSpPr>
         <p:spPr>
           <a:xfrm>
             <a:off x="640080" y="658368"/>
-            <a:ext cx="420624" cy="420624"/>
-          </a:xfrm>
-          <a:prstGeom prst="ellipse">
-            <a:avLst/>
-          </a:prstGeom>
-          <a:solidFill>
-            <a:srgbClr val="0068B7"/>
-          </a:solidFill>
-          <a:ln w="12700">
-            <a:solidFill>
-              <a:srgbClr val="0068B7"/>
-            </a:solidFill>
-            <a:prstDash val="solid"/>
-          </a:ln>
-        </p:spPr>
-      </p:sp>
-      <p:sp>
-        <p:nvSpPr>
-          <p:cNvPr id="9" name="Text 7"/>
-          <p:cNvSpPr/>
-          <p:nvPr/>
-        </p:nvSpPr>
-        <p:spPr>
-          <a:xfrm>
-            <a:off x="640080" y="731520"/>
-            <a:ext cx="420624" cy="164592"/>
-          </a:xfrm>
-          <a:prstGeom prst="rect">
-            <a:avLst/>
-          </a:prstGeom>
-          <a:noFill/>
-          <a:ln/>
-        </p:spPr>
-        <p:txBody>
-          <a:bodyPr wrap="square" lIns="0" tIns="0" rIns="0" bIns="0" rtlCol="0" anchor="ctr"/>
-          <a:lstStyle/>
-          <a:p>
-            <a:pPr algn="ctr" indent="0" marL="0">
-              <a:buNone/>
-            </a:pPr>
-            <a:r>
-              <a:rPr lang="en-US" sz="1100" b="1" dirty="0">
-                <a:solidFill>
-                  <a:srgbClr val="FFFFFF"/>
-                </a:solidFill>
-                <a:latin typeface="Aptos" pitchFamily="34" charset="0"/>
-                <a:ea typeface="Aptos" pitchFamily="34" charset="-122"/>
-                <a:cs typeface="Aptos" pitchFamily="34" charset="-120"/>
-              </a:rPr>
-              <a:t>2</a:t>
-            </a:r>
-            <a:endParaRPr lang="en-US" sz="1100" dirty="0"/>
-          </a:p>
-        </p:txBody>
-      </p:sp>
-      <p:sp>
-        <p:nvSpPr>
-          <p:cNvPr id="10" name="Text 8"/>
-          <p:cNvSpPr/>
-          <p:nvPr/>
-        </p:nvSpPr>
-        <p:spPr>
-          <a:xfrm>
-            <a:off x="640080" y="621792"/>
             <a:ext cx="10881360" cy="713232"/>
           </a:xfrm>
           <a:prstGeom prst="rect">
@@ -14602,14 +15975,14 @@
       </p:sp>
       <p:sp>
         <p:nvSpPr>
-          <p:cNvPr id="11" name="Text 9"/>
+          <p:cNvPr id="9" name="Text 7"/>
           <p:cNvSpPr/>
           <p:nvPr/>
         </p:nvSpPr>
         <p:spPr>
           <a:xfrm>
             <a:off x="868680" y="1508760"/>
-            <a:ext cx="6537960" cy="4160520"/>
+            <a:ext cx="6309360" cy="4160520"/>
           </a:xfrm>
           <a:prstGeom prst="rect">
             <a:avLst/>
@@ -14668,18 +16041,18 @@
       </p:sp>
       <p:sp>
         <p:nvSpPr>
-          <p:cNvPr id="12" name="Shape 10"/>
-          <p:cNvSpPr/>
-          <p:nvPr/>
-        </p:nvSpPr>
-        <p:spPr>
-          <a:xfrm>
-            <a:off x="7909560" y="1417320"/>
-            <a:ext cx="3154680" cy="1828800"/>
+          <p:cNvPr id="10" name="Shape 8"/>
+          <p:cNvSpPr/>
+          <p:nvPr/>
+        </p:nvSpPr>
+        <p:spPr>
+          <a:xfrm>
+            <a:off x="7635240" y="1325880"/>
+            <a:ext cx="3474720" cy="1325880"/>
           </a:xfrm>
           <a:prstGeom prst="roundRect">
             <a:avLst>
-              <a:gd name="adj" fmla="val 6000"/>
+              <a:gd name="adj" fmla="val 8276"/>
             </a:avLst>
           </a:prstGeom>
           <a:solidFill>
@@ -14695,14 +16068,14 @@
       </p:sp>
       <p:sp>
         <p:nvSpPr>
-          <p:cNvPr id="13" name="Text 11"/>
-          <p:cNvSpPr/>
-          <p:nvPr/>
-        </p:nvSpPr>
-        <p:spPr>
-          <a:xfrm>
-            <a:off x="8074152" y="1563624"/>
-            <a:ext cx="2825496" cy="256032"/>
+          <p:cNvPr id="11" name="Text 9"/>
+          <p:cNvSpPr/>
+          <p:nvPr/>
+        </p:nvSpPr>
+        <p:spPr>
+          <a:xfrm>
+            <a:off x="7799832" y="1472184"/>
+            <a:ext cx="3145536" cy="256032"/>
           </a:xfrm>
           <a:prstGeom prst="rect">
             <a:avLst/>
@@ -14726,7 +16099,7 @@
                 <a:ea typeface="Aptos" pitchFamily="34" charset="-122"/>
                 <a:cs typeface="Aptos" pitchFamily="34" charset="-120"/>
               </a:rPr>
-              <a:t>Key idea</a:t>
+              <a:t>Core concept</a:t>
             </a:r>
             <a:endParaRPr lang="en-US" sz="1300" dirty="0"/>
           </a:p>
@@ -14734,14 +16107,14 @@
       </p:sp>
       <p:sp>
         <p:nvSpPr>
-          <p:cNvPr id="14" name="Text 12"/>
-          <p:cNvSpPr/>
-          <p:nvPr/>
-        </p:nvSpPr>
-        <p:spPr>
-          <a:xfrm>
-            <a:off x="8074152" y="1920240"/>
-            <a:ext cx="2825496" cy="1188720"/>
+          <p:cNvPr id="12" name="Text 10"/>
+          <p:cNvSpPr/>
+          <p:nvPr/>
+        </p:nvSpPr>
+        <p:spPr>
+          <a:xfrm>
+            <a:off x="7799832" y="1828800"/>
+            <a:ext cx="3145536" cy="685800"/>
           </a:xfrm>
           <a:prstGeom prst="rect">
             <a:avLst/>
@@ -14775,18 +16148,159 @@
       </p:sp>
       <p:sp>
         <p:nvSpPr>
-          <p:cNvPr id="15" name="Shape 13"/>
-          <p:cNvSpPr/>
-          <p:nvPr/>
-        </p:nvSpPr>
-        <p:spPr>
-          <a:xfrm>
-            <a:off x="7909560" y="3520440"/>
-            <a:ext cx="3154680" cy="1737360"/>
+          <p:cNvPr id="13" name="Shape 11"/>
+          <p:cNvSpPr/>
+          <p:nvPr/>
+        </p:nvSpPr>
+        <p:spPr>
+          <a:xfrm>
+            <a:off x="7635240" y="2788920"/>
+            <a:ext cx="3474720" cy="1536192"/>
           </a:xfrm>
           <a:prstGeom prst="roundRect">
             <a:avLst>
-              <a:gd name="adj" fmla="val 6316"/>
+              <a:gd name="adj" fmla="val 7143"/>
+            </a:avLst>
+          </a:prstGeom>
+          <a:solidFill>
+            <a:srgbClr val="FFFFFF">
+              <a:alpha val="88000"/>
+            </a:srgbClr>
+          </a:solidFill>
+          <a:ln w="12700">
+            <a:solidFill>
+              <a:srgbClr val="D6E8F2"/>
+            </a:solidFill>
+            <a:prstDash val="solid"/>
+          </a:ln>
+        </p:spPr>
+      </p:sp>
+      <p:sp>
+        <p:nvSpPr>
+          <p:cNvPr id="14" name="Shape 12"/>
+          <p:cNvSpPr/>
+          <p:nvPr/>
+        </p:nvSpPr>
+        <p:spPr>
+          <a:xfrm>
+            <a:off x="8074152" y="3291840"/>
+            <a:ext cx="2596896" cy="749808"/>
+          </a:xfrm>
+          <a:prstGeom prst="rect">
+            <a:avLst/>
+          </a:prstGeom>
+          <a:solidFill>
+            <a:srgbClr val="EAF6F8"/>
+          </a:solidFill>
+          <a:ln w="12700">
+            <a:solidFill>
+              <a:srgbClr val="8ABBD8"/>
+            </a:solidFill>
+            <a:prstDash val="solid"/>
+          </a:ln>
+        </p:spPr>
+      </p:sp>
+      <p:sp>
+        <p:nvSpPr>
+          <p:cNvPr id="15" name="Shape 13"/>
+          <p:cNvSpPr/>
+          <p:nvPr/>
+        </p:nvSpPr>
+        <p:spPr>
+          <a:xfrm>
+            <a:off x="8202168" y="3721608"/>
+            <a:ext cx="2340864" cy="0"/>
+          </a:xfrm>
+          <a:prstGeom prst="line">
+            <a:avLst/>
+          </a:prstGeom>
+          <a:noFill/>
+          <a:ln w="19050">
+            <a:solidFill>
+              <a:srgbClr val="0068B7"/>
+            </a:solidFill>
+            <a:prstDash val="solid"/>
+          </a:ln>
+        </p:spPr>
+      </p:sp>
+      <p:sp>
+        <p:nvSpPr>
+          <p:cNvPr id="16" name="Shape 14"/>
+          <p:cNvSpPr/>
+          <p:nvPr/>
+        </p:nvSpPr>
+        <p:spPr>
+          <a:xfrm>
+            <a:off x="9198864" y="4206240"/>
+            <a:ext cx="347472" cy="347472"/>
+          </a:xfrm>
+          <a:prstGeom prst="ellipse">
+            <a:avLst/>
+          </a:prstGeom>
+          <a:solidFill>
+            <a:srgbClr val="2F8A28"/>
+          </a:solidFill>
+          <a:ln w="12700">
+            <a:solidFill>
+              <a:srgbClr val="2F8A28"/>
+            </a:solidFill>
+            <a:prstDash val="solid"/>
+          </a:ln>
+        </p:spPr>
+      </p:sp>
+      <p:sp>
+        <p:nvSpPr>
+          <p:cNvPr id="17" name="Text 15"/>
+          <p:cNvSpPr/>
+          <p:nvPr/>
+        </p:nvSpPr>
+        <p:spPr>
+          <a:xfrm>
+            <a:off x="7909560" y="3977640"/>
+            <a:ext cx="2926080" cy="182880"/>
+          </a:xfrm>
+          <a:prstGeom prst="rect">
+            <a:avLst/>
+          </a:prstGeom>
+          <a:noFill/>
+          <a:ln/>
+        </p:spPr>
+        <p:txBody>
+          <a:bodyPr wrap="square" lIns="0" tIns="0" rIns="0" bIns="0" rtlCol="0" anchor="ctr"/>
+          <a:lstStyle/>
+          <a:p>
+            <a:pPr algn="ctr" indent="0" marL="0">
+              <a:buNone/>
+            </a:pPr>
+            <a:r>
+              <a:rPr lang="en-US" sz="1000" dirty="0">
+                <a:solidFill>
+                  <a:srgbClr val="003A63"/>
+                </a:solidFill>
+                <a:latin typeface="Aptos" pitchFamily="34" charset="0"/>
+                <a:ea typeface="Aptos" pitchFamily="34" charset="-122"/>
+                <a:cs typeface="Aptos" pitchFamily="34" charset="-120"/>
+              </a:rPr>
+              <a:t>Concept to action</a:t>
+            </a:r>
+            <a:endParaRPr lang="en-US" sz="1000" dirty="0"/>
+          </a:p>
+        </p:txBody>
+      </p:sp>
+      <p:sp>
+        <p:nvSpPr>
+          <p:cNvPr id="18" name="Shape 16"/>
+          <p:cNvSpPr/>
+          <p:nvPr/>
+        </p:nvSpPr>
+        <p:spPr>
+          <a:xfrm>
+            <a:off x="7635240" y="4498848"/>
+            <a:ext cx="3474720" cy="1143000"/>
+          </a:xfrm>
+          <a:prstGeom prst="roundRect">
+            <a:avLst>
+              <a:gd name="adj" fmla="val 9600"/>
             </a:avLst>
           </a:prstGeom>
           <a:solidFill>
@@ -14802,14 +16316,14 @@
       </p:sp>
       <p:sp>
         <p:nvSpPr>
-          <p:cNvPr id="16" name="Text 14"/>
-          <p:cNvSpPr/>
-          <p:nvPr/>
-        </p:nvSpPr>
-        <p:spPr>
-          <a:xfrm>
-            <a:off x="8074152" y="3666744"/>
-            <a:ext cx="2825496" cy="256032"/>
+          <p:cNvPr id="19" name="Text 17"/>
+          <p:cNvSpPr/>
+          <p:nvPr/>
+        </p:nvSpPr>
+        <p:spPr>
+          <a:xfrm>
+            <a:off x="7799832" y="4645152"/>
+            <a:ext cx="3145536" cy="256032"/>
           </a:xfrm>
           <a:prstGeom prst="rect">
             <a:avLst/>
@@ -14833,7 +16347,7 @@
                 <a:ea typeface="Aptos" pitchFamily="34" charset="-122"/>
                 <a:cs typeface="Aptos" pitchFamily="34" charset="-120"/>
               </a:rPr>
-              <a:t>Use this for</a:t>
+              <a:t>Apply it</a:t>
             </a:r>
             <a:endParaRPr lang="en-US" sz="1300" dirty="0"/>
           </a:p>
@@ -14841,14 +16355,14 @@
       </p:sp>
       <p:sp>
         <p:nvSpPr>
-          <p:cNvPr id="17" name="Text 15"/>
-          <p:cNvSpPr/>
-          <p:nvPr/>
-        </p:nvSpPr>
-        <p:spPr>
-          <a:xfrm>
-            <a:off x="8074152" y="4023360"/>
-            <a:ext cx="2825496" cy="1097280"/>
+          <p:cNvPr id="20" name="Text 18"/>
+          <p:cNvSpPr/>
+          <p:nvPr/>
+        </p:nvSpPr>
+        <p:spPr>
+          <a:xfrm>
+            <a:off x="7799832" y="5001768"/>
+            <a:ext cx="3145536" cy="502920"/>
           </a:xfrm>
           <a:prstGeom prst="rect">
             <a:avLst/>
@@ -14874,7 +16388,7 @@
                 <a:ea typeface="Aptos" pitchFamily="34" charset="-122"/>
                 <a:cs typeface="Aptos" pitchFamily="34" charset="-120"/>
               </a:rPr>
-              <a:t>Connect the concept to public health decisions, safeguards, documentation, or implementation work.</a:t>
+              <a:t>Connect the concept to public health purpose, responsible use, required safeguards, documentation, and the next action a department should take.</a:t>
             </a:r>
             <a:endParaRPr lang="en-US" sz="1550" dirty="0"/>
           </a:p>
@@ -15048,8 +16562,8 @@
         </p:nvSpPr>
         <p:spPr>
           <a:xfrm>
-            <a:off x="9966960" y="6537960"/>
-            <a:ext cx="1645920" cy="201168"/>
+            <a:off x="9646920" y="6537960"/>
+            <a:ext cx="1965960" cy="201168"/>
           </a:xfrm>
           <a:prstGeom prst="rect">
             <a:avLst/>
@@ -15073,7 +16587,7 @@
                 <a:ea typeface="Aptos" pitchFamily="34" charset="-122"/>
                 <a:cs typeface="Aptos" pitchFamily="34" charset="-120"/>
               </a:rPr>
-              <a:t>Â© Paula Soper</a:t>
+              <a:t>Copyright Paula Soper</a:t>
             </a:r>
             <a:endParaRPr lang="en-US" sz="800" dirty="0"/>
           </a:p>
@@ -15120,77 +16634,13 @@
       </p:sp>
       <p:sp>
         <p:nvSpPr>
-          <p:cNvPr id="8" name="Shape 6"/>
+          <p:cNvPr id="8" name="Text 6"/>
           <p:cNvSpPr/>
           <p:nvPr/>
         </p:nvSpPr>
         <p:spPr>
           <a:xfrm>
             <a:off x="640080" y="658368"/>
-            <a:ext cx="420624" cy="420624"/>
-          </a:xfrm>
-          <a:prstGeom prst="ellipse">
-            <a:avLst/>
-          </a:prstGeom>
-          <a:solidFill>
-            <a:srgbClr val="0068B7"/>
-          </a:solidFill>
-          <a:ln w="12700">
-            <a:solidFill>
-              <a:srgbClr val="0068B7"/>
-            </a:solidFill>
-            <a:prstDash val="solid"/>
-          </a:ln>
-        </p:spPr>
-      </p:sp>
-      <p:sp>
-        <p:nvSpPr>
-          <p:cNvPr id="9" name="Text 7"/>
-          <p:cNvSpPr/>
-          <p:nvPr/>
-        </p:nvSpPr>
-        <p:spPr>
-          <a:xfrm>
-            <a:off x="640080" y="731520"/>
-            <a:ext cx="420624" cy="164592"/>
-          </a:xfrm>
-          <a:prstGeom prst="rect">
-            <a:avLst/>
-          </a:prstGeom>
-          <a:noFill/>
-          <a:ln/>
-        </p:spPr>
-        <p:txBody>
-          <a:bodyPr wrap="square" lIns="0" tIns="0" rIns="0" bIns="0" rtlCol="0" anchor="ctr"/>
-          <a:lstStyle/>
-          <a:p>
-            <a:pPr algn="ctr" indent="0" marL="0">
-              <a:buNone/>
-            </a:pPr>
-            <a:r>
-              <a:rPr lang="en-US" sz="1100" b="1" dirty="0">
-                <a:solidFill>
-                  <a:srgbClr val="FFFFFF"/>
-                </a:solidFill>
-                <a:latin typeface="Aptos" pitchFamily="34" charset="0"/>
-                <a:ea typeface="Aptos" pitchFamily="34" charset="-122"/>
-                <a:cs typeface="Aptos" pitchFamily="34" charset="-120"/>
-              </a:rPr>
-              <a:t>3</a:t>
-            </a:r>
-            <a:endParaRPr lang="en-US" sz="1100" dirty="0"/>
-          </a:p>
-        </p:txBody>
-      </p:sp>
-      <p:sp>
-        <p:nvSpPr>
-          <p:cNvPr id="10" name="Text 8"/>
-          <p:cNvSpPr/>
-          <p:nvPr/>
-        </p:nvSpPr>
-        <p:spPr>
-          <a:xfrm>
-            <a:off x="640080" y="621792"/>
             <a:ext cx="10881360" cy="713232"/>
           </a:xfrm>
           <a:prstGeom prst="rect">
@@ -15225,14 +16675,14 @@
       </p:sp>
       <p:sp>
         <p:nvSpPr>
-          <p:cNvPr id="11" name="Text 9"/>
+          <p:cNvPr id="9" name="Text 7"/>
           <p:cNvSpPr/>
           <p:nvPr/>
         </p:nvSpPr>
         <p:spPr>
           <a:xfrm>
             <a:off x="868680" y="1508760"/>
-            <a:ext cx="6537960" cy="4160520"/>
+            <a:ext cx="6309360" cy="4160520"/>
           </a:xfrm>
           <a:prstGeom prst="rect">
             <a:avLst/>
@@ -15291,18 +16741,18 @@
       </p:sp>
       <p:sp>
         <p:nvSpPr>
-          <p:cNvPr id="12" name="Shape 10"/>
-          <p:cNvSpPr/>
-          <p:nvPr/>
-        </p:nvSpPr>
-        <p:spPr>
-          <a:xfrm>
-            <a:off x="7909560" y="1417320"/>
-            <a:ext cx="3154680" cy="1828800"/>
+          <p:cNvPr id="10" name="Shape 8"/>
+          <p:cNvSpPr/>
+          <p:nvPr/>
+        </p:nvSpPr>
+        <p:spPr>
+          <a:xfrm>
+            <a:off x="7635240" y="1325880"/>
+            <a:ext cx="3474720" cy="1325880"/>
           </a:xfrm>
           <a:prstGeom prst="roundRect">
             <a:avLst>
-              <a:gd name="adj" fmla="val 6000"/>
+              <a:gd name="adj" fmla="val 8276"/>
             </a:avLst>
           </a:prstGeom>
           <a:solidFill>
@@ -15318,14 +16768,14 @@
       </p:sp>
       <p:sp>
         <p:nvSpPr>
-          <p:cNvPr id="13" name="Text 11"/>
-          <p:cNvSpPr/>
-          <p:nvPr/>
-        </p:nvSpPr>
-        <p:spPr>
-          <a:xfrm>
-            <a:off x="8074152" y="1563624"/>
-            <a:ext cx="2825496" cy="256032"/>
+          <p:cNvPr id="11" name="Text 9"/>
+          <p:cNvSpPr/>
+          <p:nvPr/>
+        </p:nvSpPr>
+        <p:spPr>
+          <a:xfrm>
+            <a:off x="7799832" y="1472184"/>
+            <a:ext cx="3145536" cy="256032"/>
           </a:xfrm>
           <a:prstGeom prst="rect">
             <a:avLst/>
@@ -15349,7 +16799,7 @@
                 <a:ea typeface="Aptos" pitchFamily="34" charset="-122"/>
                 <a:cs typeface="Aptos" pitchFamily="34" charset="-120"/>
               </a:rPr>
-              <a:t>Key idea</a:t>
+              <a:t>Core concept</a:t>
             </a:r>
             <a:endParaRPr lang="en-US" sz="1300" dirty="0"/>
           </a:p>
@@ -15357,14 +16807,14 @@
       </p:sp>
       <p:sp>
         <p:nvSpPr>
-          <p:cNvPr id="14" name="Text 12"/>
-          <p:cNvSpPr/>
-          <p:nvPr/>
-        </p:nvSpPr>
-        <p:spPr>
-          <a:xfrm>
-            <a:off x="8074152" y="1920240"/>
-            <a:ext cx="2825496" cy="1188720"/>
+          <p:cNvPr id="12" name="Text 10"/>
+          <p:cNvSpPr/>
+          <p:nvPr/>
+        </p:nvSpPr>
+        <p:spPr>
+          <a:xfrm>
+            <a:off x="7799832" y="1828800"/>
+            <a:ext cx="3145536" cy="685800"/>
           </a:xfrm>
           <a:prstGeom prst="rect">
             <a:avLst/>
@@ -15398,18 +16848,159 @@
       </p:sp>
       <p:sp>
         <p:nvSpPr>
-          <p:cNvPr id="15" name="Shape 13"/>
-          <p:cNvSpPr/>
-          <p:nvPr/>
-        </p:nvSpPr>
-        <p:spPr>
-          <a:xfrm>
-            <a:off x="7909560" y="3520440"/>
-            <a:ext cx="3154680" cy="1737360"/>
+          <p:cNvPr id="13" name="Shape 11"/>
+          <p:cNvSpPr/>
+          <p:nvPr/>
+        </p:nvSpPr>
+        <p:spPr>
+          <a:xfrm>
+            <a:off x="7635240" y="2788920"/>
+            <a:ext cx="3474720" cy="1536192"/>
           </a:xfrm>
           <a:prstGeom prst="roundRect">
             <a:avLst>
-              <a:gd name="adj" fmla="val 6316"/>
+              <a:gd name="adj" fmla="val 7143"/>
+            </a:avLst>
+          </a:prstGeom>
+          <a:solidFill>
+            <a:srgbClr val="FFFFFF">
+              <a:alpha val="88000"/>
+            </a:srgbClr>
+          </a:solidFill>
+          <a:ln w="12700">
+            <a:solidFill>
+              <a:srgbClr val="D6E8F2"/>
+            </a:solidFill>
+            <a:prstDash val="solid"/>
+          </a:ln>
+        </p:spPr>
+      </p:sp>
+      <p:sp>
+        <p:nvSpPr>
+          <p:cNvPr id="14" name="Shape 12"/>
+          <p:cNvSpPr/>
+          <p:nvPr/>
+        </p:nvSpPr>
+        <p:spPr>
+          <a:xfrm>
+            <a:off x="8074152" y="3291840"/>
+            <a:ext cx="2596896" cy="749808"/>
+          </a:xfrm>
+          <a:prstGeom prst="rect">
+            <a:avLst/>
+          </a:prstGeom>
+          <a:solidFill>
+            <a:srgbClr val="EAF6F8"/>
+          </a:solidFill>
+          <a:ln w="12700">
+            <a:solidFill>
+              <a:srgbClr val="8ABBD8"/>
+            </a:solidFill>
+            <a:prstDash val="solid"/>
+          </a:ln>
+        </p:spPr>
+      </p:sp>
+      <p:sp>
+        <p:nvSpPr>
+          <p:cNvPr id="15" name="Shape 13"/>
+          <p:cNvSpPr/>
+          <p:nvPr/>
+        </p:nvSpPr>
+        <p:spPr>
+          <a:xfrm>
+            <a:off x="8202168" y="3721608"/>
+            <a:ext cx="2340864" cy="0"/>
+          </a:xfrm>
+          <a:prstGeom prst="line">
+            <a:avLst/>
+          </a:prstGeom>
+          <a:noFill/>
+          <a:ln w="19050">
+            <a:solidFill>
+              <a:srgbClr val="0068B7"/>
+            </a:solidFill>
+            <a:prstDash val="solid"/>
+          </a:ln>
+        </p:spPr>
+      </p:sp>
+      <p:sp>
+        <p:nvSpPr>
+          <p:cNvPr id="16" name="Shape 14"/>
+          <p:cNvSpPr/>
+          <p:nvPr/>
+        </p:nvSpPr>
+        <p:spPr>
+          <a:xfrm>
+            <a:off x="9198864" y="4206240"/>
+            <a:ext cx="347472" cy="347472"/>
+          </a:xfrm>
+          <a:prstGeom prst="ellipse">
+            <a:avLst/>
+          </a:prstGeom>
+          <a:solidFill>
+            <a:srgbClr val="2F8A28"/>
+          </a:solidFill>
+          <a:ln w="12700">
+            <a:solidFill>
+              <a:srgbClr val="2F8A28"/>
+            </a:solidFill>
+            <a:prstDash val="solid"/>
+          </a:ln>
+        </p:spPr>
+      </p:sp>
+      <p:sp>
+        <p:nvSpPr>
+          <p:cNvPr id="17" name="Text 15"/>
+          <p:cNvSpPr/>
+          <p:nvPr/>
+        </p:nvSpPr>
+        <p:spPr>
+          <a:xfrm>
+            <a:off x="7909560" y="3977640"/>
+            <a:ext cx="2926080" cy="182880"/>
+          </a:xfrm>
+          <a:prstGeom prst="rect">
+            <a:avLst/>
+          </a:prstGeom>
+          <a:noFill/>
+          <a:ln/>
+        </p:spPr>
+        <p:txBody>
+          <a:bodyPr wrap="square" lIns="0" tIns="0" rIns="0" bIns="0" rtlCol="0" anchor="ctr"/>
+          <a:lstStyle/>
+          <a:p>
+            <a:pPr algn="ctr" indent="0" marL="0">
+              <a:buNone/>
+            </a:pPr>
+            <a:r>
+              <a:rPr lang="en-US" sz="1000" dirty="0">
+                <a:solidFill>
+                  <a:srgbClr val="003A63"/>
+                </a:solidFill>
+                <a:latin typeface="Aptos" pitchFamily="34" charset="0"/>
+                <a:ea typeface="Aptos" pitchFamily="34" charset="-122"/>
+                <a:cs typeface="Aptos" pitchFamily="34" charset="-120"/>
+              </a:rPr>
+              <a:t>Concept to action</a:t>
+            </a:r>
+            <a:endParaRPr lang="en-US" sz="1000" dirty="0"/>
+          </a:p>
+        </p:txBody>
+      </p:sp>
+      <p:sp>
+        <p:nvSpPr>
+          <p:cNvPr id="18" name="Shape 16"/>
+          <p:cNvSpPr/>
+          <p:nvPr/>
+        </p:nvSpPr>
+        <p:spPr>
+          <a:xfrm>
+            <a:off x="7635240" y="4498848"/>
+            <a:ext cx="3474720" cy="1143000"/>
+          </a:xfrm>
+          <a:prstGeom prst="roundRect">
+            <a:avLst>
+              <a:gd name="adj" fmla="val 9600"/>
             </a:avLst>
           </a:prstGeom>
           <a:solidFill>
@@ -15425,14 +17016,14 @@
       </p:sp>
       <p:sp>
         <p:nvSpPr>
-          <p:cNvPr id="16" name="Text 14"/>
-          <p:cNvSpPr/>
-          <p:nvPr/>
-        </p:nvSpPr>
-        <p:spPr>
-          <a:xfrm>
-            <a:off x="8074152" y="3666744"/>
-            <a:ext cx="2825496" cy="256032"/>
+          <p:cNvPr id="19" name="Text 17"/>
+          <p:cNvSpPr/>
+          <p:nvPr/>
+        </p:nvSpPr>
+        <p:spPr>
+          <a:xfrm>
+            <a:off x="7799832" y="4645152"/>
+            <a:ext cx="3145536" cy="256032"/>
           </a:xfrm>
           <a:prstGeom prst="rect">
             <a:avLst/>
@@ -15456,7 +17047,7 @@
                 <a:ea typeface="Aptos" pitchFamily="34" charset="-122"/>
                 <a:cs typeface="Aptos" pitchFamily="34" charset="-120"/>
               </a:rPr>
-              <a:t>Use this for</a:t>
+              <a:t>Apply it</a:t>
             </a:r>
             <a:endParaRPr lang="en-US" sz="1300" dirty="0"/>
           </a:p>
@@ -15464,14 +17055,14 @@
       </p:sp>
       <p:sp>
         <p:nvSpPr>
-          <p:cNvPr id="17" name="Text 15"/>
-          <p:cNvSpPr/>
-          <p:nvPr/>
-        </p:nvSpPr>
-        <p:spPr>
-          <a:xfrm>
-            <a:off x="8074152" y="4023360"/>
-            <a:ext cx="2825496" cy="1097280"/>
+          <p:cNvPr id="20" name="Text 18"/>
+          <p:cNvSpPr/>
+          <p:nvPr/>
+        </p:nvSpPr>
+        <p:spPr>
+          <a:xfrm>
+            <a:off x="7799832" y="5001768"/>
+            <a:ext cx="3145536" cy="502920"/>
           </a:xfrm>
           <a:prstGeom prst="rect">
             <a:avLst/>
@@ -15497,7 +17088,7 @@
                 <a:ea typeface="Aptos" pitchFamily="34" charset="-122"/>
                 <a:cs typeface="Aptos" pitchFamily="34" charset="-120"/>
               </a:rPr>
-              <a:t>Connect the concept to public health decisions, safeguards, documentation, or implementation work.</a:t>
+              <a:t>Connect the concept to public health purpose, responsible use, required safeguards, documentation, and the next action a department should take.</a:t>
             </a:r>
             <a:endParaRPr lang="en-US" sz="1550" dirty="0"/>
           </a:p>
@@ -15671,8 +17262,8 @@
         </p:nvSpPr>
         <p:spPr>
           <a:xfrm>
-            <a:off x="9966960" y="6537960"/>
-            <a:ext cx="1645920" cy="201168"/>
+            <a:off x="9646920" y="6537960"/>
+            <a:ext cx="1965960" cy="201168"/>
           </a:xfrm>
           <a:prstGeom prst="rect">
             <a:avLst/>
@@ -15696,7 +17287,7 @@
                 <a:ea typeface="Aptos" pitchFamily="34" charset="-122"/>
                 <a:cs typeface="Aptos" pitchFamily="34" charset="-120"/>
               </a:rPr>
-              <a:t>Â© Paula Soper</a:t>
+              <a:t>Copyright Paula Soper</a:t>
             </a:r>
             <a:endParaRPr lang="en-US" sz="800" dirty="0"/>
           </a:p>
@@ -15743,77 +17334,13 @@
       </p:sp>
       <p:sp>
         <p:nvSpPr>
-          <p:cNvPr id="8" name="Shape 6"/>
+          <p:cNvPr id="8" name="Text 6"/>
           <p:cNvSpPr/>
           <p:nvPr/>
         </p:nvSpPr>
         <p:spPr>
           <a:xfrm>
             <a:off x="640080" y="658368"/>
-            <a:ext cx="420624" cy="420624"/>
-          </a:xfrm>
-          <a:prstGeom prst="ellipse">
-            <a:avLst/>
-          </a:prstGeom>
-          <a:solidFill>
-            <a:srgbClr val="0068B7"/>
-          </a:solidFill>
-          <a:ln w="12700">
-            <a:solidFill>
-              <a:srgbClr val="0068B7"/>
-            </a:solidFill>
-            <a:prstDash val="solid"/>
-          </a:ln>
-        </p:spPr>
-      </p:sp>
-      <p:sp>
-        <p:nvSpPr>
-          <p:cNvPr id="9" name="Text 7"/>
-          <p:cNvSpPr/>
-          <p:nvPr/>
-        </p:nvSpPr>
-        <p:spPr>
-          <a:xfrm>
-            <a:off x="640080" y="731520"/>
-            <a:ext cx="420624" cy="164592"/>
-          </a:xfrm>
-          <a:prstGeom prst="rect">
-            <a:avLst/>
-          </a:prstGeom>
-          <a:noFill/>
-          <a:ln/>
-        </p:spPr>
-        <p:txBody>
-          <a:bodyPr wrap="square" lIns="0" tIns="0" rIns="0" bIns="0" rtlCol="0" anchor="ctr"/>
-          <a:lstStyle/>
-          <a:p>
-            <a:pPr algn="ctr" indent="0" marL="0">
-              <a:buNone/>
-            </a:pPr>
-            <a:r>
-              <a:rPr lang="en-US" sz="1100" b="1" dirty="0">
-                <a:solidFill>
-                  <a:srgbClr val="FFFFFF"/>
-                </a:solidFill>
-                <a:latin typeface="Aptos" pitchFamily="34" charset="0"/>
-                <a:ea typeface="Aptos" pitchFamily="34" charset="-122"/>
-                <a:cs typeface="Aptos" pitchFamily="34" charset="-120"/>
-              </a:rPr>
-              <a:t>4</a:t>
-            </a:r>
-            <a:endParaRPr lang="en-US" sz="1100" dirty="0"/>
-          </a:p>
-        </p:txBody>
-      </p:sp>
-      <p:sp>
-        <p:nvSpPr>
-          <p:cNvPr id="10" name="Text 8"/>
-          <p:cNvSpPr/>
-          <p:nvPr/>
-        </p:nvSpPr>
-        <p:spPr>
-          <a:xfrm>
-            <a:off x="640080" y="621792"/>
             <a:ext cx="10881360" cy="713232"/>
           </a:xfrm>
           <a:prstGeom prst="rect">
@@ -15848,14 +17375,14 @@
       </p:sp>
       <p:sp>
         <p:nvSpPr>
-          <p:cNvPr id="11" name="Text 9"/>
+          <p:cNvPr id="9" name="Text 7"/>
           <p:cNvSpPr/>
           <p:nvPr/>
         </p:nvSpPr>
         <p:spPr>
           <a:xfrm>
             <a:off x="868680" y="1508760"/>
-            <a:ext cx="6537960" cy="4160520"/>
+            <a:ext cx="6309360" cy="4160520"/>
           </a:xfrm>
           <a:prstGeom prst="rect">
             <a:avLst/>
@@ -15914,18 +17441,18 @@
       </p:sp>
       <p:sp>
         <p:nvSpPr>
-          <p:cNvPr id="12" name="Shape 10"/>
-          <p:cNvSpPr/>
-          <p:nvPr/>
-        </p:nvSpPr>
-        <p:spPr>
-          <a:xfrm>
-            <a:off x="7909560" y="1417320"/>
-            <a:ext cx="3154680" cy="1828800"/>
+          <p:cNvPr id="10" name="Shape 8"/>
+          <p:cNvSpPr/>
+          <p:nvPr/>
+        </p:nvSpPr>
+        <p:spPr>
+          <a:xfrm>
+            <a:off x="7635240" y="1325880"/>
+            <a:ext cx="3474720" cy="1325880"/>
           </a:xfrm>
           <a:prstGeom prst="roundRect">
             <a:avLst>
-              <a:gd name="adj" fmla="val 6000"/>
+              <a:gd name="adj" fmla="val 8276"/>
             </a:avLst>
           </a:prstGeom>
           <a:solidFill>
@@ -15941,14 +17468,14 @@
       </p:sp>
       <p:sp>
         <p:nvSpPr>
-          <p:cNvPr id="13" name="Text 11"/>
-          <p:cNvSpPr/>
-          <p:nvPr/>
-        </p:nvSpPr>
-        <p:spPr>
-          <a:xfrm>
-            <a:off x="8074152" y="1563624"/>
-            <a:ext cx="2825496" cy="256032"/>
+          <p:cNvPr id="11" name="Text 9"/>
+          <p:cNvSpPr/>
+          <p:nvPr/>
+        </p:nvSpPr>
+        <p:spPr>
+          <a:xfrm>
+            <a:off x="7799832" y="1472184"/>
+            <a:ext cx="3145536" cy="256032"/>
           </a:xfrm>
           <a:prstGeom prst="rect">
             <a:avLst/>
@@ -15972,7 +17499,7 @@
                 <a:ea typeface="Aptos" pitchFamily="34" charset="-122"/>
                 <a:cs typeface="Aptos" pitchFamily="34" charset="-120"/>
               </a:rPr>
-              <a:t>Key idea</a:t>
+              <a:t>Core concept</a:t>
             </a:r>
             <a:endParaRPr lang="en-US" sz="1300" dirty="0"/>
           </a:p>
@@ -15980,14 +17507,14 @@
       </p:sp>
       <p:sp>
         <p:nvSpPr>
-          <p:cNvPr id="14" name="Text 12"/>
-          <p:cNvSpPr/>
-          <p:nvPr/>
-        </p:nvSpPr>
-        <p:spPr>
-          <a:xfrm>
-            <a:off x="8074152" y="1920240"/>
-            <a:ext cx="2825496" cy="1188720"/>
+          <p:cNvPr id="12" name="Text 10"/>
+          <p:cNvSpPr/>
+          <p:nvPr/>
+        </p:nvSpPr>
+        <p:spPr>
+          <a:xfrm>
+            <a:off x="7799832" y="1828800"/>
+            <a:ext cx="3145536" cy="685800"/>
           </a:xfrm>
           <a:prstGeom prst="rect">
             <a:avLst/>
@@ -16021,18 +17548,159 @@
       </p:sp>
       <p:sp>
         <p:nvSpPr>
-          <p:cNvPr id="15" name="Shape 13"/>
-          <p:cNvSpPr/>
-          <p:nvPr/>
-        </p:nvSpPr>
-        <p:spPr>
-          <a:xfrm>
-            <a:off x="7909560" y="3520440"/>
-            <a:ext cx="3154680" cy="1737360"/>
+          <p:cNvPr id="13" name="Shape 11"/>
+          <p:cNvSpPr/>
+          <p:nvPr/>
+        </p:nvSpPr>
+        <p:spPr>
+          <a:xfrm>
+            <a:off x="7635240" y="2788920"/>
+            <a:ext cx="3474720" cy="1536192"/>
           </a:xfrm>
           <a:prstGeom prst="roundRect">
             <a:avLst>
-              <a:gd name="adj" fmla="val 6316"/>
+              <a:gd name="adj" fmla="val 7143"/>
+            </a:avLst>
+          </a:prstGeom>
+          <a:solidFill>
+            <a:srgbClr val="FFFFFF">
+              <a:alpha val="88000"/>
+            </a:srgbClr>
+          </a:solidFill>
+          <a:ln w="12700">
+            <a:solidFill>
+              <a:srgbClr val="D6E8F2"/>
+            </a:solidFill>
+            <a:prstDash val="solid"/>
+          </a:ln>
+        </p:spPr>
+      </p:sp>
+      <p:sp>
+        <p:nvSpPr>
+          <p:cNvPr id="14" name="Shape 12"/>
+          <p:cNvSpPr/>
+          <p:nvPr/>
+        </p:nvSpPr>
+        <p:spPr>
+          <a:xfrm>
+            <a:off x="8074152" y="3291840"/>
+            <a:ext cx="2596896" cy="749808"/>
+          </a:xfrm>
+          <a:prstGeom prst="rect">
+            <a:avLst/>
+          </a:prstGeom>
+          <a:solidFill>
+            <a:srgbClr val="EAF6F8"/>
+          </a:solidFill>
+          <a:ln w="12700">
+            <a:solidFill>
+              <a:srgbClr val="8ABBD8"/>
+            </a:solidFill>
+            <a:prstDash val="solid"/>
+          </a:ln>
+        </p:spPr>
+      </p:sp>
+      <p:sp>
+        <p:nvSpPr>
+          <p:cNvPr id="15" name="Shape 13"/>
+          <p:cNvSpPr/>
+          <p:nvPr/>
+        </p:nvSpPr>
+        <p:spPr>
+          <a:xfrm>
+            <a:off x="8202168" y="3721608"/>
+            <a:ext cx="2340864" cy="0"/>
+          </a:xfrm>
+          <a:prstGeom prst="line">
+            <a:avLst/>
+          </a:prstGeom>
+          <a:noFill/>
+          <a:ln w="19050">
+            <a:solidFill>
+              <a:srgbClr val="0068B7"/>
+            </a:solidFill>
+            <a:prstDash val="solid"/>
+          </a:ln>
+        </p:spPr>
+      </p:sp>
+      <p:sp>
+        <p:nvSpPr>
+          <p:cNvPr id="16" name="Shape 14"/>
+          <p:cNvSpPr/>
+          <p:nvPr/>
+        </p:nvSpPr>
+        <p:spPr>
+          <a:xfrm>
+            <a:off x="9198864" y="4206240"/>
+            <a:ext cx="347472" cy="347472"/>
+          </a:xfrm>
+          <a:prstGeom prst="ellipse">
+            <a:avLst/>
+          </a:prstGeom>
+          <a:solidFill>
+            <a:srgbClr val="2F8A28"/>
+          </a:solidFill>
+          <a:ln w="12700">
+            <a:solidFill>
+              <a:srgbClr val="2F8A28"/>
+            </a:solidFill>
+            <a:prstDash val="solid"/>
+          </a:ln>
+        </p:spPr>
+      </p:sp>
+      <p:sp>
+        <p:nvSpPr>
+          <p:cNvPr id="17" name="Text 15"/>
+          <p:cNvSpPr/>
+          <p:nvPr/>
+        </p:nvSpPr>
+        <p:spPr>
+          <a:xfrm>
+            <a:off x="7909560" y="3977640"/>
+            <a:ext cx="2926080" cy="182880"/>
+          </a:xfrm>
+          <a:prstGeom prst="rect">
+            <a:avLst/>
+          </a:prstGeom>
+          <a:noFill/>
+          <a:ln/>
+        </p:spPr>
+        <p:txBody>
+          <a:bodyPr wrap="square" lIns="0" tIns="0" rIns="0" bIns="0" rtlCol="0" anchor="ctr"/>
+          <a:lstStyle/>
+          <a:p>
+            <a:pPr algn="ctr" indent="0" marL="0">
+              <a:buNone/>
+            </a:pPr>
+            <a:r>
+              <a:rPr lang="en-US" sz="1000" dirty="0">
+                <a:solidFill>
+                  <a:srgbClr val="003A63"/>
+                </a:solidFill>
+                <a:latin typeface="Aptos" pitchFamily="34" charset="0"/>
+                <a:ea typeface="Aptos" pitchFamily="34" charset="-122"/>
+                <a:cs typeface="Aptos" pitchFamily="34" charset="-120"/>
+              </a:rPr>
+              <a:t>Concept to action</a:t>
+            </a:r>
+            <a:endParaRPr lang="en-US" sz="1000" dirty="0"/>
+          </a:p>
+        </p:txBody>
+      </p:sp>
+      <p:sp>
+        <p:nvSpPr>
+          <p:cNvPr id="18" name="Shape 16"/>
+          <p:cNvSpPr/>
+          <p:nvPr/>
+        </p:nvSpPr>
+        <p:spPr>
+          <a:xfrm>
+            <a:off x="7635240" y="4498848"/>
+            <a:ext cx="3474720" cy="1143000"/>
+          </a:xfrm>
+          <a:prstGeom prst="roundRect">
+            <a:avLst>
+              <a:gd name="adj" fmla="val 9600"/>
             </a:avLst>
           </a:prstGeom>
           <a:solidFill>
@@ -16048,14 +17716,14 @@
       </p:sp>
       <p:sp>
         <p:nvSpPr>
-          <p:cNvPr id="16" name="Text 14"/>
-          <p:cNvSpPr/>
-          <p:nvPr/>
-        </p:nvSpPr>
-        <p:spPr>
-          <a:xfrm>
-            <a:off x="8074152" y="3666744"/>
-            <a:ext cx="2825496" cy="256032"/>
+          <p:cNvPr id="19" name="Text 17"/>
+          <p:cNvSpPr/>
+          <p:nvPr/>
+        </p:nvSpPr>
+        <p:spPr>
+          <a:xfrm>
+            <a:off x="7799832" y="4645152"/>
+            <a:ext cx="3145536" cy="256032"/>
           </a:xfrm>
           <a:prstGeom prst="rect">
             <a:avLst/>
@@ -16079,7 +17747,7 @@
                 <a:ea typeface="Aptos" pitchFamily="34" charset="-122"/>
                 <a:cs typeface="Aptos" pitchFamily="34" charset="-120"/>
               </a:rPr>
-              <a:t>Use this for</a:t>
+              <a:t>Apply it</a:t>
             </a:r>
             <a:endParaRPr lang="en-US" sz="1300" dirty="0"/>
           </a:p>
@@ -16087,14 +17755,14 @@
       </p:sp>
       <p:sp>
         <p:nvSpPr>
-          <p:cNvPr id="17" name="Text 15"/>
-          <p:cNvSpPr/>
-          <p:nvPr/>
-        </p:nvSpPr>
-        <p:spPr>
-          <a:xfrm>
-            <a:off x="8074152" y="4023360"/>
-            <a:ext cx="2825496" cy="1097280"/>
+          <p:cNvPr id="20" name="Text 18"/>
+          <p:cNvSpPr/>
+          <p:nvPr/>
+        </p:nvSpPr>
+        <p:spPr>
+          <a:xfrm>
+            <a:off x="7799832" y="5001768"/>
+            <a:ext cx="3145536" cy="502920"/>
           </a:xfrm>
           <a:prstGeom prst="rect">
             <a:avLst/>
@@ -16120,7 +17788,7 @@
                 <a:ea typeface="Aptos" pitchFamily="34" charset="-122"/>
                 <a:cs typeface="Aptos" pitchFamily="34" charset="-120"/>
               </a:rPr>
-              <a:t>Connect the concept to public health decisions, safeguards, documentation, or implementation work.</a:t>
+              <a:t>Connect the concept to public health purpose, responsible use, required safeguards, documentation, and the next action a department should take.</a:t>
             </a:r>
             <a:endParaRPr lang="en-US" sz="1550" dirty="0"/>
           </a:p>

--- a/downloads/presentations/modules/anl-240.pptx
+++ b/downloads/presentations/modules/anl-240.pptx
@@ -3525,13 +3525,11 @@
             </a:avLst>
           </a:prstGeom>
           <a:solidFill>
-            <a:srgbClr val="FFFFFF">
-              <a:alpha val="88000"/>
-            </a:srgbClr>
+            <a:srgbClr val="FFFFFF"/>
           </a:solidFill>
           <a:ln w="12700">
             <a:solidFill>
-              <a:srgbClr val="D6E8F2"/>
+              <a:srgbClr val="B9D7E6"/>
             </a:solidFill>
             <a:prstDash val="solid"/>
           </a:ln>
@@ -3539,119 +3537,112 @@
       </p:sp>
       <p:sp>
         <p:nvSpPr>
-          <p:cNvPr id="14" name="Shape 12"/>
-          <p:cNvSpPr/>
-          <p:nvPr/>
-        </p:nvSpPr>
-        <p:spPr>
-          <a:xfrm>
-            <a:off x="8074152" y="3291840"/>
-            <a:ext cx="2596896" cy="749808"/>
-          </a:xfrm>
-          <a:prstGeom prst="rect">
-            <a:avLst/>
-          </a:prstGeom>
-          <a:solidFill>
-            <a:srgbClr val="EAF6F8"/>
-          </a:solidFill>
-          <a:ln w="12700">
-            <a:solidFill>
-              <a:srgbClr val="8ABBD8"/>
-            </a:solidFill>
-            <a:prstDash val="solid"/>
-          </a:ln>
-        </p:spPr>
-      </p:sp>
-      <p:sp>
-        <p:nvSpPr>
-          <p:cNvPr id="15" name="Shape 13"/>
-          <p:cNvSpPr/>
-          <p:nvPr/>
-        </p:nvSpPr>
-        <p:spPr>
-          <a:xfrm>
-            <a:off x="8202168" y="3721608"/>
-            <a:ext cx="2340864" cy="0"/>
-          </a:xfrm>
-          <a:prstGeom prst="line">
-            <a:avLst/>
-          </a:prstGeom>
-          <a:noFill/>
-          <a:ln w="19050">
-            <a:solidFill>
-              <a:srgbClr val="0068B7"/>
-            </a:solidFill>
-            <a:prstDash val="solid"/>
-          </a:ln>
-        </p:spPr>
+          <p:cNvPr id="14" name="Text 12"/>
+          <p:cNvSpPr/>
+          <p:nvPr/>
+        </p:nvSpPr>
+        <p:spPr>
+          <a:xfrm>
+            <a:off x="7799832" y="2935224"/>
+            <a:ext cx="3145536" cy="256032"/>
+          </a:xfrm>
+          <a:prstGeom prst="rect">
+            <a:avLst/>
+          </a:prstGeom>
+          <a:noFill/>
+          <a:ln/>
+        </p:spPr>
+        <p:txBody>
+          <a:bodyPr wrap="square" lIns="0" tIns="0" rIns="0" bIns="0" rtlCol="0" anchor="ctr"/>
+          <a:lstStyle/>
+          <a:p>
+            <a:pPr indent="0" marL="0">
+              <a:buNone/>
+            </a:pPr>
+            <a:r>
+              <a:rPr lang="en-US" sz="1300" b="1" dirty="0">
+                <a:solidFill>
+                  <a:srgbClr val="0068B7"/>
+                </a:solidFill>
+                <a:latin typeface="Aptos" pitchFamily="34" charset="0"/>
+                <a:ea typeface="Aptos" pitchFamily="34" charset="-122"/>
+                <a:cs typeface="Aptos" pitchFamily="34" charset="-120"/>
+              </a:rPr>
+              <a:t>Concept checkpoints</a:t>
+            </a:r>
+            <a:endParaRPr lang="en-US" sz="1300" dirty="0"/>
+          </a:p>
+        </p:txBody>
+      </p:sp>
+      <p:sp>
+        <p:nvSpPr>
+          <p:cNvPr id="15" name="Text 13"/>
+          <p:cNvSpPr/>
+          <p:nvPr/>
+        </p:nvSpPr>
+        <p:spPr>
+          <a:xfrm>
+            <a:off x="7818120" y="3300984"/>
+            <a:ext cx="3090672" cy="877824"/>
+          </a:xfrm>
+          <a:prstGeom prst="rect">
+            <a:avLst/>
+          </a:prstGeom>
+          <a:noFill/>
+          <a:ln/>
+        </p:spPr>
+        <p:txBody>
+          <a:bodyPr wrap="square" lIns="254" tIns="254" rIns="254" bIns="254" rtlCol="0" anchor="t">
+            <a:normAutofit/>
+          </a:bodyPr>
+          <a:lstStyle/>
+          <a:p>
+            <a:r>
+              <a:rPr lang="en-US" sz="1380" dirty="0">
+                <a:solidFill>
+                  <a:srgbClr val="17364A"/>
+                </a:solidFill>
+                <a:latin typeface="Aptos" pitchFamily="34" charset="0"/>
+                <a:ea typeface="Aptos" pitchFamily="34" charset="-122"/>
+                <a:cs typeface="Aptos" pitchFamily="34" charset="-120"/>
+              </a:rPr>
+              <a:t>A baseline may use several prior weeks, several prior years, a regression model, seasonal.</a:t>
+            </a:r>
+            <a:endParaRPr lang="en-US" sz="1380" dirty="0"/>
+          </a:p>
+          <a:p>
+            <a:r>
+              <a:rPr lang="en-US" sz="1380" dirty="0">
+                <a:solidFill>
+                  <a:srgbClr val="17364A"/>
+                </a:solidFill>
+                <a:latin typeface="Aptos" pitchFamily="34" charset="0"/>
+                <a:ea typeface="Aptos" pitchFamily="34" charset="-122"/>
+                <a:cs typeface="Aptos" pitchFamily="34" charset="-120"/>
+              </a:rPr>
+              <a:t>A short baseline may adapt quickly but miss seasonal context.</a:t>
+            </a:r>
+            <a:endParaRPr lang="en-US" sz="1380" dirty="0"/>
+          </a:p>
+          <a:p>
+            <a:r>
+              <a:rPr lang="en-US" sz="1380" dirty="0">
+                <a:solidFill>
+                  <a:srgbClr val="17364A"/>
+                </a:solidFill>
+                <a:latin typeface="Aptos" pitchFamily="34" charset="0"/>
+                <a:ea typeface="Aptos" pitchFamily="34" charset="-122"/>
+                <a:cs typeface="Aptos" pitchFamily="34" charset="-120"/>
+              </a:rPr>
+              <a:t>A long baseline may capture seasonality but fail when underlying systems change.</a:t>
+            </a:r>
+            <a:endParaRPr lang="en-US" sz="1380" dirty="0"/>
+          </a:p>
+        </p:txBody>
       </p:sp>
       <p:sp>
         <p:nvSpPr>
           <p:cNvPr id="16" name="Shape 14"/>
-          <p:cNvSpPr/>
-          <p:nvPr/>
-        </p:nvSpPr>
-        <p:spPr>
-          <a:xfrm>
-            <a:off x="9198864" y="4206240"/>
-            <a:ext cx="347472" cy="347472"/>
-          </a:xfrm>
-          <a:prstGeom prst="ellipse">
-            <a:avLst/>
-          </a:prstGeom>
-          <a:solidFill>
-            <a:srgbClr val="2F8A28"/>
-          </a:solidFill>
-          <a:ln w="12700">
-            <a:solidFill>
-              <a:srgbClr val="2F8A28"/>
-            </a:solidFill>
-            <a:prstDash val="solid"/>
-          </a:ln>
-        </p:spPr>
-      </p:sp>
-      <p:sp>
-        <p:nvSpPr>
-          <p:cNvPr id="17" name="Text 15"/>
-          <p:cNvSpPr/>
-          <p:nvPr/>
-        </p:nvSpPr>
-        <p:spPr>
-          <a:xfrm>
-            <a:off x="7909560" y="3977640"/>
-            <a:ext cx="2926080" cy="182880"/>
-          </a:xfrm>
-          <a:prstGeom prst="rect">
-            <a:avLst/>
-          </a:prstGeom>
-          <a:noFill/>
-          <a:ln/>
-        </p:spPr>
-        <p:txBody>
-          <a:bodyPr wrap="square" lIns="0" tIns="0" rIns="0" bIns="0" rtlCol="0" anchor="ctr"/>
-          <a:lstStyle/>
-          <a:p>
-            <a:pPr algn="ctr" indent="0" marL="0">
-              <a:buNone/>
-            </a:pPr>
-            <a:r>
-              <a:rPr lang="en-US" sz="1000" dirty="0">
-                <a:solidFill>
-                  <a:srgbClr val="003A63"/>
-                </a:solidFill>
-                <a:latin typeface="Aptos" pitchFamily="34" charset="0"/>
-                <a:ea typeface="Aptos" pitchFamily="34" charset="-122"/>
-                <a:cs typeface="Aptos" pitchFamily="34" charset="-120"/>
-              </a:rPr>
-              <a:t>Concept to action</a:t>
-            </a:r>
-            <a:endParaRPr lang="en-US" sz="1000" dirty="0"/>
-          </a:p>
-        </p:txBody>
-      </p:sp>
-      <p:sp>
-        <p:nvSpPr>
-          <p:cNvPr id="18" name="Shape 16"/>
           <p:cNvSpPr/>
           <p:nvPr/>
         </p:nvSpPr>
@@ -3678,7 +3669,7 @@
       </p:sp>
       <p:sp>
         <p:nvSpPr>
-          <p:cNvPr id="19" name="Text 17"/>
+          <p:cNvPr id="17" name="Text 15"/>
           <p:cNvSpPr/>
           <p:nvPr/>
         </p:nvSpPr>
@@ -3717,7 +3708,7 @@
       </p:sp>
       <p:sp>
         <p:nvSpPr>
-          <p:cNvPr id="20" name="Text 18"/>
+          <p:cNvPr id="18" name="Text 16"/>
           <p:cNvSpPr/>
           <p:nvPr/>
         </p:nvSpPr>
@@ -4225,13 +4216,11 @@
             </a:avLst>
           </a:prstGeom>
           <a:solidFill>
-            <a:srgbClr val="FFFFFF">
-              <a:alpha val="88000"/>
-            </a:srgbClr>
+            <a:srgbClr val="FFFFFF"/>
           </a:solidFill>
           <a:ln w="12700">
             <a:solidFill>
-              <a:srgbClr val="D6E8F2"/>
+              <a:srgbClr val="B9D7E6"/>
             </a:solidFill>
             <a:prstDash val="solid"/>
           </a:ln>
@@ -4239,119 +4228,112 @@
       </p:sp>
       <p:sp>
         <p:nvSpPr>
-          <p:cNvPr id="14" name="Shape 12"/>
-          <p:cNvSpPr/>
-          <p:nvPr/>
-        </p:nvSpPr>
-        <p:spPr>
-          <a:xfrm>
-            <a:off x="8074152" y="3291840"/>
-            <a:ext cx="2596896" cy="749808"/>
-          </a:xfrm>
-          <a:prstGeom prst="rect">
-            <a:avLst/>
-          </a:prstGeom>
-          <a:solidFill>
-            <a:srgbClr val="EAF6F8"/>
-          </a:solidFill>
-          <a:ln w="12700">
-            <a:solidFill>
-              <a:srgbClr val="8ABBD8"/>
-            </a:solidFill>
-            <a:prstDash val="solid"/>
-          </a:ln>
-        </p:spPr>
-      </p:sp>
-      <p:sp>
-        <p:nvSpPr>
-          <p:cNvPr id="15" name="Shape 13"/>
-          <p:cNvSpPr/>
-          <p:nvPr/>
-        </p:nvSpPr>
-        <p:spPr>
-          <a:xfrm>
-            <a:off x="8202168" y="3721608"/>
-            <a:ext cx="2340864" cy="0"/>
-          </a:xfrm>
-          <a:prstGeom prst="line">
-            <a:avLst/>
-          </a:prstGeom>
-          <a:noFill/>
-          <a:ln w="19050">
-            <a:solidFill>
-              <a:srgbClr val="0068B7"/>
-            </a:solidFill>
-            <a:prstDash val="solid"/>
-          </a:ln>
-        </p:spPr>
+          <p:cNvPr id="14" name="Text 12"/>
+          <p:cNvSpPr/>
+          <p:nvPr/>
+        </p:nvSpPr>
+        <p:spPr>
+          <a:xfrm>
+            <a:off x="7799832" y="2935224"/>
+            <a:ext cx="3145536" cy="256032"/>
+          </a:xfrm>
+          <a:prstGeom prst="rect">
+            <a:avLst/>
+          </a:prstGeom>
+          <a:noFill/>
+          <a:ln/>
+        </p:spPr>
+        <p:txBody>
+          <a:bodyPr wrap="square" lIns="0" tIns="0" rIns="0" bIns="0" rtlCol="0" anchor="ctr"/>
+          <a:lstStyle/>
+          <a:p>
+            <a:pPr indent="0" marL="0">
+              <a:buNone/>
+            </a:pPr>
+            <a:r>
+              <a:rPr lang="en-US" sz="1300" b="1" dirty="0">
+                <a:solidFill>
+                  <a:srgbClr val="0068B7"/>
+                </a:solidFill>
+                <a:latin typeface="Aptos" pitchFamily="34" charset="0"/>
+                <a:ea typeface="Aptos" pitchFamily="34" charset="-122"/>
+                <a:cs typeface="Aptos" pitchFamily="34" charset="-120"/>
+              </a:rPr>
+              <a:t>Concept checkpoints</a:t>
+            </a:r>
+            <a:endParaRPr lang="en-US" sz="1300" dirty="0"/>
+          </a:p>
+        </p:txBody>
+      </p:sp>
+      <p:sp>
+        <p:nvSpPr>
+          <p:cNvPr id="15" name="Text 13"/>
+          <p:cNvSpPr/>
+          <p:nvPr/>
+        </p:nvSpPr>
+        <p:spPr>
+          <a:xfrm>
+            <a:off x="7818120" y="3300984"/>
+            <a:ext cx="3090672" cy="877824"/>
+          </a:xfrm>
+          <a:prstGeom prst="rect">
+            <a:avLst/>
+          </a:prstGeom>
+          <a:noFill/>
+          <a:ln/>
+        </p:spPr>
+        <p:txBody>
+          <a:bodyPr wrap="square" lIns="254" tIns="254" rIns="254" bIns="254" rtlCol="0" anchor="t">
+            <a:normAutofit/>
+          </a:bodyPr>
+          <a:lstStyle/>
+          <a:p>
+            <a:r>
+              <a:rPr lang="en-US" sz="1380" dirty="0">
+                <a:solidFill>
+                  <a:srgbClr val="17364A"/>
+                </a:solidFill>
+                <a:latin typeface="Aptos" pitchFamily="34" charset="0"/>
+                <a:ea typeface="Aptos" pitchFamily="34" charset="-122"/>
+                <a:cs typeface="Aptos" pitchFamily="34" charset="-120"/>
+              </a:rPr>
+              <a:t>More advanced methods may use regression, Bayesian approaches, control charts, machine.</a:t>
+            </a:r>
+            <a:endParaRPr lang="en-US" sz="1380" dirty="0"/>
+          </a:p>
+          <a:p>
+            <a:r>
+              <a:rPr lang="en-US" sz="1380" dirty="0">
+                <a:solidFill>
+                  <a:srgbClr val="17364A"/>
+                </a:solidFill>
+                <a:latin typeface="Aptos" pitchFamily="34" charset="0"/>
+                <a:ea typeface="Aptos" pitchFamily="34" charset="-122"/>
+                <a:cs typeface="Aptos" pitchFamily="34" charset="-120"/>
+              </a:rPr>
+              <a:t>More complex methods are not automatically better.</a:t>
+            </a:r>
+            <a:endParaRPr lang="en-US" sz="1380" dirty="0"/>
+          </a:p>
+          <a:p>
+            <a:r>
+              <a:rPr lang="en-US" sz="1380" dirty="0">
+                <a:solidFill>
+                  <a:srgbClr val="17364A"/>
+                </a:solidFill>
+                <a:latin typeface="Aptos" pitchFamily="34" charset="0"/>
+                <a:ea typeface="Aptos" pitchFamily="34" charset="-122"/>
+                <a:cs typeface="Aptos" pitchFamily="34" charset="-120"/>
+              </a:rPr>
+              <a:t>In public health practice, interpretability, stability, transparency, and workflow fit.</a:t>
+            </a:r>
+            <a:endParaRPr lang="en-US" sz="1380" dirty="0"/>
+          </a:p>
+        </p:txBody>
       </p:sp>
       <p:sp>
         <p:nvSpPr>
           <p:cNvPr id="16" name="Shape 14"/>
-          <p:cNvSpPr/>
-          <p:nvPr/>
-        </p:nvSpPr>
-        <p:spPr>
-          <a:xfrm>
-            <a:off x="9198864" y="4206240"/>
-            <a:ext cx="347472" cy="347472"/>
-          </a:xfrm>
-          <a:prstGeom prst="ellipse">
-            <a:avLst/>
-          </a:prstGeom>
-          <a:solidFill>
-            <a:srgbClr val="2F8A28"/>
-          </a:solidFill>
-          <a:ln w="12700">
-            <a:solidFill>
-              <a:srgbClr val="2F8A28"/>
-            </a:solidFill>
-            <a:prstDash val="solid"/>
-          </a:ln>
-        </p:spPr>
-      </p:sp>
-      <p:sp>
-        <p:nvSpPr>
-          <p:cNvPr id="17" name="Text 15"/>
-          <p:cNvSpPr/>
-          <p:nvPr/>
-        </p:nvSpPr>
-        <p:spPr>
-          <a:xfrm>
-            <a:off x="7909560" y="3977640"/>
-            <a:ext cx="2926080" cy="182880"/>
-          </a:xfrm>
-          <a:prstGeom prst="rect">
-            <a:avLst/>
-          </a:prstGeom>
-          <a:noFill/>
-          <a:ln/>
-        </p:spPr>
-        <p:txBody>
-          <a:bodyPr wrap="square" lIns="0" tIns="0" rIns="0" bIns="0" rtlCol="0" anchor="ctr"/>
-          <a:lstStyle/>
-          <a:p>
-            <a:pPr algn="ctr" indent="0" marL="0">
-              <a:buNone/>
-            </a:pPr>
-            <a:r>
-              <a:rPr lang="en-US" sz="1000" dirty="0">
-                <a:solidFill>
-                  <a:srgbClr val="003A63"/>
-                </a:solidFill>
-                <a:latin typeface="Aptos" pitchFamily="34" charset="0"/>
-                <a:ea typeface="Aptos" pitchFamily="34" charset="-122"/>
-                <a:cs typeface="Aptos" pitchFamily="34" charset="-120"/>
-              </a:rPr>
-              <a:t>Concept to action</a:t>
-            </a:r>
-            <a:endParaRPr lang="en-US" sz="1000" dirty="0"/>
-          </a:p>
-        </p:txBody>
-      </p:sp>
-      <p:sp>
-        <p:nvSpPr>
-          <p:cNvPr id="18" name="Shape 16"/>
           <p:cNvSpPr/>
           <p:nvPr/>
         </p:nvSpPr>
@@ -4378,7 +4360,7 @@
       </p:sp>
       <p:sp>
         <p:nvSpPr>
-          <p:cNvPr id="19" name="Text 17"/>
+          <p:cNvPr id="17" name="Text 15"/>
           <p:cNvSpPr/>
           <p:nvPr/>
         </p:nvSpPr>
@@ -4417,7 +4399,7 @@
       </p:sp>
       <p:sp>
         <p:nvSpPr>
-          <p:cNvPr id="20" name="Text 18"/>
+          <p:cNvPr id="18" name="Text 16"/>
           <p:cNvSpPr/>
           <p:nvPr/>
         </p:nvSpPr>
@@ -4925,13 +4907,11 @@
             </a:avLst>
           </a:prstGeom>
           <a:solidFill>
-            <a:srgbClr val="FFFFFF">
-              <a:alpha val="88000"/>
-            </a:srgbClr>
+            <a:srgbClr val="FFFFFF"/>
           </a:solidFill>
           <a:ln w="12700">
             <a:solidFill>
-              <a:srgbClr val="D6E8F2"/>
+              <a:srgbClr val="B9D7E6"/>
             </a:solidFill>
             <a:prstDash val="solid"/>
           </a:ln>
@@ -4939,26 +4919,42 @@
       </p:sp>
       <p:sp>
         <p:nvSpPr>
-          <p:cNvPr id="14" name="Shape 12"/>
-          <p:cNvSpPr/>
-          <p:nvPr/>
-        </p:nvSpPr>
-        <p:spPr>
-          <a:xfrm>
-            <a:off x="8046720" y="3108960"/>
-            <a:ext cx="2651760" cy="896112"/>
-          </a:xfrm>
-          <a:prstGeom prst="arc">
-            <a:avLst/>
-          </a:prstGeom>
-          <a:noFill/>
-          <a:ln w="25400">
-            <a:solidFill>
-              <a:srgbClr val="0068B7"/>
-            </a:solidFill>
-            <a:prstDash val="solid"/>
-          </a:ln>
-        </p:spPr>
+          <p:cNvPr id="14" name="Text 12"/>
+          <p:cNvSpPr/>
+          <p:nvPr/>
+        </p:nvSpPr>
+        <p:spPr>
+          <a:xfrm>
+            <a:off x="7799832" y="2935224"/>
+            <a:ext cx="3145536" cy="256032"/>
+          </a:xfrm>
+          <a:prstGeom prst="rect">
+            <a:avLst/>
+          </a:prstGeom>
+          <a:noFill/>
+          <a:ln/>
+        </p:spPr>
+        <p:txBody>
+          <a:bodyPr wrap="square" lIns="0" tIns="0" rIns="0" bIns="0" rtlCol="0" anchor="ctr"/>
+          <a:lstStyle/>
+          <a:p>
+            <a:pPr indent="0" marL="0">
+              <a:buNone/>
+            </a:pPr>
+            <a:r>
+              <a:rPr lang="en-US" sz="1300" b="1" dirty="0">
+                <a:solidFill>
+                  <a:srgbClr val="0068B7"/>
+                </a:solidFill>
+                <a:latin typeface="Aptos" pitchFamily="34" charset="0"/>
+                <a:ea typeface="Aptos" pitchFamily="34" charset="-122"/>
+                <a:cs typeface="Aptos" pitchFamily="34" charset="-120"/>
+              </a:rPr>
+              <a:t>Concept checkpoints</a:t>
+            </a:r>
+            <a:endParaRPr lang="en-US" sz="1300" dirty="0"/>
+          </a:p>
+        </p:txBody>
       </p:sp>
       <p:sp>
         <p:nvSpPr>
@@ -4968,102 +4964,67 @@
         </p:nvSpPr>
         <p:spPr>
           <a:xfrm>
-            <a:off x="7909560" y="3099816"/>
-            <a:ext cx="2926080" cy="256032"/>
-          </a:xfrm>
-          <a:prstGeom prst="rect">
-            <a:avLst/>
-          </a:prstGeom>
-          <a:noFill/>
-          <a:ln/>
-        </p:spPr>
-        <p:txBody>
-          <a:bodyPr wrap="square" lIns="0" tIns="0" rIns="0" bIns="0" rtlCol="0" anchor="ctr"/>
-          <a:lstStyle/>
-          <a:p>
-            <a:pPr algn="ctr" indent="0" marL="0">
-              <a:buNone/>
-            </a:pPr>
-            <a:r>
-              <a:rPr lang="en-US" sz="1500" b="1" dirty="0">
-                <a:solidFill>
-                  <a:srgbClr val="003A63"/>
-                </a:solidFill>
-                <a:latin typeface="Aptos" pitchFamily="34" charset="0"/>
-                <a:ea typeface="Aptos" pitchFamily="34" charset="-122"/>
-                <a:cs typeface="Aptos" pitchFamily="34" charset="-120"/>
-              </a:rPr>
-              <a:t>Risk</a:t>
-            </a:r>
-            <a:endParaRPr lang="en-US" sz="1500" dirty="0"/>
+            <a:off x="7818120" y="3300984"/>
+            <a:ext cx="3090672" cy="877824"/>
+          </a:xfrm>
+          <a:prstGeom prst="rect">
+            <a:avLst/>
+          </a:prstGeom>
+          <a:noFill/>
+          <a:ln/>
+        </p:spPr>
+        <p:txBody>
+          <a:bodyPr wrap="square" lIns="254" tIns="254" rIns="254" bIns="254" rtlCol="0" anchor="t">
+            <a:normAutofit/>
+          </a:bodyPr>
+          <a:lstStyle/>
+          <a:p>
+            <a:r>
+              <a:rPr lang="en-US" sz="1380" dirty="0">
+                <a:solidFill>
+                  <a:srgbClr val="17364A"/>
+                </a:solidFill>
+                <a:latin typeface="Aptos" pitchFamily="34" charset="0"/>
+                <a:ea typeface="Aptos" pitchFamily="34" charset="-122"/>
+                <a:cs typeface="Aptos" pitchFamily="34" charset="-120"/>
+              </a:rPr>
+              <a:t>Alert fatigue.</a:t>
+            </a:r>
+            <a:endParaRPr lang="en-US" sz="1380" dirty="0"/>
+          </a:p>
+          <a:p>
+            <a:r>
+              <a:rPr lang="en-US" sz="1380" dirty="0">
+                <a:solidFill>
+                  <a:srgbClr val="17364A"/>
+                </a:solidFill>
+                <a:latin typeface="Aptos" pitchFamily="34" charset="0"/>
+                <a:ea typeface="Aptos" pitchFamily="34" charset="-122"/>
+                <a:cs typeface="Aptos" pitchFamily="34" charset="-120"/>
+              </a:rPr>
+              <a:t>Too many alerts can reduce attention.</a:t>
+            </a:r>
+            <a:endParaRPr lang="en-US" sz="1380" dirty="0"/>
+          </a:p>
+          <a:p>
+            <a:r>
+              <a:rPr lang="en-US" sz="1380" dirty="0">
+                <a:solidFill>
+                  <a:srgbClr val="17364A"/>
+                </a:solidFill>
+                <a:latin typeface="Aptos" pitchFamily="34" charset="0"/>
+                <a:ea typeface="Aptos" pitchFamily="34" charset="-122"/>
+                <a:cs typeface="Aptos" pitchFamily="34" charset="-120"/>
+              </a:rPr>
+              <a:t>Guardrails include threshold tuning, tiered alerting, user feedback, and periodic alert.</a:t>
+            </a:r>
+            <a:endParaRPr lang="en-US" sz="1380" dirty="0"/>
           </a:p>
         </p:txBody>
       </p:sp>
       <p:sp>
         <p:nvSpPr>
           <p:cNvPr id="16" name="Shape 14"/>
-          <p:cNvSpPr/>
-          <p:nvPr/>
-        </p:nvSpPr>
-        <p:spPr>
-          <a:xfrm>
-            <a:off x="8366760" y="3639312"/>
-            <a:ext cx="2011680" cy="0"/>
-          </a:xfrm>
-          <a:prstGeom prst="line">
-            <a:avLst/>
-          </a:prstGeom>
-          <a:noFill/>
-          <a:ln w="63500">
-            <a:solidFill>
-              <a:srgbClr val="2F8A28"/>
-            </a:solidFill>
-            <a:prstDash val="solid"/>
-          </a:ln>
-        </p:spPr>
-      </p:sp>
-      <p:sp>
-        <p:nvSpPr>
-          <p:cNvPr id="17" name="Text 15"/>
-          <p:cNvSpPr/>
-          <p:nvPr/>
-        </p:nvSpPr>
-        <p:spPr>
-          <a:xfrm>
-            <a:off x="7909560" y="3849624"/>
-            <a:ext cx="2926080" cy="164592"/>
-          </a:xfrm>
-          <a:prstGeom prst="rect">
-            <a:avLst/>
-          </a:prstGeom>
-          <a:noFill/>
-          <a:ln/>
-        </p:spPr>
-        <p:txBody>
-          <a:bodyPr wrap="square" lIns="0" tIns="0" rIns="0" bIns="0" rtlCol="0" anchor="ctr"/>
-          <a:lstStyle/>
-          <a:p>
-            <a:pPr algn="ctr" indent="0" marL="0">
-              <a:buNone/>
-            </a:pPr>
-            <a:r>
-              <a:rPr lang="en-US" sz="900" dirty="0">
-                <a:solidFill>
-                  <a:srgbClr val="003A63"/>
-                </a:solidFill>
-                <a:latin typeface="Aptos" pitchFamily="34" charset="0"/>
-                <a:ea typeface="Aptos" pitchFamily="34" charset="-122"/>
-                <a:cs typeface="Aptos" pitchFamily="34" charset="-120"/>
-              </a:rPr>
-              <a:t>Human review</a:t>
-            </a:r>
-            <a:endParaRPr lang="en-US" sz="900" dirty="0"/>
-          </a:p>
-        </p:txBody>
-      </p:sp>
-      <p:sp>
-        <p:nvSpPr>
-          <p:cNvPr id="18" name="Shape 16"/>
           <p:cNvSpPr/>
           <p:nvPr/>
         </p:nvSpPr>
@@ -5090,7 +5051,7 @@
       </p:sp>
       <p:sp>
         <p:nvSpPr>
-          <p:cNvPr id="19" name="Text 17"/>
+          <p:cNvPr id="17" name="Text 15"/>
           <p:cNvSpPr/>
           <p:nvPr/>
         </p:nvSpPr>
@@ -5129,7 +5090,7 @@
       </p:sp>
       <p:sp>
         <p:nvSpPr>
-          <p:cNvPr id="20" name="Text 18"/>
+          <p:cNvPr id="18" name="Text 16"/>
           <p:cNvSpPr/>
           <p:nvPr/>
         </p:nvSpPr>
@@ -5637,13 +5598,11 @@
             </a:avLst>
           </a:prstGeom>
           <a:solidFill>
-            <a:srgbClr val="FFFFFF">
-              <a:alpha val="88000"/>
-            </a:srgbClr>
+            <a:srgbClr val="FFFFFF"/>
           </a:solidFill>
           <a:ln w="12700">
             <a:solidFill>
-              <a:srgbClr val="D6E8F2"/>
+              <a:srgbClr val="B9D7E6"/>
             </a:solidFill>
             <a:prstDash val="solid"/>
           </a:ln>
@@ -5651,26 +5610,42 @@
       </p:sp>
       <p:sp>
         <p:nvSpPr>
-          <p:cNvPr id="14" name="Shape 12"/>
-          <p:cNvSpPr/>
-          <p:nvPr/>
-        </p:nvSpPr>
-        <p:spPr>
-          <a:xfrm>
-            <a:off x="8046720" y="3108960"/>
-            <a:ext cx="2651760" cy="896112"/>
-          </a:xfrm>
-          <a:prstGeom prst="arc">
-            <a:avLst/>
-          </a:prstGeom>
-          <a:noFill/>
-          <a:ln w="25400">
-            <a:solidFill>
-              <a:srgbClr val="0068B7"/>
-            </a:solidFill>
-            <a:prstDash val="solid"/>
-          </a:ln>
-        </p:spPr>
+          <p:cNvPr id="14" name="Text 12"/>
+          <p:cNvSpPr/>
+          <p:nvPr/>
+        </p:nvSpPr>
+        <p:spPr>
+          <a:xfrm>
+            <a:off x="7799832" y="2935224"/>
+            <a:ext cx="3145536" cy="256032"/>
+          </a:xfrm>
+          <a:prstGeom prst="rect">
+            <a:avLst/>
+          </a:prstGeom>
+          <a:noFill/>
+          <a:ln/>
+        </p:spPr>
+        <p:txBody>
+          <a:bodyPr wrap="square" lIns="0" tIns="0" rIns="0" bIns="0" rtlCol="0" anchor="ctr"/>
+          <a:lstStyle/>
+          <a:p>
+            <a:pPr indent="0" marL="0">
+              <a:buNone/>
+            </a:pPr>
+            <a:r>
+              <a:rPr lang="en-US" sz="1300" b="1" dirty="0">
+                <a:solidFill>
+                  <a:srgbClr val="0068B7"/>
+                </a:solidFill>
+                <a:latin typeface="Aptos" pitchFamily="34" charset="0"/>
+                <a:ea typeface="Aptos" pitchFamily="34" charset="-122"/>
+                <a:cs typeface="Aptos" pitchFamily="34" charset="-120"/>
+              </a:rPr>
+              <a:t>Concept checkpoints</a:t>
+            </a:r>
+            <a:endParaRPr lang="en-US" sz="1300" dirty="0"/>
+          </a:p>
+        </p:txBody>
       </p:sp>
       <p:sp>
         <p:nvSpPr>
@@ -5680,102 +5655,67 @@
         </p:nvSpPr>
         <p:spPr>
           <a:xfrm>
-            <a:off x="7909560" y="3099816"/>
-            <a:ext cx="2926080" cy="256032"/>
-          </a:xfrm>
-          <a:prstGeom prst="rect">
-            <a:avLst/>
-          </a:prstGeom>
-          <a:noFill/>
-          <a:ln/>
-        </p:spPr>
-        <p:txBody>
-          <a:bodyPr wrap="square" lIns="0" tIns="0" rIns="0" bIns="0" rtlCol="0" anchor="ctr"/>
-          <a:lstStyle/>
-          <a:p>
-            <a:pPr algn="ctr" indent="0" marL="0">
-              <a:buNone/>
-            </a:pPr>
-            <a:r>
-              <a:rPr lang="en-US" sz="1500" b="1" dirty="0">
-                <a:solidFill>
-                  <a:srgbClr val="003A63"/>
-                </a:solidFill>
-                <a:latin typeface="Aptos" pitchFamily="34" charset="0"/>
-                <a:ea typeface="Aptos" pitchFamily="34" charset="-122"/>
-                <a:cs typeface="Aptos" pitchFamily="34" charset="-120"/>
-              </a:rPr>
-              <a:t>Risk</a:t>
-            </a:r>
-            <a:endParaRPr lang="en-US" sz="1500" dirty="0"/>
+            <a:off x="7818120" y="3300984"/>
+            <a:ext cx="3090672" cy="877824"/>
+          </a:xfrm>
+          <a:prstGeom prst="rect">
+            <a:avLst/>
+          </a:prstGeom>
+          <a:noFill/>
+          <a:ln/>
+        </p:spPr>
+        <p:txBody>
+          <a:bodyPr wrap="square" lIns="254" tIns="254" rIns="254" bIns="254" rtlCol="0" anchor="t">
+            <a:normAutofit/>
+          </a:bodyPr>
+          <a:lstStyle/>
+          <a:p>
+            <a:r>
+              <a:rPr lang="en-US" sz="1380" dirty="0">
+                <a:solidFill>
+                  <a:srgbClr val="17364A"/>
+                </a:solidFill>
+                <a:latin typeface="Aptos" pitchFamily="34" charset="0"/>
+                <a:ea typeface="Aptos" pitchFamily="34" charset="-122"/>
+                <a:cs typeface="Aptos" pitchFamily="34" charset="-120"/>
+              </a:rPr>
+              <a:t>Missed emerging events.</a:t>
+            </a:r>
+            <a:endParaRPr lang="en-US" sz="1380" dirty="0"/>
+          </a:p>
+          <a:p>
+            <a:r>
+              <a:rPr lang="en-US" sz="1380" dirty="0">
+                <a:solidFill>
+                  <a:srgbClr val="17364A"/>
+                </a:solidFill>
+                <a:latin typeface="Aptos" pitchFamily="34" charset="0"/>
+                <a:ea typeface="Aptos" pitchFamily="34" charset="-122"/>
+                <a:cs typeface="Aptos" pitchFamily="34" charset="-120"/>
+              </a:rPr>
+              <a:t>Overly conservative thresholds may miss early signals.</a:t>
+            </a:r>
+            <a:endParaRPr lang="en-US" sz="1380" dirty="0"/>
+          </a:p>
+          <a:p>
+            <a:r>
+              <a:rPr lang="en-US" sz="1380" dirty="0">
+                <a:solidFill>
+                  <a:srgbClr val="17364A"/>
+                </a:solidFill>
+                <a:latin typeface="Aptos" pitchFamily="34" charset="0"/>
+                <a:ea typeface="Aptos" pitchFamily="34" charset="-122"/>
+                <a:cs typeface="Aptos" pitchFamily="34" charset="-120"/>
+              </a:rPr>
+              <a:t>Guardrails include multiple indicators, sensitivity review, and escalation pathways for.</a:t>
+            </a:r>
+            <a:endParaRPr lang="en-US" sz="1380" dirty="0"/>
           </a:p>
         </p:txBody>
       </p:sp>
       <p:sp>
         <p:nvSpPr>
           <p:cNvPr id="16" name="Shape 14"/>
-          <p:cNvSpPr/>
-          <p:nvPr/>
-        </p:nvSpPr>
-        <p:spPr>
-          <a:xfrm>
-            <a:off x="8366760" y="3639312"/>
-            <a:ext cx="2011680" cy="0"/>
-          </a:xfrm>
-          <a:prstGeom prst="line">
-            <a:avLst/>
-          </a:prstGeom>
-          <a:noFill/>
-          <a:ln w="63500">
-            <a:solidFill>
-              <a:srgbClr val="2F8A28"/>
-            </a:solidFill>
-            <a:prstDash val="solid"/>
-          </a:ln>
-        </p:spPr>
-      </p:sp>
-      <p:sp>
-        <p:nvSpPr>
-          <p:cNvPr id="17" name="Text 15"/>
-          <p:cNvSpPr/>
-          <p:nvPr/>
-        </p:nvSpPr>
-        <p:spPr>
-          <a:xfrm>
-            <a:off x="7909560" y="3849624"/>
-            <a:ext cx="2926080" cy="164592"/>
-          </a:xfrm>
-          <a:prstGeom prst="rect">
-            <a:avLst/>
-          </a:prstGeom>
-          <a:noFill/>
-          <a:ln/>
-        </p:spPr>
-        <p:txBody>
-          <a:bodyPr wrap="square" lIns="0" tIns="0" rIns="0" bIns="0" rtlCol="0" anchor="ctr"/>
-          <a:lstStyle/>
-          <a:p>
-            <a:pPr algn="ctr" indent="0" marL="0">
-              <a:buNone/>
-            </a:pPr>
-            <a:r>
-              <a:rPr lang="en-US" sz="900" dirty="0">
-                <a:solidFill>
-                  <a:srgbClr val="003A63"/>
-                </a:solidFill>
-                <a:latin typeface="Aptos" pitchFamily="34" charset="0"/>
-                <a:ea typeface="Aptos" pitchFamily="34" charset="-122"/>
-                <a:cs typeface="Aptos" pitchFamily="34" charset="-120"/>
-              </a:rPr>
-              <a:t>Human review</a:t>
-            </a:r>
-            <a:endParaRPr lang="en-US" sz="900" dirty="0"/>
-          </a:p>
-        </p:txBody>
-      </p:sp>
-      <p:sp>
-        <p:nvSpPr>
-          <p:cNvPr id="18" name="Shape 16"/>
           <p:cNvSpPr/>
           <p:nvPr/>
         </p:nvSpPr>
@@ -5802,7 +5742,7 @@
       </p:sp>
       <p:sp>
         <p:nvSpPr>
-          <p:cNvPr id="19" name="Text 17"/>
+          <p:cNvPr id="17" name="Text 15"/>
           <p:cNvSpPr/>
           <p:nvPr/>
         </p:nvSpPr>
@@ -5841,7 +5781,7 @@
       </p:sp>
       <p:sp>
         <p:nvSpPr>
-          <p:cNvPr id="20" name="Text 18"/>
+          <p:cNvPr id="18" name="Text 16"/>
           <p:cNvSpPr/>
           <p:nvPr/>
         </p:nvSpPr>
@@ -6349,13 +6289,11 @@
             </a:avLst>
           </a:prstGeom>
           <a:solidFill>
-            <a:srgbClr val="FFFFFF">
-              <a:alpha val="88000"/>
-            </a:srgbClr>
+            <a:srgbClr val="FFFFFF"/>
           </a:solidFill>
           <a:ln w="12700">
             <a:solidFill>
-              <a:srgbClr val="D6E8F2"/>
+              <a:srgbClr val="B9D7E6"/>
             </a:solidFill>
             <a:prstDash val="solid"/>
           </a:ln>
@@ -6363,30 +6301,42 @@
       </p:sp>
       <p:sp>
         <p:nvSpPr>
-          <p:cNvPr id="14" name="Shape 12"/>
-          <p:cNvSpPr/>
-          <p:nvPr/>
-        </p:nvSpPr>
-        <p:spPr>
-          <a:xfrm>
-            <a:off x="7927848" y="3319272"/>
-            <a:ext cx="792480" cy="749808"/>
-          </a:xfrm>
-          <a:prstGeom prst="roundRect">
-            <a:avLst>
-              <a:gd name="adj" fmla="val 14634"/>
-            </a:avLst>
-          </a:prstGeom>
-          <a:solidFill>
-            <a:srgbClr val="0068B7"/>
-          </a:solidFill>
-          <a:ln w="12700">
-            <a:solidFill>
-              <a:srgbClr val="0068B7"/>
-            </a:solidFill>
-            <a:prstDash val="solid"/>
-          </a:ln>
-        </p:spPr>
+          <p:cNvPr id="14" name="Text 12"/>
+          <p:cNvSpPr/>
+          <p:nvPr/>
+        </p:nvSpPr>
+        <p:spPr>
+          <a:xfrm>
+            <a:off x="7799832" y="2935224"/>
+            <a:ext cx="3145536" cy="256032"/>
+          </a:xfrm>
+          <a:prstGeom prst="rect">
+            <a:avLst/>
+          </a:prstGeom>
+          <a:noFill/>
+          <a:ln/>
+        </p:spPr>
+        <p:txBody>
+          <a:bodyPr wrap="square" lIns="0" tIns="0" rIns="0" bIns="0" rtlCol="0" anchor="ctr"/>
+          <a:lstStyle/>
+          <a:p>
+            <a:pPr indent="0" marL="0">
+              <a:buNone/>
+            </a:pPr>
+            <a:r>
+              <a:rPr lang="en-US" sz="1300" b="1" dirty="0">
+                <a:solidFill>
+                  <a:srgbClr val="0068B7"/>
+                </a:solidFill>
+                <a:latin typeface="Aptos" pitchFamily="34" charset="0"/>
+                <a:ea typeface="Aptos" pitchFamily="34" charset="-122"/>
+                <a:cs typeface="Aptos" pitchFamily="34" charset="-120"/>
+              </a:rPr>
+              <a:t>Concept checkpoints</a:t>
+            </a:r>
+            <a:endParaRPr lang="en-US" sz="1300" dirty="0"/>
+          </a:p>
+        </p:txBody>
       </p:sp>
       <p:sp>
         <p:nvSpPr>
@@ -6396,240 +6346,67 @@
         </p:nvSpPr>
         <p:spPr>
           <a:xfrm>
-            <a:off x="8001000" y="3511296"/>
-            <a:ext cx="646176" cy="310896"/>
-          </a:xfrm>
-          <a:prstGeom prst="rect">
-            <a:avLst/>
-          </a:prstGeom>
-          <a:noFill/>
-          <a:ln/>
-        </p:spPr>
-        <p:txBody>
-          <a:bodyPr wrap="square" lIns="0" tIns="0" rIns="0" bIns="0" rtlCol="0" anchor="ctr">
+            <a:off x="7818120" y="3300984"/>
+            <a:ext cx="3090672" cy="877824"/>
+          </a:xfrm>
+          <a:prstGeom prst="rect">
+            <a:avLst/>
+          </a:prstGeom>
+          <a:noFill/>
+          <a:ln/>
+        </p:spPr>
+        <p:txBody>
+          <a:bodyPr wrap="square" lIns="254" tIns="254" rIns="254" bIns="254" rtlCol="0" anchor="t">
             <a:normAutofit/>
           </a:bodyPr>
           <a:lstStyle/>
           <a:p>
-            <a:pPr algn="ctr" indent="0" marL="0">
-              <a:buNone/>
-            </a:pPr>
-            <a:r>
-              <a:rPr lang="en-US" sz="1500" b="1" dirty="0">
-                <a:solidFill>
-                  <a:srgbClr val="FFFFFF"/>
-                </a:solidFill>
-                <a:latin typeface="Aptos" pitchFamily="34" charset="0"/>
-                <a:ea typeface="Aptos" pitchFamily="34" charset="-122"/>
-                <a:cs typeface="Aptos" pitchFamily="34" charset="-120"/>
-              </a:rPr>
-              <a:t>Plan</a:t>
-            </a:r>
-            <a:endParaRPr lang="en-US" sz="1500" dirty="0"/>
+            <a:r>
+              <a:rPr lang="en-US" sz="1380" dirty="0">
+                <a:solidFill>
+                  <a:srgbClr val="17364A"/>
+                </a:solidFill>
+                <a:latin typeface="Aptos" pitchFamily="34" charset="0"/>
+                <a:ea typeface="Aptos" pitchFamily="34" charset="-122"/>
+                <a:cs typeface="Aptos" pitchFamily="34" charset="-120"/>
+              </a:rPr>
+              <a:t>Time-series and anomaly detection methods can support predictive dashboards, syndromic.</a:t>
+            </a:r>
+            <a:endParaRPr lang="en-US" sz="1380" dirty="0"/>
+          </a:p>
+          <a:p>
+            <a:r>
+              <a:rPr lang="en-US" sz="1380" dirty="0">
+                <a:solidFill>
+                  <a:srgbClr val="17364A"/>
+                </a:solidFill>
+                <a:latin typeface="Aptos" pitchFamily="34" charset="0"/>
+                <a:ea typeface="Aptos" pitchFamily="34" charset="-122"/>
+                <a:cs typeface="Aptos" pitchFamily="34" charset="-120"/>
+              </a:rPr>
+              <a:t>Agentic workflows may route alerts or create tasks, but those actions should be limited to.</a:t>
+            </a:r>
+            <a:endParaRPr lang="en-US" sz="1380" dirty="0"/>
+          </a:p>
+          <a:p>
+            <a:r>
+              <a:rPr lang="en-US" sz="1380" dirty="0">
+                <a:solidFill>
+                  <a:srgbClr val="17364A"/>
+                </a:solidFill>
+                <a:latin typeface="Aptos" pitchFamily="34" charset="0"/>
+                <a:ea typeface="Aptos" pitchFamily="34" charset="-122"/>
+                <a:cs typeface="Aptos" pitchFamily="34" charset="-120"/>
+              </a:rPr>
+              <a:t>The best AI-supported surveillance workflows combine automation with epidemiologic judgment.</a:t>
+            </a:r>
+            <a:endParaRPr lang="en-US" sz="1380" dirty="0"/>
           </a:p>
         </p:txBody>
       </p:sp>
       <p:sp>
         <p:nvSpPr>
           <p:cNvPr id="16" name="Shape 14"/>
-          <p:cNvSpPr/>
-          <p:nvPr/>
-        </p:nvSpPr>
-        <p:spPr>
-          <a:xfrm>
-            <a:off x="8976360" y="3319272"/>
-            <a:ext cx="792480" cy="749808"/>
-          </a:xfrm>
-          <a:prstGeom prst="roundRect">
-            <a:avLst>
-              <a:gd name="adj" fmla="val 14634"/>
-            </a:avLst>
-          </a:prstGeom>
-          <a:solidFill>
-            <a:srgbClr val="2F8A28"/>
-          </a:solidFill>
-          <a:ln w="12700">
-            <a:solidFill>
-              <a:srgbClr val="2F8A28"/>
-            </a:solidFill>
-            <a:prstDash val="solid"/>
-          </a:ln>
-        </p:spPr>
-      </p:sp>
-      <p:sp>
-        <p:nvSpPr>
-          <p:cNvPr id="17" name="Text 15"/>
-          <p:cNvSpPr/>
-          <p:nvPr/>
-        </p:nvSpPr>
-        <p:spPr>
-          <a:xfrm>
-            <a:off x="9049512" y="3511296"/>
-            <a:ext cx="646176" cy="310896"/>
-          </a:xfrm>
-          <a:prstGeom prst="rect">
-            <a:avLst/>
-          </a:prstGeom>
-          <a:noFill/>
-          <a:ln/>
-        </p:spPr>
-        <p:txBody>
-          <a:bodyPr wrap="square" lIns="0" tIns="0" rIns="0" bIns="0" rtlCol="0" anchor="ctr">
-            <a:normAutofit/>
-          </a:bodyPr>
-          <a:lstStyle/>
-          <a:p>
-            <a:pPr algn="ctr" indent="0" marL="0">
-              <a:buNone/>
-            </a:pPr>
-            <a:r>
-              <a:rPr lang="en-US" sz="1500" b="1" dirty="0">
-                <a:solidFill>
-                  <a:srgbClr val="FFFFFF"/>
-                </a:solidFill>
-                <a:latin typeface="Aptos" pitchFamily="34" charset="0"/>
-                <a:ea typeface="Aptos" pitchFamily="34" charset="-122"/>
-                <a:cs typeface="Aptos" pitchFamily="34" charset="-120"/>
-              </a:rPr>
-              <a:t>Do</a:t>
-            </a:r>
-            <a:endParaRPr lang="en-US" sz="1500" dirty="0"/>
-          </a:p>
-        </p:txBody>
-      </p:sp>
-      <p:sp>
-        <p:nvSpPr>
-          <p:cNvPr id="18" name="Shape 16"/>
-          <p:cNvSpPr/>
-          <p:nvPr/>
-        </p:nvSpPr>
-        <p:spPr>
-          <a:xfrm>
-            <a:off x="10024872" y="3319272"/>
-            <a:ext cx="792480" cy="749808"/>
-          </a:xfrm>
-          <a:prstGeom prst="roundRect">
-            <a:avLst>
-              <a:gd name="adj" fmla="val 14634"/>
-            </a:avLst>
-          </a:prstGeom>
-          <a:solidFill>
-            <a:srgbClr val="D69A2D"/>
-          </a:solidFill>
-          <a:ln w="12700">
-            <a:solidFill>
-              <a:srgbClr val="D69A2D"/>
-            </a:solidFill>
-            <a:prstDash val="solid"/>
-          </a:ln>
-        </p:spPr>
-      </p:sp>
-      <p:sp>
-        <p:nvSpPr>
-          <p:cNvPr id="19" name="Text 17"/>
-          <p:cNvSpPr/>
-          <p:nvPr/>
-        </p:nvSpPr>
-        <p:spPr>
-          <a:xfrm>
-            <a:off x="10098024" y="3511296"/>
-            <a:ext cx="646176" cy="310896"/>
-          </a:xfrm>
-          <a:prstGeom prst="rect">
-            <a:avLst/>
-          </a:prstGeom>
-          <a:noFill/>
-          <a:ln/>
-        </p:spPr>
-        <p:txBody>
-          <a:bodyPr wrap="square" lIns="0" tIns="0" rIns="0" bIns="0" rtlCol="0" anchor="ctr">
-            <a:normAutofit/>
-          </a:bodyPr>
-          <a:lstStyle/>
-          <a:p>
-            <a:pPr algn="ctr" indent="0" marL="0">
-              <a:buNone/>
-            </a:pPr>
-            <a:r>
-              <a:rPr lang="en-US" sz="1500" b="1" dirty="0">
-                <a:solidFill>
-                  <a:srgbClr val="FFFFFF"/>
-                </a:solidFill>
-                <a:latin typeface="Aptos" pitchFamily="34" charset="0"/>
-                <a:ea typeface="Aptos" pitchFamily="34" charset="-122"/>
-                <a:cs typeface="Aptos" pitchFamily="34" charset="-120"/>
-              </a:rPr>
-              <a:t>Review</a:t>
-            </a:r>
-            <a:endParaRPr lang="en-US" sz="1500" dirty="0"/>
-          </a:p>
-        </p:txBody>
-      </p:sp>
-      <p:sp>
-        <p:nvSpPr>
-          <p:cNvPr id="20" name="Shape 18"/>
-          <p:cNvSpPr/>
-          <p:nvPr/>
-        </p:nvSpPr>
-        <p:spPr>
-          <a:xfrm>
-            <a:off x="8293608" y="4389120"/>
-            <a:ext cx="2157984" cy="0"/>
-          </a:xfrm>
-          <a:prstGeom prst="line">
-            <a:avLst/>
-          </a:prstGeom>
-          <a:noFill/>
-          <a:ln w="25400">
-            <a:solidFill>
-              <a:srgbClr val="8ABBD8"/>
-            </a:solidFill>
-            <a:prstDash val="solid"/>
-          </a:ln>
-        </p:spPr>
-      </p:sp>
-      <p:sp>
-        <p:nvSpPr>
-          <p:cNvPr id="21" name="Text 19"/>
-          <p:cNvSpPr/>
-          <p:nvPr/>
-        </p:nvSpPr>
-        <p:spPr>
-          <a:xfrm>
-            <a:off x="7909560" y="3977640"/>
-            <a:ext cx="2926080" cy="182880"/>
-          </a:xfrm>
-          <a:prstGeom prst="rect">
-            <a:avLst/>
-          </a:prstGeom>
-          <a:noFill/>
-          <a:ln/>
-        </p:spPr>
-        <p:txBody>
-          <a:bodyPr wrap="square" lIns="0" tIns="0" rIns="0" bIns="0" rtlCol="0" anchor="ctr"/>
-          <a:lstStyle/>
-          <a:p>
-            <a:pPr algn="ctr" indent="0" marL="0">
-              <a:buNone/>
-            </a:pPr>
-            <a:r>
-              <a:rPr lang="en-US" sz="1000" dirty="0">
-                <a:solidFill>
-                  <a:srgbClr val="003A63"/>
-                </a:solidFill>
-                <a:latin typeface="Aptos" pitchFamily="34" charset="0"/>
-                <a:ea typeface="Aptos" pitchFamily="34" charset="-122"/>
-                <a:cs typeface="Aptos" pitchFamily="34" charset="-120"/>
-              </a:rPr>
-              <a:t>Dependencies visible</a:t>
-            </a:r>
-            <a:endParaRPr lang="en-US" sz="1000" dirty="0"/>
-          </a:p>
-        </p:txBody>
-      </p:sp>
-      <p:sp>
-        <p:nvSpPr>
-          <p:cNvPr id="22" name="Shape 20"/>
           <p:cNvSpPr/>
           <p:nvPr/>
         </p:nvSpPr>
@@ -6656,7 +6433,7 @@
       </p:sp>
       <p:sp>
         <p:nvSpPr>
-          <p:cNvPr id="23" name="Text 21"/>
+          <p:cNvPr id="17" name="Text 15"/>
           <p:cNvSpPr/>
           <p:nvPr/>
         </p:nvSpPr>
@@ -6695,7 +6472,7 @@
       </p:sp>
       <p:sp>
         <p:nvSpPr>
-          <p:cNvPr id="24" name="Text 22"/>
+          <p:cNvPr id="18" name="Text 16"/>
           <p:cNvSpPr/>
           <p:nvPr/>
         </p:nvSpPr>
@@ -7203,13 +6980,11 @@
             </a:avLst>
           </a:prstGeom>
           <a:solidFill>
-            <a:srgbClr val="FFFFFF">
-              <a:alpha val="88000"/>
-            </a:srgbClr>
+            <a:srgbClr val="FFFFFF"/>
           </a:solidFill>
           <a:ln w="12700">
             <a:solidFill>
-              <a:srgbClr val="D6E8F2"/>
+              <a:srgbClr val="B9D7E6"/>
             </a:solidFill>
             <a:prstDash val="solid"/>
           </a:ln>
@@ -7217,119 +6992,112 @@
       </p:sp>
       <p:sp>
         <p:nvSpPr>
-          <p:cNvPr id="14" name="Shape 12"/>
-          <p:cNvSpPr/>
-          <p:nvPr/>
-        </p:nvSpPr>
-        <p:spPr>
-          <a:xfrm>
-            <a:off x="8074152" y="3291840"/>
-            <a:ext cx="2596896" cy="749808"/>
-          </a:xfrm>
-          <a:prstGeom prst="rect">
-            <a:avLst/>
-          </a:prstGeom>
-          <a:solidFill>
-            <a:srgbClr val="EAF6F8"/>
-          </a:solidFill>
-          <a:ln w="12700">
-            <a:solidFill>
-              <a:srgbClr val="8ABBD8"/>
-            </a:solidFill>
-            <a:prstDash val="solid"/>
-          </a:ln>
-        </p:spPr>
-      </p:sp>
-      <p:sp>
-        <p:nvSpPr>
-          <p:cNvPr id="15" name="Shape 13"/>
-          <p:cNvSpPr/>
-          <p:nvPr/>
-        </p:nvSpPr>
-        <p:spPr>
-          <a:xfrm>
-            <a:off x="8202168" y="3721608"/>
-            <a:ext cx="2340864" cy="0"/>
-          </a:xfrm>
-          <a:prstGeom prst="line">
-            <a:avLst/>
-          </a:prstGeom>
-          <a:noFill/>
-          <a:ln w="19050">
-            <a:solidFill>
-              <a:srgbClr val="0068B7"/>
-            </a:solidFill>
-            <a:prstDash val="solid"/>
-          </a:ln>
-        </p:spPr>
+          <p:cNvPr id="14" name="Text 12"/>
+          <p:cNvSpPr/>
+          <p:nvPr/>
+        </p:nvSpPr>
+        <p:spPr>
+          <a:xfrm>
+            <a:off x="7799832" y="2935224"/>
+            <a:ext cx="3145536" cy="256032"/>
+          </a:xfrm>
+          <a:prstGeom prst="rect">
+            <a:avLst/>
+          </a:prstGeom>
+          <a:noFill/>
+          <a:ln/>
+        </p:spPr>
+        <p:txBody>
+          <a:bodyPr wrap="square" lIns="0" tIns="0" rIns="0" bIns="0" rtlCol="0" anchor="ctr"/>
+          <a:lstStyle/>
+          <a:p>
+            <a:pPr indent="0" marL="0">
+              <a:buNone/>
+            </a:pPr>
+            <a:r>
+              <a:rPr lang="en-US" sz="1300" b="1" dirty="0">
+                <a:solidFill>
+                  <a:srgbClr val="0068B7"/>
+                </a:solidFill>
+                <a:latin typeface="Aptos" pitchFamily="34" charset="0"/>
+                <a:ea typeface="Aptos" pitchFamily="34" charset="-122"/>
+                <a:cs typeface="Aptos" pitchFamily="34" charset="-120"/>
+              </a:rPr>
+              <a:t>Concept checkpoints</a:t>
+            </a:r>
+            <a:endParaRPr lang="en-US" sz="1300" dirty="0"/>
+          </a:p>
+        </p:txBody>
+      </p:sp>
+      <p:sp>
+        <p:nvSpPr>
+          <p:cNvPr id="15" name="Text 13"/>
+          <p:cNvSpPr/>
+          <p:nvPr/>
+        </p:nvSpPr>
+        <p:spPr>
+          <a:xfrm>
+            <a:off x="7818120" y="3300984"/>
+            <a:ext cx="3090672" cy="877824"/>
+          </a:xfrm>
+          <a:prstGeom prst="rect">
+            <a:avLst/>
+          </a:prstGeom>
+          <a:noFill/>
+          <a:ln/>
+        </p:spPr>
+        <p:txBody>
+          <a:bodyPr wrap="square" lIns="254" tIns="254" rIns="254" bIns="254" rtlCol="0" anchor="t">
+            <a:normAutofit/>
+          </a:bodyPr>
+          <a:lstStyle/>
+          <a:p>
+            <a:r>
+              <a:rPr lang="en-US" sz="1380" dirty="0">
+                <a:solidFill>
+                  <a:srgbClr val="17364A"/>
+                </a:solidFill>
+                <a:latin typeface="Aptos" pitchFamily="34" charset="0"/>
+                <a:ea typeface="Aptos" pitchFamily="34" charset="-122"/>
+                <a:cs typeface="Aptos" pitchFamily="34" charset="-120"/>
+              </a:rPr>
+              <a:t>What time-series data stream would benefit from automated signal review?</a:t>
+            </a:r>
+            <a:endParaRPr lang="en-US" sz="1380" dirty="0"/>
+          </a:p>
+          <a:p>
+            <a:r>
+              <a:rPr lang="en-US" sz="1380" dirty="0">
+                <a:solidFill>
+                  <a:srgbClr val="17364A"/>
+                </a:solidFill>
+                <a:latin typeface="Aptos" pitchFamily="34" charset="0"/>
+                <a:ea typeface="Aptos" pitchFamily="34" charset="-122"/>
+                <a:cs typeface="Aptos" pitchFamily="34" charset="-120"/>
+              </a:rPr>
+              <a:t>What baseline is appropriate for the condition, data source, and decision?</a:t>
+            </a:r>
+            <a:endParaRPr lang="en-US" sz="1380" dirty="0"/>
+          </a:p>
+          <a:p>
+            <a:r>
+              <a:rPr lang="en-US" sz="1380" dirty="0">
+                <a:solidFill>
+                  <a:srgbClr val="17364A"/>
+                </a:solidFill>
+                <a:latin typeface="Aptos" pitchFamily="34" charset="0"/>
+                <a:ea typeface="Aptos" pitchFamily="34" charset="-122"/>
+                <a:cs typeface="Aptos" pitchFamily="34" charset="-120"/>
+              </a:rPr>
+              <a:t>Which reporting artifacts could create false signals?</a:t>
+            </a:r>
+            <a:endParaRPr lang="en-US" sz="1380" dirty="0"/>
+          </a:p>
+        </p:txBody>
       </p:sp>
       <p:sp>
         <p:nvSpPr>
           <p:cNvPr id="16" name="Shape 14"/>
-          <p:cNvSpPr/>
-          <p:nvPr/>
-        </p:nvSpPr>
-        <p:spPr>
-          <a:xfrm>
-            <a:off x="9198864" y="4206240"/>
-            <a:ext cx="347472" cy="347472"/>
-          </a:xfrm>
-          <a:prstGeom prst="ellipse">
-            <a:avLst/>
-          </a:prstGeom>
-          <a:solidFill>
-            <a:srgbClr val="2F8A28"/>
-          </a:solidFill>
-          <a:ln w="12700">
-            <a:solidFill>
-              <a:srgbClr val="2F8A28"/>
-            </a:solidFill>
-            <a:prstDash val="solid"/>
-          </a:ln>
-        </p:spPr>
-      </p:sp>
-      <p:sp>
-        <p:nvSpPr>
-          <p:cNvPr id="17" name="Text 15"/>
-          <p:cNvSpPr/>
-          <p:nvPr/>
-        </p:nvSpPr>
-        <p:spPr>
-          <a:xfrm>
-            <a:off x="7909560" y="3977640"/>
-            <a:ext cx="2926080" cy="182880"/>
-          </a:xfrm>
-          <a:prstGeom prst="rect">
-            <a:avLst/>
-          </a:prstGeom>
-          <a:noFill/>
-          <a:ln/>
-        </p:spPr>
-        <p:txBody>
-          <a:bodyPr wrap="square" lIns="0" tIns="0" rIns="0" bIns="0" rtlCol="0" anchor="ctr"/>
-          <a:lstStyle/>
-          <a:p>
-            <a:pPr algn="ctr" indent="0" marL="0">
-              <a:buNone/>
-            </a:pPr>
-            <a:r>
-              <a:rPr lang="en-US" sz="1000" dirty="0">
-                <a:solidFill>
-                  <a:srgbClr val="003A63"/>
-                </a:solidFill>
-                <a:latin typeface="Aptos" pitchFamily="34" charset="0"/>
-                <a:ea typeface="Aptos" pitchFamily="34" charset="-122"/>
-                <a:cs typeface="Aptos" pitchFamily="34" charset="-120"/>
-              </a:rPr>
-              <a:t>Concept to action</a:t>
-            </a:r>
-            <a:endParaRPr lang="en-US" sz="1000" dirty="0"/>
-          </a:p>
-        </p:txBody>
-      </p:sp>
-      <p:sp>
-        <p:nvSpPr>
-          <p:cNvPr id="18" name="Shape 16"/>
           <p:cNvSpPr/>
           <p:nvPr/>
         </p:nvSpPr>
@@ -7356,7 +7124,7 @@
       </p:sp>
       <p:sp>
         <p:nvSpPr>
-          <p:cNvPr id="19" name="Text 17"/>
+          <p:cNvPr id="17" name="Text 15"/>
           <p:cNvSpPr/>
           <p:nvPr/>
         </p:nvSpPr>
@@ -7395,7 +7163,7 @@
       </p:sp>
       <p:sp>
         <p:nvSpPr>
-          <p:cNvPr id="20" name="Text 18"/>
+          <p:cNvPr id="18" name="Text 16"/>
           <p:cNvSpPr/>
           <p:nvPr/>
         </p:nvSpPr>
@@ -7889,13 +7657,11 @@
             </a:avLst>
           </a:prstGeom>
           <a:solidFill>
-            <a:srgbClr val="FFFFFF">
-              <a:alpha val="88000"/>
-            </a:srgbClr>
+            <a:srgbClr val="FFFFFF"/>
           </a:solidFill>
           <a:ln w="12700">
             <a:solidFill>
-              <a:srgbClr val="D6E8F2"/>
+              <a:srgbClr val="B9D7E6"/>
             </a:solidFill>
             <a:prstDash val="solid"/>
           </a:ln>
@@ -7903,119 +7669,98 @@
       </p:sp>
       <p:sp>
         <p:nvSpPr>
-          <p:cNvPr id="14" name="Shape 12"/>
-          <p:cNvSpPr/>
-          <p:nvPr/>
-        </p:nvSpPr>
-        <p:spPr>
-          <a:xfrm>
-            <a:off x="8074152" y="3291840"/>
-            <a:ext cx="2596896" cy="749808"/>
-          </a:xfrm>
-          <a:prstGeom prst="rect">
-            <a:avLst/>
-          </a:prstGeom>
-          <a:solidFill>
-            <a:srgbClr val="EAF6F8"/>
-          </a:solidFill>
-          <a:ln w="12700">
-            <a:solidFill>
-              <a:srgbClr val="8ABBD8"/>
-            </a:solidFill>
-            <a:prstDash val="solid"/>
-          </a:ln>
-        </p:spPr>
-      </p:sp>
-      <p:sp>
-        <p:nvSpPr>
-          <p:cNvPr id="15" name="Shape 13"/>
-          <p:cNvSpPr/>
-          <p:nvPr/>
-        </p:nvSpPr>
-        <p:spPr>
-          <a:xfrm>
-            <a:off x="8202168" y="3721608"/>
-            <a:ext cx="2340864" cy="0"/>
-          </a:xfrm>
-          <a:prstGeom prst="line">
-            <a:avLst/>
-          </a:prstGeom>
-          <a:noFill/>
-          <a:ln w="19050">
-            <a:solidFill>
-              <a:srgbClr val="0068B7"/>
-            </a:solidFill>
-            <a:prstDash val="solid"/>
-          </a:ln>
-        </p:spPr>
+          <p:cNvPr id="14" name="Text 12"/>
+          <p:cNvSpPr/>
+          <p:nvPr/>
+        </p:nvSpPr>
+        <p:spPr>
+          <a:xfrm>
+            <a:off x="7799832" y="2935224"/>
+            <a:ext cx="3145536" cy="256032"/>
+          </a:xfrm>
+          <a:prstGeom prst="rect">
+            <a:avLst/>
+          </a:prstGeom>
+          <a:noFill/>
+          <a:ln/>
+        </p:spPr>
+        <p:txBody>
+          <a:bodyPr wrap="square" lIns="0" tIns="0" rIns="0" bIns="0" rtlCol="0" anchor="ctr"/>
+          <a:lstStyle/>
+          <a:p>
+            <a:pPr indent="0" marL="0">
+              <a:buNone/>
+            </a:pPr>
+            <a:r>
+              <a:rPr lang="en-US" sz="1300" b="1" dirty="0">
+                <a:solidFill>
+                  <a:srgbClr val="0068B7"/>
+                </a:solidFill>
+                <a:latin typeface="Aptos" pitchFamily="34" charset="0"/>
+                <a:ea typeface="Aptos" pitchFamily="34" charset="-122"/>
+                <a:cs typeface="Aptos" pitchFamily="34" charset="-120"/>
+              </a:rPr>
+              <a:t>Concept checkpoints</a:t>
+            </a:r>
+            <a:endParaRPr lang="en-US" sz="1300" dirty="0"/>
+          </a:p>
+        </p:txBody>
+      </p:sp>
+      <p:sp>
+        <p:nvSpPr>
+          <p:cNvPr id="15" name="Text 13"/>
+          <p:cNvSpPr/>
+          <p:nvPr/>
+        </p:nvSpPr>
+        <p:spPr>
+          <a:xfrm>
+            <a:off x="7818120" y="3300984"/>
+            <a:ext cx="3090672" cy="877824"/>
+          </a:xfrm>
+          <a:prstGeom prst="rect">
+            <a:avLst/>
+          </a:prstGeom>
+          <a:noFill/>
+          <a:ln/>
+        </p:spPr>
+        <p:txBody>
+          <a:bodyPr wrap="square" lIns="254" tIns="254" rIns="254" bIns="254" rtlCol="0" anchor="t">
+            <a:normAutofit/>
+          </a:bodyPr>
+          <a:lstStyle/>
+          <a:p>
+            <a:r>
+              <a:rPr lang="en-US" sz="1380" dirty="0">
+                <a:solidFill>
+                  <a:srgbClr val="17364A"/>
+                </a:solidFill>
+                <a:latin typeface="Aptos" pitchFamily="34" charset="0"/>
+                <a:ea typeface="Aptos" pitchFamily="34" charset="-122"/>
+                <a:cs typeface="Aptos" pitchFamily="34" charset="-120"/>
+              </a:rPr>
+              <a:t>What threshold balances early detection and alert fatigue?</a:t>
+            </a:r>
+            <a:endParaRPr lang="en-US" sz="1380" dirty="0"/>
+          </a:p>
+          <a:p>
+            <a:r>
+              <a:rPr lang="en-US" sz="1380" dirty="0">
+                <a:solidFill>
+                  <a:srgbClr val="17364A"/>
+                </a:solidFill>
+                <a:latin typeface="Aptos" pitchFamily="34" charset="0"/>
+                <a:ea typeface="Aptos" pitchFamily="34" charset="-122"/>
+                <a:cs typeface="Aptos" pitchFamily="34" charset="-120"/>
+              </a:rPr>
+              <a:t>How will staff document review, decisions, and lessons learned?</a:t>
+            </a:r>
+            <a:endParaRPr lang="en-US" sz="1380" dirty="0"/>
+          </a:p>
+        </p:txBody>
       </p:sp>
       <p:sp>
         <p:nvSpPr>
           <p:cNvPr id="16" name="Shape 14"/>
-          <p:cNvSpPr/>
-          <p:nvPr/>
-        </p:nvSpPr>
-        <p:spPr>
-          <a:xfrm>
-            <a:off x="9198864" y="4206240"/>
-            <a:ext cx="347472" cy="347472"/>
-          </a:xfrm>
-          <a:prstGeom prst="ellipse">
-            <a:avLst/>
-          </a:prstGeom>
-          <a:solidFill>
-            <a:srgbClr val="2F8A28"/>
-          </a:solidFill>
-          <a:ln w="12700">
-            <a:solidFill>
-              <a:srgbClr val="2F8A28"/>
-            </a:solidFill>
-            <a:prstDash val="solid"/>
-          </a:ln>
-        </p:spPr>
-      </p:sp>
-      <p:sp>
-        <p:nvSpPr>
-          <p:cNvPr id="17" name="Text 15"/>
-          <p:cNvSpPr/>
-          <p:nvPr/>
-        </p:nvSpPr>
-        <p:spPr>
-          <a:xfrm>
-            <a:off x="7909560" y="3977640"/>
-            <a:ext cx="2926080" cy="182880"/>
-          </a:xfrm>
-          <a:prstGeom prst="rect">
-            <a:avLst/>
-          </a:prstGeom>
-          <a:noFill/>
-          <a:ln/>
-        </p:spPr>
-        <p:txBody>
-          <a:bodyPr wrap="square" lIns="0" tIns="0" rIns="0" bIns="0" rtlCol="0" anchor="ctr"/>
-          <a:lstStyle/>
-          <a:p>
-            <a:pPr algn="ctr" indent="0" marL="0">
-              <a:buNone/>
-            </a:pPr>
-            <a:r>
-              <a:rPr lang="en-US" sz="1000" dirty="0">
-                <a:solidFill>
-                  <a:srgbClr val="003A63"/>
-                </a:solidFill>
-                <a:latin typeface="Aptos" pitchFamily="34" charset="0"/>
-                <a:ea typeface="Aptos" pitchFamily="34" charset="-122"/>
-                <a:cs typeface="Aptos" pitchFamily="34" charset="-120"/>
-              </a:rPr>
-              <a:t>Concept to action</a:t>
-            </a:r>
-            <a:endParaRPr lang="en-US" sz="1000" dirty="0"/>
-          </a:p>
-        </p:txBody>
-      </p:sp>
-      <p:sp>
-        <p:nvSpPr>
-          <p:cNvPr id="18" name="Shape 16"/>
           <p:cNvSpPr/>
           <p:nvPr/>
         </p:nvSpPr>
@@ -8042,7 +7787,7 @@
       </p:sp>
       <p:sp>
         <p:nvSpPr>
-          <p:cNvPr id="19" name="Text 17"/>
+          <p:cNvPr id="17" name="Text 15"/>
           <p:cNvSpPr/>
           <p:nvPr/>
         </p:nvSpPr>
@@ -8081,7 +7826,7 @@
       </p:sp>
       <p:sp>
         <p:nvSpPr>
-          <p:cNvPr id="20" name="Text 18"/>
+          <p:cNvPr id="18" name="Text 16"/>
           <p:cNvSpPr/>
           <p:nvPr/>
         </p:nvSpPr>
@@ -8589,13 +8334,11 @@
             </a:avLst>
           </a:prstGeom>
           <a:solidFill>
-            <a:srgbClr val="FFFFFF">
-              <a:alpha val="88000"/>
-            </a:srgbClr>
+            <a:srgbClr val="FFFFFF"/>
           </a:solidFill>
           <a:ln w="12700">
             <a:solidFill>
-              <a:srgbClr val="D6E8F2"/>
+              <a:srgbClr val="B9D7E6"/>
             </a:solidFill>
             <a:prstDash val="solid"/>
           </a:ln>
@@ -8603,119 +8346,98 @@
       </p:sp>
       <p:sp>
         <p:nvSpPr>
-          <p:cNvPr id="14" name="Shape 12"/>
-          <p:cNvSpPr/>
-          <p:nvPr/>
-        </p:nvSpPr>
-        <p:spPr>
-          <a:xfrm>
-            <a:off x="8074152" y="3291840"/>
-            <a:ext cx="2596896" cy="749808"/>
-          </a:xfrm>
-          <a:prstGeom prst="rect">
-            <a:avLst/>
-          </a:prstGeom>
-          <a:solidFill>
-            <a:srgbClr val="EAF6F8"/>
-          </a:solidFill>
-          <a:ln w="12700">
-            <a:solidFill>
-              <a:srgbClr val="8ABBD8"/>
-            </a:solidFill>
-            <a:prstDash val="solid"/>
-          </a:ln>
-        </p:spPr>
-      </p:sp>
-      <p:sp>
-        <p:nvSpPr>
-          <p:cNvPr id="15" name="Shape 13"/>
-          <p:cNvSpPr/>
-          <p:nvPr/>
-        </p:nvSpPr>
-        <p:spPr>
-          <a:xfrm>
-            <a:off x="8202168" y="3721608"/>
-            <a:ext cx="2340864" cy="0"/>
-          </a:xfrm>
-          <a:prstGeom prst="line">
-            <a:avLst/>
-          </a:prstGeom>
-          <a:noFill/>
-          <a:ln w="19050">
-            <a:solidFill>
-              <a:srgbClr val="0068B7"/>
-            </a:solidFill>
-            <a:prstDash val="solid"/>
-          </a:ln>
-        </p:spPr>
+          <p:cNvPr id="14" name="Text 12"/>
+          <p:cNvSpPr/>
+          <p:nvPr/>
+        </p:nvSpPr>
+        <p:spPr>
+          <a:xfrm>
+            <a:off x="7799832" y="2935224"/>
+            <a:ext cx="3145536" cy="256032"/>
+          </a:xfrm>
+          <a:prstGeom prst="rect">
+            <a:avLst/>
+          </a:prstGeom>
+          <a:noFill/>
+          <a:ln/>
+        </p:spPr>
+        <p:txBody>
+          <a:bodyPr wrap="square" lIns="0" tIns="0" rIns="0" bIns="0" rtlCol="0" anchor="ctr"/>
+          <a:lstStyle/>
+          <a:p>
+            <a:pPr indent="0" marL="0">
+              <a:buNone/>
+            </a:pPr>
+            <a:r>
+              <a:rPr lang="en-US" sz="1300" b="1" dirty="0">
+                <a:solidFill>
+                  <a:srgbClr val="0068B7"/>
+                </a:solidFill>
+                <a:latin typeface="Aptos" pitchFamily="34" charset="0"/>
+                <a:ea typeface="Aptos" pitchFamily="34" charset="-122"/>
+                <a:cs typeface="Aptos" pitchFamily="34" charset="-120"/>
+              </a:rPr>
+              <a:t>Concept checkpoints</a:t>
+            </a:r>
+            <a:endParaRPr lang="en-US" sz="1300" dirty="0"/>
+          </a:p>
+        </p:txBody>
+      </p:sp>
+      <p:sp>
+        <p:nvSpPr>
+          <p:cNvPr id="15" name="Text 13"/>
+          <p:cNvSpPr/>
+          <p:nvPr/>
+        </p:nvSpPr>
+        <p:spPr>
+          <a:xfrm>
+            <a:off x="7818120" y="3300984"/>
+            <a:ext cx="3090672" cy="877824"/>
+          </a:xfrm>
+          <a:prstGeom prst="rect">
+            <a:avLst/>
+          </a:prstGeom>
+          <a:noFill/>
+          <a:ln/>
+        </p:spPr>
+        <p:txBody>
+          <a:bodyPr wrap="square" lIns="254" tIns="254" rIns="254" bIns="254" rtlCol="0" anchor="t">
+            <a:normAutofit/>
+          </a:bodyPr>
+          <a:lstStyle/>
+          <a:p>
+            <a:r>
+              <a:rPr lang="en-US" sz="1380" dirty="0">
+                <a:solidFill>
+                  <a:srgbClr val="17364A"/>
+                </a:solidFill>
+                <a:latin typeface="Aptos" pitchFamily="34" charset="0"/>
+                <a:ea typeface="Aptos" pitchFamily="34" charset="-122"/>
+                <a:cs typeface="Aptos" pitchFamily="34" charset="-120"/>
+              </a:rPr>
+              <a:t>Include the monitored indicator, data source, update frequency, baseline approach, known.</a:t>
+            </a:r>
+            <a:endParaRPr lang="en-US" sz="1380" dirty="0"/>
+          </a:p>
+          <a:p>
+            <a:r>
+              <a:rPr lang="en-US" sz="1380" dirty="0">
+                <a:solidFill>
+                  <a:srgbClr val="17364A"/>
+                </a:solidFill>
+                <a:latin typeface="Aptos" pitchFamily="34" charset="0"/>
+                <a:ea typeface="Aptos" pitchFamily="34" charset="-122"/>
+                <a:cs typeface="Aptos" pitchFamily="34" charset="-120"/>
+              </a:rPr>
+              <a:t>The plan should identify how staff will distinguish statistical anomalies from data.</a:t>
+            </a:r>
+            <a:endParaRPr lang="en-US" sz="1380" dirty="0"/>
+          </a:p>
+        </p:txBody>
       </p:sp>
       <p:sp>
         <p:nvSpPr>
           <p:cNvPr id="16" name="Shape 14"/>
-          <p:cNvSpPr/>
-          <p:nvPr/>
-        </p:nvSpPr>
-        <p:spPr>
-          <a:xfrm>
-            <a:off x="9198864" y="4206240"/>
-            <a:ext cx="347472" cy="347472"/>
-          </a:xfrm>
-          <a:prstGeom prst="ellipse">
-            <a:avLst/>
-          </a:prstGeom>
-          <a:solidFill>
-            <a:srgbClr val="2F8A28"/>
-          </a:solidFill>
-          <a:ln w="12700">
-            <a:solidFill>
-              <a:srgbClr val="2F8A28"/>
-            </a:solidFill>
-            <a:prstDash val="solid"/>
-          </a:ln>
-        </p:spPr>
-      </p:sp>
-      <p:sp>
-        <p:nvSpPr>
-          <p:cNvPr id="17" name="Text 15"/>
-          <p:cNvSpPr/>
-          <p:nvPr/>
-        </p:nvSpPr>
-        <p:spPr>
-          <a:xfrm>
-            <a:off x="7909560" y="3977640"/>
-            <a:ext cx="2926080" cy="182880"/>
-          </a:xfrm>
-          <a:prstGeom prst="rect">
-            <a:avLst/>
-          </a:prstGeom>
-          <a:noFill/>
-          <a:ln/>
-        </p:spPr>
-        <p:txBody>
-          <a:bodyPr wrap="square" lIns="0" tIns="0" rIns="0" bIns="0" rtlCol="0" anchor="ctr"/>
-          <a:lstStyle/>
-          <a:p>
-            <a:pPr algn="ctr" indent="0" marL="0">
-              <a:buNone/>
-            </a:pPr>
-            <a:r>
-              <a:rPr lang="en-US" sz="1000" dirty="0">
-                <a:solidFill>
-                  <a:srgbClr val="003A63"/>
-                </a:solidFill>
-                <a:latin typeface="Aptos" pitchFamily="34" charset="0"/>
-                <a:ea typeface="Aptos" pitchFamily="34" charset="-122"/>
-                <a:cs typeface="Aptos" pitchFamily="34" charset="-120"/>
-              </a:rPr>
-              <a:t>Concept to action</a:t>
-            </a:r>
-            <a:endParaRPr lang="en-US" sz="1000" dirty="0"/>
-          </a:p>
-        </p:txBody>
-      </p:sp>
-      <p:sp>
-        <p:nvSpPr>
-          <p:cNvPr id="18" name="Shape 16"/>
           <p:cNvSpPr/>
           <p:nvPr/>
         </p:nvSpPr>
@@ -8742,7 +8464,7 @@
       </p:sp>
       <p:sp>
         <p:nvSpPr>
-          <p:cNvPr id="19" name="Text 17"/>
+          <p:cNvPr id="17" name="Text 15"/>
           <p:cNvSpPr/>
           <p:nvPr/>
         </p:nvSpPr>
@@ -8781,7 +8503,7 @@
       </p:sp>
       <p:sp>
         <p:nvSpPr>
-          <p:cNvPr id="20" name="Text 18"/>
+          <p:cNvPr id="18" name="Text 16"/>
           <p:cNvSpPr/>
           <p:nvPr/>
         </p:nvSpPr>
@@ -9289,13 +9011,11 @@
             </a:avLst>
           </a:prstGeom>
           <a:solidFill>
-            <a:srgbClr val="FFFFFF">
-              <a:alpha val="88000"/>
-            </a:srgbClr>
+            <a:srgbClr val="FFFFFF"/>
           </a:solidFill>
           <a:ln w="12700">
             <a:solidFill>
-              <a:srgbClr val="D6E8F2"/>
+              <a:srgbClr val="B9D7E6"/>
             </a:solidFill>
             <a:prstDash val="solid"/>
           </a:ln>
@@ -9303,119 +9023,112 @@
       </p:sp>
       <p:sp>
         <p:nvSpPr>
-          <p:cNvPr id="14" name="Shape 12"/>
-          <p:cNvSpPr/>
-          <p:nvPr/>
-        </p:nvSpPr>
-        <p:spPr>
-          <a:xfrm>
-            <a:off x="8074152" y="3291840"/>
-            <a:ext cx="2596896" cy="749808"/>
-          </a:xfrm>
-          <a:prstGeom prst="rect">
-            <a:avLst/>
-          </a:prstGeom>
-          <a:solidFill>
-            <a:srgbClr val="EAF6F8"/>
-          </a:solidFill>
-          <a:ln w="12700">
-            <a:solidFill>
-              <a:srgbClr val="8ABBD8"/>
-            </a:solidFill>
-            <a:prstDash val="solid"/>
-          </a:ln>
-        </p:spPr>
-      </p:sp>
-      <p:sp>
-        <p:nvSpPr>
-          <p:cNvPr id="15" name="Shape 13"/>
-          <p:cNvSpPr/>
-          <p:nvPr/>
-        </p:nvSpPr>
-        <p:spPr>
-          <a:xfrm>
-            <a:off x="8202168" y="3721608"/>
-            <a:ext cx="2340864" cy="0"/>
-          </a:xfrm>
-          <a:prstGeom prst="line">
-            <a:avLst/>
-          </a:prstGeom>
-          <a:noFill/>
-          <a:ln w="19050">
-            <a:solidFill>
-              <a:srgbClr val="0068B7"/>
-            </a:solidFill>
-            <a:prstDash val="solid"/>
-          </a:ln>
-        </p:spPr>
+          <p:cNvPr id="14" name="Text 12"/>
+          <p:cNvSpPr/>
+          <p:nvPr/>
+        </p:nvSpPr>
+        <p:spPr>
+          <a:xfrm>
+            <a:off x="7799832" y="2935224"/>
+            <a:ext cx="3145536" cy="256032"/>
+          </a:xfrm>
+          <a:prstGeom prst="rect">
+            <a:avLst/>
+          </a:prstGeom>
+          <a:noFill/>
+          <a:ln/>
+        </p:spPr>
+        <p:txBody>
+          <a:bodyPr wrap="square" lIns="0" tIns="0" rIns="0" bIns="0" rtlCol="0" anchor="ctr"/>
+          <a:lstStyle/>
+          <a:p>
+            <a:pPr indent="0" marL="0">
+              <a:buNone/>
+            </a:pPr>
+            <a:r>
+              <a:rPr lang="en-US" sz="1300" b="1" dirty="0">
+                <a:solidFill>
+                  <a:srgbClr val="0068B7"/>
+                </a:solidFill>
+                <a:latin typeface="Aptos" pitchFamily="34" charset="0"/>
+                <a:ea typeface="Aptos" pitchFamily="34" charset="-122"/>
+                <a:cs typeface="Aptos" pitchFamily="34" charset="-120"/>
+              </a:rPr>
+              <a:t>Concept checkpoints</a:t>
+            </a:r>
+            <a:endParaRPr lang="en-US" sz="1300" dirty="0"/>
+          </a:p>
+        </p:txBody>
+      </p:sp>
+      <p:sp>
+        <p:nvSpPr>
+          <p:cNvPr id="15" name="Text 13"/>
+          <p:cNvSpPr/>
+          <p:nvPr/>
+        </p:nvSpPr>
+        <p:spPr>
+          <a:xfrm>
+            <a:off x="7818120" y="3300984"/>
+            <a:ext cx="3090672" cy="877824"/>
+          </a:xfrm>
+          <a:prstGeom prst="rect">
+            <a:avLst/>
+          </a:prstGeom>
+          <a:noFill/>
+          <a:ln/>
+        </p:spPr>
+        <p:txBody>
+          <a:bodyPr wrap="square" lIns="254" tIns="254" rIns="254" bIns="254" rtlCol="0" anchor="t">
+            <a:normAutofit/>
+          </a:bodyPr>
+          <a:lstStyle/>
+          <a:p>
+            <a:r>
+              <a:rPr lang="en-US" sz="1380" dirty="0">
+                <a:solidFill>
+                  <a:srgbClr val="17364A"/>
+                </a:solidFill>
+                <a:latin typeface="Aptos" pitchFamily="34" charset="0"/>
+                <a:ea typeface="Aptos" pitchFamily="34" charset="-122"/>
+                <a:cs typeface="Aptos" pitchFamily="34" charset="-120"/>
+              </a:rPr>
+              <a:t>Anomaly detection review plan</a:t>
+            </a:r>
+            <a:endParaRPr lang="en-US" sz="1380" dirty="0"/>
+          </a:p>
+          <a:p>
+            <a:r>
+              <a:rPr lang="en-US" sz="1380" dirty="0">
+                <a:solidFill>
+                  <a:srgbClr val="17364A"/>
+                </a:solidFill>
+                <a:latin typeface="Aptos" pitchFamily="34" charset="0"/>
+                <a:ea typeface="Aptos" pitchFamily="34" charset="-122"/>
+                <a:cs typeface="Aptos" pitchFamily="34" charset="-120"/>
+              </a:rPr>
+              <a:t>Baseline and threshold rationale</a:t>
+            </a:r>
+            <a:endParaRPr lang="en-US" sz="1380" dirty="0"/>
+          </a:p>
+          <a:p>
+            <a:r>
+              <a:rPr lang="en-US" sz="1380" dirty="0">
+                <a:solidFill>
+                  <a:srgbClr val="17364A"/>
+                </a:solidFill>
+                <a:latin typeface="Aptos" pitchFamily="34" charset="0"/>
+                <a:ea typeface="Aptos" pitchFamily="34" charset="-122"/>
+                <a:cs typeface="Aptos" pitchFamily="34" charset="-120"/>
+              </a:rPr>
+              <a:t>Alert review protocol</a:t>
+            </a:r>
+            <a:endParaRPr lang="en-US" sz="1380" dirty="0"/>
+          </a:p>
+        </p:txBody>
       </p:sp>
       <p:sp>
         <p:nvSpPr>
           <p:cNvPr id="16" name="Shape 14"/>
-          <p:cNvSpPr/>
-          <p:nvPr/>
-        </p:nvSpPr>
-        <p:spPr>
-          <a:xfrm>
-            <a:off x="9198864" y="4206240"/>
-            <a:ext cx="347472" cy="347472"/>
-          </a:xfrm>
-          <a:prstGeom prst="ellipse">
-            <a:avLst/>
-          </a:prstGeom>
-          <a:solidFill>
-            <a:srgbClr val="2F8A28"/>
-          </a:solidFill>
-          <a:ln w="12700">
-            <a:solidFill>
-              <a:srgbClr val="2F8A28"/>
-            </a:solidFill>
-            <a:prstDash val="solid"/>
-          </a:ln>
-        </p:spPr>
-      </p:sp>
-      <p:sp>
-        <p:nvSpPr>
-          <p:cNvPr id="17" name="Text 15"/>
-          <p:cNvSpPr/>
-          <p:nvPr/>
-        </p:nvSpPr>
-        <p:spPr>
-          <a:xfrm>
-            <a:off x="7909560" y="3977640"/>
-            <a:ext cx="2926080" cy="182880"/>
-          </a:xfrm>
-          <a:prstGeom prst="rect">
-            <a:avLst/>
-          </a:prstGeom>
-          <a:noFill/>
-          <a:ln/>
-        </p:spPr>
-        <p:txBody>
-          <a:bodyPr wrap="square" lIns="0" tIns="0" rIns="0" bIns="0" rtlCol="0" anchor="ctr"/>
-          <a:lstStyle/>
-          <a:p>
-            <a:pPr algn="ctr" indent="0" marL="0">
-              <a:buNone/>
-            </a:pPr>
-            <a:r>
-              <a:rPr lang="en-US" sz="1000" dirty="0">
-                <a:solidFill>
-                  <a:srgbClr val="003A63"/>
-                </a:solidFill>
-                <a:latin typeface="Aptos" pitchFamily="34" charset="0"/>
-                <a:ea typeface="Aptos" pitchFamily="34" charset="-122"/>
-                <a:cs typeface="Aptos" pitchFamily="34" charset="-120"/>
-              </a:rPr>
-              <a:t>Concept to action</a:t>
-            </a:r>
-            <a:endParaRPr lang="en-US" sz="1000" dirty="0"/>
-          </a:p>
-        </p:txBody>
-      </p:sp>
-      <p:sp>
-        <p:nvSpPr>
-          <p:cNvPr id="18" name="Shape 16"/>
           <p:cNvSpPr/>
           <p:nvPr/>
         </p:nvSpPr>
@@ -9442,7 +9155,7 @@
       </p:sp>
       <p:sp>
         <p:nvSpPr>
-          <p:cNvPr id="19" name="Text 17"/>
+          <p:cNvPr id="17" name="Text 15"/>
           <p:cNvSpPr/>
           <p:nvPr/>
         </p:nvSpPr>
@@ -9481,7 +9194,7 @@
       </p:sp>
       <p:sp>
         <p:nvSpPr>
-          <p:cNvPr id="20" name="Text 18"/>
+          <p:cNvPr id="18" name="Text 16"/>
           <p:cNvSpPr/>
           <p:nvPr/>
         </p:nvSpPr>
@@ -9961,13 +9674,11 @@
             </a:avLst>
           </a:prstGeom>
           <a:solidFill>
-            <a:srgbClr val="FFFFFF">
-              <a:alpha val="88000"/>
-            </a:srgbClr>
+            <a:srgbClr val="FFFFFF"/>
           </a:solidFill>
           <a:ln w="12700">
             <a:solidFill>
-              <a:srgbClr val="D6E8F2"/>
+              <a:srgbClr val="B9D7E6"/>
             </a:solidFill>
             <a:prstDash val="solid"/>
           </a:ln>
@@ -9975,119 +9686,84 @@
       </p:sp>
       <p:sp>
         <p:nvSpPr>
-          <p:cNvPr id="14" name="Shape 12"/>
-          <p:cNvSpPr/>
-          <p:nvPr/>
-        </p:nvSpPr>
-        <p:spPr>
-          <a:xfrm>
-            <a:off x="8074152" y="3291840"/>
-            <a:ext cx="2596896" cy="749808"/>
-          </a:xfrm>
-          <a:prstGeom prst="rect">
-            <a:avLst/>
-          </a:prstGeom>
-          <a:solidFill>
-            <a:srgbClr val="EAF6F8"/>
-          </a:solidFill>
-          <a:ln w="12700">
-            <a:solidFill>
-              <a:srgbClr val="8ABBD8"/>
-            </a:solidFill>
-            <a:prstDash val="solid"/>
-          </a:ln>
-        </p:spPr>
-      </p:sp>
-      <p:sp>
-        <p:nvSpPr>
-          <p:cNvPr id="15" name="Shape 13"/>
-          <p:cNvSpPr/>
-          <p:nvPr/>
-        </p:nvSpPr>
-        <p:spPr>
-          <a:xfrm>
-            <a:off x="8202168" y="3721608"/>
-            <a:ext cx="2340864" cy="0"/>
-          </a:xfrm>
-          <a:prstGeom prst="line">
-            <a:avLst/>
-          </a:prstGeom>
-          <a:noFill/>
-          <a:ln w="19050">
-            <a:solidFill>
-              <a:srgbClr val="0068B7"/>
-            </a:solidFill>
-            <a:prstDash val="solid"/>
-          </a:ln>
-        </p:spPr>
+          <p:cNvPr id="14" name="Text 12"/>
+          <p:cNvSpPr/>
+          <p:nvPr/>
+        </p:nvSpPr>
+        <p:spPr>
+          <a:xfrm>
+            <a:off x="7799832" y="2935224"/>
+            <a:ext cx="3145536" cy="256032"/>
+          </a:xfrm>
+          <a:prstGeom prst="rect">
+            <a:avLst/>
+          </a:prstGeom>
+          <a:noFill/>
+          <a:ln/>
+        </p:spPr>
+        <p:txBody>
+          <a:bodyPr wrap="square" lIns="0" tIns="0" rIns="0" bIns="0" rtlCol="0" anchor="ctr"/>
+          <a:lstStyle/>
+          <a:p>
+            <a:pPr indent="0" marL="0">
+              <a:buNone/>
+            </a:pPr>
+            <a:r>
+              <a:rPr lang="en-US" sz="1300" b="1" dirty="0">
+                <a:solidFill>
+                  <a:srgbClr val="0068B7"/>
+                </a:solidFill>
+                <a:latin typeface="Aptos" pitchFamily="34" charset="0"/>
+                <a:ea typeface="Aptos" pitchFamily="34" charset="-122"/>
+                <a:cs typeface="Aptos" pitchFamily="34" charset="-120"/>
+              </a:rPr>
+              <a:t>Concept checkpoints</a:t>
+            </a:r>
+            <a:endParaRPr lang="en-US" sz="1300" dirty="0"/>
+          </a:p>
+        </p:txBody>
+      </p:sp>
+      <p:sp>
+        <p:nvSpPr>
+          <p:cNvPr id="15" name="Text 13"/>
+          <p:cNvSpPr/>
+          <p:nvPr/>
+        </p:nvSpPr>
+        <p:spPr>
+          <a:xfrm>
+            <a:off x="7818120" y="3300984"/>
+            <a:ext cx="3090672" cy="877824"/>
+          </a:xfrm>
+          <a:prstGeom prst="rect">
+            <a:avLst/>
+          </a:prstGeom>
+          <a:noFill/>
+          <a:ln/>
+        </p:spPr>
+        <p:txBody>
+          <a:bodyPr wrap="square" lIns="254" tIns="254" rIns="254" bIns="254" rtlCol="0" anchor="t">
+            <a:normAutofit/>
+          </a:bodyPr>
+          <a:lstStyle/>
+          <a:p>
+            <a:r>
+              <a:rPr lang="en-US" sz="1380" dirty="0">
+                <a:solidFill>
+                  <a:srgbClr val="17364A"/>
+                </a:solidFill>
+                <a:latin typeface="Aptos" pitchFamily="34" charset="0"/>
+                <a:ea typeface="Aptos" pitchFamily="34" charset="-122"/>
+                <a:cs typeface="Aptos" pitchFamily="34" charset="-120"/>
+              </a:rPr>
+              <a:t>Signal documentation template</a:t>
+            </a:r>
+            <a:endParaRPr lang="en-US" sz="1380" dirty="0"/>
+          </a:p>
+        </p:txBody>
       </p:sp>
       <p:sp>
         <p:nvSpPr>
           <p:cNvPr id="16" name="Shape 14"/>
-          <p:cNvSpPr/>
-          <p:nvPr/>
-        </p:nvSpPr>
-        <p:spPr>
-          <a:xfrm>
-            <a:off x="9198864" y="4206240"/>
-            <a:ext cx="347472" cy="347472"/>
-          </a:xfrm>
-          <a:prstGeom prst="ellipse">
-            <a:avLst/>
-          </a:prstGeom>
-          <a:solidFill>
-            <a:srgbClr val="2F8A28"/>
-          </a:solidFill>
-          <a:ln w="12700">
-            <a:solidFill>
-              <a:srgbClr val="2F8A28"/>
-            </a:solidFill>
-            <a:prstDash val="solid"/>
-          </a:ln>
-        </p:spPr>
-      </p:sp>
-      <p:sp>
-        <p:nvSpPr>
-          <p:cNvPr id="17" name="Text 15"/>
-          <p:cNvSpPr/>
-          <p:nvPr/>
-        </p:nvSpPr>
-        <p:spPr>
-          <a:xfrm>
-            <a:off x="7909560" y="3977640"/>
-            <a:ext cx="2926080" cy="182880"/>
-          </a:xfrm>
-          <a:prstGeom prst="rect">
-            <a:avLst/>
-          </a:prstGeom>
-          <a:noFill/>
-          <a:ln/>
-        </p:spPr>
-        <p:txBody>
-          <a:bodyPr wrap="square" lIns="0" tIns="0" rIns="0" bIns="0" rtlCol="0" anchor="ctr"/>
-          <a:lstStyle/>
-          <a:p>
-            <a:pPr algn="ctr" indent="0" marL="0">
-              <a:buNone/>
-            </a:pPr>
-            <a:r>
-              <a:rPr lang="en-US" sz="1000" dirty="0">
-                <a:solidFill>
-                  <a:srgbClr val="003A63"/>
-                </a:solidFill>
-                <a:latin typeface="Aptos" pitchFamily="34" charset="0"/>
-                <a:ea typeface="Aptos" pitchFamily="34" charset="-122"/>
-                <a:cs typeface="Aptos" pitchFamily="34" charset="-120"/>
-              </a:rPr>
-              <a:t>Concept to action</a:t>
-            </a:r>
-            <a:endParaRPr lang="en-US" sz="1000" dirty="0"/>
-          </a:p>
-        </p:txBody>
-      </p:sp>
-      <p:sp>
-        <p:nvSpPr>
-          <p:cNvPr id="18" name="Shape 16"/>
           <p:cNvSpPr/>
           <p:nvPr/>
         </p:nvSpPr>
@@ -10114,7 +9790,7 @@
       </p:sp>
       <p:sp>
         <p:nvSpPr>
-          <p:cNvPr id="19" name="Text 17"/>
+          <p:cNvPr id="17" name="Text 15"/>
           <p:cNvSpPr/>
           <p:nvPr/>
         </p:nvSpPr>
@@ -10153,7 +9829,7 @@
       </p:sp>
       <p:sp>
         <p:nvSpPr>
-          <p:cNvPr id="20" name="Text 18"/>
+          <p:cNvPr id="18" name="Text 16"/>
           <p:cNvSpPr/>
           <p:nvPr/>
         </p:nvSpPr>
@@ -10686,20 +10362,20 @@
         </p:nvSpPr>
         <p:spPr>
           <a:xfrm>
-            <a:off x="7635240" y="3730752"/>
-            <a:ext cx="1033272" cy="749808"/>
+            <a:off x="7909560" y="3675888"/>
+            <a:ext cx="3154680" cy="1691640"/>
           </a:xfrm>
           <a:prstGeom prst="roundRect">
             <a:avLst>
-              <a:gd name="adj" fmla="val 14634"/>
+              <a:gd name="adj" fmla="val 6486"/>
             </a:avLst>
           </a:prstGeom>
           <a:solidFill>
-            <a:srgbClr val="0068B7"/>
+            <a:srgbClr val="FFFFFF"/>
           </a:solidFill>
           <a:ln w="12700">
             <a:solidFill>
-              <a:srgbClr val="0068B7"/>
+              <a:srgbClr val="B9D7E6"/>
             </a:solidFill>
             <a:prstDash val="solid"/>
           </a:ln>
@@ -10713,172 +10389,100 @@
         </p:nvSpPr>
         <p:spPr>
           <a:xfrm>
-            <a:off x="7708392" y="3922776"/>
-            <a:ext cx="886968" cy="310896"/>
-          </a:xfrm>
-          <a:prstGeom prst="rect">
-            <a:avLst/>
-          </a:prstGeom>
-          <a:noFill/>
-          <a:ln/>
-        </p:spPr>
-        <p:txBody>
-          <a:bodyPr wrap="square" lIns="0" tIns="0" rIns="0" bIns="0" rtlCol="0" anchor="ctr">
+            <a:off x="8074152" y="3822192"/>
+            <a:ext cx="2825496" cy="256032"/>
+          </a:xfrm>
+          <a:prstGeom prst="rect">
+            <a:avLst/>
+          </a:prstGeom>
+          <a:noFill/>
+          <a:ln/>
+        </p:spPr>
+        <p:txBody>
+          <a:bodyPr wrap="square" lIns="0" tIns="0" rIns="0" bIns="0" rtlCol="0" anchor="ctr"/>
+          <a:lstStyle/>
+          <a:p>
+            <a:pPr indent="0" marL="0">
+              <a:buNone/>
+            </a:pPr>
+            <a:r>
+              <a:rPr lang="en-US" sz="1300" b="1" dirty="0">
+                <a:solidFill>
+                  <a:srgbClr val="0068B7"/>
+                </a:solidFill>
+                <a:latin typeface="Aptos" pitchFamily="34" charset="0"/>
+                <a:ea typeface="Aptos" pitchFamily="34" charset="-122"/>
+                <a:cs typeface="Aptos" pitchFamily="34" charset="-120"/>
+              </a:rPr>
+              <a:t>Learning sequence</a:t>
+            </a:r>
+            <a:endParaRPr lang="en-US" sz="1300" dirty="0"/>
+          </a:p>
+        </p:txBody>
+      </p:sp>
+      <p:sp>
+        <p:nvSpPr>
+          <p:cNvPr id="15" name="Text 13"/>
+          <p:cNvSpPr/>
+          <p:nvPr/>
+        </p:nvSpPr>
+        <p:spPr>
+          <a:xfrm>
+            <a:off x="8092440" y="4187952"/>
+            <a:ext cx="2770632" cy="1033272"/>
+          </a:xfrm>
+          <a:prstGeom prst="rect">
+            <a:avLst/>
+          </a:prstGeom>
+          <a:noFill/>
+          <a:ln/>
+        </p:spPr>
+        <p:txBody>
+          <a:bodyPr wrap="square" lIns="254" tIns="254" rIns="254" bIns="254" rtlCol="0" anchor="t">
             <a:normAutofit/>
           </a:bodyPr>
           <a:lstStyle/>
           <a:p>
-            <a:pPr algn="ctr" indent="0" marL="0">
-              <a:buNone/>
-            </a:pPr>
-            <a:r>
-              <a:rPr lang="en-US" sz="1500" b="1" dirty="0">
-                <a:solidFill>
-                  <a:srgbClr val="FFFFFF"/>
-                </a:solidFill>
-                <a:latin typeface="Aptos" pitchFamily="34" charset="0"/>
-                <a:ea typeface="Aptos" pitchFamily="34" charset="-122"/>
-                <a:cs typeface="Aptos" pitchFamily="34" charset="-120"/>
-              </a:rPr>
-              <a:t>Learn</a:t>
-            </a:r>
-            <a:endParaRPr lang="en-US" sz="1500" dirty="0"/>
-          </a:p>
-        </p:txBody>
-      </p:sp>
-      <p:sp>
-        <p:nvSpPr>
-          <p:cNvPr id="15" name="Shape 13"/>
-          <p:cNvSpPr/>
-          <p:nvPr/>
-        </p:nvSpPr>
-        <p:spPr>
-          <a:xfrm>
-            <a:off x="8924544" y="3730752"/>
-            <a:ext cx="1033272" cy="749808"/>
-          </a:xfrm>
-          <a:prstGeom prst="roundRect">
-            <a:avLst>
-              <a:gd name="adj" fmla="val 14634"/>
-            </a:avLst>
-          </a:prstGeom>
-          <a:solidFill>
-            <a:srgbClr val="2F8A28"/>
-          </a:solidFill>
-          <a:ln w="12700">
-            <a:solidFill>
-              <a:srgbClr val="2F8A28"/>
-            </a:solidFill>
-            <a:prstDash val="solid"/>
-          </a:ln>
-        </p:spPr>
-      </p:sp>
-      <p:sp>
-        <p:nvSpPr>
-          <p:cNvPr id="16" name="Text 14"/>
-          <p:cNvSpPr/>
-          <p:nvPr/>
-        </p:nvSpPr>
-        <p:spPr>
-          <a:xfrm>
-            <a:off x="8997696" y="3922776"/>
-            <a:ext cx="886968" cy="310896"/>
-          </a:xfrm>
-          <a:prstGeom prst="rect">
-            <a:avLst/>
-          </a:prstGeom>
-          <a:noFill/>
-          <a:ln/>
-        </p:spPr>
-        <p:txBody>
-          <a:bodyPr wrap="square" lIns="0" tIns="0" rIns="0" bIns="0" rtlCol="0" anchor="ctr">
-            <a:normAutofit/>
-          </a:bodyPr>
-          <a:lstStyle/>
-          <a:p>
-            <a:pPr algn="ctr" indent="0" marL="0">
-              <a:buNone/>
-            </a:pPr>
-            <a:r>
-              <a:rPr lang="en-US" sz="1500" b="1" dirty="0">
-                <a:solidFill>
-                  <a:srgbClr val="FFFFFF"/>
-                </a:solidFill>
-                <a:latin typeface="Aptos" pitchFamily="34" charset="0"/>
-                <a:ea typeface="Aptos" pitchFamily="34" charset="-122"/>
-                <a:cs typeface="Aptos" pitchFamily="34" charset="-120"/>
-              </a:rPr>
-              <a:t>Apply</a:t>
-            </a:r>
-            <a:endParaRPr lang="en-US" sz="1500" dirty="0"/>
-          </a:p>
-        </p:txBody>
-      </p:sp>
-      <p:sp>
-        <p:nvSpPr>
-          <p:cNvPr id="17" name="Shape 15"/>
-          <p:cNvSpPr/>
-          <p:nvPr/>
-        </p:nvSpPr>
-        <p:spPr>
-          <a:xfrm>
-            <a:off x="10213848" y="3730752"/>
-            <a:ext cx="1033272" cy="749808"/>
-          </a:xfrm>
-          <a:prstGeom prst="roundRect">
-            <a:avLst>
-              <a:gd name="adj" fmla="val 14634"/>
-            </a:avLst>
-          </a:prstGeom>
-          <a:solidFill>
-            <a:srgbClr val="6A4CA3"/>
-          </a:solidFill>
-          <a:ln w="12700">
-            <a:solidFill>
-              <a:srgbClr val="6A4CA3"/>
-            </a:solidFill>
-            <a:prstDash val="solid"/>
-          </a:ln>
-        </p:spPr>
-      </p:sp>
-      <p:sp>
-        <p:nvSpPr>
-          <p:cNvPr id="18" name="Text 16"/>
-          <p:cNvSpPr/>
-          <p:nvPr/>
-        </p:nvSpPr>
-        <p:spPr>
-          <a:xfrm>
-            <a:off x="10287000" y="3922776"/>
-            <a:ext cx="886968" cy="310896"/>
-          </a:xfrm>
-          <a:prstGeom prst="rect">
-            <a:avLst/>
-          </a:prstGeom>
-          <a:noFill/>
-          <a:ln/>
-        </p:spPr>
-        <p:txBody>
-          <a:bodyPr wrap="square" lIns="0" tIns="0" rIns="0" bIns="0" rtlCol="0" anchor="ctr">
-            <a:normAutofit/>
-          </a:bodyPr>
-          <a:lstStyle/>
-          <a:p>
-            <a:pPr algn="ctr" indent="0" marL="0">
-              <a:buNone/>
-            </a:pPr>
-            <a:r>
-              <a:rPr lang="en-US" sz="1500" b="1" dirty="0">
-                <a:solidFill>
-                  <a:srgbClr val="FFFFFF"/>
-                </a:solidFill>
-                <a:latin typeface="Aptos" pitchFamily="34" charset="0"/>
-                <a:ea typeface="Aptos" pitchFamily="34" charset="-122"/>
-                <a:cs typeface="Aptos" pitchFamily="34" charset="-120"/>
-              </a:rPr>
-              <a:t>Document</a:t>
-            </a:r>
-            <a:endParaRPr lang="en-US" sz="1500" dirty="0"/>
+            <a:r>
+              <a:rPr lang="en-US" sz="1380" dirty="0">
+                <a:solidFill>
+                  <a:srgbClr val="17364A"/>
+                </a:solidFill>
+                <a:latin typeface="Aptos" pitchFamily="34" charset="0"/>
+                <a:ea typeface="Aptos" pitchFamily="34" charset="-122"/>
+                <a:cs typeface="Aptos" pitchFamily="34" charset="-120"/>
+              </a:rPr>
+              <a:t>Read the module for shared vocabulary and context.</a:t>
+            </a:r>
+            <a:endParaRPr lang="en-US" sz="1380" dirty="0"/>
+          </a:p>
+          <a:p>
+            <a:r>
+              <a:rPr lang="en-US" sz="1380" dirty="0">
+                <a:solidFill>
+                  <a:srgbClr val="17364A"/>
+                </a:solidFill>
+                <a:latin typeface="Aptos" pitchFamily="34" charset="0"/>
+                <a:ea typeface="Aptos" pitchFamily="34" charset="-122"/>
+                <a:cs typeface="Aptos" pitchFamily="34" charset="-120"/>
+              </a:rPr>
+              <a:t>Complete the practical exercise to apply the concept.</a:t>
+            </a:r>
+            <a:endParaRPr lang="en-US" sz="1380" dirty="0"/>
+          </a:p>
+          <a:p>
+            <a:r>
+              <a:rPr lang="en-US" sz="1380" dirty="0">
+                <a:solidFill>
+                  <a:srgbClr val="17364A"/>
+                </a:solidFill>
+                <a:latin typeface="Aptos" pitchFamily="34" charset="0"/>
+                <a:ea typeface="Aptos" pitchFamily="34" charset="-122"/>
+                <a:cs typeface="Aptos" pitchFamily="34" charset="-120"/>
+              </a:rPr>
+              <a:t>Use the notes and references for deeper review.</a:t>
+            </a:r>
+            <a:endParaRPr lang="en-US" sz="1380" dirty="0"/>
           </a:p>
         </p:txBody>
       </p:sp>
@@ -11351,13 +10955,11 @@
             </a:avLst>
           </a:prstGeom>
           <a:solidFill>
-            <a:srgbClr val="FFFFFF">
-              <a:alpha val="88000"/>
-            </a:srgbClr>
+            <a:srgbClr val="FFFFFF"/>
           </a:solidFill>
           <a:ln w="12700">
             <a:solidFill>
-              <a:srgbClr val="D6E8F2"/>
+              <a:srgbClr val="B9D7E6"/>
             </a:solidFill>
             <a:prstDash val="solid"/>
           </a:ln>
@@ -11365,119 +10967,112 @@
       </p:sp>
       <p:sp>
         <p:nvSpPr>
-          <p:cNvPr id="14" name="Shape 12"/>
-          <p:cNvSpPr/>
-          <p:nvPr/>
-        </p:nvSpPr>
-        <p:spPr>
-          <a:xfrm>
-            <a:off x="8074152" y="3291840"/>
-            <a:ext cx="2596896" cy="749808"/>
-          </a:xfrm>
-          <a:prstGeom prst="rect">
-            <a:avLst/>
-          </a:prstGeom>
-          <a:solidFill>
-            <a:srgbClr val="EAF6F8"/>
-          </a:solidFill>
-          <a:ln w="12700">
-            <a:solidFill>
-              <a:srgbClr val="8ABBD8"/>
-            </a:solidFill>
-            <a:prstDash val="solid"/>
-          </a:ln>
-        </p:spPr>
-      </p:sp>
-      <p:sp>
-        <p:nvSpPr>
-          <p:cNvPr id="15" name="Shape 13"/>
-          <p:cNvSpPr/>
-          <p:nvPr/>
-        </p:nvSpPr>
-        <p:spPr>
-          <a:xfrm>
-            <a:off x="8202168" y="3721608"/>
-            <a:ext cx="2340864" cy="0"/>
-          </a:xfrm>
-          <a:prstGeom prst="line">
-            <a:avLst/>
-          </a:prstGeom>
-          <a:noFill/>
-          <a:ln w="19050">
-            <a:solidFill>
-              <a:srgbClr val="0068B7"/>
-            </a:solidFill>
-            <a:prstDash val="solid"/>
-          </a:ln>
-        </p:spPr>
+          <p:cNvPr id="14" name="Text 12"/>
+          <p:cNvSpPr/>
+          <p:nvPr/>
+        </p:nvSpPr>
+        <p:spPr>
+          <a:xfrm>
+            <a:off x="7799832" y="2935224"/>
+            <a:ext cx="3145536" cy="256032"/>
+          </a:xfrm>
+          <a:prstGeom prst="rect">
+            <a:avLst/>
+          </a:prstGeom>
+          <a:noFill/>
+          <a:ln/>
+        </p:spPr>
+        <p:txBody>
+          <a:bodyPr wrap="square" lIns="0" tIns="0" rIns="0" bIns="0" rtlCol="0" anchor="ctr"/>
+          <a:lstStyle/>
+          <a:p>
+            <a:pPr indent="0" marL="0">
+              <a:buNone/>
+            </a:pPr>
+            <a:r>
+              <a:rPr lang="en-US" sz="1300" b="1" dirty="0">
+                <a:solidFill>
+                  <a:srgbClr val="0068B7"/>
+                </a:solidFill>
+                <a:latin typeface="Aptos" pitchFamily="34" charset="0"/>
+                <a:ea typeface="Aptos" pitchFamily="34" charset="-122"/>
+                <a:cs typeface="Aptos" pitchFamily="34" charset="-120"/>
+              </a:rPr>
+              <a:t>Concept checkpoints</a:t>
+            </a:r>
+            <a:endParaRPr lang="en-US" sz="1300" dirty="0"/>
+          </a:p>
+        </p:txBody>
+      </p:sp>
+      <p:sp>
+        <p:nvSpPr>
+          <p:cNvPr id="15" name="Text 13"/>
+          <p:cNvSpPr/>
+          <p:nvPr/>
+        </p:nvSpPr>
+        <p:spPr>
+          <a:xfrm>
+            <a:off x="7818120" y="3300984"/>
+            <a:ext cx="3090672" cy="877824"/>
+          </a:xfrm>
+          <a:prstGeom prst="rect">
+            <a:avLst/>
+          </a:prstGeom>
+          <a:noFill/>
+          <a:ln/>
+        </p:spPr>
+        <p:txBody>
+          <a:bodyPr wrap="square" lIns="254" tIns="254" rIns="254" bIns="254" rtlCol="0" anchor="t">
+            <a:normAutofit/>
+          </a:bodyPr>
+          <a:lstStyle/>
+          <a:p>
+            <a:r>
+              <a:rPr lang="en-US" sz="1380" dirty="0">
+                <a:solidFill>
+                  <a:srgbClr val="17364A"/>
+                </a:solidFill>
+                <a:latin typeface="Aptos" pitchFamily="34" charset="0"/>
+                <a:ea typeface="Aptos" pitchFamily="34" charset="-122"/>
+                <a:cs typeface="Aptos" pitchFamily="34" charset="-120"/>
+              </a:rPr>
+              <a:t>Anomaly detection review plan</a:t>
+            </a:r>
+            <a:endParaRPr lang="en-US" sz="1380" dirty="0"/>
+          </a:p>
+          <a:p>
+            <a:r>
+              <a:rPr lang="en-US" sz="1380" dirty="0">
+                <a:solidFill>
+                  <a:srgbClr val="17364A"/>
+                </a:solidFill>
+                <a:latin typeface="Aptos" pitchFamily="34" charset="0"/>
+                <a:ea typeface="Aptos" pitchFamily="34" charset="-122"/>
+                <a:cs typeface="Aptos" pitchFamily="34" charset="-120"/>
+              </a:rPr>
+              <a:t>Baseline and threshold rationale</a:t>
+            </a:r>
+            <a:endParaRPr lang="en-US" sz="1380" dirty="0"/>
+          </a:p>
+          <a:p>
+            <a:r>
+              <a:rPr lang="en-US" sz="1380" dirty="0">
+                <a:solidFill>
+                  <a:srgbClr val="17364A"/>
+                </a:solidFill>
+                <a:latin typeface="Aptos" pitchFamily="34" charset="0"/>
+                <a:ea typeface="Aptos" pitchFamily="34" charset="-122"/>
+                <a:cs typeface="Aptos" pitchFamily="34" charset="-120"/>
+              </a:rPr>
+              <a:t>Alert review protocol</a:t>
+            </a:r>
+            <a:endParaRPr lang="en-US" sz="1380" dirty="0"/>
+          </a:p>
+        </p:txBody>
       </p:sp>
       <p:sp>
         <p:nvSpPr>
           <p:cNvPr id="16" name="Shape 14"/>
-          <p:cNvSpPr/>
-          <p:nvPr/>
-        </p:nvSpPr>
-        <p:spPr>
-          <a:xfrm>
-            <a:off x="9198864" y="4206240"/>
-            <a:ext cx="347472" cy="347472"/>
-          </a:xfrm>
-          <a:prstGeom prst="ellipse">
-            <a:avLst/>
-          </a:prstGeom>
-          <a:solidFill>
-            <a:srgbClr val="2F8A28"/>
-          </a:solidFill>
-          <a:ln w="12700">
-            <a:solidFill>
-              <a:srgbClr val="2F8A28"/>
-            </a:solidFill>
-            <a:prstDash val="solid"/>
-          </a:ln>
-        </p:spPr>
-      </p:sp>
-      <p:sp>
-        <p:nvSpPr>
-          <p:cNvPr id="17" name="Text 15"/>
-          <p:cNvSpPr/>
-          <p:nvPr/>
-        </p:nvSpPr>
-        <p:spPr>
-          <a:xfrm>
-            <a:off x="7909560" y="3977640"/>
-            <a:ext cx="2926080" cy="182880"/>
-          </a:xfrm>
-          <a:prstGeom prst="rect">
-            <a:avLst/>
-          </a:prstGeom>
-          <a:noFill/>
-          <a:ln/>
-        </p:spPr>
-        <p:txBody>
-          <a:bodyPr wrap="square" lIns="0" tIns="0" rIns="0" bIns="0" rtlCol="0" anchor="ctr"/>
-          <a:lstStyle/>
-          <a:p>
-            <a:pPr algn="ctr" indent="0" marL="0">
-              <a:buNone/>
-            </a:pPr>
-            <a:r>
-              <a:rPr lang="en-US" sz="1000" dirty="0">
-                <a:solidFill>
-                  <a:srgbClr val="003A63"/>
-                </a:solidFill>
-                <a:latin typeface="Aptos" pitchFamily="34" charset="0"/>
-                <a:ea typeface="Aptos" pitchFamily="34" charset="-122"/>
-                <a:cs typeface="Aptos" pitchFamily="34" charset="-120"/>
-              </a:rPr>
-              <a:t>Concept to action</a:t>
-            </a:r>
-            <a:endParaRPr lang="en-US" sz="1000" dirty="0"/>
-          </a:p>
-        </p:txBody>
-      </p:sp>
-      <p:sp>
-        <p:nvSpPr>
-          <p:cNvPr id="18" name="Shape 16"/>
           <p:cNvSpPr/>
           <p:nvPr/>
         </p:nvSpPr>
@@ -11504,7 +11099,7 @@
       </p:sp>
       <p:sp>
         <p:nvSpPr>
-          <p:cNvPr id="19" name="Text 17"/>
+          <p:cNvPr id="17" name="Text 15"/>
           <p:cNvSpPr/>
           <p:nvPr/>
         </p:nvSpPr>
@@ -11543,7 +11138,7 @@
       </p:sp>
       <p:sp>
         <p:nvSpPr>
-          <p:cNvPr id="20" name="Text 18"/>
+          <p:cNvPr id="18" name="Text 16"/>
           <p:cNvSpPr/>
           <p:nvPr/>
         </p:nvSpPr>
@@ -12051,13 +11646,11 @@
             </a:avLst>
           </a:prstGeom>
           <a:solidFill>
-            <a:srgbClr val="FFFFFF">
-              <a:alpha val="88000"/>
-            </a:srgbClr>
+            <a:srgbClr val="FFFFFF"/>
           </a:solidFill>
           <a:ln w="12700">
             <a:solidFill>
-              <a:srgbClr val="D6E8F2"/>
+              <a:srgbClr val="B9D7E6"/>
             </a:solidFill>
             <a:prstDash val="solid"/>
           </a:ln>
@@ -12065,119 +11658,112 @@
       </p:sp>
       <p:sp>
         <p:nvSpPr>
-          <p:cNvPr id="14" name="Shape 12"/>
-          <p:cNvSpPr/>
-          <p:nvPr/>
-        </p:nvSpPr>
-        <p:spPr>
-          <a:xfrm>
-            <a:off x="8074152" y="3291840"/>
-            <a:ext cx="2596896" cy="749808"/>
-          </a:xfrm>
-          <a:prstGeom prst="rect">
-            <a:avLst/>
-          </a:prstGeom>
-          <a:solidFill>
-            <a:srgbClr val="EAF6F8"/>
-          </a:solidFill>
-          <a:ln w="12700">
-            <a:solidFill>
-              <a:srgbClr val="8ABBD8"/>
-            </a:solidFill>
-            <a:prstDash val="solid"/>
-          </a:ln>
-        </p:spPr>
-      </p:sp>
-      <p:sp>
-        <p:nvSpPr>
-          <p:cNvPr id="15" name="Shape 13"/>
-          <p:cNvSpPr/>
-          <p:nvPr/>
-        </p:nvSpPr>
-        <p:spPr>
-          <a:xfrm>
-            <a:off x="8202168" y="3721608"/>
-            <a:ext cx="2340864" cy="0"/>
-          </a:xfrm>
-          <a:prstGeom prst="line">
-            <a:avLst/>
-          </a:prstGeom>
-          <a:noFill/>
-          <a:ln w="19050">
-            <a:solidFill>
-              <a:srgbClr val="0068B7"/>
-            </a:solidFill>
-            <a:prstDash val="solid"/>
-          </a:ln>
-        </p:spPr>
+          <p:cNvPr id="14" name="Text 12"/>
+          <p:cNvSpPr/>
+          <p:nvPr/>
+        </p:nvSpPr>
+        <p:spPr>
+          <a:xfrm>
+            <a:off x="7799832" y="2935224"/>
+            <a:ext cx="3145536" cy="256032"/>
+          </a:xfrm>
+          <a:prstGeom prst="rect">
+            <a:avLst/>
+          </a:prstGeom>
+          <a:noFill/>
+          <a:ln/>
+        </p:spPr>
+        <p:txBody>
+          <a:bodyPr wrap="square" lIns="0" tIns="0" rIns="0" bIns="0" rtlCol="0" anchor="ctr"/>
+          <a:lstStyle/>
+          <a:p>
+            <a:pPr indent="0" marL="0">
+              <a:buNone/>
+            </a:pPr>
+            <a:r>
+              <a:rPr lang="en-US" sz="1300" b="1" dirty="0">
+                <a:solidFill>
+                  <a:srgbClr val="0068B7"/>
+                </a:solidFill>
+                <a:latin typeface="Aptos" pitchFamily="34" charset="0"/>
+                <a:ea typeface="Aptos" pitchFamily="34" charset="-122"/>
+                <a:cs typeface="Aptos" pitchFamily="34" charset="-120"/>
+              </a:rPr>
+              <a:t>Concept checkpoints</a:t>
+            </a:r>
+            <a:endParaRPr lang="en-US" sz="1300" dirty="0"/>
+          </a:p>
+        </p:txBody>
+      </p:sp>
+      <p:sp>
+        <p:nvSpPr>
+          <p:cNvPr id="15" name="Text 13"/>
+          <p:cNvSpPr/>
+          <p:nvPr/>
+        </p:nvSpPr>
+        <p:spPr>
+          <a:xfrm>
+            <a:off x="7818120" y="3300984"/>
+            <a:ext cx="3090672" cy="877824"/>
+          </a:xfrm>
+          <a:prstGeom prst="rect">
+            <a:avLst/>
+          </a:prstGeom>
+          <a:noFill/>
+          <a:ln/>
+        </p:spPr>
+        <p:txBody>
+          <a:bodyPr wrap="square" lIns="254" tIns="254" rIns="254" bIns="254" rtlCol="0" anchor="t">
+            <a:normAutofit/>
+          </a:bodyPr>
+          <a:lstStyle/>
+          <a:p>
+            <a:r>
+              <a:rPr lang="en-US" sz="1380" dirty="0">
+                <a:solidFill>
+                  <a:srgbClr val="17364A"/>
+                </a:solidFill>
+                <a:latin typeface="Aptos" pitchFamily="34" charset="0"/>
+                <a:ea typeface="Aptos" pitchFamily="34" charset="-122"/>
+                <a:cs typeface="Aptos" pitchFamily="34" charset="-120"/>
+              </a:rPr>
+              <a:t>1.</a:t>
+            </a:r>
+            <a:endParaRPr lang="en-US" sz="1380" dirty="0"/>
+          </a:p>
+          <a:p>
+            <a:r>
+              <a:rPr lang="en-US" sz="1380" dirty="0">
+                <a:solidFill>
+                  <a:srgbClr val="17364A"/>
+                </a:solidFill>
+                <a:latin typeface="Aptos" pitchFamily="34" charset="0"/>
+                <a:ea typeface="Aptos" pitchFamily="34" charset="-122"/>
+                <a:cs typeface="Aptos" pitchFamily="34" charset="-120"/>
+              </a:rPr>
+              <a:t>What is an anomaly in a public health time series?</a:t>
+            </a:r>
+            <a:endParaRPr lang="en-US" sz="1380" dirty="0"/>
+          </a:p>
+          <a:p>
+            <a:r>
+              <a:rPr lang="en-US" sz="1380" dirty="0">
+                <a:solidFill>
+                  <a:srgbClr val="17364A"/>
+                </a:solidFill>
+                <a:latin typeface="Aptos" pitchFamily="34" charset="0"/>
+                <a:ea typeface="Aptos" pitchFamily="34" charset="-122"/>
+                <a:cs typeface="Aptos" pitchFamily="34" charset="-120"/>
+              </a:rPr>
+              <a:t>2.</a:t>
+            </a:r>
+            <a:endParaRPr lang="en-US" sz="1380" dirty="0"/>
+          </a:p>
+        </p:txBody>
       </p:sp>
       <p:sp>
         <p:nvSpPr>
           <p:cNvPr id="16" name="Shape 14"/>
-          <p:cNvSpPr/>
-          <p:nvPr/>
-        </p:nvSpPr>
-        <p:spPr>
-          <a:xfrm>
-            <a:off x="9198864" y="4206240"/>
-            <a:ext cx="347472" cy="347472"/>
-          </a:xfrm>
-          <a:prstGeom prst="ellipse">
-            <a:avLst/>
-          </a:prstGeom>
-          <a:solidFill>
-            <a:srgbClr val="2F8A28"/>
-          </a:solidFill>
-          <a:ln w="12700">
-            <a:solidFill>
-              <a:srgbClr val="2F8A28"/>
-            </a:solidFill>
-            <a:prstDash val="solid"/>
-          </a:ln>
-        </p:spPr>
-      </p:sp>
-      <p:sp>
-        <p:nvSpPr>
-          <p:cNvPr id="17" name="Text 15"/>
-          <p:cNvSpPr/>
-          <p:nvPr/>
-        </p:nvSpPr>
-        <p:spPr>
-          <a:xfrm>
-            <a:off x="7909560" y="3977640"/>
-            <a:ext cx="2926080" cy="182880"/>
-          </a:xfrm>
-          <a:prstGeom prst="rect">
-            <a:avLst/>
-          </a:prstGeom>
-          <a:noFill/>
-          <a:ln/>
-        </p:spPr>
-        <p:txBody>
-          <a:bodyPr wrap="square" lIns="0" tIns="0" rIns="0" bIns="0" rtlCol="0" anchor="ctr"/>
-          <a:lstStyle/>
-          <a:p>
-            <a:pPr algn="ctr" indent="0" marL="0">
-              <a:buNone/>
-            </a:pPr>
-            <a:r>
-              <a:rPr lang="en-US" sz="1000" dirty="0">
-                <a:solidFill>
-                  <a:srgbClr val="003A63"/>
-                </a:solidFill>
-                <a:latin typeface="Aptos" pitchFamily="34" charset="0"/>
-                <a:ea typeface="Aptos" pitchFamily="34" charset="-122"/>
-                <a:cs typeface="Aptos" pitchFamily="34" charset="-120"/>
-              </a:rPr>
-              <a:t>Concept to action</a:t>
-            </a:r>
-            <a:endParaRPr lang="en-US" sz="1000" dirty="0"/>
-          </a:p>
-        </p:txBody>
-      </p:sp>
-      <p:sp>
-        <p:nvSpPr>
-          <p:cNvPr id="18" name="Shape 16"/>
           <p:cNvSpPr/>
           <p:nvPr/>
         </p:nvSpPr>
@@ -12204,7 +11790,7 @@
       </p:sp>
       <p:sp>
         <p:nvSpPr>
-          <p:cNvPr id="19" name="Text 17"/>
+          <p:cNvPr id="17" name="Text 15"/>
           <p:cNvSpPr/>
           <p:nvPr/>
         </p:nvSpPr>
@@ -12243,7 +11829,7 @@
       </p:sp>
       <p:sp>
         <p:nvSpPr>
-          <p:cNvPr id="20" name="Text 18"/>
+          <p:cNvPr id="18" name="Text 16"/>
           <p:cNvSpPr/>
           <p:nvPr/>
         </p:nvSpPr>
@@ -12751,13 +12337,11 @@
             </a:avLst>
           </a:prstGeom>
           <a:solidFill>
-            <a:srgbClr val="FFFFFF">
-              <a:alpha val="88000"/>
-            </a:srgbClr>
+            <a:srgbClr val="FFFFFF"/>
           </a:solidFill>
           <a:ln w="12700">
             <a:solidFill>
-              <a:srgbClr val="D6E8F2"/>
+              <a:srgbClr val="B9D7E6"/>
             </a:solidFill>
             <a:prstDash val="solid"/>
           </a:ln>
@@ -12765,119 +12349,98 @@
       </p:sp>
       <p:sp>
         <p:nvSpPr>
-          <p:cNvPr id="14" name="Shape 12"/>
-          <p:cNvSpPr/>
-          <p:nvPr/>
-        </p:nvSpPr>
-        <p:spPr>
-          <a:xfrm>
-            <a:off x="8074152" y="3291840"/>
-            <a:ext cx="2596896" cy="749808"/>
-          </a:xfrm>
-          <a:prstGeom prst="rect">
-            <a:avLst/>
-          </a:prstGeom>
-          <a:solidFill>
-            <a:srgbClr val="EAF6F8"/>
-          </a:solidFill>
-          <a:ln w="12700">
-            <a:solidFill>
-              <a:srgbClr val="8ABBD8"/>
-            </a:solidFill>
-            <a:prstDash val="solid"/>
-          </a:ln>
-        </p:spPr>
-      </p:sp>
-      <p:sp>
-        <p:nvSpPr>
-          <p:cNvPr id="15" name="Shape 13"/>
-          <p:cNvSpPr/>
-          <p:nvPr/>
-        </p:nvSpPr>
-        <p:spPr>
-          <a:xfrm>
-            <a:off x="8202168" y="3721608"/>
-            <a:ext cx="2340864" cy="0"/>
-          </a:xfrm>
-          <a:prstGeom prst="line">
-            <a:avLst/>
-          </a:prstGeom>
-          <a:noFill/>
-          <a:ln w="19050">
-            <a:solidFill>
-              <a:srgbClr val="0068B7"/>
-            </a:solidFill>
-            <a:prstDash val="solid"/>
-          </a:ln>
-        </p:spPr>
+          <p:cNvPr id="14" name="Text 12"/>
+          <p:cNvSpPr/>
+          <p:nvPr/>
+        </p:nvSpPr>
+        <p:spPr>
+          <a:xfrm>
+            <a:off x="7799832" y="2935224"/>
+            <a:ext cx="3145536" cy="256032"/>
+          </a:xfrm>
+          <a:prstGeom prst="rect">
+            <a:avLst/>
+          </a:prstGeom>
+          <a:noFill/>
+          <a:ln/>
+        </p:spPr>
+        <p:txBody>
+          <a:bodyPr wrap="square" lIns="0" tIns="0" rIns="0" bIns="0" rtlCol="0" anchor="ctr"/>
+          <a:lstStyle/>
+          <a:p>
+            <a:pPr indent="0" marL="0">
+              <a:buNone/>
+            </a:pPr>
+            <a:r>
+              <a:rPr lang="en-US" sz="1300" b="1" dirty="0">
+                <a:solidFill>
+                  <a:srgbClr val="0068B7"/>
+                </a:solidFill>
+                <a:latin typeface="Aptos" pitchFamily="34" charset="0"/>
+                <a:ea typeface="Aptos" pitchFamily="34" charset="-122"/>
+                <a:cs typeface="Aptos" pitchFamily="34" charset="-120"/>
+              </a:rPr>
+              <a:t>Concept checkpoints</a:t>
+            </a:r>
+            <a:endParaRPr lang="en-US" sz="1300" dirty="0"/>
+          </a:p>
+        </p:txBody>
+      </p:sp>
+      <p:sp>
+        <p:nvSpPr>
+          <p:cNvPr id="15" name="Text 13"/>
+          <p:cNvSpPr/>
+          <p:nvPr/>
+        </p:nvSpPr>
+        <p:spPr>
+          <a:xfrm>
+            <a:off x="7818120" y="3300984"/>
+            <a:ext cx="3090672" cy="877824"/>
+          </a:xfrm>
+          <a:prstGeom prst="rect">
+            <a:avLst/>
+          </a:prstGeom>
+          <a:noFill/>
+          <a:ln/>
+        </p:spPr>
+        <p:txBody>
+          <a:bodyPr wrap="square" lIns="254" tIns="254" rIns="254" bIns="254" rtlCol="0" anchor="t">
+            <a:normAutofit/>
+          </a:bodyPr>
+          <a:lstStyle/>
+          <a:p>
+            <a:r>
+              <a:rPr lang="en-US" sz="1380" dirty="0">
+                <a:solidFill>
+                  <a:srgbClr val="17364A"/>
+                </a:solidFill>
+                <a:latin typeface="Aptos" pitchFamily="34" charset="0"/>
+                <a:ea typeface="Aptos" pitchFamily="34" charset="-122"/>
+                <a:cs typeface="Aptos" pitchFamily="34" charset="-120"/>
+              </a:rPr>
+              <a:t>NIST Artificial Intelligence Risk Management Framework:.</a:t>
+            </a:r>
+            <a:endParaRPr lang="en-US" sz="1380" dirty="0"/>
+          </a:p>
+          <a:p>
+            <a:r>
+              <a:rPr lang="en-US" sz="1380" dirty="0">
+                <a:solidFill>
+                  <a:srgbClr val="17364A"/>
+                </a:solidFill>
+                <a:latin typeface="Aptos" pitchFamily="34" charset="0"/>
+                <a:ea typeface="Aptos" pitchFamily="34" charset="-122"/>
+                <a:cs typeface="Aptos" pitchFamily="34" charset="-120"/>
+              </a:rPr>
+              <a:t>CDC Public Health Data Strategy:.</a:t>
+            </a:r>
+            <a:endParaRPr lang="en-US" sz="1380" dirty="0"/>
+          </a:p>
+        </p:txBody>
       </p:sp>
       <p:sp>
         <p:nvSpPr>
           <p:cNvPr id="16" name="Shape 14"/>
-          <p:cNvSpPr/>
-          <p:nvPr/>
-        </p:nvSpPr>
-        <p:spPr>
-          <a:xfrm>
-            <a:off x="9198864" y="4206240"/>
-            <a:ext cx="347472" cy="347472"/>
-          </a:xfrm>
-          <a:prstGeom prst="ellipse">
-            <a:avLst/>
-          </a:prstGeom>
-          <a:solidFill>
-            <a:srgbClr val="2F8A28"/>
-          </a:solidFill>
-          <a:ln w="12700">
-            <a:solidFill>
-              <a:srgbClr val="2F8A28"/>
-            </a:solidFill>
-            <a:prstDash val="solid"/>
-          </a:ln>
-        </p:spPr>
-      </p:sp>
-      <p:sp>
-        <p:nvSpPr>
-          <p:cNvPr id="17" name="Text 15"/>
-          <p:cNvSpPr/>
-          <p:nvPr/>
-        </p:nvSpPr>
-        <p:spPr>
-          <a:xfrm>
-            <a:off x="7909560" y="3977640"/>
-            <a:ext cx="2926080" cy="182880"/>
-          </a:xfrm>
-          <a:prstGeom prst="rect">
-            <a:avLst/>
-          </a:prstGeom>
-          <a:noFill/>
-          <a:ln/>
-        </p:spPr>
-        <p:txBody>
-          <a:bodyPr wrap="square" lIns="0" tIns="0" rIns="0" bIns="0" rtlCol="0" anchor="ctr"/>
-          <a:lstStyle/>
-          <a:p>
-            <a:pPr algn="ctr" indent="0" marL="0">
-              <a:buNone/>
-            </a:pPr>
-            <a:r>
-              <a:rPr lang="en-US" sz="1000" dirty="0">
-                <a:solidFill>
-                  <a:srgbClr val="003A63"/>
-                </a:solidFill>
-                <a:latin typeface="Aptos" pitchFamily="34" charset="0"/>
-                <a:ea typeface="Aptos" pitchFamily="34" charset="-122"/>
-                <a:cs typeface="Aptos" pitchFamily="34" charset="-120"/>
-              </a:rPr>
-              <a:t>Concept to action</a:t>
-            </a:r>
-            <a:endParaRPr lang="en-US" sz="1000" dirty="0"/>
-          </a:p>
-        </p:txBody>
-      </p:sp>
-      <p:sp>
-        <p:nvSpPr>
-          <p:cNvPr id="18" name="Shape 16"/>
           <p:cNvSpPr/>
           <p:nvPr/>
         </p:nvSpPr>
@@ -12904,7 +12467,7 @@
       </p:sp>
       <p:sp>
         <p:nvSpPr>
-          <p:cNvPr id="19" name="Text 17"/>
+          <p:cNvPr id="17" name="Text 15"/>
           <p:cNvSpPr/>
           <p:nvPr/>
         </p:nvSpPr>
@@ -12943,7 +12506,7 @@
       </p:sp>
       <p:sp>
         <p:nvSpPr>
-          <p:cNvPr id="20" name="Text 18"/>
+          <p:cNvPr id="18" name="Text 16"/>
           <p:cNvSpPr/>
           <p:nvPr/>
         </p:nvSpPr>
@@ -13456,20 +13019,20 @@
         </p:nvSpPr>
         <p:spPr>
           <a:xfrm>
-            <a:off x="7818120" y="3977640"/>
-            <a:ext cx="972312" cy="749808"/>
+            <a:off x="8046720" y="3794760"/>
+            <a:ext cx="3063240" cy="1600200"/>
           </a:xfrm>
           <a:prstGeom prst="roundRect">
             <a:avLst>
-              <a:gd name="adj" fmla="val 14634"/>
+              <a:gd name="adj" fmla="val 6857"/>
             </a:avLst>
           </a:prstGeom>
           <a:solidFill>
-            <a:srgbClr val="0068B7"/>
+            <a:srgbClr val="FFFFFF"/>
           </a:solidFill>
           <a:ln w="12700">
             <a:solidFill>
-              <a:srgbClr val="0068B7"/>
+              <a:srgbClr val="B9D7E6"/>
             </a:solidFill>
             <a:prstDash val="solid"/>
           </a:ln>
@@ -13483,172 +13046,100 @@
         </p:nvSpPr>
         <p:spPr>
           <a:xfrm>
-            <a:off x="7891272" y="4169664"/>
-            <a:ext cx="826008" cy="310896"/>
-          </a:xfrm>
-          <a:prstGeom prst="rect">
-            <a:avLst/>
-          </a:prstGeom>
-          <a:noFill/>
-          <a:ln/>
-        </p:spPr>
-        <p:txBody>
-          <a:bodyPr wrap="square" lIns="0" tIns="0" rIns="0" bIns="0" rtlCol="0" anchor="ctr">
+            <a:off x="8211312" y="3941064"/>
+            <a:ext cx="2734056" cy="256032"/>
+          </a:xfrm>
+          <a:prstGeom prst="rect">
+            <a:avLst/>
+          </a:prstGeom>
+          <a:noFill/>
+          <a:ln/>
+        </p:spPr>
+        <p:txBody>
+          <a:bodyPr wrap="square" lIns="0" tIns="0" rIns="0" bIns="0" rtlCol="0" anchor="ctr"/>
+          <a:lstStyle/>
+          <a:p>
+            <a:pPr indent="0" marL="0">
+              <a:buNone/>
+            </a:pPr>
+            <a:r>
+              <a:rPr lang="en-US" sz="1300" b="1" dirty="0">
+                <a:solidFill>
+                  <a:srgbClr val="0068B7"/>
+                </a:solidFill>
+                <a:latin typeface="Aptos" pitchFamily="34" charset="0"/>
+                <a:ea typeface="Aptos" pitchFamily="34" charset="-122"/>
+                <a:cs typeface="Aptos" pitchFamily="34" charset="-120"/>
+              </a:rPr>
+              <a:t>Use the play links to</a:t>
+            </a:r>
+            <a:endParaRPr lang="en-US" sz="1300" dirty="0"/>
+          </a:p>
+        </p:txBody>
+      </p:sp>
+      <p:sp>
+        <p:nvSpPr>
+          <p:cNvPr id="15" name="Text 13"/>
+          <p:cNvSpPr/>
+          <p:nvPr/>
+        </p:nvSpPr>
+        <p:spPr>
+          <a:xfrm>
+            <a:off x="8229600" y="4306824"/>
+            <a:ext cx="2679192" cy="941832"/>
+          </a:xfrm>
+          <a:prstGeom prst="rect">
+            <a:avLst/>
+          </a:prstGeom>
+          <a:noFill/>
+          <a:ln/>
+        </p:spPr>
+        <p:txBody>
+          <a:bodyPr wrap="square" lIns="254" tIns="254" rIns="254" bIns="254" rtlCol="0" anchor="t">
             <a:normAutofit/>
           </a:bodyPr>
           <a:lstStyle/>
           <a:p>
-            <a:pPr algn="ctr" indent="0" marL="0">
-              <a:buNone/>
-            </a:pPr>
-            <a:r>
-              <a:rPr lang="en-US" sz="1500" b="1" dirty="0">
-                <a:solidFill>
-                  <a:srgbClr val="FFFFFF"/>
-                </a:solidFill>
-                <a:latin typeface="Aptos" pitchFamily="34" charset="0"/>
-                <a:ea typeface="Aptos" pitchFamily="34" charset="-122"/>
-                <a:cs typeface="Aptos" pitchFamily="34" charset="-120"/>
-              </a:rPr>
-              <a:t>Lesson</a:t>
-            </a:r>
-            <a:endParaRPr lang="en-US" sz="1500" dirty="0"/>
-          </a:p>
-        </p:txBody>
-      </p:sp>
-      <p:sp>
-        <p:nvSpPr>
-          <p:cNvPr id="15" name="Shape 13"/>
-          <p:cNvSpPr/>
-          <p:nvPr/>
-        </p:nvSpPr>
-        <p:spPr>
-          <a:xfrm>
-            <a:off x="9046464" y="3977640"/>
-            <a:ext cx="972312" cy="749808"/>
-          </a:xfrm>
-          <a:prstGeom prst="roundRect">
-            <a:avLst>
-              <a:gd name="adj" fmla="val 14634"/>
-            </a:avLst>
-          </a:prstGeom>
-          <a:solidFill>
-            <a:srgbClr val="2F8A28"/>
-          </a:solidFill>
-          <a:ln w="12700">
-            <a:solidFill>
-              <a:srgbClr val="2F8A28"/>
-            </a:solidFill>
-            <a:prstDash val="solid"/>
-          </a:ln>
-        </p:spPr>
-      </p:sp>
-      <p:sp>
-        <p:nvSpPr>
-          <p:cNvPr id="16" name="Text 14"/>
-          <p:cNvSpPr/>
-          <p:nvPr/>
-        </p:nvSpPr>
-        <p:spPr>
-          <a:xfrm>
-            <a:off x="9119616" y="4169664"/>
-            <a:ext cx="826008" cy="310896"/>
-          </a:xfrm>
-          <a:prstGeom prst="rect">
-            <a:avLst/>
-          </a:prstGeom>
-          <a:noFill/>
-          <a:ln/>
-        </p:spPr>
-        <p:txBody>
-          <a:bodyPr wrap="square" lIns="0" tIns="0" rIns="0" bIns="0" rtlCol="0" anchor="ctr">
-            <a:normAutofit/>
-          </a:bodyPr>
-          <a:lstStyle/>
-          <a:p>
-            <a:pPr algn="ctr" indent="0" marL="0">
-              <a:buNone/>
-            </a:pPr>
-            <a:r>
-              <a:rPr lang="en-US" sz="1500" b="1" dirty="0">
-                <a:solidFill>
-                  <a:srgbClr val="FFFFFF"/>
-                </a:solidFill>
-                <a:latin typeface="Aptos" pitchFamily="34" charset="0"/>
-                <a:ea typeface="Aptos" pitchFamily="34" charset="-122"/>
-                <a:cs typeface="Aptos" pitchFamily="34" charset="-120"/>
-              </a:rPr>
-              <a:t>Plays</a:t>
-            </a:r>
-            <a:endParaRPr lang="en-US" sz="1500" dirty="0"/>
-          </a:p>
-        </p:txBody>
-      </p:sp>
-      <p:sp>
-        <p:nvSpPr>
-          <p:cNvPr id="17" name="Shape 15"/>
-          <p:cNvSpPr/>
-          <p:nvPr/>
-        </p:nvSpPr>
-        <p:spPr>
-          <a:xfrm>
-            <a:off x="10274808" y="3977640"/>
-            <a:ext cx="972312" cy="749808"/>
-          </a:xfrm>
-          <a:prstGeom prst="roundRect">
-            <a:avLst>
-              <a:gd name="adj" fmla="val 14634"/>
-            </a:avLst>
-          </a:prstGeom>
-          <a:solidFill>
-            <a:srgbClr val="6A4CA3"/>
-          </a:solidFill>
-          <a:ln w="12700">
-            <a:solidFill>
-              <a:srgbClr val="6A4CA3"/>
-            </a:solidFill>
-            <a:prstDash val="solid"/>
-          </a:ln>
-        </p:spPr>
-      </p:sp>
-      <p:sp>
-        <p:nvSpPr>
-          <p:cNvPr id="18" name="Text 16"/>
-          <p:cNvSpPr/>
-          <p:nvPr/>
-        </p:nvSpPr>
-        <p:spPr>
-          <a:xfrm>
-            <a:off x="10347960" y="4169664"/>
-            <a:ext cx="826008" cy="310896"/>
-          </a:xfrm>
-          <a:prstGeom prst="rect">
-            <a:avLst/>
-          </a:prstGeom>
-          <a:noFill/>
-          <a:ln/>
-        </p:spPr>
-        <p:txBody>
-          <a:bodyPr wrap="square" lIns="0" tIns="0" rIns="0" bIns="0" rtlCol="0" anchor="ctr">
-            <a:normAutofit/>
-          </a:bodyPr>
-          <a:lstStyle/>
-          <a:p>
-            <a:pPr algn="ctr" indent="0" marL="0">
-              <a:buNone/>
-            </a:pPr>
-            <a:r>
-              <a:rPr lang="en-US" sz="1500" b="1" dirty="0">
-                <a:solidFill>
-                  <a:srgbClr val="FFFFFF"/>
-                </a:solidFill>
-                <a:latin typeface="Aptos" pitchFamily="34" charset="0"/>
-                <a:ea typeface="Aptos" pitchFamily="34" charset="-122"/>
-                <a:cs typeface="Aptos" pitchFamily="34" charset="-120"/>
-              </a:rPr>
-              <a:t>Action</a:t>
-            </a:r>
-            <a:endParaRPr lang="en-US" sz="1500" dirty="0"/>
+            <a:r>
+              <a:rPr lang="en-US" sz="1380" dirty="0">
+                <a:solidFill>
+                  <a:srgbClr val="17364A"/>
+                </a:solidFill>
+                <a:latin typeface="Aptos" pitchFamily="34" charset="0"/>
+                <a:ea typeface="Aptos" pitchFamily="34" charset="-122"/>
+                <a:cs typeface="Aptos" pitchFamily="34" charset="-120"/>
+              </a:rPr>
+              <a:t>Locate the decision point in the playbook sequence.</a:t>
+            </a:r>
+            <a:endParaRPr lang="en-US" sz="1380" dirty="0"/>
+          </a:p>
+          <a:p>
+            <a:r>
+              <a:rPr lang="en-US" sz="1380" dirty="0">
+                <a:solidFill>
+                  <a:srgbClr val="17364A"/>
+                </a:solidFill>
+                <a:latin typeface="Aptos" pitchFamily="34" charset="0"/>
+                <a:ea typeface="Aptos" pitchFamily="34" charset="-122"/>
+                <a:cs typeface="Aptos" pitchFamily="34" charset="-120"/>
+              </a:rPr>
+              <a:t>Identify who should participate in the work.</a:t>
+            </a:r>
+            <a:endParaRPr lang="en-US" sz="1380" dirty="0"/>
+          </a:p>
+          <a:p>
+            <a:r>
+              <a:rPr lang="en-US" sz="1380" dirty="0">
+                <a:solidFill>
+                  <a:srgbClr val="17364A"/>
+                </a:solidFill>
+                <a:latin typeface="Aptos" pitchFamily="34" charset="0"/>
+                <a:ea typeface="Aptos" pitchFamily="34" charset="-122"/>
+                <a:cs typeface="Aptos" pitchFamily="34" charset="-120"/>
+              </a:rPr>
+              <a:t>Document the review, approval, or implementation step.</a:t>
+            </a:r>
+            <a:endParaRPr lang="en-US" sz="1380" dirty="0"/>
           </a:p>
         </p:txBody>
       </p:sp>
@@ -14126,20 +13617,20 @@
         </p:nvSpPr>
         <p:spPr>
           <a:xfrm>
-            <a:off x="7818120" y="3977640"/>
-            <a:ext cx="972312" cy="749808"/>
+            <a:off x="8046720" y="3794760"/>
+            <a:ext cx="3063240" cy="1600200"/>
           </a:xfrm>
           <a:prstGeom prst="roundRect">
             <a:avLst>
-              <a:gd name="adj" fmla="val 14634"/>
+              <a:gd name="adj" fmla="val 6857"/>
             </a:avLst>
           </a:prstGeom>
           <a:solidFill>
-            <a:srgbClr val="0068B7"/>
+            <a:srgbClr val="FFFFFF"/>
           </a:solidFill>
           <a:ln w="12700">
             <a:solidFill>
-              <a:srgbClr val="0068B7"/>
+              <a:srgbClr val="B9D7E6"/>
             </a:solidFill>
             <a:prstDash val="solid"/>
           </a:ln>
@@ -14153,172 +13644,100 @@
         </p:nvSpPr>
         <p:spPr>
           <a:xfrm>
-            <a:off x="7891272" y="4169664"/>
-            <a:ext cx="826008" cy="310896"/>
-          </a:xfrm>
-          <a:prstGeom prst="rect">
-            <a:avLst/>
-          </a:prstGeom>
-          <a:noFill/>
-          <a:ln/>
-        </p:spPr>
-        <p:txBody>
-          <a:bodyPr wrap="square" lIns="0" tIns="0" rIns="0" bIns="0" rtlCol="0" anchor="ctr">
+            <a:off x="8211312" y="3941064"/>
+            <a:ext cx="2734056" cy="256032"/>
+          </a:xfrm>
+          <a:prstGeom prst="rect">
+            <a:avLst/>
+          </a:prstGeom>
+          <a:noFill/>
+          <a:ln/>
+        </p:spPr>
+        <p:txBody>
+          <a:bodyPr wrap="square" lIns="0" tIns="0" rIns="0" bIns="0" rtlCol="0" anchor="ctr"/>
+          <a:lstStyle/>
+          <a:p>
+            <a:pPr indent="0" marL="0">
+              <a:buNone/>
+            </a:pPr>
+            <a:r>
+              <a:rPr lang="en-US" sz="1300" b="1" dirty="0">
+                <a:solidFill>
+                  <a:srgbClr val="0068B7"/>
+                </a:solidFill>
+                <a:latin typeface="Aptos" pitchFamily="34" charset="0"/>
+                <a:ea typeface="Aptos" pitchFamily="34" charset="-122"/>
+                <a:cs typeface="Aptos" pitchFamily="34" charset="-120"/>
+              </a:rPr>
+              <a:t>Tool selection cues</a:t>
+            </a:r>
+            <a:endParaRPr lang="en-US" sz="1300" dirty="0"/>
+          </a:p>
+        </p:txBody>
+      </p:sp>
+      <p:sp>
+        <p:nvSpPr>
+          <p:cNvPr id="15" name="Text 13"/>
+          <p:cNvSpPr/>
+          <p:nvPr/>
+        </p:nvSpPr>
+        <p:spPr>
+          <a:xfrm>
+            <a:off x="8229600" y="4306824"/>
+            <a:ext cx="2679192" cy="941832"/>
+          </a:xfrm>
+          <a:prstGeom prst="rect">
+            <a:avLst/>
+          </a:prstGeom>
+          <a:noFill/>
+          <a:ln/>
+        </p:spPr>
+        <p:txBody>
+          <a:bodyPr wrap="square" lIns="254" tIns="254" rIns="254" bIns="254" rtlCol="0" anchor="t">
             <a:normAutofit/>
           </a:bodyPr>
           <a:lstStyle/>
           <a:p>
-            <a:pPr algn="ctr" indent="0" marL="0">
-              <a:buNone/>
-            </a:pPr>
-            <a:r>
-              <a:rPr lang="en-US" sz="1500" b="1" dirty="0">
-                <a:solidFill>
-                  <a:srgbClr val="FFFFFF"/>
-                </a:solidFill>
-                <a:latin typeface="Aptos" pitchFamily="34" charset="0"/>
-                <a:ea typeface="Aptos" pitchFamily="34" charset="-122"/>
-                <a:cs typeface="Aptos" pitchFamily="34" charset="-120"/>
-              </a:rPr>
-              <a:t>Concept</a:t>
-            </a:r>
-            <a:endParaRPr lang="en-US" sz="1500" dirty="0"/>
-          </a:p>
-        </p:txBody>
-      </p:sp>
-      <p:sp>
-        <p:nvSpPr>
-          <p:cNvPr id="15" name="Shape 13"/>
-          <p:cNvSpPr/>
-          <p:nvPr/>
-        </p:nvSpPr>
-        <p:spPr>
-          <a:xfrm>
-            <a:off x="9046464" y="3977640"/>
-            <a:ext cx="972312" cy="749808"/>
-          </a:xfrm>
-          <a:prstGeom prst="roundRect">
-            <a:avLst>
-              <a:gd name="adj" fmla="val 14634"/>
-            </a:avLst>
-          </a:prstGeom>
-          <a:solidFill>
-            <a:srgbClr val="2F8A28"/>
-          </a:solidFill>
-          <a:ln w="12700">
-            <a:solidFill>
-              <a:srgbClr val="2F8A28"/>
-            </a:solidFill>
-            <a:prstDash val="solid"/>
-          </a:ln>
-        </p:spPr>
-      </p:sp>
-      <p:sp>
-        <p:nvSpPr>
-          <p:cNvPr id="16" name="Text 14"/>
-          <p:cNvSpPr/>
-          <p:nvPr/>
-        </p:nvSpPr>
-        <p:spPr>
-          <a:xfrm>
-            <a:off x="9119616" y="4169664"/>
-            <a:ext cx="826008" cy="310896"/>
-          </a:xfrm>
-          <a:prstGeom prst="rect">
-            <a:avLst/>
-          </a:prstGeom>
-          <a:noFill/>
-          <a:ln/>
-        </p:spPr>
-        <p:txBody>
-          <a:bodyPr wrap="square" lIns="0" tIns="0" rIns="0" bIns="0" rtlCol="0" anchor="ctr">
-            <a:normAutofit/>
-          </a:bodyPr>
-          <a:lstStyle/>
-          <a:p>
-            <a:pPr algn="ctr" indent="0" marL="0">
-              <a:buNone/>
-            </a:pPr>
-            <a:r>
-              <a:rPr lang="en-US" sz="1500" b="1" dirty="0">
-                <a:solidFill>
-                  <a:srgbClr val="FFFFFF"/>
-                </a:solidFill>
-                <a:latin typeface="Aptos" pitchFamily="34" charset="0"/>
-                <a:ea typeface="Aptos" pitchFamily="34" charset="-122"/>
-                <a:cs typeface="Aptos" pitchFamily="34" charset="-120"/>
-              </a:rPr>
-              <a:t>Tool</a:t>
-            </a:r>
-            <a:endParaRPr lang="en-US" sz="1500" dirty="0"/>
-          </a:p>
-        </p:txBody>
-      </p:sp>
-      <p:sp>
-        <p:nvSpPr>
-          <p:cNvPr id="17" name="Shape 15"/>
-          <p:cNvSpPr/>
-          <p:nvPr/>
-        </p:nvSpPr>
-        <p:spPr>
-          <a:xfrm>
-            <a:off x="10274808" y="3977640"/>
-            <a:ext cx="972312" cy="749808"/>
-          </a:xfrm>
-          <a:prstGeom prst="roundRect">
-            <a:avLst>
-              <a:gd name="adj" fmla="val 14634"/>
-            </a:avLst>
-          </a:prstGeom>
-          <a:solidFill>
-            <a:srgbClr val="D69A2D"/>
-          </a:solidFill>
-          <a:ln w="12700">
-            <a:solidFill>
-              <a:srgbClr val="D69A2D"/>
-            </a:solidFill>
-            <a:prstDash val="solid"/>
-          </a:ln>
-        </p:spPr>
-      </p:sp>
-      <p:sp>
-        <p:nvSpPr>
-          <p:cNvPr id="18" name="Text 16"/>
-          <p:cNvSpPr/>
-          <p:nvPr/>
-        </p:nvSpPr>
-        <p:spPr>
-          <a:xfrm>
-            <a:off x="10347960" y="4169664"/>
-            <a:ext cx="826008" cy="310896"/>
-          </a:xfrm>
-          <a:prstGeom prst="rect">
-            <a:avLst/>
-          </a:prstGeom>
-          <a:noFill/>
-          <a:ln/>
-        </p:spPr>
-        <p:txBody>
-          <a:bodyPr wrap="square" lIns="0" tIns="0" rIns="0" bIns="0" rtlCol="0" anchor="ctr">
-            <a:normAutofit/>
-          </a:bodyPr>
-          <a:lstStyle/>
-          <a:p>
-            <a:pPr algn="ctr" indent="0" marL="0">
-              <a:buNone/>
-            </a:pPr>
-            <a:r>
-              <a:rPr lang="en-US" sz="1500" b="1" dirty="0">
-                <a:solidFill>
-                  <a:srgbClr val="FFFFFF"/>
-                </a:solidFill>
-                <a:latin typeface="Aptos" pitchFamily="34" charset="0"/>
-                <a:ea typeface="Aptos" pitchFamily="34" charset="-122"/>
-                <a:cs typeface="Aptos" pitchFamily="34" charset="-120"/>
-              </a:rPr>
-              <a:t>Artifact</a:t>
-            </a:r>
-            <a:endParaRPr lang="en-US" sz="1500" dirty="0"/>
+            <a:r>
+              <a:rPr lang="en-US" sz="1380" dirty="0">
+                <a:solidFill>
+                  <a:srgbClr val="17364A"/>
+                </a:solidFill>
+                <a:latin typeface="Aptos" pitchFamily="34" charset="0"/>
+                <a:ea typeface="Aptos" pitchFamily="34" charset="-122"/>
+                <a:cs typeface="Aptos" pitchFamily="34" charset="-120"/>
+              </a:rPr>
+              <a:t>Use a tool when no comparable local process exists.</a:t>
+            </a:r>
+            <a:endParaRPr lang="en-US" sz="1380" dirty="0"/>
+          </a:p>
+          <a:p>
+            <a:r>
+              <a:rPr lang="en-US" sz="1380" dirty="0">
+                <a:solidFill>
+                  <a:srgbClr val="17364A"/>
+                </a:solidFill>
+                <a:latin typeface="Aptos" pitchFamily="34" charset="0"/>
+                <a:ea typeface="Aptos" pitchFamily="34" charset="-122"/>
+                <a:cs typeface="Aptos" pitchFamily="34" charset="-120"/>
+              </a:rPr>
+              <a:t>Adapt existing department templates when they already fit the purpose.</a:t>
+            </a:r>
+            <a:endParaRPr lang="en-US" sz="1380" dirty="0"/>
+          </a:p>
+          <a:p>
+            <a:r>
+              <a:rPr lang="en-US" sz="1380" dirty="0">
+                <a:solidFill>
+                  <a:srgbClr val="17364A"/>
+                </a:solidFill>
+                <a:latin typeface="Aptos" pitchFamily="34" charset="0"/>
+                <a:ea typeface="Aptos" pitchFamily="34" charset="-122"/>
+                <a:cs typeface="Aptos" pitchFamily="34" charset="-120"/>
+              </a:rPr>
+              <a:t>Save the completed artifact as evidence of the decision.</a:t>
+            </a:r>
+            <a:endParaRPr lang="en-US" sz="1380" dirty="0"/>
           </a:p>
         </p:txBody>
       </p:sp>
@@ -14791,13 +14210,11 @@
             </a:avLst>
           </a:prstGeom>
           <a:solidFill>
-            <a:srgbClr val="FFFFFF">
-              <a:alpha val="88000"/>
-            </a:srgbClr>
+            <a:srgbClr val="FFFFFF"/>
           </a:solidFill>
           <a:ln w="12700">
             <a:solidFill>
-              <a:srgbClr val="D6E8F2"/>
+              <a:srgbClr val="B9D7E6"/>
             </a:solidFill>
             <a:prstDash val="solid"/>
           </a:ln>
@@ -14805,119 +14222,98 @@
       </p:sp>
       <p:sp>
         <p:nvSpPr>
-          <p:cNvPr id="14" name="Shape 12"/>
-          <p:cNvSpPr/>
-          <p:nvPr/>
-        </p:nvSpPr>
-        <p:spPr>
-          <a:xfrm>
-            <a:off x="8074152" y="3291840"/>
-            <a:ext cx="2596896" cy="749808"/>
-          </a:xfrm>
-          <a:prstGeom prst="rect">
-            <a:avLst/>
-          </a:prstGeom>
-          <a:solidFill>
-            <a:srgbClr val="EAF6F8"/>
-          </a:solidFill>
-          <a:ln w="12700">
-            <a:solidFill>
-              <a:srgbClr val="8ABBD8"/>
-            </a:solidFill>
-            <a:prstDash val="solid"/>
-          </a:ln>
-        </p:spPr>
-      </p:sp>
-      <p:sp>
-        <p:nvSpPr>
-          <p:cNvPr id="15" name="Shape 13"/>
-          <p:cNvSpPr/>
-          <p:nvPr/>
-        </p:nvSpPr>
-        <p:spPr>
-          <a:xfrm>
-            <a:off x="8202168" y="3721608"/>
-            <a:ext cx="2340864" cy="0"/>
-          </a:xfrm>
-          <a:prstGeom prst="line">
-            <a:avLst/>
-          </a:prstGeom>
-          <a:noFill/>
-          <a:ln w="19050">
-            <a:solidFill>
-              <a:srgbClr val="0068B7"/>
-            </a:solidFill>
-            <a:prstDash val="solid"/>
-          </a:ln>
-        </p:spPr>
+          <p:cNvPr id="14" name="Text 12"/>
+          <p:cNvSpPr/>
+          <p:nvPr/>
+        </p:nvSpPr>
+        <p:spPr>
+          <a:xfrm>
+            <a:off x="7799832" y="2935224"/>
+            <a:ext cx="3145536" cy="256032"/>
+          </a:xfrm>
+          <a:prstGeom prst="rect">
+            <a:avLst/>
+          </a:prstGeom>
+          <a:noFill/>
+          <a:ln/>
+        </p:spPr>
+        <p:txBody>
+          <a:bodyPr wrap="square" lIns="0" tIns="0" rIns="0" bIns="0" rtlCol="0" anchor="ctr"/>
+          <a:lstStyle/>
+          <a:p>
+            <a:pPr indent="0" marL="0">
+              <a:buNone/>
+            </a:pPr>
+            <a:r>
+              <a:rPr lang="en-US" sz="1300" b="1" dirty="0">
+                <a:solidFill>
+                  <a:srgbClr val="0068B7"/>
+                </a:solidFill>
+                <a:latin typeface="Aptos" pitchFamily="34" charset="0"/>
+                <a:ea typeface="Aptos" pitchFamily="34" charset="-122"/>
+                <a:cs typeface="Aptos" pitchFamily="34" charset="-120"/>
+              </a:rPr>
+              <a:t>Concept checkpoints</a:t>
+            </a:r>
+            <a:endParaRPr lang="en-US" sz="1300" dirty="0"/>
+          </a:p>
+        </p:txBody>
+      </p:sp>
+      <p:sp>
+        <p:nvSpPr>
+          <p:cNvPr id="15" name="Text 13"/>
+          <p:cNvSpPr/>
+          <p:nvPr/>
+        </p:nvSpPr>
+        <p:spPr>
+          <a:xfrm>
+            <a:off x="7818120" y="3300984"/>
+            <a:ext cx="3090672" cy="877824"/>
+          </a:xfrm>
+          <a:prstGeom prst="rect">
+            <a:avLst/>
+          </a:prstGeom>
+          <a:noFill/>
+          <a:ln/>
+        </p:spPr>
+        <p:txBody>
+          <a:bodyPr wrap="square" lIns="254" tIns="254" rIns="254" bIns="254" rtlCol="0" anchor="t">
+            <a:normAutofit/>
+          </a:bodyPr>
+          <a:lstStyle/>
+          <a:p>
+            <a:r>
+              <a:rPr lang="en-US" sz="1380" dirty="0">
+                <a:solidFill>
+                  <a:srgbClr val="17364A"/>
+                </a:solidFill>
+                <a:latin typeface="Aptos" pitchFamily="34" charset="0"/>
+                <a:ea typeface="Aptos" pitchFamily="34" charset="-122"/>
+                <a:cs typeface="Aptos" pitchFamily="34" charset="-120"/>
+              </a:rPr>
+              <a:t>Identify risks from alert fatigue, data artifacts, delayed reporting, and model drift.</a:t>
+            </a:r>
+            <a:endParaRPr lang="en-US" sz="1380" dirty="0"/>
+          </a:p>
+          <a:p>
+            <a:r>
+              <a:rPr lang="en-US" sz="1380" dirty="0">
+                <a:solidFill>
+                  <a:srgbClr val="17364A"/>
+                </a:solidFill>
+                <a:latin typeface="Aptos" pitchFamily="34" charset="0"/>
+                <a:ea typeface="Aptos" pitchFamily="34" charset="-122"/>
+                <a:cs typeface="Aptos" pitchFamily="34" charset="-120"/>
+              </a:rPr>
+              <a:t>Design guardrails for AI-supported surveillance alerts.</a:t>
+            </a:r>
+            <a:endParaRPr lang="en-US" sz="1380" dirty="0"/>
+          </a:p>
+        </p:txBody>
       </p:sp>
       <p:sp>
         <p:nvSpPr>
           <p:cNvPr id="16" name="Shape 14"/>
-          <p:cNvSpPr/>
-          <p:nvPr/>
-        </p:nvSpPr>
-        <p:spPr>
-          <a:xfrm>
-            <a:off x="9198864" y="4206240"/>
-            <a:ext cx="347472" cy="347472"/>
-          </a:xfrm>
-          <a:prstGeom prst="ellipse">
-            <a:avLst/>
-          </a:prstGeom>
-          <a:solidFill>
-            <a:srgbClr val="2F8A28"/>
-          </a:solidFill>
-          <a:ln w="12700">
-            <a:solidFill>
-              <a:srgbClr val="2F8A28"/>
-            </a:solidFill>
-            <a:prstDash val="solid"/>
-          </a:ln>
-        </p:spPr>
-      </p:sp>
-      <p:sp>
-        <p:nvSpPr>
-          <p:cNvPr id="17" name="Text 15"/>
-          <p:cNvSpPr/>
-          <p:nvPr/>
-        </p:nvSpPr>
-        <p:spPr>
-          <a:xfrm>
-            <a:off x="7909560" y="3977640"/>
-            <a:ext cx="2926080" cy="182880"/>
-          </a:xfrm>
-          <a:prstGeom prst="rect">
-            <a:avLst/>
-          </a:prstGeom>
-          <a:noFill/>
-          <a:ln/>
-        </p:spPr>
-        <p:txBody>
-          <a:bodyPr wrap="square" lIns="0" tIns="0" rIns="0" bIns="0" rtlCol="0" anchor="ctr"/>
-          <a:lstStyle/>
-          <a:p>
-            <a:pPr algn="ctr" indent="0" marL="0">
-              <a:buNone/>
-            </a:pPr>
-            <a:r>
-              <a:rPr lang="en-US" sz="1000" dirty="0">
-                <a:solidFill>
-                  <a:srgbClr val="003A63"/>
-                </a:solidFill>
-                <a:latin typeface="Aptos" pitchFamily="34" charset="0"/>
-                <a:ea typeface="Aptos" pitchFamily="34" charset="-122"/>
-                <a:cs typeface="Aptos" pitchFamily="34" charset="-120"/>
-              </a:rPr>
-              <a:t>Concept to action</a:t>
-            </a:r>
-            <a:endParaRPr lang="en-US" sz="1000" dirty="0"/>
-          </a:p>
-        </p:txBody>
-      </p:sp>
-      <p:sp>
-        <p:nvSpPr>
-          <p:cNvPr id="18" name="Shape 16"/>
           <p:cNvSpPr/>
           <p:nvPr/>
         </p:nvSpPr>
@@ -14944,7 +14340,7 @@
       </p:sp>
       <p:sp>
         <p:nvSpPr>
-          <p:cNvPr id="19" name="Text 17"/>
+          <p:cNvPr id="17" name="Text 15"/>
           <p:cNvSpPr/>
           <p:nvPr/>
         </p:nvSpPr>
@@ -14983,7 +14379,7 @@
       </p:sp>
       <p:sp>
         <p:nvSpPr>
-          <p:cNvPr id="20" name="Text 18"/>
+          <p:cNvPr id="18" name="Text 16"/>
           <p:cNvSpPr/>
           <p:nvPr/>
         </p:nvSpPr>
@@ -15463,13 +14859,11 @@
             </a:avLst>
           </a:prstGeom>
           <a:solidFill>
-            <a:srgbClr val="FFFFFF">
-              <a:alpha val="88000"/>
-            </a:srgbClr>
+            <a:srgbClr val="FFFFFF"/>
           </a:solidFill>
           <a:ln w="12700">
             <a:solidFill>
-              <a:srgbClr val="D6E8F2"/>
+              <a:srgbClr val="B9D7E6"/>
             </a:solidFill>
             <a:prstDash val="solid"/>
           </a:ln>
@@ -15477,119 +14871,84 @@
       </p:sp>
       <p:sp>
         <p:nvSpPr>
-          <p:cNvPr id="14" name="Shape 12"/>
-          <p:cNvSpPr/>
-          <p:nvPr/>
-        </p:nvSpPr>
-        <p:spPr>
-          <a:xfrm>
-            <a:off x="8074152" y="3291840"/>
-            <a:ext cx="2596896" cy="749808"/>
-          </a:xfrm>
-          <a:prstGeom prst="rect">
-            <a:avLst/>
-          </a:prstGeom>
-          <a:solidFill>
-            <a:srgbClr val="EAF6F8"/>
-          </a:solidFill>
-          <a:ln w="12700">
-            <a:solidFill>
-              <a:srgbClr val="8ABBD8"/>
-            </a:solidFill>
-            <a:prstDash val="solid"/>
-          </a:ln>
-        </p:spPr>
-      </p:sp>
-      <p:sp>
-        <p:nvSpPr>
-          <p:cNvPr id="15" name="Shape 13"/>
-          <p:cNvSpPr/>
-          <p:nvPr/>
-        </p:nvSpPr>
-        <p:spPr>
-          <a:xfrm>
-            <a:off x="8202168" y="3721608"/>
-            <a:ext cx="2340864" cy="0"/>
-          </a:xfrm>
-          <a:prstGeom prst="line">
-            <a:avLst/>
-          </a:prstGeom>
-          <a:noFill/>
-          <a:ln w="19050">
-            <a:solidFill>
-              <a:srgbClr val="0068B7"/>
-            </a:solidFill>
-            <a:prstDash val="solid"/>
-          </a:ln>
-        </p:spPr>
+          <p:cNvPr id="14" name="Text 12"/>
+          <p:cNvSpPr/>
+          <p:nvPr/>
+        </p:nvSpPr>
+        <p:spPr>
+          <a:xfrm>
+            <a:off x="7799832" y="2935224"/>
+            <a:ext cx="3145536" cy="256032"/>
+          </a:xfrm>
+          <a:prstGeom prst="rect">
+            <a:avLst/>
+          </a:prstGeom>
+          <a:noFill/>
+          <a:ln/>
+        </p:spPr>
+        <p:txBody>
+          <a:bodyPr wrap="square" lIns="0" tIns="0" rIns="0" bIns="0" rtlCol="0" anchor="ctr"/>
+          <a:lstStyle/>
+          <a:p>
+            <a:pPr indent="0" marL="0">
+              <a:buNone/>
+            </a:pPr>
+            <a:r>
+              <a:rPr lang="en-US" sz="1300" b="1" dirty="0">
+                <a:solidFill>
+                  <a:srgbClr val="0068B7"/>
+                </a:solidFill>
+                <a:latin typeface="Aptos" pitchFamily="34" charset="0"/>
+                <a:ea typeface="Aptos" pitchFamily="34" charset="-122"/>
+                <a:cs typeface="Aptos" pitchFamily="34" charset="-120"/>
+              </a:rPr>
+              <a:t>Concept checkpoints</a:t>
+            </a:r>
+            <a:endParaRPr lang="en-US" sz="1300" dirty="0"/>
+          </a:p>
+        </p:txBody>
+      </p:sp>
+      <p:sp>
+        <p:nvSpPr>
+          <p:cNvPr id="15" name="Text 13"/>
+          <p:cNvSpPr/>
+          <p:nvPr/>
+        </p:nvSpPr>
+        <p:spPr>
+          <a:xfrm>
+            <a:off x="7818120" y="3300984"/>
+            <a:ext cx="3090672" cy="877824"/>
+          </a:xfrm>
+          <a:prstGeom prst="rect">
+            <a:avLst/>
+          </a:prstGeom>
+          <a:noFill/>
+          <a:ln/>
+        </p:spPr>
+        <p:txBody>
+          <a:bodyPr wrap="square" lIns="254" tIns="254" rIns="254" bIns="254" rtlCol="0" anchor="t">
+            <a:normAutofit/>
+          </a:bodyPr>
+          <a:lstStyle/>
+          <a:p>
+            <a:r>
+              <a:rPr lang="en-US" sz="1380" dirty="0">
+                <a:solidFill>
+                  <a:srgbClr val="17364A"/>
+                </a:solidFill>
+                <a:latin typeface="Aptos" pitchFamily="34" charset="0"/>
+                <a:ea typeface="Aptos" pitchFamily="34" charset="-122"/>
+                <a:cs typeface="Aptos" pitchFamily="34" charset="-120"/>
+              </a:rPr>
+              <a:t>Produce an anomaly detection review plan for one public health data stream.</a:t>
+            </a:r>
+            <a:endParaRPr lang="en-US" sz="1380" dirty="0"/>
+          </a:p>
+        </p:txBody>
       </p:sp>
       <p:sp>
         <p:nvSpPr>
           <p:cNvPr id="16" name="Shape 14"/>
-          <p:cNvSpPr/>
-          <p:nvPr/>
-        </p:nvSpPr>
-        <p:spPr>
-          <a:xfrm>
-            <a:off x="9198864" y="4206240"/>
-            <a:ext cx="347472" cy="347472"/>
-          </a:xfrm>
-          <a:prstGeom prst="ellipse">
-            <a:avLst/>
-          </a:prstGeom>
-          <a:solidFill>
-            <a:srgbClr val="2F8A28"/>
-          </a:solidFill>
-          <a:ln w="12700">
-            <a:solidFill>
-              <a:srgbClr val="2F8A28"/>
-            </a:solidFill>
-            <a:prstDash val="solid"/>
-          </a:ln>
-        </p:spPr>
-      </p:sp>
-      <p:sp>
-        <p:nvSpPr>
-          <p:cNvPr id="17" name="Text 15"/>
-          <p:cNvSpPr/>
-          <p:nvPr/>
-        </p:nvSpPr>
-        <p:spPr>
-          <a:xfrm>
-            <a:off x="7909560" y="3977640"/>
-            <a:ext cx="2926080" cy="182880"/>
-          </a:xfrm>
-          <a:prstGeom prst="rect">
-            <a:avLst/>
-          </a:prstGeom>
-          <a:noFill/>
-          <a:ln/>
-        </p:spPr>
-        <p:txBody>
-          <a:bodyPr wrap="square" lIns="0" tIns="0" rIns="0" bIns="0" rtlCol="0" anchor="ctr"/>
-          <a:lstStyle/>
-          <a:p>
-            <a:pPr algn="ctr" indent="0" marL="0">
-              <a:buNone/>
-            </a:pPr>
-            <a:r>
-              <a:rPr lang="en-US" sz="1000" dirty="0">
-                <a:solidFill>
-                  <a:srgbClr val="003A63"/>
-                </a:solidFill>
-                <a:latin typeface="Aptos" pitchFamily="34" charset="0"/>
-                <a:ea typeface="Aptos" pitchFamily="34" charset="-122"/>
-                <a:cs typeface="Aptos" pitchFamily="34" charset="-120"/>
-              </a:rPr>
-              <a:t>Concept to action</a:t>
-            </a:r>
-            <a:endParaRPr lang="en-US" sz="1000" dirty="0"/>
-          </a:p>
-        </p:txBody>
-      </p:sp>
-      <p:sp>
-        <p:nvSpPr>
-          <p:cNvPr id="18" name="Shape 16"/>
           <p:cNvSpPr/>
           <p:nvPr/>
         </p:nvSpPr>
@@ -15616,7 +14975,7 @@
       </p:sp>
       <p:sp>
         <p:nvSpPr>
-          <p:cNvPr id="19" name="Text 17"/>
+          <p:cNvPr id="17" name="Text 15"/>
           <p:cNvSpPr/>
           <p:nvPr/>
         </p:nvSpPr>
@@ -15655,7 +15014,7 @@
       </p:sp>
       <p:sp>
         <p:nvSpPr>
-          <p:cNvPr id="20" name="Text 18"/>
+          <p:cNvPr id="18" name="Text 16"/>
           <p:cNvSpPr/>
           <p:nvPr/>
         </p:nvSpPr>
@@ -16163,13 +15522,11 @@
             </a:avLst>
           </a:prstGeom>
           <a:solidFill>
-            <a:srgbClr val="FFFFFF">
-              <a:alpha val="88000"/>
-            </a:srgbClr>
+            <a:srgbClr val="FFFFFF"/>
           </a:solidFill>
           <a:ln w="12700">
             <a:solidFill>
-              <a:srgbClr val="D6E8F2"/>
+              <a:srgbClr val="B9D7E6"/>
             </a:solidFill>
             <a:prstDash val="solid"/>
           </a:ln>
@@ -16177,119 +15534,112 @@
       </p:sp>
       <p:sp>
         <p:nvSpPr>
-          <p:cNvPr id="14" name="Shape 12"/>
-          <p:cNvSpPr/>
-          <p:nvPr/>
-        </p:nvSpPr>
-        <p:spPr>
-          <a:xfrm>
-            <a:off x="8074152" y="3291840"/>
-            <a:ext cx="2596896" cy="749808"/>
-          </a:xfrm>
-          <a:prstGeom prst="rect">
-            <a:avLst/>
-          </a:prstGeom>
-          <a:solidFill>
-            <a:srgbClr val="EAF6F8"/>
-          </a:solidFill>
-          <a:ln w="12700">
-            <a:solidFill>
-              <a:srgbClr val="8ABBD8"/>
-            </a:solidFill>
-            <a:prstDash val="solid"/>
-          </a:ln>
-        </p:spPr>
-      </p:sp>
-      <p:sp>
-        <p:nvSpPr>
-          <p:cNvPr id="15" name="Shape 13"/>
-          <p:cNvSpPr/>
-          <p:nvPr/>
-        </p:nvSpPr>
-        <p:spPr>
-          <a:xfrm>
-            <a:off x="8202168" y="3721608"/>
-            <a:ext cx="2340864" cy="0"/>
-          </a:xfrm>
-          <a:prstGeom prst="line">
-            <a:avLst/>
-          </a:prstGeom>
-          <a:noFill/>
-          <a:ln w="19050">
-            <a:solidFill>
-              <a:srgbClr val="0068B7"/>
-            </a:solidFill>
-            <a:prstDash val="solid"/>
-          </a:ln>
-        </p:spPr>
+          <p:cNvPr id="14" name="Text 12"/>
+          <p:cNvSpPr/>
+          <p:nvPr/>
+        </p:nvSpPr>
+        <p:spPr>
+          <a:xfrm>
+            <a:off x="7799832" y="2935224"/>
+            <a:ext cx="3145536" cy="256032"/>
+          </a:xfrm>
+          <a:prstGeom prst="rect">
+            <a:avLst/>
+          </a:prstGeom>
+          <a:noFill/>
+          <a:ln/>
+        </p:spPr>
+        <p:txBody>
+          <a:bodyPr wrap="square" lIns="0" tIns="0" rIns="0" bIns="0" rtlCol="0" anchor="ctr"/>
+          <a:lstStyle/>
+          <a:p>
+            <a:pPr indent="0" marL="0">
+              <a:buNone/>
+            </a:pPr>
+            <a:r>
+              <a:rPr lang="en-US" sz="1300" b="1" dirty="0">
+                <a:solidFill>
+                  <a:srgbClr val="0068B7"/>
+                </a:solidFill>
+                <a:latin typeface="Aptos" pitchFamily="34" charset="0"/>
+                <a:ea typeface="Aptos" pitchFamily="34" charset="-122"/>
+                <a:cs typeface="Aptos" pitchFamily="34" charset="-120"/>
+              </a:rPr>
+              <a:t>Concept checkpoints</a:t>
+            </a:r>
+            <a:endParaRPr lang="en-US" sz="1300" dirty="0"/>
+          </a:p>
+        </p:txBody>
+      </p:sp>
+      <p:sp>
+        <p:nvSpPr>
+          <p:cNvPr id="15" name="Text 13"/>
+          <p:cNvSpPr/>
+          <p:nvPr/>
+        </p:nvSpPr>
+        <p:spPr>
+          <a:xfrm>
+            <a:off x="7818120" y="3300984"/>
+            <a:ext cx="3090672" cy="877824"/>
+          </a:xfrm>
+          <a:prstGeom prst="rect">
+            <a:avLst/>
+          </a:prstGeom>
+          <a:noFill/>
+          <a:ln/>
+        </p:spPr>
+        <p:txBody>
+          <a:bodyPr wrap="square" lIns="254" tIns="254" rIns="254" bIns="254" rtlCol="0" anchor="t">
+            <a:normAutofit/>
+          </a:bodyPr>
+          <a:lstStyle/>
+          <a:p>
+            <a:r>
+              <a:rPr lang="en-US" sz="1380" dirty="0">
+                <a:solidFill>
+                  <a:srgbClr val="17364A"/>
+                </a:solidFill>
+                <a:latin typeface="Aptos" pitchFamily="34" charset="0"/>
+                <a:ea typeface="Aptos" pitchFamily="34" charset="-122"/>
+                <a:cs typeface="Aptos" pitchFamily="34" charset="-120"/>
+              </a:rPr>
+              <a:t>In public health, time patterns are central to surveillance, outbreak detection, syndromic.</a:t>
+            </a:r>
+            <a:endParaRPr lang="en-US" sz="1380" dirty="0"/>
+          </a:p>
+          <a:p>
+            <a:r>
+              <a:rPr lang="en-US" sz="1380" dirty="0">
+                <a:solidFill>
+                  <a:srgbClr val="17364A"/>
+                </a:solidFill>
+                <a:latin typeface="Aptos" pitchFamily="34" charset="0"/>
+                <a:ea typeface="Aptos" pitchFamily="34" charset="-122"/>
+                <a:cs typeface="Aptos" pitchFamily="34" charset="-120"/>
+              </a:rPr>
+              <a:t>AI-supported anomaly detection can help identify unusual increases, decreases, or pattern.</a:t>
+            </a:r>
+            <a:endParaRPr lang="en-US" sz="1380" dirty="0"/>
+          </a:p>
+          <a:p>
+            <a:r>
+              <a:rPr lang="en-US" sz="1380" dirty="0">
+                <a:solidFill>
+                  <a:srgbClr val="17364A"/>
+                </a:solidFill>
+                <a:latin typeface="Aptos" pitchFamily="34" charset="0"/>
+                <a:ea typeface="Aptos" pitchFamily="34" charset="-122"/>
+                <a:cs typeface="Aptos" pitchFamily="34" charset="-120"/>
+              </a:rPr>
+              <a:t>This module explains how time-series and anomaly detection methods can support public.</a:t>
+            </a:r>
+            <a:endParaRPr lang="en-US" sz="1380" dirty="0"/>
+          </a:p>
+        </p:txBody>
       </p:sp>
       <p:sp>
         <p:nvSpPr>
           <p:cNvPr id="16" name="Shape 14"/>
-          <p:cNvSpPr/>
-          <p:nvPr/>
-        </p:nvSpPr>
-        <p:spPr>
-          <a:xfrm>
-            <a:off x="9198864" y="4206240"/>
-            <a:ext cx="347472" cy="347472"/>
-          </a:xfrm>
-          <a:prstGeom prst="ellipse">
-            <a:avLst/>
-          </a:prstGeom>
-          <a:solidFill>
-            <a:srgbClr val="2F8A28"/>
-          </a:solidFill>
-          <a:ln w="12700">
-            <a:solidFill>
-              <a:srgbClr val="2F8A28"/>
-            </a:solidFill>
-            <a:prstDash val="solid"/>
-          </a:ln>
-        </p:spPr>
-      </p:sp>
-      <p:sp>
-        <p:nvSpPr>
-          <p:cNvPr id="17" name="Text 15"/>
-          <p:cNvSpPr/>
-          <p:nvPr/>
-        </p:nvSpPr>
-        <p:spPr>
-          <a:xfrm>
-            <a:off x="7909560" y="3977640"/>
-            <a:ext cx="2926080" cy="182880"/>
-          </a:xfrm>
-          <a:prstGeom prst="rect">
-            <a:avLst/>
-          </a:prstGeom>
-          <a:noFill/>
-          <a:ln/>
-        </p:spPr>
-        <p:txBody>
-          <a:bodyPr wrap="square" lIns="0" tIns="0" rIns="0" bIns="0" rtlCol="0" anchor="ctr"/>
-          <a:lstStyle/>
-          <a:p>
-            <a:pPr algn="ctr" indent="0" marL="0">
-              <a:buNone/>
-            </a:pPr>
-            <a:r>
-              <a:rPr lang="en-US" sz="1000" dirty="0">
-                <a:solidFill>
-                  <a:srgbClr val="003A63"/>
-                </a:solidFill>
-                <a:latin typeface="Aptos" pitchFamily="34" charset="0"/>
-                <a:ea typeface="Aptos" pitchFamily="34" charset="-122"/>
-                <a:cs typeface="Aptos" pitchFamily="34" charset="-120"/>
-              </a:rPr>
-              <a:t>Concept to action</a:t>
-            </a:r>
-            <a:endParaRPr lang="en-US" sz="1000" dirty="0"/>
-          </a:p>
-        </p:txBody>
-      </p:sp>
-      <p:sp>
-        <p:nvSpPr>
-          <p:cNvPr id="18" name="Shape 16"/>
           <p:cNvSpPr/>
           <p:nvPr/>
         </p:nvSpPr>
@@ -16316,7 +15666,7 @@
       </p:sp>
       <p:sp>
         <p:nvSpPr>
-          <p:cNvPr id="19" name="Text 17"/>
+          <p:cNvPr id="17" name="Text 15"/>
           <p:cNvSpPr/>
           <p:nvPr/>
         </p:nvSpPr>
@@ -16355,7 +15705,7 @@
       </p:sp>
       <p:sp>
         <p:nvSpPr>
-          <p:cNvPr id="20" name="Text 18"/>
+          <p:cNvPr id="18" name="Text 16"/>
           <p:cNvSpPr/>
           <p:nvPr/>
         </p:nvSpPr>
@@ -16863,13 +16213,11 @@
             </a:avLst>
           </a:prstGeom>
           <a:solidFill>
-            <a:srgbClr val="FFFFFF">
-              <a:alpha val="88000"/>
-            </a:srgbClr>
+            <a:srgbClr val="FFFFFF"/>
           </a:solidFill>
           <a:ln w="12700">
             <a:solidFill>
-              <a:srgbClr val="D6E8F2"/>
+              <a:srgbClr val="B9D7E6"/>
             </a:solidFill>
             <a:prstDash val="solid"/>
           </a:ln>
@@ -16877,119 +16225,112 @@
       </p:sp>
       <p:sp>
         <p:nvSpPr>
-          <p:cNvPr id="14" name="Shape 12"/>
-          <p:cNvSpPr/>
-          <p:nvPr/>
-        </p:nvSpPr>
-        <p:spPr>
-          <a:xfrm>
-            <a:off x="8074152" y="3291840"/>
-            <a:ext cx="2596896" cy="749808"/>
-          </a:xfrm>
-          <a:prstGeom prst="rect">
-            <a:avLst/>
-          </a:prstGeom>
-          <a:solidFill>
-            <a:srgbClr val="EAF6F8"/>
-          </a:solidFill>
-          <a:ln w="12700">
-            <a:solidFill>
-              <a:srgbClr val="8ABBD8"/>
-            </a:solidFill>
-            <a:prstDash val="solid"/>
-          </a:ln>
-        </p:spPr>
-      </p:sp>
-      <p:sp>
-        <p:nvSpPr>
-          <p:cNvPr id="15" name="Shape 13"/>
-          <p:cNvSpPr/>
-          <p:nvPr/>
-        </p:nvSpPr>
-        <p:spPr>
-          <a:xfrm>
-            <a:off x="8202168" y="3721608"/>
-            <a:ext cx="2340864" cy="0"/>
-          </a:xfrm>
-          <a:prstGeom prst="line">
-            <a:avLst/>
-          </a:prstGeom>
-          <a:noFill/>
-          <a:ln w="19050">
-            <a:solidFill>
-              <a:srgbClr val="0068B7"/>
-            </a:solidFill>
-            <a:prstDash val="solid"/>
-          </a:ln>
-        </p:spPr>
+          <p:cNvPr id="14" name="Text 12"/>
+          <p:cNvSpPr/>
+          <p:nvPr/>
+        </p:nvSpPr>
+        <p:spPr>
+          <a:xfrm>
+            <a:off x="7799832" y="2935224"/>
+            <a:ext cx="3145536" cy="256032"/>
+          </a:xfrm>
+          <a:prstGeom prst="rect">
+            <a:avLst/>
+          </a:prstGeom>
+          <a:noFill/>
+          <a:ln/>
+        </p:spPr>
+        <p:txBody>
+          <a:bodyPr wrap="square" lIns="0" tIns="0" rIns="0" bIns="0" rtlCol="0" anchor="ctr"/>
+          <a:lstStyle/>
+          <a:p>
+            <a:pPr indent="0" marL="0">
+              <a:buNone/>
+            </a:pPr>
+            <a:r>
+              <a:rPr lang="en-US" sz="1300" b="1" dirty="0">
+                <a:solidFill>
+                  <a:srgbClr val="0068B7"/>
+                </a:solidFill>
+                <a:latin typeface="Aptos" pitchFamily="34" charset="0"/>
+                <a:ea typeface="Aptos" pitchFamily="34" charset="-122"/>
+                <a:cs typeface="Aptos" pitchFamily="34" charset="-120"/>
+              </a:rPr>
+              <a:t>Concept checkpoints</a:t>
+            </a:r>
+            <a:endParaRPr lang="en-US" sz="1300" dirty="0"/>
+          </a:p>
+        </p:txBody>
+      </p:sp>
+      <p:sp>
+        <p:nvSpPr>
+          <p:cNvPr id="15" name="Text 13"/>
+          <p:cNvSpPr/>
+          <p:nvPr/>
+        </p:nvSpPr>
+        <p:spPr>
+          <a:xfrm>
+            <a:off x="7818120" y="3300984"/>
+            <a:ext cx="3090672" cy="877824"/>
+          </a:xfrm>
+          <a:prstGeom prst="rect">
+            <a:avLst/>
+          </a:prstGeom>
+          <a:noFill/>
+          <a:ln/>
+        </p:spPr>
+        <p:txBody>
+          <a:bodyPr wrap="square" lIns="254" tIns="254" rIns="254" bIns="254" rtlCol="0" anchor="t">
+            <a:normAutofit/>
+          </a:bodyPr>
+          <a:lstStyle/>
+          <a:p>
+            <a:r>
+              <a:rPr lang="en-US" sz="1380" dirty="0">
+                <a:solidFill>
+                  <a:srgbClr val="17364A"/>
+                </a:solidFill>
+                <a:latin typeface="Aptos" pitchFamily="34" charset="0"/>
+                <a:ea typeface="Aptos" pitchFamily="34" charset="-122"/>
+                <a:cs typeface="Aptos" pitchFamily="34" charset="-120"/>
+              </a:rPr>
+              <a:t>A single count may be difficult to interpret without knowing whether it is higher than.</a:t>
+            </a:r>
+            <a:endParaRPr lang="en-US" sz="1380" dirty="0"/>
+          </a:p>
+          <a:p>
+            <a:r>
+              <a:rPr lang="en-US" sz="1380" dirty="0">
+                <a:solidFill>
+                  <a:srgbClr val="17364A"/>
+                </a:solidFill>
+                <a:latin typeface="Aptos" pitchFamily="34" charset="0"/>
+                <a:ea typeface="Aptos" pitchFamily="34" charset="-122"/>
+                <a:cs typeface="Aptos" pitchFamily="34" charset="-120"/>
+              </a:rPr>
+              <a:t>AI-supported anomaly detection can help staff review large volumes of data and prioritize.</a:t>
+            </a:r>
+            <a:endParaRPr lang="en-US" sz="1380" dirty="0"/>
+          </a:p>
+          <a:p>
+            <a:r>
+              <a:rPr lang="en-US" sz="1380" dirty="0">
+                <a:solidFill>
+                  <a:srgbClr val="17364A"/>
+                </a:solidFill>
+                <a:latin typeface="Aptos" pitchFamily="34" charset="0"/>
+                <a:ea typeface="Aptos" pitchFamily="34" charset="-122"/>
+                <a:cs typeface="Aptos" pitchFamily="34" charset="-120"/>
+              </a:rPr>
+              <a:t>However, public health time-series data are shaped by reporting systems as much as disease.</a:t>
+            </a:r>
+            <a:endParaRPr lang="en-US" sz="1380" dirty="0"/>
+          </a:p>
+        </p:txBody>
       </p:sp>
       <p:sp>
         <p:nvSpPr>
           <p:cNvPr id="16" name="Shape 14"/>
-          <p:cNvSpPr/>
-          <p:nvPr/>
-        </p:nvSpPr>
-        <p:spPr>
-          <a:xfrm>
-            <a:off x="9198864" y="4206240"/>
-            <a:ext cx="347472" cy="347472"/>
-          </a:xfrm>
-          <a:prstGeom prst="ellipse">
-            <a:avLst/>
-          </a:prstGeom>
-          <a:solidFill>
-            <a:srgbClr val="2F8A28"/>
-          </a:solidFill>
-          <a:ln w="12700">
-            <a:solidFill>
-              <a:srgbClr val="2F8A28"/>
-            </a:solidFill>
-            <a:prstDash val="solid"/>
-          </a:ln>
-        </p:spPr>
-      </p:sp>
-      <p:sp>
-        <p:nvSpPr>
-          <p:cNvPr id="17" name="Text 15"/>
-          <p:cNvSpPr/>
-          <p:nvPr/>
-        </p:nvSpPr>
-        <p:spPr>
-          <a:xfrm>
-            <a:off x="7909560" y="3977640"/>
-            <a:ext cx="2926080" cy="182880"/>
-          </a:xfrm>
-          <a:prstGeom prst="rect">
-            <a:avLst/>
-          </a:prstGeom>
-          <a:noFill/>
-          <a:ln/>
-        </p:spPr>
-        <p:txBody>
-          <a:bodyPr wrap="square" lIns="0" tIns="0" rIns="0" bIns="0" rtlCol="0" anchor="ctr"/>
-          <a:lstStyle/>
-          <a:p>
-            <a:pPr algn="ctr" indent="0" marL="0">
-              <a:buNone/>
-            </a:pPr>
-            <a:r>
-              <a:rPr lang="en-US" sz="1000" dirty="0">
-                <a:solidFill>
-                  <a:srgbClr val="003A63"/>
-                </a:solidFill>
-                <a:latin typeface="Aptos" pitchFamily="34" charset="0"/>
-                <a:ea typeface="Aptos" pitchFamily="34" charset="-122"/>
-                <a:cs typeface="Aptos" pitchFamily="34" charset="-120"/>
-              </a:rPr>
-              <a:t>Concept to action</a:t>
-            </a:r>
-            <a:endParaRPr lang="en-US" sz="1000" dirty="0"/>
-          </a:p>
-        </p:txBody>
-      </p:sp>
-      <p:sp>
-        <p:nvSpPr>
-          <p:cNvPr id="18" name="Shape 16"/>
           <p:cNvSpPr/>
           <p:nvPr/>
         </p:nvSpPr>
@@ -17016,7 +16357,7 @@
       </p:sp>
       <p:sp>
         <p:nvSpPr>
-          <p:cNvPr id="19" name="Text 17"/>
+          <p:cNvPr id="17" name="Text 15"/>
           <p:cNvSpPr/>
           <p:nvPr/>
         </p:nvSpPr>
@@ -17055,7 +16396,7 @@
       </p:sp>
       <p:sp>
         <p:nvSpPr>
-          <p:cNvPr id="20" name="Text 18"/>
+          <p:cNvPr id="18" name="Text 16"/>
           <p:cNvSpPr/>
           <p:nvPr/>
         </p:nvSpPr>
@@ -17563,13 +16904,11 @@
             </a:avLst>
           </a:prstGeom>
           <a:solidFill>
-            <a:srgbClr val="FFFFFF">
-              <a:alpha val="88000"/>
-            </a:srgbClr>
+            <a:srgbClr val="FFFFFF"/>
           </a:solidFill>
           <a:ln w="12700">
             <a:solidFill>
-              <a:srgbClr val="D6E8F2"/>
+              <a:srgbClr val="B9D7E6"/>
             </a:solidFill>
             <a:prstDash val="solid"/>
           </a:ln>
@@ -17577,119 +16916,112 @@
       </p:sp>
       <p:sp>
         <p:nvSpPr>
-          <p:cNvPr id="14" name="Shape 12"/>
-          <p:cNvSpPr/>
-          <p:nvPr/>
-        </p:nvSpPr>
-        <p:spPr>
-          <a:xfrm>
-            <a:off x="8074152" y="3291840"/>
-            <a:ext cx="2596896" cy="749808"/>
-          </a:xfrm>
-          <a:prstGeom prst="rect">
-            <a:avLst/>
-          </a:prstGeom>
-          <a:solidFill>
-            <a:srgbClr val="EAF6F8"/>
-          </a:solidFill>
-          <a:ln w="12700">
-            <a:solidFill>
-              <a:srgbClr val="8ABBD8"/>
-            </a:solidFill>
-            <a:prstDash val="solid"/>
-          </a:ln>
-        </p:spPr>
-      </p:sp>
-      <p:sp>
-        <p:nvSpPr>
-          <p:cNvPr id="15" name="Shape 13"/>
-          <p:cNvSpPr/>
-          <p:nvPr/>
-        </p:nvSpPr>
-        <p:spPr>
-          <a:xfrm>
-            <a:off x="8202168" y="3721608"/>
-            <a:ext cx="2340864" cy="0"/>
-          </a:xfrm>
-          <a:prstGeom prst="line">
-            <a:avLst/>
-          </a:prstGeom>
-          <a:noFill/>
-          <a:ln w="19050">
-            <a:solidFill>
-              <a:srgbClr val="0068B7"/>
-            </a:solidFill>
-            <a:prstDash val="solid"/>
-          </a:ln>
-        </p:spPr>
+          <p:cNvPr id="14" name="Text 12"/>
+          <p:cNvSpPr/>
+          <p:nvPr/>
+        </p:nvSpPr>
+        <p:spPr>
+          <a:xfrm>
+            <a:off x="7799832" y="2935224"/>
+            <a:ext cx="3145536" cy="256032"/>
+          </a:xfrm>
+          <a:prstGeom prst="rect">
+            <a:avLst/>
+          </a:prstGeom>
+          <a:noFill/>
+          <a:ln/>
+        </p:spPr>
+        <p:txBody>
+          <a:bodyPr wrap="square" lIns="0" tIns="0" rIns="0" bIns="0" rtlCol="0" anchor="ctr"/>
+          <a:lstStyle/>
+          <a:p>
+            <a:pPr indent="0" marL="0">
+              <a:buNone/>
+            </a:pPr>
+            <a:r>
+              <a:rPr lang="en-US" sz="1300" b="1" dirty="0">
+                <a:solidFill>
+                  <a:srgbClr val="0068B7"/>
+                </a:solidFill>
+                <a:latin typeface="Aptos" pitchFamily="34" charset="0"/>
+                <a:ea typeface="Aptos" pitchFamily="34" charset="-122"/>
+                <a:cs typeface="Aptos" pitchFamily="34" charset="-120"/>
+              </a:rPr>
+              <a:t>Concept checkpoints</a:t>
+            </a:r>
+            <a:endParaRPr lang="en-US" sz="1300" dirty="0"/>
+          </a:p>
+        </p:txBody>
+      </p:sp>
+      <p:sp>
+        <p:nvSpPr>
+          <p:cNvPr id="15" name="Text 13"/>
+          <p:cNvSpPr/>
+          <p:nvPr/>
+        </p:nvSpPr>
+        <p:spPr>
+          <a:xfrm>
+            <a:off x="7818120" y="3300984"/>
+            <a:ext cx="3090672" cy="877824"/>
+          </a:xfrm>
+          <a:prstGeom prst="rect">
+            <a:avLst/>
+          </a:prstGeom>
+          <a:noFill/>
+          <a:ln/>
+        </p:spPr>
+        <p:txBody>
+          <a:bodyPr wrap="square" lIns="254" tIns="254" rIns="254" bIns="254" rtlCol="0" anchor="t">
+            <a:normAutofit/>
+          </a:bodyPr>
+          <a:lstStyle/>
+          <a:p>
+            <a:r>
+              <a:rPr lang="en-US" sz="1380" dirty="0">
+                <a:solidFill>
+                  <a:srgbClr val="17364A"/>
+                </a:solidFill>
+                <a:latin typeface="Aptos" pitchFamily="34" charset="0"/>
+                <a:ea typeface="Aptos" pitchFamily="34" charset="-122"/>
+                <a:cs typeface="Aptos" pitchFamily="34" charset="-120"/>
+              </a:rPr>
+              <a:t>A syndromic surveillance team may use anomaly detection to monitor emergency department.</a:t>
+            </a:r>
+            <a:endParaRPr lang="en-US" sz="1380" dirty="0"/>
+          </a:p>
+          <a:p>
+            <a:r>
+              <a:rPr lang="en-US" sz="1380" dirty="0">
+                <a:solidFill>
+                  <a:srgbClr val="17364A"/>
+                </a:solidFill>
+                <a:latin typeface="Aptos" pitchFamily="34" charset="0"/>
+                <a:ea typeface="Aptos" pitchFamily="34" charset="-122"/>
+                <a:cs typeface="Aptos" pitchFamily="34" charset="-120"/>
+              </a:rPr>
+              <a:t>The alert could prompt review of age groups, facilities, diagnosis text, lab data, school.</a:t>
+            </a:r>
+            <a:endParaRPr lang="en-US" sz="1380" dirty="0"/>
+          </a:p>
+          <a:p>
+            <a:r>
+              <a:rPr lang="en-US" sz="1380" dirty="0">
+                <a:solidFill>
+                  <a:srgbClr val="17364A"/>
+                </a:solidFill>
+                <a:latin typeface="Aptos" pitchFamily="34" charset="0"/>
+                <a:ea typeface="Aptos" pitchFamily="34" charset="-122"/>
+                <a:cs typeface="Aptos" pitchFamily="34" charset="-120"/>
+              </a:rPr>
+              <a:t>The alert is valuable only if it enters a disciplined review process.</a:t>
+            </a:r>
+            <a:endParaRPr lang="en-US" sz="1380" dirty="0"/>
+          </a:p>
+        </p:txBody>
       </p:sp>
       <p:sp>
         <p:nvSpPr>
           <p:cNvPr id="16" name="Shape 14"/>
-          <p:cNvSpPr/>
-          <p:nvPr/>
-        </p:nvSpPr>
-        <p:spPr>
-          <a:xfrm>
-            <a:off x="9198864" y="4206240"/>
-            <a:ext cx="347472" cy="347472"/>
-          </a:xfrm>
-          <a:prstGeom prst="ellipse">
-            <a:avLst/>
-          </a:prstGeom>
-          <a:solidFill>
-            <a:srgbClr val="2F8A28"/>
-          </a:solidFill>
-          <a:ln w="12700">
-            <a:solidFill>
-              <a:srgbClr val="2F8A28"/>
-            </a:solidFill>
-            <a:prstDash val="solid"/>
-          </a:ln>
-        </p:spPr>
-      </p:sp>
-      <p:sp>
-        <p:nvSpPr>
-          <p:cNvPr id="17" name="Text 15"/>
-          <p:cNvSpPr/>
-          <p:nvPr/>
-        </p:nvSpPr>
-        <p:spPr>
-          <a:xfrm>
-            <a:off x="7909560" y="3977640"/>
-            <a:ext cx="2926080" cy="182880"/>
-          </a:xfrm>
-          <a:prstGeom prst="rect">
-            <a:avLst/>
-          </a:prstGeom>
-          <a:noFill/>
-          <a:ln/>
-        </p:spPr>
-        <p:txBody>
-          <a:bodyPr wrap="square" lIns="0" tIns="0" rIns="0" bIns="0" rtlCol="0" anchor="ctr"/>
-          <a:lstStyle/>
-          <a:p>
-            <a:pPr algn="ctr" indent="0" marL="0">
-              <a:buNone/>
-            </a:pPr>
-            <a:r>
-              <a:rPr lang="en-US" sz="1000" dirty="0">
-                <a:solidFill>
-                  <a:srgbClr val="003A63"/>
-                </a:solidFill>
-                <a:latin typeface="Aptos" pitchFamily="34" charset="0"/>
-                <a:ea typeface="Aptos" pitchFamily="34" charset="-122"/>
-                <a:cs typeface="Aptos" pitchFamily="34" charset="-120"/>
-              </a:rPr>
-              <a:t>Concept to action</a:t>
-            </a:r>
-            <a:endParaRPr lang="en-US" sz="1000" dirty="0"/>
-          </a:p>
-        </p:txBody>
-      </p:sp>
-      <p:sp>
-        <p:nvSpPr>
-          <p:cNvPr id="18" name="Shape 16"/>
           <p:cNvSpPr/>
           <p:nvPr/>
         </p:nvSpPr>
@@ -17716,7 +17048,7 @@
       </p:sp>
       <p:sp>
         <p:nvSpPr>
-          <p:cNvPr id="19" name="Text 17"/>
+          <p:cNvPr id="17" name="Text 15"/>
           <p:cNvSpPr/>
           <p:nvPr/>
         </p:nvSpPr>
@@ -17755,7 +17087,7 @@
       </p:sp>
       <p:sp>
         <p:nvSpPr>
-          <p:cNvPr id="20" name="Text 18"/>
+          <p:cNvPr id="18" name="Text 16"/>
           <p:cNvSpPr/>
           <p:nvPr/>
         </p:nvSpPr>

--- a/downloads/presentations/modules/anl-240.pptx
+++ b/downloads/presentations/modules/anl-240.pptx
@@ -3353,49 +3353,58 @@
           <a:ln/>
         </p:spPr>
         <p:txBody>
-          <a:bodyPr wrap="square" lIns="635" tIns="635" rIns="635" bIns="635" rtlCol="0" anchor="t">
+          <a:bodyPr wrap="square" lIns="1016" tIns="1016" rIns="1016" bIns="1016" rtlCol="0" anchor="t">
             <a:normAutofit/>
           </a:bodyPr>
           <a:lstStyle/>
           <a:p>
+            <a:pPr indent="0" marL="0">
+              <a:buNone/>
+            </a:pPr>
             <a:r>
               <a:rPr lang="en-US" sz="2100" dirty="0">
                 <a:solidFill>
-                  <a:srgbClr val="17364A"/>
-                </a:solidFill>
-                <a:latin typeface="Aptos" pitchFamily="34" charset="0"/>
-                <a:ea typeface="Aptos" pitchFamily="34" charset="-122"/>
-                <a:cs typeface="Aptos" pitchFamily="34" charset="-120"/>
-              </a:rPr>
-              <a:t>Baseline selection is one of the most important technical decisions.</a:t>
+                  <a:srgbClr val="003A63"/>
+                </a:solidFill>
+                <a:latin typeface="Aptos" pitchFamily="34" charset="0"/>
+                <a:ea typeface="Aptos" pitchFamily="34" charset="-122"/>
+                <a:cs typeface="Aptos" pitchFamily="34" charset="-120"/>
+              </a:rPr>
+              <a:t>• Baseline selection is one of the most important technical decisions.</a:t>
             </a:r>
             <a:endParaRPr lang="en-US" sz="2100" dirty="0"/>
           </a:p>
           <a:p>
+            <a:pPr indent="0" marL="0">
+              <a:buNone/>
+            </a:pPr>
             <a:r>
               <a:rPr lang="en-US" sz="2100" dirty="0">
                 <a:solidFill>
-                  <a:srgbClr val="17364A"/>
-                </a:solidFill>
-                <a:latin typeface="Aptos" pitchFamily="34" charset="0"/>
-                <a:ea typeface="Aptos" pitchFamily="34" charset="-122"/>
-                <a:cs typeface="Aptos" pitchFamily="34" charset="-120"/>
-              </a:rPr>
-              <a:t>A baseline may use several prior weeks, several prior years, a regression model, seasonal.</a:t>
+                  <a:srgbClr val="003A63"/>
+                </a:solidFill>
+                <a:latin typeface="Aptos" pitchFamily="34" charset="0"/>
+                <a:ea typeface="Aptos" pitchFamily="34" charset="-122"/>
+                <a:cs typeface="Aptos" pitchFamily="34" charset="-120"/>
+              </a:rPr>
+              <a:t>• A baseline may use several prior weeks, several prior years, a regression model, seasonal.</a:t>
             </a:r>
             <a:endParaRPr lang="en-US" sz="2100" dirty="0"/>
           </a:p>
           <a:p>
+            <a:pPr indent="0" marL="0">
+              <a:buNone/>
+            </a:pPr>
             <a:r>
               <a:rPr lang="en-US" sz="2100" dirty="0">
                 <a:solidFill>
-                  <a:srgbClr val="17364A"/>
-                </a:solidFill>
-                <a:latin typeface="Aptos" pitchFamily="34" charset="0"/>
-                <a:ea typeface="Aptos" pitchFamily="34" charset="-122"/>
-                <a:cs typeface="Aptos" pitchFamily="34" charset="-120"/>
-              </a:rPr>
-              <a:t>The baseline should match the public health question.</a:t>
+                  <a:srgbClr val="003A63"/>
+                </a:solidFill>
+                <a:latin typeface="Aptos" pitchFamily="34" charset="0"/>
+                <a:ea typeface="Aptos" pitchFamily="34" charset="-122"/>
+                <a:cs typeface="Aptos" pitchFamily="34" charset="-120"/>
+              </a:rPr>
+              <a:t>• The baseline should match the public health question.</a:t>
             </a:r>
             <a:endParaRPr lang="en-US" sz="2100" dirty="0"/>
           </a:p>
@@ -3475,17 +3484,17 @@
         </p:nvSpPr>
         <p:spPr>
           <a:xfrm>
-            <a:off x="7799832" y="1828800"/>
-            <a:ext cx="3145536" cy="685800"/>
-          </a:xfrm>
-          <a:prstGeom prst="rect">
-            <a:avLst/>
-          </a:prstGeom>
-          <a:noFill/>
-          <a:ln/>
-        </p:spPr>
-        <p:txBody>
-          <a:bodyPr wrap="square" lIns="0" tIns="0" rIns="0" bIns="0" rtlCol="0" anchor="t">
+            <a:off x="7799832" y="1801368"/>
+            <a:ext cx="3145536" cy="758952"/>
+          </a:xfrm>
+          <a:prstGeom prst="rect">
+            <a:avLst/>
+          </a:prstGeom>
+          <a:noFill/>
+          <a:ln/>
+        </p:spPr>
+        <p:txBody>
+          <a:bodyPr wrap="square" lIns="254" tIns="254" rIns="254" bIns="254" rtlCol="0" anchor="t">
             <a:normAutofit/>
           </a:bodyPr>
           <a:lstStyle/>
@@ -3494,7 +3503,7 @@
               <a:buNone/>
             </a:pPr>
             <a:r>
-              <a:rPr lang="en-US" sz="1550" dirty="0">
+              <a:rPr lang="en-US" sz="1320" dirty="0">
                 <a:solidFill>
                   <a:srgbClr val="17364A"/>
                 </a:solidFill>
@@ -3504,7 +3513,7 @@
               </a:rPr>
               <a:t>Baseline selection is one of the most important technical decisions.</a:t>
             </a:r>
-            <a:endParaRPr lang="en-US" sz="1550" dirty="0"/>
+            <a:endParaRPr lang="en-US" sz="1320" dirty="0"/>
           </a:p>
         </p:txBody>
       </p:sp>
@@ -3592,13 +3601,16 @@
           <a:ln/>
         </p:spPr>
         <p:txBody>
-          <a:bodyPr wrap="square" lIns="254" tIns="254" rIns="254" bIns="254" rtlCol="0" anchor="t">
+          <a:bodyPr wrap="square" lIns="508" tIns="508" rIns="508" bIns="508" rtlCol="0" anchor="t">
             <a:normAutofit/>
           </a:bodyPr>
           <a:lstStyle/>
           <a:p>
-            <a:r>
-              <a:rPr lang="en-US" sz="1380" dirty="0">
+            <a:pPr indent="0" marL="0">
+              <a:buNone/>
+            </a:pPr>
+            <a:r>
+              <a:rPr lang="en-US" sz="1220" dirty="0">
                 <a:solidFill>
                   <a:srgbClr val="17364A"/>
                 </a:solidFill>
@@ -3606,13 +3618,16 @@
                 <a:ea typeface="Aptos" pitchFamily="34" charset="-122"/>
                 <a:cs typeface="Aptos" pitchFamily="34" charset="-120"/>
               </a:rPr>
-              <a:t>A baseline may use several prior weeks, several prior years, a regression model, seasonal.</a:t>
-            </a:r>
-            <a:endParaRPr lang="en-US" sz="1380" dirty="0"/>
-          </a:p>
-          <a:p>
-            <a:r>
-              <a:rPr lang="en-US" sz="1380" dirty="0">
+              <a:t>A baseline may use several prior weeks, several prior years, a.</a:t>
+            </a:r>
+            <a:endParaRPr lang="en-US" sz="1220" dirty="0"/>
+          </a:p>
+          <a:p>
+            <a:pPr indent="0" marL="0">
+              <a:buNone/>
+            </a:pPr>
+            <a:r>
+              <a:rPr lang="en-US" sz="1220" dirty="0">
                 <a:solidFill>
                   <a:srgbClr val="17364A"/>
                 </a:solidFill>
@@ -3622,11 +3637,14 @@
               </a:rPr>
               <a:t>A short baseline may adapt quickly but miss seasonal context.</a:t>
             </a:r>
-            <a:endParaRPr lang="en-US" sz="1380" dirty="0"/>
-          </a:p>
-          <a:p>
-            <a:r>
-              <a:rPr lang="en-US" sz="1380" dirty="0">
+            <a:endParaRPr lang="en-US" sz="1220" dirty="0"/>
+          </a:p>
+          <a:p>
+            <a:pPr indent="0" marL="0">
+              <a:buNone/>
+            </a:pPr>
+            <a:r>
+              <a:rPr lang="en-US" sz="1220" dirty="0">
                 <a:solidFill>
                   <a:srgbClr val="17364A"/>
                 </a:solidFill>
@@ -3634,9 +3652,9 @@
                 <a:ea typeface="Aptos" pitchFamily="34" charset="-122"/>
                 <a:cs typeface="Aptos" pitchFamily="34" charset="-120"/>
               </a:rPr>
-              <a:t>A long baseline may capture seasonality but fail when underlying systems change.</a:t>
-            </a:r>
-            <a:endParaRPr lang="en-US" sz="1380" dirty="0"/>
+              <a:t>A long baseline may capture seasonality but fail when underlying.</a:t>
+            </a:r>
+            <a:endParaRPr lang="en-US" sz="1220" dirty="0"/>
           </a:p>
         </p:txBody>
       </p:sp>
@@ -3714,17 +3732,17 @@
         </p:nvSpPr>
         <p:spPr>
           <a:xfrm>
-            <a:off x="7799832" y="5001768"/>
-            <a:ext cx="3145536" cy="502920"/>
-          </a:xfrm>
-          <a:prstGeom prst="rect">
-            <a:avLst/>
-          </a:prstGeom>
-          <a:noFill/>
-          <a:ln/>
-        </p:spPr>
-        <p:txBody>
-          <a:bodyPr wrap="square" lIns="0" tIns="0" rIns="0" bIns="0" rtlCol="0" anchor="t">
+            <a:off x="7799832" y="4974336"/>
+            <a:ext cx="3145536" cy="576072"/>
+          </a:xfrm>
+          <a:prstGeom prst="rect">
+            <a:avLst/>
+          </a:prstGeom>
+          <a:noFill/>
+          <a:ln/>
+        </p:spPr>
+        <p:txBody>
+          <a:bodyPr wrap="square" lIns="254" tIns="254" rIns="254" bIns="254" rtlCol="0" anchor="t">
             <a:normAutofit/>
           </a:bodyPr>
           <a:lstStyle/>
@@ -3733,7 +3751,7 @@
               <a:buNone/>
             </a:pPr>
             <a:r>
-              <a:rPr lang="en-US" sz="1550" dirty="0">
+              <a:rPr lang="en-US" sz="1320" dirty="0">
                 <a:solidFill>
                   <a:srgbClr val="17364A"/>
                 </a:solidFill>
@@ -3741,9 +3759,9 @@
                 <a:ea typeface="Aptos" pitchFamily="34" charset="-122"/>
                 <a:cs typeface="Aptos" pitchFamily="34" charset="-120"/>
               </a:rPr>
-              <a:t>Connect the concept to public health purpose, responsible use, required safeguards, documentation, and the next action a department should take.</a:t>
-            </a:r>
-            <a:endParaRPr lang="en-US" sz="1550" dirty="0"/>
+              <a:t>Connect the concept to public health purpose, responsible use, required safeguards, documentation, and the next action a.</a:t>
+            </a:r>
+            <a:endParaRPr lang="en-US" sz="1320" dirty="0"/>
           </a:p>
         </p:txBody>
       </p:sp>
@@ -4044,49 +4062,58 @@
           <a:ln/>
         </p:spPr>
         <p:txBody>
-          <a:bodyPr wrap="square" lIns="635" tIns="635" rIns="635" bIns="635" rtlCol="0" anchor="t">
+          <a:bodyPr wrap="square" lIns="1016" tIns="1016" rIns="1016" bIns="1016" rtlCol="0" anchor="t">
             <a:normAutofit/>
           </a:bodyPr>
           <a:lstStyle/>
           <a:p>
+            <a:pPr indent="0" marL="0">
+              <a:buNone/>
+            </a:pPr>
             <a:r>
               <a:rPr lang="en-US" sz="2100" dirty="0">
                 <a:solidFill>
-                  <a:srgbClr val="17364A"/>
-                </a:solidFill>
-                <a:latin typeface="Aptos" pitchFamily="34" charset="0"/>
-                <a:ea typeface="Aptos" pitchFamily="34" charset="-122"/>
-                <a:cs typeface="Aptos" pitchFamily="34" charset="-120"/>
-              </a:rPr>
-              <a:t>Anomaly detection methods vary in complexity.</a:t>
+                  <a:srgbClr val="003A63"/>
+                </a:solidFill>
+                <a:latin typeface="Aptos" pitchFamily="34" charset="0"/>
+                <a:ea typeface="Aptos" pitchFamily="34" charset="-122"/>
+                <a:cs typeface="Aptos" pitchFamily="34" charset="-120"/>
+              </a:rPr>
+              <a:t>• Anomaly detection methods vary in complexity.</a:t>
             </a:r>
             <a:endParaRPr lang="en-US" sz="2100" dirty="0"/>
           </a:p>
           <a:p>
+            <a:pPr indent="0" marL="0">
+              <a:buNone/>
+            </a:pPr>
             <a:r>
               <a:rPr lang="en-US" sz="2100" dirty="0">
                 <a:solidFill>
-                  <a:srgbClr val="17364A"/>
-                </a:solidFill>
-                <a:latin typeface="Aptos" pitchFamily="34" charset="0"/>
-                <a:ea typeface="Aptos" pitchFamily="34" charset="-122"/>
-                <a:cs typeface="Aptos" pitchFamily="34" charset="-120"/>
-              </a:rPr>
-              <a:t>Simple methods may compare counts to moving averages or standard deviations.</a:t>
+                  <a:srgbClr val="003A63"/>
+                </a:solidFill>
+                <a:latin typeface="Aptos" pitchFamily="34" charset="0"/>
+                <a:ea typeface="Aptos" pitchFamily="34" charset="-122"/>
+                <a:cs typeface="Aptos" pitchFamily="34" charset="-120"/>
+              </a:rPr>
+              <a:t>• Simple methods may compare counts to moving averages or standard deviations.</a:t>
             </a:r>
             <a:endParaRPr lang="en-US" sz="2100" dirty="0"/>
           </a:p>
           <a:p>
+            <a:pPr indent="0" marL="0">
+              <a:buNone/>
+            </a:pPr>
             <a:r>
               <a:rPr lang="en-US" sz="2100" dirty="0">
                 <a:solidFill>
-                  <a:srgbClr val="17364A"/>
-                </a:solidFill>
-                <a:latin typeface="Aptos" pitchFamily="34" charset="0"/>
-                <a:ea typeface="Aptos" pitchFamily="34" charset="-122"/>
-                <a:cs typeface="Aptos" pitchFamily="34" charset="-120"/>
-              </a:rPr>
-              <a:t>More advanced methods may use regression, Bayesian approaches, control charts, machine learning, or.</a:t>
+                  <a:srgbClr val="003A63"/>
+                </a:solidFill>
+                <a:latin typeface="Aptos" pitchFamily="34" charset="0"/>
+                <a:ea typeface="Aptos" pitchFamily="34" charset="-122"/>
+                <a:cs typeface="Aptos" pitchFamily="34" charset="-120"/>
+              </a:rPr>
+              <a:t>• More advanced methods may use regression, Bayesian approaches, control charts, machine.</a:t>
             </a:r>
             <a:endParaRPr lang="en-US" sz="2100" dirty="0"/>
           </a:p>
@@ -4166,17 +4193,17 @@
         </p:nvSpPr>
         <p:spPr>
           <a:xfrm>
-            <a:off x="7799832" y="1828800"/>
-            <a:ext cx="3145536" cy="685800"/>
-          </a:xfrm>
-          <a:prstGeom prst="rect">
-            <a:avLst/>
-          </a:prstGeom>
-          <a:noFill/>
-          <a:ln/>
-        </p:spPr>
-        <p:txBody>
-          <a:bodyPr wrap="square" lIns="0" tIns="0" rIns="0" bIns="0" rtlCol="0" anchor="t">
+            <a:off x="7799832" y="1801368"/>
+            <a:ext cx="3145536" cy="758952"/>
+          </a:xfrm>
+          <a:prstGeom prst="rect">
+            <a:avLst/>
+          </a:prstGeom>
+          <a:noFill/>
+          <a:ln/>
+        </p:spPr>
+        <p:txBody>
+          <a:bodyPr wrap="square" lIns="254" tIns="254" rIns="254" bIns="254" rtlCol="0" anchor="t">
             <a:normAutofit/>
           </a:bodyPr>
           <a:lstStyle/>
@@ -4185,7 +4212,7 @@
               <a:buNone/>
             </a:pPr>
             <a:r>
-              <a:rPr lang="en-US" sz="1550" dirty="0">
+              <a:rPr lang="en-US" sz="1320" dirty="0">
                 <a:solidFill>
                   <a:srgbClr val="17364A"/>
                 </a:solidFill>
@@ -4195,7 +4222,7 @@
               </a:rPr>
               <a:t>Anomaly detection methods vary in complexity.</a:t>
             </a:r>
-            <a:endParaRPr lang="en-US" sz="1550" dirty="0"/>
+            <a:endParaRPr lang="en-US" sz="1320" dirty="0"/>
           </a:p>
         </p:txBody>
       </p:sp>
@@ -4283,13 +4310,16 @@
           <a:ln/>
         </p:spPr>
         <p:txBody>
-          <a:bodyPr wrap="square" lIns="254" tIns="254" rIns="254" bIns="254" rtlCol="0" anchor="t">
+          <a:bodyPr wrap="square" lIns="508" tIns="508" rIns="508" bIns="508" rtlCol="0" anchor="t">
             <a:normAutofit/>
           </a:bodyPr>
           <a:lstStyle/>
           <a:p>
-            <a:r>
-              <a:rPr lang="en-US" sz="1380" dirty="0">
+            <a:pPr indent="0" marL="0">
+              <a:buNone/>
+            </a:pPr>
+            <a:r>
+              <a:rPr lang="en-US" sz="1220" dirty="0">
                 <a:solidFill>
                   <a:srgbClr val="17364A"/>
                 </a:solidFill>
@@ -4297,13 +4327,16 @@
                 <a:ea typeface="Aptos" pitchFamily="34" charset="-122"/>
                 <a:cs typeface="Aptos" pitchFamily="34" charset="-120"/>
               </a:rPr>
-              <a:t>More advanced methods may use regression, Bayesian approaches, control charts, machine.</a:t>
-            </a:r>
-            <a:endParaRPr lang="en-US" sz="1380" dirty="0"/>
-          </a:p>
-          <a:p>
-            <a:r>
-              <a:rPr lang="en-US" sz="1380" dirty="0">
+              <a:t>More advanced methods may use regression, Bayesian approaches,.</a:t>
+            </a:r>
+            <a:endParaRPr lang="en-US" sz="1220" dirty="0"/>
+          </a:p>
+          <a:p>
+            <a:pPr indent="0" marL="0">
+              <a:buNone/>
+            </a:pPr>
+            <a:r>
+              <a:rPr lang="en-US" sz="1220" dirty="0">
                 <a:solidFill>
                   <a:srgbClr val="17364A"/>
                 </a:solidFill>
@@ -4313,11 +4346,14 @@
               </a:rPr>
               <a:t>More complex methods are not automatically better.</a:t>
             </a:r>
-            <a:endParaRPr lang="en-US" sz="1380" dirty="0"/>
-          </a:p>
-          <a:p>
-            <a:r>
-              <a:rPr lang="en-US" sz="1380" dirty="0">
+            <a:endParaRPr lang="en-US" sz="1220" dirty="0"/>
+          </a:p>
+          <a:p>
+            <a:pPr indent="0" marL="0">
+              <a:buNone/>
+            </a:pPr>
+            <a:r>
+              <a:rPr lang="en-US" sz="1220" dirty="0">
                 <a:solidFill>
                   <a:srgbClr val="17364A"/>
                 </a:solidFill>
@@ -4325,9 +4361,9 @@
                 <a:ea typeface="Aptos" pitchFamily="34" charset="-122"/>
                 <a:cs typeface="Aptos" pitchFamily="34" charset="-120"/>
               </a:rPr>
-              <a:t>In public health practice, interpretability, stability, transparency, and workflow fit.</a:t>
-            </a:r>
-            <a:endParaRPr lang="en-US" sz="1380" dirty="0"/>
+              <a:t>In public health practice, interpretability, stability,.</a:t>
+            </a:r>
+            <a:endParaRPr lang="en-US" sz="1220" dirty="0"/>
           </a:p>
         </p:txBody>
       </p:sp>
@@ -4405,17 +4441,17 @@
         </p:nvSpPr>
         <p:spPr>
           <a:xfrm>
-            <a:off x="7799832" y="5001768"/>
-            <a:ext cx="3145536" cy="502920"/>
-          </a:xfrm>
-          <a:prstGeom prst="rect">
-            <a:avLst/>
-          </a:prstGeom>
-          <a:noFill/>
-          <a:ln/>
-        </p:spPr>
-        <p:txBody>
-          <a:bodyPr wrap="square" lIns="0" tIns="0" rIns="0" bIns="0" rtlCol="0" anchor="t">
+            <a:off x="7799832" y="4974336"/>
+            <a:ext cx="3145536" cy="576072"/>
+          </a:xfrm>
+          <a:prstGeom prst="rect">
+            <a:avLst/>
+          </a:prstGeom>
+          <a:noFill/>
+          <a:ln/>
+        </p:spPr>
+        <p:txBody>
+          <a:bodyPr wrap="square" lIns="254" tIns="254" rIns="254" bIns="254" rtlCol="0" anchor="t">
             <a:normAutofit/>
           </a:bodyPr>
           <a:lstStyle/>
@@ -4424,7 +4460,7 @@
               <a:buNone/>
             </a:pPr>
             <a:r>
-              <a:rPr lang="en-US" sz="1550" dirty="0">
+              <a:rPr lang="en-US" sz="1320" dirty="0">
                 <a:solidFill>
                   <a:srgbClr val="17364A"/>
                 </a:solidFill>
@@ -4432,9 +4468,9 @@
                 <a:ea typeface="Aptos" pitchFamily="34" charset="-122"/>
                 <a:cs typeface="Aptos" pitchFamily="34" charset="-120"/>
               </a:rPr>
-              <a:t>Connect the concept to public health purpose, responsible use, required safeguards, documentation, and the next action a department should take.</a:t>
-            </a:r>
-            <a:endParaRPr lang="en-US" sz="1550" dirty="0"/>
+              <a:t>Connect the concept to public health purpose, responsible use, required safeguards, documentation, and the next action a.</a:t>
+            </a:r>
+            <a:endParaRPr lang="en-US" sz="1320" dirty="0"/>
           </a:p>
         </p:txBody>
       </p:sp>
@@ -4735,49 +4771,58 @@
           <a:ln/>
         </p:spPr>
         <p:txBody>
-          <a:bodyPr wrap="square" lIns="635" tIns="635" rIns="635" bIns="635" rtlCol="0" anchor="t">
+          <a:bodyPr wrap="square" lIns="1016" tIns="1016" rIns="1016" bIns="1016" rtlCol="0" anchor="t">
             <a:normAutofit/>
           </a:bodyPr>
           <a:lstStyle/>
           <a:p>
+            <a:pPr indent="0" marL="0">
+              <a:buNone/>
+            </a:pPr>
             <a:r>
               <a:rPr lang="en-US" sz="2100" dirty="0">
                 <a:solidFill>
-                  <a:srgbClr val="17364A"/>
-                </a:solidFill>
-                <a:latin typeface="Aptos" pitchFamily="34" charset="0"/>
-                <a:ea typeface="Aptos" pitchFamily="34" charset="-122"/>
-                <a:cs typeface="Aptos" pitchFamily="34" charset="-120"/>
-              </a:rPr>
-              <a:t>Reporting artifacts.</a:t>
+                  <a:srgbClr val="003A63"/>
+                </a:solidFill>
+                <a:latin typeface="Aptos" pitchFamily="34" charset="0"/>
+                <a:ea typeface="Aptos" pitchFamily="34" charset="-122"/>
+                <a:cs typeface="Aptos" pitchFamily="34" charset="-120"/>
+              </a:rPr>
+              <a:t>• Reporting artifacts.</a:t>
             </a:r>
             <a:endParaRPr lang="en-US" sz="2100" dirty="0"/>
           </a:p>
           <a:p>
+            <a:pPr indent="0" marL="0">
+              <a:buNone/>
+            </a:pPr>
             <a:r>
               <a:rPr lang="en-US" sz="2100" dirty="0">
                 <a:solidFill>
-                  <a:srgbClr val="17364A"/>
-                </a:solidFill>
-                <a:latin typeface="Aptos" pitchFamily="34" charset="0"/>
-                <a:ea typeface="Aptos" pitchFamily="34" charset="-122"/>
-                <a:cs typeface="Aptos" pitchFamily="34" charset="-120"/>
-              </a:rPr>
-              <a:t>Feed failures, delayed batches, or coding changes can trigger false alerts.</a:t>
+                  <a:srgbClr val="003A63"/>
+                </a:solidFill>
+                <a:latin typeface="Aptos" pitchFamily="34" charset="0"/>
+                <a:ea typeface="Aptos" pitchFamily="34" charset="-122"/>
+                <a:cs typeface="Aptos" pitchFamily="34" charset="-120"/>
+              </a:rPr>
+              <a:t>• Feed failures, delayed batches, or coding changes can trigger false alerts.</a:t>
             </a:r>
             <a:endParaRPr lang="en-US" sz="2100" dirty="0"/>
           </a:p>
           <a:p>
+            <a:pPr indent="0" marL="0">
+              <a:buNone/>
+            </a:pPr>
             <a:r>
               <a:rPr lang="en-US" sz="2100" dirty="0">
                 <a:solidFill>
-                  <a:srgbClr val="17364A"/>
-                </a:solidFill>
-                <a:latin typeface="Aptos" pitchFamily="34" charset="0"/>
-                <a:ea typeface="Aptos" pitchFamily="34" charset="-122"/>
-                <a:cs typeface="Aptos" pitchFamily="34" charset="-120"/>
-              </a:rPr>
-              <a:t>Guardrails include data quality checks, feed monitoring, and partner change logs.</a:t>
+                  <a:srgbClr val="003A63"/>
+                </a:solidFill>
+                <a:latin typeface="Aptos" pitchFamily="34" charset="0"/>
+                <a:ea typeface="Aptos" pitchFamily="34" charset="-122"/>
+                <a:cs typeface="Aptos" pitchFamily="34" charset="-120"/>
+              </a:rPr>
+              <a:t>• Guardrails include data quality checks, feed monitoring, and partner change logs.</a:t>
             </a:r>
             <a:endParaRPr lang="en-US" sz="2100" dirty="0"/>
           </a:p>
@@ -4857,17 +4902,17 @@
         </p:nvSpPr>
         <p:spPr>
           <a:xfrm>
-            <a:off x="7799832" y="1828800"/>
-            <a:ext cx="3145536" cy="685800"/>
-          </a:xfrm>
-          <a:prstGeom prst="rect">
-            <a:avLst/>
-          </a:prstGeom>
-          <a:noFill/>
-          <a:ln/>
-        </p:spPr>
-        <p:txBody>
-          <a:bodyPr wrap="square" lIns="0" tIns="0" rIns="0" bIns="0" rtlCol="0" anchor="t">
+            <a:off x="7799832" y="1801368"/>
+            <a:ext cx="3145536" cy="758952"/>
+          </a:xfrm>
+          <a:prstGeom prst="rect">
+            <a:avLst/>
+          </a:prstGeom>
+          <a:noFill/>
+          <a:ln/>
+        </p:spPr>
+        <p:txBody>
+          <a:bodyPr wrap="square" lIns="254" tIns="254" rIns="254" bIns="254" rtlCol="0" anchor="t">
             <a:normAutofit/>
           </a:bodyPr>
           <a:lstStyle/>
@@ -4876,7 +4921,7 @@
               <a:buNone/>
             </a:pPr>
             <a:r>
-              <a:rPr lang="en-US" sz="1550" dirty="0">
+              <a:rPr lang="en-US" sz="1320" dirty="0">
                 <a:solidFill>
                   <a:srgbClr val="17364A"/>
                 </a:solidFill>
@@ -4886,7 +4931,7 @@
               </a:rPr>
               <a:t>Reporting artifacts.</a:t>
             </a:r>
-            <a:endParaRPr lang="en-US" sz="1550" dirty="0"/>
+            <a:endParaRPr lang="en-US" sz="1320" dirty="0"/>
           </a:p>
         </p:txBody>
       </p:sp>
@@ -4974,13 +5019,16 @@
           <a:ln/>
         </p:spPr>
         <p:txBody>
-          <a:bodyPr wrap="square" lIns="254" tIns="254" rIns="254" bIns="254" rtlCol="0" anchor="t">
+          <a:bodyPr wrap="square" lIns="508" tIns="508" rIns="508" bIns="508" rtlCol="0" anchor="t">
             <a:normAutofit/>
           </a:bodyPr>
           <a:lstStyle/>
           <a:p>
-            <a:r>
-              <a:rPr lang="en-US" sz="1380" dirty="0">
+            <a:pPr indent="0" marL="0">
+              <a:buNone/>
+            </a:pPr>
+            <a:r>
+              <a:rPr lang="en-US" sz="1220" dirty="0">
                 <a:solidFill>
                   <a:srgbClr val="17364A"/>
                 </a:solidFill>
@@ -4990,11 +5038,14 @@
               </a:rPr>
               <a:t>Alert fatigue.</a:t>
             </a:r>
-            <a:endParaRPr lang="en-US" sz="1380" dirty="0"/>
-          </a:p>
-          <a:p>
-            <a:r>
-              <a:rPr lang="en-US" sz="1380" dirty="0">
+            <a:endParaRPr lang="en-US" sz="1220" dirty="0"/>
+          </a:p>
+          <a:p>
+            <a:pPr indent="0" marL="0">
+              <a:buNone/>
+            </a:pPr>
+            <a:r>
+              <a:rPr lang="en-US" sz="1220" dirty="0">
                 <a:solidFill>
                   <a:srgbClr val="17364A"/>
                 </a:solidFill>
@@ -5004,11 +5055,14 @@
               </a:rPr>
               <a:t>Too many alerts can reduce attention.</a:t>
             </a:r>
-            <a:endParaRPr lang="en-US" sz="1380" dirty="0"/>
-          </a:p>
-          <a:p>
-            <a:r>
-              <a:rPr lang="en-US" sz="1380" dirty="0">
+            <a:endParaRPr lang="en-US" sz="1220" dirty="0"/>
+          </a:p>
+          <a:p>
+            <a:pPr indent="0" marL="0">
+              <a:buNone/>
+            </a:pPr>
+            <a:r>
+              <a:rPr lang="en-US" sz="1220" dirty="0">
                 <a:solidFill>
                   <a:srgbClr val="17364A"/>
                 </a:solidFill>
@@ -5016,9 +5070,9 @@
                 <a:ea typeface="Aptos" pitchFamily="34" charset="-122"/>
                 <a:cs typeface="Aptos" pitchFamily="34" charset="-120"/>
               </a:rPr>
-              <a:t>Guardrails include threshold tuning, tiered alerting, user feedback, and periodic alert.</a:t>
-            </a:r>
-            <a:endParaRPr lang="en-US" sz="1380" dirty="0"/>
+              <a:t>Guardrails include threshold tuning, tiered alerting, user.</a:t>
+            </a:r>
+            <a:endParaRPr lang="en-US" sz="1220" dirty="0"/>
           </a:p>
         </p:txBody>
       </p:sp>
@@ -5096,17 +5150,17 @@
         </p:nvSpPr>
         <p:spPr>
           <a:xfrm>
-            <a:off x="7799832" y="5001768"/>
-            <a:ext cx="3145536" cy="502920"/>
-          </a:xfrm>
-          <a:prstGeom prst="rect">
-            <a:avLst/>
-          </a:prstGeom>
-          <a:noFill/>
-          <a:ln/>
-        </p:spPr>
-        <p:txBody>
-          <a:bodyPr wrap="square" lIns="0" tIns="0" rIns="0" bIns="0" rtlCol="0" anchor="t">
+            <a:off x="7799832" y="4974336"/>
+            <a:ext cx="3145536" cy="576072"/>
+          </a:xfrm>
+          <a:prstGeom prst="rect">
+            <a:avLst/>
+          </a:prstGeom>
+          <a:noFill/>
+          <a:ln/>
+        </p:spPr>
+        <p:txBody>
+          <a:bodyPr wrap="square" lIns="254" tIns="254" rIns="254" bIns="254" rtlCol="0" anchor="t">
             <a:normAutofit/>
           </a:bodyPr>
           <a:lstStyle/>
@@ -5115,7 +5169,7 @@
               <a:buNone/>
             </a:pPr>
             <a:r>
-              <a:rPr lang="en-US" sz="1550" dirty="0">
+              <a:rPr lang="en-US" sz="1320" dirty="0">
                 <a:solidFill>
                   <a:srgbClr val="17364A"/>
                 </a:solidFill>
@@ -5123,9 +5177,9 @@
                 <a:ea typeface="Aptos" pitchFamily="34" charset="-122"/>
                 <a:cs typeface="Aptos" pitchFamily="34" charset="-120"/>
               </a:rPr>
-              <a:t>Identify what could go wrong, who could be affected, what safeguards are needed, and what evidence should be reviewed before use expands.</a:t>
-            </a:r>
-            <a:endParaRPr lang="en-US" sz="1550" dirty="0"/>
+              <a:t>Identify what could go wrong, who could be affected, what safeguards are needed, and what evidence should be reviewed.</a:t>
+            </a:r>
+            <a:endParaRPr lang="en-US" sz="1320" dirty="0"/>
           </a:p>
         </p:txBody>
       </p:sp>
@@ -5426,49 +5480,58 @@
           <a:ln/>
         </p:spPr>
         <p:txBody>
-          <a:bodyPr wrap="square" lIns="635" tIns="635" rIns="635" bIns="635" rtlCol="0" anchor="t">
+          <a:bodyPr wrap="square" lIns="1016" tIns="1016" rIns="1016" bIns="1016" rtlCol="0" anchor="t">
             <a:normAutofit/>
           </a:bodyPr>
           <a:lstStyle/>
           <a:p>
+            <a:pPr indent="0" marL="0">
+              <a:buNone/>
+            </a:pPr>
             <a:r>
               <a:rPr lang="en-US" sz="2100" dirty="0">
                 <a:solidFill>
-                  <a:srgbClr val="17364A"/>
-                </a:solidFill>
-                <a:latin typeface="Aptos" pitchFamily="34" charset="0"/>
-                <a:ea typeface="Aptos" pitchFamily="34" charset="-122"/>
-                <a:cs typeface="Aptos" pitchFamily="34" charset="-120"/>
-              </a:rPr>
-              <a:t>Missed emerging events.</a:t>
+                  <a:srgbClr val="003A63"/>
+                </a:solidFill>
+                <a:latin typeface="Aptos" pitchFamily="34" charset="0"/>
+                <a:ea typeface="Aptos" pitchFamily="34" charset="-122"/>
+                <a:cs typeface="Aptos" pitchFamily="34" charset="-120"/>
+              </a:rPr>
+              <a:t>• Missed emerging events.</a:t>
             </a:r>
             <a:endParaRPr lang="en-US" sz="2100" dirty="0"/>
           </a:p>
           <a:p>
+            <a:pPr indent="0" marL="0">
+              <a:buNone/>
+            </a:pPr>
             <a:r>
               <a:rPr lang="en-US" sz="2100" dirty="0">
                 <a:solidFill>
-                  <a:srgbClr val="17364A"/>
-                </a:solidFill>
-                <a:latin typeface="Aptos" pitchFamily="34" charset="0"/>
-                <a:ea typeface="Aptos" pitchFamily="34" charset="-122"/>
-                <a:cs typeface="Aptos" pitchFamily="34" charset="-120"/>
-              </a:rPr>
-              <a:t>Overly conservative thresholds may miss early signals.</a:t>
+                  <a:srgbClr val="003A63"/>
+                </a:solidFill>
+                <a:latin typeface="Aptos" pitchFamily="34" charset="0"/>
+                <a:ea typeface="Aptos" pitchFamily="34" charset="-122"/>
+                <a:cs typeface="Aptos" pitchFamily="34" charset="-120"/>
+              </a:rPr>
+              <a:t>• Overly conservative thresholds may miss early signals.</a:t>
             </a:r>
             <a:endParaRPr lang="en-US" sz="2100" dirty="0"/>
           </a:p>
           <a:p>
+            <a:pPr indent="0" marL="0">
+              <a:buNone/>
+            </a:pPr>
             <a:r>
               <a:rPr lang="en-US" sz="2100" dirty="0">
                 <a:solidFill>
-                  <a:srgbClr val="17364A"/>
-                </a:solidFill>
-                <a:latin typeface="Aptos" pitchFamily="34" charset="0"/>
-                <a:ea typeface="Aptos" pitchFamily="34" charset="-122"/>
-                <a:cs typeface="Aptos" pitchFamily="34" charset="-120"/>
-              </a:rPr>
-              <a:t>Guardrails include multiple indicators, sensitivity review, and escalation pathways for staff concerns.</a:t>
+                  <a:srgbClr val="003A63"/>
+                </a:solidFill>
+                <a:latin typeface="Aptos" pitchFamily="34" charset="0"/>
+                <a:ea typeface="Aptos" pitchFamily="34" charset="-122"/>
+                <a:cs typeface="Aptos" pitchFamily="34" charset="-120"/>
+              </a:rPr>
+              <a:t>• Guardrails include multiple indicators, sensitivity review, and escalation pathways for staff.</a:t>
             </a:r>
             <a:endParaRPr lang="en-US" sz="2100" dirty="0"/>
           </a:p>
@@ -5548,17 +5611,17 @@
         </p:nvSpPr>
         <p:spPr>
           <a:xfrm>
-            <a:off x="7799832" y="1828800"/>
-            <a:ext cx="3145536" cy="685800"/>
-          </a:xfrm>
-          <a:prstGeom prst="rect">
-            <a:avLst/>
-          </a:prstGeom>
-          <a:noFill/>
-          <a:ln/>
-        </p:spPr>
-        <p:txBody>
-          <a:bodyPr wrap="square" lIns="0" tIns="0" rIns="0" bIns="0" rtlCol="0" anchor="t">
+            <a:off x="7799832" y="1801368"/>
+            <a:ext cx="3145536" cy="758952"/>
+          </a:xfrm>
+          <a:prstGeom prst="rect">
+            <a:avLst/>
+          </a:prstGeom>
+          <a:noFill/>
+          <a:ln/>
+        </p:spPr>
+        <p:txBody>
+          <a:bodyPr wrap="square" lIns="254" tIns="254" rIns="254" bIns="254" rtlCol="0" anchor="t">
             <a:normAutofit/>
           </a:bodyPr>
           <a:lstStyle/>
@@ -5567,7 +5630,7 @@
               <a:buNone/>
             </a:pPr>
             <a:r>
-              <a:rPr lang="en-US" sz="1550" dirty="0">
+              <a:rPr lang="en-US" sz="1320" dirty="0">
                 <a:solidFill>
                   <a:srgbClr val="17364A"/>
                 </a:solidFill>
@@ -5577,7 +5640,7 @@
               </a:rPr>
               <a:t>Missed emerging events.</a:t>
             </a:r>
-            <a:endParaRPr lang="en-US" sz="1550" dirty="0"/>
+            <a:endParaRPr lang="en-US" sz="1320" dirty="0"/>
           </a:p>
         </p:txBody>
       </p:sp>
@@ -5665,13 +5728,16 @@
           <a:ln/>
         </p:spPr>
         <p:txBody>
-          <a:bodyPr wrap="square" lIns="254" tIns="254" rIns="254" bIns="254" rtlCol="0" anchor="t">
+          <a:bodyPr wrap="square" lIns="508" tIns="508" rIns="508" bIns="508" rtlCol="0" anchor="t">
             <a:normAutofit/>
           </a:bodyPr>
           <a:lstStyle/>
           <a:p>
-            <a:r>
-              <a:rPr lang="en-US" sz="1380" dirty="0">
+            <a:pPr indent="0" marL="0">
+              <a:buNone/>
+            </a:pPr>
+            <a:r>
+              <a:rPr lang="en-US" sz="1220" dirty="0">
                 <a:solidFill>
                   <a:srgbClr val="17364A"/>
                 </a:solidFill>
@@ -5681,11 +5747,14 @@
               </a:rPr>
               <a:t>Missed emerging events.</a:t>
             </a:r>
-            <a:endParaRPr lang="en-US" sz="1380" dirty="0"/>
-          </a:p>
-          <a:p>
-            <a:r>
-              <a:rPr lang="en-US" sz="1380" dirty="0">
+            <a:endParaRPr lang="en-US" sz="1220" dirty="0"/>
+          </a:p>
+          <a:p>
+            <a:pPr indent="0" marL="0">
+              <a:buNone/>
+            </a:pPr>
+            <a:r>
+              <a:rPr lang="en-US" sz="1220" dirty="0">
                 <a:solidFill>
                   <a:srgbClr val="17364A"/>
                 </a:solidFill>
@@ -5695,11 +5764,14 @@
               </a:rPr>
               <a:t>Overly conservative thresholds may miss early signals.</a:t>
             </a:r>
-            <a:endParaRPr lang="en-US" sz="1380" dirty="0"/>
-          </a:p>
-          <a:p>
-            <a:r>
-              <a:rPr lang="en-US" sz="1380" dirty="0">
+            <a:endParaRPr lang="en-US" sz="1220" dirty="0"/>
+          </a:p>
+          <a:p>
+            <a:pPr indent="0" marL="0">
+              <a:buNone/>
+            </a:pPr>
+            <a:r>
+              <a:rPr lang="en-US" sz="1220" dirty="0">
                 <a:solidFill>
                   <a:srgbClr val="17364A"/>
                 </a:solidFill>
@@ -5707,9 +5779,9 @@
                 <a:ea typeface="Aptos" pitchFamily="34" charset="-122"/>
                 <a:cs typeface="Aptos" pitchFamily="34" charset="-120"/>
               </a:rPr>
-              <a:t>Guardrails include multiple indicators, sensitivity review, and escalation pathways for.</a:t>
-            </a:r>
-            <a:endParaRPr lang="en-US" sz="1380" dirty="0"/>
+              <a:t>Guardrails include multiple indicators, sensitivity review, and.</a:t>
+            </a:r>
+            <a:endParaRPr lang="en-US" sz="1220" dirty="0"/>
           </a:p>
         </p:txBody>
       </p:sp>
@@ -5787,17 +5859,17 @@
         </p:nvSpPr>
         <p:spPr>
           <a:xfrm>
-            <a:off x="7799832" y="5001768"/>
-            <a:ext cx="3145536" cy="502920"/>
-          </a:xfrm>
-          <a:prstGeom prst="rect">
-            <a:avLst/>
-          </a:prstGeom>
-          <a:noFill/>
-          <a:ln/>
-        </p:spPr>
-        <p:txBody>
-          <a:bodyPr wrap="square" lIns="0" tIns="0" rIns="0" bIns="0" rtlCol="0" anchor="t">
+            <a:off x="7799832" y="4974336"/>
+            <a:ext cx="3145536" cy="576072"/>
+          </a:xfrm>
+          <a:prstGeom prst="rect">
+            <a:avLst/>
+          </a:prstGeom>
+          <a:noFill/>
+          <a:ln/>
+        </p:spPr>
+        <p:txBody>
+          <a:bodyPr wrap="square" lIns="254" tIns="254" rIns="254" bIns="254" rtlCol="0" anchor="t">
             <a:normAutofit/>
           </a:bodyPr>
           <a:lstStyle/>
@@ -5806,7 +5878,7 @@
               <a:buNone/>
             </a:pPr>
             <a:r>
-              <a:rPr lang="en-US" sz="1550" dirty="0">
+              <a:rPr lang="en-US" sz="1320" dirty="0">
                 <a:solidFill>
                   <a:srgbClr val="17364A"/>
                 </a:solidFill>
@@ -5814,9 +5886,9 @@
                 <a:ea typeface="Aptos" pitchFamily="34" charset="-122"/>
                 <a:cs typeface="Aptos" pitchFamily="34" charset="-120"/>
               </a:rPr>
-              <a:t>Identify what could go wrong, who could be affected, what safeguards are needed, and what evidence should be reviewed before use expands.</a:t>
-            </a:r>
-            <a:endParaRPr lang="en-US" sz="1550" dirty="0"/>
+              <a:t>Identify what could go wrong, who could be affected, what safeguards are needed, and what evidence should be reviewed.</a:t>
+            </a:r>
+            <a:endParaRPr lang="en-US" sz="1320" dirty="0"/>
           </a:p>
         </p:txBody>
       </p:sp>
@@ -6117,49 +6189,58 @@
           <a:ln/>
         </p:spPr>
         <p:txBody>
-          <a:bodyPr wrap="square" lIns="635" tIns="635" rIns="635" bIns="635" rtlCol="0" anchor="t">
+          <a:bodyPr wrap="square" lIns="1016" tIns="1016" rIns="1016" bIns="1016" rtlCol="0" anchor="t">
             <a:normAutofit/>
           </a:bodyPr>
           <a:lstStyle/>
           <a:p>
+            <a:pPr indent="0" marL="0">
+              <a:buNone/>
+            </a:pPr>
             <a:r>
               <a:rPr lang="en-US" sz="2100" dirty="0">
                 <a:solidFill>
-                  <a:srgbClr val="17364A"/>
-                </a:solidFill>
-                <a:latin typeface="Aptos" pitchFamily="34" charset="0"/>
-                <a:ea typeface="Aptos" pitchFamily="34" charset="-122"/>
-                <a:cs typeface="Aptos" pitchFamily="34" charset="-120"/>
-              </a:rPr>
-              <a:t>Time-series and anomaly detection methods can support predictive dashboards, syndromic surveillance,.</a:t>
+                  <a:srgbClr val="003A63"/>
+                </a:solidFill>
+                <a:latin typeface="Aptos" pitchFamily="34" charset="0"/>
+                <a:ea typeface="Aptos" pitchFamily="34" charset="-122"/>
+                <a:cs typeface="Aptos" pitchFamily="34" charset="-120"/>
+              </a:rPr>
+              <a:t>• Time-series and anomaly detection methods can support predictive dashboards, syndromic.</a:t>
             </a:r>
             <a:endParaRPr lang="en-US" sz="2100" dirty="0"/>
           </a:p>
           <a:p>
+            <a:pPr indent="0" marL="0">
+              <a:buNone/>
+            </a:pPr>
             <a:r>
               <a:rPr lang="en-US" sz="2100" dirty="0">
                 <a:solidFill>
-                  <a:srgbClr val="17364A"/>
-                </a:solidFill>
-                <a:latin typeface="Aptos" pitchFamily="34" charset="0"/>
-                <a:ea typeface="Aptos" pitchFamily="34" charset="-122"/>
-                <a:cs typeface="Aptos" pitchFamily="34" charset="-120"/>
-              </a:rPr>
-              <a:t>Generative AI may summarize signal review, but it should include uncertainty and source indicators.</a:t>
+                  <a:srgbClr val="003A63"/>
+                </a:solidFill>
+                <a:latin typeface="Aptos" pitchFamily="34" charset="0"/>
+                <a:ea typeface="Aptos" pitchFamily="34" charset="-122"/>
+                <a:cs typeface="Aptos" pitchFamily="34" charset="-120"/>
+              </a:rPr>
+              <a:t>• Generative AI may summarize signal review, but it should include uncertainty and source.</a:t>
             </a:r>
             <a:endParaRPr lang="en-US" sz="2100" dirty="0"/>
           </a:p>
           <a:p>
+            <a:pPr indent="0" marL="0">
+              <a:buNone/>
+            </a:pPr>
             <a:r>
               <a:rPr lang="en-US" sz="2100" dirty="0">
                 <a:solidFill>
-                  <a:srgbClr val="17364A"/>
-                </a:solidFill>
-                <a:latin typeface="Aptos" pitchFamily="34" charset="0"/>
-                <a:ea typeface="Aptos" pitchFamily="34" charset="-122"/>
-                <a:cs typeface="Aptos" pitchFamily="34" charset="-120"/>
-              </a:rPr>
-              <a:t>Agentic workflows may route alerts or create tasks, but those actions should be limited to defined.</a:t>
+                  <a:srgbClr val="003A63"/>
+                </a:solidFill>
+                <a:latin typeface="Aptos" pitchFamily="34" charset="0"/>
+                <a:ea typeface="Aptos" pitchFamily="34" charset="-122"/>
+                <a:cs typeface="Aptos" pitchFamily="34" charset="-120"/>
+              </a:rPr>
+              <a:t>• Agentic workflows may route alerts or create tasks, but those actions should be limited to.</a:t>
             </a:r>
             <a:endParaRPr lang="en-US" sz="2100" dirty="0"/>
           </a:p>
@@ -6239,17 +6320,17 @@
         </p:nvSpPr>
         <p:spPr>
           <a:xfrm>
-            <a:off x="7799832" y="1828800"/>
-            <a:ext cx="3145536" cy="685800"/>
-          </a:xfrm>
-          <a:prstGeom prst="rect">
-            <a:avLst/>
-          </a:prstGeom>
-          <a:noFill/>
-          <a:ln/>
-        </p:spPr>
-        <p:txBody>
-          <a:bodyPr wrap="square" lIns="0" tIns="0" rIns="0" bIns="0" rtlCol="0" anchor="t">
+            <a:off x="7799832" y="1801368"/>
+            <a:ext cx="3145536" cy="758952"/>
+          </a:xfrm>
+          <a:prstGeom prst="rect">
+            <a:avLst/>
+          </a:prstGeom>
+          <a:noFill/>
+          <a:ln/>
+        </p:spPr>
+        <p:txBody>
+          <a:bodyPr wrap="square" lIns="254" tIns="254" rIns="254" bIns="254" rtlCol="0" anchor="t">
             <a:normAutofit/>
           </a:bodyPr>
           <a:lstStyle/>
@@ -6258,7 +6339,7 @@
               <a:buNone/>
             </a:pPr>
             <a:r>
-              <a:rPr lang="en-US" sz="1550" dirty="0">
+              <a:rPr lang="en-US" sz="1320" dirty="0">
                 <a:solidFill>
                   <a:srgbClr val="17364A"/>
                 </a:solidFill>
@@ -6268,7 +6349,7 @@
               </a:rPr>
               <a:t>Time-series and anomaly detection methods can support predictive dashboards, syndromic surveillance,.</a:t>
             </a:r>
-            <a:endParaRPr lang="en-US" sz="1550" dirty="0"/>
+            <a:endParaRPr lang="en-US" sz="1320" dirty="0"/>
           </a:p>
         </p:txBody>
       </p:sp>
@@ -6356,13 +6437,16 @@
           <a:ln/>
         </p:spPr>
         <p:txBody>
-          <a:bodyPr wrap="square" lIns="254" tIns="254" rIns="254" bIns="254" rtlCol="0" anchor="t">
+          <a:bodyPr wrap="square" lIns="508" tIns="508" rIns="508" bIns="508" rtlCol="0" anchor="t">
             <a:normAutofit/>
           </a:bodyPr>
           <a:lstStyle/>
           <a:p>
-            <a:r>
-              <a:rPr lang="en-US" sz="1380" dirty="0">
+            <a:pPr indent="0" marL="0">
+              <a:buNone/>
+            </a:pPr>
+            <a:r>
+              <a:rPr lang="en-US" sz="1220" dirty="0">
                 <a:solidFill>
                   <a:srgbClr val="17364A"/>
                 </a:solidFill>
@@ -6370,13 +6454,16 @@
                 <a:ea typeface="Aptos" pitchFamily="34" charset="-122"/>
                 <a:cs typeface="Aptos" pitchFamily="34" charset="-120"/>
               </a:rPr>
-              <a:t>Time-series and anomaly detection methods can support predictive dashboards, syndromic.</a:t>
-            </a:r>
-            <a:endParaRPr lang="en-US" sz="1380" dirty="0"/>
-          </a:p>
-          <a:p>
-            <a:r>
-              <a:rPr lang="en-US" sz="1380" dirty="0">
+              <a:t>Time-series and anomaly detection methods can support predictive.</a:t>
+            </a:r>
+            <a:endParaRPr lang="en-US" sz="1220" dirty="0"/>
+          </a:p>
+          <a:p>
+            <a:pPr indent="0" marL="0">
+              <a:buNone/>
+            </a:pPr>
+            <a:r>
+              <a:rPr lang="en-US" sz="1220" dirty="0">
                 <a:solidFill>
                   <a:srgbClr val="17364A"/>
                 </a:solidFill>
@@ -6384,13 +6471,16 @@
                 <a:ea typeface="Aptos" pitchFamily="34" charset="-122"/>
                 <a:cs typeface="Aptos" pitchFamily="34" charset="-120"/>
               </a:rPr>
-              <a:t>Agentic workflows may route alerts or create tasks, but those actions should be limited to.</a:t>
-            </a:r>
-            <a:endParaRPr lang="en-US" sz="1380" dirty="0"/>
-          </a:p>
-          <a:p>
-            <a:r>
-              <a:rPr lang="en-US" sz="1380" dirty="0">
+              <a:t>Agentic workflows may route alerts or create tasks, but those.</a:t>
+            </a:r>
+            <a:endParaRPr lang="en-US" sz="1220" dirty="0"/>
+          </a:p>
+          <a:p>
+            <a:pPr indent="0" marL="0">
+              <a:buNone/>
+            </a:pPr>
+            <a:r>
+              <a:rPr lang="en-US" sz="1220" dirty="0">
                 <a:solidFill>
                   <a:srgbClr val="17364A"/>
                 </a:solidFill>
@@ -6398,9 +6488,9 @@
                 <a:ea typeface="Aptos" pitchFamily="34" charset="-122"/>
                 <a:cs typeface="Aptos" pitchFamily="34" charset="-120"/>
               </a:rPr>
-              <a:t>The best AI-supported surveillance workflows combine automation with epidemiologic judgment.</a:t>
-            </a:r>
-            <a:endParaRPr lang="en-US" sz="1380" dirty="0"/>
+              <a:t>The best AI-supported surveillance workflows combine automation.</a:t>
+            </a:r>
+            <a:endParaRPr lang="en-US" sz="1220" dirty="0"/>
           </a:p>
         </p:txBody>
       </p:sp>
@@ -6478,17 +6568,17 @@
         </p:nvSpPr>
         <p:spPr>
           <a:xfrm>
-            <a:off x="7799832" y="5001768"/>
-            <a:ext cx="3145536" cy="502920"/>
-          </a:xfrm>
-          <a:prstGeom prst="rect">
-            <a:avLst/>
-          </a:prstGeom>
-          <a:noFill/>
-          <a:ln/>
-        </p:spPr>
-        <p:txBody>
-          <a:bodyPr wrap="square" lIns="0" tIns="0" rIns="0" bIns="0" rtlCol="0" anchor="t">
+            <a:off x="7799832" y="4974336"/>
+            <a:ext cx="3145536" cy="576072"/>
+          </a:xfrm>
+          <a:prstGeom prst="rect">
+            <a:avLst/>
+          </a:prstGeom>
+          <a:noFill/>
+          <a:ln/>
+        </p:spPr>
+        <p:txBody>
+          <a:bodyPr wrap="square" lIns="254" tIns="254" rIns="254" bIns="254" rtlCol="0" anchor="t">
             <a:normAutofit/>
           </a:bodyPr>
           <a:lstStyle/>
@@ -6497,7 +6587,7 @@
               <a:buNone/>
             </a:pPr>
             <a:r>
-              <a:rPr lang="en-US" sz="1550" dirty="0">
+              <a:rPr lang="en-US" sz="1320" dirty="0">
                 <a:solidFill>
                   <a:srgbClr val="17364A"/>
                 </a:solidFill>
@@ -6505,9 +6595,9 @@
                 <a:ea typeface="Aptos" pitchFamily="34" charset="-122"/>
                 <a:cs typeface="Aptos" pitchFamily="34" charset="-120"/>
               </a:rPr>
-              <a:t>Use the concept to clarify workflow changes, dependencies, staffing, procurement requirements, training needs, and implementation checkpoints.</a:t>
-            </a:r>
-            <a:endParaRPr lang="en-US" sz="1550" dirty="0"/>
+              <a:t>Use the concept to clarify workflow changes, dependencies, staffing, procurement requirements, training needs, and.</a:t>
+            </a:r>
+            <a:endParaRPr lang="en-US" sz="1320" dirty="0"/>
           </a:p>
         </p:txBody>
       </p:sp>
@@ -6808,49 +6898,58 @@
           <a:ln/>
         </p:spPr>
         <p:txBody>
-          <a:bodyPr wrap="square" lIns="635" tIns="635" rIns="635" bIns="635" rtlCol="0" anchor="t">
+          <a:bodyPr wrap="square" lIns="1016" tIns="1016" rIns="1016" bIns="1016" rtlCol="0" anchor="t">
             <a:normAutofit/>
           </a:bodyPr>
           <a:lstStyle/>
           <a:p>
+            <a:pPr indent="0" marL="0">
+              <a:buNone/>
+            </a:pPr>
             <a:r>
               <a:rPr lang="en-US" sz="2100" dirty="0">
                 <a:solidFill>
-                  <a:srgbClr val="17364A"/>
-                </a:solidFill>
-                <a:latin typeface="Aptos" pitchFamily="34" charset="0"/>
-                <a:ea typeface="Aptos" pitchFamily="34" charset="-122"/>
-                <a:cs typeface="Aptos" pitchFamily="34" charset="-120"/>
-              </a:rPr>
-              <a:t>What time-series data stream would benefit from automated signal review?</a:t>
+                  <a:srgbClr val="003A63"/>
+                </a:solidFill>
+                <a:latin typeface="Aptos" pitchFamily="34" charset="0"/>
+                <a:ea typeface="Aptos" pitchFamily="34" charset="-122"/>
+                <a:cs typeface="Aptos" pitchFamily="34" charset="-120"/>
+              </a:rPr>
+              <a:t>• What time-series data stream would benefit from automated signal review?</a:t>
             </a:r>
             <a:endParaRPr lang="en-US" sz="2100" dirty="0"/>
           </a:p>
           <a:p>
+            <a:pPr indent="0" marL="0">
+              <a:buNone/>
+            </a:pPr>
             <a:r>
               <a:rPr lang="en-US" sz="2100" dirty="0">
                 <a:solidFill>
-                  <a:srgbClr val="17364A"/>
-                </a:solidFill>
-                <a:latin typeface="Aptos" pitchFamily="34" charset="0"/>
-                <a:ea typeface="Aptos" pitchFamily="34" charset="-122"/>
-                <a:cs typeface="Aptos" pitchFamily="34" charset="-120"/>
-              </a:rPr>
-              <a:t>What baseline is appropriate for the condition, data source, and decision?</a:t>
+                  <a:srgbClr val="003A63"/>
+                </a:solidFill>
+                <a:latin typeface="Aptos" pitchFamily="34" charset="0"/>
+                <a:ea typeface="Aptos" pitchFamily="34" charset="-122"/>
+                <a:cs typeface="Aptos" pitchFamily="34" charset="-120"/>
+              </a:rPr>
+              <a:t>• What baseline is appropriate for the condition, data source, and decision?</a:t>
             </a:r>
             <a:endParaRPr lang="en-US" sz="2100" dirty="0"/>
           </a:p>
           <a:p>
+            <a:pPr indent="0" marL="0">
+              <a:buNone/>
+            </a:pPr>
             <a:r>
               <a:rPr lang="en-US" sz="2100" dirty="0">
                 <a:solidFill>
-                  <a:srgbClr val="17364A"/>
-                </a:solidFill>
-                <a:latin typeface="Aptos" pitchFamily="34" charset="0"/>
-                <a:ea typeface="Aptos" pitchFamily="34" charset="-122"/>
-                <a:cs typeface="Aptos" pitchFamily="34" charset="-120"/>
-              </a:rPr>
-              <a:t>Which reporting artifacts could create false signals?</a:t>
+                  <a:srgbClr val="003A63"/>
+                </a:solidFill>
+                <a:latin typeface="Aptos" pitchFamily="34" charset="0"/>
+                <a:ea typeface="Aptos" pitchFamily="34" charset="-122"/>
+                <a:cs typeface="Aptos" pitchFamily="34" charset="-120"/>
+              </a:rPr>
+              <a:t>• Which reporting artifacts could create false signals?</a:t>
             </a:r>
             <a:endParaRPr lang="en-US" sz="2100" dirty="0"/>
           </a:p>
@@ -6930,17 +7029,17 @@
         </p:nvSpPr>
         <p:spPr>
           <a:xfrm>
-            <a:off x="7799832" y="1828800"/>
-            <a:ext cx="3145536" cy="685800"/>
-          </a:xfrm>
-          <a:prstGeom prst="rect">
-            <a:avLst/>
-          </a:prstGeom>
-          <a:noFill/>
-          <a:ln/>
-        </p:spPr>
-        <p:txBody>
-          <a:bodyPr wrap="square" lIns="0" tIns="0" rIns="0" bIns="0" rtlCol="0" anchor="t">
+            <a:off x="7799832" y="1801368"/>
+            <a:ext cx="3145536" cy="758952"/>
+          </a:xfrm>
+          <a:prstGeom prst="rect">
+            <a:avLst/>
+          </a:prstGeom>
+          <a:noFill/>
+          <a:ln/>
+        </p:spPr>
+        <p:txBody>
+          <a:bodyPr wrap="square" lIns="254" tIns="254" rIns="254" bIns="254" rtlCol="0" anchor="t">
             <a:normAutofit/>
           </a:bodyPr>
           <a:lstStyle/>
@@ -6949,7 +7048,7 @@
               <a:buNone/>
             </a:pPr>
             <a:r>
-              <a:rPr lang="en-US" sz="1550" dirty="0">
+              <a:rPr lang="en-US" sz="1320" dirty="0">
                 <a:solidFill>
                   <a:srgbClr val="17364A"/>
                 </a:solidFill>
@@ -6959,7 +7058,7 @@
               </a:rPr>
               <a:t>What time-series data stream would benefit from automated signal review?</a:t>
             </a:r>
-            <a:endParaRPr lang="en-US" sz="1550" dirty="0"/>
+            <a:endParaRPr lang="en-US" sz="1320" dirty="0"/>
           </a:p>
         </p:txBody>
       </p:sp>
@@ -7047,13 +7146,16 @@
           <a:ln/>
         </p:spPr>
         <p:txBody>
-          <a:bodyPr wrap="square" lIns="254" tIns="254" rIns="254" bIns="254" rtlCol="0" anchor="t">
+          <a:bodyPr wrap="square" lIns="508" tIns="508" rIns="508" bIns="508" rtlCol="0" anchor="t">
             <a:normAutofit/>
           </a:bodyPr>
           <a:lstStyle/>
           <a:p>
-            <a:r>
-              <a:rPr lang="en-US" sz="1380" dirty="0">
+            <a:pPr indent="0" marL="0">
+              <a:buNone/>
+            </a:pPr>
+            <a:r>
+              <a:rPr lang="en-US" sz="1220" dirty="0">
                 <a:solidFill>
                   <a:srgbClr val="17364A"/>
                 </a:solidFill>
@@ -7061,13 +7163,16 @@
                 <a:ea typeface="Aptos" pitchFamily="34" charset="-122"/>
                 <a:cs typeface="Aptos" pitchFamily="34" charset="-120"/>
               </a:rPr>
-              <a:t>What time-series data stream would benefit from automated signal review?</a:t>
-            </a:r>
-            <a:endParaRPr lang="en-US" sz="1380" dirty="0"/>
-          </a:p>
-          <a:p>
-            <a:r>
-              <a:rPr lang="en-US" sz="1380" dirty="0">
+              <a:t>What time-series data stream would benefit from automated signal.</a:t>
+            </a:r>
+            <a:endParaRPr lang="en-US" sz="1220" dirty="0"/>
+          </a:p>
+          <a:p>
+            <a:pPr indent="0" marL="0">
+              <a:buNone/>
+            </a:pPr>
+            <a:r>
+              <a:rPr lang="en-US" sz="1220" dirty="0">
                 <a:solidFill>
                   <a:srgbClr val="17364A"/>
                 </a:solidFill>
@@ -7075,13 +7180,16 @@
                 <a:ea typeface="Aptos" pitchFamily="34" charset="-122"/>
                 <a:cs typeface="Aptos" pitchFamily="34" charset="-120"/>
               </a:rPr>
-              <a:t>What baseline is appropriate for the condition, data source, and decision?</a:t>
-            </a:r>
-            <a:endParaRPr lang="en-US" sz="1380" dirty="0"/>
-          </a:p>
-          <a:p>
-            <a:r>
-              <a:rPr lang="en-US" sz="1380" dirty="0">
+              <a:t>What baseline is appropriate for the condition, data source, and.</a:t>
+            </a:r>
+            <a:endParaRPr lang="en-US" sz="1220" dirty="0"/>
+          </a:p>
+          <a:p>
+            <a:pPr indent="0" marL="0">
+              <a:buNone/>
+            </a:pPr>
+            <a:r>
+              <a:rPr lang="en-US" sz="1220" dirty="0">
                 <a:solidFill>
                   <a:srgbClr val="17364A"/>
                 </a:solidFill>
@@ -7091,7 +7199,7 @@
               </a:rPr>
               <a:t>Which reporting artifacts could create false signals?</a:t>
             </a:r>
-            <a:endParaRPr lang="en-US" sz="1380" dirty="0"/>
+            <a:endParaRPr lang="en-US" sz="1220" dirty="0"/>
           </a:p>
         </p:txBody>
       </p:sp>
@@ -7169,17 +7277,17 @@
         </p:nvSpPr>
         <p:spPr>
           <a:xfrm>
-            <a:off x="7799832" y="5001768"/>
-            <a:ext cx="3145536" cy="502920"/>
-          </a:xfrm>
-          <a:prstGeom prst="rect">
-            <a:avLst/>
-          </a:prstGeom>
-          <a:noFill/>
-          <a:ln/>
-        </p:spPr>
-        <p:txBody>
-          <a:bodyPr wrap="square" lIns="0" tIns="0" rIns="0" bIns="0" rtlCol="0" anchor="t">
+            <a:off x="7799832" y="4974336"/>
+            <a:ext cx="3145536" cy="576072"/>
+          </a:xfrm>
+          <a:prstGeom prst="rect">
+            <a:avLst/>
+          </a:prstGeom>
+          <a:noFill/>
+          <a:ln/>
+        </p:spPr>
+        <p:txBody>
+          <a:bodyPr wrap="square" lIns="254" tIns="254" rIns="254" bIns="254" rtlCol="0" anchor="t">
             <a:normAutofit/>
           </a:bodyPr>
           <a:lstStyle/>
@@ -7188,7 +7296,7 @@
               <a:buNone/>
             </a:pPr>
             <a:r>
-              <a:rPr lang="en-US" sz="1550" dirty="0">
+              <a:rPr lang="en-US" sz="1320" dirty="0">
                 <a:solidFill>
                   <a:srgbClr val="17364A"/>
                 </a:solidFill>
@@ -7196,9 +7304,9 @@
                 <a:ea typeface="Aptos" pitchFamily="34" charset="-122"/>
                 <a:cs typeface="Aptos" pitchFamily="34" charset="-120"/>
               </a:rPr>
-              <a:t>Connect the concept to public health purpose, responsible use, required safeguards, documentation, and the next action a department should take.</a:t>
-            </a:r>
-            <a:endParaRPr lang="en-US" sz="1550" dirty="0"/>
+              <a:t>Connect the concept to public health purpose, responsible use, required safeguards, documentation, and the next action a.</a:t>
+            </a:r>
+            <a:endParaRPr lang="en-US" sz="1320" dirty="0"/>
           </a:p>
         </p:txBody>
       </p:sp>
@@ -7499,35 +7607,41 @@
           <a:ln/>
         </p:spPr>
         <p:txBody>
-          <a:bodyPr wrap="square" lIns="635" tIns="635" rIns="635" bIns="635" rtlCol="0" anchor="t">
+          <a:bodyPr wrap="square" lIns="1016" tIns="1016" rIns="1016" bIns="1016" rtlCol="0" anchor="t">
             <a:normAutofit/>
           </a:bodyPr>
           <a:lstStyle/>
           <a:p>
+            <a:pPr indent="0" marL="0">
+              <a:buNone/>
+            </a:pPr>
             <a:r>
               <a:rPr lang="en-US" sz="2100" dirty="0">
                 <a:solidFill>
-                  <a:srgbClr val="17364A"/>
-                </a:solidFill>
-                <a:latin typeface="Aptos" pitchFamily="34" charset="0"/>
-                <a:ea typeface="Aptos" pitchFamily="34" charset="-122"/>
-                <a:cs typeface="Aptos" pitchFamily="34" charset="-120"/>
-              </a:rPr>
-              <a:t>What threshold balances early detection and alert fatigue?</a:t>
+                  <a:srgbClr val="003A63"/>
+                </a:solidFill>
+                <a:latin typeface="Aptos" pitchFamily="34" charset="0"/>
+                <a:ea typeface="Aptos" pitchFamily="34" charset="-122"/>
+                <a:cs typeface="Aptos" pitchFamily="34" charset="-120"/>
+              </a:rPr>
+              <a:t>• What threshold balances early detection and alert fatigue?</a:t>
             </a:r>
             <a:endParaRPr lang="en-US" sz="2100" dirty="0"/>
           </a:p>
           <a:p>
+            <a:pPr indent="0" marL="0">
+              <a:buNone/>
+            </a:pPr>
             <a:r>
               <a:rPr lang="en-US" sz="2100" dirty="0">
                 <a:solidFill>
-                  <a:srgbClr val="17364A"/>
-                </a:solidFill>
-                <a:latin typeface="Aptos" pitchFamily="34" charset="0"/>
-                <a:ea typeface="Aptos" pitchFamily="34" charset="-122"/>
-                <a:cs typeface="Aptos" pitchFamily="34" charset="-120"/>
-              </a:rPr>
-              <a:t>How will staff document review, decisions, and lessons learned?</a:t>
+                  <a:srgbClr val="003A63"/>
+                </a:solidFill>
+                <a:latin typeface="Aptos" pitchFamily="34" charset="0"/>
+                <a:ea typeface="Aptos" pitchFamily="34" charset="-122"/>
+                <a:cs typeface="Aptos" pitchFamily="34" charset="-120"/>
+              </a:rPr>
+              <a:t>• How will staff document review, decisions, and lessons learned?</a:t>
             </a:r>
             <a:endParaRPr lang="en-US" sz="2100" dirty="0"/>
           </a:p>
@@ -7607,17 +7721,17 @@
         </p:nvSpPr>
         <p:spPr>
           <a:xfrm>
-            <a:off x="7799832" y="1828800"/>
-            <a:ext cx="3145536" cy="685800"/>
-          </a:xfrm>
-          <a:prstGeom prst="rect">
-            <a:avLst/>
-          </a:prstGeom>
-          <a:noFill/>
-          <a:ln/>
-        </p:spPr>
-        <p:txBody>
-          <a:bodyPr wrap="square" lIns="0" tIns="0" rIns="0" bIns="0" rtlCol="0" anchor="t">
+            <a:off x="7799832" y="1801368"/>
+            <a:ext cx="3145536" cy="758952"/>
+          </a:xfrm>
+          <a:prstGeom prst="rect">
+            <a:avLst/>
+          </a:prstGeom>
+          <a:noFill/>
+          <a:ln/>
+        </p:spPr>
+        <p:txBody>
+          <a:bodyPr wrap="square" lIns="254" tIns="254" rIns="254" bIns="254" rtlCol="0" anchor="t">
             <a:normAutofit/>
           </a:bodyPr>
           <a:lstStyle/>
@@ -7626,7 +7740,7 @@
               <a:buNone/>
             </a:pPr>
             <a:r>
-              <a:rPr lang="en-US" sz="1550" dirty="0">
+              <a:rPr lang="en-US" sz="1320" dirty="0">
                 <a:solidFill>
                   <a:srgbClr val="17364A"/>
                 </a:solidFill>
@@ -7636,7 +7750,7 @@
               </a:rPr>
               <a:t>What threshold balances early detection and alert fatigue?</a:t>
             </a:r>
-            <a:endParaRPr lang="en-US" sz="1550" dirty="0"/>
+            <a:endParaRPr lang="en-US" sz="1320" dirty="0"/>
           </a:p>
         </p:txBody>
       </p:sp>
@@ -7724,13 +7838,16 @@
           <a:ln/>
         </p:spPr>
         <p:txBody>
-          <a:bodyPr wrap="square" lIns="254" tIns="254" rIns="254" bIns="254" rtlCol="0" anchor="t">
+          <a:bodyPr wrap="square" lIns="508" tIns="508" rIns="508" bIns="508" rtlCol="0" anchor="t">
             <a:normAutofit/>
           </a:bodyPr>
           <a:lstStyle/>
           <a:p>
-            <a:r>
-              <a:rPr lang="en-US" sz="1380" dirty="0">
+            <a:pPr indent="0" marL="0">
+              <a:buNone/>
+            </a:pPr>
+            <a:r>
+              <a:rPr lang="en-US" sz="1220" dirty="0">
                 <a:solidFill>
                   <a:srgbClr val="17364A"/>
                 </a:solidFill>
@@ -7740,11 +7857,14 @@
               </a:rPr>
               <a:t>What threshold balances early detection and alert fatigue?</a:t>
             </a:r>
-            <a:endParaRPr lang="en-US" sz="1380" dirty="0"/>
-          </a:p>
-          <a:p>
-            <a:r>
-              <a:rPr lang="en-US" sz="1380" dirty="0">
+            <a:endParaRPr lang="en-US" sz="1220" dirty="0"/>
+          </a:p>
+          <a:p>
+            <a:pPr indent="0" marL="0">
+              <a:buNone/>
+            </a:pPr>
+            <a:r>
+              <a:rPr lang="en-US" sz="1220" dirty="0">
                 <a:solidFill>
                   <a:srgbClr val="17364A"/>
                 </a:solidFill>
@@ -7754,7 +7874,7 @@
               </a:rPr>
               <a:t>How will staff document review, decisions, and lessons learned?</a:t>
             </a:r>
-            <a:endParaRPr lang="en-US" sz="1380" dirty="0"/>
+            <a:endParaRPr lang="en-US" sz="1220" dirty="0"/>
           </a:p>
         </p:txBody>
       </p:sp>
@@ -7832,17 +7952,17 @@
         </p:nvSpPr>
         <p:spPr>
           <a:xfrm>
-            <a:off x="7799832" y="5001768"/>
-            <a:ext cx="3145536" cy="502920"/>
-          </a:xfrm>
-          <a:prstGeom prst="rect">
-            <a:avLst/>
-          </a:prstGeom>
-          <a:noFill/>
-          <a:ln/>
-        </p:spPr>
-        <p:txBody>
-          <a:bodyPr wrap="square" lIns="0" tIns="0" rIns="0" bIns="0" rtlCol="0" anchor="t">
+            <a:off x="7799832" y="4974336"/>
+            <a:ext cx="3145536" cy="576072"/>
+          </a:xfrm>
+          <a:prstGeom prst="rect">
+            <a:avLst/>
+          </a:prstGeom>
+          <a:noFill/>
+          <a:ln/>
+        </p:spPr>
+        <p:txBody>
+          <a:bodyPr wrap="square" lIns="254" tIns="254" rIns="254" bIns="254" rtlCol="0" anchor="t">
             <a:normAutofit/>
           </a:bodyPr>
           <a:lstStyle/>
@@ -7851,7 +7971,7 @@
               <a:buNone/>
             </a:pPr>
             <a:r>
-              <a:rPr lang="en-US" sz="1550" dirty="0">
+              <a:rPr lang="en-US" sz="1320" dirty="0">
                 <a:solidFill>
                   <a:srgbClr val="17364A"/>
                 </a:solidFill>
@@ -7859,9 +7979,9 @@
                 <a:ea typeface="Aptos" pitchFamily="34" charset="-122"/>
                 <a:cs typeface="Aptos" pitchFamily="34" charset="-120"/>
               </a:rPr>
-              <a:t>Connect the concept to public health purpose, responsible use, required safeguards, documentation, and the next action a department should take.</a:t>
-            </a:r>
-            <a:endParaRPr lang="en-US" sz="1550" dirty="0"/>
+              <a:t>Connect the concept to public health purpose, responsible use, required safeguards, documentation, and the next action a.</a:t>
+            </a:r>
+            <a:endParaRPr lang="en-US" sz="1320" dirty="0"/>
           </a:p>
         </p:txBody>
       </p:sp>
@@ -8162,49 +8282,58 @@
           <a:ln/>
         </p:spPr>
         <p:txBody>
-          <a:bodyPr wrap="square" lIns="635" tIns="635" rIns="635" bIns="635" rtlCol="0" anchor="t">
+          <a:bodyPr wrap="square" lIns="1016" tIns="1016" rIns="1016" bIns="1016" rtlCol="0" anchor="t">
             <a:normAutofit/>
           </a:bodyPr>
           <a:lstStyle/>
           <a:p>
+            <a:pPr indent="0" marL="0">
+              <a:buNone/>
+            </a:pPr>
             <a:r>
               <a:rPr lang="en-US" sz="2100" dirty="0">
                 <a:solidFill>
-                  <a:srgbClr val="17364A"/>
-                </a:solidFill>
-                <a:latin typeface="Aptos" pitchFamily="34" charset="0"/>
-                <a:ea typeface="Aptos" pitchFamily="34" charset="-122"/>
-                <a:cs typeface="Aptos" pitchFamily="34" charset="-120"/>
-              </a:rPr>
-              <a:t>Create an anomaly detection review plan for one public health data stream.</a:t>
+                  <a:srgbClr val="003A63"/>
+                </a:solidFill>
+                <a:latin typeface="Aptos" pitchFamily="34" charset="0"/>
+                <a:ea typeface="Aptos" pitchFamily="34" charset="-122"/>
+                <a:cs typeface="Aptos" pitchFamily="34" charset="-120"/>
+              </a:rPr>
+              <a:t>• Create an anomaly detection review plan for one public health data stream.</a:t>
             </a:r>
             <a:endParaRPr lang="en-US" sz="2100" dirty="0"/>
           </a:p>
           <a:p>
+            <a:pPr indent="0" marL="0">
+              <a:buNone/>
+            </a:pPr>
             <a:r>
               <a:rPr lang="en-US" sz="2100" dirty="0">
                 <a:solidFill>
-                  <a:srgbClr val="17364A"/>
-                </a:solidFill>
-                <a:latin typeface="Aptos" pitchFamily="34" charset="0"/>
-                <a:ea typeface="Aptos" pitchFamily="34" charset="-122"/>
-                <a:cs typeface="Aptos" pitchFamily="34" charset="-120"/>
-              </a:rPr>
-              <a:t>Include the monitored indicator, data source, update frequency, baseline approach, known reporting.</a:t>
+                  <a:srgbClr val="003A63"/>
+                </a:solidFill>
+                <a:latin typeface="Aptos" pitchFamily="34" charset="0"/>
+                <a:ea typeface="Aptos" pitchFamily="34" charset="-122"/>
+                <a:cs typeface="Aptos" pitchFamily="34" charset="-120"/>
+              </a:rPr>
+              <a:t>• Include the monitored indicator, data source, update frequency, baseline approach, known.</a:t>
             </a:r>
             <a:endParaRPr lang="en-US" sz="2100" dirty="0"/>
           </a:p>
           <a:p>
+            <a:pPr indent="0" marL="0">
+              <a:buNone/>
+            </a:pPr>
             <a:r>
               <a:rPr lang="en-US" sz="2100" dirty="0">
                 <a:solidFill>
-                  <a:srgbClr val="17364A"/>
-                </a:solidFill>
-                <a:latin typeface="Aptos" pitchFamily="34" charset="0"/>
-                <a:ea typeface="Aptos" pitchFamily="34" charset="-122"/>
-                <a:cs typeface="Aptos" pitchFamily="34" charset="-120"/>
-              </a:rPr>
-              <a:t>The plan should identify how staff will distinguish statistical anomalies from data quality issues and.</a:t>
+                  <a:srgbClr val="003A63"/>
+                </a:solidFill>
+                <a:latin typeface="Aptos" pitchFamily="34" charset="0"/>
+                <a:ea typeface="Aptos" pitchFamily="34" charset="-122"/>
+                <a:cs typeface="Aptos" pitchFamily="34" charset="-120"/>
+              </a:rPr>
+              <a:t>• The plan should identify how staff will distinguish statistical anomalies from data quality.</a:t>
             </a:r>
             <a:endParaRPr lang="en-US" sz="2100" dirty="0"/>
           </a:p>
@@ -8284,17 +8413,17 @@
         </p:nvSpPr>
         <p:spPr>
           <a:xfrm>
-            <a:off x="7799832" y="1828800"/>
-            <a:ext cx="3145536" cy="685800"/>
-          </a:xfrm>
-          <a:prstGeom prst="rect">
-            <a:avLst/>
-          </a:prstGeom>
-          <a:noFill/>
-          <a:ln/>
-        </p:spPr>
-        <p:txBody>
-          <a:bodyPr wrap="square" lIns="0" tIns="0" rIns="0" bIns="0" rtlCol="0" anchor="t">
+            <a:off x="7799832" y="1801368"/>
+            <a:ext cx="3145536" cy="758952"/>
+          </a:xfrm>
+          <a:prstGeom prst="rect">
+            <a:avLst/>
+          </a:prstGeom>
+          <a:noFill/>
+          <a:ln/>
+        </p:spPr>
+        <p:txBody>
+          <a:bodyPr wrap="square" lIns="254" tIns="254" rIns="254" bIns="254" rtlCol="0" anchor="t">
             <a:normAutofit/>
           </a:bodyPr>
           <a:lstStyle/>
@@ -8303,7 +8432,7 @@
               <a:buNone/>
             </a:pPr>
             <a:r>
-              <a:rPr lang="en-US" sz="1550" dirty="0">
+              <a:rPr lang="en-US" sz="1320" dirty="0">
                 <a:solidFill>
                   <a:srgbClr val="17364A"/>
                 </a:solidFill>
@@ -8313,7 +8442,7 @@
               </a:rPr>
               <a:t>Create an anomaly detection review plan for one public health data stream.</a:t>
             </a:r>
-            <a:endParaRPr lang="en-US" sz="1550" dirty="0"/>
+            <a:endParaRPr lang="en-US" sz="1320" dirty="0"/>
           </a:p>
         </p:txBody>
       </p:sp>
@@ -8401,13 +8530,16 @@
           <a:ln/>
         </p:spPr>
         <p:txBody>
-          <a:bodyPr wrap="square" lIns="254" tIns="254" rIns="254" bIns="254" rtlCol="0" anchor="t">
+          <a:bodyPr wrap="square" lIns="508" tIns="508" rIns="508" bIns="508" rtlCol="0" anchor="t">
             <a:normAutofit/>
           </a:bodyPr>
           <a:lstStyle/>
           <a:p>
-            <a:r>
-              <a:rPr lang="en-US" sz="1380" dirty="0">
+            <a:pPr indent="0" marL="0">
+              <a:buNone/>
+            </a:pPr>
+            <a:r>
+              <a:rPr lang="en-US" sz="1220" dirty="0">
                 <a:solidFill>
                   <a:srgbClr val="17364A"/>
                 </a:solidFill>
@@ -8415,13 +8547,16 @@
                 <a:ea typeface="Aptos" pitchFamily="34" charset="-122"/>
                 <a:cs typeface="Aptos" pitchFamily="34" charset="-120"/>
               </a:rPr>
-              <a:t>Include the monitored indicator, data source, update frequency, baseline approach, known.</a:t>
-            </a:r>
-            <a:endParaRPr lang="en-US" sz="1380" dirty="0"/>
-          </a:p>
-          <a:p>
-            <a:r>
-              <a:rPr lang="en-US" sz="1380" dirty="0">
+              <a:t>Include the monitored indicator, data source, update frequency,.</a:t>
+            </a:r>
+            <a:endParaRPr lang="en-US" sz="1220" dirty="0"/>
+          </a:p>
+          <a:p>
+            <a:pPr indent="0" marL="0">
+              <a:buNone/>
+            </a:pPr>
+            <a:r>
+              <a:rPr lang="en-US" sz="1220" dirty="0">
                 <a:solidFill>
                   <a:srgbClr val="17364A"/>
                 </a:solidFill>
@@ -8429,9 +8564,9 @@
                 <a:ea typeface="Aptos" pitchFamily="34" charset="-122"/>
                 <a:cs typeface="Aptos" pitchFamily="34" charset="-120"/>
               </a:rPr>
-              <a:t>The plan should identify how staff will distinguish statistical anomalies from data.</a:t>
-            </a:r>
-            <a:endParaRPr lang="en-US" sz="1380" dirty="0"/>
+              <a:t>The plan should identify how staff will distinguish statistical.</a:t>
+            </a:r>
+            <a:endParaRPr lang="en-US" sz="1220" dirty="0"/>
           </a:p>
         </p:txBody>
       </p:sp>
@@ -8509,17 +8644,17 @@
         </p:nvSpPr>
         <p:spPr>
           <a:xfrm>
-            <a:off x="7799832" y="5001768"/>
-            <a:ext cx="3145536" cy="502920"/>
-          </a:xfrm>
-          <a:prstGeom prst="rect">
-            <a:avLst/>
-          </a:prstGeom>
-          <a:noFill/>
-          <a:ln/>
-        </p:spPr>
-        <p:txBody>
-          <a:bodyPr wrap="square" lIns="0" tIns="0" rIns="0" bIns="0" rtlCol="0" anchor="t">
+            <a:off x="7799832" y="4974336"/>
+            <a:ext cx="3145536" cy="576072"/>
+          </a:xfrm>
+          <a:prstGeom prst="rect">
+            <a:avLst/>
+          </a:prstGeom>
+          <a:noFill/>
+          <a:ln/>
+        </p:spPr>
+        <p:txBody>
+          <a:bodyPr wrap="square" lIns="254" tIns="254" rIns="254" bIns="254" rtlCol="0" anchor="t">
             <a:normAutofit/>
           </a:bodyPr>
           <a:lstStyle/>
@@ -8528,7 +8663,7 @@
               <a:buNone/>
             </a:pPr>
             <a:r>
-              <a:rPr lang="en-US" sz="1550" dirty="0">
+              <a:rPr lang="en-US" sz="1320" dirty="0">
                 <a:solidFill>
                   <a:srgbClr val="17364A"/>
                 </a:solidFill>
@@ -8536,9 +8671,9 @@
                 <a:ea typeface="Aptos" pitchFamily="34" charset="-122"/>
                 <a:cs typeface="Aptos" pitchFamily="34" charset="-120"/>
               </a:rPr>
-              <a:t>Use the assignment to test whether you can explain the concept, apply it to a realistic public health situation, and identify what would need review before the work moves forward.</a:t>
-            </a:r>
-            <a:endParaRPr lang="en-US" sz="1550" dirty="0"/>
+              <a:t>Use the assignment to test whether you can explain the concept, apply it to a realistic public health situation, and.</a:t>
+            </a:r>
+            <a:endParaRPr lang="en-US" sz="1320" dirty="0"/>
           </a:p>
         </p:txBody>
       </p:sp>
@@ -8839,49 +8974,58 @@
           <a:ln/>
         </p:spPr>
         <p:txBody>
-          <a:bodyPr wrap="square" lIns="635" tIns="635" rIns="635" bIns="635" rtlCol="0" anchor="t">
+          <a:bodyPr wrap="square" lIns="1016" tIns="1016" rIns="1016" bIns="1016" rtlCol="0" anchor="t">
             <a:normAutofit/>
           </a:bodyPr>
           <a:lstStyle/>
           <a:p>
+            <a:pPr indent="0" marL="0">
+              <a:buNone/>
+            </a:pPr>
             <a:r>
               <a:rPr lang="en-US" sz="2100" dirty="0">
                 <a:solidFill>
-                  <a:srgbClr val="17364A"/>
-                </a:solidFill>
-                <a:latin typeface="Aptos" pitchFamily="34" charset="0"/>
-                <a:ea typeface="Aptos" pitchFamily="34" charset="-122"/>
-                <a:cs typeface="Aptos" pitchFamily="34" charset="-120"/>
-              </a:rPr>
-              <a:t>Anomaly detection review plan</a:t>
+                  <a:srgbClr val="003A63"/>
+                </a:solidFill>
+                <a:latin typeface="Aptos" pitchFamily="34" charset="0"/>
+                <a:ea typeface="Aptos" pitchFamily="34" charset="-122"/>
+                <a:cs typeface="Aptos" pitchFamily="34" charset="-120"/>
+              </a:rPr>
+              <a:t>• Anomaly detection review plan</a:t>
             </a:r>
             <a:endParaRPr lang="en-US" sz="2100" dirty="0"/>
           </a:p>
           <a:p>
+            <a:pPr indent="0" marL="0">
+              <a:buNone/>
+            </a:pPr>
             <a:r>
               <a:rPr lang="en-US" sz="2100" dirty="0">
                 <a:solidFill>
-                  <a:srgbClr val="17364A"/>
-                </a:solidFill>
-                <a:latin typeface="Aptos" pitchFamily="34" charset="0"/>
-                <a:ea typeface="Aptos" pitchFamily="34" charset="-122"/>
-                <a:cs typeface="Aptos" pitchFamily="34" charset="-120"/>
-              </a:rPr>
-              <a:t>Baseline and threshold rationale</a:t>
+                  <a:srgbClr val="003A63"/>
+                </a:solidFill>
+                <a:latin typeface="Aptos" pitchFamily="34" charset="0"/>
+                <a:ea typeface="Aptos" pitchFamily="34" charset="-122"/>
+                <a:cs typeface="Aptos" pitchFamily="34" charset="-120"/>
+              </a:rPr>
+              <a:t>• Baseline and threshold rationale</a:t>
             </a:r>
             <a:endParaRPr lang="en-US" sz="2100" dirty="0"/>
           </a:p>
           <a:p>
+            <a:pPr indent="0" marL="0">
+              <a:buNone/>
+            </a:pPr>
             <a:r>
               <a:rPr lang="en-US" sz="2100" dirty="0">
                 <a:solidFill>
-                  <a:srgbClr val="17364A"/>
-                </a:solidFill>
-                <a:latin typeface="Aptos" pitchFamily="34" charset="0"/>
-                <a:ea typeface="Aptos" pitchFamily="34" charset="-122"/>
-                <a:cs typeface="Aptos" pitchFamily="34" charset="-120"/>
-              </a:rPr>
-              <a:t>Alert review protocol</a:t>
+                  <a:srgbClr val="003A63"/>
+                </a:solidFill>
+                <a:latin typeface="Aptos" pitchFamily="34" charset="0"/>
+                <a:ea typeface="Aptos" pitchFamily="34" charset="-122"/>
+                <a:cs typeface="Aptos" pitchFamily="34" charset="-120"/>
+              </a:rPr>
+              <a:t>• Alert review protocol</a:t>
             </a:r>
             <a:endParaRPr lang="en-US" sz="2100" dirty="0"/>
           </a:p>
@@ -8961,17 +9105,17 @@
         </p:nvSpPr>
         <p:spPr>
           <a:xfrm>
-            <a:off x="7799832" y="1828800"/>
-            <a:ext cx="3145536" cy="685800"/>
-          </a:xfrm>
-          <a:prstGeom prst="rect">
-            <a:avLst/>
-          </a:prstGeom>
-          <a:noFill/>
-          <a:ln/>
-        </p:spPr>
-        <p:txBody>
-          <a:bodyPr wrap="square" lIns="0" tIns="0" rIns="0" bIns="0" rtlCol="0" anchor="t">
+            <a:off x="7799832" y="1801368"/>
+            <a:ext cx="3145536" cy="758952"/>
+          </a:xfrm>
+          <a:prstGeom prst="rect">
+            <a:avLst/>
+          </a:prstGeom>
+          <a:noFill/>
+          <a:ln/>
+        </p:spPr>
+        <p:txBody>
+          <a:bodyPr wrap="square" lIns="254" tIns="254" rIns="254" bIns="254" rtlCol="0" anchor="t">
             <a:normAutofit/>
           </a:bodyPr>
           <a:lstStyle/>
@@ -8980,7 +9124,7 @@
               <a:buNone/>
             </a:pPr>
             <a:r>
-              <a:rPr lang="en-US" sz="1550" dirty="0">
+              <a:rPr lang="en-US" sz="1320" dirty="0">
                 <a:solidFill>
                   <a:srgbClr val="17364A"/>
                 </a:solidFill>
@@ -8990,7 +9134,7 @@
               </a:rPr>
               <a:t>Anomaly detection review plan</a:t>
             </a:r>
-            <a:endParaRPr lang="en-US" sz="1550" dirty="0"/>
+            <a:endParaRPr lang="en-US" sz="1320" dirty="0"/>
           </a:p>
         </p:txBody>
       </p:sp>
@@ -9078,13 +9222,16 @@
           <a:ln/>
         </p:spPr>
         <p:txBody>
-          <a:bodyPr wrap="square" lIns="254" tIns="254" rIns="254" bIns="254" rtlCol="0" anchor="t">
+          <a:bodyPr wrap="square" lIns="508" tIns="508" rIns="508" bIns="508" rtlCol="0" anchor="t">
             <a:normAutofit/>
           </a:bodyPr>
           <a:lstStyle/>
           <a:p>
-            <a:r>
-              <a:rPr lang="en-US" sz="1380" dirty="0">
+            <a:pPr indent="0" marL="0">
+              <a:buNone/>
+            </a:pPr>
+            <a:r>
+              <a:rPr lang="en-US" sz="1220" dirty="0">
                 <a:solidFill>
                   <a:srgbClr val="17364A"/>
                 </a:solidFill>
@@ -9094,11 +9241,14 @@
               </a:rPr>
               <a:t>Anomaly detection review plan</a:t>
             </a:r>
-            <a:endParaRPr lang="en-US" sz="1380" dirty="0"/>
-          </a:p>
-          <a:p>
-            <a:r>
-              <a:rPr lang="en-US" sz="1380" dirty="0">
+            <a:endParaRPr lang="en-US" sz="1220" dirty="0"/>
+          </a:p>
+          <a:p>
+            <a:pPr indent="0" marL="0">
+              <a:buNone/>
+            </a:pPr>
+            <a:r>
+              <a:rPr lang="en-US" sz="1220" dirty="0">
                 <a:solidFill>
                   <a:srgbClr val="17364A"/>
                 </a:solidFill>
@@ -9108,11 +9258,14 @@
               </a:rPr>
               <a:t>Baseline and threshold rationale</a:t>
             </a:r>
-            <a:endParaRPr lang="en-US" sz="1380" dirty="0"/>
-          </a:p>
-          <a:p>
-            <a:r>
-              <a:rPr lang="en-US" sz="1380" dirty="0">
+            <a:endParaRPr lang="en-US" sz="1220" dirty="0"/>
+          </a:p>
+          <a:p>
+            <a:pPr indent="0" marL="0">
+              <a:buNone/>
+            </a:pPr>
+            <a:r>
+              <a:rPr lang="en-US" sz="1220" dirty="0">
                 <a:solidFill>
                   <a:srgbClr val="17364A"/>
                 </a:solidFill>
@@ -9122,7 +9275,7 @@
               </a:rPr>
               <a:t>Alert review protocol</a:t>
             </a:r>
-            <a:endParaRPr lang="en-US" sz="1380" dirty="0"/>
+            <a:endParaRPr lang="en-US" sz="1220" dirty="0"/>
           </a:p>
         </p:txBody>
       </p:sp>
@@ -9200,17 +9353,17 @@
         </p:nvSpPr>
         <p:spPr>
           <a:xfrm>
-            <a:off x="7799832" y="5001768"/>
-            <a:ext cx="3145536" cy="502920"/>
-          </a:xfrm>
-          <a:prstGeom prst="rect">
-            <a:avLst/>
-          </a:prstGeom>
-          <a:noFill/>
-          <a:ln/>
-        </p:spPr>
-        <p:txBody>
-          <a:bodyPr wrap="square" lIns="0" tIns="0" rIns="0" bIns="0" rtlCol="0" anchor="t">
+            <a:off x="7799832" y="4974336"/>
+            <a:ext cx="3145536" cy="576072"/>
+          </a:xfrm>
+          <a:prstGeom prst="rect">
+            <a:avLst/>
+          </a:prstGeom>
+          <a:noFill/>
+          <a:ln/>
+        </p:spPr>
+        <p:txBody>
+          <a:bodyPr wrap="square" lIns="254" tIns="254" rIns="254" bIns="254" rtlCol="0" anchor="t">
             <a:normAutofit/>
           </a:bodyPr>
           <a:lstStyle/>
@@ -9219,7 +9372,7 @@
               <a:buNone/>
             </a:pPr>
             <a:r>
-              <a:rPr lang="en-US" sz="1550" dirty="0">
+              <a:rPr lang="en-US" sz="1320" dirty="0">
                 <a:solidFill>
                   <a:srgbClr val="17364A"/>
                 </a:solidFill>
@@ -9227,9 +9380,9 @@
                 <a:ea typeface="Aptos" pitchFamily="34" charset="-122"/>
                 <a:cs typeface="Aptos" pitchFamily="34" charset="-120"/>
               </a:rPr>
-              <a:t>Connect the concept to public health purpose, responsible use, required safeguards, documentation, and the next action a department should take.</a:t>
-            </a:r>
-            <a:endParaRPr lang="en-US" sz="1550" dirty="0"/>
+              <a:t>Connect the concept to public health purpose, responsible use, required safeguards, documentation, and the next action a.</a:t>
+            </a:r>
+            <a:endParaRPr lang="en-US" sz="1320" dirty="0"/>
           </a:p>
         </p:txBody>
       </p:sp>
@@ -9530,21 +9683,24 @@
           <a:ln/>
         </p:spPr>
         <p:txBody>
-          <a:bodyPr wrap="square" lIns="635" tIns="635" rIns="635" bIns="635" rtlCol="0" anchor="t">
+          <a:bodyPr wrap="square" lIns="1016" tIns="1016" rIns="1016" bIns="1016" rtlCol="0" anchor="t">
             <a:normAutofit/>
           </a:bodyPr>
           <a:lstStyle/>
           <a:p>
+            <a:pPr indent="0" marL="0">
+              <a:buNone/>
+            </a:pPr>
             <a:r>
               <a:rPr lang="en-US" sz="2100" dirty="0">
                 <a:solidFill>
-                  <a:srgbClr val="17364A"/>
-                </a:solidFill>
-                <a:latin typeface="Aptos" pitchFamily="34" charset="0"/>
-                <a:ea typeface="Aptos" pitchFamily="34" charset="-122"/>
-                <a:cs typeface="Aptos" pitchFamily="34" charset="-120"/>
-              </a:rPr>
-              <a:t>Signal documentation template</a:t>
+                  <a:srgbClr val="003A63"/>
+                </a:solidFill>
+                <a:latin typeface="Aptos" pitchFamily="34" charset="0"/>
+                <a:ea typeface="Aptos" pitchFamily="34" charset="-122"/>
+                <a:cs typeface="Aptos" pitchFamily="34" charset="-120"/>
+              </a:rPr>
+              <a:t>• Signal documentation template</a:t>
             </a:r>
             <a:endParaRPr lang="en-US" sz="2100" dirty="0"/>
           </a:p>
@@ -9624,17 +9780,17 @@
         </p:nvSpPr>
         <p:spPr>
           <a:xfrm>
-            <a:off x="7799832" y="1828800"/>
-            <a:ext cx="3145536" cy="685800"/>
-          </a:xfrm>
-          <a:prstGeom prst="rect">
-            <a:avLst/>
-          </a:prstGeom>
-          <a:noFill/>
-          <a:ln/>
-        </p:spPr>
-        <p:txBody>
-          <a:bodyPr wrap="square" lIns="0" tIns="0" rIns="0" bIns="0" rtlCol="0" anchor="t">
+            <a:off x="7799832" y="1801368"/>
+            <a:ext cx="3145536" cy="758952"/>
+          </a:xfrm>
+          <a:prstGeom prst="rect">
+            <a:avLst/>
+          </a:prstGeom>
+          <a:noFill/>
+          <a:ln/>
+        </p:spPr>
+        <p:txBody>
+          <a:bodyPr wrap="square" lIns="254" tIns="254" rIns="254" bIns="254" rtlCol="0" anchor="t">
             <a:normAutofit/>
           </a:bodyPr>
           <a:lstStyle/>
@@ -9643,7 +9799,7 @@
               <a:buNone/>
             </a:pPr>
             <a:r>
-              <a:rPr lang="en-US" sz="1550" dirty="0">
+              <a:rPr lang="en-US" sz="1320" dirty="0">
                 <a:solidFill>
                   <a:srgbClr val="17364A"/>
                 </a:solidFill>
@@ -9653,7 +9809,7 @@
               </a:rPr>
               <a:t>Signal documentation template</a:t>
             </a:r>
-            <a:endParaRPr lang="en-US" sz="1550" dirty="0"/>
+            <a:endParaRPr lang="en-US" sz="1320" dirty="0"/>
           </a:p>
         </p:txBody>
       </p:sp>
@@ -9741,13 +9897,16 @@
           <a:ln/>
         </p:spPr>
         <p:txBody>
-          <a:bodyPr wrap="square" lIns="254" tIns="254" rIns="254" bIns="254" rtlCol="0" anchor="t">
+          <a:bodyPr wrap="square" lIns="508" tIns="508" rIns="508" bIns="508" rtlCol="0" anchor="t">
             <a:normAutofit/>
           </a:bodyPr>
           <a:lstStyle/>
           <a:p>
-            <a:r>
-              <a:rPr lang="en-US" sz="1380" dirty="0">
+            <a:pPr indent="0" marL="0">
+              <a:buNone/>
+            </a:pPr>
+            <a:r>
+              <a:rPr lang="en-US" sz="1220" dirty="0">
                 <a:solidFill>
                   <a:srgbClr val="17364A"/>
                 </a:solidFill>
@@ -9757,7 +9916,7 @@
               </a:rPr>
               <a:t>Signal documentation template</a:t>
             </a:r>
-            <a:endParaRPr lang="en-US" sz="1380" dirty="0"/>
+            <a:endParaRPr lang="en-US" sz="1220" dirty="0"/>
           </a:p>
         </p:txBody>
       </p:sp>
@@ -9835,17 +9994,17 @@
         </p:nvSpPr>
         <p:spPr>
           <a:xfrm>
-            <a:off x="7799832" y="5001768"/>
-            <a:ext cx="3145536" cy="502920"/>
-          </a:xfrm>
-          <a:prstGeom prst="rect">
-            <a:avLst/>
-          </a:prstGeom>
-          <a:noFill/>
-          <a:ln/>
-        </p:spPr>
-        <p:txBody>
-          <a:bodyPr wrap="square" lIns="0" tIns="0" rIns="0" bIns="0" rtlCol="0" anchor="t">
+            <a:off x="7799832" y="4974336"/>
+            <a:ext cx="3145536" cy="576072"/>
+          </a:xfrm>
+          <a:prstGeom prst="rect">
+            <a:avLst/>
+          </a:prstGeom>
+          <a:noFill/>
+          <a:ln/>
+        </p:spPr>
+        <p:txBody>
+          <a:bodyPr wrap="square" lIns="254" tIns="254" rIns="254" bIns="254" rtlCol="0" anchor="t">
             <a:normAutofit/>
           </a:bodyPr>
           <a:lstStyle/>
@@ -9854,7 +10013,7 @@
               <a:buNone/>
             </a:pPr>
             <a:r>
-              <a:rPr lang="en-US" sz="1550" dirty="0">
+              <a:rPr lang="en-US" sz="1320" dirty="0">
                 <a:solidFill>
                   <a:srgbClr val="17364A"/>
                 </a:solidFill>
@@ -9862,9 +10021,9 @@
                 <a:ea typeface="Aptos" pitchFamily="34" charset="-122"/>
                 <a:cs typeface="Aptos" pitchFamily="34" charset="-120"/>
               </a:rPr>
-              <a:t>Connect the concept to public health purpose, responsible use, required safeguards, documentation, and the next action a department should take.</a:t>
-            </a:r>
-            <a:endParaRPr lang="en-US" sz="1550" dirty="0"/>
+              <a:t>Connect the concept to public health purpose, responsible use, required safeguards, documentation, and the next action a.</a:t>
+            </a:r>
+            <a:endParaRPr lang="en-US" sz="1320" dirty="0"/>
           </a:p>
         </p:txBody>
       </p:sp>
@@ -10165,49 +10324,58 @@
           <a:ln/>
         </p:spPr>
         <p:txBody>
-          <a:bodyPr wrap="square" lIns="635" tIns="635" rIns="635" bIns="635" rtlCol="0" anchor="t">
+          <a:bodyPr wrap="square" lIns="1016" tIns="1016" rIns="1016" bIns="1016" rtlCol="0" anchor="t">
             <a:normAutofit/>
           </a:bodyPr>
           <a:lstStyle/>
           <a:p>
+            <a:pPr indent="0" marL="0">
+              <a:buNone/>
+            </a:pPr>
             <a:r>
               <a:rPr lang="en-US" sz="2100" dirty="0">
                 <a:solidFill>
-                  <a:srgbClr val="17364A"/>
-                </a:solidFill>
-                <a:latin typeface="Aptos" pitchFamily="34" charset="0"/>
-                <a:ea typeface="Aptos" pitchFamily="34" charset="-122"/>
-                <a:cs typeface="Aptos" pitchFamily="34" charset="-120"/>
-              </a:rPr>
-              <a:t>Time-series analysis examines data collected over time.</a:t>
+                  <a:srgbClr val="003A63"/>
+                </a:solidFill>
+                <a:latin typeface="Aptos" pitchFamily="34" charset="0"/>
+                <a:ea typeface="Aptos" pitchFamily="34" charset="-122"/>
+                <a:cs typeface="Aptos" pitchFamily="34" charset="-120"/>
+              </a:rPr>
+              <a:t>• Time-series analysis examines data collected over time.</a:t>
             </a:r>
             <a:endParaRPr lang="en-US" sz="2100" dirty="0"/>
           </a:p>
           <a:p>
+            <a:pPr indent="0" marL="0">
+              <a:buNone/>
+            </a:pPr>
             <a:r>
               <a:rPr lang="en-US" sz="2100" dirty="0">
                 <a:solidFill>
-                  <a:srgbClr val="17364A"/>
-                </a:solidFill>
-                <a:latin typeface="Aptos" pitchFamily="34" charset="0"/>
-                <a:ea typeface="Aptos" pitchFamily="34" charset="-122"/>
-                <a:cs typeface="Aptos" pitchFamily="34" charset="-120"/>
-              </a:rPr>
-              <a:t>In public health, time patterns are central to surveillance, outbreak detection, syndromic monitoring, wastewater.</a:t>
+                  <a:srgbClr val="003A63"/>
+                </a:solidFill>
+                <a:latin typeface="Aptos" pitchFamily="34" charset="0"/>
+                <a:ea typeface="Aptos" pitchFamily="34" charset="-122"/>
+                <a:cs typeface="Aptos" pitchFamily="34" charset="-120"/>
+              </a:rPr>
+              <a:t>• In public health, time patterns are central to surveillance, outbreak detection, syndromic.</a:t>
             </a:r>
             <a:endParaRPr lang="en-US" sz="2100" dirty="0"/>
           </a:p>
           <a:p>
+            <a:pPr indent="0" marL="0">
+              <a:buNone/>
+            </a:pPr>
             <a:r>
               <a:rPr lang="en-US" sz="2100" dirty="0">
                 <a:solidFill>
-                  <a:srgbClr val="17364A"/>
-                </a:solidFill>
-                <a:latin typeface="Aptos" pitchFamily="34" charset="0"/>
-                <a:ea typeface="Aptos" pitchFamily="34" charset="-122"/>
-                <a:cs typeface="Aptos" pitchFamily="34" charset="-120"/>
-              </a:rPr>
-              <a:t>AI-supported anomaly detection can help identify unusual increases, decreases, or pattern changes that may.</a:t>
+                  <a:srgbClr val="003A63"/>
+                </a:solidFill>
+                <a:latin typeface="Aptos" pitchFamily="34" charset="0"/>
+                <a:ea typeface="Aptos" pitchFamily="34" charset="-122"/>
+                <a:cs typeface="Aptos" pitchFamily="34" charset="-120"/>
+              </a:rPr>
+              <a:t>• AI-supported anomaly detection can help identify unusual increases, decreases, or pattern.</a:t>
             </a:r>
             <a:endParaRPr lang="en-US" sz="2100" dirty="0"/>
           </a:p>
@@ -10287,17 +10455,17 @@
         </p:nvSpPr>
         <p:spPr>
           <a:xfrm>
-            <a:off x="8074152" y="1920240"/>
-            <a:ext cx="2825496" cy="1280160"/>
-          </a:xfrm>
-          <a:prstGeom prst="rect">
-            <a:avLst/>
-          </a:prstGeom>
-          <a:noFill/>
-          <a:ln/>
-        </p:spPr>
-        <p:txBody>
-          <a:bodyPr wrap="square" lIns="0" tIns="0" rIns="0" bIns="0" rtlCol="0" anchor="t">
+            <a:off x="8074152" y="1892808"/>
+            <a:ext cx="2825496" cy="1353312"/>
+          </a:xfrm>
+          <a:prstGeom prst="rect">
+            <a:avLst/>
+          </a:prstGeom>
+          <a:noFill/>
+          <a:ln/>
+        </p:spPr>
+        <p:txBody>
+          <a:bodyPr wrap="square" lIns="254" tIns="254" rIns="254" bIns="254" rtlCol="0" anchor="t">
             <a:normAutofit/>
           </a:bodyPr>
           <a:lstStyle/>
@@ -10306,7 +10474,7 @@
               <a:buNone/>
             </a:pPr>
             <a:r>
-              <a:rPr lang="en-US" sz="1550" dirty="0">
+              <a:rPr lang="en-US" sz="1320" dirty="0">
                 <a:solidFill>
                   <a:srgbClr val="17364A"/>
                 </a:solidFill>
@@ -10314,43 +10482,9 @@
                 <a:ea typeface="Aptos" pitchFamily="34" charset="-122"/>
                 <a:cs typeface="Aptos" pitchFamily="34" charset="-120"/>
               </a:rPr>
-              <a:t>Level: applied/foundational</a:t>
-            </a:r>
-            <a:endParaRPr lang="en-US" sz="1550" dirty="0"/>
-          </a:p>
-          <a:p>
-            <a:pPr indent="0" marL="0">
-              <a:buNone/>
-            </a:pPr>
-            <a:r>
-              <a:rPr lang="en-US" sz="1550" dirty="0">
-                <a:solidFill>
-                  <a:srgbClr val="17364A"/>
-                </a:solidFill>
-                <a:latin typeface="Aptos" pitchFamily="34" charset="0"/>
-                <a:ea typeface="Aptos" pitchFamily="34" charset="-122"/>
-                <a:cs typeface="Aptos" pitchFamily="34" charset="-120"/>
-              </a:rPr>
-              <a:t>Primary track: Analytics and Modeling Track</a:t>
-            </a:r>
-            <a:endParaRPr lang="en-US" sz="1550" dirty="0"/>
-          </a:p>
-          <a:p>
-            <a:pPr indent="0" marL="0">
-              <a:buNone/>
-            </a:pPr>
-            <a:r>
-              <a:rPr lang="en-US" sz="1550" dirty="0">
-                <a:solidFill>
-                  <a:srgbClr val="17364A"/>
-                </a:solidFill>
-                <a:latin typeface="Aptos" pitchFamily="34" charset="0"/>
-                <a:ea typeface="Aptos" pitchFamily="34" charset="-122"/>
-                <a:cs typeface="Aptos" pitchFamily="34" charset="-120"/>
-              </a:rPr>
-              <a:t>Appears in tracks: analytics-modeling</a:t>
-            </a:r>
-            <a:endParaRPr lang="en-US" sz="1550" dirty="0"/>
+              <a:t>Level: applied/foundational Primary track: Analytics and Modeling Track Appears in tracks: analytics-modeling</a:t>
+            </a:r>
+            <a:endParaRPr lang="en-US" sz="1320" dirty="0"/>
           </a:p>
         </p:txBody>
       </p:sp>
@@ -10438,13 +10572,16 @@
           <a:ln/>
         </p:spPr>
         <p:txBody>
-          <a:bodyPr wrap="square" lIns="254" tIns="254" rIns="254" bIns="254" rtlCol="0" anchor="t">
+          <a:bodyPr wrap="square" lIns="508" tIns="508" rIns="508" bIns="508" rtlCol="0" anchor="t">
             <a:normAutofit/>
           </a:bodyPr>
           <a:lstStyle/>
           <a:p>
-            <a:r>
-              <a:rPr lang="en-US" sz="1380" dirty="0">
+            <a:pPr indent="0" marL="0">
+              <a:buNone/>
+            </a:pPr>
+            <a:r>
+              <a:rPr lang="en-US" sz="1220" dirty="0">
                 <a:solidFill>
                   <a:srgbClr val="17364A"/>
                 </a:solidFill>
@@ -10454,11 +10591,14 @@
               </a:rPr>
               <a:t>Read the module for shared vocabulary and context.</a:t>
             </a:r>
-            <a:endParaRPr lang="en-US" sz="1380" dirty="0"/>
-          </a:p>
-          <a:p>
-            <a:r>
-              <a:rPr lang="en-US" sz="1380" dirty="0">
+            <a:endParaRPr lang="en-US" sz="1220" dirty="0"/>
+          </a:p>
+          <a:p>
+            <a:pPr indent="0" marL="0">
+              <a:buNone/>
+            </a:pPr>
+            <a:r>
+              <a:rPr lang="en-US" sz="1220" dirty="0">
                 <a:solidFill>
                   <a:srgbClr val="17364A"/>
                 </a:solidFill>
@@ -10468,11 +10608,14 @@
               </a:rPr>
               <a:t>Complete the practical exercise to apply the concept.</a:t>
             </a:r>
-            <a:endParaRPr lang="en-US" sz="1380" dirty="0"/>
-          </a:p>
-          <a:p>
-            <a:r>
-              <a:rPr lang="en-US" sz="1380" dirty="0">
+            <a:endParaRPr lang="en-US" sz="1220" dirty="0"/>
+          </a:p>
+          <a:p>
+            <a:pPr indent="0" marL="0">
+              <a:buNone/>
+            </a:pPr>
+            <a:r>
+              <a:rPr lang="en-US" sz="1220" dirty="0">
                 <a:solidFill>
                   <a:srgbClr val="17364A"/>
                 </a:solidFill>
@@ -10482,7 +10625,7 @@
               </a:rPr>
               <a:t>Use the notes and references for deeper review.</a:t>
             </a:r>
-            <a:endParaRPr lang="en-US" sz="1380" dirty="0"/>
+            <a:endParaRPr lang="en-US" sz="1220" dirty="0"/>
           </a:p>
         </p:txBody>
       </p:sp>
@@ -10783,49 +10926,58 @@
           <a:ln/>
         </p:spPr>
         <p:txBody>
-          <a:bodyPr wrap="square" lIns="635" tIns="635" rIns="635" bIns="635" rtlCol="0" anchor="t">
+          <a:bodyPr wrap="square" lIns="1016" tIns="1016" rIns="1016" bIns="1016" rtlCol="0" anchor="t">
             <a:normAutofit/>
           </a:bodyPr>
           <a:lstStyle/>
           <a:p>
+            <a:pPr indent="0" marL="0">
+              <a:buNone/>
+            </a:pPr>
             <a:r>
               <a:rPr lang="en-US" sz="2100" dirty="0">
                 <a:solidFill>
-                  <a:srgbClr val="17364A"/>
-                </a:solidFill>
-                <a:latin typeface="Aptos" pitchFamily="34" charset="0"/>
-                <a:ea typeface="Aptos" pitchFamily="34" charset="-122"/>
-                <a:cs typeface="Aptos" pitchFamily="34" charset="-120"/>
-              </a:rPr>
-              <a:t>Anomaly detection review plan</a:t>
+                  <a:srgbClr val="003A63"/>
+                </a:solidFill>
+                <a:latin typeface="Aptos" pitchFamily="34" charset="0"/>
+                <a:ea typeface="Aptos" pitchFamily="34" charset="-122"/>
+                <a:cs typeface="Aptos" pitchFamily="34" charset="-120"/>
+              </a:rPr>
+              <a:t>• Anomaly detection review plan</a:t>
             </a:r>
             <a:endParaRPr lang="en-US" sz="2100" dirty="0"/>
           </a:p>
           <a:p>
+            <a:pPr indent="0" marL="0">
+              <a:buNone/>
+            </a:pPr>
             <a:r>
               <a:rPr lang="en-US" sz="2100" dirty="0">
                 <a:solidFill>
-                  <a:srgbClr val="17364A"/>
-                </a:solidFill>
-                <a:latin typeface="Aptos" pitchFamily="34" charset="0"/>
-                <a:ea typeface="Aptos" pitchFamily="34" charset="-122"/>
-                <a:cs typeface="Aptos" pitchFamily="34" charset="-120"/>
-              </a:rPr>
-              <a:t>Baseline and threshold rationale</a:t>
+                  <a:srgbClr val="003A63"/>
+                </a:solidFill>
+                <a:latin typeface="Aptos" pitchFamily="34" charset="0"/>
+                <a:ea typeface="Aptos" pitchFamily="34" charset="-122"/>
+                <a:cs typeface="Aptos" pitchFamily="34" charset="-120"/>
+              </a:rPr>
+              <a:t>• Baseline and threshold rationale</a:t>
             </a:r>
             <a:endParaRPr lang="en-US" sz="2100" dirty="0"/>
           </a:p>
           <a:p>
+            <a:pPr indent="0" marL="0">
+              <a:buNone/>
+            </a:pPr>
             <a:r>
               <a:rPr lang="en-US" sz="2100" dirty="0">
                 <a:solidFill>
-                  <a:srgbClr val="17364A"/>
-                </a:solidFill>
-                <a:latin typeface="Aptos" pitchFamily="34" charset="0"/>
-                <a:ea typeface="Aptos" pitchFamily="34" charset="-122"/>
-                <a:cs typeface="Aptos" pitchFamily="34" charset="-120"/>
-              </a:rPr>
-              <a:t>Alert review protocol</a:t>
+                  <a:srgbClr val="003A63"/>
+                </a:solidFill>
+                <a:latin typeface="Aptos" pitchFamily="34" charset="0"/>
+                <a:ea typeface="Aptos" pitchFamily="34" charset="-122"/>
+                <a:cs typeface="Aptos" pitchFamily="34" charset="-120"/>
+              </a:rPr>
+              <a:t>• Alert review protocol</a:t>
             </a:r>
             <a:endParaRPr lang="en-US" sz="2100" dirty="0"/>
           </a:p>
@@ -10905,17 +11057,17 @@
         </p:nvSpPr>
         <p:spPr>
           <a:xfrm>
-            <a:off x="7799832" y="1828800"/>
-            <a:ext cx="3145536" cy="685800"/>
-          </a:xfrm>
-          <a:prstGeom prst="rect">
-            <a:avLst/>
-          </a:prstGeom>
-          <a:noFill/>
-          <a:ln/>
-        </p:spPr>
-        <p:txBody>
-          <a:bodyPr wrap="square" lIns="0" tIns="0" rIns="0" bIns="0" rtlCol="0" anchor="t">
+            <a:off x="7799832" y="1801368"/>
+            <a:ext cx="3145536" cy="758952"/>
+          </a:xfrm>
+          <a:prstGeom prst="rect">
+            <a:avLst/>
+          </a:prstGeom>
+          <a:noFill/>
+          <a:ln/>
+        </p:spPr>
+        <p:txBody>
+          <a:bodyPr wrap="square" lIns="254" tIns="254" rIns="254" bIns="254" rtlCol="0" anchor="t">
             <a:normAutofit/>
           </a:bodyPr>
           <a:lstStyle/>
@@ -10924,7 +11076,7 @@
               <a:buNone/>
             </a:pPr>
             <a:r>
-              <a:rPr lang="en-US" sz="1550" dirty="0">
+              <a:rPr lang="en-US" sz="1320" dirty="0">
                 <a:solidFill>
                   <a:srgbClr val="17364A"/>
                 </a:solidFill>
@@ -10934,7 +11086,7 @@
               </a:rPr>
               <a:t>Anomaly detection review plan</a:t>
             </a:r>
-            <a:endParaRPr lang="en-US" sz="1550" dirty="0"/>
+            <a:endParaRPr lang="en-US" sz="1320" dirty="0"/>
           </a:p>
         </p:txBody>
       </p:sp>
@@ -11022,13 +11174,16 @@
           <a:ln/>
         </p:spPr>
         <p:txBody>
-          <a:bodyPr wrap="square" lIns="254" tIns="254" rIns="254" bIns="254" rtlCol="0" anchor="t">
+          <a:bodyPr wrap="square" lIns="508" tIns="508" rIns="508" bIns="508" rtlCol="0" anchor="t">
             <a:normAutofit/>
           </a:bodyPr>
           <a:lstStyle/>
           <a:p>
-            <a:r>
-              <a:rPr lang="en-US" sz="1380" dirty="0">
+            <a:pPr indent="0" marL="0">
+              <a:buNone/>
+            </a:pPr>
+            <a:r>
+              <a:rPr lang="en-US" sz="1220" dirty="0">
                 <a:solidFill>
                   <a:srgbClr val="17364A"/>
                 </a:solidFill>
@@ -11038,11 +11193,14 @@
               </a:rPr>
               <a:t>Anomaly detection review plan</a:t>
             </a:r>
-            <a:endParaRPr lang="en-US" sz="1380" dirty="0"/>
-          </a:p>
-          <a:p>
-            <a:r>
-              <a:rPr lang="en-US" sz="1380" dirty="0">
+            <a:endParaRPr lang="en-US" sz="1220" dirty="0"/>
+          </a:p>
+          <a:p>
+            <a:pPr indent="0" marL="0">
+              <a:buNone/>
+            </a:pPr>
+            <a:r>
+              <a:rPr lang="en-US" sz="1220" dirty="0">
                 <a:solidFill>
                   <a:srgbClr val="17364A"/>
                 </a:solidFill>
@@ -11052,11 +11210,14 @@
               </a:rPr>
               <a:t>Baseline and threshold rationale</a:t>
             </a:r>
-            <a:endParaRPr lang="en-US" sz="1380" dirty="0"/>
-          </a:p>
-          <a:p>
-            <a:r>
-              <a:rPr lang="en-US" sz="1380" dirty="0">
+            <a:endParaRPr lang="en-US" sz="1220" dirty="0"/>
+          </a:p>
+          <a:p>
+            <a:pPr indent="0" marL="0">
+              <a:buNone/>
+            </a:pPr>
+            <a:r>
+              <a:rPr lang="en-US" sz="1220" dirty="0">
                 <a:solidFill>
                   <a:srgbClr val="17364A"/>
                 </a:solidFill>
@@ -11066,7 +11227,7 @@
               </a:rPr>
               <a:t>Alert review protocol</a:t>
             </a:r>
-            <a:endParaRPr lang="en-US" sz="1380" dirty="0"/>
+            <a:endParaRPr lang="en-US" sz="1220" dirty="0"/>
           </a:p>
         </p:txBody>
       </p:sp>
@@ -11144,17 +11305,17 @@
         </p:nvSpPr>
         <p:spPr>
           <a:xfrm>
-            <a:off x="7799832" y="5001768"/>
-            <a:ext cx="3145536" cy="502920"/>
-          </a:xfrm>
-          <a:prstGeom prst="rect">
-            <a:avLst/>
-          </a:prstGeom>
-          <a:noFill/>
-          <a:ln/>
-        </p:spPr>
-        <p:txBody>
-          <a:bodyPr wrap="square" lIns="0" tIns="0" rIns="0" bIns="0" rtlCol="0" anchor="t">
+            <a:off x="7799832" y="4974336"/>
+            <a:ext cx="3145536" cy="576072"/>
+          </a:xfrm>
+          <a:prstGeom prst="rect">
+            <a:avLst/>
+          </a:prstGeom>
+          <a:noFill/>
+          <a:ln/>
+        </p:spPr>
+        <p:txBody>
+          <a:bodyPr wrap="square" lIns="254" tIns="254" rIns="254" bIns="254" rtlCol="0" anchor="t">
             <a:normAutofit/>
           </a:bodyPr>
           <a:lstStyle/>
@@ -11163,7 +11324,7 @@
               <a:buNone/>
             </a:pPr>
             <a:r>
-              <a:rPr lang="en-US" sz="1550" dirty="0">
+              <a:rPr lang="en-US" sz="1320" dirty="0">
                 <a:solidFill>
                   <a:srgbClr val="17364A"/>
                 </a:solidFill>
@@ -11171,9 +11332,9 @@
                 <a:ea typeface="Aptos" pitchFamily="34" charset="-122"/>
                 <a:cs typeface="Aptos" pitchFamily="34" charset="-120"/>
               </a:rPr>
-              <a:t>Use the assignment to test whether you can explain the concept, apply it to a realistic public health situation, and identify what would need review before the work moves forward.</a:t>
-            </a:r>
-            <a:endParaRPr lang="en-US" sz="1550" dirty="0"/>
+              <a:t>Use the assignment to test whether you can explain the concept, apply it to a realistic public health situation, and.</a:t>
+            </a:r>
+            <a:endParaRPr lang="en-US" sz="1320" dirty="0"/>
           </a:p>
         </p:txBody>
       </p:sp>
@@ -11474,49 +11635,58 @@
           <a:ln/>
         </p:spPr>
         <p:txBody>
-          <a:bodyPr wrap="square" lIns="635" tIns="635" rIns="635" bIns="635" rtlCol="0" anchor="t">
+          <a:bodyPr wrap="square" lIns="1016" tIns="1016" rIns="1016" bIns="1016" rtlCol="0" anchor="t">
             <a:normAutofit/>
           </a:bodyPr>
           <a:lstStyle/>
           <a:p>
+            <a:pPr indent="0" marL="0">
+              <a:buNone/>
+            </a:pPr>
             <a:r>
               <a:rPr lang="en-US" sz="2100" dirty="0">
                 <a:solidFill>
-                  <a:srgbClr val="17364A"/>
-                </a:solidFill>
-                <a:latin typeface="Aptos" pitchFamily="34" charset="0"/>
-                <a:ea typeface="Aptos" pitchFamily="34" charset="-122"/>
-                <a:cs typeface="Aptos" pitchFamily="34" charset="-120"/>
-              </a:rPr>
-              <a:t>1. What is an anomaly in a public health time series?</a:t>
+                  <a:srgbClr val="003A63"/>
+                </a:solidFill>
+                <a:latin typeface="Aptos" pitchFamily="34" charset="0"/>
+                <a:ea typeface="Aptos" pitchFamily="34" charset="-122"/>
+                <a:cs typeface="Aptos" pitchFamily="34" charset="-120"/>
+              </a:rPr>
+              <a:t>• 1. What is an anomaly in a public health time series?</a:t>
             </a:r>
             <a:endParaRPr lang="en-US" sz="2100" dirty="0"/>
           </a:p>
           <a:p>
+            <a:pPr indent="0" marL="0">
+              <a:buNone/>
+            </a:pPr>
             <a:r>
               <a:rPr lang="en-US" sz="2100" dirty="0">
                 <a:solidFill>
-                  <a:srgbClr val="17364A"/>
-                </a:solidFill>
-                <a:latin typeface="Aptos" pitchFamily="34" charset="0"/>
-                <a:ea typeface="Aptos" pitchFamily="34" charset="-122"/>
-                <a:cs typeface="Aptos" pitchFamily="34" charset="-120"/>
-              </a:rPr>
-              <a:t>2. Why does seasonality matter?</a:t>
+                  <a:srgbClr val="003A63"/>
+                </a:solidFill>
+                <a:latin typeface="Aptos" pitchFamily="34" charset="0"/>
+                <a:ea typeface="Aptos" pitchFamily="34" charset="-122"/>
+                <a:cs typeface="Aptos" pitchFamily="34" charset="-120"/>
+              </a:rPr>
+              <a:t>• 2. Why does seasonality matter?</a:t>
             </a:r>
             <a:endParaRPr lang="en-US" sz="2100" dirty="0"/>
           </a:p>
           <a:p>
+            <a:pPr indent="0" marL="0">
+              <a:buNone/>
+            </a:pPr>
             <a:r>
               <a:rPr lang="en-US" sz="2100" dirty="0">
                 <a:solidFill>
-                  <a:srgbClr val="17364A"/>
-                </a:solidFill>
-                <a:latin typeface="Aptos" pitchFamily="34" charset="0"/>
-                <a:ea typeface="Aptos" pitchFamily="34" charset="-122"/>
-                <a:cs typeface="Aptos" pitchFamily="34" charset="-120"/>
-              </a:rPr>
-              <a:t>3. What is a common risk of too many low-value alerts?</a:t>
+                  <a:srgbClr val="003A63"/>
+                </a:solidFill>
+                <a:latin typeface="Aptos" pitchFamily="34" charset="0"/>
+                <a:ea typeface="Aptos" pitchFamily="34" charset="-122"/>
+                <a:cs typeface="Aptos" pitchFamily="34" charset="-120"/>
+              </a:rPr>
+              <a:t>• 3. What is a common risk of too many low-value alerts?</a:t>
             </a:r>
             <a:endParaRPr lang="en-US" sz="2100" dirty="0"/>
           </a:p>
@@ -11596,17 +11766,17 @@
         </p:nvSpPr>
         <p:spPr>
           <a:xfrm>
-            <a:off x="7799832" y="1828800"/>
-            <a:ext cx="3145536" cy="685800"/>
-          </a:xfrm>
-          <a:prstGeom prst="rect">
-            <a:avLst/>
-          </a:prstGeom>
-          <a:noFill/>
-          <a:ln/>
-        </p:spPr>
-        <p:txBody>
-          <a:bodyPr wrap="square" lIns="0" tIns="0" rIns="0" bIns="0" rtlCol="0" anchor="t">
+            <a:off x="7799832" y="1801368"/>
+            <a:ext cx="3145536" cy="758952"/>
+          </a:xfrm>
+          <a:prstGeom prst="rect">
+            <a:avLst/>
+          </a:prstGeom>
+          <a:noFill/>
+          <a:ln/>
+        </p:spPr>
+        <p:txBody>
+          <a:bodyPr wrap="square" lIns="254" tIns="254" rIns="254" bIns="254" rtlCol="0" anchor="t">
             <a:normAutofit/>
           </a:bodyPr>
           <a:lstStyle/>
@@ -11615,7 +11785,7 @@
               <a:buNone/>
             </a:pPr>
             <a:r>
-              <a:rPr lang="en-US" sz="1550" dirty="0">
+              <a:rPr lang="en-US" sz="1320" dirty="0">
                 <a:solidFill>
                   <a:srgbClr val="17364A"/>
                 </a:solidFill>
@@ -11625,7 +11795,7 @@
               </a:rPr>
               <a:t>1. What is an anomaly in a public health time series?</a:t>
             </a:r>
-            <a:endParaRPr lang="en-US" sz="1550" dirty="0"/>
+            <a:endParaRPr lang="en-US" sz="1320" dirty="0"/>
           </a:p>
         </p:txBody>
       </p:sp>
@@ -11713,13 +11883,16 @@
           <a:ln/>
         </p:spPr>
         <p:txBody>
-          <a:bodyPr wrap="square" lIns="254" tIns="254" rIns="254" bIns="254" rtlCol="0" anchor="t">
+          <a:bodyPr wrap="square" lIns="508" tIns="508" rIns="508" bIns="508" rtlCol="0" anchor="t">
             <a:normAutofit/>
           </a:bodyPr>
           <a:lstStyle/>
           <a:p>
-            <a:r>
-              <a:rPr lang="en-US" sz="1380" dirty="0">
+            <a:pPr indent="0" marL="0">
+              <a:buNone/>
+            </a:pPr>
+            <a:r>
+              <a:rPr lang="en-US" sz="1220" dirty="0">
                 <a:solidFill>
                   <a:srgbClr val="17364A"/>
                 </a:solidFill>
@@ -11729,11 +11902,14 @@
               </a:rPr>
               <a:t>1.</a:t>
             </a:r>
-            <a:endParaRPr lang="en-US" sz="1380" dirty="0"/>
-          </a:p>
-          <a:p>
-            <a:r>
-              <a:rPr lang="en-US" sz="1380" dirty="0">
+            <a:endParaRPr lang="en-US" sz="1220" dirty="0"/>
+          </a:p>
+          <a:p>
+            <a:pPr indent="0" marL="0">
+              <a:buNone/>
+            </a:pPr>
+            <a:r>
+              <a:rPr lang="en-US" sz="1220" dirty="0">
                 <a:solidFill>
                   <a:srgbClr val="17364A"/>
                 </a:solidFill>
@@ -11743,11 +11919,14 @@
               </a:rPr>
               <a:t>What is an anomaly in a public health time series?</a:t>
             </a:r>
-            <a:endParaRPr lang="en-US" sz="1380" dirty="0"/>
-          </a:p>
-          <a:p>
-            <a:r>
-              <a:rPr lang="en-US" sz="1380" dirty="0">
+            <a:endParaRPr lang="en-US" sz="1220" dirty="0"/>
+          </a:p>
+          <a:p>
+            <a:pPr indent="0" marL="0">
+              <a:buNone/>
+            </a:pPr>
+            <a:r>
+              <a:rPr lang="en-US" sz="1220" dirty="0">
                 <a:solidFill>
                   <a:srgbClr val="17364A"/>
                 </a:solidFill>
@@ -11757,7 +11936,7 @@
               </a:rPr>
               <a:t>2.</a:t>
             </a:r>
-            <a:endParaRPr lang="en-US" sz="1380" dirty="0"/>
+            <a:endParaRPr lang="en-US" sz="1220" dirty="0"/>
           </a:p>
         </p:txBody>
       </p:sp>
@@ -11835,17 +12014,17 @@
         </p:nvSpPr>
         <p:spPr>
           <a:xfrm>
-            <a:off x="7799832" y="5001768"/>
-            <a:ext cx="3145536" cy="502920"/>
-          </a:xfrm>
-          <a:prstGeom prst="rect">
-            <a:avLst/>
-          </a:prstGeom>
-          <a:noFill/>
-          <a:ln/>
-        </p:spPr>
-        <p:txBody>
-          <a:bodyPr wrap="square" lIns="0" tIns="0" rIns="0" bIns="0" rtlCol="0" anchor="t">
+            <a:off x="7799832" y="4974336"/>
+            <a:ext cx="3145536" cy="576072"/>
+          </a:xfrm>
+          <a:prstGeom prst="rect">
+            <a:avLst/>
+          </a:prstGeom>
+          <a:noFill/>
+          <a:ln/>
+        </p:spPr>
+        <p:txBody>
+          <a:bodyPr wrap="square" lIns="254" tIns="254" rIns="254" bIns="254" rtlCol="0" anchor="t">
             <a:normAutofit/>
           </a:bodyPr>
           <a:lstStyle/>
@@ -11854,7 +12033,7 @@
               <a:buNone/>
             </a:pPr>
             <a:r>
-              <a:rPr lang="en-US" sz="1550" dirty="0">
+              <a:rPr lang="en-US" sz="1320" dirty="0">
                 <a:solidFill>
                   <a:srgbClr val="17364A"/>
                 </a:solidFill>
@@ -11862,9 +12041,9 @@
                 <a:ea typeface="Aptos" pitchFamily="34" charset="-122"/>
                 <a:cs typeface="Aptos" pitchFamily="34" charset="-120"/>
               </a:rPr>
-              <a:t>Use the assignment to test whether you can explain the concept, apply it to a realistic public health situation, and identify what would need review before the work moves forward.</a:t>
-            </a:r>
-            <a:endParaRPr lang="en-US" sz="1550" dirty="0"/>
+              <a:t>Use the assignment to test whether you can explain the concept, apply it to a realistic public health situation, and.</a:t>
+            </a:r>
+            <a:endParaRPr lang="en-US" sz="1320" dirty="0"/>
           </a:p>
         </p:txBody>
       </p:sp>
@@ -12165,49 +12344,58 @@
           <a:ln/>
         </p:spPr>
         <p:txBody>
-          <a:bodyPr wrap="square" lIns="635" tIns="635" rIns="635" bIns="635" rtlCol="0" anchor="t">
+          <a:bodyPr wrap="square" lIns="1016" tIns="1016" rIns="1016" bIns="1016" rtlCol="0" anchor="t">
             <a:normAutofit/>
           </a:bodyPr>
           <a:lstStyle/>
           <a:p>
+            <a:pPr indent="0" marL="0">
+              <a:buNone/>
+            </a:pPr>
             <a:r>
               <a:rPr lang="en-US" sz="2100" dirty="0">
                 <a:solidFill>
-                  <a:srgbClr val="17364A"/>
-                </a:solidFill>
-                <a:latin typeface="Aptos" pitchFamily="34" charset="0"/>
-                <a:ea typeface="Aptos" pitchFamily="34" charset="-122"/>
-                <a:cs typeface="Aptos" pitchFamily="34" charset="-120"/>
-              </a:rPr>
-              <a:t>CDC National Syndromic Surveillance Program: https://www.cdc.gov/nssp/</a:t>
+                  <a:srgbClr val="003A63"/>
+                </a:solidFill>
+                <a:latin typeface="Aptos" pitchFamily="34" charset="0"/>
+                <a:ea typeface="Aptos" pitchFamily="34" charset="-122"/>
+                <a:cs typeface="Aptos" pitchFamily="34" charset="-120"/>
+              </a:rPr>
+              <a:t>• CDC National Syndromic Surveillance Program: https://www.cdc.gov/nssp/</a:t>
             </a:r>
             <a:endParaRPr lang="en-US" sz="2100" dirty="0"/>
           </a:p>
           <a:p>
+            <a:pPr indent="0" marL="0">
+              <a:buNone/>
+            </a:pPr>
             <a:r>
               <a:rPr lang="en-US" sz="2100" dirty="0">
                 <a:solidFill>
-                  <a:srgbClr val="17364A"/>
-                </a:solidFill>
-                <a:latin typeface="Aptos" pitchFamily="34" charset="0"/>
-                <a:ea typeface="Aptos" pitchFamily="34" charset="-122"/>
-                <a:cs typeface="Aptos" pitchFamily="34" charset="-120"/>
-              </a:rPr>
-              <a:t>CDC Evaluation Framework: https://www.cdc.gov/evaluation/</a:t>
+                  <a:srgbClr val="003A63"/>
+                </a:solidFill>
+                <a:latin typeface="Aptos" pitchFamily="34" charset="0"/>
+                <a:ea typeface="Aptos" pitchFamily="34" charset="-122"/>
+                <a:cs typeface="Aptos" pitchFamily="34" charset="-120"/>
+              </a:rPr>
+              <a:t>• CDC Evaluation Framework: https://www.cdc.gov/evaluation/</a:t>
             </a:r>
             <a:endParaRPr lang="en-US" sz="2100" dirty="0"/>
           </a:p>
           <a:p>
+            <a:pPr indent="0" marL="0">
+              <a:buNone/>
+            </a:pPr>
             <a:r>
               <a:rPr lang="en-US" sz="2100" dirty="0">
                 <a:solidFill>
-                  <a:srgbClr val="17364A"/>
-                </a:solidFill>
-                <a:latin typeface="Aptos" pitchFamily="34" charset="0"/>
-                <a:ea typeface="Aptos" pitchFamily="34" charset="-122"/>
-                <a:cs typeface="Aptos" pitchFamily="34" charset="-120"/>
-              </a:rPr>
-              <a:t>NIST Artificial Intelligence Risk Management Framework:.</a:t>
+                  <a:srgbClr val="003A63"/>
+                </a:solidFill>
+                <a:latin typeface="Aptos" pitchFamily="34" charset="0"/>
+                <a:ea typeface="Aptos" pitchFamily="34" charset="-122"/>
+                <a:cs typeface="Aptos" pitchFamily="34" charset="-120"/>
+              </a:rPr>
+              <a:t>• NIST Artificial Intelligence Risk Management Framework:.</a:t>
             </a:r>
             <a:endParaRPr lang="en-US" sz="2100" dirty="0"/>
           </a:p>
@@ -12287,17 +12475,17 @@
         </p:nvSpPr>
         <p:spPr>
           <a:xfrm>
-            <a:off x="7799832" y="1828800"/>
-            <a:ext cx="3145536" cy="685800"/>
-          </a:xfrm>
-          <a:prstGeom prst="rect">
-            <a:avLst/>
-          </a:prstGeom>
-          <a:noFill/>
-          <a:ln/>
-        </p:spPr>
-        <p:txBody>
-          <a:bodyPr wrap="square" lIns="0" tIns="0" rIns="0" bIns="0" rtlCol="0" anchor="t">
+            <a:off x="7799832" y="1801368"/>
+            <a:ext cx="3145536" cy="758952"/>
+          </a:xfrm>
+          <a:prstGeom prst="rect">
+            <a:avLst/>
+          </a:prstGeom>
+          <a:noFill/>
+          <a:ln/>
+        </p:spPr>
+        <p:txBody>
+          <a:bodyPr wrap="square" lIns="254" tIns="254" rIns="254" bIns="254" rtlCol="0" anchor="t">
             <a:normAutofit/>
           </a:bodyPr>
           <a:lstStyle/>
@@ -12306,7 +12494,7 @@
               <a:buNone/>
             </a:pPr>
             <a:r>
-              <a:rPr lang="en-US" sz="1550" dirty="0">
+              <a:rPr lang="en-US" sz="1320" dirty="0">
                 <a:solidFill>
                   <a:srgbClr val="17364A"/>
                 </a:solidFill>
@@ -12316,7 +12504,7 @@
               </a:rPr>
               <a:t>CDC National Syndromic Surveillance Program: https://www.cdc.gov/nssp/</a:t>
             </a:r>
-            <a:endParaRPr lang="en-US" sz="1550" dirty="0"/>
+            <a:endParaRPr lang="en-US" sz="1320" dirty="0"/>
           </a:p>
         </p:txBody>
       </p:sp>
@@ -12404,13 +12592,16 @@
           <a:ln/>
         </p:spPr>
         <p:txBody>
-          <a:bodyPr wrap="square" lIns="254" tIns="254" rIns="254" bIns="254" rtlCol="0" anchor="t">
+          <a:bodyPr wrap="square" lIns="508" tIns="508" rIns="508" bIns="508" rtlCol="0" anchor="t">
             <a:normAutofit/>
           </a:bodyPr>
           <a:lstStyle/>
           <a:p>
-            <a:r>
-              <a:rPr lang="en-US" sz="1380" dirty="0">
+            <a:pPr indent="0" marL="0">
+              <a:buNone/>
+            </a:pPr>
+            <a:r>
+              <a:rPr lang="en-US" sz="1220" dirty="0">
                 <a:solidFill>
                   <a:srgbClr val="17364A"/>
                 </a:solidFill>
@@ -12420,11 +12611,14 @@
               </a:rPr>
               <a:t>NIST Artificial Intelligence Risk Management Framework:.</a:t>
             </a:r>
-            <a:endParaRPr lang="en-US" sz="1380" dirty="0"/>
-          </a:p>
-          <a:p>
-            <a:r>
-              <a:rPr lang="en-US" sz="1380" dirty="0">
+            <a:endParaRPr lang="en-US" sz="1220" dirty="0"/>
+          </a:p>
+          <a:p>
+            <a:pPr indent="0" marL="0">
+              <a:buNone/>
+            </a:pPr>
+            <a:r>
+              <a:rPr lang="en-US" sz="1220" dirty="0">
                 <a:solidFill>
                   <a:srgbClr val="17364A"/>
                 </a:solidFill>
@@ -12434,7 +12628,7 @@
               </a:rPr>
               <a:t>CDC Public Health Data Strategy:.</a:t>
             </a:r>
-            <a:endParaRPr lang="en-US" sz="1380" dirty="0"/>
+            <a:endParaRPr lang="en-US" sz="1220" dirty="0"/>
           </a:p>
         </p:txBody>
       </p:sp>
@@ -12512,17 +12706,17 @@
         </p:nvSpPr>
         <p:spPr>
           <a:xfrm>
-            <a:off x="7799832" y="5001768"/>
-            <a:ext cx="3145536" cy="502920"/>
-          </a:xfrm>
-          <a:prstGeom prst="rect">
-            <a:avLst/>
-          </a:prstGeom>
-          <a:noFill/>
-          <a:ln/>
-        </p:spPr>
-        <p:txBody>
-          <a:bodyPr wrap="square" lIns="0" tIns="0" rIns="0" bIns="0" rtlCol="0" anchor="t">
+            <a:off x="7799832" y="4974336"/>
+            <a:ext cx="3145536" cy="576072"/>
+          </a:xfrm>
+          <a:prstGeom prst="rect">
+            <a:avLst/>
+          </a:prstGeom>
+          <a:noFill/>
+          <a:ln/>
+        </p:spPr>
+        <p:txBody>
+          <a:bodyPr wrap="square" lIns="254" tIns="254" rIns="254" bIns="254" rtlCol="0" anchor="t">
             <a:normAutofit/>
           </a:bodyPr>
           <a:lstStyle/>
@@ -12531,7 +12725,7 @@
               <a:buNone/>
             </a:pPr>
             <a:r>
-              <a:rPr lang="en-US" sz="1550" dirty="0">
+              <a:rPr lang="en-US" sz="1320" dirty="0">
                 <a:solidFill>
                   <a:srgbClr val="17364A"/>
                 </a:solidFill>
@@ -12539,9 +12733,9 @@
                 <a:ea typeface="Aptos" pitchFamily="34" charset="-122"/>
                 <a:cs typeface="Aptos" pitchFamily="34" charset="-120"/>
               </a:rPr>
-              <a:t>Connect the concept to public health purpose, responsible use, required safeguards, documentation, and the next action a department should take.</a:t>
-            </a:r>
-            <a:endParaRPr lang="en-US" sz="1550" dirty="0"/>
+              <a:t>Connect the concept to public health purpose, responsible use, required safeguards, documentation, and the next action a.</a:t>
+            </a:r>
+            <a:endParaRPr lang="en-US" sz="1320" dirty="0"/>
           </a:p>
         </p:txBody>
       </p:sp>
@@ -12842,63 +13036,75 @@
           <a:ln/>
         </p:spPr>
         <p:txBody>
-          <a:bodyPr wrap="square" lIns="635" tIns="635" rIns="635" bIns="635" rtlCol="0" anchor="t">
+          <a:bodyPr wrap="square" lIns="1016" tIns="1016" rIns="1016" bIns="1016" rtlCol="0" anchor="t">
             <a:normAutofit/>
           </a:bodyPr>
           <a:lstStyle/>
           <a:p>
+            <a:pPr indent="0" marL="0">
+              <a:buNone/>
+            </a:pPr>
             <a:r>
               <a:rPr lang="en-US" sz="1900" dirty="0">
                 <a:solidFill>
-                  <a:srgbClr val="17364A"/>
-                </a:solidFill>
-                <a:latin typeface="Aptos" pitchFamily="34" charset="0"/>
-                <a:ea typeface="Aptos" pitchFamily="34" charset="-122"/>
-                <a:cs typeface="Aptos" pitchFamily="34" charset="-120"/>
-              </a:rPr>
-              <a:t>Play 13: Monitor and Evaluate AI Systems - This lesson informs Play 13 by helping learners connect the.</a:t>
+                  <a:srgbClr val="003A63"/>
+                </a:solidFill>
+                <a:latin typeface="Aptos" pitchFamily="34" charset="0"/>
+                <a:ea typeface="Aptos" pitchFamily="34" charset="-122"/>
+                <a:cs typeface="Aptos" pitchFamily="34" charset="-120"/>
+              </a:rPr>
+              <a:t>• Play 13: Monitor and Evaluate AI Systems - This lesson informs Play 13 by helping learners.</a:t>
             </a:r>
             <a:endParaRPr lang="en-US" sz="1900" dirty="0"/>
           </a:p>
           <a:p>
+            <a:pPr indent="0" marL="0">
+              <a:buNone/>
+            </a:pPr>
             <a:r>
               <a:rPr lang="en-US" sz="1900" dirty="0">
                 <a:solidFill>
-                  <a:srgbClr val="17364A"/>
-                </a:solidFill>
-                <a:latin typeface="Aptos" pitchFamily="34" charset="0"/>
-                <a:ea typeface="Aptos" pitchFamily="34" charset="-122"/>
-                <a:cs typeface="Aptos" pitchFamily="34" charset="-120"/>
-              </a:rPr>
-              <a:t>Play 12: Execute Governance and Oversight - This lesson informs Play 12 by helping learners connect the.</a:t>
+                  <a:srgbClr val="003A63"/>
+                </a:solidFill>
+                <a:latin typeface="Aptos" pitchFamily="34" charset="0"/>
+                <a:ea typeface="Aptos" pitchFamily="34" charset="-122"/>
+                <a:cs typeface="Aptos" pitchFamily="34" charset="-120"/>
+              </a:rPr>
+              <a:t>• Play 12: Execute Governance and Oversight - This lesson informs Play 12 by helping learners.</a:t>
             </a:r>
             <a:endParaRPr lang="en-US" sz="1900" dirty="0"/>
           </a:p>
           <a:p>
+            <a:pPr indent="0" marL="0">
+              <a:buNone/>
+            </a:pPr>
             <a:r>
               <a:rPr lang="en-US" sz="1900" dirty="0">
                 <a:solidFill>
-                  <a:srgbClr val="17364A"/>
-                </a:solidFill>
-                <a:latin typeface="Aptos" pitchFamily="34" charset="0"/>
-                <a:ea typeface="Aptos" pitchFamily="34" charset="-122"/>
-                <a:cs typeface="Aptos" pitchFamily="34" charset="-120"/>
-              </a:rPr>
-              <a:t>Play 1: Vision &amp; Guardrails - This lesson informs Play 1 by helping learners connect the lesson topic to.</a:t>
+                  <a:srgbClr val="003A63"/>
+                </a:solidFill>
+                <a:latin typeface="Aptos" pitchFamily="34" charset="0"/>
+                <a:ea typeface="Aptos" pitchFamily="34" charset="-122"/>
+                <a:cs typeface="Aptos" pitchFamily="34" charset="-120"/>
+              </a:rPr>
+              <a:t>• Play 1: Vision &amp; Guardrails - This lesson informs Play 1 by helping learners connect the.</a:t>
             </a:r>
             <a:endParaRPr lang="en-US" sz="1900" dirty="0"/>
           </a:p>
           <a:p>
+            <a:pPr indent="0" marL="0">
+              <a:buNone/>
+            </a:pPr>
             <a:r>
               <a:rPr lang="en-US" sz="1900" dirty="0">
                 <a:solidFill>
-                  <a:srgbClr val="17364A"/>
-                </a:solidFill>
-                <a:latin typeface="Aptos" pitchFamily="34" charset="0"/>
-                <a:ea typeface="Aptos" pitchFamily="34" charset="-122"/>
-                <a:cs typeface="Aptos" pitchFamily="34" charset="-120"/>
-              </a:rPr>
-              <a:t>Play 11: Build and Deploy AI Solutions - This lesson informs Play 11 by helping learners connect the lesson.</a:t>
+                  <a:srgbClr val="003A63"/>
+                </a:solidFill>
+                <a:latin typeface="Aptos" pitchFamily="34" charset="0"/>
+                <a:ea typeface="Aptos" pitchFamily="34" charset="-122"/>
+                <a:cs typeface="Aptos" pitchFamily="34" charset="-120"/>
+              </a:rPr>
+              <a:t>• Play 11: Build and Deploy AI Solutions - This lesson informs Play 11 by helping learners.</a:t>
             </a:r>
             <a:endParaRPr lang="en-US" sz="1900" dirty="0"/>
           </a:p>
@@ -12978,17 +13184,17 @@
         </p:nvSpPr>
         <p:spPr>
           <a:xfrm>
-            <a:off x="8211312" y="1920240"/>
-            <a:ext cx="2734056" cy="1463040"/>
-          </a:xfrm>
-          <a:prstGeom prst="rect">
-            <a:avLst/>
-          </a:prstGeom>
-          <a:noFill/>
-          <a:ln/>
-        </p:spPr>
-        <p:txBody>
-          <a:bodyPr wrap="square" lIns="0" tIns="0" rIns="0" bIns="0" rtlCol="0" anchor="t">
+            <a:off x="8211312" y="1892808"/>
+            <a:ext cx="2734056" cy="1536192"/>
+          </a:xfrm>
+          <a:prstGeom prst="rect">
+            <a:avLst/>
+          </a:prstGeom>
+          <a:noFill/>
+          <a:ln/>
+        </p:spPr>
+        <p:txBody>
+          <a:bodyPr wrap="square" lIns="254" tIns="254" rIns="254" bIns="254" rtlCol="0" anchor="t">
             <a:normAutofit/>
           </a:bodyPr>
           <a:lstStyle/>
@@ -12997,7 +13203,7 @@
               <a:buNone/>
             </a:pPr>
             <a:r>
-              <a:rPr lang="en-US" sz="1550" dirty="0">
+              <a:rPr lang="en-US" sz="1320" dirty="0">
                 <a:solidFill>
                   <a:srgbClr val="17364A"/>
                 </a:solidFill>
@@ -13005,9 +13211,9 @@
                 <a:ea typeface="Aptos" pitchFamily="34" charset="-122"/>
                 <a:cs typeface="Aptos" pitchFamily="34" charset="-120"/>
               </a:rPr>
-              <a:t>Use the related plays to identify decisions, participants, timing, approvals, and documentation needed for responsible implementation.</a:t>
-            </a:r>
-            <a:endParaRPr lang="en-US" sz="1550" dirty="0"/>
+              <a:t>Use the related plays to identify decisions, participants, timing, approvals, and documentation needed for responsible.</a:t>
+            </a:r>
+            <a:endParaRPr lang="en-US" sz="1320" dirty="0"/>
           </a:p>
         </p:txBody>
       </p:sp>
@@ -13095,13 +13301,16 @@
           <a:ln/>
         </p:spPr>
         <p:txBody>
-          <a:bodyPr wrap="square" lIns="254" tIns="254" rIns="254" bIns="254" rtlCol="0" anchor="t">
+          <a:bodyPr wrap="square" lIns="508" tIns="508" rIns="508" bIns="508" rtlCol="0" anchor="t">
             <a:normAutofit/>
           </a:bodyPr>
           <a:lstStyle/>
           <a:p>
-            <a:r>
-              <a:rPr lang="en-US" sz="1380" dirty="0">
+            <a:pPr indent="0" marL="0">
+              <a:buNone/>
+            </a:pPr>
+            <a:r>
+              <a:rPr lang="en-US" sz="1220" dirty="0">
                 <a:solidFill>
                   <a:srgbClr val="17364A"/>
                 </a:solidFill>
@@ -13111,11 +13320,14 @@
               </a:rPr>
               <a:t>Locate the decision point in the playbook sequence.</a:t>
             </a:r>
-            <a:endParaRPr lang="en-US" sz="1380" dirty="0"/>
-          </a:p>
-          <a:p>
-            <a:r>
-              <a:rPr lang="en-US" sz="1380" dirty="0">
+            <a:endParaRPr lang="en-US" sz="1220" dirty="0"/>
+          </a:p>
+          <a:p>
+            <a:pPr indent="0" marL="0">
+              <a:buNone/>
+            </a:pPr>
+            <a:r>
+              <a:rPr lang="en-US" sz="1220" dirty="0">
                 <a:solidFill>
                   <a:srgbClr val="17364A"/>
                 </a:solidFill>
@@ -13125,11 +13337,14 @@
               </a:rPr>
               <a:t>Identify who should participate in the work.</a:t>
             </a:r>
-            <a:endParaRPr lang="en-US" sz="1380" dirty="0"/>
-          </a:p>
-          <a:p>
-            <a:r>
-              <a:rPr lang="en-US" sz="1380" dirty="0">
+            <a:endParaRPr lang="en-US" sz="1220" dirty="0"/>
+          </a:p>
+          <a:p>
+            <a:pPr indent="0" marL="0">
+              <a:buNone/>
+            </a:pPr>
+            <a:r>
+              <a:rPr lang="en-US" sz="1220" dirty="0">
                 <a:solidFill>
                   <a:srgbClr val="17364A"/>
                 </a:solidFill>
@@ -13139,7 +13354,7 @@
               </a:rPr>
               <a:t>Document the review, approval, or implementation step.</a:t>
             </a:r>
-            <a:endParaRPr lang="en-US" sz="1380" dirty="0"/>
+            <a:endParaRPr lang="en-US" sz="1220" dirty="0"/>
           </a:p>
         </p:txBody>
       </p:sp>
@@ -13440,63 +13655,75 @@
           <a:ln/>
         </p:spPr>
         <p:txBody>
-          <a:bodyPr wrap="square" lIns="635" tIns="635" rIns="635" bIns="635" rtlCol="0" anchor="t">
+          <a:bodyPr wrap="square" lIns="1016" tIns="1016" rIns="1016" bIns="1016" rtlCol="0" anchor="t">
             <a:normAutofit/>
           </a:bodyPr>
           <a:lstStyle/>
           <a:p>
+            <a:pPr indent="0" marL="0">
+              <a:buNone/>
+            </a:pPr>
             <a:r>
               <a:rPr lang="en-US" sz="1850" dirty="0">
                 <a:solidFill>
-                  <a:srgbClr val="17364A"/>
-                </a:solidFill>
-                <a:latin typeface="Aptos" pitchFamily="34" charset="0"/>
-                <a:ea typeface="Aptos" pitchFamily="34" charset="-122"/>
-                <a:cs typeface="Aptos" pitchFamily="34" charset="-120"/>
-              </a:rPr>
-              <a:t>Tool 44: Performance Monitoring Dashboard (Dashboard) - Use this tool to complete or strengthen the.</a:t>
+                  <a:srgbClr val="003A63"/>
+                </a:solidFill>
+                <a:latin typeface="Aptos" pitchFamily="34" charset="0"/>
+                <a:ea typeface="Aptos" pitchFamily="34" charset="-122"/>
+                <a:cs typeface="Aptos" pitchFamily="34" charset="-120"/>
+              </a:rPr>
+              <a:t>• Tool 44: Performance Monitoring Dashboard (Dashboard) - Use this tool to complete or.</a:t>
             </a:r>
             <a:endParaRPr lang="en-US" sz="1850" dirty="0"/>
           </a:p>
           <a:p>
+            <a:pPr indent="0" marL="0">
+              <a:buNone/>
+            </a:pPr>
             <a:r>
               <a:rPr lang="en-US" sz="1850" dirty="0">
                 <a:solidFill>
-                  <a:srgbClr val="17364A"/>
-                </a:solidFill>
-                <a:latin typeface="Aptos" pitchFamily="34" charset="0"/>
-                <a:ea typeface="Aptos" pitchFamily="34" charset="-122"/>
-                <a:cs typeface="Aptos" pitchFamily="34" charset="-120"/>
-              </a:rPr>
-              <a:t>Tool 45: Continuous Improvement Log (Log) - Use Continuous Improvement Log to translate this lesson into a.</a:t>
+                  <a:srgbClr val="003A63"/>
+                </a:solidFill>
+                <a:latin typeface="Aptos" pitchFamily="34" charset="0"/>
+                <a:ea typeface="Aptos" pitchFamily="34" charset="-122"/>
+                <a:cs typeface="Aptos" pitchFamily="34" charset="-120"/>
+              </a:rPr>
+              <a:t>• Tool 45: Continuous Improvement Log (Log) - Use Continuous Improvement Log to translate this.</a:t>
             </a:r>
             <a:endParaRPr lang="en-US" sz="1850" dirty="0"/>
           </a:p>
           <a:p>
+            <a:pPr indent="0" marL="0">
+              <a:buNone/>
+            </a:pPr>
             <a:r>
               <a:rPr lang="en-US" sz="1850" dirty="0">
                 <a:solidFill>
-                  <a:srgbClr val="17364A"/>
-                </a:solidFill>
-                <a:latin typeface="Aptos" pitchFamily="34" charset="0"/>
-                <a:ea typeface="Aptos" pitchFamily="34" charset="-122"/>
-                <a:cs typeface="Aptos" pitchFamily="34" charset="-120"/>
-              </a:rPr>
-              <a:t>Tool 48: AI Evaluation &amp; Outcomes Reporting (Template) - Use this tool to complete or strengthen the.</a:t>
+                  <a:srgbClr val="003A63"/>
+                </a:solidFill>
+                <a:latin typeface="Aptos" pitchFamily="34" charset="0"/>
+                <a:ea typeface="Aptos" pitchFamily="34" charset="-122"/>
+                <a:cs typeface="Aptos" pitchFamily="34" charset="-120"/>
+              </a:rPr>
+              <a:t>• Tool 48: AI Evaluation &amp; Outcomes Reporting (Template) - Use this tool to complete or.</a:t>
             </a:r>
             <a:endParaRPr lang="en-US" sz="1850" dirty="0"/>
           </a:p>
           <a:p>
+            <a:pPr indent="0" marL="0">
+              <a:buNone/>
+            </a:pPr>
             <a:r>
               <a:rPr lang="en-US" sz="1850" dirty="0">
                 <a:solidFill>
-                  <a:srgbClr val="17364A"/>
-                </a:solidFill>
-                <a:latin typeface="Aptos" pitchFamily="34" charset="0"/>
-                <a:ea typeface="Aptos" pitchFamily="34" charset="-122"/>
-                <a:cs typeface="Aptos" pitchFamily="34" charset="-120"/>
-              </a:rPr>
-              <a:t>Tool 4: AI Policy Landscape Scan (Worksheet) - Use AI Policy Landscape Scan to translate this lesson into a.</a:t>
+                  <a:srgbClr val="003A63"/>
+                </a:solidFill>
+                <a:latin typeface="Aptos" pitchFamily="34" charset="0"/>
+                <a:ea typeface="Aptos" pitchFamily="34" charset="-122"/>
+                <a:cs typeface="Aptos" pitchFamily="34" charset="-120"/>
+              </a:rPr>
+              <a:t>• Tool 4: AI Policy Landscape Scan (Worksheet) - Use AI Policy Landscape Scan to translate this.</a:t>
             </a:r>
             <a:endParaRPr lang="en-US" sz="1850" dirty="0"/>
           </a:p>
@@ -13576,17 +13803,17 @@
         </p:nvSpPr>
         <p:spPr>
           <a:xfrm>
-            <a:off x="8211312" y="1920240"/>
-            <a:ext cx="2734056" cy="1463040"/>
-          </a:xfrm>
-          <a:prstGeom prst="rect">
-            <a:avLst/>
-          </a:prstGeom>
-          <a:noFill/>
-          <a:ln/>
-        </p:spPr>
-        <p:txBody>
-          <a:bodyPr wrap="square" lIns="0" tIns="0" rIns="0" bIns="0" rtlCol="0" anchor="t">
+            <a:off x="8211312" y="1892808"/>
+            <a:ext cx="2734056" cy="1536192"/>
+          </a:xfrm>
+          <a:prstGeom prst="rect">
+            <a:avLst/>
+          </a:prstGeom>
+          <a:noFill/>
+          <a:ln/>
+        </p:spPr>
+        <p:txBody>
+          <a:bodyPr wrap="square" lIns="254" tIns="254" rIns="254" bIns="254" rtlCol="0" anchor="t">
             <a:normAutofit/>
           </a:bodyPr>
           <a:lstStyle/>
@@ -13595,7 +13822,7 @@
               <a:buNone/>
             </a:pPr>
             <a:r>
-              <a:rPr lang="en-US" sz="1550" dirty="0">
+              <a:rPr lang="en-US" sz="1320" dirty="0">
                 <a:solidFill>
                   <a:srgbClr val="17364A"/>
                 </a:solidFill>
@@ -13603,9 +13830,9 @@
                 <a:ea typeface="Aptos" pitchFamily="34" charset="-122"/>
                 <a:cs typeface="Aptos" pitchFamily="34" charset="-120"/>
               </a:rPr>
-              <a:t>Use linked tools when your department needs a structured worksheet, template, checklist, review process, or documentation artifact.</a:t>
-            </a:r>
-            <a:endParaRPr lang="en-US" sz="1550" dirty="0"/>
+              <a:t>Use linked tools when your department needs a structured worksheet, template, checklist, review process, or.</a:t>
+            </a:r>
+            <a:endParaRPr lang="en-US" sz="1320" dirty="0"/>
           </a:p>
         </p:txBody>
       </p:sp>
@@ -13693,13 +13920,16 @@
           <a:ln/>
         </p:spPr>
         <p:txBody>
-          <a:bodyPr wrap="square" lIns="254" tIns="254" rIns="254" bIns="254" rtlCol="0" anchor="t">
+          <a:bodyPr wrap="square" lIns="508" tIns="508" rIns="508" bIns="508" rtlCol="0" anchor="t">
             <a:normAutofit/>
           </a:bodyPr>
           <a:lstStyle/>
           <a:p>
-            <a:r>
-              <a:rPr lang="en-US" sz="1380" dirty="0">
+            <a:pPr indent="0" marL="0">
+              <a:buNone/>
+            </a:pPr>
+            <a:r>
+              <a:rPr lang="en-US" sz="1220" dirty="0">
                 <a:solidFill>
                   <a:srgbClr val="17364A"/>
                 </a:solidFill>
@@ -13709,11 +13939,14 @@
               </a:rPr>
               <a:t>Use a tool when no comparable local process exists.</a:t>
             </a:r>
-            <a:endParaRPr lang="en-US" sz="1380" dirty="0"/>
-          </a:p>
-          <a:p>
-            <a:r>
-              <a:rPr lang="en-US" sz="1380" dirty="0">
+            <a:endParaRPr lang="en-US" sz="1220" dirty="0"/>
+          </a:p>
+          <a:p>
+            <a:pPr indent="0" marL="0">
+              <a:buNone/>
+            </a:pPr>
+            <a:r>
+              <a:rPr lang="en-US" sz="1220" dirty="0">
                 <a:solidFill>
                   <a:srgbClr val="17364A"/>
                 </a:solidFill>
@@ -13721,13 +13954,16 @@
                 <a:ea typeface="Aptos" pitchFamily="34" charset="-122"/>
                 <a:cs typeface="Aptos" pitchFamily="34" charset="-120"/>
               </a:rPr>
-              <a:t>Adapt existing department templates when they already fit the purpose.</a:t>
-            </a:r>
-            <a:endParaRPr lang="en-US" sz="1380" dirty="0"/>
-          </a:p>
-          <a:p>
-            <a:r>
-              <a:rPr lang="en-US" sz="1380" dirty="0">
+              <a:t>Adapt existing department templates when they already fit the.</a:t>
+            </a:r>
+            <a:endParaRPr lang="en-US" sz="1220" dirty="0"/>
+          </a:p>
+          <a:p>
+            <a:pPr indent="0" marL="0">
+              <a:buNone/>
+            </a:pPr>
+            <a:r>
+              <a:rPr lang="en-US" sz="1220" dirty="0">
                 <a:solidFill>
                   <a:srgbClr val="17364A"/>
                 </a:solidFill>
@@ -13737,7 +13973,7 @@
               </a:rPr>
               <a:t>Save the completed artifact as evidence of the decision.</a:t>
             </a:r>
-            <a:endParaRPr lang="en-US" sz="1380" dirty="0"/>
+            <a:endParaRPr lang="en-US" sz="1220" dirty="0"/>
           </a:p>
         </p:txBody>
       </p:sp>
@@ -14038,49 +14274,58 @@
           <a:ln/>
         </p:spPr>
         <p:txBody>
-          <a:bodyPr wrap="square" lIns="635" tIns="635" rIns="635" bIns="635" rtlCol="0" anchor="t">
+          <a:bodyPr wrap="square" lIns="1016" tIns="1016" rIns="1016" bIns="1016" rtlCol="0" anchor="t">
             <a:normAutofit/>
           </a:bodyPr>
           <a:lstStyle/>
           <a:p>
+            <a:pPr indent="0" marL="0">
+              <a:buNone/>
+            </a:pPr>
             <a:r>
               <a:rPr lang="en-US" sz="2100" dirty="0">
                 <a:solidFill>
-                  <a:srgbClr val="17364A"/>
-                </a:solidFill>
-                <a:latin typeface="Aptos" pitchFamily="34" charset="0"/>
-                <a:ea typeface="Aptos" pitchFamily="34" charset="-122"/>
-                <a:cs typeface="Aptos" pitchFamily="34" charset="-120"/>
-              </a:rPr>
-              <a:t>Define time-series analysis and anomaly detection in public health terms.</a:t>
+                  <a:srgbClr val="003A63"/>
+                </a:solidFill>
+                <a:latin typeface="Aptos" pitchFamily="34" charset="0"/>
+                <a:ea typeface="Aptos" pitchFamily="34" charset="-122"/>
+                <a:cs typeface="Aptos" pitchFamily="34" charset="-120"/>
+              </a:rPr>
+              <a:t>• Define time-series analysis and anomaly detection in public health terms.</a:t>
             </a:r>
             <a:endParaRPr lang="en-US" sz="2100" dirty="0"/>
           </a:p>
           <a:p>
+            <a:pPr indent="0" marL="0">
+              <a:buNone/>
+            </a:pPr>
             <a:r>
               <a:rPr lang="en-US" sz="2100" dirty="0">
                 <a:solidFill>
-                  <a:srgbClr val="17364A"/>
-                </a:solidFill>
-                <a:latin typeface="Aptos" pitchFamily="34" charset="0"/>
-                <a:ea typeface="Aptos" pitchFamily="34" charset="-122"/>
-                <a:cs typeface="Aptos" pitchFamily="34" charset="-120"/>
-              </a:rPr>
-              <a:t>Explain baselines, seasonality, trends, reporting delays, and thresholds.</a:t>
+                  <a:srgbClr val="003A63"/>
+                </a:solidFill>
+                <a:latin typeface="Aptos" pitchFamily="34" charset="0"/>
+                <a:ea typeface="Aptos" pitchFamily="34" charset="-122"/>
+                <a:cs typeface="Aptos" pitchFamily="34" charset="-120"/>
+              </a:rPr>
+              <a:t>• Explain baselines, seasonality, trends, reporting delays, and thresholds.</a:t>
             </a:r>
             <a:endParaRPr lang="en-US" sz="2100" dirty="0"/>
           </a:p>
           <a:p>
+            <a:pPr indent="0" marL="0">
+              <a:buNone/>
+            </a:pPr>
             <a:r>
               <a:rPr lang="en-US" sz="2100" dirty="0">
                 <a:solidFill>
-                  <a:srgbClr val="17364A"/>
-                </a:solidFill>
-                <a:latin typeface="Aptos" pitchFamily="34" charset="0"/>
-                <a:ea typeface="Aptos" pitchFamily="34" charset="-122"/>
-                <a:cs typeface="Aptos" pitchFamily="34" charset="-120"/>
-              </a:rPr>
-              <a:t>Distinguish statistical signals from confirmed outbreaks or public health events.</a:t>
+                  <a:srgbClr val="003A63"/>
+                </a:solidFill>
+                <a:latin typeface="Aptos" pitchFamily="34" charset="0"/>
+                <a:ea typeface="Aptos" pitchFamily="34" charset="-122"/>
+                <a:cs typeface="Aptos" pitchFamily="34" charset="-120"/>
+              </a:rPr>
+              <a:t>• Distinguish statistical signals from confirmed outbreaks or public health events.</a:t>
             </a:r>
             <a:endParaRPr lang="en-US" sz="2100" dirty="0"/>
           </a:p>
@@ -14160,17 +14405,17 @@
         </p:nvSpPr>
         <p:spPr>
           <a:xfrm>
-            <a:off x="7799832" y="1828800"/>
-            <a:ext cx="3145536" cy="685800"/>
-          </a:xfrm>
-          <a:prstGeom prst="rect">
-            <a:avLst/>
-          </a:prstGeom>
-          <a:noFill/>
-          <a:ln/>
-        </p:spPr>
-        <p:txBody>
-          <a:bodyPr wrap="square" lIns="0" tIns="0" rIns="0" bIns="0" rtlCol="0" anchor="t">
+            <a:off x="7799832" y="1801368"/>
+            <a:ext cx="3145536" cy="758952"/>
+          </a:xfrm>
+          <a:prstGeom prst="rect">
+            <a:avLst/>
+          </a:prstGeom>
+          <a:noFill/>
+          <a:ln/>
+        </p:spPr>
+        <p:txBody>
+          <a:bodyPr wrap="square" lIns="254" tIns="254" rIns="254" bIns="254" rtlCol="0" anchor="t">
             <a:normAutofit/>
           </a:bodyPr>
           <a:lstStyle/>
@@ -14179,7 +14424,7 @@
               <a:buNone/>
             </a:pPr>
             <a:r>
-              <a:rPr lang="en-US" sz="1550" dirty="0">
+              <a:rPr lang="en-US" sz="1320" dirty="0">
                 <a:solidFill>
                   <a:srgbClr val="17364A"/>
                 </a:solidFill>
@@ -14189,7 +14434,7 @@
               </a:rPr>
               <a:t>Define time-series analysis and anomaly detection in public health terms.</a:t>
             </a:r>
-            <a:endParaRPr lang="en-US" sz="1550" dirty="0"/>
+            <a:endParaRPr lang="en-US" sz="1320" dirty="0"/>
           </a:p>
         </p:txBody>
       </p:sp>
@@ -14277,13 +14522,16 @@
           <a:ln/>
         </p:spPr>
         <p:txBody>
-          <a:bodyPr wrap="square" lIns="254" tIns="254" rIns="254" bIns="254" rtlCol="0" anchor="t">
+          <a:bodyPr wrap="square" lIns="508" tIns="508" rIns="508" bIns="508" rtlCol="0" anchor="t">
             <a:normAutofit/>
           </a:bodyPr>
           <a:lstStyle/>
           <a:p>
-            <a:r>
-              <a:rPr lang="en-US" sz="1380" dirty="0">
+            <a:pPr indent="0" marL="0">
+              <a:buNone/>
+            </a:pPr>
+            <a:r>
+              <a:rPr lang="en-US" sz="1220" dirty="0">
                 <a:solidFill>
                   <a:srgbClr val="17364A"/>
                 </a:solidFill>
@@ -14291,13 +14539,16 @@
                 <a:ea typeface="Aptos" pitchFamily="34" charset="-122"/>
                 <a:cs typeface="Aptos" pitchFamily="34" charset="-120"/>
               </a:rPr>
-              <a:t>Identify risks from alert fatigue, data artifacts, delayed reporting, and model drift.</a:t>
-            </a:r>
-            <a:endParaRPr lang="en-US" sz="1380" dirty="0"/>
-          </a:p>
-          <a:p>
-            <a:r>
-              <a:rPr lang="en-US" sz="1380" dirty="0">
+              <a:t>Identify risks from alert fatigue, data artifacts, delayed.</a:t>
+            </a:r>
+            <a:endParaRPr lang="en-US" sz="1220" dirty="0"/>
+          </a:p>
+          <a:p>
+            <a:pPr indent="0" marL="0">
+              <a:buNone/>
+            </a:pPr>
+            <a:r>
+              <a:rPr lang="en-US" sz="1220" dirty="0">
                 <a:solidFill>
                   <a:srgbClr val="17364A"/>
                 </a:solidFill>
@@ -14307,7 +14558,7 @@
               </a:rPr>
               <a:t>Design guardrails for AI-supported surveillance alerts.</a:t>
             </a:r>
-            <a:endParaRPr lang="en-US" sz="1380" dirty="0"/>
+            <a:endParaRPr lang="en-US" sz="1220" dirty="0"/>
           </a:p>
         </p:txBody>
       </p:sp>
@@ -14385,17 +14636,17 @@
         </p:nvSpPr>
         <p:spPr>
           <a:xfrm>
-            <a:off x="7799832" y="5001768"/>
-            <a:ext cx="3145536" cy="502920"/>
-          </a:xfrm>
-          <a:prstGeom prst="rect">
-            <a:avLst/>
-          </a:prstGeom>
-          <a:noFill/>
-          <a:ln/>
-        </p:spPr>
-        <p:txBody>
-          <a:bodyPr wrap="square" lIns="0" tIns="0" rIns="0" bIns="0" rtlCol="0" anchor="t">
+            <a:off x="7799832" y="4974336"/>
+            <a:ext cx="3145536" cy="576072"/>
+          </a:xfrm>
+          <a:prstGeom prst="rect">
+            <a:avLst/>
+          </a:prstGeom>
+          <a:noFill/>
+          <a:ln/>
+        </p:spPr>
+        <p:txBody>
+          <a:bodyPr wrap="square" lIns="254" tIns="254" rIns="254" bIns="254" rtlCol="0" anchor="t">
             <a:normAutofit/>
           </a:bodyPr>
           <a:lstStyle/>
@@ -14404,7 +14655,7 @@
               <a:buNone/>
             </a:pPr>
             <a:r>
-              <a:rPr lang="en-US" sz="1550" dirty="0">
+              <a:rPr lang="en-US" sz="1320" dirty="0">
                 <a:solidFill>
                   <a:srgbClr val="17364A"/>
                 </a:solidFill>
@@ -14412,9 +14663,9 @@
                 <a:ea typeface="Aptos" pitchFamily="34" charset="-122"/>
                 <a:cs typeface="Aptos" pitchFamily="34" charset="-120"/>
               </a:rPr>
-              <a:t>Use the assignment to test whether you can explain the concept, apply it to a realistic public health situation, and identify what would need review before the work moves forward.</a:t>
-            </a:r>
-            <a:endParaRPr lang="en-US" sz="1550" dirty="0"/>
+              <a:t>Use the assignment to test whether you can explain the concept, apply it to a realistic public health situation, and.</a:t>
+            </a:r>
+            <a:endParaRPr lang="en-US" sz="1320" dirty="0"/>
           </a:p>
         </p:txBody>
       </p:sp>
@@ -14715,21 +14966,24 @@
           <a:ln/>
         </p:spPr>
         <p:txBody>
-          <a:bodyPr wrap="square" lIns="635" tIns="635" rIns="635" bIns="635" rtlCol="0" anchor="t">
+          <a:bodyPr wrap="square" lIns="1016" tIns="1016" rIns="1016" bIns="1016" rtlCol="0" anchor="t">
             <a:normAutofit/>
           </a:bodyPr>
           <a:lstStyle/>
           <a:p>
+            <a:pPr indent="0" marL="0">
+              <a:buNone/>
+            </a:pPr>
             <a:r>
               <a:rPr lang="en-US" sz="2100" dirty="0">
                 <a:solidFill>
-                  <a:srgbClr val="17364A"/>
-                </a:solidFill>
-                <a:latin typeface="Aptos" pitchFamily="34" charset="0"/>
-                <a:ea typeface="Aptos" pitchFamily="34" charset="-122"/>
-                <a:cs typeface="Aptos" pitchFamily="34" charset="-120"/>
-              </a:rPr>
-              <a:t>Produce an anomaly detection review plan for one public health data stream.</a:t>
+                  <a:srgbClr val="003A63"/>
+                </a:solidFill>
+                <a:latin typeface="Aptos" pitchFamily="34" charset="0"/>
+                <a:ea typeface="Aptos" pitchFamily="34" charset="-122"/>
+                <a:cs typeface="Aptos" pitchFamily="34" charset="-120"/>
+              </a:rPr>
+              <a:t>• Produce an anomaly detection review plan for one public health data stream.</a:t>
             </a:r>
             <a:endParaRPr lang="en-US" sz="2100" dirty="0"/>
           </a:p>
@@ -14809,17 +15063,17 @@
         </p:nvSpPr>
         <p:spPr>
           <a:xfrm>
-            <a:off x="7799832" y="1828800"/>
-            <a:ext cx="3145536" cy="685800"/>
-          </a:xfrm>
-          <a:prstGeom prst="rect">
-            <a:avLst/>
-          </a:prstGeom>
-          <a:noFill/>
-          <a:ln/>
-        </p:spPr>
-        <p:txBody>
-          <a:bodyPr wrap="square" lIns="0" tIns="0" rIns="0" bIns="0" rtlCol="0" anchor="t">
+            <a:off x="7799832" y="1801368"/>
+            <a:ext cx="3145536" cy="758952"/>
+          </a:xfrm>
+          <a:prstGeom prst="rect">
+            <a:avLst/>
+          </a:prstGeom>
+          <a:noFill/>
+          <a:ln/>
+        </p:spPr>
+        <p:txBody>
+          <a:bodyPr wrap="square" lIns="254" tIns="254" rIns="254" bIns="254" rtlCol="0" anchor="t">
             <a:normAutofit/>
           </a:bodyPr>
           <a:lstStyle/>
@@ -14828,7 +15082,7 @@
               <a:buNone/>
             </a:pPr>
             <a:r>
-              <a:rPr lang="en-US" sz="1550" dirty="0">
+              <a:rPr lang="en-US" sz="1320" dirty="0">
                 <a:solidFill>
                   <a:srgbClr val="17364A"/>
                 </a:solidFill>
@@ -14838,7 +15092,7 @@
               </a:rPr>
               <a:t>Produce an anomaly detection review plan for one public health data stream.</a:t>
             </a:r>
-            <a:endParaRPr lang="en-US" sz="1550" dirty="0"/>
+            <a:endParaRPr lang="en-US" sz="1320" dirty="0"/>
           </a:p>
         </p:txBody>
       </p:sp>
@@ -14926,13 +15180,16 @@
           <a:ln/>
         </p:spPr>
         <p:txBody>
-          <a:bodyPr wrap="square" lIns="254" tIns="254" rIns="254" bIns="254" rtlCol="0" anchor="t">
+          <a:bodyPr wrap="square" lIns="508" tIns="508" rIns="508" bIns="508" rtlCol="0" anchor="t">
             <a:normAutofit/>
           </a:bodyPr>
           <a:lstStyle/>
           <a:p>
-            <a:r>
-              <a:rPr lang="en-US" sz="1380" dirty="0">
+            <a:pPr indent="0" marL="0">
+              <a:buNone/>
+            </a:pPr>
+            <a:r>
+              <a:rPr lang="en-US" sz="1220" dirty="0">
                 <a:solidFill>
                   <a:srgbClr val="17364A"/>
                 </a:solidFill>
@@ -14940,9 +15197,9 @@
                 <a:ea typeface="Aptos" pitchFamily="34" charset="-122"/>
                 <a:cs typeface="Aptos" pitchFamily="34" charset="-120"/>
               </a:rPr>
-              <a:t>Produce an anomaly detection review plan for one public health data stream.</a:t>
-            </a:r>
-            <a:endParaRPr lang="en-US" sz="1380" dirty="0"/>
+              <a:t>Produce an anomaly detection review plan for one public health.</a:t>
+            </a:r>
+            <a:endParaRPr lang="en-US" sz="1220" dirty="0"/>
           </a:p>
         </p:txBody>
       </p:sp>
@@ -15020,17 +15277,17 @@
         </p:nvSpPr>
         <p:spPr>
           <a:xfrm>
-            <a:off x="7799832" y="5001768"/>
-            <a:ext cx="3145536" cy="502920"/>
-          </a:xfrm>
-          <a:prstGeom prst="rect">
-            <a:avLst/>
-          </a:prstGeom>
-          <a:noFill/>
-          <a:ln/>
-        </p:spPr>
-        <p:txBody>
-          <a:bodyPr wrap="square" lIns="0" tIns="0" rIns="0" bIns="0" rtlCol="0" anchor="t">
+            <a:off x="7799832" y="4974336"/>
+            <a:ext cx="3145536" cy="576072"/>
+          </a:xfrm>
+          <a:prstGeom prst="rect">
+            <a:avLst/>
+          </a:prstGeom>
+          <a:noFill/>
+          <a:ln/>
+        </p:spPr>
+        <p:txBody>
+          <a:bodyPr wrap="square" lIns="254" tIns="254" rIns="254" bIns="254" rtlCol="0" anchor="t">
             <a:normAutofit/>
           </a:bodyPr>
           <a:lstStyle/>
@@ -15039,7 +15296,7 @@
               <a:buNone/>
             </a:pPr>
             <a:r>
-              <a:rPr lang="en-US" sz="1550" dirty="0">
+              <a:rPr lang="en-US" sz="1320" dirty="0">
                 <a:solidFill>
                   <a:srgbClr val="17364A"/>
                 </a:solidFill>
@@ -15047,9 +15304,9 @@
                 <a:ea typeface="Aptos" pitchFamily="34" charset="-122"/>
                 <a:cs typeface="Aptos" pitchFamily="34" charset="-120"/>
               </a:rPr>
-              <a:t>Use the assignment to test whether you can explain the concept, apply it to a realistic public health situation, and identify what would need review before the work moves forward.</a:t>
-            </a:r>
-            <a:endParaRPr lang="en-US" sz="1550" dirty="0"/>
+              <a:t>Use the assignment to test whether you can explain the concept, apply it to a realistic public health situation, and.</a:t>
+            </a:r>
+            <a:endParaRPr lang="en-US" sz="1320" dirty="0"/>
           </a:p>
         </p:txBody>
       </p:sp>
@@ -15350,49 +15607,58 @@
           <a:ln/>
         </p:spPr>
         <p:txBody>
-          <a:bodyPr wrap="square" lIns="635" tIns="635" rIns="635" bIns="635" rtlCol="0" anchor="t">
+          <a:bodyPr wrap="square" lIns="1016" tIns="1016" rIns="1016" bIns="1016" rtlCol="0" anchor="t">
             <a:normAutofit/>
           </a:bodyPr>
           <a:lstStyle/>
           <a:p>
+            <a:pPr indent="0" marL="0">
+              <a:buNone/>
+            </a:pPr>
             <a:r>
               <a:rPr lang="en-US" sz="2100" dirty="0">
                 <a:solidFill>
-                  <a:srgbClr val="17364A"/>
-                </a:solidFill>
-                <a:latin typeface="Aptos" pitchFamily="34" charset="0"/>
-                <a:ea typeface="Aptos" pitchFamily="34" charset="-122"/>
-                <a:cs typeface="Aptos" pitchFamily="34" charset="-120"/>
-              </a:rPr>
-              <a:t>Time-series analysis examines data collected over time.</a:t>
+                  <a:srgbClr val="003A63"/>
+                </a:solidFill>
+                <a:latin typeface="Aptos" pitchFamily="34" charset="0"/>
+                <a:ea typeface="Aptos" pitchFamily="34" charset="-122"/>
+                <a:cs typeface="Aptos" pitchFamily="34" charset="-120"/>
+              </a:rPr>
+              <a:t>• Time-series analysis examines data collected over time.</a:t>
             </a:r>
             <a:endParaRPr lang="en-US" sz="2100" dirty="0"/>
           </a:p>
           <a:p>
+            <a:pPr indent="0" marL="0">
+              <a:buNone/>
+            </a:pPr>
             <a:r>
               <a:rPr lang="en-US" sz="2100" dirty="0">
                 <a:solidFill>
-                  <a:srgbClr val="17364A"/>
-                </a:solidFill>
-                <a:latin typeface="Aptos" pitchFamily="34" charset="0"/>
-                <a:ea typeface="Aptos" pitchFamily="34" charset="-122"/>
-                <a:cs typeface="Aptos" pitchFamily="34" charset="-120"/>
-              </a:rPr>
-              <a:t>In public health, time patterns are central to surveillance, outbreak detection, syndromic monitoring,.</a:t>
+                  <a:srgbClr val="003A63"/>
+                </a:solidFill>
+                <a:latin typeface="Aptos" pitchFamily="34" charset="0"/>
+                <a:ea typeface="Aptos" pitchFamily="34" charset="-122"/>
+                <a:cs typeface="Aptos" pitchFamily="34" charset="-120"/>
+              </a:rPr>
+              <a:t>• In public health, time patterns are central to surveillance, outbreak detection, syndromic.</a:t>
             </a:r>
             <a:endParaRPr lang="en-US" sz="2100" dirty="0"/>
           </a:p>
           <a:p>
+            <a:pPr indent="0" marL="0">
+              <a:buNone/>
+            </a:pPr>
             <a:r>
               <a:rPr lang="en-US" sz="2100" dirty="0">
                 <a:solidFill>
-                  <a:srgbClr val="17364A"/>
-                </a:solidFill>
-                <a:latin typeface="Aptos" pitchFamily="34" charset="0"/>
-                <a:ea typeface="Aptos" pitchFamily="34" charset="-122"/>
-                <a:cs typeface="Aptos" pitchFamily="34" charset="-120"/>
-              </a:rPr>
-              <a:t>AI-supported anomaly detection can help identify unusual increases, decreases, or pattern changes that.</a:t>
+                  <a:srgbClr val="003A63"/>
+                </a:solidFill>
+                <a:latin typeface="Aptos" pitchFamily="34" charset="0"/>
+                <a:ea typeface="Aptos" pitchFamily="34" charset="-122"/>
+                <a:cs typeface="Aptos" pitchFamily="34" charset="-120"/>
+              </a:rPr>
+              <a:t>• AI-supported anomaly detection can help identify unusual increases, decreases, or pattern.</a:t>
             </a:r>
             <a:endParaRPr lang="en-US" sz="2100" dirty="0"/>
           </a:p>
@@ -15472,17 +15738,17 @@
         </p:nvSpPr>
         <p:spPr>
           <a:xfrm>
-            <a:off x="7799832" y="1828800"/>
-            <a:ext cx="3145536" cy="685800"/>
-          </a:xfrm>
-          <a:prstGeom prst="rect">
-            <a:avLst/>
-          </a:prstGeom>
-          <a:noFill/>
-          <a:ln/>
-        </p:spPr>
-        <p:txBody>
-          <a:bodyPr wrap="square" lIns="0" tIns="0" rIns="0" bIns="0" rtlCol="0" anchor="t">
+            <a:off x="7799832" y="1801368"/>
+            <a:ext cx="3145536" cy="758952"/>
+          </a:xfrm>
+          <a:prstGeom prst="rect">
+            <a:avLst/>
+          </a:prstGeom>
+          <a:noFill/>
+          <a:ln/>
+        </p:spPr>
+        <p:txBody>
+          <a:bodyPr wrap="square" lIns="254" tIns="254" rIns="254" bIns="254" rtlCol="0" anchor="t">
             <a:normAutofit/>
           </a:bodyPr>
           <a:lstStyle/>
@@ -15491,7 +15757,7 @@
               <a:buNone/>
             </a:pPr>
             <a:r>
-              <a:rPr lang="en-US" sz="1550" dirty="0">
+              <a:rPr lang="en-US" sz="1320" dirty="0">
                 <a:solidFill>
                   <a:srgbClr val="17364A"/>
                 </a:solidFill>
@@ -15501,7 +15767,7 @@
               </a:rPr>
               <a:t>Time-series analysis examines data collected over time.</a:t>
             </a:r>
-            <a:endParaRPr lang="en-US" sz="1550" dirty="0"/>
+            <a:endParaRPr lang="en-US" sz="1320" dirty="0"/>
           </a:p>
         </p:txBody>
       </p:sp>
@@ -15589,13 +15855,16 @@
           <a:ln/>
         </p:spPr>
         <p:txBody>
-          <a:bodyPr wrap="square" lIns="254" tIns="254" rIns="254" bIns="254" rtlCol="0" anchor="t">
+          <a:bodyPr wrap="square" lIns="508" tIns="508" rIns="508" bIns="508" rtlCol="0" anchor="t">
             <a:normAutofit/>
           </a:bodyPr>
           <a:lstStyle/>
           <a:p>
-            <a:r>
-              <a:rPr lang="en-US" sz="1380" dirty="0">
+            <a:pPr indent="0" marL="0">
+              <a:buNone/>
+            </a:pPr>
+            <a:r>
+              <a:rPr lang="en-US" sz="1220" dirty="0">
                 <a:solidFill>
                   <a:srgbClr val="17364A"/>
                 </a:solidFill>
@@ -15603,13 +15872,16 @@
                 <a:ea typeface="Aptos" pitchFamily="34" charset="-122"/>
                 <a:cs typeface="Aptos" pitchFamily="34" charset="-120"/>
               </a:rPr>
-              <a:t>In public health, time patterns are central to surveillance, outbreak detection, syndromic.</a:t>
-            </a:r>
-            <a:endParaRPr lang="en-US" sz="1380" dirty="0"/>
-          </a:p>
-          <a:p>
-            <a:r>
-              <a:rPr lang="en-US" sz="1380" dirty="0">
+              <a:t>In public health, time patterns are central to surveillance,.</a:t>
+            </a:r>
+            <a:endParaRPr lang="en-US" sz="1220" dirty="0"/>
+          </a:p>
+          <a:p>
+            <a:pPr indent="0" marL="0">
+              <a:buNone/>
+            </a:pPr>
+            <a:r>
+              <a:rPr lang="en-US" sz="1220" dirty="0">
                 <a:solidFill>
                   <a:srgbClr val="17364A"/>
                 </a:solidFill>
@@ -15617,13 +15889,16 @@
                 <a:ea typeface="Aptos" pitchFamily="34" charset="-122"/>
                 <a:cs typeface="Aptos" pitchFamily="34" charset="-120"/>
               </a:rPr>
-              <a:t>AI-supported anomaly detection can help identify unusual increases, decreases, or pattern.</a:t>
-            </a:r>
-            <a:endParaRPr lang="en-US" sz="1380" dirty="0"/>
-          </a:p>
-          <a:p>
-            <a:r>
-              <a:rPr lang="en-US" sz="1380" dirty="0">
+              <a:t>AI-supported anomaly detection can help identify unusual.</a:t>
+            </a:r>
+            <a:endParaRPr lang="en-US" sz="1220" dirty="0"/>
+          </a:p>
+          <a:p>
+            <a:pPr indent="0" marL="0">
+              <a:buNone/>
+            </a:pPr>
+            <a:r>
+              <a:rPr lang="en-US" sz="1220" dirty="0">
                 <a:solidFill>
                   <a:srgbClr val="17364A"/>
                 </a:solidFill>
@@ -15631,9 +15906,9 @@
                 <a:ea typeface="Aptos" pitchFamily="34" charset="-122"/>
                 <a:cs typeface="Aptos" pitchFamily="34" charset="-120"/>
               </a:rPr>
-              <a:t>This module explains how time-series and anomaly detection methods can support public.</a:t>
-            </a:r>
-            <a:endParaRPr lang="en-US" sz="1380" dirty="0"/>
+              <a:t>This module explains how time-series and anomaly detection methods.</a:t>
+            </a:r>
+            <a:endParaRPr lang="en-US" sz="1220" dirty="0"/>
           </a:p>
         </p:txBody>
       </p:sp>
@@ -15711,17 +15986,17 @@
         </p:nvSpPr>
         <p:spPr>
           <a:xfrm>
-            <a:off x="7799832" y="5001768"/>
-            <a:ext cx="3145536" cy="502920"/>
-          </a:xfrm>
-          <a:prstGeom prst="rect">
-            <a:avLst/>
-          </a:prstGeom>
-          <a:noFill/>
-          <a:ln/>
-        </p:spPr>
-        <p:txBody>
-          <a:bodyPr wrap="square" lIns="0" tIns="0" rIns="0" bIns="0" rtlCol="0" anchor="t">
+            <a:off x="7799832" y="4974336"/>
+            <a:ext cx="3145536" cy="576072"/>
+          </a:xfrm>
+          <a:prstGeom prst="rect">
+            <a:avLst/>
+          </a:prstGeom>
+          <a:noFill/>
+          <a:ln/>
+        </p:spPr>
+        <p:txBody>
+          <a:bodyPr wrap="square" lIns="254" tIns="254" rIns="254" bIns="254" rtlCol="0" anchor="t">
             <a:normAutofit/>
           </a:bodyPr>
           <a:lstStyle/>
@@ -15730,7 +16005,7 @@
               <a:buNone/>
             </a:pPr>
             <a:r>
-              <a:rPr lang="en-US" sz="1550" dirty="0">
+              <a:rPr lang="en-US" sz="1320" dirty="0">
                 <a:solidFill>
                   <a:srgbClr val="17364A"/>
                 </a:solidFill>
@@ -15738,9 +16013,9 @@
                 <a:ea typeface="Aptos" pitchFamily="34" charset="-122"/>
                 <a:cs typeface="Aptos" pitchFamily="34" charset="-120"/>
               </a:rPr>
-              <a:t>Connect the concept to public health purpose, responsible use, required safeguards, documentation, and the next action a department should take.</a:t>
-            </a:r>
-            <a:endParaRPr lang="en-US" sz="1550" dirty="0"/>
+              <a:t>Connect the concept to public health purpose, responsible use, required safeguards, documentation, and the next action a.</a:t>
+            </a:r>
+            <a:endParaRPr lang="en-US" sz="1320" dirty="0"/>
           </a:p>
         </p:txBody>
       </p:sp>
@@ -16041,49 +16316,58 @@
           <a:ln/>
         </p:spPr>
         <p:txBody>
-          <a:bodyPr wrap="square" lIns="635" tIns="635" rIns="635" bIns="635" rtlCol="0" anchor="t">
+          <a:bodyPr wrap="square" lIns="1016" tIns="1016" rIns="1016" bIns="1016" rtlCol="0" anchor="t">
             <a:normAutofit/>
           </a:bodyPr>
           <a:lstStyle/>
           <a:p>
+            <a:pPr indent="0" marL="0">
+              <a:buNone/>
+            </a:pPr>
             <a:r>
               <a:rPr lang="en-US" sz="2100" dirty="0">
                 <a:solidFill>
-                  <a:srgbClr val="17364A"/>
-                </a:solidFill>
-                <a:latin typeface="Aptos" pitchFamily="34" charset="0"/>
-                <a:ea typeface="Aptos" pitchFamily="34" charset="-122"/>
-                <a:cs typeface="Aptos" pitchFamily="34" charset="-120"/>
-              </a:rPr>
-              <a:t>Time-series methods matter because public health surveillance is often about change.</a:t>
+                  <a:srgbClr val="003A63"/>
+                </a:solidFill>
+                <a:latin typeface="Aptos" pitchFamily="34" charset="0"/>
+                <a:ea typeface="Aptos" pitchFamily="34" charset="-122"/>
+                <a:cs typeface="Aptos" pitchFamily="34" charset="-120"/>
+              </a:rPr>
+              <a:t>• Time-series methods matter because public health surveillance is often about change.</a:t>
             </a:r>
             <a:endParaRPr lang="en-US" sz="2100" dirty="0"/>
           </a:p>
           <a:p>
+            <a:pPr indent="0" marL="0">
+              <a:buNone/>
+            </a:pPr>
             <a:r>
               <a:rPr lang="en-US" sz="2100" dirty="0">
                 <a:solidFill>
-                  <a:srgbClr val="17364A"/>
-                </a:solidFill>
-                <a:latin typeface="Aptos" pitchFamily="34" charset="0"/>
-                <a:ea typeface="Aptos" pitchFamily="34" charset="-122"/>
-                <a:cs typeface="Aptos" pitchFamily="34" charset="-120"/>
-              </a:rPr>
-              <a:t>A single count may be difficult to interpret without knowing whether it is higher than expected for.</a:t>
+                  <a:srgbClr val="003A63"/>
+                </a:solidFill>
+                <a:latin typeface="Aptos" pitchFamily="34" charset="0"/>
+                <a:ea typeface="Aptos" pitchFamily="34" charset="-122"/>
+                <a:cs typeface="Aptos" pitchFamily="34" charset="-120"/>
+              </a:rPr>
+              <a:t>• A single count may be difficult to interpret without knowing whether it is higher than.</a:t>
             </a:r>
             <a:endParaRPr lang="en-US" sz="2100" dirty="0"/>
           </a:p>
           <a:p>
+            <a:pPr indent="0" marL="0">
+              <a:buNone/>
+            </a:pPr>
             <a:r>
               <a:rPr lang="en-US" sz="2100" dirty="0">
                 <a:solidFill>
-                  <a:srgbClr val="17364A"/>
-                </a:solidFill>
-                <a:latin typeface="Aptos" pitchFamily="34" charset="0"/>
-                <a:ea typeface="Aptos" pitchFamily="34" charset="-122"/>
-                <a:cs typeface="Aptos" pitchFamily="34" charset="-120"/>
-              </a:rPr>
-              <a:t>AI-supported anomaly detection can help staff review large volumes of data and prioritize signals that.</a:t>
+                  <a:srgbClr val="003A63"/>
+                </a:solidFill>
+                <a:latin typeface="Aptos" pitchFamily="34" charset="0"/>
+                <a:ea typeface="Aptos" pitchFamily="34" charset="-122"/>
+                <a:cs typeface="Aptos" pitchFamily="34" charset="-120"/>
+              </a:rPr>
+              <a:t>• AI-supported anomaly detection can help staff review large volumes of data and prioritize.</a:t>
             </a:r>
             <a:endParaRPr lang="en-US" sz="2100" dirty="0"/>
           </a:p>
@@ -16163,17 +16447,17 @@
         </p:nvSpPr>
         <p:spPr>
           <a:xfrm>
-            <a:off x="7799832" y="1828800"/>
-            <a:ext cx="3145536" cy="685800"/>
-          </a:xfrm>
-          <a:prstGeom prst="rect">
-            <a:avLst/>
-          </a:prstGeom>
-          <a:noFill/>
-          <a:ln/>
-        </p:spPr>
-        <p:txBody>
-          <a:bodyPr wrap="square" lIns="0" tIns="0" rIns="0" bIns="0" rtlCol="0" anchor="t">
+            <a:off x="7799832" y="1801368"/>
+            <a:ext cx="3145536" cy="758952"/>
+          </a:xfrm>
+          <a:prstGeom prst="rect">
+            <a:avLst/>
+          </a:prstGeom>
+          <a:noFill/>
+          <a:ln/>
+        </p:spPr>
+        <p:txBody>
+          <a:bodyPr wrap="square" lIns="254" tIns="254" rIns="254" bIns="254" rtlCol="0" anchor="t">
             <a:normAutofit/>
           </a:bodyPr>
           <a:lstStyle/>
@@ -16182,7 +16466,7 @@
               <a:buNone/>
             </a:pPr>
             <a:r>
-              <a:rPr lang="en-US" sz="1550" dirty="0">
+              <a:rPr lang="en-US" sz="1320" dirty="0">
                 <a:solidFill>
                   <a:srgbClr val="17364A"/>
                 </a:solidFill>
@@ -16192,7 +16476,7 @@
               </a:rPr>
               <a:t>Time-series methods matter because public health surveillance is often about change.</a:t>
             </a:r>
-            <a:endParaRPr lang="en-US" sz="1550" dirty="0"/>
+            <a:endParaRPr lang="en-US" sz="1320" dirty="0"/>
           </a:p>
         </p:txBody>
       </p:sp>
@@ -16280,13 +16564,16 @@
           <a:ln/>
         </p:spPr>
         <p:txBody>
-          <a:bodyPr wrap="square" lIns="254" tIns="254" rIns="254" bIns="254" rtlCol="0" anchor="t">
+          <a:bodyPr wrap="square" lIns="508" tIns="508" rIns="508" bIns="508" rtlCol="0" anchor="t">
             <a:normAutofit/>
           </a:bodyPr>
           <a:lstStyle/>
           <a:p>
-            <a:r>
-              <a:rPr lang="en-US" sz="1380" dirty="0">
+            <a:pPr indent="0" marL="0">
+              <a:buNone/>
+            </a:pPr>
+            <a:r>
+              <a:rPr lang="en-US" sz="1220" dirty="0">
                 <a:solidFill>
                   <a:srgbClr val="17364A"/>
                 </a:solidFill>
@@ -16294,13 +16581,16 @@
                 <a:ea typeface="Aptos" pitchFamily="34" charset="-122"/>
                 <a:cs typeface="Aptos" pitchFamily="34" charset="-120"/>
               </a:rPr>
-              <a:t>A single count may be difficult to interpret without knowing whether it is higher than.</a:t>
-            </a:r>
-            <a:endParaRPr lang="en-US" sz="1380" dirty="0"/>
-          </a:p>
-          <a:p>
-            <a:r>
-              <a:rPr lang="en-US" sz="1380" dirty="0">
+              <a:t>A single count may be difficult to interpret without knowing.</a:t>
+            </a:r>
+            <a:endParaRPr lang="en-US" sz="1220" dirty="0"/>
+          </a:p>
+          <a:p>
+            <a:pPr indent="0" marL="0">
+              <a:buNone/>
+            </a:pPr>
+            <a:r>
+              <a:rPr lang="en-US" sz="1220" dirty="0">
                 <a:solidFill>
                   <a:srgbClr val="17364A"/>
                 </a:solidFill>
@@ -16308,13 +16598,16 @@
                 <a:ea typeface="Aptos" pitchFamily="34" charset="-122"/>
                 <a:cs typeface="Aptos" pitchFamily="34" charset="-120"/>
               </a:rPr>
-              <a:t>AI-supported anomaly detection can help staff review large volumes of data and prioritize.</a:t>
-            </a:r>
-            <a:endParaRPr lang="en-US" sz="1380" dirty="0"/>
-          </a:p>
-          <a:p>
-            <a:r>
-              <a:rPr lang="en-US" sz="1380" dirty="0">
+              <a:t>AI-supported anomaly detection can help staff review large volumes.</a:t>
+            </a:r>
+            <a:endParaRPr lang="en-US" sz="1220" dirty="0"/>
+          </a:p>
+          <a:p>
+            <a:pPr indent="0" marL="0">
+              <a:buNone/>
+            </a:pPr>
+            <a:r>
+              <a:rPr lang="en-US" sz="1220" dirty="0">
                 <a:solidFill>
                   <a:srgbClr val="17364A"/>
                 </a:solidFill>
@@ -16322,9 +16615,9 @@
                 <a:ea typeface="Aptos" pitchFamily="34" charset="-122"/>
                 <a:cs typeface="Aptos" pitchFamily="34" charset="-120"/>
               </a:rPr>
-              <a:t>However, public health time-series data are shaped by reporting systems as much as disease.</a:t>
-            </a:r>
-            <a:endParaRPr lang="en-US" sz="1380" dirty="0"/>
+              <a:t>However, public health time-series data are shaped by reporting.</a:t>
+            </a:r>
+            <a:endParaRPr lang="en-US" sz="1220" dirty="0"/>
           </a:p>
         </p:txBody>
       </p:sp>
@@ -16402,17 +16695,17 @@
         </p:nvSpPr>
         <p:spPr>
           <a:xfrm>
-            <a:off x="7799832" y="5001768"/>
-            <a:ext cx="3145536" cy="502920"/>
-          </a:xfrm>
-          <a:prstGeom prst="rect">
-            <a:avLst/>
-          </a:prstGeom>
-          <a:noFill/>
-          <a:ln/>
-        </p:spPr>
-        <p:txBody>
-          <a:bodyPr wrap="square" lIns="0" tIns="0" rIns="0" bIns="0" rtlCol="0" anchor="t">
+            <a:off x="7799832" y="4974336"/>
+            <a:ext cx="3145536" cy="576072"/>
+          </a:xfrm>
+          <a:prstGeom prst="rect">
+            <a:avLst/>
+          </a:prstGeom>
+          <a:noFill/>
+          <a:ln/>
+        </p:spPr>
+        <p:txBody>
+          <a:bodyPr wrap="square" lIns="254" tIns="254" rIns="254" bIns="254" rtlCol="0" anchor="t">
             <a:normAutofit/>
           </a:bodyPr>
           <a:lstStyle/>
@@ -16421,7 +16714,7 @@
               <a:buNone/>
             </a:pPr>
             <a:r>
-              <a:rPr lang="en-US" sz="1550" dirty="0">
+              <a:rPr lang="en-US" sz="1320" dirty="0">
                 <a:solidFill>
                   <a:srgbClr val="17364A"/>
                 </a:solidFill>
@@ -16429,9 +16722,9 @@
                 <a:ea typeface="Aptos" pitchFamily="34" charset="-122"/>
                 <a:cs typeface="Aptos" pitchFamily="34" charset="-120"/>
               </a:rPr>
-              <a:t>Connect the concept to public health purpose, responsible use, required safeguards, documentation, and the next action a department should take.</a:t>
-            </a:r>
-            <a:endParaRPr lang="en-US" sz="1550" dirty="0"/>
+              <a:t>Connect the concept to public health purpose, responsible use, required safeguards, documentation, and the next action a.</a:t>
+            </a:r>
+            <a:endParaRPr lang="en-US" sz="1320" dirty="0"/>
           </a:p>
         </p:txBody>
       </p:sp>
@@ -16732,49 +17025,58 @@
           <a:ln/>
         </p:spPr>
         <p:txBody>
-          <a:bodyPr wrap="square" lIns="635" tIns="635" rIns="635" bIns="635" rtlCol="0" anchor="t">
+          <a:bodyPr wrap="square" lIns="1016" tIns="1016" rIns="1016" bIns="1016" rtlCol="0" anchor="t">
             <a:normAutofit/>
           </a:bodyPr>
           <a:lstStyle/>
           <a:p>
+            <a:pPr indent="0" marL="0">
+              <a:buNone/>
+            </a:pPr>
             <a:r>
               <a:rPr lang="en-US" sz="2100" dirty="0">
                 <a:solidFill>
-                  <a:srgbClr val="17364A"/>
-                </a:solidFill>
-                <a:latin typeface="Aptos" pitchFamily="34" charset="0"/>
-                <a:ea typeface="Aptos" pitchFamily="34" charset="-122"/>
-                <a:cs typeface="Aptos" pitchFamily="34" charset="-120"/>
-              </a:rPr>
-              <a:t>A syndromic surveillance team may use anomaly detection to monitor emergency department visits for.</a:t>
+                  <a:srgbClr val="003A63"/>
+                </a:solidFill>
+                <a:latin typeface="Aptos" pitchFamily="34" charset="0"/>
+                <a:ea typeface="Aptos" pitchFamily="34" charset="-122"/>
+                <a:cs typeface="Aptos" pitchFamily="34" charset="-120"/>
+              </a:rPr>
+              <a:t>• A syndromic surveillance team may use anomaly detection to monitor emergency department visits.</a:t>
             </a:r>
             <a:endParaRPr lang="en-US" sz="2100" dirty="0"/>
           </a:p>
           <a:p>
+            <a:pPr indent="0" marL="0">
+              <a:buNone/>
+            </a:pPr>
             <a:r>
               <a:rPr lang="en-US" sz="2100" dirty="0">
                 <a:solidFill>
-                  <a:srgbClr val="17364A"/>
-                </a:solidFill>
-                <a:latin typeface="Aptos" pitchFamily="34" charset="0"/>
-                <a:ea typeface="Aptos" pitchFamily="34" charset="-122"/>
-                <a:cs typeface="Aptos" pitchFamily="34" charset="-120"/>
-              </a:rPr>
-              <a:t>The system may flag a county when visits exceed the expected range for that day and season.</a:t>
+                  <a:srgbClr val="003A63"/>
+                </a:solidFill>
+                <a:latin typeface="Aptos" pitchFamily="34" charset="0"/>
+                <a:ea typeface="Aptos" pitchFamily="34" charset="-122"/>
+                <a:cs typeface="Aptos" pitchFamily="34" charset="-120"/>
+              </a:rPr>
+              <a:t>• The system may flag a county when visits exceed the expected range for that day and season.</a:t>
             </a:r>
             <a:endParaRPr lang="en-US" sz="2100" dirty="0"/>
           </a:p>
           <a:p>
+            <a:pPr indent="0" marL="0">
+              <a:buNone/>
+            </a:pPr>
             <a:r>
               <a:rPr lang="en-US" sz="2100" dirty="0">
                 <a:solidFill>
-                  <a:srgbClr val="17364A"/>
-                </a:solidFill>
-                <a:latin typeface="Aptos" pitchFamily="34" charset="0"/>
-                <a:ea typeface="Aptos" pitchFamily="34" charset="-122"/>
-                <a:cs typeface="Aptos" pitchFamily="34" charset="-120"/>
-              </a:rPr>
-              <a:t>The alert could prompt review of age groups, facilities, diagnosis text, lab data, school absenteeism,.</a:t>
+                  <a:srgbClr val="003A63"/>
+                </a:solidFill>
+                <a:latin typeface="Aptos" pitchFamily="34" charset="0"/>
+                <a:ea typeface="Aptos" pitchFamily="34" charset="-122"/>
+                <a:cs typeface="Aptos" pitchFamily="34" charset="-120"/>
+              </a:rPr>
+              <a:t>• The alert could prompt review of age groups, facilities, diagnosis text, lab data, school.</a:t>
             </a:r>
             <a:endParaRPr lang="en-US" sz="2100" dirty="0"/>
           </a:p>
@@ -16854,17 +17156,17 @@
         </p:nvSpPr>
         <p:spPr>
           <a:xfrm>
-            <a:off x="7799832" y="1828800"/>
-            <a:ext cx="3145536" cy="685800"/>
-          </a:xfrm>
-          <a:prstGeom prst="rect">
-            <a:avLst/>
-          </a:prstGeom>
-          <a:noFill/>
-          <a:ln/>
-        </p:spPr>
-        <p:txBody>
-          <a:bodyPr wrap="square" lIns="0" tIns="0" rIns="0" bIns="0" rtlCol="0" anchor="t">
+            <a:off x="7799832" y="1801368"/>
+            <a:ext cx="3145536" cy="758952"/>
+          </a:xfrm>
+          <a:prstGeom prst="rect">
+            <a:avLst/>
+          </a:prstGeom>
+          <a:noFill/>
+          <a:ln/>
+        </p:spPr>
+        <p:txBody>
+          <a:bodyPr wrap="square" lIns="254" tIns="254" rIns="254" bIns="254" rtlCol="0" anchor="t">
             <a:normAutofit/>
           </a:bodyPr>
           <a:lstStyle/>
@@ -16873,7 +17175,7 @@
               <a:buNone/>
             </a:pPr>
             <a:r>
-              <a:rPr lang="en-US" sz="1550" dirty="0">
+              <a:rPr lang="en-US" sz="1320" dirty="0">
                 <a:solidFill>
                   <a:srgbClr val="17364A"/>
                 </a:solidFill>
@@ -16883,7 +17185,7 @@
               </a:rPr>
               <a:t>A syndromic surveillance team may use anomaly detection to monitor emergency department visits for.</a:t>
             </a:r>
-            <a:endParaRPr lang="en-US" sz="1550" dirty="0"/>
+            <a:endParaRPr lang="en-US" sz="1320" dirty="0"/>
           </a:p>
         </p:txBody>
       </p:sp>
@@ -16971,13 +17273,16 @@
           <a:ln/>
         </p:spPr>
         <p:txBody>
-          <a:bodyPr wrap="square" lIns="254" tIns="254" rIns="254" bIns="254" rtlCol="0" anchor="t">
+          <a:bodyPr wrap="square" lIns="508" tIns="508" rIns="508" bIns="508" rtlCol="0" anchor="t">
             <a:normAutofit/>
           </a:bodyPr>
           <a:lstStyle/>
           <a:p>
-            <a:r>
-              <a:rPr lang="en-US" sz="1380" dirty="0">
+            <a:pPr indent="0" marL="0">
+              <a:buNone/>
+            </a:pPr>
+            <a:r>
+              <a:rPr lang="en-US" sz="1220" dirty="0">
                 <a:solidFill>
                   <a:srgbClr val="17364A"/>
                 </a:solidFill>
@@ -16985,13 +17290,16 @@
                 <a:ea typeface="Aptos" pitchFamily="34" charset="-122"/>
                 <a:cs typeface="Aptos" pitchFamily="34" charset="-120"/>
               </a:rPr>
-              <a:t>A syndromic surveillance team may use anomaly detection to monitor emergency department.</a:t>
-            </a:r>
-            <a:endParaRPr lang="en-US" sz="1380" dirty="0"/>
-          </a:p>
-          <a:p>
-            <a:r>
-              <a:rPr lang="en-US" sz="1380" dirty="0">
+              <a:t>A syndromic surveillance team may use anomaly detection to monitor.</a:t>
+            </a:r>
+            <a:endParaRPr lang="en-US" sz="1220" dirty="0"/>
+          </a:p>
+          <a:p>
+            <a:pPr indent="0" marL="0">
+              <a:buNone/>
+            </a:pPr>
+            <a:r>
+              <a:rPr lang="en-US" sz="1220" dirty="0">
                 <a:solidFill>
                   <a:srgbClr val="17364A"/>
                 </a:solidFill>
@@ -16999,13 +17307,16 @@
                 <a:ea typeface="Aptos" pitchFamily="34" charset="-122"/>
                 <a:cs typeface="Aptos" pitchFamily="34" charset="-120"/>
               </a:rPr>
-              <a:t>The alert could prompt review of age groups, facilities, diagnosis text, lab data, school.</a:t>
-            </a:r>
-            <a:endParaRPr lang="en-US" sz="1380" dirty="0"/>
-          </a:p>
-          <a:p>
-            <a:r>
-              <a:rPr lang="en-US" sz="1380" dirty="0">
+              <a:t>The alert could prompt review of age groups, facilities, diagnosis.</a:t>
+            </a:r>
+            <a:endParaRPr lang="en-US" sz="1220" dirty="0"/>
+          </a:p>
+          <a:p>
+            <a:pPr indent="0" marL="0">
+              <a:buNone/>
+            </a:pPr>
+            <a:r>
+              <a:rPr lang="en-US" sz="1220" dirty="0">
                 <a:solidFill>
                   <a:srgbClr val="17364A"/>
                 </a:solidFill>
@@ -17013,9 +17324,9 @@
                 <a:ea typeface="Aptos" pitchFamily="34" charset="-122"/>
                 <a:cs typeface="Aptos" pitchFamily="34" charset="-120"/>
               </a:rPr>
-              <a:t>The alert is valuable only if it enters a disciplined review process.</a:t>
-            </a:r>
-            <a:endParaRPr lang="en-US" sz="1380" dirty="0"/>
+              <a:t>The alert is valuable only if it enters a disciplined review.</a:t>
+            </a:r>
+            <a:endParaRPr lang="en-US" sz="1220" dirty="0"/>
           </a:p>
         </p:txBody>
       </p:sp>
@@ -17093,17 +17404,17 @@
         </p:nvSpPr>
         <p:spPr>
           <a:xfrm>
-            <a:off x="7799832" y="5001768"/>
-            <a:ext cx="3145536" cy="502920"/>
-          </a:xfrm>
-          <a:prstGeom prst="rect">
-            <a:avLst/>
-          </a:prstGeom>
-          <a:noFill/>
-          <a:ln/>
-        </p:spPr>
-        <p:txBody>
-          <a:bodyPr wrap="square" lIns="0" tIns="0" rIns="0" bIns="0" rtlCol="0" anchor="t">
+            <a:off x="7799832" y="4974336"/>
+            <a:ext cx="3145536" cy="576072"/>
+          </a:xfrm>
+          <a:prstGeom prst="rect">
+            <a:avLst/>
+          </a:prstGeom>
+          <a:noFill/>
+          <a:ln/>
+        </p:spPr>
+        <p:txBody>
+          <a:bodyPr wrap="square" lIns="254" tIns="254" rIns="254" bIns="254" rtlCol="0" anchor="t">
             <a:normAutofit/>
           </a:bodyPr>
           <a:lstStyle/>
@@ -17112,7 +17423,7 @@
               <a:buNone/>
             </a:pPr>
             <a:r>
-              <a:rPr lang="en-US" sz="1550" dirty="0">
+              <a:rPr lang="en-US" sz="1320" dirty="0">
                 <a:solidFill>
                   <a:srgbClr val="17364A"/>
                 </a:solidFill>
@@ -17120,9 +17431,9 @@
                 <a:ea typeface="Aptos" pitchFamily="34" charset="-122"/>
                 <a:cs typeface="Aptos" pitchFamily="34" charset="-120"/>
               </a:rPr>
-              <a:t>Connect the concept to public health purpose, responsible use, required safeguards, documentation, and the next action a department should take.</a:t>
-            </a:r>
-            <a:endParaRPr lang="en-US" sz="1550" dirty="0"/>
+              <a:t>Connect the concept to public health purpose, responsible use, required safeguards, documentation, and the next action a.</a:t>
+            </a:r>
+            <a:endParaRPr lang="en-US" sz="1320" dirty="0"/>
           </a:p>
         </p:txBody>
       </p:sp>

--- a/downloads/presentations/modules/anl-240.pptx
+++ b/downloads/presentations/modules/anl-240.pptx
@@ -3419,11 +3419,11 @@
         <p:spPr>
           <a:xfrm>
             <a:off x="7635240" y="1325880"/>
-            <a:ext cx="3474720" cy="1325880"/>
+            <a:ext cx="3474720" cy="1207008"/>
           </a:xfrm>
           <a:prstGeom prst="roundRect">
             <a:avLst>
-              <a:gd name="adj" fmla="val 8276"/>
+              <a:gd name="adj" fmla="val 9091"/>
             </a:avLst>
           </a:prstGeom>
           <a:solidFill>
@@ -3485,7 +3485,7 @@
         <p:spPr>
           <a:xfrm>
             <a:off x="7799832" y="1801368"/>
-            <a:ext cx="3145536" cy="758952"/>
+            <a:ext cx="3145536" cy="640080"/>
           </a:xfrm>
           <a:prstGeom prst="rect">
             <a:avLst/>
@@ -3525,12 +3525,12 @@
         </p:nvSpPr>
         <p:spPr>
           <a:xfrm>
-            <a:off x="7635240" y="2788920"/>
-            <a:ext cx="3474720" cy="1536192"/>
+            <a:off x="7635240" y="2670048"/>
+            <a:ext cx="3474720" cy="1377086"/>
           </a:xfrm>
           <a:prstGeom prst="roundRect">
             <a:avLst>
-              <a:gd name="adj" fmla="val 7143"/>
+              <a:gd name="adj" fmla="val 7968"/>
             </a:avLst>
           </a:prstGeom>
           <a:solidFill>
@@ -3552,7 +3552,7 @@
         </p:nvSpPr>
         <p:spPr>
           <a:xfrm>
-            <a:off x="7799832" y="2935224"/>
+            <a:off x="7799832" y="2816352"/>
             <a:ext cx="3145536" cy="256032"/>
           </a:xfrm>
           <a:prstGeom prst="rect">
@@ -3591,8 +3591,8 @@
         </p:nvSpPr>
         <p:spPr>
           <a:xfrm>
-            <a:off x="7818120" y="3300984"/>
-            <a:ext cx="3090672" cy="877824"/>
+            <a:off x="7818120" y="3182112"/>
+            <a:ext cx="3090672" cy="718718"/>
           </a:xfrm>
           <a:prstGeom prst="rect">
             <a:avLst/>
@@ -3666,12 +3666,12 @@
         </p:nvSpPr>
         <p:spPr>
           <a:xfrm>
-            <a:off x="7635240" y="4498848"/>
-            <a:ext cx="3474720" cy="1143000"/>
+            <a:off x="7635240" y="4184294"/>
+            <a:ext cx="3474720" cy="1466698"/>
           </a:xfrm>
           <a:prstGeom prst="roundRect">
             <a:avLst>
-              <a:gd name="adj" fmla="val 9600"/>
+              <a:gd name="adj" fmla="val 7481"/>
             </a:avLst>
           </a:prstGeom>
           <a:solidFill>
@@ -3693,7 +3693,7 @@
         </p:nvSpPr>
         <p:spPr>
           <a:xfrm>
-            <a:off x="7799832" y="4645152"/>
+            <a:off x="7799832" y="4330598"/>
             <a:ext cx="3145536" cy="256032"/>
           </a:xfrm>
           <a:prstGeom prst="rect">
@@ -3732,8 +3732,8 @@
         </p:nvSpPr>
         <p:spPr>
           <a:xfrm>
-            <a:off x="7799832" y="4974336"/>
-            <a:ext cx="3145536" cy="576072"/>
+            <a:off x="7799832" y="4659782"/>
+            <a:ext cx="3145536" cy="899770"/>
           </a:xfrm>
           <a:prstGeom prst="rect">
             <a:avLst/>
@@ -3759,7 +3759,7 @@
                 <a:ea typeface="Aptos" pitchFamily="34" charset="-122"/>
                 <a:cs typeface="Aptos" pitchFamily="34" charset="-120"/>
               </a:rPr>
-              <a:t>Connect the concept to public health purpose, responsible use, required safeguards, documentation, and the next action a.</a:t>
+              <a:t>Connect the concept to public health purpose, responsible use, required safeguards, documentation, and the next action a department should take.</a:t>
             </a:r>
             <a:endParaRPr lang="en-US" sz="1320" dirty="0"/>
           </a:p>
@@ -4128,11 +4128,11 @@
         <p:spPr>
           <a:xfrm>
             <a:off x="7635240" y="1325880"/>
-            <a:ext cx="3474720" cy="1325880"/>
+            <a:ext cx="3474720" cy="1207008"/>
           </a:xfrm>
           <a:prstGeom prst="roundRect">
             <a:avLst>
-              <a:gd name="adj" fmla="val 8276"/>
+              <a:gd name="adj" fmla="val 9091"/>
             </a:avLst>
           </a:prstGeom>
           <a:solidFill>
@@ -4194,7 +4194,7 @@
         <p:spPr>
           <a:xfrm>
             <a:off x="7799832" y="1801368"/>
-            <a:ext cx="3145536" cy="758952"/>
+            <a:ext cx="3145536" cy="640080"/>
           </a:xfrm>
           <a:prstGeom prst="rect">
             <a:avLst/>
@@ -4234,12 +4234,12 @@
         </p:nvSpPr>
         <p:spPr>
           <a:xfrm>
-            <a:off x="7635240" y="2788920"/>
-            <a:ext cx="3474720" cy="1536192"/>
+            <a:off x="7635240" y="2670048"/>
+            <a:ext cx="3474720" cy="1377086"/>
           </a:xfrm>
           <a:prstGeom prst="roundRect">
             <a:avLst>
-              <a:gd name="adj" fmla="val 7143"/>
+              <a:gd name="adj" fmla="val 7968"/>
             </a:avLst>
           </a:prstGeom>
           <a:solidFill>
@@ -4261,7 +4261,7 @@
         </p:nvSpPr>
         <p:spPr>
           <a:xfrm>
-            <a:off x="7799832" y="2935224"/>
+            <a:off x="7799832" y="2816352"/>
             <a:ext cx="3145536" cy="256032"/>
           </a:xfrm>
           <a:prstGeom prst="rect">
@@ -4300,8 +4300,8 @@
         </p:nvSpPr>
         <p:spPr>
           <a:xfrm>
-            <a:off x="7818120" y="3300984"/>
-            <a:ext cx="3090672" cy="877824"/>
+            <a:off x="7818120" y="3182112"/>
+            <a:ext cx="3090672" cy="718718"/>
           </a:xfrm>
           <a:prstGeom prst="rect">
             <a:avLst/>
@@ -4375,12 +4375,12 @@
         </p:nvSpPr>
         <p:spPr>
           <a:xfrm>
-            <a:off x="7635240" y="4498848"/>
-            <a:ext cx="3474720" cy="1143000"/>
+            <a:off x="7635240" y="4184294"/>
+            <a:ext cx="3474720" cy="1466698"/>
           </a:xfrm>
           <a:prstGeom prst="roundRect">
             <a:avLst>
-              <a:gd name="adj" fmla="val 9600"/>
+              <a:gd name="adj" fmla="val 7481"/>
             </a:avLst>
           </a:prstGeom>
           <a:solidFill>
@@ -4402,7 +4402,7 @@
         </p:nvSpPr>
         <p:spPr>
           <a:xfrm>
-            <a:off x="7799832" y="4645152"/>
+            <a:off x="7799832" y="4330598"/>
             <a:ext cx="3145536" cy="256032"/>
           </a:xfrm>
           <a:prstGeom prst="rect">
@@ -4441,8 +4441,8 @@
         </p:nvSpPr>
         <p:spPr>
           <a:xfrm>
-            <a:off x="7799832" y="4974336"/>
-            <a:ext cx="3145536" cy="576072"/>
+            <a:off x="7799832" y="4659782"/>
+            <a:ext cx="3145536" cy="899770"/>
           </a:xfrm>
           <a:prstGeom prst="rect">
             <a:avLst/>
@@ -4468,7 +4468,7 @@
                 <a:ea typeface="Aptos" pitchFamily="34" charset="-122"/>
                 <a:cs typeface="Aptos" pitchFamily="34" charset="-120"/>
               </a:rPr>
-              <a:t>Connect the concept to public health purpose, responsible use, required safeguards, documentation, and the next action a.</a:t>
+              <a:t>Connect the concept to public health purpose, responsible use, required safeguards, documentation, and the next action a department should take.</a:t>
             </a:r>
             <a:endParaRPr lang="en-US" sz="1320" dirty="0"/>
           </a:p>
@@ -4837,11 +4837,11 @@
         <p:spPr>
           <a:xfrm>
             <a:off x="7635240" y="1325880"/>
-            <a:ext cx="3474720" cy="1325880"/>
+            <a:ext cx="3474720" cy="1207008"/>
           </a:xfrm>
           <a:prstGeom prst="roundRect">
             <a:avLst>
-              <a:gd name="adj" fmla="val 8276"/>
+              <a:gd name="adj" fmla="val 9091"/>
             </a:avLst>
           </a:prstGeom>
           <a:solidFill>
@@ -4903,7 +4903,7 @@
         <p:spPr>
           <a:xfrm>
             <a:off x="7799832" y="1801368"/>
-            <a:ext cx="3145536" cy="758952"/>
+            <a:ext cx="3145536" cy="640080"/>
           </a:xfrm>
           <a:prstGeom prst="rect">
             <a:avLst/>
@@ -4943,7 +4943,7 @@
         </p:nvSpPr>
         <p:spPr>
           <a:xfrm>
-            <a:off x="7635240" y="2788920"/>
+            <a:off x="7635240" y="2670048"/>
             <a:ext cx="3474720" cy="1536192"/>
           </a:xfrm>
           <a:prstGeom prst="roundRect">
@@ -4970,8 +4970,8 @@
         </p:nvSpPr>
         <p:spPr>
           <a:xfrm>
-            <a:off x="7799832" y="2935224"/>
-            <a:ext cx="3145536" cy="256032"/>
+            <a:off x="7799832" y="2798064"/>
+            <a:ext cx="3145536" cy="237744"/>
           </a:xfrm>
           <a:prstGeom prst="rect">
             <a:avLst/>
@@ -4987,7 +4987,7 @@
               <a:buNone/>
             </a:pPr>
             <a:r>
-              <a:rPr lang="en-US" sz="1300" b="1" dirty="0">
+              <a:rPr lang="en-US" sz="1250" b="1" dirty="0">
                 <a:solidFill>
                   <a:srgbClr val="0068B7"/>
                 </a:solidFill>
@@ -4995,101 +4995,317 @@
                 <a:ea typeface="Aptos" pitchFamily="34" charset="-122"/>
                 <a:cs typeface="Aptos" pitchFamily="34" charset="-120"/>
               </a:rPr>
-              <a:t>Concept checkpoints</a:t>
-            </a:r>
-            <a:endParaRPr lang="en-US" sz="1300" dirty="0"/>
-          </a:p>
-        </p:txBody>
-      </p:sp>
-      <p:sp>
-        <p:nvSpPr>
-          <p:cNvPr id="15" name="Text 13"/>
-          <p:cNvSpPr/>
-          <p:nvPr/>
-        </p:nvSpPr>
-        <p:spPr>
-          <a:xfrm>
-            <a:off x="7818120" y="3300984"/>
-            <a:ext cx="3090672" cy="877824"/>
-          </a:xfrm>
-          <a:prstGeom prst="rect">
-            <a:avLst/>
-          </a:prstGeom>
-          <a:noFill/>
-          <a:ln/>
-        </p:spPr>
-        <p:txBody>
-          <a:bodyPr wrap="square" lIns="508" tIns="508" rIns="508" bIns="508" rtlCol="0" anchor="t">
+              <a:t>Risk control loop</a:t>
+            </a:r>
+            <a:endParaRPr lang="en-US" sz="1250" dirty="0"/>
+          </a:p>
+        </p:txBody>
+      </p:sp>
+      <p:sp>
+        <p:nvSpPr>
+          <p:cNvPr id="15" name="Shape 13"/>
+          <p:cNvSpPr/>
+          <p:nvPr/>
+        </p:nvSpPr>
+        <p:spPr>
+          <a:xfrm>
+            <a:off x="8763000" y="3351276"/>
+            <a:ext cx="164592" cy="0"/>
+          </a:xfrm>
+          <a:prstGeom prst="line">
+            <a:avLst/>
+          </a:prstGeom>
+          <a:noFill/>
+          <a:ln w="15240">
+            <a:solidFill>
+              <a:srgbClr val="8ABBD8"/>
+            </a:solidFill>
+            <a:prstDash val="solid"/>
+          </a:ln>
+        </p:spPr>
+      </p:sp>
+      <p:sp>
+        <p:nvSpPr>
+          <p:cNvPr id="16" name="Shape 14"/>
+          <p:cNvSpPr/>
+          <p:nvPr/>
+        </p:nvSpPr>
+        <p:spPr>
+          <a:xfrm>
+            <a:off x="7872984" y="3200400"/>
+            <a:ext cx="890016" cy="301752"/>
+          </a:xfrm>
+          <a:prstGeom prst="roundRect">
+            <a:avLst>
+              <a:gd name="adj" fmla="val 24242"/>
+            </a:avLst>
+          </a:prstGeom>
+          <a:solidFill>
+            <a:srgbClr val="0068B7"/>
+          </a:solidFill>
+          <a:ln w="12700">
+            <a:solidFill>
+              <a:srgbClr val="0068B7"/>
+            </a:solidFill>
+            <a:prstDash val="solid"/>
+          </a:ln>
+        </p:spPr>
+      </p:sp>
+      <p:sp>
+        <p:nvSpPr>
+          <p:cNvPr id="17" name="Text 15"/>
+          <p:cNvSpPr/>
+          <p:nvPr/>
+        </p:nvSpPr>
+        <p:spPr>
+          <a:xfrm>
+            <a:off x="7909560" y="3273552"/>
+            <a:ext cx="816864" cy="146304"/>
+          </a:xfrm>
+          <a:prstGeom prst="rect">
+            <a:avLst/>
+          </a:prstGeom>
+          <a:noFill/>
+          <a:ln/>
+        </p:spPr>
+        <p:txBody>
+          <a:bodyPr wrap="square" lIns="0" tIns="0" rIns="0" bIns="0" rtlCol="0" anchor="ctr">
             <a:normAutofit/>
           </a:bodyPr>
           <a:lstStyle/>
           <a:p>
-            <a:pPr indent="0" marL="0">
-              <a:buNone/>
-            </a:pPr>
-            <a:r>
-              <a:rPr lang="en-US" sz="1220" dirty="0">
-                <a:solidFill>
-                  <a:srgbClr val="17364A"/>
-                </a:solidFill>
-                <a:latin typeface="Aptos" pitchFamily="34" charset="0"/>
-                <a:ea typeface="Aptos" pitchFamily="34" charset="-122"/>
-                <a:cs typeface="Aptos" pitchFamily="34" charset="-120"/>
-              </a:rPr>
-              <a:t>Alert fatigue.</a:t>
-            </a:r>
-            <a:endParaRPr lang="en-US" sz="1220" dirty="0"/>
-          </a:p>
-          <a:p>
-            <a:pPr indent="0" marL="0">
-              <a:buNone/>
-            </a:pPr>
-            <a:r>
-              <a:rPr lang="en-US" sz="1220" dirty="0">
-                <a:solidFill>
-                  <a:srgbClr val="17364A"/>
-                </a:solidFill>
-                <a:latin typeface="Aptos" pitchFamily="34" charset="0"/>
-                <a:ea typeface="Aptos" pitchFamily="34" charset="-122"/>
-                <a:cs typeface="Aptos" pitchFamily="34" charset="-120"/>
-              </a:rPr>
-              <a:t>Too many alerts can reduce attention.</a:t>
-            </a:r>
-            <a:endParaRPr lang="en-US" sz="1220" dirty="0"/>
-          </a:p>
-          <a:p>
-            <a:pPr indent="0" marL="0">
-              <a:buNone/>
-            </a:pPr>
-            <a:r>
-              <a:rPr lang="en-US" sz="1220" dirty="0">
-                <a:solidFill>
-                  <a:srgbClr val="17364A"/>
-                </a:solidFill>
-                <a:latin typeface="Aptos" pitchFamily="34" charset="0"/>
-                <a:ea typeface="Aptos" pitchFamily="34" charset="-122"/>
-                <a:cs typeface="Aptos" pitchFamily="34" charset="-120"/>
-              </a:rPr>
-              <a:t>Guardrails include threshold tuning, tiered alerting, user.</a:t>
-            </a:r>
-            <a:endParaRPr lang="en-US" sz="1220" dirty="0"/>
-          </a:p>
-        </p:txBody>
-      </p:sp>
-      <p:sp>
-        <p:nvSpPr>
-          <p:cNvPr id="16" name="Shape 14"/>
-          <p:cNvSpPr/>
-          <p:nvPr/>
-        </p:nvSpPr>
-        <p:spPr>
-          <a:xfrm>
-            <a:off x="7635240" y="4498848"/>
-            <a:ext cx="3474720" cy="1143000"/>
+            <a:pPr algn="ctr" indent="0" marL="0">
+              <a:buNone/>
+            </a:pPr>
+            <a:r>
+              <a:rPr lang="en-US" sz="880" b="1" dirty="0">
+                <a:solidFill>
+                  <a:srgbClr val="FFFFFF"/>
+                </a:solidFill>
+                <a:latin typeface="Aptos" pitchFamily="34" charset="0"/>
+                <a:ea typeface="Aptos" pitchFamily="34" charset="-122"/>
+                <a:cs typeface="Aptos" pitchFamily="34" charset="-120"/>
+              </a:rPr>
+              <a:t>Identify</a:t>
+            </a:r>
+            <a:endParaRPr lang="en-US" sz="880" dirty="0"/>
+          </a:p>
+        </p:txBody>
+      </p:sp>
+      <p:sp>
+        <p:nvSpPr>
+          <p:cNvPr id="18" name="Shape 16"/>
+          <p:cNvSpPr/>
+          <p:nvPr/>
+        </p:nvSpPr>
+        <p:spPr>
+          <a:xfrm>
+            <a:off x="9817608" y="3351276"/>
+            <a:ext cx="164592" cy="0"/>
+          </a:xfrm>
+          <a:prstGeom prst="line">
+            <a:avLst/>
+          </a:prstGeom>
+          <a:noFill/>
+          <a:ln w="15240">
+            <a:solidFill>
+              <a:srgbClr val="8ABBD8"/>
+            </a:solidFill>
+            <a:prstDash val="solid"/>
+          </a:ln>
+        </p:spPr>
+      </p:sp>
+      <p:sp>
+        <p:nvSpPr>
+          <p:cNvPr id="19" name="Shape 17"/>
+          <p:cNvSpPr/>
+          <p:nvPr/>
+        </p:nvSpPr>
+        <p:spPr>
+          <a:xfrm>
+            <a:off x="8927592" y="3200400"/>
+            <a:ext cx="890016" cy="301752"/>
           </a:xfrm>
           <a:prstGeom prst="roundRect">
             <a:avLst>
-              <a:gd name="adj" fmla="val 9600"/>
+              <a:gd name="adj" fmla="val 24242"/>
+            </a:avLst>
+          </a:prstGeom>
+          <a:solidFill>
+            <a:srgbClr val="2F8A28"/>
+          </a:solidFill>
+          <a:ln w="12700">
+            <a:solidFill>
+              <a:srgbClr val="2F8A28"/>
+            </a:solidFill>
+            <a:prstDash val="solid"/>
+          </a:ln>
+        </p:spPr>
+      </p:sp>
+      <p:sp>
+        <p:nvSpPr>
+          <p:cNvPr id="20" name="Text 18"/>
+          <p:cNvSpPr/>
+          <p:nvPr/>
+        </p:nvSpPr>
+        <p:spPr>
+          <a:xfrm>
+            <a:off x="8964168" y="3273552"/>
+            <a:ext cx="816864" cy="146304"/>
+          </a:xfrm>
+          <a:prstGeom prst="rect">
+            <a:avLst/>
+          </a:prstGeom>
+          <a:noFill/>
+          <a:ln/>
+        </p:spPr>
+        <p:txBody>
+          <a:bodyPr wrap="square" lIns="0" tIns="0" rIns="0" bIns="0" rtlCol="0" anchor="ctr">
+            <a:normAutofit/>
+          </a:bodyPr>
+          <a:lstStyle/>
+          <a:p>
+            <a:pPr algn="ctr" indent="0" marL="0">
+              <a:buNone/>
+            </a:pPr>
+            <a:r>
+              <a:rPr lang="en-US" sz="880" b="1" dirty="0">
+                <a:solidFill>
+                  <a:srgbClr val="FFFFFF"/>
+                </a:solidFill>
+                <a:latin typeface="Aptos" pitchFamily="34" charset="0"/>
+                <a:ea typeface="Aptos" pitchFamily="34" charset="-122"/>
+                <a:cs typeface="Aptos" pitchFamily="34" charset="-120"/>
+              </a:rPr>
+              <a:t>Control</a:t>
+            </a:r>
+            <a:endParaRPr lang="en-US" sz="880" dirty="0"/>
+          </a:p>
+        </p:txBody>
+      </p:sp>
+      <p:sp>
+        <p:nvSpPr>
+          <p:cNvPr id="21" name="Shape 19"/>
+          <p:cNvSpPr/>
+          <p:nvPr/>
+        </p:nvSpPr>
+        <p:spPr>
+          <a:xfrm>
+            <a:off x="9982200" y="3200400"/>
+            <a:ext cx="890016" cy="301752"/>
+          </a:xfrm>
+          <a:prstGeom prst="roundRect">
+            <a:avLst>
+              <a:gd name="adj" fmla="val 24242"/>
+            </a:avLst>
+          </a:prstGeom>
+          <a:solidFill>
+            <a:srgbClr val="6A4CA3"/>
+          </a:solidFill>
+          <a:ln w="12700">
+            <a:solidFill>
+              <a:srgbClr val="6A4CA3"/>
+            </a:solidFill>
+            <a:prstDash val="solid"/>
+          </a:ln>
+        </p:spPr>
+      </p:sp>
+      <p:sp>
+        <p:nvSpPr>
+          <p:cNvPr id="22" name="Text 20"/>
+          <p:cNvSpPr/>
+          <p:nvPr/>
+        </p:nvSpPr>
+        <p:spPr>
+          <a:xfrm>
+            <a:off x="10018776" y="3273552"/>
+            <a:ext cx="816864" cy="146304"/>
+          </a:xfrm>
+          <a:prstGeom prst="rect">
+            <a:avLst/>
+          </a:prstGeom>
+          <a:noFill/>
+          <a:ln/>
+        </p:spPr>
+        <p:txBody>
+          <a:bodyPr wrap="square" lIns="0" tIns="0" rIns="0" bIns="0" rtlCol="0" anchor="ctr">
+            <a:normAutofit/>
+          </a:bodyPr>
+          <a:lstStyle/>
+          <a:p>
+            <a:pPr algn="ctr" indent="0" marL="0">
+              <a:buNone/>
+            </a:pPr>
+            <a:r>
+              <a:rPr lang="en-US" sz="880" b="1" dirty="0">
+                <a:solidFill>
+                  <a:srgbClr val="FFFFFF"/>
+                </a:solidFill>
+                <a:latin typeface="Aptos" pitchFamily="34" charset="0"/>
+                <a:ea typeface="Aptos" pitchFamily="34" charset="-122"/>
+                <a:cs typeface="Aptos" pitchFamily="34" charset="-120"/>
+              </a:rPr>
+              <a:t>Monitor</a:t>
+            </a:r>
+            <a:endParaRPr lang="en-US" sz="880" dirty="0"/>
+          </a:p>
+        </p:txBody>
+      </p:sp>
+      <p:sp>
+        <p:nvSpPr>
+          <p:cNvPr id="23" name="Text 21"/>
+          <p:cNvSpPr/>
+          <p:nvPr/>
+        </p:nvSpPr>
+        <p:spPr>
+          <a:xfrm>
+            <a:off x="7854696" y="3694176"/>
+            <a:ext cx="3035808" cy="365760"/>
+          </a:xfrm>
+          <a:prstGeom prst="rect">
+            <a:avLst/>
+          </a:prstGeom>
+          <a:noFill/>
+          <a:ln/>
+        </p:spPr>
+        <p:txBody>
+          <a:bodyPr wrap="square" lIns="254" tIns="254" rIns="254" bIns="254" rtlCol="0" anchor="t">
+            <a:normAutofit/>
+          </a:bodyPr>
+          <a:lstStyle/>
+          <a:p>
+            <a:pPr indent="0" marL="0">
+              <a:buNone/>
+            </a:pPr>
+            <a:r>
+              <a:rPr lang="en-US" sz="1120" dirty="0">
+                <a:solidFill>
+                  <a:srgbClr val="17364A"/>
+                </a:solidFill>
+                <a:latin typeface="Aptos" pitchFamily="34" charset="0"/>
+                <a:ea typeface="Aptos" pitchFamily="34" charset="-122"/>
+                <a:cs typeface="Aptos" pitchFamily="34" charset="-120"/>
+              </a:rPr>
+              <a:t>Responsible use depends on finding risks early, applying safeguards, and watching for drift or harm over time.</a:t>
+            </a:r>
+            <a:endParaRPr lang="en-US" sz="1120" dirty="0"/>
+          </a:p>
+        </p:txBody>
+      </p:sp>
+      <p:sp>
+        <p:nvSpPr>
+          <p:cNvPr id="24" name="Shape 22"/>
+          <p:cNvSpPr/>
+          <p:nvPr/>
+        </p:nvSpPr>
+        <p:spPr>
+          <a:xfrm>
+            <a:off x="7635240" y="4343400"/>
+            <a:ext cx="3474720" cy="1255471"/>
+          </a:xfrm>
+          <a:prstGeom prst="roundRect">
+            <a:avLst>
+              <a:gd name="adj" fmla="val 8740"/>
             </a:avLst>
           </a:prstGeom>
           <a:solidFill>
@@ -5105,13 +5321,13 @@
       </p:sp>
       <p:sp>
         <p:nvSpPr>
-          <p:cNvPr id="17" name="Text 15"/>
-          <p:cNvSpPr/>
-          <p:nvPr/>
-        </p:nvSpPr>
-        <p:spPr>
-          <a:xfrm>
-            <a:off x="7799832" y="4645152"/>
+          <p:cNvPr id="25" name="Text 23"/>
+          <p:cNvSpPr/>
+          <p:nvPr/>
+        </p:nvSpPr>
+        <p:spPr>
+          <a:xfrm>
+            <a:off x="7799832" y="4489704"/>
             <a:ext cx="3145536" cy="256032"/>
           </a:xfrm>
           <a:prstGeom prst="rect">
@@ -5144,14 +5360,14 @@
       </p:sp>
       <p:sp>
         <p:nvSpPr>
-          <p:cNvPr id="18" name="Text 16"/>
-          <p:cNvSpPr/>
-          <p:nvPr/>
-        </p:nvSpPr>
-        <p:spPr>
-          <a:xfrm>
-            <a:off x="7799832" y="4974336"/>
-            <a:ext cx="3145536" cy="576072"/>
+          <p:cNvPr id="26" name="Text 24"/>
+          <p:cNvSpPr/>
+          <p:nvPr/>
+        </p:nvSpPr>
+        <p:spPr>
+          <a:xfrm>
+            <a:off x="7799832" y="4818888"/>
+            <a:ext cx="3145536" cy="688543"/>
           </a:xfrm>
           <a:prstGeom prst="rect">
             <a:avLst/>
@@ -5177,7 +5393,7 @@
                 <a:ea typeface="Aptos" pitchFamily="34" charset="-122"/>
                 <a:cs typeface="Aptos" pitchFamily="34" charset="-120"/>
               </a:rPr>
-              <a:t>Identify what could go wrong, who could be affected, what safeguards are needed, and what evidence should be reviewed.</a:t>
+              <a:t>Identify what could go wrong, who could be affected, what safeguards are needed, and what evidence should be reviewed before use.</a:t>
             </a:r>
             <a:endParaRPr lang="en-US" sz="1320" dirty="0"/>
           </a:p>
@@ -5546,11 +5762,11 @@
         <p:spPr>
           <a:xfrm>
             <a:off x="7635240" y="1325880"/>
-            <a:ext cx="3474720" cy="1325880"/>
+            <a:ext cx="3474720" cy="1207008"/>
           </a:xfrm>
           <a:prstGeom prst="roundRect">
             <a:avLst>
-              <a:gd name="adj" fmla="val 8276"/>
+              <a:gd name="adj" fmla="val 9091"/>
             </a:avLst>
           </a:prstGeom>
           <a:solidFill>
@@ -5612,7 +5828,7 @@
         <p:spPr>
           <a:xfrm>
             <a:off x="7799832" y="1801368"/>
-            <a:ext cx="3145536" cy="758952"/>
+            <a:ext cx="3145536" cy="640080"/>
           </a:xfrm>
           <a:prstGeom prst="rect">
             <a:avLst/>
@@ -5652,7 +5868,7 @@
         </p:nvSpPr>
         <p:spPr>
           <a:xfrm>
-            <a:off x="7635240" y="2788920"/>
+            <a:off x="7635240" y="2670048"/>
             <a:ext cx="3474720" cy="1536192"/>
           </a:xfrm>
           <a:prstGeom prst="roundRect">
@@ -5679,8 +5895,8 @@
         </p:nvSpPr>
         <p:spPr>
           <a:xfrm>
-            <a:off x="7799832" y="2935224"/>
-            <a:ext cx="3145536" cy="256032"/>
+            <a:off x="7799832" y="2798064"/>
+            <a:ext cx="3145536" cy="237744"/>
           </a:xfrm>
           <a:prstGeom prst="rect">
             <a:avLst/>
@@ -5696,7 +5912,7 @@
               <a:buNone/>
             </a:pPr>
             <a:r>
-              <a:rPr lang="en-US" sz="1300" b="1" dirty="0">
+              <a:rPr lang="en-US" sz="1250" b="1" dirty="0">
                 <a:solidFill>
                   <a:srgbClr val="0068B7"/>
                 </a:solidFill>
@@ -5704,101 +5920,317 @@
                 <a:ea typeface="Aptos" pitchFamily="34" charset="-122"/>
                 <a:cs typeface="Aptos" pitchFamily="34" charset="-120"/>
               </a:rPr>
-              <a:t>Concept checkpoints</a:t>
-            </a:r>
-            <a:endParaRPr lang="en-US" sz="1300" dirty="0"/>
-          </a:p>
-        </p:txBody>
-      </p:sp>
-      <p:sp>
-        <p:nvSpPr>
-          <p:cNvPr id="15" name="Text 13"/>
-          <p:cNvSpPr/>
-          <p:nvPr/>
-        </p:nvSpPr>
-        <p:spPr>
-          <a:xfrm>
-            <a:off x="7818120" y="3300984"/>
-            <a:ext cx="3090672" cy="877824"/>
-          </a:xfrm>
-          <a:prstGeom prst="rect">
-            <a:avLst/>
-          </a:prstGeom>
-          <a:noFill/>
-          <a:ln/>
-        </p:spPr>
-        <p:txBody>
-          <a:bodyPr wrap="square" lIns="508" tIns="508" rIns="508" bIns="508" rtlCol="0" anchor="t">
+              <a:t>Risk control loop</a:t>
+            </a:r>
+            <a:endParaRPr lang="en-US" sz="1250" dirty="0"/>
+          </a:p>
+        </p:txBody>
+      </p:sp>
+      <p:sp>
+        <p:nvSpPr>
+          <p:cNvPr id="15" name="Shape 13"/>
+          <p:cNvSpPr/>
+          <p:nvPr/>
+        </p:nvSpPr>
+        <p:spPr>
+          <a:xfrm>
+            <a:off x="8763000" y="3351276"/>
+            <a:ext cx="164592" cy="0"/>
+          </a:xfrm>
+          <a:prstGeom prst="line">
+            <a:avLst/>
+          </a:prstGeom>
+          <a:noFill/>
+          <a:ln w="15240">
+            <a:solidFill>
+              <a:srgbClr val="8ABBD8"/>
+            </a:solidFill>
+            <a:prstDash val="solid"/>
+          </a:ln>
+        </p:spPr>
+      </p:sp>
+      <p:sp>
+        <p:nvSpPr>
+          <p:cNvPr id="16" name="Shape 14"/>
+          <p:cNvSpPr/>
+          <p:nvPr/>
+        </p:nvSpPr>
+        <p:spPr>
+          <a:xfrm>
+            <a:off x="7872984" y="3200400"/>
+            <a:ext cx="890016" cy="301752"/>
+          </a:xfrm>
+          <a:prstGeom prst="roundRect">
+            <a:avLst>
+              <a:gd name="adj" fmla="val 24242"/>
+            </a:avLst>
+          </a:prstGeom>
+          <a:solidFill>
+            <a:srgbClr val="0068B7"/>
+          </a:solidFill>
+          <a:ln w="12700">
+            <a:solidFill>
+              <a:srgbClr val="0068B7"/>
+            </a:solidFill>
+            <a:prstDash val="solid"/>
+          </a:ln>
+        </p:spPr>
+      </p:sp>
+      <p:sp>
+        <p:nvSpPr>
+          <p:cNvPr id="17" name="Text 15"/>
+          <p:cNvSpPr/>
+          <p:nvPr/>
+        </p:nvSpPr>
+        <p:spPr>
+          <a:xfrm>
+            <a:off x="7909560" y="3273552"/>
+            <a:ext cx="816864" cy="146304"/>
+          </a:xfrm>
+          <a:prstGeom prst="rect">
+            <a:avLst/>
+          </a:prstGeom>
+          <a:noFill/>
+          <a:ln/>
+        </p:spPr>
+        <p:txBody>
+          <a:bodyPr wrap="square" lIns="0" tIns="0" rIns="0" bIns="0" rtlCol="0" anchor="ctr">
             <a:normAutofit/>
           </a:bodyPr>
           <a:lstStyle/>
           <a:p>
-            <a:pPr indent="0" marL="0">
-              <a:buNone/>
-            </a:pPr>
-            <a:r>
-              <a:rPr lang="en-US" sz="1220" dirty="0">
-                <a:solidFill>
-                  <a:srgbClr val="17364A"/>
-                </a:solidFill>
-                <a:latin typeface="Aptos" pitchFamily="34" charset="0"/>
-                <a:ea typeface="Aptos" pitchFamily="34" charset="-122"/>
-                <a:cs typeface="Aptos" pitchFamily="34" charset="-120"/>
-              </a:rPr>
-              <a:t>Missed emerging events.</a:t>
-            </a:r>
-            <a:endParaRPr lang="en-US" sz="1220" dirty="0"/>
-          </a:p>
-          <a:p>
-            <a:pPr indent="0" marL="0">
-              <a:buNone/>
-            </a:pPr>
-            <a:r>
-              <a:rPr lang="en-US" sz="1220" dirty="0">
-                <a:solidFill>
-                  <a:srgbClr val="17364A"/>
-                </a:solidFill>
-                <a:latin typeface="Aptos" pitchFamily="34" charset="0"/>
-                <a:ea typeface="Aptos" pitchFamily="34" charset="-122"/>
-                <a:cs typeface="Aptos" pitchFamily="34" charset="-120"/>
-              </a:rPr>
-              <a:t>Overly conservative thresholds may miss early signals.</a:t>
-            </a:r>
-            <a:endParaRPr lang="en-US" sz="1220" dirty="0"/>
-          </a:p>
-          <a:p>
-            <a:pPr indent="0" marL="0">
-              <a:buNone/>
-            </a:pPr>
-            <a:r>
-              <a:rPr lang="en-US" sz="1220" dirty="0">
-                <a:solidFill>
-                  <a:srgbClr val="17364A"/>
-                </a:solidFill>
-                <a:latin typeface="Aptos" pitchFamily="34" charset="0"/>
-                <a:ea typeface="Aptos" pitchFamily="34" charset="-122"/>
-                <a:cs typeface="Aptos" pitchFamily="34" charset="-120"/>
-              </a:rPr>
-              <a:t>Guardrails include multiple indicators, sensitivity review, and.</a:t>
-            </a:r>
-            <a:endParaRPr lang="en-US" sz="1220" dirty="0"/>
-          </a:p>
-        </p:txBody>
-      </p:sp>
-      <p:sp>
-        <p:nvSpPr>
-          <p:cNvPr id="16" name="Shape 14"/>
-          <p:cNvSpPr/>
-          <p:nvPr/>
-        </p:nvSpPr>
-        <p:spPr>
-          <a:xfrm>
-            <a:off x="7635240" y="4498848"/>
-            <a:ext cx="3474720" cy="1143000"/>
+            <a:pPr algn="ctr" indent="0" marL="0">
+              <a:buNone/>
+            </a:pPr>
+            <a:r>
+              <a:rPr lang="en-US" sz="880" b="1" dirty="0">
+                <a:solidFill>
+                  <a:srgbClr val="FFFFFF"/>
+                </a:solidFill>
+                <a:latin typeface="Aptos" pitchFamily="34" charset="0"/>
+                <a:ea typeface="Aptos" pitchFamily="34" charset="-122"/>
+                <a:cs typeface="Aptos" pitchFamily="34" charset="-120"/>
+              </a:rPr>
+              <a:t>Identify</a:t>
+            </a:r>
+            <a:endParaRPr lang="en-US" sz="880" dirty="0"/>
+          </a:p>
+        </p:txBody>
+      </p:sp>
+      <p:sp>
+        <p:nvSpPr>
+          <p:cNvPr id="18" name="Shape 16"/>
+          <p:cNvSpPr/>
+          <p:nvPr/>
+        </p:nvSpPr>
+        <p:spPr>
+          <a:xfrm>
+            <a:off x="9817608" y="3351276"/>
+            <a:ext cx="164592" cy="0"/>
+          </a:xfrm>
+          <a:prstGeom prst="line">
+            <a:avLst/>
+          </a:prstGeom>
+          <a:noFill/>
+          <a:ln w="15240">
+            <a:solidFill>
+              <a:srgbClr val="8ABBD8"/>
+            </a:solidFill>
+            <a:prstDash val="solid"/>
+          </a:ln>
+        </p:spPr>
+      </p:sp>
+      <p:sp>
+        <p:nvSpPr>
+          <p:cNvPr id="19" name="Shape 17"/>
+          <p:cNvSpPr/>
+          <p:nvPr/>
+        </p:nvSpPr>
+        <p:spPr>
+          <a:xfrm>
+            <a:off x="8927592" y="3200400"/>
+            <a:ext cx="890016" cy="301752"/>
           </a:xfrm>
           <a:prstGeom prst="roundRect">
             <a:avLst>
-              <a:gd name="adj" fmla="val 9600"/>
+              <a:gd name="adj" fmla="val 24242"/>
+            </a:avLst>
+          </a:prstGeom>
+          <a:solidFill>
+            <a:srgbClr val="2F8A28"/>
+          </a:solidFill>
+          <a:ln w="12700">
+            <a:solidFill>
+              <a:srgbClr val="2F8A28"/>
+            </a:solidFill>
+            <a:prstDash val="solid"/>
+          </a:ln>
+        </p:spPr>
+      </p:sp>
+      <p:sp>
+        <p:nvSpPr>
+          <p:cNvPr id="20" name="Text 18"/>
+          <p:cNvSpPr/>
+          <p:nvPr/>
+        </p:nvSpPr>
+        <p:spPr>
+          <a:xfrm>
+            <a:off x="8964168" y="3273552"/>
+            <a:ext cx="816864" cy="146304"/>
+          </a:xfrm>
+          <a:prstGeom prst="rect">
+            <a:avLst/>
+          </a:prstGeom>
+          <a:noFill/>
+          <a:ln/>
+        </p:spPr>
+        <p:txBody>
+          <a:bodyPr wrap="square" lIns="0" tIns="0" rIns="0" bIns="0" rtlCol="0" anchor="ctr">
+            <a:normAutofit/>
+          </a:bodyPr>
+          <a:lstStyle/>
+          <a:p>
+            <a:pPr algn="ctr" indent="0" marL="0">
+              <a:buNone/>
+            </a:pPr>
+            <a:r>
+              <a:rPr lang="en-US" sz="880" b="1" dirty="0">
+                <a:solidFill>
+                  <a:srgbClr val="FFFFFF"/>
+                </a:solidFill>
+                <a:latin typeface="Aptos" pitchFamily="34" charset="0"/>
+                <a:ea typeface="Aptos" pitchFamily="34" charset="-122"/>
+                <a:cs typeface="Aptos" pitchFamily="34" charset="-120"/>
+              </a:rPr>
+              <a:t>Control</a:t>
+            </a:r>
+            <a:endParaRPr lang="en-US" sz="880" dirty="0"/>
+          </a:p>
+        </p:txBody>
+      </p:sp>
+      <p:sp>
+        <p:nvSpPr>
+          <p:cNvPr id="21" name="Shape 19"/>
+          <p:cNvSpPr/>
+          <p:nvPr/>
+        </p:nvSpPr>
+        <p:spPr>
+          <a:xfrm>
+            <a:off x="9982200" y="3200400"/>
+            <a:ext cx="890016" cy="301752"/>
+          </a:xfrm>
+          <a:prstGeom prst="roundRect">
+            <a:avLst>
+              <a:gd name="adj" fmla="val 24242"/>
+            </a:avLst>
+          </a:prstGeom>
+          <a:solidFill>
+            <a:srgbClr val="6A4CA3"/>
+          </a:solidFill>
+          <a:ln w="12700">
+            <a:solidFill>
+              <a:srgbClr val="6A4CA3"/>
+            </a:solidFill>
+            <a:prstDash val="solid"/>
+          </a:ln>
+        </p:spPr>
+      </p:sp>
+      <p:sp>
+        <p:nvSpPr>
+          <p:cNvPr id="22" name="Text 20"/>
+          <p:cNvSpPr/>
+          <p:nvPr/>
+        </p:nvSpPr>
+        <p:spPr>
+          <a:xfrm>
+            <a:off x="10018776" y="3273552"/>
+            <a:ext cx="816864" cy="146304"/>
+          </a:xfrm>
+          <a:prstGeom prst="rect">
+            <a:avLst/>
+          </a:prstGeom>
+          <a:noFill/>
+          <a:ln/>
+        </p:spPr>
+        <p:txBody>
+          <a:bodyPr wrap="square" lIns="0" tIns="0" rIns="0" bIns="0" rtlCol="0" anchor="ctr">
+            <a:normAutofit/>
+          </a:bodyPr>
+          <a:lstStyle/>
+          <a:p>
+            <a:pPr algn="ctr" indent="0" marL="0">
+              <a:buNone/>
+            </a:pPr>
+            <a:r>
+              <a:rPr lang="en-US" sz="880" b="1" dirty="0">
+                <a:solidFill>
+                  <a:srgbClr val="FFFFFF"/>
+                </a:solidFill>
+                <a:latin typeface="Aptos" pitchFamily="34" charset="0"/>
+                <a:ea typeface="Aptos" pitchFamily="34" charset="-122"/>
+                <a:cs typeface="Aptos" pitchFamily="34" charset="-120"/>
+              </a:rPr>
+              <a:t>Monitor</a:t>
+            </a:r>
+            <a:endParaRPr lang="en-US" sz="880" dirty="0"/>
+          </a:p>
+        </p:txBody>
+      </p:sp>
+      <p:sp>
+        <p:nvSpPr>
+          <p:cNvPr id="23" name="Text 21"/>
+          <p:cNvSpPr/>
+          <p:nvPr/>
+        </p:nvSpPr>
+        <p:spPr>
+          <a:xfrm>
+            <a:off x="7854696" y="3694176"/>
+            <a:ext cx="3035808" cy="365760"/>
+          </a:xfrm>
+          <a:prstGeom prst="rect">
+            <a:avLst/>
+          </a:prstGeom>
+          <a:noFill/>
+          <a:ln/>
+        </p:spPr>
+        <p:txBody>
+          <a:bodyPr wrap="square" lIns="254" tIns="254" rIns="254" bIns="254" rtlCol="0" anchor="t">
+            <a:normAutofit/>
+          </a:bodyPr>
+          <a:lstStyle/>
+          <a:p>
+            <a:pPr indent="0" marL="0">
+              <a:buNone/>
+            </a:pPr>
+            <a:r>
+              <a:rPr lang="en-US" sz="1120" dirty="0">
+                <a:solidFill>
+                  <a:srgbClr val="17364A"/>
+                </a:solidFill>
+                <a:latin typeface="Aptos" pitchFamily="34" charset="0"/>
+                <a:ea typeface="Aptos" pitchFamily="34" charset="-122"/>
+                <a:cs typeface="Aptos" pitchFamily="34" charset="-120"/>
+              </a:rPr>
+              <a:t>Responsible use depends on finding risks early, applying safeguards, and watching for drift or harm over time.</a:t>
+            </a:r>
+            <a:endParaRPr lang="en-US" sz="1120" dirty="0"/>
+          </a:p>
+        </p:txBody>
+      </p:sp>
+      <p:sp>
+        <p:nvSpPr>
+          <p:cNvPr id="24" name="Shape 22"/>
+          <p:cNvSpPr/>
+          <p:nvPr/>
+        </p:nvSpPr>
+        <p:spPr>
+          <a:xfrm>
+            <a:off x="7635240" y="4343400"/>
+            <a:ext cx="3474720" cy="1255471"/>
+          </a:xfrm>
+          <a:prstGeom prst="roundRect">
+            <a:avLst>
+              <a:gd name="adj" fmla="val 8740"/>
             </a:avLst>
           </a:prstGeom>
           <a:solidFill>
@@ -5814,13 +6246,13 @@
       </p:sp>
       <p:sp>
         <p:nvSpPr>
-          <p:cNvPr id="17" name="Text 15"/>
-          <p:cNvSpPr/>
-          <p:nvPr/>
-        </p:nvSpPr>
-        <p:spPr>
-          <a:xfrm>
-            <a:off x="7799832" y="4645152"/>
+          <p:cNvPr id="25" name="Text 23"/>
+          <p:cNvSpPr/>
+          <p:nvPr/>
+        </p:nvSpPr>
+        <p:spPr>
+          <a:xfrm>
+            <a:off x="7799832" y="4489704"/>
             <a:ext cx="3145536" cy="256032"/>
           </a:xfrm>
           <a:prstGeom prst="rect">
@@ -5853,14 +6285,14 @@
       </p:sp>
       <p:sp>
         <p:nvSpPr>
-          <p:cNvPr id="18" name="Text 16"/>
-          <p:cNvSpPr/>
-          <p:nvPr/>
-        </p:nvSpPr>
-        <p:spPr>
-          <a:xfrm>
-            <a:off x="7799832" y="4974336"/>
-            <a:ext cx="3145536" cy="576072"/>
+          <p:cNvPr id="26" name="Text 24"/>
+          <p:cNvSpPr/>
+          <p:nvPr/>
+        </p:nvSpPr>
+        <p:spPr>
+          <a:xfrm>
+            <a:off x="7799832" y="4818888"/>
+            <a:ext cx="3145536" cy="688543"/>
           </a:xfrm>
           <a:prstGeom prst="rect">
             <a:avLst/>
@@ -5886,7 +6318,7 @@
                 <a:ea typeface="Aptos" pitchFamily="34" charset="-122"/>
                 <a:cs typeface="Aptos" pitchFamily="34" charset="-120"/>
               </a:rPr>
-              <a:t>Identify what could go wrong, who could be affected, what safeguards are needed, and what evidence should be reviewed.</a:t>
+              <a:t>Identify what could go wrong, who could be affected, what safeguards are needed, and what evidence should be reviewed before use.</a:t>
             </a:r>
             <a:endParaRPr lang="en-US" sz="1320" dirty="0"/>
           </a:p>
@@ -6255,11 +6687,11 @@
         <p:spPr>
           <a:xfrm>
             <a:off x="7635240" y="1325880"/>
-            <a:ext cx="3474720" cy="1325880"/>
+            <a:ext cx="3474720" cy="1255471"/>
           </a:xfrm>
           <a:prstGeom prst="roundRect">
             <a:avLst>
-              <a:gd name="adj" fmla="val 8276"/>
+              <a:gd name="adj" fmla="val 8740"/>
             </a:avLst>
           </a:prstGeom>
           <a:solidFill>
@@ -6321,7 +6753,7 @@
         <p:spPr>
           <a:xfrm>
             <a:off x="7799832" y="1801368"/>
-            <a:ext cx="3145536" cy="758952"/>
+            <a:ext cx="3145536" cy="688543"/>
           </a:xfrm>
           <a:prstGeom prst="rect">
             <a:avLst/>
@@ -6361,12 +6793,12 @@
         </p:nvSpPr>
         <p:spPr>
           <a:xfrm>
-            <a:off x="7635240" y="2788920"/>
-            <a:ext cx="3474720" cy="1536192"/>
+            <a:off x="7635240" y="2718511"/>
+            <a:ext cx="3474720" cy="1328623"/>
           </a:xfrm>
           <a:prstGeom prst="roundRect">
             <a:avLst>
-              <a:gd name="adj" fmla="val 7143"/>
+              <a:gd name="adj" fmla="val 8259"/>
             </a:avLst>
           </a:prstGeom>
           <a:solidFill>
@@ -6388,8 +6820,8 @@
         </p:nvSpPr>
         <p:spPr>
           <a:xfrm>
-            <a:off x="7799832" y="2935224"/>
-            <a:ext cx="3145536" cy="256032"/>
+            <a:off x="7799832" y="2846527"/>
+            <a:ext cx="3145536" cy="237744"/>
           </a:xfrm>
           <a:prstGeom prst="rect">
             <a:avLst/>
@@ -6405,7 +6837,7 @@
               <a:buNone/>
             </a:pPr>
             <a:r>
-              <a:rPr lang="en-US" sz="1300" b="1" dirty="0">
+              <a:rPr lang="en-US" sz="1250" b="1" dirty="0">
                 <a:solidFill>
                   <a:srgbClr val="0068B7"/>
                 </a:solidFill>
@@ -6413,101 +6845,317 @@
                 <a:ea typeface="Aptos" pitchFamily="34" charset="-122"/>
                 <a:cs typeface="Aptos" pitchFamily="34" charset="-120"/>
               </a:rPr>
-              <a:t>Concept checkpoints</a:t>
-            </a:r>
-            <a:endParaRPr lang="en-US" sz="1300" dirty="0"/>
-          </a:p>
-        </p:txBody>
-      </p:sp>
-      <p:sp>
-        <p:nvSpPr>
-          <p:cNvPr id="15" name="Text 13"/>
-          <p:cNvSpPr/>
-          <p:nvPr/>
-        </p:nvSpPr>
-        <p:spPr>
-          <a:xfrm>
-            <a:off x="7818120" y="3300984"/>
-            <a:ext cx="3090672" cy="877824"/>
-          </a:xfrm>
-          <a:prstGeom prst="rect">
-            <a:avLst/>
-          </a:prstGeom>
-          <a:noFill/>
-          <a:ln/>
-        </p:spPr>
-        <p:txBody>
-          <a:bodyPr wrap="square" lIns="508" tIns="508" rIns="508" bIns="508" rtlCol="0" anchor="t">
+              <a:t>Implementation path</a:t>
+            </a:r>
+            <a:endParaRPr lang="en-US" sz="1250" dirty="0"/>
+          </a:p>
+        </p:txBody>
+      </p:sp>
+      <p:sp>
+        <p:nvSpPr>
+          <p:cNvPr id="15" name="Shape 13"/>
+          <p:cNvSpPr/>
+          <p:nvPr/>
+        </p:nvSpPr>
+        <p:spPr>
+          <a:xfrm>
+            <a:off x="8763000" y="3399739"/>
+            <a:ext cx="164592" cy="0"/>
+          </a:xfrm>
+          <a:prstGeom prst="line">
+            <a:avLst/>
+          </a:prstGeom>
+          <a:noFill/>
+          <a:ln w="15240">
+            <a:solidFill>
+              <a:srgbClr val="8ABBD8"/>
+            </a:solidFill>
+            <a:prstDash val="solid"/>
+          </a:ln>
+        </p:spPr>
+      </p:sp>
+      <p:sp>
+        <p:nvSpPr>
+          <p:cNvPr id="16" name="Shape 14"/>
+          <p:cNvSpPr/>
+          <p:nvPr/>
+        </p:nvSpPr>
+        <p:spPr>
+          <a:xfrm>
+            <a:off x="7872984" y="3248863"/>
+            <a:ext cx="890016" cy="301752"/>
+          </a:xfrm>
+          <a:prstGeom prst="roundRect">
+            <a:avLst>
+              <a:gd name="adj" fmla="val 24242"/>
+            </a:avLst>
+          </a:prstGeom>
+          <a:solidFill>
+            <a:srgbClr val="0068B7"/>
+          </a:solidFill>
+          <a:ln w="12700">
+            <a:solidFill>
+              <a:srgbClr val="0068B7"/>
+            </a:solidFill>
+            <a:prstDash val="solid"/>
+          </a:ln>
+        </p:spPr>
+      </p:sp>
+      <p:sp>
+        <p:nvSpPr>
+          <p:cNvPr id="17" name="Text 15"/>
+          <p:cNvSpPr/>
+          <p:nvPr/>
+        </p:nvSpPr>
+        <p:spPr>
+          <a:xfrm>
+            <a:off x="7909560" y="3322015"/>
+            <a:ext cx="816864" cy="146304"/>
+          </a:xfrm>
+          <a:prstGeom prst="rect">
+            <a:avLst/>
+          </a:prstGeom>
+          <a:noFill/>
+          <a:ln/>
+        </p:spPr>
+        <p:txBody>
+          <a:bodyPr wrap="square" lIns="0" tIns="0" rIns="0" bIns="0" rtlCol="0" anchor="ctr">
             <a:normAutofit/>
           </a:bodyPr>
           <a:lstStyle/>
           <a:p>
-            <a:pPr indent="0" marL="0">
-              <a:buNone/>
-            </a:pPr>
-            <a:r>
-              <a:rPr lang="en-US" sz="1220" dirty="0">
-                <a:solidFill>
-                  <a:srgbClr val="17364A"/>
-                </a:solidFill>
-                <a:latin typeface="Aptos" pitchFamily="34" charset="0"/>
-                <a:ea typeface="Aptos" pitchFamily="34" charset="-122"/>
-                <a:cs typeface="Aptos" pitchFamily="34" charset="-120"/>
-              </a:rPr>
-              <a:t>Time-series and anomaly detection methods can support predictive.</a:t>
-            </a:r>
-            <a:endParaRPr lang="en-US" sz="1220" dirty="0"/>
-          </a:p>
-          <a:p>
-            <a:pPr indent="0" marL="0">
-              <a:buNone/>
-            </a:pPr>
-            <a:r>
-              <a:rPr lang="en-US" sz="1220" dirty="0">
-                <a:solidFill>
-                  <a:srgbClr val="17364A"/>
-                </a:solidFill>
-                <a:latin typeface="Aptos" pitchFamily="34" charset="0"/>
-                <a:ea typeface="Aptos" pitchFamily="34" charset="-122"/>
-                <a:cs typeface="Aptos" pitchFamily="34" charset="-120"/>
-              </a:rPr>
-              <a:t>Agentic workflows may route alerts or create tasks, but those.</a:t>
-            </a:r>
-            <a:endParaRPr lang="en-US" sz="1220" dirty="0"/>
-          </a:p>
-          <a:p>
-            <a:pPr indent="0" marL="0">
-              <a:buNone/>
-            </a:pPr>
-            <a:r>
-              <a:rPr lang="en-US" sz="1220" dirty="0">
-                <a:solidFill>
-                  <a:srgbClr val="17364A"/>
-                </a:solidFill>
-                <a:latin typeface="Aptos" pitchFamily="34" charset="0"/>
-                <a:ea typeface="Aptos" pitchFamily="34" charset="-122"/>
-                <a:cs typeface="Aptos" pitchFamily="34" charset="-120"/>
-              </a:rPr>
-              <a:t>The best AI-supported surveillance workflows combine automation.</a:t>
-            </a:r>
-            <a:endParaRPr lang="en-US" sz="1220" dirty="0"/>
-          </a:p>
-        </p:txBody>
-      </p:sp>
-      <p:sp>
-        <p:nvSpPr>
-          <p:cNvPr id="16" name="Shape 14"/>
-          <p:cNvSpPr/>
-          <p:nvPr/>
-        </p:nvSpPr>
-        <p:spPr>
-          <a:xfrm>
-            <a:off x="7635240" y="4498848"/>
-            <a:ext cx="3474720" cy="1143000"/>
+            <a:pPr algn="ctr" indent="0" marL="0">
+              <a:buNone/>
+            </a:pPr>
+            <a:r>
+              <a:rPr lang="en-US" sz="880" b="1" dirty="0">
+                <a:solidFill>
+                  <a:srgbClr val="FFFFFF"/>
+                </a:solidFill>
+                <a:latin typeface="Aptos" pitchFamily="34" charset="0"/>
+                <a:ea typeface="Aptos" pitchFamily="34" charset="-122"/>
+                <a:cs typeface="Aptos" pitchFamily="34" charset="-120"/>
+              </a:rPr>
+              <a:t>Need</a:t>
+            </a:r>
+            <a:endParaRPr lang="en-US" sz="880" dirty="0"/>
+          </a:p>
+        </p:txBody>
+      </p:sp>
+      <p:sp>
+        <p:nvSpPr>
+          <p:cNvPr id="18" name="Shape 16"/>
+          <p:cNvSpPr/>
+          <p:nvPr/>
+        </p:nvSpPr>
+        <p:spPr>
+          <a:xfrm>
+            <a:off x="9817608" y="3399739"/>
+            <a:ext cx="164592" cy="0"/>
+          </a:xfrm>
+          <a:prstGeom prst="line">
+            <a:avLst/>
+          </a:prstGeom>
+          <a:noFill/>
+          <a:ln w="15240">
+            <a:solidFill>
+              <a:srgbClr val="8ABBD8"/>
+            </a:solidFill>
+            <a:prstDash val="solid"/>
+          </a:ln>
+        </p:spPr>
+      </p:sp>
+      <p:sp>
+        <p:nvSpPr>
+          <p:cNvPr id="19" name="Shape 17"/>
+          <p:cNvSpPr/>
+          <p:nvPr/>
+        </p:nvSpPr>
+        <p:spPr>
+          <a:xfrm>
+            <a:off x="8927592" y="3248863"/>
+            <a:ext cx="890016" cy="301752"/>
           </a:xfrm>
           <a:prstGeom prst="roundRect">
             <a:avLst>
-              <a:gd name="adj" fmla="val 9600"/>
+              <a:gd name="adj" fmla="val 24242"/>
+            </a:avLst>
+          </a:prstGeom>
+          <a:solidFill>
+            <a:srgbClr val="2F8A28"/>
+          </a:solidFill>
+          <a:ln w="12700">
+            <a:solidFill>
+              <a:srgbClr val="2F8A28"/>
+            </a:solidFill>
+            <a:prstDash val="solid"/>
+          </a:ln>
+        </p:spPr>
+      </p:sp>
+      <p:sp>
+        <p:nvSpPr>
+          <p:cNvPr id="20" name="Text 18"/>
+          <p:cNvSpPr/>
+          <p:nvPr/>
+        </p:nvSpPr>
+        <p:spPr>
+          <a:xfrm>
+            <a:off x="8964168" y="3322015"/>
+            <a:ext cx="816864" cy="146304"/>
+          </a:xfrm>
+          <a:prstGeom prst="rect">
+            <a:avLst/>
+          </a:prstGeom>
+          <a:noFill/>
+          <a:ln/>
+        </p:spPr>
+        <p:txBody>
+          <a:bodyPr wrap="square" lIns="0" tIns="0" rIns="0" bIns="0" rtlCol="0" anchor="ctr">
+            <a:normAutofit/>
+          </a:bodyPr>
+          <a:lstStyle/>
+          <a:p>
+            <a:pPr algn="ctr" indent="0" marL="0">
+              <a:buNone/>
+            </a:pPr>
+            <a:r>
+              <a:rPr lang="en-US" sz="880" b="1" dirty="0">
+                <a:solidFill>
+                  <a:srgbClr val="FFFFFF"/>
+                </a:solidFill>
+                <a:latin typeface="Aptos" pitchFamily="34" charset="0"/>
+                <a:ea typeface="Aptos" pitchFamily="34" charset="-122"/>
+                <a:cs typeface="Aptos" pitchFamily="34" charset="-120"/>
+              </a:rPr>
+              <a:t>Build</a:t>
+            </a:r>
+            <a:endParaRPr lang="en-US" sz="880" dirty="0"/>
+          </a:p>
+        </p:txBody>
+      </p:sp>
+      <p:sp>
+        <p:nvSpPr>
+          <p:cNvPr id="21" name="Shape 19"/>
+          <p:cNvSpPr/>
+          <p:nvPr/>
+        </p:nvSpPr>
+        <p:spPr>
+          <a:xfrm>
+            <a:off x="9982200" y="3248863"/>
+            <a:ext cx="890016" cy="301752"/>
+          </a:xfrm>
+          <a:prstGeom prst="roundRect">
+            <a:avLst>
+              <a:gd name="adj" fmla="val 24242"/>
+            </a:avLst>
+          </a:prstGeom>
+          <a:solidFill>
+            <a:srgbClr val="6A4CA3"/>
+          </a:solidFill>
+          <a:ln w="12700">
+            <a:solidFill>
+              <a:srgbClr val="6A4CA3"/>
+            </a:solidFill>
+            <a:prstDash val="solid"/>
+          </a:ln>
+        </p:spPr>
+      </p:sp>
+      <p:sp>
+        <p:nvSpPr>
+          <p:cNvPr id="22" name="Text 20"/>
+          <p:cNvSpPr/>
+          <p:nvPr/>
+        </p:nvSpPr>
+        <p:spPr>
+          <a:xfrm>
+            <a:off x="10018776" y="3322015"/>
+            <a:ext cx="816864" cy="146304"/>
+          </a:xfrm>
+          <a:prstGeom prst="rect">
+            <a:avLst/>
+          </a:prstGeom>
+          <a:noFill/>
+          <a:ln/>
+        </p:spPr>
+        <p:txBody>
+          <a:bodyPr wrap="square" lIns="0" tIns="0" rIns="0" bIns="0" rtlCol="0" anchor="ctr">
+            <a:normAutofit/>
+          </a:bodyPr>
+          <a:lstStyle/>
+          <a:p>
+            <a:pPr algn="ctr" indent="0" marL="0">
+              <a:buNone/>
+            </a:pPr>
+            <a:r>
+              <a:rPr lang="en-US" sz="880" b="1" dirty="0">
+                <a:solidFill>
+                  <a:srgbClr val="FFFFFF"/>
+                </a:solidFill>
+                <a:latin typeface="Aptos" pitchFamily="34" charset="0"/>
+                <a:ea typeface="Aptos" pitchFamily="34" charset="-122"/>
+                <a:cs typeface="Aptos" pitchFamily="34" charset="-120"/>
+              </a:rPr>
+              <a:t>Adopt</a:t>
+            </a:r>
+            <a:endParaRPr lang="en-US" sz="880" dirty="0"/>
+          </a:p>
+        </p:txBody>
+      </p:sp>
+      <p:sp>
+        <p:nvSpPr>
+          <p:cNvPr id="23" name="Text 21"/>
+          <p:cNvSpPr/>
+          <p:nvPr/>
+        </p:nvSpPr>
+        <p:spPr>
+          <a:xfrm>
+            <a:off x="7854696" y="3742639"/>
+            <a:ext cx="3035808" cy="158191"/>
+          </a:xfrm>
+          <a:prstGeom prst="rect">
+            <a:avLst/>
+          </a:prstGeom>
+          <a:noFill/>
+          <a:ln/>
+        </p:spPr>
+        <p:txBody>
+          <a:bodyPr wrap="square" lIns="254" tIns="254" rIns="254" bIns="254" rtlCol="0" anchor="t">
+            <a:normAutofit/>
+          </a:bodyPr>
+          <a:lstStyle/>
+          <a:p>
+            <a:pPr indent="0" marL="0">
+              <a:buNone/>
+            </a:pPr>
+            <a:r>
+              <a:rPr lang="en-US" sz="1120" dirty="0">
+                <a:solidFill>
+                  <a:srgbClr val="17364A"/>
+                </a:solidFill>
+                <a:latin typeface="Aptos" pitchFamily="34" charset="0"/>
+                <a:ea typeface="Aptos" pitchFamily="34" charset="-122"/>
+                <a:cs typeface="Aptos" pitchFamily="34" charset="-120"/>
+              </a:rPr>
+              <a:t>Implementation work should make dependencies, approvals, training, and sustainment visible before launch.</a:t>
+            </a:r>
+            <a:endParaRPr lang="en-US" sz="1120" dirty="0"/>
+          </a:p>
+        </p:txBody>
+      </p:sp>
+      <p:sp>
+        <p:nvSpPr>
+          <p:cNvPr id="24" name="Shape 22"/>
+          <p:cNvSpPr/>
+          <p:nvPr/>
+        </p:nvSpPr>
+        <p:spPr>
+          <a:xfrm>
+            <a:off x="7635240" y="4184294"/>
+            <a:ext cx="3474720" cy="1466698"/>
+          </a:xfrm>
+          <a:prstGeom prst="roundRect">
+            <a:avLst>
+              <a:gd name="adj" fmla="val 7481"/>
             </a:avLst>
           </a:prstGeom>
           <a:solidFill>
@@ -6523,13 +7171,13 @@
       </p:sp>
       <p:sp>
         <p:nvSpPr>
-          <p:cNvPr id="17" name="Text 15"/>
-          <p:cNvSpPr/>
-          <p:nvPr/>
-        </p:nvSpPr>
-        <p:spPr>
-          <a:xfrm>
-            <a:off x="7799832" y="4645152"/>
+          <p:cNvPr id="25" name="Text 23"/>
+          <p:cNvSpPr/>
+          <p:nvPr/>
+        </p:nvSpPr>
+        <p:spPr>
+          <a:xfrm>
+            <a:off x="7799832" y="4330598"/>
             <a:ext cx="3145536" cy="256032"/>
           </a:xfrm>
           <a:prstGeom prst="rect">
@@ -6562,14 +7210,14 @@
       </p:sp>
       <p:sp>
         <p:nvSpPr>
-          <p:cNvPr id="18" name="Text 16"/>
-          <p:cNvSpPr/>
-          <p:nvPr/>
-        </p:nvSpPr>
-        <p:spPr>
-          <a:xfrm>
-            <a:off x="7799832" y="4974336"/>
-            <a:ext cx="3145536" cy="576072"/>
+          <p:cNvPr id="26" name="Text 24"/>
+          <p:cNvSpPr/>
+          <p:nvPr/>
+        </p:nvSpPr>
+        <p:spPr>
+          <a:xfrm>
+            <a:off x="7799832" y="4659782"/>
+            <a:ext cx="3145536" cy="899770"/>
           </a:xfrm>
           <a:prstGeom prst="rect">
             <a:avLst/>
@@ -6595,7 +7243,7 @@
                 <a:ea typeface="Aptos" pitchFamily="34" charset="-122"/>
                 <a:cs typeface="Aptos" pitchFamily="34" charset="-120"/>
               </a:rPr>
-              <a:t>Use the concept to clarify workflow changes, dependencies, staffing, procurement requirements, training needs, and.</a:t>
+              <a:t>Use the concept to clarify workflow changes, dependencies, staffing, procurement requirements, training needs, and implementation checkpoints.</a:t>
             </a:r>
             <a:endParaRPr lang="en-US" sz="1320" dirty="0"/>
           </a:p>
@@ -6964,11 +7612,11 @@
         <p:spPr>
           <a:xfrm>
             <a:off x="7635240" y="1325880"/>
-            <a:ext cx="3474720" cy="1325880"/>
+            <a:ext cx="3474720" cy="1207008"/>
           </a:xfrm>
           <a:prstGeom prst="roundRect">
             <a:avLst>
-              <a:gd name="adj" fmla="val 8276"/>
+              <a:gd name="adj" fmla="val 9091"/>
             </a:avLst>
           </a:prstGeom>
           <a:solidFill>
@@ -7030,7 +7678,7 @@
         <p:spPr>
           <a:xfrm>
             <a:off x="7799832" y="1801368"/>
-            <a:ext cx="3145536" cy="758952"/>
+            <a:ext cx="3145536" cy="640080"/>
           </a:xfrm>
           <a:prstGeom prst="rect">
             <a:avLst/>
@@ -7070,12 +7718,12 @@
         </p:nvSpPr>
         <p:spPr>
           <a:xfrm>
-            <a:off x="7635240" y="2788920"/>
-            <a:ext cx="3474720" cy="1536192"/>
+            <a:off x="7635240" y="2670048"/>
+            <a:ext cx="3474720" cy="1377086"/>
           </a:xfrm>
           <a:prstGeom prst="roundRect">
             <a:avLst>
-              <a:gd name="adj" fmla="val 7143"/>
+              <a:gd name="adj" fmla="val 7968"/>
             </a:avLst>
           </a:prstGeom>
           <a:solidFill>
@@ -7097,7 +7745,7 @@
         </p:nvSpPr>
         <p:spPr>
           <a:xfrm>
-            <a:off x="7799832" y="2935224"/>
+            <a:off x="7799832" y="2816352"/>
             <a:ext cx="3145536" cy="256032"/>
           </a:xfrm>
           <a:prstGeom prst="rect">
@@ -7136,8 +7784,8 @@
         </p:nvSpPr>
         <p:spPr>
           <a:xfrm>
-            <a:off x="7818120" y="3300984"/>
-            <a:ext cx="3090672" cy="877824"/>
+            <a:off x="7818120" y="3182112"/>
+            <a:ext cx="3090672" cy="718718"/>
           </a:xfrm>
           <a:prstGeom prst="rect">
             <a:avLst/>
@@ -7211,12 +7859,12 @@
         </p:nvSpPr>
         <p:spPr>
           <a:xfrm>
-            <a:off x="7635240" y="4498848"/>
-            <a:ext cx="3474720" cy="1143000"/>
+            <a:off x="7635240" y="4184294"/>
+            <a:ext cx="3474720" cy="1466698"/>
           </a:xfrm>
           <a:prstGeom prst="roundRect">
             <a:avLst>
-              <a:gd name="adj" fmla="val 9600"/>
+              <a:gd name="adj" fmla="val 7481"/>
             </a:avLst>
           </a:prstGeom>
           <a:solidFill>
@@ -7238,7 +7886,7 @@
         </p:nvSpPr>
         <p:spPr>
           <a:xfrm>
-            <a:off x="7799832" y="4645152"/>
+            <a:off x="7799832" y="4330598"/>
             <a:ext cx="3145536" cy="256032"/>
           </a:xfrm>
           <a:prstGeom prst="rect">
@@ -7277,8 +7925,8 @@
         </p:nvSpPr>
         <p:spPr>
           <a:xfrm>
-            <a:off x="7799832" y="4974336"/>
-            <a:ext cx="3145536" cy="576072"/>
+            <a:off x="7799832" y="4659782"/>
+            <a:ext cx="3145536" cy="899770"/>
           </a:xfrm>
           <a:prstGeom prst="rect">
             <a:avLst/>
@@ -7304,7 +7952,7 @@
                 <a:ea typeface="Aptos" pitchFamily="34" charset="-122"/>
                 <a:cs typeface="Aptos" pitchFamily="34" charset="-120"/>
               </a:rPr>
-              <a:t>Connect the concept to public health purpose, responsible use, required safeguards, documentation, and the next action a.</a:t>
+              <a:t>Connect the concept to public health purpose, responsible use, required safeguards, documentation, and the next action a department should take.</a:t>
             </a:r>
             <a:endParaRPr lang="en-US" sz="1320" dirty="0"/>
           </a:p>
@@ -7656,11 +8304,11 @@
         <p:spPr>
           <a:xfrm>
             <a:off x="7635240" y="1325880"/>
-            <a:ext cx="3474720" cy="1325880"/>
+            <a:ext cx="3474720" cy="1207008"/>
           </a:xfrm>
           <a:prstGeom prst="roundRect">
             <a:avLst>
-              <a:gd name="adj" fmla="val 8276"/>
+              <a:gd name="adj" fmla="val 9091"/>
             </a:avLst>
           </a:prstGeom>
           <a:solidFill>
@@ -7722,7 +8370,7 @@
         <p:spPr>
           <a:xfrm>
             <a:off x="7799832" y="1801368"/>
-            <a:ext cx="3145536" cy="758952"/>
+            <a:ext cx="3145536" cy="640080"/>
           </a:xfrm>
           <a:prstGeom prst="rect">
             <a:avLst/>
@@ -7762,12 +8410,12 @@
         </p:nvSpPr>
         <p:spPr>
           <a:xfrm>
-            <a:off x="7635240" y="2788920"/>
-            <a:ext cx="3474720" cy="1536192"/>
+            <a:off x="7635240" y="2670048"/>
+            <a:ext cx="3474720" cy="1377086"/>
           </a:xfrm>
           <a:prstGeom prst="roundRect">
             <a:avLst>
-              <a:gd name="adj" fmla="val 7143"/>
+              <a:gd name="adj" fmla="val 7968"/>
             </a:avLst>
           </a:prstGeom>
           <a:solidFill>
@@ -7789,7 +8437,7 @@
         </p:nvSpPr>
         <p:spPr>
           <a:xfrm>
-            <a:off x="7799832" y="2935224"/>
+            <a:off x="7799832" y="2816352"/>
             <a:ext cx="3145536" cy="256032"/>
           </a:xfrm>
           <a:prstGeom prst="rect">
@@ -7828,8 +8476,8 @@
         </p:nvSpPr>
         <p:spPr>
           <a:xfrm>
-            <a:off x="7818120" y="3300984"/>
-            <a:ext cx="3090672" cy="877824"/>
+            <a:off x="7818120" y="3182112"/>
+            <a:ext cx="3090672" cy="718718"/>
           </a:xfrm>
           <a:prstGeom prst="rect">
             <a:avLst/>
@@ -7886,12 +8534,12 @@
         </p:nvSpPr>
         <p:spPr>
           <a:xfrm>
-            <a:off x="7635240" y="4498848"/>
-            <a:ext cx="3474720" cy="1143000"/>
+            <a:off x="7635240" y="4184294"/>
+            <a:ext cx="3474720" cy="1466698"/>
           </a:xfrm>
           <a:prstGeom prst="roundRect">
             <a:avLst>
-              <a:gd name="adj" fmla="val 9600"/>
+              <a:gd name="adj" fmla="val 7481"/>
             </a:avLst>
           </a:prstGeom>
           <a:solidFill>
@@ -7913,7 +8561,7 @@
         </p:nvSpPr>
         <p:spPr>
           <a:xfrm>
-            <a:off x="7799832" y="4645152"/>
+            <a:off x="7799832" y="4330598"/>
             <a:ext cx="3145536" cy="256032"/>
           </a:xfrm>
           <a:prstGeom prst="rect">
@@ -7952,8 +8600,8 @@
         </p:nvSpPr>
         <p:spPr>
           <a:xfrm>
-            <a:off x="7799832" y="4974336"/>
-            <a:ext cx="3145536" cy="576072"/>
+            <a:off x="7799832" y="4659782"/>
+            <a:ext cx="3145536" cy="899770"/>
           </a:xfrm>
           <a:prstGeom prst="rect">
             <a:avLst/>
@@ -7979,7 +8627,7 @@
                 <a:ea typeface="Aptos" pitchFamily="34" charset="-122"/>
                 <a:cs typeface="Aptos" pitchFamily="34" charset="-120"/>
               </a:rPr>
-              <a:t>Connect the concept to public health purpose, responsible use, required safeguards, documentation, and the next action a.</a:t>
+              <a:t>Connect the concept to public health purpose, responsible use, required safeguards, documentation, and the next action a department should take.</a:t>
             </a:r>
             <a:endParaRPr lang="en-US" sz="1320" dirty="0"/>
           </a:p>
@@ -8348,11 +8996,11 @@
         <p:spPr>
           <a:xfrm>
             <a:off x="7635240" y="1325880"/>
-            <a:ext cx="3474720" cy="1325880"/>
+            <a:ext cx="3474720" cy="1207008"/>
           </a:xfrm>
           <a:prstGeom prst="roundRect">
             <a:avLst>
-              <a:gd name="adj" fmla="val 8276"/>
+              <a:gd name="adj" fmla="val 9091"/>
             </a:avLst>
           </a:prstGeom>
           <a:solidFill>
@@ -8414,7 +9062,7 @@
         <p:spPr>
           <a:xfrm>
             <a:off x="7799832" y="1801368"/>
-            <a:ext cx="3145536" cy="758952"/>
+            <a:ext cx="3145536" cy="640080"/>
           </a:xfrm>
           <a:prstGeom prst="rect">
             <a:avLst/>
@@ -8454,12 +9102,12 @@
         </p:nvSpPr>
         <p:spPr>
           <a:xfrm>
-            <a:off x="7635240" y="2788920"/>
-            <a:ext cx="3474720" cy="1536192"/>
+            <a:off x="7635240" y="2670048"/>
+            <a:ext cx="3474720" cy="1377086"/>
           </a:xfrm>
           <a:prstGeom prst="roundRect">
             <a:avLst>
-              <a:gd name="adj" fmla="val 7143"/>
+              <a:gd name="adj" fmla="val 7968"/>
             </a:avLst>
           </a:prstGeom>
           <a:solidFill>
@@ -8481,7 +9129,7 @@
         </p:nvSpPr>
         <p:spPr>
           <a:xfrm>
-            <a:off x="7799832" y="2935224"/>
+            <a:off x="7799832" y="2816352"/>
             <a:ext cx="3145536" cy="256032"/>
           </a:xfrm>
           <a:prstGeom prst="rect">
@@ -8520,8 +9168,8 @@
         </p:nvSpPr>
         <p:spPr>
           <a:xfrm>
-            <a:off x="7818120" y="3300984"/>
-            <a:ext cx="3090672" cy="877824"/>
+            <a:off x="7818120" y="3182112"/>
+            <a:ext cx="3090672" cy="718718"/>
           </a:xfrm>
           <a:prstGeom prst="rect">
             <a:avLst/>
@@ -8578,12 +9226,12 @@
         </p:nvSpPr>
         <p:spPr>
           <a:xfrm>
-            <a:off x="7635240" y="4498848"/>
-            <a:ext cx="3474720" cy="1143000"/>
+            <a:off x="7635240" y="4184294"/>
+            <a:ext cx="3474720" cy="1466698"/>
           </a:xfrm>
           <a:prstGeom prst="roundRect">
             <a:avLst>
-              <a:gd name="adj" fmla="val 9600"/>
+              <a:gd name="adj" fmla="val 7481"/>
             </a:avLst>
           </a:prstGeom>
           <a:solidFill>
@@ -8605,7 +9253,7 @@
         </p:nvSpPr>
         <p:spPr>
           <a:xfrm>
-            <a:off x="7799832" y="4645152"/>
+            <a:off x="7799832" y="4330598"/>
             <a:ext cx="3145536" cy="256032"/>
           </a:xfrm>
           <a:prstGeom prst="rect">
@@ -8644,8 +9292,8 @@
         </p:nvSpPr>
         <p:spPr>
           <a:xfrm>
-            <a:off x="7799832" y="4974336"/>
-            <a:ext cx="3145536" cy="576072"/>
+            <a:off x="7799832" y="4659782"/>
+            <a:ext cx="3145536" cy="899770"/>
           </a:xfrm>
           <a:prstGeom prst="rect">
             <a:avLst/>
@@ -8671,7 +9319,7 @@
                 <a:ea typeface="Aptos" pitchFamily="34" charset="-122"/>
                 <a:cs typeface="Aptos" pitchFamily="34" charset="-120"/>
               </a:rPr>
-              <a:t>Use the assignment to test whether you can explain the concept, apply it to a realistic public health situation, and.</a:t>
+              <a:t>Use the assignment to test whether you can explain the concept, apply it to a realistic public health situation, and identify what would need review before the work moves forward.</a:t>
             </a:r>
             <a:endParaRPr lang="en-US" sz="1320" dirty="0"/>
           </a:p>
@@ -9040,11 +9688,11 @@
         <p:spPr>
           <a:xfrm>
             <a:off x="7635240" y="1325880"/>
-            <a:ext cx="3474720" cy="1325880"/>
+            <a:ext cx="3474720" cy="1207008"/>
           </a:xfrm>
           <a:prstGeom prst="roundRect">
             <a:avLst>
-              <a:gd name="adj" fmla="val 8276"/>
+              <a:gd name="adj" fmla="val 9091"/>
             </a:avLst>
           </a:prstGeom>
           <a:solidFill>
@@ -9106,7 +9754,7 @@
         <p:spPr>
           <a:xfrm>
             <a:off x="7799832" y="1801368"/>
-            <a:ext cx="3145536" cy="758952"/>
+            <a:ext cx="3145536" cy="640080"/>
           </a:xfrm>
           <a:prstGeom prst="rect">
             <a:avLst/>
@@ -9146,12 +9794,12 @@
         </p:nvSpPr>
         <p:spPr>
           <a:xfrm>
-            <a:off x="7635240" y="2788920"/>
-            <a:ext cx="3474720" cy="1536192"/>
+            <a:off x="7635240" y="2670048"/>
+            <a:ext cx="3474720" cy="1377086"/>
           </a:xfrm>
           <a:prstGeom prst="roundRect">
             <a:avLst>
-              <a:gd name="adj" fmla="val 7143"/>
+              <a:gd name="adj" fmla="val 7968"/>
             </a:avLst>
           </a:prstGeom>
           <a:solidFill>
@@ -9173,7 +9821,7 @@
         </p:nvSpPr>
         <p:spPr>
           <a:xfrm>
-            <a:off x="7799832" y="2935224"/>
+            <a:off x="7799832" y="2816352"/>
             <a:ext cx="3145536" cy="256032"/>
           </a:xfrm>
           <a:prstGeom prst="rect">
@@ -9212,8 +9860,8 @@
         </p:nvSpPr>
         <p:spPr>
           <a:xfrm>
-            <a:off x="7818120" y="3300984"/>
-            <a:ext cx="3090672" cy="877824"/>
+            <a:off x="7818120" y="3182112"/>
+            <a:ext cx="3090672" cy="718718"/>
           </a:xfrm>
           <a:prstGeom prst="rect">
             <a:avLst/>
@@ -9287,12 +9935,12 @@
         </p:nvSpPr>
         <p:spPr>
           <a:xfrm>
-            <a:off x="7635240" y="4498848"/>
-            <a:ext cx="3474720" cy="1143000"/>
+            <a:off x="7635240" y="4184294"/>
+            <a:ext cx="3474720" cy="1466698"/>
           </a:xfrm>
           <a:prstGeom prst="roundRect">
             <a:avLst>
-              <a:gd name="adj" fmla="val 9600"/>
+              <a:gd name="adj" fmla="val 7481"/>
             </a:avLst>
           </a:prstGeom>
           <a:solidFill>
@@ -9314,7 +9962,7 @@
         </p:nvSpPr>
         <p:spPr>
           <a:xfrm>
-            <a:off x="7799832" y="4645152"/>
+            <a:off x="7799832" y="4330598"/>
             <a:ext cx="3145536" cy="256032"/>
           </a:xfrm>
           <a:prstGeom prst="rect">
@@ -9353,8 +10001,8 @@
         </p:nvSpPr>
         <p:spPr>
           <a:xfrm>
-            <a:off x="7799832" y="4974336"/>
-            <a:ext cx="3145536" cy="576072"/>
+            <a:off x="7799832" y="4659782"/>
+            <a:ext cx="3145536" cy="899770"/>
           </a:xfrm>
           <a:prstGeom prst="rect">
             <a:avLst/>
@@ -9380,7 +10028,7 @@
                 <a:ea typeface="Aptos" pitchFamily="34" charset="-122"/>
                 <a:cs typeface="Aptos" pitchFamily="34" charset="-120"/>
               </a:rPr>
-              <a:t>Connect the concept to public health purpose, responsible use, required safeguards, documentation, and the next action a.</a:t>
+              <a:t>Connect the concept to public health purpose, responsible use, required safeguards, documentation, and the next action a department should take.</a:t>
             </a:r>
             <a:endParaRPr lang="en-US" sz="1320" dirty="0"/>
           </a:p>
@@ -9715,11 +10363,11 @@
         <p:spPr>
           <a:xfrm>
             <a:off x="7635240" y="1325880"/>
-            <a:ext cx="3474720" cy="1325880"/>
+            <a:ext cx="3474720" cy="1207008"/>
           </a:xfrm>
           <a:prstGeom prst="roundRect">
             <a:avLst>
-              <a:gd name="adj" fmla="val 8276"/>
+              <a:gd name="adj" fmla="val 9091"/>
             </a:avLst>
           </a:prstGeom>
           <a:solidFill>
@@ -9781,7 +10429,7 @@
         <p:spPr>
           <a:xfrm>
             <a:off x="7799832" y="1801368"/>
-            <a:ext cx="3145536" cy="758952"/>
+            <a:ext cx="3145536" cy="640080"/>
           </a:xfrm>
           <a:prstGeom prst="rect">
             <a:avLst/>
@@ -9821,12 +10469,12 @@
         </p:nvSpPr>
         <p:spPr>
           <a:xfrm>
-            <a:off x="7635240" y="2788920"/>
-            <a:ext cx="3474720" cy="1536192"/>
+            <a:off x="7635240" y="2670048"/>
+            <a:ext cx="3474720" cy="1377086"/>
           </a:xfrm>
           <a:prstGeom prst="roundRect">
             <a:avLst>
-              <a:gd name="adj" fmla="val 7143"/>
+              <a:gd name="adj" fmla="val 7968"/>
             </a:avLst>
           </a:prstGeom>
           <a:solidFill>
@@ -9848,7 +10496,7 @@
         </p:nvSpPr>
         <p:spPr>
           <a:xfrm>
-            <a:off x="7799832" y="2935224"/>
+            <a:off x="7799832" y="2816352"/>
             <a:ext cx="3145536" cy="256032"/>
           </a:xfrm>
           <a:prstGeom prst="rect">
@@ -9887,8 +10535,8 @@
         </p:nvSpPr>
         <p:spPr>
           <a:xfrm>
-            <a:off x="7818120" y="3300984"/>
-            <a:ext cx="3090672" cy="877824"/>
+            <a:off x="7818120" y="3182112"/>
+            <a:ext cx="3090672" cy="718718"/>
           </a:xfrm>
           <a:prstGeom prst="rect">
             <a:avLst/>
@@ -9928,12 +10576,12 @@
         </p:nvSpPr>
         <p:spPr>
           <a:xfrm>
-            <a:off x="7635240" y="4498848"/>
-            <a:ext cx="3474720" cy="1143000"/>
+            <a:off x="7635240" y="4184294"/>
+            <a:ext cx="3474720" cy="1466698"/>
           </a:xfrm>
           <a:prstGeom prst="roundRect">
             <a:avLst>
-              <a:gd name="adj" fmla="val 9600"/>
+              <a:gd name="adj" fmla="val 7481"/>
             </a:avLst>
           </a:prstGeom>
           <a:solidFill>
@@ -9955,7 +10603,7 @@
         </p:nvSpPr>
         <p:spPr>
           <a:xfrm>
-            <a:off x="7799832" y="4645152"/>
+            <a:off x="7799832" y="4330598"/>
             <a:ext cx="3145536" cy="256032"/>
           </a:xfrm>
           <a:prstGeom prst="rect">
@@ -9994,8 +10642,8 @@
         </p:nvSpPr>
         <p:spPr>
           <a:xfrm>
-            <a:off x="7799832" y="4974336"/>
-            <a:ext cx="3145536" cy="576072"/>
+            <a:off x="7799832" y="4659782"/>
+            <a:ext cx="3145536" cy="899770"/>
           </a:xfrm>
           <a:prstGeom prst="rect">
             <a:avLst/>
@@ -10021,7 +10669,7 @@
                 <a:ea typeface="Aptos" pitchFamily="34" charset="-122"/>
                 <a:cs typeface="Aptos" pitchFamily="34" charset="-120"/>
               </a:rPr>
-              <a:t>Connect the concept to public health purpose, responsible use, required safeguards, documentation, and the next action a.</a:t>
+              <a:t>Connect the concept to public health purpose, responsible use, required safeguards, documentation, and the next action a department should take.</a:t>
             </a:r>
             <a:endParaRPr lang="en-US" sz="1320" dirty="0"/>
           </a:p>
@@ -10992,11 +11640,11 @@
         <p:spPr>
           <a:xfrm>
             <a:off x="7635240" y="1325880"/>
-            <a:ext cx="3474720" cy="1325880"/>
+            <a:ext cx="3474720" cy="1207008"/>
           </a:xfrm>
           <a:prstGeom prst="roundRect">
             <a:avLst>
-              <a:gd name="adj" fmla="val 8276"/>
+              <a:gd name="adj" fmla="val 9091"/>
             </a:avLst>
           </a:prstGeom>
           <a:solidFill>
@@ -11058,7 +11706,7 @@
         <p:spPr>
           <a:xfrm>
             <a:off x="7799832" y="1801368"/>
-            <a:ext cx="3145536" cy="758952"/>
+            <a:ext cx="3145536" cy="640080"/>
           </a:xfrm>
           <a:prstGeom prst="rect">
             <a:avLst/>
@@ -11098,12 +11746,12 @@
         </p:nvSpPr>
         <p:spPr>
           <a:xfrm>
-            <a:off x="7635240" y="2788920"/>
-            <a:ext cx="3474720" cy="1536192"/>
+            <a:off x="7635240" y="2670048"/>
+            <a:ext cx="3474720" cy="1377086"/>
           </a:xfrm>
           <a:prstGeom prst="roundRect">
             <a:avLst>
-              <a:gd name="adj" fmla="val 7143"/>
+              <a:gd name="adj" fmla="val 7968"/>
             </a:avLst>
           </a:prstGeom>
           <a:solidFill>
@@ -11125,7 +11773,7 @@
         </p:nvSpPr>
         <p:spPr>
           <a:xfrm>
-            <a:off x="7799832" y="2935224"/>
+            <a:off x="7799832" y="2816352"/>
             <a:ext cx="3145536" cy="256032"/>
           </a:xfrm>
           <a:prstGeom prst="rect">
@@ -11164,8 +11812,8 @@
         </p:nvSpPr>
         <p:spPr>
           <a:xfrm>
-            <a:off x="7818120" y="3300984"/>
-            <a:ext cx="3090672" cy="877824"/>
+            <a:off x="7818120" y="3182112"/>
+            <a:ext cx="3090672" cy="718718"/>
           </a:xfrm>
           <a:prstGeom prst="rect">
             <a:avLst/>
@@ -11239,12 +11887,12 @@
         </p:nvSpPr>
         <p:spPr>
           <a:xfrm>
-            <a:off x="7635240" y="4498848"/>
-            <a:ext cx="3474720" cy="1143000"/>
+            <a:off x="7635240" y="4184294"/>
+            <a:ext cx="3474720" cy="1466698"/>
           </a:xfrm>
           <a:prstGeom prst="roundRect">
             <a:avLst>
-              <a:gd name="adj" fmla="val 9600"/>
+              <a:gd name="adj" fmla="val 7481"/>
             </a:avLst>
           </a:prstGeom>
           <a:solidFill>
@@ -11266,7 +11914,7 @@
         </p:nvSpPr>
         <p:spPr>
           <a:xfrm>
-            <a:off x="7799832" y="4645152"/>
+            <a:off x="7799832" y="4330598"/>
             <a:ext cx="3145536" cy="256032"/>
           </a:xfrm>
           <a:prstGeom prst="rect">
@@ -11305,8 +11953,8 @@
         </p:nvSpPr>
         <p:spPr>
           <a:xfrm>
-            <a:off x="7799832" y="4974336"/>
-            <a:ext cx="3145536" cy="576072"/>
+            <a:off x="7799832" y="4659782"/>
+            <a:ext cx="3145536" cy="899770"/>
           </a:xfrm>
           <a:prstGeom prst="rect">
             <a:avLst/>
@@ -11332,7 +11980,7 @@
                 <a:ea typeface="Aptos" pitchFamily="34" charset="-122"/>
                 <a:cs typeface="Aptos" pitchFamily="34" charset="-120"/>
               </a:rPr>
-              <a:t>Use the assignment to test whether you can explain the concept, apply it to a realistic public health situation, and.</a:t>
+              <a:t>Use the assignment to test whether you can explain the concept, apply it to a realistic public health situation, and identify what would need review before the work moves forward.</a:t>
             </a:r>
             <a:endParaRPr lang="en-US" sz="1320" dirty="0"/>
           </a:p>
@@ -11701,11 +12349,11 @@
         <p:spPr>
           <a:xfrm>
             <a:off x="7635240" y="1325880"/>
-            <a:ext cx="3474720" cy="1325880"/>
+            <a:ext cx="3474720" cy="1207008"/>
           </a:xfrm>
           <a:prstGeom prst="roundRect">
             <a:avLst>
-              <a:gd name="adj" fmla="val 8276"/>
+              <a:gd name="adj" fmla="val 9091"/>
             </a:avLst>
           </a:prstGeom>
           <a:solidFill>
@@ -11767,7 +12415,7 @@
         <p:spPr>
           <a:xfrm>
             <a:off x="7799832" y="1801368"/>
-            <a:ext cx="3145536" cy="758952"/>
+            <a:ext cx="3145536" cy="640080"/>
           </a:xfrm>
           <a:prstGeom prst="rect">
             <a:avLst/>
@@ -11807,12 +12455,12 @@
         </p:nvSpPr>
         <p:spPr>
           <a:xfrm>
-            <a:off x="7635240" y="2788920"/>
-            <a:ext cx="3474720" cy="1536192"/>
+            <a:off x="7635240" y="2670048"/>
+            <a:ext cx="3474720" cy="1377086"/>
           </a:xfrm>
           <a:prstGeom prst="roundRect">
             <a:avLst>
-              <a:gd name="adj" fmla="val 7143"/>
+              <a:gd name="adj" fmla="val 7968"/>
             </a:avLst>
           </a:prstGeom>
           <a:solidFill>
@@ -11834,7 +12482,7 @@
         </p:nvSpPr>
         <p:spPr>
           <a:xfrm>
-            <a:off x="7799832" y="2935224"/>
+            <a:off x="7799832" y="2816352"/>
             <a:ext cx="3145536" cy="256032"/>
           </a:xfrm>
           <a:prstGeom prst="rect">
@@ -11873,8 +12521,8 @@
         </p:nvSpPr>
         <p:spPr>
           <a:xfrm>
-            <a:off x="7818120" y="3300984"/>
-            <a:ext cx="3090672" cy="877824"/>
+            <a:off x="7818120" y="3182112"/>
+            <a:ext cx="3090672" cy="718718"/>
           </a:xfrm>
           <a:prstGeom prst="rect">
             <a:avLst/>
@@ -11948,12 +12596,12 @@
         </p:nvSpPr>
         <p:spPr>
           <a:xfrm>
-            <a:off x="7635240" y="4498848"/>
-            <a:ext cx="3474720" cy="1143000"/>
+            <a:off x="7635240" y="4184294"/>
+            <a:ext cx="3474720" cy="1466698"/>
           </a:xfrm>
           <a:prstGeom prst="roundRect">
             <a:avLst>
-              <a:gd name="adj" fmla="val 9600"/>
+              <a:gd name="adj" fmla="val 7481"/>
             </a:avLst>
           </a:prstGeom>
           <a:solidFill>
@@ -11975,7 +12623,7 @@
         </p:nvSpPr>
         <p:spPr>
           <a:xfrm>
-            <a:off x="7799832" y="4645152"/>
+            <a:off x="7799832" y="4330598"/>
             <a:ext cx="3145536" cy="256032"/>
           </a:xfrm>
           <a:prstGeom prst="rect">
@@ -12014,8 +12662,8 @@
         </p:nvSpPr>
         <p:spPr>
           <a:xfrm>
-            <a:off x="7799832" y="4974336"/>
-            <a:ext cx="3145536" cy="576072"/>
+            <a:off x="7799832" y="4659782"/>
+            <a:ext cx="3145536" cy="899770"/>
           </a:xfrm>
           <a:prstGeom prst="rect">
             <a:avLst/>
@@ -12041,7 +12689,7 @@
                 <a:ea typeface="Aptos" pitchFamily="34" charset="-122"/>
                 <a:cs typeface="Aptos" pitchFamily="34" charset="-120"/>
               </a:rPr>
-              <a:t>Use the assignment to test whether you can explain the concept, apply it to a realistic public health situation, and.</a:t>
+              <a:t>Use the assignment to test whether you can explain the concept, apply it to a realistic public health situation, and identify what would need review before the work moves forward.</a:t>
             </a:r>
             <a:endParaRPr lang="en-US" sz="1320" dirty="0"/>
           </a:p>
@@ -12410,11 +13058,11 @@
         <p:spPr>
           <a:xfrm>
             <a:off x="7635240" y="1325880"/>
-            <a:ext cx="3474720" cy="1325880"/>
+            <a:ext cx="3474720" cy="1207008"/>
           </a:xfrm>
           <a:prstGeom prst="roundRect">
             <a:avLst>
-              <a:gd name="adj" fmla="val 8276"/>
+              <a:gd name="adj" fmla="val 9091"/>
             </a:avLst>
           </a:prstGeom>
           <a:solidFill>
@@ -12476,7 +13124,7 @@
         <p:spPr>
           <a:xfrm>
             <a:off x="7799832" y="1801368"/>
-            <a:ext cx="3145536" cy="758952"/>
+            <a:ext cx="3145536" cy="640080"/>
           </a:xfrm>
           <a:prstGeom prst="rect">
             <a:avLst/>
@@ -12516,12 +13164,12 @@
         </p:nvSpPr>
         <p:spPr>
           <a:xfrm>
-            <a:off x="7635240" y="2788920"/>
-            <a:ext cx="3474720" cy="1536192"/>
+            <a:off x="7635240" y="2670048"/>
+            <a:ext cx="3474720" cy="1377086"/>
           </a:xfrm>
           <a:prstGeom prst="roundRect">
             <a:avLst>
-              <a:gd name="adj" fmla="val 7143"/>
+              <a:gd name="adj" fmla="val 7968"/>
             </a:avLst>
           </a:prstGeom>
           <a:solidFill>
@@ -12543,7 +13191,7 @@
         </p:nvSpPr>
         <p:spPr>
           <a:xfrm>
-            <a:off x="7799832" y="2935224"/>
+            <a:off x="7799832" y="2816352"/>
             <a:ext cx="3145536" cy="256032"/>
           </a:xfrm>
           <a:prstGeom prst="rect">
@@ -12582,8 +13230,8 @@
         </p:nvSpPr>
         <p:spPr>
           <a:xfrm>
-            <a:off x="7818120" y="3300984"/>
-            <a:ext cx="3090672" cy="877824"/>
+            <a:off x="7818120" y="3182112"/>
+            <a:ext cx="3090672" cy="718718"/>
           </a:xfrm>
           <a:prstGeom prst="rect">
             <a:avLst/>
@@ -12640,12 +13288,12 @@
         </p:nvSpPr>
         <p:spPr>
           <a:xfrm>
-            <a:off x="7635240" y="4498848"/>
-            <a:ext cx="3474720" cy="1143000"/>
+            <a:off x="7635240" y="4184294"/>
+            <a:ext cx="3474720" cy="1466698"/>
           </a:xfrm>
           <a:prstGeom prst="roundRect">
             <a:avLst>
-              <a:gd name="adj" fmla="val 9600"/>
+              <a:gd name="adj" fmla="val 7481"/>
             </a:avLst>
           </a:prstGeom>
           <a:solidFill>
@@ -12667,7 +13315,7 @@
         </p:nvSpPr>
         <p:spPr>
           <a:xfrm>
-            <a:off x="7799832" y="4645152"/>
+            <a:off x="7799832" y="4330598"/>
             <a:ext cx="3145536" cy="256032"/>
           </a:xfrm>
           <a:prstGeom prst="rect">
@@ -12706,8 +13354,8 @@
         </p:nvSpPr>
         <p:spPr>
           <a:xfrm>
-            <a:off x="7799832" y="4974336"/>
-            <a:ext cx="3145536" cy="576072"/>
+            <a:off x="7799832" y="4659782"/>
+            <a:ext cx="3145536" cy="899770"/>
           </a:xfrm>
           <a:prstGeom prst="rect">
             <a:avLst/>
@@ -12733,7 +13381,7 @@
                 <a:ea typeface="Aptos" pitchFamily="34" charset="-122"/>
                 <a:cs typeface="Aptos" pitchFamily="34" charset="-120"/>
               </a:rPr>
-              <a:t>Connect the concept to public health purpose, responsible use, required safeguards, documentation, and the next action a.</a:t>
+              <a:t>Connect the concept to public health purpose, responsible use, required safeguards, documentation, and the next action a department should take.</a:t>
             </a:r>
             <a:endParaRPr lang="en-US" sz="1320" dirty="0"/>
           </a:p>
@@ -13211,7 +13859,7 @@
                 <a:ea typeface="Aptos" pitchFamily="34" charset="-122"/>
                 <a:cs typeface="Aptos" pitchFamily="34" charset="-120"/>
               </a:rPr>
-              <a:t>Use the related plays to identify decisions, participants, timing, approvals, and documentation needed for responsible.</a:t>
+              <a:t>Use the related plays to identify decisions, participants, timing, approvals, and documentation needed for responsible implementation.</a:t>
             </a:r>
             <a:endParaRPr lang="en-US" sz="1320" dirty="0"/>
           </a:p>
@@ -13830,7 +14478,7 @@
                 <a:ea typeface="Aptos" pitchFamily="34" charset="-122"/>
                 <a:cs typeface="Aptos" pitchFamily="34" charset="-120"/>
               </a:rPr>
-              <a:t>Use linked tools when your department needs a structured worksheet, template, checklist, review process, or.</a:t>
+              <a:t>Use linked tools when your department needs a structured worksheet, template, checklist, review process, or documentation artifact.</a:t>
             </a:r>
             <a:endParaRPr lang="en-US" sz="1320" dirty="0"/>
           </a:p>
@@ -14340,11 +14988,11 @@
         <p:spPr>
           <a:xfrm>
             <a:off x="7635240" y="1325880"/>
-            <a:ext cx="3474720" cy="1325880"/>
+            <a:ext cx="3474720" cy="1207008"/>
           </a:xfrm>
           <a:prstGeom prst="roundRect">
             <a:avLst>
-              <a:gd name="adj" fmla="val 8276"/>
+              <a:gd name="adj" fmla="val 9091"/>
             </a:avLst>
           </a:prstGeom>
           <a:solidFill>
@@ -14406,7 +15054,7 @@
         <p:spPr>
           <a:xfrm>
             <a:off x="7799832" y="1801368"/>
-            <a:ext cx="3145536" cy="758952"/>
+            <a:ext cx="3145536" cy="640080"/>
           </a:xfrm>
           <a:prstGeom prst="rect">
             <a:avLst/>
@@ -14446,12 +15094,12 @@
         </p:nvSpPr>
         <p:spPr>
           <a:xfrm>
-            <a:off x="7635240" y="2788920"/>
-            <a:ext cx="3474720" cy="1536192"/>
+            <a:off x="7635240" y="2670048"/>
+            <a:ext cx="3474720" cy="1377086"/>
           </a:xfrm>
           <a:prstGeom prst="roundRect">
             <a:avLst>
-              <a:gd name="adj" fmla="val 7143"/>
+              <a:gd name="adj" fmla="val 7968"/>
             </a:avLst>
           </a:prstGeom>
           <a:solidFill>
@@ -14473,7 +15121,7 @@
         </p:nvSpPr>
         <p:spPr>
           <a:xfrm>
-            <a:off x="7799832" y="2935224"/>
+            <a:off x="7799832" y="2816352"/>
             <a:ext cx="3145536" cy="256032"/>
           </a:xfrm>
           <a:prstGeom prst="rect">
@@ -14512,8 +15160,8 @@
         </p:nvSpPr>
         <p:spPr>
           <a:xfrm>
-            <a:off x="7818120" y="3300984"/>
-            <a:ext cx="3090672" cy="877824"/>
+            <a:off x="7818120" y="3182112"/>
+            <a:ext cx="3090672" cy="718718"/>
           </a:xfrm>
           <a:prstGeom prst="rect">
             <a:avLst/>
@@ -14570,12 +15218,12 @@
         </p:nvSpPr>
         <p:spPr>
           <a:xfrm>
-            <a:off x="7635240" y="4498848"/>
-            <a:ext cx="3474720" cy="1143000"/>
+            <a:off x="7635240" y="4184294"/>
+            <a:ext cx="3474720" cy="1466698"/>
           </a:xfrm>
           <a:prstGeom prst="roundRect">
             <a:avLst>
-              <a:gd name="adj" fmla="val 9600"/>
+              <a:gd name="adj" fmla="val 7481"/>
             </a:avLst>
           </a:prstGeom>
           <a:solidFill>
@@ -14597,7 +15245,7 @@
         </p:nvSpPr>
         <p:spPr>
           <a:xfrm>
-            <a:off x="7799832" y="4645152"/>
+            <a:off x="7799832" y="4330598"/>
             <a:ext cx="3145536" cy="256032"/>
           </a:xfrm>
           <a:prstGeom prst="rect">
@@ -14636,8 +15284,8 @@
         </p:nvSpPr>
         <p:spPr>
           <a:xfrm>
-            <a:off x="7799832" y="4974336"/>
-            <a:ext cx="3145536" cy="576072"/>
+            <a:off x="7799832" y="4659782"/>
+            <a:ext cx="3145536" cy="899770"/>
           </a:xfrm>
           <a:prstGeom prst="rect">
             <a:avLst/>
@@ -14663,7 +15311,7 @@
                 <a:ea typeface="Aptos" pitchFamily="34" charset="-122"/>
                 <a:cs typeface="Aptos" pitchFamily="34" charset="-120"/>
               </a:rPr>
-              <a:t>Use the assignment to test whether you can explain the concept, apply it to a realistic public health situation, and.</a:t>
+              <a:t>Use the assignment to test whether you can explain the concept, apply it to a realistic public health situation, and identify what would need review before the work moves forward.</a:t>
             </a:r>
             <a:endParaRPr lang="en-US" sz="1320" dirty="0"/>
           </a:p>
@@ -14998,11 +15646,11 @@
         <p:spPr>
           <a:xfrm>
             <a:off x="7635240" y="1325880"/>
-            <a:ext cx="3474720" cy="1325880"/>
+            <a:ext cx="3474720" cy="1207008"/>
           </a:xfrm>
           <a:prstGeom prst="roundRect">
             <a:avLst>
-              <a:gd name="adj" fmla="val 8276"/>
+              <a:gd name="adj" fmla="val 9091"/>
             </a:avLst>
           </a:prstGeom>
           <a:solidFill>
@@ -15064,7 +15712,7 @@
         <p:spPr>
           <a:xfrm>
             <a:off x="7799832" y="1801368"/>
-            <a:ext cx="3145536" cy="758952"/>
+            <a:ext cx="3145536" cy="640080"/>
           </a:xfrm>
           <a:prstGeom prst="rect">
             <a:avLst/>
@@ -15104,12 +15752,12 @@
         </p:nvSpPr>
         <p:spPr>
           <a:xfrm>
-            <a:off x="7635240" y="2788920"/>
-            <a:ext cx="3474720" cy="1536192"/>
+            <a:off x="7635240" y="2670048"/>
+            <a:ext cx="3474720" cy="1377086"/>
           </a:xfrm>
           <a:prstGeom prst="roundRect">
             <a:avLst>
-              <a:gd name="adj" fmla="val 7143"/>
+              <a:gd name="adj" fmla="val 7968"/>
             </a:avLst>
           </a:prstGeom>
           <a:solidFill>
@@ -15131,7 +15779,7 @@
         </p:nvSpPr>
         <p:spPr>
           <a:xfrm>
-            <a:off x="7799832" y="2935224"/>
+            <a:off x="7799832" y="2816352"/>
             <a:ext cx="3145536" cy="256032"/>
           </a:xfrm>
           <a:prstGeom prst="rect">
@@ -15170,8 +15818,8 @@
         </p:nvSpPr>
         <p:spPr>
           <a:xfrm>
-            <a:off x="7818120" y="3300984"/>
-            <a:ext cx="3090672" cy="877824"/>
+            <a:off x="7818120" y="3182112"/>
+            <a:ext cx="3090672" cy="718718"/>
           </a:xfrm>
           <a:prstGeom prst="rect">
             <a:avLst/>
@@ -15211,12 +15859,12 @@
         </p:nvSpPr>
         <p:spPr>
           <a:xfrm>
-            <a:off x="7635240" y="4498848"/>
-            <a:ext cx="3474720" cy="1143000"/>
+            <a:off x="7635240" y="4184294"/>
+            <a:ext cx="3474720" cy="1466698"/>
           </a:xfrm>
           <a:prstGeom prst="roundRect">
             <a:avLst>
-              <a:gd name="adj" fmla="val 9600"/>
+              <a:gd name="adj" fmla="val 7481"/>
             </a:avLst>
           </a:prstGeom>
           <a:solidFill>
@@ -15238,7 +15886,7 @@
         </p:nvSpPr>
         <p:spPr>
           <a:xfrm>
-            <a:off x="7799832" y="4645152"/>
+            <a:off x="7799832" y="4330598"/>
             <a:ext cx="3145536" cy="256032"/>
           </a:xfrm>
           <a:prstGeom prst="rect">
@@ -15277,8 +15925,8 @@
         </p:nvSpPr>
         <p:spPr>
           <a:xfrm>
-            <a:off x="7799832" y="4974336"/>
-            <a:ext cx="3145536" cy="576072"/>
+            <a:off x="7799832" y="4659782"/>
+            <a:ext cx="3145536" cy="899770"/>
           </a:xfrm>
           <a:prstGeom prst="rect">
             <a:avLst/>
@@ -15304,7 +15952,7 @@
                 <a:ea typeface="Aptos" pitchFamily="34" charset="-122"/>
                 <a:cs typeface="Aptos" pitchFamily="34" charset="-120"/>
               </a:rPr>
-              <a:t>Use the assignment to test whether you can explain the concept, apply it to a realistic public health situation, and.</a:t>
+              <a:t>Use the assignment to test whether you can explain the concept, apply it to a realistic public health situation, and identify what would need review before the work moves forward.</a:t>
             </a:r>
             <a:endParaRPr lang="en-US" sz="1320" dirty="0"/>
           </a:p>
@@ -15673,11 +16321,11 @@
         <p:spPr>
           <a:xfrm>
             <a:off x="7635240" y="1325880"/>
-            <a:ext cx="3474720" cy="1325880"/>
+            <a:ext cx="3474720" cy="1207008"/>
           </a:xfrm>
           <a:prstGeom prst="roundRect">
             <a:avLst>
-              <a:gd name="adj" fmla="val 8276"/>
+              <a:gd name="adj" fmla="val 9091"/>
             </a:avLst>
           </a:prstGeom>
           <a:solidFill>
@@ -15739,7 +16387,7 @@
         <p:spPr>
           <a:xfrm>
             <a:off x="7799832" y="1801368"/>
-            <a:ext cx="3145536" cy="758952"/>
+            <a:ext cx="3145536" cy="640080"/>
           </a:xfrm>
           <a:prstGeom prst="rect">
             <a:avLst/>
@@ -15779,12 +16427,12 @@
         </p:nvSpPr>
         <p:spPr>
           <a:xfrm>
-            <a:off x="7635240" y="2788920"/>
-            <a:ext cx="3474720" cy="1536192"/>
+            <a:off x="7635240" y="2670048"/>
+            <a:ext cx="3474720" cy="1377086"/>
           </a:xfrm>
           <a:prstGeom prst="roundRect">
             <a:avLst>
-              <a:gd name="adj" fmla="val 7143"/>
+              <a:gd name="adj" fmla="val 7968"/>
             </a:avLst>
           </a:prstGeom>
           <a:solidFill>
@@ -15806,7 +16454,7 @@
         </p:nvSpPr>
         <p:spPr>
           <a:xfrm>
-            <a:off x="7799832" y="2935224"/>
+            <a:off x="7799832" y="2816352"/>
             <a:ext cx="3145536" cy="256032"/>
           </a:xfrm>
           <a:prstGeom prst="rect">
@@ -15845,8 +16493,8 @@
         </p:nvSpPr>
         <p:spPr>
           <a:xfrm>
-            <a:off x="7818120" y="3300984"/>
-            <a:ext cx="3090672" cy="877824"/>
+            <a:off x="7818120" y="3182112"/>
+            <a:ext cx="3090672" cy="718718"/>
           </a:xfrm>
           <a:prstGeom prst="rect">
             <a:avLst/>
@@ -15920,12 +16568,12 @@
         </p:nvSpPr>
         <p:spPr>
           <a:xfrm>
-            <a:off x="7635240" y="4498848"/>
-            <a:ext cx="3474720" cy="1143000"/>
+            <a:off x="7635240" y="4184294"/>
+            <a:ext cx="3474720" cy="1466698"/>
           </a:xfrm>
           <a:prstGeom prst="roundRect">
             <a:avLst>
-              <a:gd name="adj" fmla="val 9600"/>
+              <a:gd name="adj" fmla="val 7481"/>
             </a:avLst>
           </a:prstGeom>
           <a:solidFill>
@@ -15947,7 +16595,7 @@
         </p:nvSpPr>
         <p:spPr>
           <a:xfrm>
-            <a:off x="7799832" y="4645152"/>
+            <a:off x="7799832" y="4330598"/>
             <a:ext cx="3145536" cy="256032"/>
           </a:xfrm>
           <a:prstGeom prst="rect">
@@ -15986,8 +16634,8 @@
         </p:nvSpPr>
         <p:spPr>
           <a:xfrm>
-            <a:off x="7799832" y="4974336"/>
-            <a:ext cx="3145536" cy="576072"/>
+            <a:off x="7799832" y="4659782"/>
+            <a:ext cx="3145536" cy="899770"/>
           </a:xfrm>
           <a:prstGeom prst="rect">
             <a:avLst/>
@@ -16013,7 +16661,7 @@
                 <a:ea typeface="Aptos" pitchFamily="34" charset="-122"/>
                 <a:cs typeface="Aptos" pitchFamily="34" charset="-120"/>
               </a:rPr>
-              <a:t>Connect the concept to public health purpose, responsible use, required safeguards, documentation, and the next action a.</a:t>
+              <a:t>Connect the concept to public health purpose, responsible use, required safeguards, documentation, and the next action a department should take.</a:t>
             </a:r>
             <a:endParaRPr lang="en-US" sz="1320" dirty="0"/>
           </a:p>
@@ -16382,11 +17030,11 @@
         <p:spPr>
           <a:xfrm>
             <a:off x="7635240" y="1325880"/>
-            <a:ext cx="3474720" cy="1325880"/>
+            <a:ext cx="3474720" cy="1207008"/>
           </a:xfrm>
           <a:prstGeom prst="roundRect">
             <a:avLst>
-              <a:gd name="adj" fmla="val 8276"/>
+              <a:gd name="adj" fmla="val 9091"/>
             </a:avLst>
           </a:prstGeom>
           <a:solidFill>
@@ -16448,7 +17096,7 @@
         <p:spPr>
           <a:xfrm>
             <a:off x="7799832" y="1801368"/>
-            <a:ext cx="3145536" cy="758952"/>
+            <a:ext cx="3145536" cy="640080"/>
           </a:xfrm>
           <a:prstGeom prst="rect">
             <a:avLst/>
@@ -16488,12 +17136,12 @@
         </p:nvSpPr>
         <p:spPr>
           <a:xfrm>
-            <a:off x="7635240" y="2788920"/>
-            <a:ext cx="3474720" cy="1536192"/>
+            <a:off x="7635240" y="2670048"/>
+            <a:ext cx="3474720" cy="1377086"/>
           </a:xfrm>
           <a:prstGeom prst="roundRect">
             <a:avLst>
-              <a:gd name="adj" fmla="val 7143"/>
+              <a:gd name="adj" fmla="val 7968"/>
             </a:avLst>
           </a:prstGeom>
           <a:solidFill>
@@ -16515,7 +17163,7 @@
         </p:nvSpPr>
         <p:spPr>
           <a:xfrm>
-            <a:off x="7799832" y="2935224"/>
+            <a:off x="7799832" y="2816352"/>
             <a:ext cx="3145536" cy="256032"/>
           </a:xfrm>
           <a:prstGeom prst="rect">
@@ -16554,8 +17202,8 @@
         </p:nvSpPr>
         <p:spPr>
           <a:xfrm>
-            <a:off x="7818120" y="3300984"/>
-            <a:ext cx="3090672" cy="877824"/>
+            <a:off x="7818120" y="3182112"/>
+            <a:ext cx="3090672" cy="718718"/>
           </a:xfrm>
           <a:prstGeom prst="rect">
             <a:avLst/>
@@ -16629,12 +17277,12 @@
         </p:nvSpPr>
         <p:spPr>
           <a:xfrm>
-            <a:off x="7635240" y="4498848"/>
-            <a:ext cx="3474720" cy="1143000"/>
+            <a:off x="7635240" y="4184294"/>
+            <a:ext cx="3474720" cy="1466698"/>
           </a:xfrm>
           <a:prstGeom prst="roundRect">
             <a:avLst>
-              <a:gd name="adj" fmla="val 9600"/>
+              <a:gd name="adj" fmla="val 7481"/>
             </a:avLst>
           </a:prstGeom>
           <a:solidFill>
@@ -16656,7 +17304,7 @@
         </p:nvSpPr>
         <p:spPr>
           <a:xfrm>
-            <a:off x="7799832" y="4645152"/>
+            <a:off x="7799832" y="4330598"/>
             <a:ext cx="3145536" cy="256032"/>
           </a:xfrm>
           <a:prstGeom prst="rect">
@@ -16695,8 +17343,8 @@
         </p:nvSpPr>
         <p:spPr>
           <a:xfrm>
-            <a:off x="7799832" y="4974336"/>
-            <a:ext cx="3145536" cy="576072"/>
+            <a:off x="7799832" y="4659782"/>
+            <a:ext cx="3145536" cy="899770"/>
           </a:xfrm>
           <a:prstGeom prst="rect">
             <a:avLst/>
@@ -16722,7 +17370,7 @@
                 <a:ea typeface="Aptos" pitchFamily="34" charset="-122"/>
                 <a:cs typeface="Aptos" pitchFamily="34" charset="-120"/>
               </a:rPr>
-              <a:t>Connect the concept to public health purpose, responsible use, required safeguards, documentation, and the next action a.</a:t>
+              <a:t>Connect the concept to public health purpose, responsible use, required safeguards, documentation, and the next action a department should take.</a:t>
             </a:r>
             <a:endParaRPr lang="en-US" sz="1320" dirty="0"/>
           </a:p>
@@ -17091,11 +17739,11 @@
         <p:spPr>
           <a:xfrm>
             <a:off x="7635240" y="1325880"/>
-            <a:ext cx="3474720" cy="1325880"/>
+            <a:ext cx="3474720" cy="1255471"/>
           </a:xfrm>
           <a:prstGeom prst="roundRect">
             <a:avLst>
-              <a:gd name="adj" fmla="val 8276"/>
+              <a:gd name="adj" fmla="val 8740"/>
             </a:avLst>
           </a:prstGeom>
           <a:solidFill>
@@ -17157,7 +17805,7 @@
         <p:spPr>
           <a:xfrm>
             <a:off x="7799832" y="1801368"/>
-            <a:ext cx="3145536" cy="758952"/>
+            <a:ext cx="3145536" cy="688543"/>
           </a:xfrm>
           <a:prstGeom prst="rect">
             <a:avLst/>
@@ -17197,12 +17845,12 @@
         </p:nvSpPr>
         <p:spPr>
           <a:xfrm>
-            <a:off x="7635240" y="2788920"/>
-            <a:ext cx="3474720" cy="1536192"/>
+            <a:off x="7635240" y="2718511"/>
+            <a:ext cx="3474720" cy="1328623"/>
           </a:xfrm>
           <a:prstGeom prst="roundRect">
             <a:avLst>
-              <a:gd name="adj" fmla="val 7143"/>
+              <a:gd name="adj" fmla="val 8259"/>
             </a:avLst>
           </a:prstGeom>
           <a:solidFill>
@@ -17224,7 +17872,7 @@
         </p:nvSpPr>
         <p:spPr>
           <a:xfrm>
-            <a:off x="7799832" y="2935224"/>
+            <a:off x="7799832" y="2864815"/>
             <a:ext cx="3145536" cy="256032"/>
           </a:xfrm>
           <a:prstGeom prst="rect">
@@ -17263,8 +17911,8 @@
         </p:nvSpPr>
         <p:spPr>
           <a:xfrm>
-            <a:off x="7818120" y="3300984"/>
-            <a:ext cx="3090672" cy="877824"/>
+            <a:off x="7818120" y="3230575"/>
+            <a:ext cx="3090672" cy="670255"/>
           </a:xfrm>
           <a:prstGeom prst="rect">
             <a:avLst/>
@@ -17338,12 +17986,12 @@
         </p:nvSpPr>
         <p:spPr>
           <a:xfrm>
-            <a:off x="7635240" y="4498848"/>
-            <a:ext cx="3474720" cy="1143000"/>
+            <a:off x="7635240" y="4184294"/>
+            <a:ext cx="3474720" cy="1466698"/>
           </a:xfrm>
           <a:prstGeom prst="roundRect">
             <a:avLst>
-              <a:gd name="adj" fmla="val 9600"/>
+              <a:gd name="adj" fmla="val 7481"/>
             </a:avLst>
           </a:prstGeom>
           <a:solidFill>
@@ -17365,7 +18013,7 @@
         </p:nvSpPr>
         <p:spPr>
           <a:xfrm>
-            <a:off x="7799832" y="4645152"/>
+            <a:off x="7799832" y="4330598"/>
             <a:ext cx="3145536" cy="256032"/>
           </a:xfrm>
           <a:prstGeom prst="rect">
@@ -17404,8 +18052,8 @@
         </p:nvSpPr>
         <p:spPr>
           <a:xfrm>
-            <a:off x="7799832" y="4974336"/>
-            <a:ext cx="3145536" cy="576072"/>
+            <a:off x="7799832" y="4659782"/>
+            <a:ext cx="3145536" cy="899770"/>
           </a:xfrm>
           <a:prstGeom prst="rect">
             <a:avLst/>
@@ -17431,7 +18079,7 @@
                 <a:ea typeface="Aptos" pitchFamily="34" charset="-122"/>
                 <a:cs typeface="Aptos" pitchFamily="34" charset="-120"/>
               </a:rPr>
-              <a:t>Connect the concept to public health purpose, responsible use, required safeguards, documentation, and the next action a.</a:t>
+              <a:t>Connect the concept to public health purpose, responsible use, required safeguards, documentation, and the next action a department should take.</a:t>
             </a:r>
             <a:endParaRPr lang="en-US" sz="1320" dirty="0"/>
           </a:p>

--- a/downloads/presentations/modules/anl-240.pptx
+++ b/downloads/presentations/modules/anl-240.pptx
@@ -3343,8 +3343,8 @@
         </p:nvSpPr>
         <p:spPr>
           <a:xfrm>
-            <a:off x="868680" y="1508760"/>
-            <a:ext cx="6309360" cy="4160520"/>
+            <a:off x="822960" y="1463040"/>
+            <a:ext cx="6565392" cy="4343400"/>
           </a:xfrm>
           <a:prstGeom prst="rect">
             <a:avLst/>
@@ -3362,7 +3362,7 @@
               <a:buNone/>
             </a:pPr>
             <a:r>
-              <a:rPr lang="en-US" sz="2100" dirty="0">
+              <a:rPr lang="en-US" sz="1920" dirty="0">
                 <a:solidFill>
                   <a:srgbClr val="003A63"/>
                 </a:solidFill>
@@ -3372,14 +3372,14 @@
               </a:rPr>
               <a:t>• Baseline selection is one of the most important technical decisions.</a:t>
             </a:r>
-            <a:endParaRPr lang="en-US" sz="2100" dirty="0"/>
-          </a:p>
-          <a:p>
-            <a:pPr indent="0" marL="0">
-              <a:buNone/>
-            </a:pPr>
-            <a:r>
-              <a:rPr lang="en-US" sz="2100" dirty="0">
+            <a:endParaRPr lang="en-US" sz="1920" dirty="0"/>
+          </a:p>
+          <a:p>
+            <a:pPr indent="0" marL="0">
+              <a:buNone/>
+            </a:pPr>
+            <a:r>
+              <a:rPr lang="en-US" sz="1920" dirty="0">
                 <a:solidFill>
                   <a:srgbClr val="003A63"/>
                 </a:solidFill>
@@ -3387,16 +3387,16 @@
                 <a:ea typeface="Aptos" pitchFamily="34" charset="-122"/>
                 <a:cs typeface="Aptos" pitchFamily="34" charset="-120"/>
               </a:rPr>
-              <a:t>• A baseline may use several prior weeks, several prior years, a regression model, seasonal.</a:t>
-            </a:r>
-            <a:endParaRPr lang="en-US" sz="2100" dirty="0"/>
-          </a:p>
-          <a:p>
-            <a:pPr indent="0" marL="0">
-              <a:buNone/>
-            </a:pPr>
-            <a:r>
-              <a:rPr lang="en-US" sz="2100" dirty="0">
+              <a:t>• A baseline may use several prior weeks, several prior years, a regression.</a:t>
+            </a:r>
+            <a:endParaRPr lang="en-US" sz="1920" dirty="0"/>
+          </a:p>
+          <a:p>
+            <a:pPr indent="0" marL="0">
+              <a:buNone/>
+            </a:pPr>
+            <a:r>
+              <a:rPr lang="en-US" sz="1920" dirty="0">
                 <a:solidFill>
                   <a:srgbClr val="003A63"/>
                 </a:solidFill>
@@ -3406,7 +3406,7 @@
               </a:rPr>
               <a:t>• The baseline should match the public health question.</a:t>
             </a:r>
-            <a:endParaRPr lang="en-US" sz="2100" dirty="0"/>
+            <a:endParaRPr lang="en-US" sz="1920" dirty="0"/>
           </a:p>
         </p:txBody>
       </p:sp>
@@ -3418,12 +3418,12 @@
         </p:nvSpPr>
         <p:spPr>
           <a:xfrm>
-            <a:off x="7635240" y="1325880"/>
-            <a:ext cx="3474720" cy="1207008"/>
+            <a:off x="7543800" y="1325880"/>
+            <a:ext cx="3611880" cy="1261872"/>
           </a:xfrm>
           <a:prstGeom prst="roundRect">
             <a:avLst>
-              <a:gd name="adj" fmla="val 9091"/>
+              <a:gd name="adj" fmla="val 8696"/>
             </a:avLst>
           </a:prstGeom>
           <a:solidFill>
@@ -3445,8 +3445,8 @@
         </p:nvSpPr>
         <p:spPr>
           <a:xfrm>
-            <a:off x="7799832" y="1472184"/>
-            <a:ext cx="3145536" cy="256032"/>
+            <a:off x="7708392" y="1453896"/>
+            <a:ext cx="3282696" cy="228600"/>
           </a:xfrm>
           <a:prstGeom prst="rect">
             <a:avLst/>
@@ -3462,7 +3462,7 @@
               <a:buNone/>
             </a:pPr>
             <a:r>
-              <a:rPr lang="en-US" sz="1300" b="1" dirty="0">
+              <a:rPr lang="en-US" sz="1220" b="1" dirty="0">
                 <a:solidFill>
                   <a:srgbClr val="0068B7"/>
                 </a:solidFill>
@@ -3472,7 +3472,7 @@
               </a:rPr>
               <a:t>Core concept</a:t>
             </a:r>
-            <a:endParaRPr lang="en-US" sz="1300" dirty="0"/>
+            <a:endParaRPr lang="en-US" sz="1220" dirty="0"/>
           </a:p>
         </p:txBody>
       </p:sp>
@@ -3484,8 +3484,8 @@
         </p:nvSpPr>
         <p:spPr>
           <a:xfrm>
-            <a:off x="7799832" y="1801368"/>
-            <a:ext cx="3145536" cy="640080"/>
+            <a:off x="7708392" y="1764792"/>
+            <a:ext cx="3282696" cy="749808"/>
           </a:xfrm>
           <a:prstGeom prst="rect">
             <a:avLst/>
@@ -3503,7 +3503,7 @@
               <a:buNone/>
             </a:pPr>
             <a:r>
-              <a:rPr lang="en-US" sz="1320" dirty="0">
+              <a:rPr lang="en-US" sz="1220" dirty="0">
                 <a:solidFill>
                   <a:srgbClr val="17364A"/>
                 </a:solidFill>
@@ -3513,7 +3513,7 @@
               </a:rPr>
               <a:t>Baseline selection is one of the most important technical decisions.</a:t>
             </a:r>
-            <a:endParaRPr lang="en-US" sz="1320" dirty="0"/>
+            <a:endParaRPr lang="en-US" sz="1220" dirty="0"/>
           </a:p>
         </p:txBody>
       </p:sp>
@@ -3525,12 +3525,12 @@
         </p:nvSpPr>
         <p:spPr>
           <a:xfrm>
-            <a:off x="7635240" y="2670048"/>
-            <a:ext cx="3474720" cy="1377086"/>
+            <a:off x="7543800" y="2724912"/>
+            <a:ext cx="3611880" cy="1527048"/>
           </a:xfrm>
           <a:prstGeom prst="roundRect">
             <a:avLst>
-              <a:gd name="adj" fmla="val 7968"/>
+              <a:gd name="adj" fmla="val 7186"/>
             </a:avLst>
           </a:prstGeom>
           <a:solidFill>
@@ -3552,8 +3552,8 @@
         </p:nvSpPr>
         <p:spPr>
           <a:xfrm>
-            <a:off x="7799832" y="2816352"/>
-            <a:ext cx="3145536" cy="256032"/>
+            <a:off x="7708392" y="2852928"/>
+            <a:ext cx="3282696" cy="228600"/>
           </a:xfrm>
           <a:prstGeom prst="rect">
             <a:avLst/>
@@ -3569,7 +3569,7 @@
               <a:buNone/>
             </a:pPr>
             <a:r>
-              <a:rPr lang="en-US" sz="1300" b="1" dirty="0">
+              <a:rPr lang="en-US" sz="1220" b="1" dirty="0">
                 <a:solidFill>
                   <a:srgbClr val="0068B7"/>
                 </a:solidFill>
@@ -3579,7 +3579,7 @@
               </a:rPr>
               <a:t>Concept checkpoints</a:t>
             </a:r>
-            <a:endParaRPr lang="en-US" sz="1300" dirty="0"/>
+            <a:endParaRPr lang="en-US" sz="1220" dirty="0"/>
           </a:p>
         </p:txBody>
       </p:sp>
@@ -3591,8 +3591,8 @@
         </p:nvSpPr>
         <p:spPr>
           <a:xfrm>
-            <a:off x="7818120" y="3182112"/>
-            <a:ext cx="3090672" cy="718718"/>
+            <a:off x="7726680" y="3182112"/>
+            <a:ext cx="3227832" cy="960120"/>
           </a:xfrm>
           <a:prstGeom prst="rect">
             <a:avLst/>
@@ -3610,7 +3610,7 @@
               <a:buNone/>
             </a:pPr>
             <a:r>
-              <a:rPr lang="en-US" sz="1220" dirty="0">
+              <a:rPr lang="en-US" sz="1140" dirty="0">
                 <a:solidFill>
                   <a:srgbClr val="17364A"/>
                 </a:solidFill>
@@ -3618,16 +3618,16 @@
                 <a:ea typeface="Aptos" pitchFamily="34" charset="-122"/>
                 <a:cs typeface="Aptos" pitchFamily="34" charset="-120"/>
               </a:rPr>
-              <a:t>A baseline may use several prior weeks, several prior years, a.</a:t>
-            </a:r>
-            <a:endParaRPr lang="en-US" sz="1220" dirty="0"/>
-          </a:p>
-          <a:p>
-            <a:pPr indent="0" marL="0">
-              <a:buNone/>
-            </a:pPr>
-            <a:r>
-              <a:rPr lang="en-US" sz="1220" dirty="0">
+              <a:t>A baseline may use several prior weeks, several.</a:t>
+            </a:r>
+            <a:endParaRPr lang="en-US" sz="1140" dirty="0"/>
+          </a:p>
+          <a:p>
+            <a:pPr indent="0" marL="0">
+              <a:buNone/>
+            </a:pPr>
+            <a:r>
+              <a:rPr lang="en-US" sz="1140" dirty="0">
                 <a:solidFill>
                   <a:srgbClr val="17364A"/>
                 </a:solidFill>
@@ -3635,16 +3635,16 @@
                 <a:ea typeface="Aptos" pitchFamily="34" charset="-122"/>
                 <a:cs typeface="Aptos" pitchFamily="34" charset="-120"/>
               </a:rPr>
-              <a:t>A short baseline may adapt quickly but miss seasonal context.</a:t>
-            </a:r>
-            <a:endParaRPr lang="en-US" sz="1220" dirty="0"/>
-          </a:p>
-          <a:p>
-            <a:pPr indent="0" marL="0">
-              <a:buNone/>
-            </a:pPr>
-            <a:r>
-              <a:rPr lang="en-US" sz="1220" dirty="0">
+              <a:t>A short baseline may adapt quickly but miss.</a:t>
+            </a:r>
+            <a:endParaRPr lang="en-US" sz="1140" dirty="0"/>
+          </a:p>
+          <a:p>
+            <a:pPr indent="0" marL="0">
+              <a:buNone/>
+            </a:pPr>
+            <a:r>
+              <a:rPr lang="en-US" sz="1140" dirty="0">
                 <a:solidFill>
                   <a:srgbClr val="17364A"/>
                 </a:solidFill>
@@ -3652,9 +3652,9 @@
                 <a:ea typeface="Aptos" pitchFamily="34" charset="-122"/>
                 <a:cs typeface="Aptos" pitchFamily="34" charset="-120"/>
               </a:rPr>
-              <a:t>A long baseline may capture seasonality but fail when underlying.</a:t>
-            </a:r>
-            <a:endParaRPr lang="en-US" sz="1220" dirty="0"/>
+              <a:t>A long baseline may capture seasonality but fail.</a:t>
+            </a:r>
+            <a:endParaRPr lang="en-US" sz="1140" dirty="0"/>
           </a:p>
         </p:txBody>
       </p:sp>
@@ -3666,12 +3666,12 @@
         </p:nvSpPr>
         <p:spPr>
           <a:xfrm>
-            <a:off x="7635240" y="4184294"/>
-            <a:ext cx="3474720" cy="1466698"/>
+            <a:off x="7543800" y="4389120"/>
+            <a:ext cx="3611880" cy="1261872"/>
           </a:xfrm>
           <a:prstGeom prst="roundRect">
             <a:avLst>
-              <a:gd name="adj" fmla="val 7481"/>
+              <a:gd name="adj" fmla="val 8696"/>
             </a:avLst>
           </a:prstGeom>
           <a:solidFill>
@@ -3693,8 +3693,8 @@
         </p:nvSpPr>
         <p:spPr>
           <a:xfrm>
-            <a:off x="7799832" y="4330598"/>
-            <a:ext cx="3145536" cy="256032"/>
+            <a:off x="7708392" y="4517136"/>
+            <a:ext cx="3282696" cy="228600"/>
           </a:xfrm>
           <a:prstGeom prst="rect">
             <a:avLst/>
@@ -3710,7 +3710,7 @@
               <a:buNone/>
             </a:pPr>
             <a:r>
-              <a:rPr lang="en-US" sz="1300" b="1" dirty="0">
+              <a:rPr lang="en-US" sz="1220" b="1" dirty="0">
                 <a:solidFill>
                   <a:srgbClr val="0068B7"/>
                 </a:solidFill>
@@ -3720,7 +3720,7 @@
               </a:rPr>
               <a:t>Apply it</a:t>
             </a:r>
-            <a:endParaRPr lang="en-US" sz="1300" dirty="0"/>
+            <a:endParaRPr lang="en-US" sz="1220" dirty="0"/>
           </a:p>
         </p:txBody>
       </p:sp>
@@ -3732,8 +3732,8 @@
         </p:nvSpPr>
         <p:spPr>
           <a:xfrm>
-            <a:off x="7799832" y="4659782"/>
-            <a:ext cx="3145536" cy="899770"/>
+            <a:off x="7708392" y="4828032"/>
+            <a:ext cx="3282696" cy="749808"/>
           </a:xfrm>
           <a:prstGeom prst="rect">
             <a:avLst/>
@@ -3751,7 +3751,7 @@
               <a:buNone/>
             </a:pPr>
             <a:r>
-              <a:rPr lang="en-US" sz="1320" dirty="0">
+              <a:rPr lang="en-US" sz="1220" dirty="0">
                 <a:solidFill>
                   <a:srgbClr val="17364A"/>
                 </a:solidFill>
@@ -3759,9 +3759,9 @@
                 <a:ea typeface="Aptos" pitchFamily="34" charset="-122"/>
                 <a:cs typeface="Aptos" pitchFamily="34" charset="-120"/>
               </a:rPr>
-              <a:t>Connect the concept to public health purpose, responsible use, required safeguards, documentation, and the next action a department should take.</a:t>
-            </a:r>
-            <a:endParaRPr lang="en-US" sz="1320" dirty="0"/>
+              <a:t>Connect the concept to public health purpose, responsible use, required.</a:t>
+            </a:r>
+            <a:endParaRPr lang="en-US" sz="1220" dirty="0"/>
           </a:p>
         </p:txBody>
       </p:sp>
@@ -4052,8 +4052,8 @@
         </p:nvSpPr>
         <p:spPr>
           <a:xfrm>
-            <a:off x="868680" y="1508760"/>
-            <a:ext cx="6309360" cy="4160520"/>
+            <a:off x="822960" y="1463040"/>
+            <a:ext cx="6565392" cy="4343400"/>
           </a:xfrm>
           <a:prstGeom prst="rect">
             <a:avLst/>
@@ -4071,7 +4071,7 @@
               <a:buNone/>
             </a:pPr>
             <a:r>
-              <a:rPr lang="en-US" sz="2100" dirty="0">
+              <a:rPr lang="en-US" sz="1920" dirty="0">
                 <a:solidFill>
                   <a:srgbClr val="003A63"/>
                 </a:solidFill>
@@ -4081,14 +4081,14 @@
               </a:rPr>
               <a:t>• Anomaly detection methods vary in complexity.</a:t>
             </a:r>
-            <a:endParaRPr lang="en-US" sz="2100" dirty="0"/>
-          </a:p>
-          <a:p>
-            <a:pPr indent="0" marL="0">
-              <a:buNone/>
-            </a:pPr>
-            <a:r>
-              <a:rPr lang="en-US" sz="2100" dirty="0">
+            <a:endParaRPr lang="en-US" sz="1920" dirty="0"/>
+          </a:p>
+          <a:p>
+            <a:pPr indent="0" marL="0">
+              <a:buNone/>
+            </a:pPr>
+            <a:r>
+              <a:rPr lang="en-US" sz="1920" dirty="0">
                 <a:solidFill>
                   <a:srgbClr val="003A63"/>
                 </a:solidFill>
@@ -4098,14 +4098,14 @@
               </a:rPr>
               <a:t>• Simple methods may compare counts to moving averages or standard deviations.</a:t>
             </a:r>
-            <a:endParaRPr lang="en-US" sz="2100" dirty="0"/>
-          </a:p>
-          <a:p>
-            <a:pPr indent="0" marL="0">
-              <a:buNone/>
-            </a:pPr>
-            <a:r>
-              <a:rPr lang="en-US" sz="2100" dirty="0">
+            <a:endParaRPr lang="en-US" sz="1920" dirty="0"/>
+          </a:p>
+          <a:p>
+            <a:pPr indent="0" marL="0">
+              <a:buNone/>
+            </a:pPr>
+            <a:r>
+              <a:rPr lang="en-US" sz="1920" dirty="0">
                 <a:solidFill>
                   <a:srgbClr val="003A63"/>
                 </a:solidFill>
@@ -4113,9 +4113,9 @@
                 <a:ea typeface="Aptos" pitchFamily="34" charset="-122"/>
                 <a:cs typeface="Aptos" pitchFamily="34" charset="-120"/>
               </a:rPr>
-              <a:t>• More advanced methods may use regression, Bayesian approaches, control charts, machine.</a:t>
-            </a:r>
-            <a:endParaRPr lang="en-US" sz="2100" dirty="0"/>
+              <a:t>• More advanced methods may use regression, Bayesian approaches, control.</a:t>
+            </a:r>
+            <a:endParaRPr lang="en-US" sz="1920" dirty="0"/>
           </a:p>
         </p:txBody>
       </p:sp>
@@ -4127,12 +4127,12 @@
         </p:nvSpPr>
         <p:spPr>
           <a:xfrm>
-            <a:off x="7635240" y="1325880"/>
-            <a:ext cx="3474720" cy="1207008"/>
+            <a:off x="7543800" y="1325880"/>
+            <a:ext cx="3611880" cy="1261872"/>
           </a:xfrm>
           <a:prstGeom prst="roundRect">
             <a:avLst>
-              <a:gd name="adj" fmla="val 9091"/>
+              <a:gd name="adj" fmla="val 8696"/>
             </a:avLst>
           </a:prstGeom>
           <a:solidFill>
@@ -4154,8 +4154,8 @@
         </p:nvSpPr>
         <p:spPr>
           <a:xfrm>
-            <a:off x="7799832" y="1472184"/>
-            <a:ext cx="3145536" cy="256032"/>
+            <a:off x="7708392" y="1453896"/>
+            <a:ext cx="3282696" cy="228600"/>
           </a:xfrm>
           <a:prstGeom prst="rect">
             <a:avLst/>
@@ -4171,7 +4171,7 @@
               <a:buNone/>
             </a:pPr>
             <a:r>
-              <a:rPr lang="en-US" sz="1300" b="1" dirty="0">
+              <a:rPr lang="en-US" sz="1220" b="1" dirty="0">
                 <a:solidFill>
                   <a:srgbClr val="0068B7"/>
                 </a:solidFill>
@@ -4181,7 +4181,7 @@
               </a:rPr>
               <a:t>Core concept</a:t>
             </a:r>
-            <a:endParaRPr lang="en-US" sz="1300" dirty="0"/>
+            <a:endParaRPr lang="en-US" sz="1220" dirty="0"/>
           </a:p>
         </p:txBody>
       </p:sp>
@@ -4193,8 +4193,8 @@
         </p:nvSpPr>
         <p:spPr>
           <a:xfrm>
-            <a:off x="7799832" y="1801368"/>
-            <a:ext cx="3145536" cy="640080"/>
+            <a:off x="7708392" y="1764792"/>
+            <a:ext cx="3282696" cy="749808"/>
           </a:xfrm>
           <a:prstGeom prst="rect">
             <a:avLst/>
@@ -4212,7 +4212,7 @@
               <a:buNone/>
             </a:pPr>
             <a:r>
-              <a:rPr lang="en-US" sz="1320" dirty="0">
+              <a:rPr lang="en-US" sz="1220" dirty="0">
                 <a:solidFill>
                   <a:srgbClr val="17364A"/>
                 </a:solidFill>
@@ -4222,7 +4222,7 @@
               </a:rPr>
               <a:t>Anomaly detection methods vary in complexity.</a:t>
             </a:r>
-            <a:endParaRPr lang="en-US" sz="1320" dirty="0"/>
+            <a:endParaRPr lang="en-US" sz="1220" dirty="0"/>
           </a:p>
         </p:txBody>
       </p:sp>
@@ -4234,12 +4234,12 @@
         </p:nvSpPr>
         <p:spPr>
           <a:xfrm>
-            <a:off x="7635240" y="2670048"/>
-            <a:ext cx="3474720" cy="1377086"/>
+            <a:off x="7543800" y="2724912"/>
+            <a:ext cx="3611880" cy="1527048"/>
           </a:xfrm>
           <a:prstGeom prst="roundRect">
             <a:avLst>
-              <a:gd name="adj" fmla="val 7968"/>
+              <a:gd name="adj" fmla="val 7186"/>
             </a:avLst>
           </a:prstGeom>
           <a:solidFill>
@@ -4261,8 +4261,8 @@
         </p:nvSpPr>
         <p:spPr>
           <a:xfrm>
-            <a:off x="7799832" y="2816352"/>
-            <a:ext cx="3145536" cy="256032"/>
+            <a:off x="7708392" y="2852928"/>
+            <a:ext cx="3282696" cy="228600"/>
           </a:xfrm>
           <a:prstGeom prst="rect">
             <a:avLst/>
@@ -4278,7 +4278,7 @@
               <a:buNone/>
             </a:pPr>
             <a:r>
-              <a:rPr lang="en-US" sz="1300" b="1" dirty="0">
+              <a:rPr lang="en-US" sz="1220" b="1" dirty="0">
                 <a:solidFill>
                   <a:srgbClr val="0068B7"/>
                 </a:solidFill>
@@ -4288,7 +4288,7 @@
               </a:rPr>
               <a:t>Concept checkpoints</a:t>
             </a:r>
-            <a:endParaRPr lang="en-US" sz="1300" dirty="0"/>
+            <a:endParaRPr lang="en-US" sz="1220" dirty="0"/>
           </a:p>
         </p:txBody>
       </p:sp>
@@ -4300,8 +4300,8 @@
         </p:nvSpPr>
         <p:spPr>
           <a:xfrm>
-            <a:off x="7818120" y="3182112"/>
-            <a:ext cx="3090672" cy="718718"/>
+            <a:off x="7726680" y="3182112"/>
+            <a:ext cx="3227832" cy="960120"/>
           </a:xfrm>
           <a:prstGeom prst="rect">
             <a:avLst/>
@@ -4319,7 +4319,7 @@
               <a:buNone/>
             </a:pPr>
             <a:r>
-              <a:rPr lang="en-US" sz="1220" dirty="0">
+              <a:rPr lang="en-US" sz="1140" dirty="0">
                 <a:solidFill>
                   <a:srgbClr val="17364A"/>
                 </a:solidFill>
@@ -4327,16 +4327,16 @@
                 <a:ea typeface="Aptos" pitchFamily="34" charset="-122"/>
                 <a:cs typeface="Aptos" pitchFamily="34" charset="-120"/>
               </a:rPr>
-              <a:t>More advanced methods may use regression, Bayesian approaches,.</a:t>
-            </a:r>
-            <a:endParaRPr lang="en-US" sz="1220" dirty="0"/>
-          </a:p>
-          <a:p>
-            <a:pPr indent="0" marL="0">
-              <a:buNone/>
-            </a:pPr>
-            <a:r>
-              <a:rPr lang="en-US" sz="1220" dirty="0">
+              <a:t>More advanced methods may use regression, Bayesian.</a:t>
+            </a:r>
+            <a:endParaRPr lang="en-US" sz="1140" dirty="0"/>
+          </a:p>
+          <a:p>
+            <a:pPr indent="0" marL="0">
+              <a:buNone/>
+            </a:pPr>
+            <a:r>
+              <a:rPr lang="en-US" sz="1140" dirty="0">
                 <a:solidFill>
                   <a:srgbClr val="17364A"/>
                 </a:solidFill>
@@ -4346,14 +4346,14 @@
               </a:rPr>
               <a:t>More complex methods are not automatically better.</a:t>
             </a:r>
-            <a:endParaRPr lang="en-US" sz="1220" dirty="0"/>
-          </a:p>
-          <a:p>
-            <a:pPr indent="0" marL="0">
-              <a:buNone/>
-            </a:pPr>
-            <a:r>
-              <a:rPr lang="en-US" sz="1220" dirty="0">
+            <a:endParaRPr lang="en-US" sz="1140" dirty="0"/>
+          </a:p>
+          <a:p>
+            <a:pPr indent="0" marL="0">
+              <a:buNone/>
+            </a:pPr>
+            <a:r>
+              <a:rPr lang="en-US" sz="1140" dirty="0">
                 <a:solidFill>
                   <a:srgbClr val="17364A"/>
                 </a:solidFill>
@@ -4361,9 +4361,9 @@
                 <a:ea typeface="Aptos" pitchFamily="34" charset="-122"/>
                 <a:cs typeface="Aptos" pitchFamily="34" charset="-120"/>
               </a:rPr>
-              <a:t>In public health practice, interpretability, stability,.</a:t>
-            </a:r>
-            <a:endParaRPr lang="en-US" sz="1220" dirty="0"/>
+              <a:t>In public health practice, interpretability,.</a:t>
+            </a:r>
+            <a:endParaRPr lang="en-US" sz="1140" dirty="0"/>
           </a:p>
         </p:txBody>
       </p:sp>
@@ -4375,12 +4375,12 @@
         </p:nvSpPr>
         <p:spPr>
           <a:xfrm>
-            <a:off x="7635240" y="4184294"/>
-            <a:ext cx="3474720" cy="1466698"/>
+            <a:off x="7543800" y="4389120"/>
+            <a:ext cx="3611880" cy="1261872"/>
           </a:xfrm>
           <a:prstGeom prst="roundRect">
             <a:avLst>
-              <a:gd name="adj" fmla="val 7481"/>
+              <a:gd name="adj" fmla="val 8696"/>
             </a:avLst>
           </a:prstGeom>
           <a:solidFill>
@@ -4402,8 +4402,8 @@
         </p:nvSpPr>
         <p:spPr>
           <a:xfrm>
-            <a:off x="7799832" y="4330598"/>
-            <a:ext cx="3145536" cy="256032"/>
+            <a:off x="7708392" y="4517136"/>
+            <a:ext cx="3282696" cy="228600"/>
           </a:xfrm>
           <a:prstGeom prst="rect">
             <a:avLst/>
@@ -4419,7 +4419,7 @@
               <a:buNone/>
             </a:pPr>
             <a:r>
-              <a:rPr lang="en-US" sz="1300" b="1" dirty="0">
+              <a:rPr lang="en-US" sz="1220" b="1" dirty="0">
                 <a:solidFill>
                   <a:srgbClr val="0068B7"/>
                 </a:solidFill>
@@ -4429,7 +4429,7 @@
               </a:rPr>
               <a:t>Apply it</a:t>
             </a:r>
-            <a:endParaRPr lang="en-US" sz="1300" dirty="0"/>
+            <a:endParaRPr lang="en-US" sz="1220" dirty="0"/>
           </a:p>
         </p:txBody>
       </p:sp>
@@ -4441,8 +4441,8 @@
         </p:nvSpPr>
         <p:spPr>
           <a:xfrm>
-            <a:off x="7799832" y="4659782"/>
-            <a:ext cx="3145536" cy="899770"/>
+            <a:off x="7708392" y="4828032"/>
+            <a:ext cx="3282696" cy="749808"/>
           </a:xfrm>
           <a:prstGeom prst="rect">
             <a:avLst/>
@@ -4460,7 +4460,7 @@
               <a:buNone/>
             </a:pPr>
             <a:r>
-              <a:rPr lang="en-US" sz="1320" dirty="0">
+              <a:rPr lang="en-US" sz="1220" dirty="0">
                 <a:solidFill>
                   <a:srgbClr val="17364A"/>
                 </a:solidFill>
@@ -4468,9 +4468,9 @@
                 <a:ea typeface="Aptos" pitchFamily="34" charset="-122"/>
                 <a:cs typeface="Aptos" pitchFamily="34" charset="-120"/>
               </a:rPr>
-              <a:t>Connect the concept to public health purpose, responsible use, required safeguards, documentation, and the next action a department should take.</a:t>
-            </a:r>
-            <a:endParaRPr lang="en-US" sz="1320" dirty="0"/>
+              <a:t>Connect the concept to public health purpose, responsible use, required.</a:t>
+            </a:r>
+            <a:endParaRPr lang="en-US" sz="1220" dirty="0"/>
           </a:p>
         </p:txBody>
       </p:sp>
@@ -4761,8 +4761,8 @@
         </p:nvSpPr>
         <p:spPr>
           <a:xfrm>
-            <a:off x="868680" y="1508760"/>
-            <a:ext cx="6309360" cy="4160520"/>
+            <a:off x="822960" y="1463040"/>
+            <a:ext cx="6565392" cy="4343400"/>
           </a:xfrm>
           <a:prstGeom prst="rect">
             <a:avLst/>
@@ -4780,7 +4780,7 @@
               <a:buNone/>
             </a:pPr>
             <a:r>
-              <a:rPr lang="en-US" sz="2100" dirty="0">
+              <a:rPr lang="en-US" sz="1920" dirty="0">
                 <a:solidFill>
                   <a:srgbClr val="003A63"/>
                 </a:solidFill>
@@ -4790,14 +4790,14 @@
               </a:rPr>
               <a:t>• Reporting artifacts.</a:t>
             </a:r>
-            <a:endParaRPr lang="en-US" sz="2100" dirty="0"/>
-          </a:p>
-          <a:p>
-            <a:pPr indent="0" marL="0">
-              <a:buNone/>
-            </a:pPr>
-            <a:r>
-              <a:rPr lang="en-US" sz="2100" dirty="0">
+            <a:endParaRPr lang="en-US" sz="1920" dirty="0"/>
+          </a:p>
+          <a:p>
+            <a:pPr indent="0" marL="0">
+              <a:buNone/>
+            </a:pPr>
+            <a:r>
+              <a:rPr lang="en-US" sz="1920" dirty="0">
                 <a:solidFill>
                   <a:srgbClr val="003A63"/>
                 </a:solidFill>
@@ -4807,14 +4807,14 @@
               </a:rPr>
               <a:t>• Feed failures, delayed batches, or coding changes can trigger false alerts.</a:t>
             </a:r>
-            <a:endParaRPr lang="en-US" sz="2100" dirty="0"/>
-          </a:p>
-          <a:p>
-            <a:pPr indent="0" marL="0">
-              <a:buNone/>
-            </a:pPr>
-            <a:r>
-              <a:rPr lang="en-US" sz="2100" dirty="0">
+            <a:endParaRPr lang="en-US" sz="1920" dirty="0"/>
+          </a:p>
+          <a:p>
+            <a:pPr indent="0" marL="0">
+              <a:buNone/>
+            </a:pPr>
+            <a:r>
+              <a:rPr lang="en-US" sz="1920" dirty="0">
                 <a:solidFill>
                   <a:srgbClr val="003A63"/>
                 </a:solidFill>
@@ -4822,9 +4822,9 @@
                 <a:ea typeface="Aptos" pitchFamily="34" charset="-122"/>
                 <a:cs typeface="Aptos" pitchFamily="34" charset="-120"/>
               </a:rPr>
-              <a:t>• Guardrails include data quality checks, feed monitoring, and partner change logs.</a:t>
-            </a:r>
-            <a:endParaRPr lang="en-US" sz="2100" dirty="0"/>
+              <a:t>• Guardrails include data quality checks, feed monitoring, and partner change.</a:t>
+            </a:r>
+            <a:endParaRPr lang="en-US" sz="1920" dirty="0"/>
           </a:p>
         </p:txBody>
       </p:sp>
@@ -4836,12 +4836,12 @@
         </p:nvSpPr>
         <p:spPr>
           <a:xfrm>
-            <a:off x="7635240" y="1325880"/>
-            <a:ext cx="3474720" cy="1207008"/>
+            <a:off x="7543800" y="1325880"/>
+            <a:ext cx="3611880" cy="1261872"/>
           </a:xfrm>
           <a:prstGeom prst="roundRect">
             <a:avLst>
-              <a:gd name="adj" fmla="val 9091"/>
+              <a:gd name="adj" fmla="val 8696"/>
             </a:avLst>
           </a:prstGeom>
           <a:solidFill>
@@ -4863,8 +4863,8 @@
         </p:nvSpPr>
         <p:spPr>
           <a:xfrm>
-            <a:off x="7799832" y="1472184"/>
-            <a:ext cx="3145536" cy="256032"/>
+            <a:off x="7708392" y="1453896"/>
+            <a:ext cx="3282696" cy="228600"/>
           </a:xfrm>
           <a:prstGeom prst="rect">
             <a:avLst/>
@@ -4880,7 +4880,7 @@
               <a:buNone/>
             </a:pPr>
             <a:r>
-              <a:rPr lang="en-US" sz="1300" b="1" dirty="0">
+              <a:rPr lang="en-US" sz="1220" b="1" dirty="0">
                 <a:solidFill>
                   <a:srgbClr val="0068B7"/>
                 </a:solidFill>
@@ -4890,7 +4890,7 @@
               </a:rPr>
               <a:t>Risk check</a:t>
             </a:r>
-            <a:endParaRPr lang="en-US" sz="1300" dirty="0"/>
+            <a:endParaRPr lang="en-US" sz="1220" dirty="0"/>
           </a:p>
         </p:txBody>
       </p:sp>
@@ -4902,8 +4902,8 @@
         </p:nvSpPr>
         <p:spPr>
           <a:xfrm>
-            <a:off x="7799832" y="1801368"/>
-            <a:ext cx="3145536" cy="640080"/>
+            <a:off x="7708392" y="1764792"/>
+            <a:ext cx="3282696" cy="749808"/>
           </a:xfrm>
           <a:prstGeom prst="rect">
             <a:avLst/>
@@ -4921,7 +4921,7 @@
               <a:buNone/>
             </a:pPr>
             <a:r>
-              <a:rPr lang="en-US" sz="1320" dirty="0">
+              <a:rPr lang="en-US" sz="1220" dirty="0">
                 <a:solidFill>
                   <a:srgbClr val="17364A"/>
                 </a:solidFill>
@@ -4931,7 +4931,7 @@
               </a:rPr>
               <a:t>Reporting artifacts.</a:t>
             </a:r>
-            <a:endParaRPr lang="en-US" sz="1320" dirty="0"/>
+            <a:endParaRPr lang="en-US" sz="1220" dirty="0"/>
           </a:p>
         </p:txBody>
       </p:sp>
@@ -4943,12 +4943,12 @@
         </p:nvSpPr>
         <p:spPr>
           <a:xfrm>
-            <a:off x="7635240" y="2670048"/>
-            <a:ext cx="3474720" cy="1536192"/>
+            <a:off x="7543800" y="2724912"/>
+            <a:ext cx="3611880" cy="1527048"/>
           </a:xfrm>
           <a:prstGeom prst="roundRect">
             <a:avLst>
-              <a:gd name="adj" fmla="val 7143"/>
+              <a:gd name="adj" fmla="val 7186"/>
             </a:avLst>
           </a:prstGeom>
           <a:solidFill>
@@ -4970,24 +4970,26 @@
         </p:nvSpPr>
         <p:spPr>
           <a:xfrm>
-            <a:off x="7799832" y="2798064"/>
-            <a:ext cx="3145536" cy="237744"/>
-          </a:xfrm>
-          <a:prstGeom prst="rect">
-            <a:avLst/>
-          </a:prstGeom>
-          <a:noFill/>
-          <a:ln/>
-        </p:spPr>
-        <p:txBody>
-          <a:bodyPr wrap="square" lIns="0" tIns="0" rIns="0" bIns="0" rtlCol="0" anchor="ctr"/>
-          <a:lstStyle/>
-          <a:p>
-            <a:pPr indent="0" marL="0">
-              <a:buNone/>
-            </a:pPr>
-            <a:r>
-              <a:rPr lang="en-US" sz="1250" b="1" dirty="0">
+            <a:off x="7708392" y="2852928"/>
+            <a:ext cx="3282696" cy="219456"/>
+          </a:xfrm>
+          <a:prstGeom prst="rect">
+            <a:avLst/>
+          </a:prstGeom>
+          <a:noFill/>
+          <a:ln/>
+        </p:spPr>
+        <p:txBody>
+          <a:bodyPr wrap="square" lIns="0" tIns="0" rIns="0" bIns="0" rtlCol="0" anchor="ctr">
+            <a:normAutofit/>
+          </a:bodyPr>
+          <a:lstStyle/>
+          <a:p>
+            <a:pPr indent="0" marL="0">
+              <a:buNone/>
+            </a:pPr>
+            <a:r>
+              <a:rPr lang="en-US" sz="1160" b="1" dirty="0">
                 <a:solidFill>
                   <a:srgbClr val="0068B7"/>
                 </a:solidFill>
@@ -4997,7 +4999,7 @@
               </a:rPr>
               <a:t>Risk control loop</a:t>
             </a:r>
-            <a:endParaRPr lang="en-US" sz="1250" dirty="0"/>
+            <a:endParaRPr lang="en-US" sz="1160" dirty="0"/>
           </a:p>
         </p:txBody>
       </p:sp>
@@ -5009,7 +5011,7 @@
         </p:nvSpPr>
         <p:spPr>
           <a:xfrm>
-            <a:off x="8763000" y="3351276"/>
+            <a:off x="8717280" y="3406140"/>
             <a:ext cx="164592" cy="0"/>
           </a:xfrm>
           <a:prstGeom prst="line">
@@ -5032,8 +5034,8 @@
         </p:nvSpPr>
         <p:spPr>
           <a:xfrm>
-            <a:off x="7872984" y="3200400"/>
-            <a:ext cx="890016" cy="301752"/>
+            <a:off x="7781544" y="3255264"/>
+            <a:ext cx="935736" cy="301752"/>
           </a:xfrm>
           <a:prstGeom prst="roundRect">
             <a:avLst>
@@ -5059,8 +5061,8 @@
         </p:nvSpPr>
         <p:spPr>
           <a:xfrm>
-            <a:off x="7909560" y="3273552"/>
-            <a:ext cx="816864" cy="146304"/>
+            <a:off x="7818120" y="3328416"/>
+            <a:ext cx="862584" cy="146304"/>
           </a:xfrm>
           <a:prstGeom prst="rect">
             <a:avLst/>
@@ -5100,7 +5102,7 @@
         </p:nvSpPr>
         <p:spPr>
           <a:xfrm>
-            <a:off x="9817608" y="3351276"/>
+            <a:off x="9817608" y="3406140"/>
             <a:ext cx="164592" cy="0"/>
           </a:xfrm>
           <a:prstGeom prst="line">
@@ -5123,8 +5125,8 @@
         </p:nvSpPr>
         <p:spPr>
           <a:xfrm>
-            <a:off x="8927592" y="3200400"/>
-            <a:ext cx="890016" cy="301752"/>
+            <a:off x="8881872" y="3255264"/>
+            <a:ext cx="935736" cy="301752"/>
           </a:xfrm>
           <a:prstGeom prst="roundRect">
             <a:avLst>
@@ -5150,8 +5152,8 @@
         </p:nvSpPr>
         <p:spPr>
           <a:xfrm>
-            <a:off x="8964168" y="3273552"/>
-            <a:ext cx="816864" cy="146304"/>
+            <a:off x="8918448" y="3328416"/>
+            <a:ext cx="862584" cy="146304"/>
           </a:xfrm>
           <a:prstGeom prst="rect">
             <a:avLst/>
@@ -5191,8 +5193,8 @@
         </p:nvSpPr>
         <p:spPr>
           <a:xfrm>
-            <a:off x="9982200" y="3200400"/>
-            <a:ext cx="890016" cy="301752"/>
+            <a:off x="9982200" y="3255264"/>
+            <a:ext cx="935736" cy="301752"/>
           </a:xfrm>
           <a:prstGeom prst="roundRect">
             <a:avLst>
@@ -5218,8 +5220,8 @@
         </p:nvSpPr>
         <p:spPr>
           <a:xfrm>
-            <a:off x="10018776" y="3273552"/>
-            <a:ext cx="816864" cy="146304"/>
+            <a:off x="10018776" y="3328416"/>
+            <a:ext cx="862584" cy="146304"/>
           </a:xfrm>
           <a:prstGeom prst="rect">
             <a:avLst/>
@@ -5259,8 +5261,8 @@
         </p:nvSpPr>
         <p:spPr>
           <a:xfrm>
-            <a:off x="7854696" y="3694176"/>
-            <a:ext cx="3035808" cy="365760"/>
+            <a:off x="7763256" y="3749040"/>
+            <a:ext cx="3172968" cy="356616"/>
           </a:xfrm>
           <a:prstGeom prst="rect">
             <a:avLst/>
@@ -5278,7 +5280,7 @@
               <a:buNone/>
             </a:pPr>
             <a:r>
-              <a:rPr lang="en-US" sz="1120" dirty="0">
+              <a:rPr lang="en-US" sz="1040" dirty="0">
                 <a:solidFill>
                   <a:srgbClr val="17364A"/>
                 </a:solidFill>
@@ -5286,9 +5288,9 @@
                 <a:ea typeface="Aptos" pitchFamily="34" charset="-122"/>
                 <a:cs typeface="Aptos" pitchFamily="34" charset="-120"/>
               </a:rPr>
-              <a:t>Responsible use depends on finding risks early, applying safeguards, and watching for drift or harm over time.</a:t>
-            </a:r>
-            <a:endParaRPr lang="en-US" sz="1120" dirty="0"/>
+              <a:t>Responsible use depends on finding risks early, applying safeguards,.</a:t>
+            </a:r>
+            <a:endParaRPr lang="en-US" sz="1040" dirty="0"/>
           </a:p>
         </p:txBody>
       </p:sp>
@@ -5300,12 +5302,12 @@
         </p:nvSpPr>
         <p:spPr>
           <a:xfrm>
-            <a:off x="7635240" y="4343400"/>
-            <a:ext cx="3474720" cy="1255471"/>
+            <a:off x="7543800" y="4389120"/>
+            <a:ext cx="3611880" cy="1261872"/>
           </a:xfrm>
           <a:prstGeom prst="roundRect">
             <a:avLst>
-              <a:gd name="adj" fmla="val 8740"/>
+              <a:gd name="adj" fmla="val 8696"/>
             </a:avLst>
           </a:prstGeom>
           <a:solidFill>
@@ -5327,8 +5329,8 @@
         </p:nvSpPr>
         <p:spPr>
           <a:xfrm>
-            <a:off x="7799832" y="4489704"/>
-            <a:ext cx="3145536" cy="256032"/>
+            <a:off x="7708392" y="4517136"/>
+            <a:ext cx="3282696" cy="228600"/>
           </a:xfrm>
           <a:prstGeom prst="rect">
             <a:avLst/>
@@ -5344,7 +5346,7 @@
               <a:buNone/>
             </a:pPr>
             <a:r>
-              <a:rPr lang="en-US" sz="1300" b="1" dirty="0">
+              <a:rPr lang="en-US" sz="1220" b="1" dirty="0">
                 <a:solidFill>
                   <a:srgbClr val="0068B7"/>
                 </a:solidFill>
@@ -5354,7 +5356,7 @@
               </a:rPr>
               <a:t>Safeguard to plan</a:t>
             </a:r>
-            <a:endParaRPr lang="en-US" sz="1300" dirty="0"/>
+            <a:endParaRPr lang="en-US" sz="1220" dirty="0"/>
           </a:p>
         </p:txBody>
       </p:sp>
@@ -5366,8 +5368,8 @@
         </p:nvSpPr>
         <p:spPr>
           <a:xfrm>
-            <a:off x="7799832" y="4818888"/>
-            <a:ext cx="3145536" cy="688543"/>
+            <a:off x="7708392" y="4828032"/>
+            <a:ext cx="3282696" cy="749808"/>
           </a:xfrm>
           <a:prstGeom prst="rect">
             <a:avLst/>
@@ -5385,7 +5387,7 @@
               <a:buNone/>
             </a:pPr>
             <a:r>
-              <a:rPr lang="en-US" sz="1320" dirty="0">
+              <a:rPr lang="en-US" sz="1220" dirty="0">
                 <a:solidFill>
                   <a:srgbClr val="17364A"/>
                 </a:solidFill>
@@ -5393,9 +5395,9 @@
                 <a:ea typeface="Aptos" pitchFamily="34" charset="-122"/>
                 <a:cs typeface="Aptos" pitchFamily="34" charset="-120"/>
               </a:rPr>
-              <a:t>Identify what could go wrong, who could be affected, what safeguards are needed, and what evidence should be reviewed before use.</a:t>
-            </a:r>
-            <a:endParaRPr lang="en-US" sz="1320" dirty="0"/>
+              <a:t>Identify what could go wrong, who could be affected, what safeguards are needed,.</a:t>
+            </a:r>
+            <a:endParaRPr lang="en-US" sz="1220" dirty="0"/>
           </a:p>
         </p:txBody>
       </p:sp>
@@ -5686,8 +5688,8 @@
         </p:nvSpPr>
         <p:spPr>
           <a:xfrm>
-            <a:off x="868680" y="1508760"/>
-            <a:ext cx="6309360" cy="4160520"/>
+            <a:off x="822960" y="1463040"/>
+            <a:ext cx="6565392" cy="4343400"/>
           </a:xfrm>
           <a:prstGeom prst="rect">
             <a:avLst/>
@@ -5705,7 +5707,7 @@
               <a:buNone/>
             </a:pPr>
             <a:r>
-              <a:rPr lang="en-US" sz="2100" dirty="0">
+              <a:rPr lang="en-US" sz="1920" dirty="0">
                 <a:solidFill>
                   <a:srgbClr val="003A63"/>
                 </a:solidFill>
@@ -5715,14 +5717,14 @@
               </a:rPr>
               <a:t>• Missed emerging events.</a:t>
             </a:r>
-            <a:endParaRPr lang="en-US" sz="2100" dirty="0"/>
-          </a:p>
-          <a:p>
-            <a:pPr indent="0" marL="0">
-              <a:buNone/>
-            </a:pPr>
-            <a:r>
-              <a:rPr lang="en-US" sz="2100" dirty="0">
+            <a:endParaRPr lang="en-US" sz="1920" dirty="0"/>
+          </a:p>
+          <a:p>
+            <a:pPr indent="0" marL="0">
+              <a:buNone/>
+            </a:pPr>
+            <a:r>
+              <a:rPr lang="en-US" sz="1920" dirty="0">
                 <a:solidFill>
                   <a:srgbClr val="003A63"/>
                 </a:solidFill>
@@ -5732,14 +5734,14 @@
               </a:rPr>
               <a:t>• Overly conservative thresholds may miss early signals.</a:t>
             </a:r>
-            <a:endParaRPr lang="en-US" sz="2100" dirty="0"/>
-          </a:p>
-          <a:p>
-            <a:pPr indent="0" marL="0">
-              <a:buNone/>
-            </a:pPr>
-            <a:r>
-              <a:rPr lang="en-US" sz="2100" dirty="0">
+            <a:endParaRPr lang="en-US" sz="1920" dirty="0"/>
+          </a:p>
+          <a:p>
+            <a:pPr indent="0" marL="0">
+              <a:buNone/>
+            </a:pPr>
+            <a:r>
+              <a:rPr lang="en-US" sz="1920" dirty="0">
                 <a:solidFill>
                   <a:srgbClr val="003A63"/>
                 </a:solidFill>
@@ -5747,9 +5749,9 @@
                 <a:ea typeface="Aptos" pitchFamily="34" charset="-122"/>
                 <a:cs typeface="Aptos" pitchFamily="34" charset="-120"/>
               </a:rPr>
-              <a:t>• Guardrails include multiple indicators, sensitivity review, and escalation pathways for staff.</a:t>
-            </a:r>
-            <a:endParaRPr lang="en-US" sz="2100" dirty="0"/>
+              <a:t>• Guardrails include multiple indicators, sensitivity review, and escalation.</a:t>
+            </a:r>
+            <a:endParaRPr lang="en-US" sz="1920" dirty="0"/>
           </a:p>
         </p:txBody>
       </p:sp>
@@ -5761,12 +5763,12 @@
         </p:nvSpPr>
         <p:spPr>
           <a:xfrm>
-            <a:off x="7635240" y="1325880"/>
-            <a:ext cx="3474720" cy="1207008"/>
+            <a:off x="7543800" y="1325880"/>
+            <a:ext cx="3611880" cy="1261872"/>
           </a:xfrm>
           <a:prstGeom prst="roundRect">
             <a:avLst>
-              <a:gd name="adj" fmla="val 9091"/>
+              <a:gd name="adj" fmla="val 8696"/>
             </a:avLst>
           </a:prstGeom>
           <a:solidFill>
@@ -5788,8 +5790,8 @@
         </p:nvSpPr>
         <p:spPr>
           <a:xfrm>
-            <a:off x="7799832" y="1472184"/>
-            <a:ext cx="3145536" cy="256032"/>
+            <a:off x="7708392" y="1453896"/>
+            <a:ext cx="3282696" cy="228600"/>
           </a:xfrm>
           <a:prstGeom prst="rect">
             <a:avLst/>
@@ -5805,7 +5807,7 @@
               <a:buNone/>
             </a:pPr>
             <a:r>
-              <a:rPr lang="en-US" sz="1300" b="1" dirty="0">
+              <a:rPr lang="en-US" sz="1220" b="1" dirty="0">
                 <a:solidFill>
                   <a:srgbClr val="0068B7"/>
                 </a:solidFill>
@@ -5815,7 +5817,7 @@
               </a:rPr>
               <a:t>Risk check</a:t>
             </a:r>
-            <a:endParaRPr lang="en-US" sz="1300" dirty="0"/>
+            <a:endParaRPr lang="en-US" sz="1220" dirty="0"/>
           </a:p>
         </p:txBody>
       </p:sp>
@@ -5827,8 +5829,8 @@
         </p:nvSpPr>
         <p:spPr>
           <a:xfrm>
-            <a:off x="7799832" y="1801368"/>
-            <a:ext cx="3145536" cy="640080"/>
+            <a:off x="7708392" y="1764792"/>
+            <a:ext cx="3282696" cy="749808"/>
           </a:xfrm>
           <a:prstGeom prst="rect">
             <a:avLst/>
@@ -5846,7 +5848,7 @@
               <a:buNone/>
             </a:pPr>
             <a:r>
-              <a:rPr lang="en-US" sz="1320" dirty="0">
+              <a:rPr lang="en-US" sz="1220" dirty="0">
                 <a:solidFill>
                   <a:srgbClr val="17364A"/>
                 </a:solidFill>
@@ -5856,7 +5858,7 @@
               </a:rPr>
               <a:t>Missed emerging events.</a:t>
             </a:r>
-            <a:endParaRPr lang="en-US" sz="1320" dirty="0"/>
+            <a:endParaRPr lang="en-US" sz="1220" dirty="0"/>
           </a:p>
         </p:txBody>
       </p:sp>
@@ -5868,12 +5870,12 @@
         </p:nvSpPr>
         <p:spPr>
           <a:xfrm>
-            <a:off x="7635240" y="2670048"/>
-            <a:ext cx="3474720" cy="1536192"/>
+            <a:off x="7543800" y="2724912"/>
+            <a:ext cx="3611880" cy="1527048"/>
           </a:xfrm>
           <a:prstGeom prst="roundRect">
             <a:avLst>
-              <a:gd name="adj" fmla="val 7143"/>
+              <a:gd name="adj" fmla="val 7186"/>
             </a:avLst>
           </a:prstGeom>
           <a:solidFill>
@@ -5895,24 +5897,26 @@
         </p:nvSpPr>
         <p:spPr>
           <a:xfrm>
-            <a:off x="7799832" y="2798064"/>
-            <a:ext cx="3145536" cy="237744"/>
-          </a:xfrm>
-          <a:prstGeom prst="rect">
-            <a:avLst/>
-          </a:prstGeom>
-          <a:noFill/>
-          <a:ln/>
-        </p:spPr>
-        <p:txBody>
-          <a:bodyPr wrap="square" lIns="0" tIns="0" rIns="0" bIns="0" rtlCol="0" anchor="ctr"/>
-          <a:lstStyle/>
-          <a:p>
-            <a:pPr indent="0" marL="0">
-              <a:buNone/>
-            </a:pPr>
-            <a:r>
-              <a:rPr lang="en-US" sz="1250" b="1" dirty="0">
+            <a:off x="7708392" y="2852928"/>
+            <a:ext cx="3282696" cy="219456"/>
+          </a:xfrm>
+          <a:prstGeom prst="rect">
+            <a:avLst/>
+          </a:prstGeom>
+          <a:noFill/>
+          <a:ln/>
+        </p:spPr>
+        <p:txBody>
+          <a:bodyPr wrap="square" lIns="0" tIns="0" rIns="0" bIns="0" rtlCol="0" anchor="ctr">
+            <a:normAutofit/>
+          </a:bodyPr>
+          <a:lstStyle/>
+          <a:p>
+            <a:pPr indent="0" marL="0">
+              <a:buNone/>
+            </a:pPr>
+            <a:r>
+              <a:rPr lang="en-US" sz="1160" b="1" dirty="0">
                 <a:solidFill>
                   <a:srgbClr val="0068B7"/>
                 </a:solidFill>
@@ -5922,7 +5926,7 @@
               </a:rPr>
               <a:t>Risk control loop</a:t>
             </a:r>
-            <a:endParaRPr lang="en-US" sz="1250" dirty="0"/>
+            <a:endParaRPr lang="en-US" sz="1160" dirty="0"/>
           </a:p>
         </p:txBody>
       </p:sp>
@@ -5934,7 +5938,7 @@
         </p:nvSpPr>
         <p:spPr>
           <a:xfrm>
-            <a:off x="8763000" y="3351276"/>
+            <a:off x="8717280" y="3406140"/>
             <a:ext cx="164592" cy="0"/>
           </a:xfrm>
           <a:prstGeom prst="line">
@@ -5957,8 +5961,8 @@
         </p:nvSpPr>
         <p:spPr>
           <a:xfrm>
-            <a:off x="7872984" y="3200400"/>
-            <a:ext cx="890016" cy="301752"/>
+            <a:off x="7781544" y="3255264"/>
+            <a:ext cx="935736" cy="301752"/>
           </a:xfrm>
           <a:prstGeom prst="roundRect">
             <a:avLst>
@@ -5984,8 +5988,8 @@
         </p:nvSpPr>
         <p:spPr>
           <a:xfrm>
-            <a:off x="7909560" y="3273552"/>
-            <a:ext cx="816864" cy="146304"/>
+            <a:off x="7818120" y="3328416"/>
+            <a:ext cx="862584" cy="146304"/>
           </a:xfrm>
           <a:prstGeom prst="rect">
             <a:avLst/>
@@ -6025,7 +6029,7 @@
         </p:nvSpPr>
         <p:spPr>
           <a:xfrm>
-            <a:off x="9817608" y="3351276"/>
+            <a:off x="9817608" y="3406140"/>
             <a:ext cx="164592" cy="0"/>
           </a:xfrm>
           <a:prstGeom prst="line">
@@ -6048,8 +6052,8 @@
         </p:nvSpPr>
         <p:spPr>
           <a:xfrm>
-            <a:off x="8927592" y="3200400"/>
-            <a:ext cx="890016" cy="301752"/>
+            <a:off x="8881872" y="3255264"/>
+            <a:ext cx="935736" cy="301752"/>
           </a:xfrm>
           <a:prstGeom prst="roundRect">
             <a:avLst>
@@ -6075,8 +6079,8 @@
         </p:nvSpPr>
         <p:spPr>
           <a:xfrm>
-            <a:off x="8964168" y="3273552"/>
-            <a:ext cx="816864" cy="146304"/>
+            <a:off x="8918448" y="3328416"/>
+            <a:ext cx="862584" cy="146304"/>
           </a:xfrm>
           <a:prstGeom prst="rect">
             <a:avLst/>
@@ -6116,8 +6120,8 @@
         </p:nvSpPr>
         <p:spPr>
           <a:xfrm>
-            <a:off x="9982200" y="3200400"/>
-            <a:ext cx="890016" cy="301752"/>
+            <a:off x="9982200" y="3255264"/>
+            <a:ext cx="935736" cy="301752"/>
           </a:xfrm>
           <a:prstGeom prst="roundRect">
             <a:avLst>
@@ -6143,8 +6147,8 @@
         </p:nvSpPr>
         <p:spPr>
           <a:xfrm>
-            <a:off x="10018776" y="3273552"/>
-            <a:ext cx="816864" cy="146304"/>
+            <a:off x="10018776" y="3328416"/>
+            <a:ext cx="862584" cy="146304"/>
           </a:xfrm>
           <a:prstGeom prst="rect">
             <a:avLst/>
@@ -6184,8 +6188,8 @@
         </p:nvSpPr>
         <p:spPr>
           <a:xfrm>
-            <a:off x="7854696" y="3694176"/>
-            <a:ext cx="3035808" cy="365760"/>
+            <a:off x="7763256" y="3749040"/>
+            <a:ext cx="3172968" cy="356616"/>
           </a:xfrm>
           <a:prstGeom prst="rect">
             <a:avLst/>
@@ -6203,7 +6207,7 @@
               <a:buNone/>
             </a:pPr>
             <a:r>
-              <a:rPr lang="en-US" sz="1120" dirty="0">
+              <a:rPr lang="en-US" sz="1040" dirty="0">
                 <a:solidFill>
                   <a:srgbClr val="17364A"/>
                 </a:solidFill>
@@ -6211,9 +6215,9 @@
                 <a:ea typeface="Aptos" pitchFamily="34" charset="-122"/>
                 <a:cs typeface="Aptos" pitchFamily="34" charset="-120"/>
               </a:rPr>
-              <a:t>Responsible use depends on finding risks early, applying safeguards, and watching for drift or harm over time.</a:t>
-            </a:r>
-            <a:endParaRPr lang="en-US" sz="1120" dirty="0"/>
+              <a:t>Responsible use depends on finding risks early, applying safeguards,.</a:t>
+            </a:r>
+            <a:endParaRPr lang="en-US" sz="1040" dirty="0"/>
           </a:p>
         </p:txBody>
       </p:sp>
@@ -6225,12 +6229,12 @@
         </p:nvSpPr>
         <p:spPr>
           <a:xfrm>
-            <a:off x="7635240" y="4343400"/>
-            <a:ext cx="3474720" cy="1255471"/>
+            <a:off x="7543800" y="4389120"/>
+            <a:ext cx="3611880" cy="1261872"/>
           </a:xfrm>
           <a:prstGeom prst="roundRect">
             <a:avLst>
-              <a:gd name="adj" fmla="val 8740"/>
+              <a:gd name="adj" fmla="val 8696"/>
             </a:avLst>
           </a:prstGeom>
           <a:solidFill>
@@ -6252,8 +6256,8 @@
         </p:nvSpPr>
         <p:spPr>
           <a:xfrm>
-            <a:off x="7799832" y="4489704"/>
-            <a:ext cx="3145536" cy="256032"/>
+            <a:off x="7708392" y="4517136"/>
+            <a:ext cx="3282696" cy="228600"/>
           </a:xfrm>
           <a:prstGeom prst="rect">
             <a:avLst/>
@@ -6269,7 +6273,7 @@
               <a:buNone/>
             </a:pPr>
             <a:r>
-              <a:rPr lang="en-US" sz="1300" b="1" dirty="0">
+              <a:rPr lang="en-US" sz="1220" b="1" dirty="0">
                 <a:solidFill>
                   <a:srgbClr val="0068B7"/>
                 </a:solidFill>
@@ -6279,7 +6283,7 @@
               </a:rPr>
               <a:t>Safeguard to plan</a:t>
             </a:r>
-            <a:endParaRPr lang="en-US" sz="1300" dirty="0"/>
+            <a:endParaRPr lang="en-US" sz="1220" dirty="0"/>
           </a:p>
         </p:txBody>
       </p:sp>
@@ -6291,8 +6295,8 @@
         </p:nvSpPr>
         <p:spPr>
           <a:xfrm>
-            <a:off x="7799832" y="4818888"/>
-            <a:ext cx="3145536" cy="688543"/>
+            <a:off x="7708392" y="4828032"/>
+            <a:ext cx="3282696" cy="749808"/>
           </a:xfrm>
           <a:prstGeom prst="rect">
             <a:avLst/>
@@ -6310,7 +6314,7 @@
               <a:buNone/>
             </a:pPr>
             <a:r>
-              <a:rPr lang="en-US" sz="1320" dirty="0">
+              <a:rPr lang="en-US" sz="1220" dirty="0">
                 <a:solidFill>
                   <a:srgbClr val="17364A"/>
                 </a:solidFill>
@@ -6318,9 +6322,9 @@
                 <a:ea typeface="Aptos" pitchFamily="34" charset="-122"/>
                 <a:cs typeface="Aptos" pitchFamily="34" charset="-120"/>
               </a:rPr>
-              <a:t>Identify what could go wrong, who could be affected, what safeguards are needed, and what evidence should be reviewed before use.</a:t>
-            </a:r>
-            <a:endParaRPr lang="en-US" sz="1320" dirty="0"/>
+              <a:t>Identify what could go wrong, who could be affected, what safeguards are needed,.</a:t>
+            </a:r>
+            <a:endParaRPr lang="en-US" sz="1220" dirty="0"/>
           </a:p>
         </p:txBody>
       </p:sp>
@@ -6611,8 +6615,8 @@
         </p:nvSpPr>
         <p:spPr>
           <a:xfrm>
-            <a:off x="868680" y="1508760"/>
-            <a:ext cx="6309360" cy="4160520"/>
+            <a:off x="822960" y="1463040"/>
+            <a:ext cx="6565392" cy="4343400"/>
           </a:xfrm>
           <a:prstGeom prst="rect">
             <a:avLst/>
@@ -6630,7 +6634,7 @@
               <a:buNone/>
             </a:pPr>
             <a:r>
-              <a:rPr lang="en-US" sz="2100" dirty="0">
+              <a:rPr lang="en-US" sz="1920" dirty="0">
                 <a:solidFill>
                   <a:srgbClr val="003A63"/>
                 </a:solidFill>
@@ -6638,16 +6642,16 @@
                 <a:ea typeface="Aptos" pitchFamily="34" charset="-122"/>
                 <a:cs typeface="Aptos" pitchFamily="34" charset="-120"/>
               </a:rPr>
-              <a:t>• Time-series and anomaly detection methods can support predictive dashboards, syndromic.</a:t>
-            </a:r>
-            <a:endParaRPr lang="en-US" sz="2100" dirty="0"/>
-          </a:p>
-          <a:p>
-            <a:pPr indent="0" marL="0">
-              <a:buNone/>
-            </a:pPr>
-            <a:r>
-              <a:rPr lang="en-US" sz="2100" dirty="0">
+              <a:t>• Time-series and anomaly detection methods can support predictive dashboards,.</a:t>
+            </a:r>
+            <a:endParaRPr lang="en-US" sz="1920" dirty="0"/>
+          </a:p>
+          <a:p>
+            <a:pPr indent="0" marL="0">
+              <a:buNone/>
+            </a:pPr>
+            <a:r>
+              <a:rPr lang="en-US" sz="1920" dirty="0">
                 <a:solidFill>
                   <a:srgbClr val="003A63"/>
                 </a:solidFill>
@@ -6655,16 +6659,16 @@
                 <a:ea typeface="Aptos" pitchFamily="34" charset="-122"/>
                 <a:cs typeface="Aptos" pitchFamily="34" charset="-120"/>
               </a:rPr>
-              <a:t>• Generative AI may summarize signal review, but it should include uncertainty and source.</a:t>
-            </a:r>
-            <a:endParaRPr lang="en-US" sz="2100" dirty="0"/>
-          </a:p>
-          <a:p>
-            <a:pPr indent="0" marL="0">
-              <a:buNone/>
-            </a:pPr>
-            <a:r>
-              <a:rPr lang="en-US" sz="2100" dirty="0">
+              <a:t>• Generative AI may summarize signal review, but it should include uncertainty.</a:t>
+            </a:r>
+            <a:endParaRPr lang="en-US" sz="1920" dirty="0"/>
+          </a:p>
+          <a:p>
+            <a:pPr indent="0" marL="0">
+              <a:buNone/>
+            </a:pPr>
+            <a:r>
+              <a:rPr lang="en-US" sz="1920" dirty="0">
                 <a:solidFill>
                   <a:srgbClr val="003A63"/>
                 </a:solidFill>
@@ -6672,9 +6676,9 @@
                 <a:ea typeface="Aptos" pitchFamily="34" charset="-122"/>
                 <a:cs typeface="Aptos" pitchFamily="34" charset="-120"/>
               </a:rPr>
-              <a:t>• Agentic workflows may route alerts or create tasks, but those actions should be limited to.</a:t>
-            </a:r>
-            <a:endParaRPr lang="en-US" sz="2100" dirty="0"/>
+              <a:t>• Agentic workflows may route alerts or create tasks, but those actions should.</a:t>
+            </a:r>
+            <a:endParaRPr lang="en-US" sz="1920" dirty="0"/>
           </a:p>
         </p:txBody>
       </p:sp>
@@ -6686,12 +6690,12 @@
         </p:nvSpPr>
         <p:spPr>
           <a:xfrm>
-            <a:off x="7635240" y="1325880"/>
-            <a:ext cx="3474720" cy="1255471"/>
+            <a:off x="7543800" y="1325880"/>
+            <a:ext cx="3611880" cy="1261872"/>
           </a:xfrm>
           <a:prstGeom prst="roundRect">
             <a:avLst>
-              <a:gd name="adj" fmla="val 8740"/>
+              <a:gd name="adj" fmla="val 8696"/>
             </a:avLst>
           </a:prstGeom>
           <a:solidFill>
@@ -6713,8 +6717,8 @@
         </p:nvSpPr>
         <p:spPr>
           <a:xfrm>
-            <a:off x="7799832" y="1472184"/>
-            <a:ext cx="3145536" cy="256032"/>
+            <a:off x="7708392" y="1453896"/>
+            <a:ext cx="3282696" cy="228600"/>
           </a:xfrm>
           <a:prstGeom prst="rect">
             <a:avLst/>
@@ -6730,7 +6734,7 @@
               <a:buNone/>
             </a:pPr>
             <a:r>
-              <a:rPr lang="en-US" sz="1300" b="1" dirty="0">
+              <a:rPr lang="en-US" sz="1220" b="1" dirty="0">
                 <a:solidFill>
                   <a:srgbClr val="0068B7"/>
                 </a:solidFill>
@@ -6740,7 +6744,7 @@
               </a:rPr>
               <a:t>Implementation cue</a:t>
             </a:r>
-            <a:endParaRPr lang="en-US" sz="1300" dirty="0"/>
+            <a:endParaRPr lang="en-US" sz="1220" dirty="0"/>
           </a:p>
         </p:txBody>
       </p:sp>
@@ -6752,8 +6756,8 @@
         </p:nvSpPr>
         <p:spPr>
           <a:xfrm>
-            <a:off x="7799832" y="1801368"/>
-            <a:ext cx="3145536" cy="688543"/>
+            <a:off x="7708392" y="1764792"/>
+            <a:ext cx="3282696" cy="749808"/>
           </a:xfrm>
           <a:prstGeom prst="rect">
             <a:avLst/>
@@ -6771,7 +6775,7 @@
               <a:buNone/>
             </a:pPr>
             <a:r>
-              <a:rPr lang="en-US" sz="1320" dirty="0">
+              <a:rPr lang="en-US" sz="1220" dirty="0">
                 <a:solidFill>
                   <a:srgbClr val="17364A"/>
                 </a:solidFill>
@@ -6779,9 +6783,9 @@
                 <a:ea typeface="Aptos" pitchFamily="34" charset="-122"/>
                 <a:cs typeface="Aptos" pitchFamily="34" charset="-120"/>
               </a:rPr>
-              <a:t>Time-series and anomaly detection methods can support predictive dashboards, syndromic surveillance,.</a:t>
-            </a:r>
-            <a:endParaRPr lang="en-US" sz="1320" dirty="0"/>
+              <a:t>Time-series and anomaly detection methods can support predictive dashboards,.</a:t>
+            </a:r>
+            <a:endParaRPr lang="en-US" sz="1220" dirty="0"/>
           </a:p>
         </p:txBody>
       </p:sp>
@@ -6793,12 +6797,12 @@
         </p:nvSpPr>
         <p:spPr>
           <a:xfrm>
-            <a:off x="7635240" y="2718511"/>
-            <a:ext cx="3474720" cy="1328623"/>
+            <a:off x="7543800" y="2724912"/>
+            <a:ext cx="3611880" cy="1527048"/>
           </a:xfrm>
           <a:prstGeom prst="roundRect">
             <a:avLst>
-              <a:gd name="adj" fmla="val 8259"/>
+              <a:gd name="adj" fmla="val 7186"/>
             </a:avLst>
           </a:prstGeom>
           <a:solidFill>
@@ -6820,24 +6824,26 @@
         </p:nvSpPr>
         <p:spPr>
           <a:xfrm>
-            <a:off x="7799832" y="2846527"/>
-            <a:ext cx="3145536" cy="237744"/>
-          </a:xfrm>
-          <a:prstGeom prst="rect">
-            <a:avLst/>
-          </a:prstGeom>
-          <a:noFill/>
-          <a:ln/>
-        </p:spPr>
-        <p:txBody>
-          <a:bodyPr wrap="square" lIns="0" tIns="0" rIns="0" bIns="0" rtlCol="0" anchor="ctr"/>
-          <a:lstStyle/>
-          <a:p>
-            <a:pPr indent="0" marL="0">
-              <a:buNone/>
-            </a:pPr>
-            <a:r>
-              <a:rPr lang="en-US" sz="1250" b="1" dirty="0">
+            <a:off x="7708392" y="2852928"/>
+            <a:ext cx="3282696" cy="219456"/>
+          </a:xfrm>
+          <a:prstGeom prst="rect">
+            <a:avLst/>
+          </a:prstGeom>
+          <a:noFill/>
+          <a:ln/>
+        </p:spPr>
+        <p:txBody>
+          <a:bodyPr wrap="square" lIns="0" tIns="0" rIns="0" bIns="0" rtlCol="0" anchor="ctr">
+            <a:normAutofit/>
+          </a:bodyPr>
+          <a:lstStyle/>
+          <a:p>
+            <a:pPr indent="0" marL="0">
+              <a:buNone/>
+            </a:pPr>
+            <a:r>
+              <a:rPr lang="en-US" sz="1160" b="1" dirty="0">
                 <a:solidFill>
                   <a:srgbClr val="0068B7"/>
                 </a:solidFill>
@@ -6847,7 +6853,7 @@
               </a:rPr>
               <a:t>Implementation path</a:t>
             </a:r>
-            <a:endParaRPr lang="en-US" sz="1250" dirty="0"/>
+            <a:endParaRPr lang="en-US" sz="1160" dirty="0"/>
           </a:p>
         </p:txBody>
       </p:sp>
@@ -6859,7 +6865,7 @@
         </p:nvSpPr>
         <p:spPr>
           <a:xfrm>
-            <a:off x="8763000" y="3399739"/>
+            <a:off x="8717280" y="3406140"/>
             <a:ext cx="164592" cy="0"/>
           </a:xfrm>
           <a:prstGeom prst="line">
@@ -6882,8 +6888,8 @@
         </p:nvSpPr>
         <p:spPr>
           <a:xfrm>
-            <a:off x="7872984" y="3248863"/>
-            <a:ext cx="890016" cy="301752"/>
+            <a:off x="7781544" y="3255264"/>
+            <a:ext cx="935736" cy="301752"/>
           </a:xfrm>
           <a:prstGeom prst="roundRect">
             <a:avLst>
@@ -6909,8 +6915,8 @@
         </p:nvSpPr>
         <p:spPr>
           <a:xfrm>
-            <a:off x="7909560" y="3322015"/>
-            <a:ext cx="816864" cy="146304"/>
+            <a:off x="7818120" y="3328416"/>
+            <a:ext cx="862584" cy="146304"/>
           </a:xfrm>
           <a:prstGeom prst="rect">
             <a:avLst/>
@@ -6950,7 +6956,7 @@
         </p:nvSpPr>
         <p:spPr>
           <a:xfrm>
-            <a:off x="9817608" y="3399739"/>
+            <a:off x="9817608" y="3406140"/>
             <a:ext cx="164592" cy="0"/>
           </a:xfrm>
           <a:prstGeom prst="line">
@@ -6973,8 +6979,8 @@
         </p:nvSpPr>
         <p:spPr>
           <a:xfrm>
-            <a:off x="8927592" y="3248863"/>
-            <a:ext cx="890016" cy="301752"/>
+            <a:off x="8881872" y="3255264"/>
+            <a:ext cx="935736" cy="301752"/>
           </a:xfrm>
           <a:prstGeom prst="roundRect">
             <a:avLst>
@@ -7000,8 +7006,8 @@
         </p:nvSpPr>
         <p:spPr>
           <a:xfrm>
-            <a:off x="8964168" y="3322015"/>
-            <a:ext cx="816864" cy="146304"/>
+            <a:off x="8918448" y="3328416"/>
+            <a:ext cx="862584" cy="146304"/>
           </a:xfrm>
           <a:prstGeom prst="rect">
             <a:avLst/>
@@ -7041,8 +7047,8 @@
         </p:nvSpPr>
         <p:spPr>
           <a:xfrm>
-            <a:off x="9982200" y="3248863"/>
-            <a:ext cx="890016" cy="301752"/>
+            <a:off x="9982200" y="3255264"/>
+            <a:ext cx="935736" cy="301752"/>
           </a:xfrm>
           <a:prstGeom prst="roundRect">
             <a:avLst>
@@ -7068,8 +7074,8 @@
         </p:nvSpPr>
         <p:spPr>
           <a:xfrm>
-            <a:off x="10018776" y="3322015"/>
-            <a:ext cx="816864" cy="146304"/>
+            <a:off x="10018776" y="3328416"/>
+            <a:ext cx="862584" cy="146304"/>
           </a:xfrm>
           <a:prstGeom prst="rect">
             <a:avLst/>
@@ -7109,8 +7115,8 @@
         </p:nvSpPr>
         <p:spPr>
           <a:xfrm>
-            <a:off x="7854696" y="3742639"/>
-            <a:ext cx="3035808" cy="158191"/>
+            <a:off x="7763256" y="3749040"/>
+            <a:ext cx="3172968" cy="356616"/>
           </a:xfrm>
           <a:prstGeom prst="rect">
             <a:avLst/>
@@ -7128,7 +7134,7 @@
               <a:buNone/>
             </a:pPr>
             <a:r>
-              <a:rPr lang="en-US" sz="1120" dirty="0">
+              <a:rPr lang="en-US" sz="1040" dirty="0">
                 <a:solidFill>
                   <a:srgbClr val="17364A"/>
                 </a:solidFill>
@@ -7136,9 +7142,9 @@
                 <a:ea typeface="Aptos" pitchFamily="34" charset="-122"/>
                 <a:cs typeface="Aptos" pitchFamily="34" charset="-120"/>
               </a:rPr>
-              <a:t>Implementation work should make dependencies, approvals, training, and sustainment visible before launch.</a:t>
-            </a:r>
-            <a:endParaRPr lang="en-US" sz="1120" dirty="0"/>
+              <a:t>Implementation work should make dependencies, approvals, training, and.</a:t>
+            </a:r>
+            <a:endParaRPr lang="en-US" sz="1040" dirty="0"/>
           </a:p>
         </p:txBody>
       </p:sp>
@@ -7150,12 +7156,12 @@
         </p:nvSpPr>
         <p:spPr>
           <a:xfrm>
-            <a:off x="7635240" y="4184294"/>
-            <a:ext cx="3474720" cy="1466698"/>
+            <a:off x="7543800" y="4389120"/>
+            <a:ext cx="3611880" cy="1261872"/>
           </a:xfrm>
           <a:prstGeom prst="roundRect">
             <a:avLst>
-              <a:gd name="adj" fmla="val 7481"/>
+              <a:gd name="adj" fmla="val 8696"/>
             </a:avLst>
           </a:prstGeom>
           <a:solidFill>
@@ -7177,8 +7183,8 @@
         </p:nvSpPr>
         <p:spPr>
           <a:xfrm>
-            <a:off x="7799832" y="4330598"/>
-            <a:ext cx="3145536" cy="256032"/>
+            <a:off x="7708392" y="4517136"/>
+            <a:ext cx="3282696" cy="228600"/>
           </a:xfrm>
           <a:prstGeom prst="rect">
             <a:avLst/>
@@ -7194,7 +7200,7 @@
               <a:buNone/>
             </a:pPr>
             <a:r>
-              <a:rPr lang="en-US" sz="1300" b="1" dirty="0">
+              <a:rPr lang="en-US" sz="1220" b="1" dirty="0">
                 <a:solidFill>
                   <a:srgbClr val="0068B7"/>
                 </a:solidFill>
@@ -7204,7 +7210,7 @@
               </a:rPr>
               <a:t>Next action</a:t>
             </a:r>
-            <a:endParaRPr lang="en-US" sz="1300" dirty="0"/>
+            <a:endParaRPr lang="en-US" sz="1220" dirty="0"/>
           </a:p>
         </p:txBody>
       </p:sp>
@@ -7216,8 +7222,8 @@
         </p:nvSpPr>
         <p:spPr>
           <a:xfrm>
-            <a:off x="7799832" y="4659782"/>
-            <a:ext cx="3145536" cy="899770"/>
+            <a:off x="7708392" y="4828032"/>
+            <a:ext cx="3282696" cy="749808"/>
           </a:xfrm>
           <a:prstGeom prst="rect">
             <a:avLst/>
@@ -7235,7 +7241,7 @@
               <a:buNone/>
             </a:pPr>
             <a:r>
-              <a:rPr lang="en-US" sz="1320" dirty="0">
+              <a:rPr lang="en-US" sz="1220" dirty="0">
                 <a:solidFill>
                   <a:srgbClr val="17364A"/>
                 </a:solidFill>
@@ -7243,9 +7249,9 @@
                 <a:ea typeface="Aptos" pitchFamily="34" charset="-122"/>
                 <a:cs typeface="Aptos" pitchFamily="34" charset="-120"/>
               </a:rPr>
-              <a:t>Use the concept to clarify workflow changes, dependencies, staffing, procurement requirements, training needs, and implementation checkpoints.</a:t>
-            </a:r>
-            <a:endParaRPr lang="en-US" sz="1320" dirty="0"/>
+              <a:t>Use the concept to clarify workflow changes, dependencies, staffing, procurement.</a:t>
+            </a:r>
+            <a:endParaRPr lang="en-US" sz="1220" dirty="0"/>
           </a:p>
         </p:txBody>
       </p:sp>
@@ -7536,8 +7542,8 @@
         </p:nvSpPr>
         <p:spPr>
           <a:xfrm>
-            <a:off x="868680" y="1508760"/>
-            <a:ext cx="6309360" cy="4160520"/>
+            <a:off x="822960" y="1463040"/>
+            <a:ext cx="6565392" cy="4343400"/>
           </a:xfrm>
           <a:prstGeom prst="rect">
             <a:avLst/>
@@ -7555,7 +7561,7 @@
               <a:buNone/>
             </a:pPr>
             <a:r>
-              <a:rPr lang="en-US" sz="2100" dirty="0">
+              <a:rPr lang="en-US" sz="1920" dirty="0">
                 <a:solidFill>
                   <a:srgbClr val="003A63"/>
                 </a:solidFill>
@@ -7565,14 +7571,14 @@
               </a:rPr>
               <a:t>• What time-series data stream would benefit from automated signal review?</a:t>
             </a:r>
-            <a:endParaRPr lang="en-US" sz="2100" dirty="0"/>
-          </a:p>
-          <a:p>
-            <a:pPr indent="0" marL="0">
-              <a:buNone/>
-            </a:pPr>
-            <a:r>
-              <a:rPr lang="en-US" sz="2100" dirty="0">
+            <a:endParaRPr lang="en-US" sz="1920" dirty="0"/>
+          </a:p>
+          <a:p>
+            <a:pPr indent="0" marL="0">
+              <a:buNone/>
+            </a:pPr>
+            <a:r>
+              <a:rPr lang="en-US" sz="1920" dirty="0">
                 <a:solidFill>
                   <a:srgbClr val="003A63"/>
                 </a:solidFill>
@@ -7582,14 +7588,14 @@
               </a:rPr>
               <a:t>• What baseline is appropriate for the condition, data source, and decision?</a:t>
             </a:r>
-            <a:endParaRPr lang="en-US" sz="2100" dirty="0"/>
-          </a:p>
-          <a:p>
-            <a:pPr indent="0" marL="0">
-              <a:buNone/>
-            </a:pPr>
-            <a:r>
-              <a:rPr lang="en-US" sz="2100" dirty="0">
+            <a:endParaRPr lang="en-US" sz="1920" dirty="0"/>
+          </a:p>
+          <a:p>
+            <a:pPr indent="0" marL="0">
+              <a:buNone/>
+            </a:pPr>
+            <a:r>
+              <a:rPr lang="en-US" sz="1920" dirty="0">
                 <a:solidFill>
                   <a:srgbClr val="003A63"/>
                 </a:solidFill>
@@ -7599,7 +7605,7 @@
               </a:rPr>
               <a:t>• Which reporting artifacts could create false signals?</a:t>
             </a:r>
-            <a:endParaRPr lang="en-US" sz="2100" dirty="0"/>
+            <a:endParaRPr lang="en-US" sz="1920" dirty="0"/>
           </a:p>
         </p:txBody>
       </p:sp>
@@ -7611,12 +7617,12 @@
         </p:nvSpPr>
         <p:spPr>
           <a:xfrm>
-            <a:off x="7635240" y="1325880"/>
-            <a:ext cx="3474720" cy="1207008"/>
+            <a:off x="7543800" y="1325880"/>
+            <a:ext cx="3611880" cy="1261872"/>
           </a:xfrm>
           <a:prstGeom prst="roundRect">
             <a:avLst>
-              <a:gd name="adj" fmla="val 9091"/>
+              <a:gd name="adj" fmla="val 8696"/>
             </a:avLst>
           </a:prstGeom>
           <a:solidFill>
@@ -7638,8 +7644,8 @@
         </p:nvSpPr>
         <p:spPr>
           <a:xfrm>
-            <a:off x="7799832" y="1472184"/>
-            <a:ext cx="3145536" cy="256032"/>
+            <a:off x="7708392" y="1453896"/>
+            <a:ext cx="3282696" cy="228600"/>
           </a:xfrm>
           <a:prstGeom prst="rect">
             <a:avLst/>
@@ -7655,7 +7661,7 @@
               <a:buNone/>
             </a:pPr>
             <a:r>
-              <a:rPr lang="en-US" sz="1300" b="1" dirty="0">
+              <a:rPr lang="en-US" sz="1220" b="1" dirty="0">
                 <a:solidFill>
                   <a:srgbClr val="0068B7"/>
                 </a:solidFill>
@@ -7665,7 +7671,7 @@
               </a:rPr>
               <a:t>Core concept</a:t>
             </a:r>
-            <a:endParaRPr lang="en-US" sz="1300" dirty="0"/>
+            <a:endParaRPr lang="en-US" sz="1220" dirty="0"/>
           </a:p>
         </p:txBody>
       </p:sp>
@@ -7677,8 +7683,8 @@
         </p:nvSpPr>
         <p:spPr>
           <a:xfrm>
-            <a:off x="7799832" y="1801368"/>
-            <a:ext cx="3145536" cy="640080"/>
+            <a:off x="7708392" y="1764792"/>
+            <a:ext cx="3282696" cy="749808"/>
           </a:xfrm>
           <a:prstGeom prst="rect">
             <a:avLst/>
@@ -7696,7 +7702,7 @@
               <a:buNone/>
             </a:pPr>
             <a:r>
-              <a:rPr lang="en-US" sz="1320" dirty="0">
+              <a:rPr lang="en-US" sz="1220" dirty="0">
                 <a:solidFill>
                   <a:srgbClr val="17364A"/>
                 </a:solidFill>
@@ -7706,7 +7712,7 @@
               </a:rPr>
               <a:t>What time-series data stream would benefit from automated signal review?</a:t>
             </a:r>
-            <a:endParaRPr lang="en-US" sz="1320" dirty="0"/>
+            <a:endParaRPr lang="en-US" sz="1220" dirty="0"/>
           </a:p>
         </p:txBody>
       </p:sp>
@@ -7718,12 +7724,12 @@
         </p:nvSpPr>
         <p:spPr>
           <a:xfrm>
-            <a:off x="7635240" y="2670048"/>
-            <a:ext cx="3474720" cy="1377086"/>
+            <a:off x="7543800" y="2724912"/>
+            <a:ext cx="3611880" cy="1527048"/>
           </a:xfrm>
           <a:prstGeom prst="roundRect">
             <a:avLst>
-              <a:gd name="adj" fmla="val 7968"/>
+              <a:gd name="adj" fmla="val 7186"/>
             </a:avLst>
           </a:prstGeom>
           <a:solidFill>
@@ -7745,8 +7751,8 @@
         </p:nvSpPr>
         <p:spPr>
           <a:xfrm>
-            <a:off x="7799832" y="2816352"/>
-            <a:ext cx="3145536" cy="256032"/>
+            <a:off x="7708392" y="2852928"/>
+            <a:ext cx="3282696" cy="228600"/>
           </a:xfrm>
           <a:prstGeom prst="rect">
             <a:avLst/>
@@ -7762,7 +7768,7 @@
               <a:buNone/>
             </a:pPr>
             <a:r>
-              <a:rPr lang="en-US" sz="1300" b="1" dirty="0">
+              <a:rPr lang="en-US" sz="1220" b="1" dirty="0">
                 <a:solidFill>
                   <a:srgbClr val="0068B7"/>
                 </a:solidFill>
@@ -7772,7 +7778,7 @@
               </a:rPr>
               <a:t>Concept checkpoints</a:t>
             </a:r>
-            <a:endParaRPr lang="en-US" sz="1300" dirty="0"/>
+            <a:endParaRPr lang="en-US" sz="1220" dirty="0"/>
           </a:p>
         </p:txBody>
       </p:sp>
@@ -7784,8 +7790,8 @@
         </p:nvSpPr>
         <p:spPr>
           <a:xfrm>
-            <a:off x="7818120" y="3182112"/>
-            <a:ext cx="3090672" cy="718718"/>
+            <a:off x="7726680" y="3182112"/>
+            <a:ext cx="3227832" cy="960120"/>
           </a:xfrm>
           <a:prstGeom prst="rect">
             <a:avLst/>
@@ -7803,7 +7809,7 @@
               <a:buNone/>
             </a:pPr>
             <a:r>
-              <a:rPr lang="en-US" sz="1220" dirty="0">
+              <a:rPr lang="en-US" sz="1140" dirty="0">
                 <a:solidFill>
                   <a:srgbClr val="17364A"/>
                 </a:solidFill>
@@ -7811,16 +7817,16 @@
                 <a:ea typeface="Aptos" pitchFamily="34" charset="-122"/>
                 <a:cs typeface="Aptos" pitchFamily="34" charset="-120"/>
               </a:rPr>
-              <a:t>What time-series data stream would benefit from automated signal.</a:t>
-            </a:r>
-            <a:endParaRPr lang="en-US" sz="1220" dirty="0"/>
-          </a:p>
-          <a:p>
-            <a:pPr indent="0" marL="0">
-              <a:buNone/>
-            </a:pPr>
-            <a:r>
-              <a:rPr lang="en-US" sz="1220" dirty="0">
+              <a:t>What time-series data stream would benefit from.</a:t>
+            </a:r>
+            <a:endParaRPr lang="en-US" sz="1140" dirty="0"/>
+          </a:p>
+          <a:p>
+            <a:pPr indent="0" marL="0">
+              <a:buNone/>
+            </a:pPr>
+            <a:r>
+              <a:rPr lang="en-US" sz="1140" dirty="0">
                 <a:solidFill>
                   <a:srgbClr val="17364A"/>
                 </a:solidFill>
@@ -7828,16 +7834,16 @@
                 <a:ea typeface="Aptos" pitchFamily="34" charset="-122"/>
                 <a:cs typeface="Aptos" pitchFamily="34" charset="-120"/>
               </a:rPr>
-              <a:t>What baseline is appropriate for the condition, data source, and.</a:t>
-            </a:r>
-            <a:endParaRPr lang="en-US" sz="1220" dirty="0"/>
-          </a:p>
-          <a:p>
-            <a:pPr indent="0" marL="0">
-              <a:buNone/>
-            </a:pPr>
-            <a:r>
-              <a:rPr lang="en-US" sz="1220" dirty="0">
+              <a:t>What baseline is appropriate for the condition,.</a:t>
+            </a:r>
+            <a:endParaRPr lang="en-US" sz="1140" dirty="0"/>
+          </a:p>
+          <a:p>
+            <a:pPr indent="0" marL="0">
+              <a:buNone/>
+            </a:pPr>
+            <a:r>
+              <a:rPr lang="en-US" sz="1140" dirty="0">
                 <a:solidFill>
                   <a:srgbClr val="17364A"/>
                 </a:solidFill>
@@ -7845,9 +7851,9 @@
                 <a:ea typeface="Aptos" pitchFamily="34" charset="-122"/>
                 <a:cs typeface="Aptos" pitchFamily="34" charset="-120"/>
               </a:rPr>
-              <a:t>Which reporting artifacts could create false signals?</a:t>
-            </a:r>
-            <a:endParaRPr lang="en-US" sz="1220" dirty="0"/>
+              <a:t>Which reporting artifacts could create false.</a:t>
+            </a:r>
+            <a:endParaRPr lang="en-US" sz="1140" dirty="0"/>
           </a:p>
         </p:txBody>
       </p:sp>
@@ -7859,12 +7865,12 @@
         </p:nvSpPr>
         <p:spPr>
           <a:xfrm>
-            <a:off x="7635240" y="4184294"/>
-            <a:ext cx="3474720" cy="1466698"/>
+            <a:off x="7543800" y="4389120"/>
+            <a:ext cx="3611880" cy="1261872"/>
           </a:xfrm>
           <a:prstGeom prst="roundRect">
             <a:avLst>
-              <a:gd name="adj" fmla="val 7481"/>
+              <a:gd name="adj" fmla="val 8696"/>
             </a:avLst>
           </a:prstGeom>
           <a:solidFill>
@@ -7886,8 +7892,8 @@
         </p:nvSpPr>
         <p:spPr>
           <a:xfrm>
-            <a:off x="7799832" y="4330598"/>
-            <a:ext cx="3145536" cy="256032"/>
+            <a:off x="7708392" y="4517136"/>
+            <a:ext cx="3282696" cy="228600"/>
           </a:xfrm>
           <a:prstGeom prst="rect">
             <a:avLst/>
@@ -7903,7 +7909,7 @@
               <a:buNone/>
             </a:pPr>
             <a:r>
-              <a:rPr lang="en-US" sz="1300" b="1" dirty="0">
+              <a:rPr lang="en-US" sz="1220" b="1" dirty="0">
                 <a:solidFill>
                   <a:srgbClr val="0068B7"/>
                 </a:solidFill>
@@ -7913,7 +7919,7 @@
               </a:rPr>
               <a:t>Apply it</a:t>
             </a:r>
-            <a:endParaRPr lang="en-US" sz="1300" dirty="0"/>
+            <a:endParaRPr lang="en-US" sz="1220" dirty="0"/>
           </a:p>
         </p:txBody>
       </p:sp>
@@ -7925,8 +7931,8 @@
         </p:nvSpPr>
         <p:spPr>
           <a:xfrm>
-            <a:off x="7799832" y="4659782"/>
-            <a:ext cx="3145536" cy="899770"/>
+            <a:off x="7708392" y="4828032"/>
+            <a:ext cx="3282696" cy="749808"/>
           </a:xfrm>
           <a:prstGeom prst="rect">
             <a:avLst/>
@@ -7944,7 +7950,7 @@
               <a:buNone/>
             </a:pPr>
             <a:r>
-              <a:rPr lang="en-US" sz="1320" dirty="0">
+              <a:rPr lang="en-US" sz="1220" dirty="0">
                 <a:solidFill>
                   <a:srgbClr val="17364A"/>
                 </a:solidFill>
@@ -7952,9 +7958,9 @@
                 <a:ea typeface="Aptos" pitchFamily="34" charset="-122"/>
                 <a:cs typeface="Aptos" pitchFamily="34" charset="-120"/>
               </a:rPr>
-              <a:t>Connect the concept to public health purpose, responsible use, required safeguards, documentation, and the next action a department should take.</a:t>
-            </a:r>
-            <a:endParaRPr lang="en-US" sz="1320" dirty="0"/>
+              <a:t>Connect the concept to public health purpose, responsible use, required.</a:t>
+            </a:r>
+            <a:endParaRPr lang="en-US" sz="1220" dirty="0"/>
           </a:p>
         </p:txBody>
       </p:sp>
@@ -8245,8 +8251,8 @@
         </p:nvSpPr>
         <p:spPr>
           <a:xfrm>
-            <a:off x="868680" y="1508760"/>
-            <a:ext cx="6309360" cy="4160520"/>
+            <a:off x="822960" y="1463040"/>
+            <a:ext cx="6565392" cy="4343400"/>
           </a:xfrm>
           <a:prstGeom prst="rect">
             <a:avLst/>
@@ -8264,7 +8270,7 @@
               <a:buNone/>
             </a:pPr>
             <a:r>
-              <a:rPr lang="en-US" sz="2100" dirty="0">
+              <a:rPr lang="en-US" sz="1920" dirty="0">
                 <a:solidFill>
                   <a:srgbClr val="003A63"/>
                 </a:solidFill>
@@ -8274,14 +8280,14 @@
               </a:rPr>
               <a:t>• What threshold balances early detection and alert fatigue?</a:t>
             </a:r>
-            <a:endParaRPr lang="en-US" sz="2100" dirty="0"/>
-          </a:p>
-          <a:p>
-            <a:pPr indent="0" marL="0">
-              <a:buNone/>
-            </a:pPr>
-            <a:r>
-              <a:rPr lang="en-US" sz="2100" dirty="0">
+            <a:endParaRPr lang="en-US" sz="1920" dirty="0"/>
+          </a:p>
+          <a:p>
+            <a:pPr indent="0" marL="0">
+              <a:buNone/>
+            </a:pPr>
+            <a:r>
+              <a:rPr lang="en-US" sz="1920" dirty="0">
                 <a:solidFill>
                   <a:srgbClr val="003A63"/>
                 </a:solidFill>
@@ -8291,7 +8297,7 @@
               </a:rPr>
               <a:t>• How will staff document review, decisions, and lessons learned?</a:t>
             </a:r>
-            <a:endParaRPr lang="en-US" sz="2100" dirty="0"/>
+            <a:endParaRPr lang="en-US" sz="1920" dirty="0"/>
           </a:p>
         </p:txBody>
       </p:sp>
@@ -8303,12 +8309,12 @@
         </p:nvSpPr>
         <p:spPr>
           <a:xfrm>
-            <a:off x="7635240" y="1325880"/>
-            <a:ext cx="3474720" cy="1207008"/>
+            <a:off x="7543800" y="1325880"/>
+            <a:ext cx="3611880" cy="1261872"/>
           </a:xfrm>
           <a:prstGeom prst="roundRect">
             <a:avLst>
-              <a:gd name="adj" fmla="val 9091"/>
+              <a:gd name="adj" fmla="val 8696"/>
             </a:avLst>
           </a:prstGeom>
           <a:solidFill>
@@ -8330,8 +8336,8 @@
         </p:nvSpPr>
         <p:spPr>
           <a:xfrm>
-            <a:off x="7799832" y="1472184"/>
-            <a:ext cx="3145536" cy="256032"/>
+            <a:off x="7708392" y="1453896"/>
+            <a:ext cx="3282696" cy="228600"/>
           </a:xfrm>
           <a:prstGeom prst="rect">
             <a:avLst/>
@@ -8347,7 +8353,7 @@
               <a:buNone/>
             </a:pPr>
             <a:r>
-              <a:rPr lang="en-US" sz="1300" b="1" dirty="0">
+              <a:rPr lang="en-US" sz="1220" b="1" dirty="0">
                 <a:solidFill>
                   <a:srgbClr val="0068B7"/>
                 </a:solidFill>
@@ -8357,7 +8363,7 @@
               </a:rPr>
               <a:t>Core concept</a:t>
             </a:r>
-            <a:endParaRPr lang="en-US" sz="1300" dirty="0"/>
+            <a:endParaRPr lang="en-US" sz="1220" dirty="0"/>
           </a:p>
         </p:txBody>
       </p:sp>
@@ -8369,8 +8375,8 @@
         </p:nvSpPr>
         <p:spPr>
           <a:xfrm>
-            <a:off x="7799832" y="1801368"/>
-            <a:ext cx="3145536" cy="640080"/>
+            <a:off x="7708392" y="1764792"/>
+            <a:ext cx="3282696" cy="749808"/>
           </a:xfrm>
           <a:prstGeom prst="rect">
             <a:avLst/>
@@ -8388,7 +8394,7 @@
               <a:buNone/>
             </a:pPr>
             <a:r>
-              <a:rPr lang="en-US" sz="1320" dirty="0">
+              <a:rPr lang="en-US" sz="1220" dirty="0">
                 <a:solidFill>
                   <a:srgbClr val="17364A"/>
                 </a:solidFill>
@@ -8398,7 +8404,7 @@
               </a:rPr>
               <a:t>What threshold balances early detection and alert fatigue?</a:t>
             </a:r>
-            <a:endParaRPr lang="en-US" sz="1320" dirty="0"/>
+            <a:endParaRPr lang="en-US" sz="1220" dirty="0"/>
           </a:p>
         </p:txBody>
       </p:sp>
@@ -8410,12 +8416,12 @@
         </p:nvSpPr>
         <p:spPr>
           <a:xfrm>
-            <a:off x="7635240" y="2670048"/>
-            <a:ext cx="3474720" cy="1377086"/>
+            <a:off x="7543800" y="2724912"/>
+            <a:ext cx="3611880" cy="1527048"/>
           </a:xfrm>
           <a:prstGeom prst="roundRect">
             <a:avLst>
-              <a:gd name="adj" fmla="val 7968"/>
+              <a:gd name="adj" fmla="val 7186"/>
             </a:avLst>
           </a:prstGeom>
           <a:solidFill>
@@ -8437,8 +8443,8 @@
         </p:nvSpPr>
         <p:spPr>
           <a:xfrm>
-            <a:off x="7799832" y="2816352"/>
-            <a:ext cx="3145536" cy="256032"/>
+            <a:off x="7708392" y="2852928"/>
+            <a:ext cx="3282696" cy="228600"/>
           </a:xfrm>
           <a:prstGeom prst="rect">
             <a:avLst/>
@@ -8454,7 +8460,7 @@
               <a:buNone/>
             </a:pPr>
             <a:r>
-              <a:rPr lang="en-US" sz="1300" b="1" dirty="0">
+              <a:rPr lang="en-US" sz="1220" b="1" dirty="0">
                 <a:solidFill>
                   <a:srgbClr val="0068B7"/>
                 </a:solidFill>
@@ -8464,7 +8470,7 @@
               </a:rPr>
               <a:t>Concept checkpoints</a:t>
             </a:r>
-            <a:endParaRPr lang="en-US" sz="1300" dirty="0"/>
+            <a:endParaRPr lang="en-US" sz="1220" dirty="0"/>
           </a:p>
         </p:txBody>
       </p:sp>
@@ -8476,8 +8482,8 @@
         </p:nvSpPr>
         <p:spPr>
           <a:xfrm>
-            <a:off x="7818120" y="3182112"/>
-            <a:ext cx="3090672" cy="718718"/>
+            <a:off x="7726680" y="3182112"/>
+            <a:ext cx="3227832" cy="960120"/>
           </a:xfrm>
           <a:prstGeom prst="rect">
             <a:avLst/>
@@ -8495,7 +8501,7 @@
               <a:buNone/>
             </a:pPr>
             <a:r>
-              <a:rPr lang="en-US" sz="1220" dirty="0">
+              <a:rPr lang="en-US" sz="1140" dirty="0">
                 <a:solidFill>
                   <a:srgbClr val="17364A"/>
                 </a:solidFill>
@@ -8503,16 +8509,16 @@
                 <a:ea typeface="Aptos" pitchFamily="34" charset="-122"/>
                 <a:cs typeface="Aptos" pitchFamily="34" charset="-120"/>
               </a:rPr>
-              <a:t>What threshold balances early detection and alert fatigue?</a:t>
-            </a:r>
-            <a:endParaRPr lang="en-US" sz="1220" dirty="0"/>
-          </a:p>
-          <a:p>
-            <a:pPr indent="0" marL="0">
-              <a:buNone/>
-            </a:pPr>
-            <a:r>
-              <a:rPr lang="en-US" sz="1220" dirty="0">
+              <a:t>What threshold balances early detection and alert.</a:t>
+            </a:r>
+            <a:endParaRPr lang="en-US" sz="1140" dirty="0"/>
+          </a:p>
+          <a:p>
+            <a:pPr indent="0" marL="0">
+              <a:buNone/>
+            </a:pPr>
+            <a:r>
+              <a:rPr lang="en-US" sz="1140" dirty="0">
                 <a:solidFill>
                   <a:srgbClr val="17364A"/>
                 </a:solidFill>
@@ -8520,9 +8526,9 @@
                 <a:ea typeface="Aptos" pitchFamily="34" charset="-122"/>
                 <a:cs typeface="Aptos" pitchFamily="34" charset="-120"/>
               </a:rPr>
-              <a:t>How will staff document review, decisions, and lessons learned?</a:t>
-            </a:r>
-            <a:endParaRPr lang="en-US" sz="1220" dirty="0"/>
+              <a:t>How will staff document review, decisions, and.</a:t>
+            </a:r>
+            <a:endParaRPr lang="en-US" sz="1140" dirty="0"/>
           </a:p>
         </p:txBody>
       </p:sp>
@@ -8534,12 +8540,12 @@
         </p:nvSpPr>
         <p:spPr>
           <a:xfrm>
-            <a:off x="7635240" y="4184294"/>
-            <a:ext cx="3474720" cy="1466698"/>
+            <a:off x="7543800" y="4389120"/>
+            <a:ext cx="3611880" cy="1261872"/>
           </a:xfrm>
           <a:prstGeom prst="roundRect">
             <a:avLst>
-              <a:gd name="adj" fmla="val 7481"/>
+              <a:gd name="adj" fmla="val 8696"/>
             </a:avLst>
           </a:prstGeom>
           <a:solidFill>
@@ -8561,8 +8567,8 @@
         </p:nvSpPr>
         <p:spPr>
           <a:xfrm>
-            <a:off x="7799832" y="4330598"/>
-            <a:ext cx="3145536" cy="256032"/>
+            <a:off x="7708392" y="4517136"/>
+            <a:ext cx="3282696" cy="228600"/>
           </a:xfrm>
           <a:prstGeom prst="rect">
             <a:avLst/>
@@ -8578,7 +8584,7 @@
               <a:buNone/>
             </a:pPr>
             <a:r>
-              <a:rPr lang="en-US" sz="1300" b="1" dirty="0">
+              <a:rPr lang="en-US" sz="1220" b="1" dirty="0">
                 <a:solidFill>
                   <a:srgbClr val="0068B7"/>
                 </a:solidFill>
@@ -8588,7 +8594,7 @@
               </a:rPr>
               <a:t>Apply it</a:t>
             </a:r>
-            <a:endParaRPr lang="en-US" sz="1300" dirty="0"/>
+            <a:endParaRPr lang="en-US" sz="1220" dirty="0"/>
           </a:p>
         </p:txBody>
       </p:sp>
@@ -8600,8 +8606,8 @@
         </p:nvSpPr>
         <p:spPr>
           <a:xfrm>
-            <a:off x="7799832" y="4659782"/>
-            <a:ext cx="3145536" cy="899770"/>
+            <a:off x="7708392" y="4828032"/>
+            <a:ext cx="3282696" cy="749808"/>
           </a:xfrm>
           <a:prstGeom prst="rect">
             <a:avLst/>
@@ -8619,7 +8625,7 @@
               <a:buNone/>
             </a:pPr>
             <a:r>
-              <a:rPr lang="en-US" sz="1320" dirty="0">
+              <a:rPr lang="en-US" sz="1220" dirty="0">
                 <a:solidFill>
                   <a:srgbClr val="17364A"/>
                 </a:solidFill>
@@ -8627,9 +8633,9 @@
                 <a:ea typeface="Aptos" pitchFamily="34" charset="-122"/>
                 <a:cs typeface="Aptos" pitchFamily="34" charset="-120"/>
               </a:rPr>
-              <a:t>Connect the concept to public health purpose, responsible use, required safeguards, documentation, and the next action a department should take.</a:t>
-            </a:r>
-            <a:endParaRPr lang="en-US" sz="1320" dirty="0"/>
+              <a:t>Connect the concept to public health purpose, responsible use, required.</a:t>
+            </a:r>
+            <a:endParaRPr lang="en-US" sz="1220" dirty="0"/>
           </a:p>
         </p:txBody>
       </p:sp>
@@ -8920,8 +8926,8 @@
         </p:nvSpPr>
         <p:spPr>
           <a:xfrm>
-            <a:off x="868680" y="1508760"/>
-            <a:ext cx="6309360" cy="4160520"/>
+            <a:off x="822960" y="1463040"/>
+            <a:ext cx="6565392" cy="4343400"/>
           </a:xfrm>
           <a:prstGeom prst="rect">
             <a:avLst/>
@@ -8939,7 +8945,7 @@
               <a:buNone/>
             </a:pPr>
             <a:r>
-              <a:rPr lang="en-US" sz="2100" dirty="0">
+              <a:rPr lang="en-US" sz="1920" dirty="0">
                 <a:solidFill>
                   <a:srgbClr val="003A63"/>
                 </a:solidFill>
@@ -8949,14 +8955,14 @@
               </a:rPr>
               <a:t>• Create an anomaly detection review plan for one public health data stream.</a:t>
             </a:r>
-            <a:endParaRPr lang="en-US" sz="2100" dirty="0"/>
-          </a:p>
-          <a:p>
-            <a:pPr indent="0" marL="0">
-              <a:buNone/>
-            </a:pPr>
-            <a:r>
-              <a:rPr lang="en-US" sz="2100" dirty="0">
+            <a:endParaRPr lang="en-US" sz="1920" dirty="0"/>
+          </a:p>
+          <a:p>
+            <a:pPr indent="0" marL="0">
+              <a:buNone/>
+            </a:pPr>
+            <a:r>
+              <a:rPr lang="en-US" sz="1920" dirty="0">
                 <a:solidFill>
                   <a:srgbClr val="003A63"/>
                 </a:solidFill>
@@ -8964,16 +8970,16 @@
                 <a:ea typeface="Aptos" pitchFamily="34" charset="-122"/>
                 <a:cs typeface="Aptos" pitchFamily="34" charset="-120"/>
               </a:rPr>
-              <a:t>• Include the monitored indicator, data source, update frequency, baseline approach, known.</a:t>
-            </a:r>
-            <a:endParaRPr lang="en-US" sz="2100" dirty="0"/>
-          </a:p>
-          <a:p>
-            <a:pPr indent="0" marL="0">
-              <a:buNone/>
-            </a:pPr>
-            <a:r>
-              <a:rPr lang="en-US" sz="2100" dirty="0">
+              <a:t>• Include the monitored indicator, data source, update frequency, baseline.</a:t>
+            </a:r>
+            <a:endParaRPr lang="en-US" sz="1920" dirty="0"/>
+          </a:p>
+          <a:p>
+            <a:pPr indent="0" marL="0">
+              <a:buNone/>
+            </a:pPr>
+            <a:r>
+              <a:rPr lang="en-US" sz="1920" dirty="0">
                 <a:solidFill>
                   <a:srgbClr val="003A63"/>
                 </a:solidFill>
@@ -8981,9 +8987,9 @@
                 <a:ea typeface="Aptos" pitchFamily="34" charset="-122"/>
                 <a:cs typeface="Aptos" pitchFamily="34" charset="-120"/>
               </a:rPr>
-              <a:t>• The plan should identify how staff will distinguish statistical anomalies from data quality.</a:t>
-            </a:r>
-            <a:endParaRPr lang="en-US" sz="2100" dirty="0"/>
+              <a:t>• The plan should identify how staff will distinguish statistical anomalies.</a:t>
+            </a:r>
+            <a:endParaRPr lang="en-US" sz="1920" dirty="0"/>
           </a:p>
         </p:txBody>
       </p:sp>
@@ -8995,12 +9001,12 @@
         </p:nvSpPr>
         <p:spPr>
           <a:xfrm>
-            <a:off x="7635240" y="1325880"/>
-            <a:ext cx="3474720" cy="1207008"/>
+            <a:off x="7543800" y="1325880"/>
+            <a:ext cx="3611880" cy="1261872"/>
           </a:xfrm>
           <a:prstGeom prst="roundRect">
             <a:avLst>
-              <a:gd name="adj" fmla="val 9091"/>
+              <a:gd name="adj" fmla="val 8696"/>
             </a:avLst>
           </a:prstGeom>
           <a:solidFill>
@@ -9022,8 +9028,8 @@
         </p:nvSpPr>
         <p:spPr>
           <a:xfrm>
-            <a:off x="7799832" y="1472184"/>
-            <a:ext cx="3145536" cy="256032"/>
+            <a:off x="7708392" y="1453896"/>
+            <a:ext cx="3282696" cy="228600"/>
           </a:xfrm>
           <a:prstGeom prst="rect">
             <a:avLst/>
@@ -9039,7 +9045,7 @@
               <a:buNone/>
             </a:pPr>
             <a:r>
-              <a:rPr lang="en-US" sz="1300" b="1" dirty="0">
+              <a:rPr lang="en-US" sz="1220" b="1" dirty="0">
                 <a:solidFill>
                   <a:srgbClr val="0068B7"/>
                 </a:solidFill>
@@ -9049,7 +9055,7 @@
               </a:rPr>
               <a:t>Practice focus</a:t>
             </a:r>
-            <a:endParaRPr lang="en-US" sz="1300" dirty="0"/>
+            <a:endParaRPr lang="en-US" sz="1220" dirty="0"/>
           </a:p>
         </p:txBody>
       </p:sp>
@@ -9061,8 +9067,8 @@
         </p:nvSpPr>
         <p:spPr>
           <a:xfrm>
-            <a:off x="7799832" y="1801368"/>
-            <a:ext cx="3145536" cy="640080"/>
+            <a:off x="7708392" y="1764792"/>
+            <a:ext cx="3282696" cy="749808"/>
           </a:xfrm>
           <a:prstGeom prst="rect">
             <a:avLst/>
@@ -9080,7 +9086,7 @@
               <a:buNone/>
             </a:pPr>
             <a:r>
-              <a:rPr lang="en-US" sz="1320" dirty="0">
+              <a:rPr lang="en-US" sz="1220" dirty="0">
                 <a:solidFill>
                   <a:srgbClr val="17364A"/>
                 </a:solidFill>
@@ -9090,7 +9096,7 @@
               </a:rPr>
               <a:t>Create an anomaly detection review plan for one public health data stream.</a:t>
             </a:r>
-            <a:endParaRPr lang="en-US" sz="1320" dirty="0"/>
+            <a:endParaRPr lang="en-US" sz="1220" dirty="0"/>
           </a:p>
         </p:txBody>
       </p:sp>
@@ -9102,12 +9108,12 @@
         </p:nvSpPr>
         <p:spPr>
           <a:xfrm>
-            <a:off x="7635240" y="2670048"/>
-            <a:ext cx="3474720" cy="1377086"/>
+            <a:off x="7543800" y="2724912"/>
+            <a:ext cx="3611880" cy="1527048"/>
           </a:xfrm>
           <a:prstGeom prst="roundRect">
             <a:avLst>
-              <a:gd name="adj" fmla="val 7968"/>
+              <a:gd name="adj" fmla="val 7186"/>
             </a:avLst>
           </a:prstGeom>
           <a:solidFill>
@@ -9129,8 +9135,8 @@
         </p:nvSpPr>
         <p:spPr>
           <a:xfrm>
-            <a:off x="7799832" y="2816352"/>
-            <a:ext cx="3145536" cy="256032"/>
+            <a:off x="7708392" y="2852928"/>
+            <a:ext cx="3282696" cy="228600"/>
           </a:xfrm>
           <a:prstGeom prst="rect">
             <a:avLst/>
@@ -9146,7 +9152,7 @@
               <a:buNone/>
             </a:pPr>
             <a:r>
-              <a:rPr lang="en-US" sz="1300" b="1" dirty="0">
+              <a:rPr lang="en-US" sz="1220" b="1" dirty="0">
                 <a:solidFill>
                   <a:srgbClr val="0068B7"/>
                 </a:solidFill>
@@ -9156,7 +9162,7 @@
               </a:rPr>
               <a:t>Concept checkpoints</a:t>
             </a:r>
-            <a:endParaRPr lang="en-US" sz="1300" dirty="0"/>
+            <a:endParaRPr lang="en-US" sz="1220" dirty="0"/>
           </a:p>
         </p:txBody>
       </p:sp>
@@ -9168,8 +9174,8 @@
         </p:nvSpPr>
         <p:spPr>
           <a:xfrm>
-            <a:off x="7818120" y="3182112"/>
-            <a:ext cx="3090672" cy="718718"/>
+            <a:off x="7726680" y="3182112"/>
+            <a:ext cx="3227832" cy="960120"/>
           </a:xfrm>
           <a:prstGeom prst="rect">
             <a:avLst/>
@@ -9187,7 +9193,7 @@
               <a:buNone/>
             </a:pPr>
             <a:r>
-              <a:rPr lang="en-US" sz="1220" dirty="0">
+              <a:rPr lang="en-US" sz="1140" dirty="0">
                 <a:solidFill>
                   <a:srgbClr val="17364A"/>
                 </a:solidFill>
@@ -9195,16 +9201,16 @@
                 <a:ea typeface="Aptos" pitchFamily="34" charset="-122"/>
                 <a:cs typeface="Aptos" pitchFamily="34" charset="-120"/>
               </a:rPr>
-              <a:t>Include the monitored indicator, data source, update frequency,.</a:t>
-            </a:r>
-            <a:endParaRPr lang="en-US" sz="1220" dirty="0"/>
-          </a:p>
-          <a:p>
-            <a:pPr indent="0" marL="0">
-              <a:buNone/>
-            </a:pPr>
-            <a:r>
-              <a:rPr lang="en-US" sz="1220" dirty="0">
+              <a:t>Include the monitored indicator, data source,.</a:t>
+            </a:r>
+            <a:endParaRPr lang="en-US" sz="1140" dirty="0"/>
+          </a:p>
+          <a:p>
+            <a:pPr indent="0" marL="0">
+              <a:buNone/>
+            </a:pPr>
+            <a:r>
+              <a:rPr lang="en-US" sz="1140" dirty="0">
                 <a:solidFill>
                   <a:srgbClr val="17364A"/>
                 </a:solidFill>
@@ -9212,9 +9218,9 @@
                 <a:ea typeface="Aptos" pitchFamily="34" charset="-122"/>
                 <a:cs typeface="Aptos" pitchFamily="34" charset="-120"/>
               </a:rPr>
-              <a:t>The plan should identify how staff will distinguish statistical.</a:t>
-            </a:r>
-            <a:endParaRPr lang="en-US" sz="1220" dirty="0"/>
+              <a:t>The plan should identify how staff will.</a:t>
+            </a:r>
+            <a:endParaRPr lang="en-US" sz="1140" dirty="0"/>
           </a:p>
         </p:txBody>
       </p:sp>
@@ -9226,12 +9232,12 @@
         </p:nvSpPr>
         <p:spPr>
           <a:xfrm>
-            <a:off x="7635240" y="4184294"/>
-            <a:ext cx="3474720" cy="1466698"/>
+            <a:off x="7543800" y="4389120"/>
+            <a:ext cx="3611880" cy="1261872"/>
           </a:xfrm>
           <a:prstGeom prst="roundRect">
             <a:avLst>
-              <a:gd name="adj" fmla="val 7481"/>
+              <a:gd name="adj" fmla="val 8696"/>
             </a:avLst>
           </a:prstGeom>
           <a:solidFill>
@@ -9253,8 +9259,8 @@
         </p:nvSpPr>
         <p:spPr>
           <a:xfrm>
-            <a:off x="7799832" y="4330598"/>
-            <a:ext cx="3145536" cy="256032"/>
+            <a:off x="7708392" y="4517136"/>
+            <a:ext cx="3282696" cy="228600"/>
           </a:xfrm>
           <a:prstGeom prst="rect">
             <a:avLst/>
@@ -9270,7 +9276,7 @@
               <a:buNone/>
             </a:pPr>
             <a:r>
-              <a:rPr lang="en-US" sz="1300" b="1" dirty="0">
+              <a:rPr lang="en-US" sz="1220" b="1" dirty="0">
                 <a:solidFill>
                   <a:srgbClr val="0068B7"/>
                 </a:solidFill>
@@ -9280,7 +9286,7 @@
               </a:rPr>
               <a:t>What to produce</a:t>
             </a:r>
-            <a:endParaRPr lang="en-US" sz="1300" dirty="0"/>
+            <a:endParaRPr lang="en-US" sz="1220" dirty="0"/>
           </a:p>
         </p:txBody>
       </p:sp>
@@ -9292,8 +9298,8 @@
         </p:nvSpPr>
         <p:spPr>
           <a:xfrm>
-            <a:off x="7799832" y="4659782"/>
-            <a:ext cx="3145536" cy="899770"/>
+            <a:off x="7708392" y="4828032"/>
+            <a:ext cx="3282696" cy="749808"/>
           </a:xfrm>
           <a:prstGeom prst="rect">
             <a:avLst/>
@@ -9311,7 +9317,7 @@
               <a:buNone/>
             </a:pPr>
             <a:r>
-              <a:rPr lang="en-US" sz="1320" dirty="0">
+              <a:rPr lang="en-US" sz="1220" dirty="0">
                 <a:solidFill>
                   <a:srgbClr val="17364A"/>
                 </a:solidFill>
@@ -9319,9 +9325,9 @@
                 <a:ea typeface="Aptos" pitchFamily="34" charset="-122"/>
                 <a:cs typeface="Aptos" pitchFamily="34" charset="-120"/>
               </a:rPr>
-              <a:t>Use the assignment to test whether you can explain the concept, apply it to a realistic public health situation, and identify what would need review before the work moves forward.</a:t>
-            </a:r>
-            <a:endParaRPr lang="en-US" sz="1320" dirty="0"/>
+              <a:t>Use the assignment to test whether you can explain the concept, apply it to a.</a:t>
+            </a:r>
+            <a:endParaRPr lang="en-US" sz="1220" dirty="0"/>
           </a:p>
         </p:txBody>
       </p:sp>
@@ -9612,8 +9618,8 @@
         </p:nvSpPr>
         <p:spPr>
           <a:xfrm>
-            <a:off x="868680" y="1508760"/>
-            <a:ext cx="6309360" cy="4160520"/>
+            <a:off x="822960" y="1463040"/>
+            <a:ext cx="6565392" cy="4343400"/>
           </a:xfrm>
           <a:prstGeom prst="rect">
             <a:avLst/>
@@ -9631,7 +9637,7 @@
               <a:buNone/>
             </a:pPr>
             <a:r>
-              <a:rPr lang="en-US" sz="2100" dirty="0">
+              <a:rPr lang="en-US" sz="1920" dirty="0">
                 <a:solidFill>
                   <a:srgbClr val="003A63"/>
                 </a:solidFill>
@@ -9641,14 +9647,14 @@
               </a:rPr>
               <a:t>• Anomaly detection review plan</a:t>
             </a:r>
-            <a:endParaRPr lang="en-US" sz="2100" dirty="0"/>
-          </a:p>
-          <a:p>
-            <a:pPr indent="0" marL="0">
-              <a:buNone/>
-            </a:pPr>
-            <a:r>
-              <a:rPr lang="en-US" sz="2100" dirty="0">
+            <a:endParaRPr lang="en-US" sz="1920" dirty="0"/>
+          </a:p>
+          <a:p>
+            <a:pPr indent="0" marL="0">
+              <a:buNone/>
+            </a:pPr>
+            <a:r>
+              <a:rPr lang="en-US" sz="1920" dirty="0">
                 <a:solidFill>
                   <a:srgbClr val="003A63"/>
                 </a:solidFill>
@@ -9658,14 +9664,14 @@
               </a:rPr>
               <a:t>• Baseline and threshold rationale</a:t>
             </a:r>
-            <a:endParaRPr lang="en-US" sz="2100" dirty="0"/>
-          </a:p>
-          <a:p>
-            <a:pPr indent="0" marL="0">
-              <a:buNone/>
-            </a:pPr>
-            <a:r>
-              <a:rPr lang="en-US" sz="2100" dirty="0">
+            <a:endParaRPr lang="en-US" sz="1920" dirty="0"/>
+          </a:p>
+          <a:p>
+            <a:pPr indent="0" marL="0">
+              <a:buNone/>
+            </a:pPr>
+            <a:r>
+              <a:rPr lang="en-US" sz="1920" dirty="0">
                 <a:solidFill>
                   <a:srgbClr val="003A63"/>
                 </a:solidFill>
@@ -9675,7 +9681,7 @@
               </a:rPr>
               <a:t>• Alert review protocol</a:t>
             </a:r>
-            <a:endParaRPr lang="en-US" sz="2100" dirty="0"/>
+            <a:endParaRPr lang="en-US" sz="1920" dirty="0"/>
           </a:p>
         </p:txBody>
       </p:sp>
@@ -9687,12 +9693,12 @@
         </p:nvSpPr>
         <p:spPr>
           <a:xfrm>
-            <a:off x="7635240" y="1325880"/>
-            <a:ext cx="3474720" cy="1207008"/>
+            <a:off x="7543800" y="1325880"/>
+            <a:ext cx="3611880" cy="1261872"/>
           </a:xfrm>
           <a:prstGeom prst="roundRect">
             <a:avLst>
-              <a:gd name="adj" fmla="val 9091"/>
+              <a:gd name="adj" fmla="val 8696"/>
             </a:avLst>
           </a:prstGeom>
           <a:solidFill>
@@ -9714,8 +9720,8 @@
         </p:nvSpPr>
         <p:spPr>
           <a:xfrm>
-            <a:off x="7799832" y="1472184"/>
-            <a:ext cx="3145536" cy="256032"/>
+            <a:off x="7708392" y="1453896"/>
+            <a:ext cx="3282696" cy="228600"/>
           </a:xfrm>
           <a:prstGeom prst="rect">
             <a:avLst/>
@@ -9731,7 +9737,7 @@
               <a:buNone/>
             </a:pPr>
             <a:r>
-              <a:rPr lang="en-US" sz="1300" b="1" dirty="0">
+              <a:rPr lang="en-US" sz="1220" b="1" dirty="0">
                 <a:solidFill>
                   <a:srgbClr val="0068B7"/>
                 </a:solidFill>
@@ -9741,7 +9747,7 @@
               </a:rPr>
               <a:t>Core concept</a:t>
             </a:r>
-            <a:endParaRPr lang="en-US" sz="1300" dirty="0"/>
+            <a:endParaRPr lang="en-US" sz="1220" dirty="0"/>
           </a:p>
         </p:txBody>
       </p:sp>
@@ -9753,8 +9759,8 @@
         </p:nvSpPr>
         <p:spPr>
           <a:xfrm>
-            <a:off x="7799832" y="1801368"/>
-            <a:ext cx="3145536" cy="640080"/>
+            <a:off x="7708392" y="1764792"/>
+            <a:ext cx="3282696" cy="749808"/>
           </a:xfrm>
           <a:prstGeom prst="rect">
             <a:avLst/>
@@ -9772,7 +9778,7 @@
               <a:buNone/>
             </a:pPr>
             <a:r>
-              <a:rPr lang="en-US" sz="1320" dirty="0">
+              <a:rPr lang="en-US" sz="1220" dirty="0">
                 <a:solidFill>
                   <a:srgbClr val="17364A"/>
                 </a:solidFill>
@@ -9782,7 +9788,7 @@
               </a:rPr>
               <a:t>Anomaly detection review plan</a:t>
             </a:r>
-            <a:endParaRPr lang="en-US" sz="1320" dirty="0"/>
+            <a:endParaRPr lang="en-US" sz="1220" dirty="0"/>
           </a:p>
         </p:txBody>
       </p:sp>
@@ -9794,12 +9800,12 @@
         </p:nvSpPr>
         <p:spPr>
           <a:xfrm>
-            <a:off x="7635240" y="2670048"/>
-            <a:ext cx="3474720" cy="1377086"/>
+            <a:off x="7543800" y="2724912"/>
+            <a:ext cx="3611880" cy="1527048"/>
           </a:xfrm>
           <a:prstGeom prst="roundRect">
             <a:avLst>
-              <a:gd name="adj" fmla="val 7968"/>
+              <a:gd name="adj" fmla="val 7186"/>
             </a:avLst>
           </a:prstGeom>
           <a:solidFill>
@@ -9821,8 +9827,8 @@
         </p:nvSpPr>
         <p:spPr>
           <a:xfrm>
-            <a:off x="7799832" y="2816352"/>
-            <a:ext cx="3145536" cy="256032"/>
+            <a:off x="7708392" y="2852928"/>
+            <a:ext cx="3282696" cy="228600"/>
           </a:xfrm>
           <a:prstGeom prst="rect">
             <a:avLst/>
@@ -9838,7 +9844,7 @@
               <a:buNone/>
             </a:pPr>
             <a:r>
-              <a:rPr lang="en-US" sz="1300" b="1" dirty="0">
+              <a:rPr lang="en-US" sz="1220" b="1" dirty="0">
                 <a:solidFill>
                   <a:srgbClr val="0068B7"/>
                 </a:solidFill>
@@ -9848,7 +9854,7 @@
               </a:rPr>
               <a:t>Concept checkpoints</a:t>
             </a:r>
-            <a:endParaRPr lang="en-US" sz="1300" dirty="0"/>
+            <a:endParaRPr lang="en-US" sz="1220" dirty="0"/>
           </a:p>
         </p:txBody>
       </p:sp>
@@ -9860,8 +9866,8 @@
         </p:nvSpPr>
         <p:spPr>
           <a:xfrm>
-            <a:off x="7818120" y="3182112"/>
-            <a:ext cx="3090672" cy="718718"/>
+            <a:off x="7726680" y="3182112"/>
+            <a:ext cx="3227832" cy="960120"/>
           </a:xfrm>
           <a:prstGeom prst="rect">
             <a:avLst/>
@@ -9879,7 +9885,7 @@
               <a:buNone/>
             </a:pPr>
             <a:r>
-              <a:rPr lang="en-US" sz="1220" dirty="0">
+              <a:rPr lang="en-US" sz="1140" dirty="0">
                 <a:solidFill>
                   <a:srgbClr val="17364A"/>
                 </a:solidFill>
@@ -9889,14 +9895,14 @@
               </a:rPr>
               <a:t>Anomaly detection review plan</a:t>
             </a:r>
-            <a:endParaRPr lang="en-US" sz="1220" dirty="0"/>
-          </a:p>
-          <a:p>
-            <a:pPr indent="0" marL="0">
-              <a:buNone/>
-            </a:pPr>
-            <a:r>
-              <a:rPr lang="en-US" sz="1220" dirty="0">
+            <a:endParaRPr lang="en-US" sz="1140" dirty="0"/>
+          </a:p>
+          <a:p>
+            <a:pPr indent="0" marL="0">
+              <a:buNone/>
+            </a:pPr>
+            <a:r>
+              <a:rPr lang="en-US" sz="1140" dirty="0">
                 <a:solidFill>
                   <a:srgbClr val="17364A"/>
                 </a:solidFill>
@@ -9906,14 +9912,14 @@
               </a:rPr>
               <a:t>Baseline and threshold rationale</a:t>
             </a:r>
-            <a:endParaRPr lang="en-US" sz="1220" dirty="0"/>
-          </a:p>
-          <a:p>
-            <a:pPr indent="0" marL="0">
-              <a:buNone/>
-            </a:pPr>
-            <a:r>
-              <a:rPr lang="en-US" sz="1220" dirty="0">
+            <a:endParaRPr lang="en-US" sz="1140" dirty="0"/>
+          </a:p>
+          <a:p>
+            <a:pPr indent="0" marL="0">
+              <a:buNone/>
+            </a:pPr>
+            <a:r>
+              <a:rPr lang="en-US" sz="1140" dirty="0">
                 <a:solidFill>
                   <a:srgbClr val="17364A"/>
                 </a:solidFill>
@@ -9923,7 +9929,7 @@
               </a:rPr>
               <a:t>Alert review protocol</a:t>
             </a:r>
-            <a:endParaRPr lang="en-US" sz="1220" dirty="0"/>
+            <a:endParaRPr lang="en-US" sz="1140" dirty="0"/>
           </a:p>
         </p:txBody>
       </p:sp>
@@ -9935,12 +9941,12 @@
         </p:nvSpPr>
         <p:spPr>
           <a:xfrm>
-            <a:off x="7635240" y="4184294"/>
-            <a:ext cx="3474720" cy="1466698"/>
+            <a:off x="7543800" y="4389120"/>
+            <a:ext cx="3611880" cy="1261872"/>
           </a:xfrm>
           <a:prstGeom prst="roundRect">
             <a:avLst>
-              <a:gd name="adj" fmla="val 7481"/>
+              <a:gd name="adj" fmla="val 8696"/>
             </a:avLst>
           </a:prstGeom>
           <a:solidFill>
@@ -9962,8 +9968,8 @@
         </p:nvSpPr>
         <p:spPr>
           <a:xfrm>
-            <a:off x="7799832" y="4330598"/>
-            <a:ext cx="3145536" cy="256032"/>
+            <a:off x="7708392" y="4517136"/>
+            <a:ext cx="3282696" cy="228600"/>
           </a:xfrm>
           <a:prstGeom prst="rect">
             <a:avLst/>
@@ -9979,7 +9985,7 @@
               <a:buNone/>
             </a:pPr>
             <a:r>
-              <a:rPr lang="en-US" sz="1300" b="1" dirty="0">
+              <a:rPr lang="en-US" sz="1220" b="1" dirty="0">
                 <a:solidFill>
                   <a:srgbClr val="0068B7"/>
                 </a:solidFill>
@@ -9989,7 +9995,7 @@
               </a:rPr>
               <a:t>Apply it</a:t>
             </a:r>
-            <a:endParaRPr lang="en-US" sz="1300" dirty="0"/>
+            <a:endParaRPr lang="en-US" sz="1220" dirty="0"/>
           </a:p>
         </p:txBody>
       </p:sp>
@@ -10001,8 +10007,8 @@
         </p:nvSpPr>
         <p:spPr>
           <a:xfrm>
-            <a:off x="7799832" y="4659782"/>
-            <a:ext cx="3145536" cy="899770"/>
+            <a:off x="7708392" y="4828032"/>
+            <a:ext cx="3282696" cy="749808"/>
           </a:xfrm>
           <a:prstGeom prst="rect">
             <a:avLst/>
@@ -10020,7 +10026,7 @@
               <a:buNone/>
             </a:pPr>
             <a:r>
-              <a:rPr lang="en-US" sz="1320" dirty="0">
+              <a:rPr lang="en-US" sz="1220" dirty="0">
                 <a:solidFill>
                   <a:srgbClr val="17364A"/>
                 </a:solidFill>
@@ -10028,9 +10034,9 @@
                 <a:ea typeface="Aptos" pitchFamily="34" charset="-122"/>
                 <a:cs typeface="Aptos" pitchFamily="34" charset="-120"/>
               </a:rPr>
-              <a:t>Connect the concept to public health purpose, responsible use, required safeguards, documentation, and the next action a department should take.</a:t>
-            </a:r>
-            <a:endParaRPr lang="en-US" sz="1320" dirty="0"/>
+              <a:t>Connect the concept to public health purpose, responsible use, required.</a:t>
+            </a:r>
+            <a:endParaRPr lang="en-US" sz="1220" dirty="0"/>
           </a:p>
         </p:txBody>
       </p:sp>
@@ -10321,8 +10327,8 @@
         </p:nvSpPr>
         <p:spPr>
           <a:xfrm>
-            <a:off x="868680" y="1508760"/>
-            <a:ext cx="6309360" cy="4160520"/>
+            <a:off x="822960" y="1463040"/>
+            <a:ext cx="6565392" cy="4343400"/>
           </a:xfrm>
           <a:prstGeom prst="rect">
             <a:avLst/>
@@ -10340,7 +10346,7 @@
               <a:buNone/>
             </a:pPr>
             <a:r>
-              <a:rPr lang="en-US" sz="2100" dirty="0">
+              <a:rPr lang="en-US" sz="1920" dirty="0">
                 <a:solidFill>
                   <a:srgbClr val="003A63"/>
                 </a:solidFill>
@@ -10350,7 +10356,7 @@
               </a:rPr>
               <a:t>• Signal documentation template</a:t>
             </a:r>
-            <a:endParaRPr lang="en-US" sz="2100" dirty="0"/>
+            <a:endParaRPr lang="en-US" sz="1920" dirty="0"/>
           </a:p>
         </p:txBody>
       </p:sp>
@@ -10362,12 +10368,12 @@
         </p:nvSpPr>
         <p:spPr>
           <a:xfrm>
-            <a:off x="7635240" y="1325880"/>
-            <a:ext cx="3474720" cy="1207008"/>
+            <a:off x="7543800" y="1325880"/>
+            <a:ext cx="3611880" cy="1261872"/>
           </a:xfrm>
           <a:prstGeom prst="roundRect">
             <a:avLst>
-              <a:gd name="adj" fmla="val 9091"/>
+              <a:gd name="adj" fmla="val 8696"/>
             </a:avLst>
           </a:prstGeom>
           <a:solidFill>
@@ -10389,8 +10395,8 @@
         </p:nvSpPr>
         <p:spPr>
           <a:xfrm>
-            <a:off x="7799832" y="1472184"/>
-            <a:ext cx="3145536" cy="256032"/>
+            <a:off x="7708392" y="1453896"/>
+            <a:ext cx="3282696" cy="228600"/>
           </a:xfrm>
           <a:prstGeom prst="rect">
             <a:avLst/>
@@ -10406,7 +10412,7 @@
               <a:buNone/>
             </a:pPr>
             <a:r>
-              <a:rPr lang="en-US" sz="1300" b="1" dirty="0">
+              <a:rPr lang="en-US" sz="1220" b="1" dirty="0">
                 <a:solidFill>
                   <a:srgbClr val="0068B7"/>
                 </a:solidFill>
@@ -10416,7 +10422,7 @@
               </a:rPr>
               <a:t>Core concept</a:t>
             </a:r>
-            <a:endParaRPr lang="en-US" sz="1300" dirty="0"/>
+            <a:endParaRPr lang="en-US" sz="1220" dirty="0"/>
           </a:p>
         </p:txBody>
       </p:sp>
@@ -10428,8 +10434,8 @@
         </p:nvSpPr>
         <p:spPr>
           <a:xfrm>
-            <a:off x="7799832" y="1801368"/>
-            <a:ext cx="3145536" cy="640080"/>
+            <a:off x="7708392" y="1764792"/>
+            <a:ext cx="3282696" cy="749808"/>
           </a:xfrm>
           <a:prstGeom prst="rect">
             <a:avLst/>
@@ -10447,7 +10453,7 @@
               <a:buNone/>
             </a:pPr>
             <a:r>
-              <a:rPr lang="en-US" sz="1320" dirty="0">
+              <a:rPr lang="en-US" sz="1220" dirty="0">
                 <a:solidFill>
                   <a:srgbClr val="17364A"/>
                 </a:solidFill>
@@ -10457,7 +10463,7 @@
               </a:rPr>
               <a:t>Signal documentation template</a:t>
             </a:r>
-            <a:endParaRPr lang="en-US" sz="1320" dirty="0"/>
+            <a:endParaRPr lang="en-US" sz="1220" dirty="0"/>
           </a:p>
         </p:txBody>
       </p:sp>
@@ -10469,12 +10475,12 @@
         </p:nvSpPr>
         <p:spPr>
           <a:xfrm>
-            <a:off x="7635240" y="2670048"/>
-            <a:ext cx="3474720" cy="1377086"/>
+            <a:off x="7543800" y="2724912"/>
+            <a:ext cx="3611880" cy="1527048"/>
           </a:xfrm>
           <a:prstGeom prst="roundRect">
             <a:avLst>
-              <a:gd name="adj" fmla="val 7968"/>
+              <a:gd name="adj" fmla="val 7186"/>
             </a:avLst>
           </a:prstGeom>
           <a:solidFill>
@@ -10496,8 +10502,8 @@
         </p:nvSpPr>
         <p:spPr>
           <a:xfrm>
-            <a:off x="7799832" y="2816352"/>
-            <a:ext cx="3145536" cy="256032"/>
+            <a:off x="7708392" y="2852928"/>
+            <a:ext cx="3282696" cy="228600"/>
           </a:xfrm>
           <a:prstGeom prst="rect">
             <a:avLst/>
@@ -10513,7 +10519,7 @@
               <a:buNone/>
             </a:pPr>
             <a:r>
-              <a:rPr lang="en-US" sz="1300" b="1" dirty="0">
+              <a:rPr lang="en-US" sz="1220" b="1" dirty="0">
                 <a:solidFill>
                   <a:srgbClr val="0068B7"/>
                 </a:solidFill>
@@ -10523,7 +10529,7 @@
               </a:rPr>
               <a:t>Concept checkpoints</a:t>
             </a:r>
-            <a:endParaRPr lang="en-US" sz="1300" dirty="0"/>
+            <a:endParaRPr lang="en-US" sz="1220" dirty="0"/>
           </a:p>
         </p:txBody>
       </p:sp>
@@ -10535,8 +10541,8 @@
         </p:nvSpPr>
         <p:spPr>
           <a:xfrm>
-            <a:off x="7818120" y="3182112"/>
-            <a:ext cx="3090672" cy="718718"/>
+            <a:off x="7726680" y="3182112"/>
+            <a:ext cx="3227832" cy="960120"/>
           </a:xfrm>
           <a:prstGeom prst="rect">
             <a:avLst/>
@@ -10554,7 +10560,7 @@
               <a:buNone/>
             </a:pPr>
             <a:r>
-              <a:rPr lang="en-US" sz="1220" dirty="0">
+              <a:rPr lang="en-US" sz="1140" dirty="0">
                 <a:solidFill>
                   <a:srgbClr val="17364A"/>
                 </a:solidFill>
@@ -10564,7 +10570,7 @@
               </a:rPr>
               <a:t>Signal documentation template</a:t>
             </a:r>
-            <a:endParaRPr lang="en-US" sz="1220" dirty="0"/>
+            <a:endParaRPr lang="en-US" sz="1140" dirty="0"/>
           </a:p>
         </p:txBody>
       </p:sp>
@@ -10576,12 +10582,12 @@
         </p:nvSpPr>
         <p:spPr>
           <a:xfrm>
-            <a:off x="7635240" y="4184294"/>
-            <a:ext cx="3474720" cy="1466698"/>
+            <a:off x="7543800" y="4389120"/>
+            <a:ext cx="3611880" cy="1261872"/>
           </a:xfrm>
           <a:prstGeom prst="roundRect">
             <a:avLst>
-              <a:gd name="adj" fmla="val 7481"/>
+              <a:gd name="adj" fmla="val 8696"/>
             </a:avLst>
           </a:prstGeom>
           <a:solidFill>
@@ -10603,8 +10609,8 @@
         </p:nvSpPr>
         <p:spPr>
           <a:xfrm>
-            <a:off x="7799832" y="4330598"/>
-            <a:ext cx="3145536" cy="256032"/>
+            <a:off x="7708392" y="4517136"/>
+            <a:ext cx="3282696" cy="228600"/>
           </a:xfrm>
           <a:prstGeom prst="rect">
             <a:avLst/>
@@ -10620,7 +10626,7 @@
               <a:buNone/>
             </a:pPr>
             <a:r>
-              <a:rPr lang="en-US" sz="1300" b="1" dirty="0">
+              <a:rPr lang="en-US" sz="1220" b="1" dirty="0">
                 <a:solidFill>
                   <a:srgbClr val="0068B7"/>
                 </a:solidFill>
@@ -10630,7 +10636,7 @@
               </a:rPr>
               <a:t>Apply it</a:t>
             </a:r>
-            <a:endParaRPr lang="en-US" sz="1300" dirty="0"/>
+            <a:endParaRPr lang="en-US" sz="1220" dirty="0"/>
           </a:p>
         </p:txBody>
       </p:sp>
@@ -10642,8 +10648,8 @@
         </p:nvSpPr>
         <p:spPr>
           <a:xfrm>
-            <a:off x="7799832" y="4659782"/>
-            <a:ext cx="3145536" cy="899770"/>
+            <a:off x="7708392" y="4828032"/>
+            <a:ext cx="3282696" cy="749808"/>
           </a:xfrm>
           <a:prstGeom prst="rect">
             <a:avLst/>
@@ -10661,7 +10667,7 @@
               <a:buNone/>
             </a:pPr>
             <a:r>
-              <a:rPr lang="en-US" sz="1320" dirty="0">
+              <a:rPr lang="en-US" sz="1220" dirty="0">
                 <a:solidFill>
                   <a:srgbClr val="17364A"/>
                 </a:solidFill>
@@ -10669,9 +10675,9 @@
                 <a:ea typeface="Aptos" pitchFamily="34" charset="-122"/>
                 <a:cs typeface="Aptos" pitchFamily="34" charset="-120"/>
               </a:rPr>
-              <a:t>Connect the concept to public health purpose, responsible use, required safeguards, documentation, and the next action a department should take.</a:t>
-            </a:r>
-            <a:endParaRPr lang="en-US" sz="1320" dirty="0"/>
+              <a:t>Connect the concept to public health purpose, responsible use, required.</a:t>
+            </a:r>
+            <a:endParaRPr lang="en-US" sz="1220" dirty="0"/>
           </a:p>
         </p:txBody>
       </p:sp>
@@ -11006,7 +11012,7 @@
                 <a:ea typeface="Aptos" pitchFamily="34" charset="-122"/>
                 <a:cs typeface="Aptos" pitchFamily="34" charset="-120"/>
               </a:rPr>
-              <a:t>• In public health, time patterns are central to surveillance, outbreak detection, syndromic.</a:t>
+              <a:t>• In public health, time patterns are central to surveillance, outbreak.</a:t>
             </a:r>
             <a:endParaRPr lang="en-US" sz="2100" dirty="0"/>
           </a:p>
@@ -11023,7 +11029,7 @@
                 <a:ea typeface="Aptos" pitchFamily="34" charset="-122"/>
                 <a:cs typeface="Aptos" pitchFamily="34" charset="-120"/>
               </a:rPr>
-              <a:t>• AI-supported anomaly detection can help identify unusual increases, decreases, or pattern.</a:t>
+              <a:t>• AI-supported anomaly detection can help identify unusual increases,.</a:t>
             </a:r>
             <a:endParaRPr lang="en-US" sz="2100" dirty="0"/>
           </a:p>
@@ -11064,8 +11070,8 @@
         </p:nvSpPr>
         <p:spPr>
           <a:xfrm>
-            <a:off x="8074152" y="1563624"/>
-            <a:ext cx="2825496" cy="256032"/>
+            <a:off x="8074152" y="1545336"/>
+            <a:ext cx="2825496" cy="228600"/>
           </a:xfrm>
           <a:prstGeom prst="rect">
             <a:avLst/>
@@ -11081,7 +11087,7 @@
               <a:buNone/>
             </a:pPr>
             <a:r>
-              <a:rPr lang="en-US" sz="1300" b="1" dirty="0">
+              <a:rPr lang="en-US" sz="1220" b="1" dirty="0">
                 <a:solidFill>
                   <a:srgbClr val="0068B7"/>
                 </a:solidFill>
@@ -11091,7 +11097,7 @@
               </a:rPr>
               <a:t>Module details</a:t>
             </a:r>
-            <a:endParaRPr lang="en-US" sz="1300" dirty="0"/>
+            <a:endParaRPr lang="en-US" sz="1220" dirty="0"/>
           </a:p>
         </p:txBody>
       </p:sp>
@@ -11103,8 +11109,8 @@
         </p:nvSpPr>
         <p:spPr>
           <a:xfrm>
-            <a:off x="8074152" y="1892808"/>
-            <a:ext cx="2825496" cy="1353312"/>
+            <a:off x="8074152" y="1856232"/>
+            <a:ext cx="2825496" cy="1408176"/>
           </a:xfrm>
           <a:prstGeom prst="rect">
             <a:avLst/>
@@ -11122,7 +11128,7 @@
               <a:buNone/>
             </a:pPr>
             <a:r>
-              <a:rPr lang="en-US" sz="1320" dirty="0">
+              <a:rPr lang="en-US" sz="1220" dirty="0">
                 <a:solidFill>
                   <a:srgbClr val="17364A"/>
                 </a:solidFill>
@@ -11130,9 +11136,9 @@
                 <a:ea typeface="Aptos" pitchFamily="34" charset="-122"/>
                 <a:cs typeface="Aptos" pitchFamily="34" charset="-120"/>
               </a:rPr>
-              <a:t>Level: applied/foundational Primary track: Analytics and Modeling Track Appears in tracks: analytics-modeling</a:t>
-            </a:r>
-            <a:endParaRPr lang="en-US" sz="1320" dirty="0"/>
+              <a:t>Level: applied/foundational Primary track: Analytics and Modeling Track Appears.</a:t>
+            </a:r>
+            <a:endParaRPr lang="en-US" sz="1220" dirty="0"/>
           </a:p>
         </p:txBody>
       </p:sp>
@@ -11171,8 +11177,8 @@
         </p:nvSpPr>
         <p:spPr>
           <a:xfrm>
-            <a:off x="8074152" y="3822192"/>
-            <a:ext cx="2825496" cy="256032"/>
+            <a:off x="8074152" y="3803904"/>
+            <a:ext cx="2825496" cy="228600"/>
           </a:xfrm>
           <a:prstGeom prst="rect">
             <a:avLst/>
@@ -11188,7 +11194,7 @@
               <a:buNone/>
             </a:pPr>
             <a:r>
-              <a:rPr lang="en-US" sz="1300" b="1" dirty="0">
+              <a:rPr lang="en-US" sz="1220" b="1" dirty="0">
                 <a:solidFill>
                   <a:srgbClr val="0068B7"/>
                 </a:solidFill>
@@ -11198,7 +11204,7 @@
               </a:rPr>
               <a:t>Learning sequence</a:t>
             </a:r>
-            <a:endParaRPr lang="en-US" sz="1300" dirty="0"/>
+            <a:endParaRPr lang="en-US" sz="1220" dirty="0"/>
           </a:p>
         </p:txBody>
       </p:sp>
@@ -11210,8 +11216,8 @@
         </p:nvSpPr>
         <p:spPr>
           <a:xfrm>
-            <a:off x="8092440" y="4187952"/>
-            <a:ext cx="2770632" cy="1033272"/>
+            <a:off x="8092440" y="4133088"/>
+            <a:ext cx="2770632" cy="1124712"/>
           </a:xfrm>
           <a:prstGeom prst="rect">
             <a:avLst/>
@@ -11229,7 +11235,7 @@
               <a:buNone/>
             </a:pPr>
             <a:r>
-              <a:rPr lang="en-US" sz="1220" dirty="0">
+              <a:rPr lang="en-US" sz="1140" dirty="0">
                 <a:solidFill>
                   <a:srgbClr val="17364A"/>
                 </a:solidFill>
@@ -11239,14 +11245,14 @@
               </a:rPr>
               <a:t>Read the module for shared vocabulary and context.</a:t>
             </a:r>
-            <a:endParaRPr lang="en-US" sz="1220" dirty="0"/>
-          </a:p>
-          <a:p>
-            <a:pPr indent="0" marL="0">
-              <a:buNone/>
-            </a:pPr>
-            <a:r>
-              <a:rPr lang="en-US" sz="1220" dirty="0">
+            <a:endParaRPr lang="en-US" sz="1140" dirty="0"/>
+          </a:p>
+          <a:p>
+            <a:pPr indent="0" marL="0">
+              <a:buNone/>
+            </a:pPr>
+            <a:r>
+              <a:rPr lang="en-US" sz="1140" dirty="0">
                 <a:solidFill>
                   <a:srgbClr val="17364A"/>
                 </a:solidFill>
@@ -11254,16 +11260,16 @@
                 <a:ea typeface="Aptos" pitchFamily="34" charset="-122"/>
                 <a:cs typeface="Aptos" pitchFamily="34" charset="-120"/>
               </a:rPr>
-              <a:t>Complete the practical exercise to apply the concept.</a:t>
-            </a:r>
-            <a:endParaRPr lang="en-US" sz="1220" dirty="0"/>
-          </a:p>
-          <a:p>
-            <a:pPr indent="0" marL="0">
-              <a:buNone/>
-            </a:pPr>
-            <a:r>
-              <a:rPr lang="en-US" sz="1220" dirty="0">
+              <a:t>Complete the practical exercise to apply the.</a:t>
+            </a:r>
+            <a:endParaRPr lang="en-US" sz="1140" dirty="0"/>
+          </a:p>
+          <a:p>
+            <a:pPr indent="0" marL="0">
+              <a:buNone/>
+            </a:pPr>
+            <a:r>
+              <a:rPr lang="en-US" sz="1140" dirty="0">
                 <a:solidFill>
                   <a:srgbClr val="17364A"/>
                 </a:solidFill>
@@ -11273,7 +11279,7 @@
               </a:rPr>
               <a:t>Use the notes and references for deeper review.</a:t>
             </a:r>
-            <a:endParaRPr lang="en-US" sz="1220" dirty="0"/>
+            <a:endParaRPr lang="en-US" sz="1140" dirty="0"/>
           </a:p>
         </p:txBody>
       </p:sp>
@@ -11564,8 +11570,8 @@
         </p:nvSpPr>
         <p:spPr>
           <a:xfrm>
-            <a:off x="868680" y="1508760"/>
-            <a:ext cx="6309360" cy="4160520"/>
+            <a:off x="822960" y="1463040"/>
+            <a:ext cx="6565392" cy="4343400"/>
           </a:xfrm>
           <a:prstGeom prst="rect">
             <a:avLst/>
@@ -11583,7 +11589,7 @@
               <a:buNone/>
             </a:pPr>
             <a:r>
-              <a:rPr lang="en-US" sz="2100" dirty="0">
+              <a:rPr lang="en-US" sz="1920" dirty="0">
                 <a:solidFill>
                   <a:srgbClr val="003A63"/>
                 </a:solidFill>
@@ -11593,14 +11599,14 @@
               </a:rPr>
               <a:t>• Anomaly detection review plan</a:t>
             </a:r>
-            <a:endParaRPr lang="en-US" sz="2100" dirty="0"/>
-          </a:p>
-          <a:p>
-            <a:pPr indent="0" marL="0">
-              <a:buNone/>
-            </a:pPr>
-            <a:r>
-              <a:rPr lang="en-US" sz="2100" dirty="0">
+            <a:endParaRPr lang="en-US" sz="1920" dirty="0"/>
+          </a:p>
+          <a:p>
+            <a:pPr indent="0" marL="0">
+              <a:buNone/>
+            </a:pPr>
+            <a:r>
+              <a:rPr lang="en-US" sz="1920" dirty="0">
                 <a:solidFill>
                   <a:srgbClr val="003A63"/>
                 </a:solidFill>
@@ -11610,14 +11616,14 @@
               </a:rPr>
               <a:t>• Baseline and threshold rationale</a:t>
             </a:r>
-            <a:endParaRPr lang="en-US" sz="2100" dirty="0"/>
-          </a:p>
-          <a:p>
-            <a:pPr indent="0" marL="0">
-              <a:buNone/>
-            </a:pPr>
-            <a:r>
-              <a:rPr lang="en-US" sz="2100" dirty="0">
+            <a:endParaRPr lang="en-US" sz="1920" dirty="0"/>
+          </a:p>
+          <a:p>
+            <a:pPr indent="0" marL="0">
+              <a:buNone/>
+            </a:pPr>
+            <a:r>
+              <a:rPr lang="en-US" sz="1920" dirty="0">
                 <a:solidFill>
                   <a:srgbClr val="003A63"/>
                 </a:solidFill>
@@ -11627,7 +11633,7 @@
               </a:rPr>
               <a:t>• Alert review protocol</a:t>
             </a:r>
-            <a:endParaRPr lang="en-US" sz="2100" dirty="0"/>
+            <a:endParaRPr lang="en-US" sz="1920" dirty="0"/>
           </a:p>
         </p:txBody>
       </p:sp>
@@ -11639,12 +11645,12 @@
         </p:nvSpPr>
         <p:spPr>
           <a:xfrm>
-            <a:off x="7635240" y="1325880"/>
-            <a:ext cx="3474720" cy="1207008"/>
+            <a:off x="7543800" y="1325880"/>
+            <a:ext cx="3611880" cy="1261872"/>
           </a:xfrm>
           <a:prstGeom prst="roundRect">
             <a:avLst>
-              <a:gd name="adj" fmla="val 9091"/>
+              <a:gd name="adj" fmla="val 8696"/>
             </a:avLst>
           </a:prstGeom>
           <a:solidFill>
@@ -11666,8 +11672,8 @@
         </p:nvSpPr>
         <p:spPr>
           <a:xfrm>
-            <a:off x="7799832" y="1472184"/>
-            <a:ext cx="3145536" cy="256032"/>
+            <a:off x="7708392" y="1453896"/>
+            <a:ext cx="3282696" cy="228600"/>
           </a:xfrm>
           <a:prstGeom prst="rect">
             <a:avLst/>
@@ -11683,7 +11689,7 @@
               <a:buNone/>
             </a:pPr>
             <a:r>
-              <a:rPr lang="en-US" sz="1300" b="1" dirty="0">
+              <a:rPr lang="en-US" sz="1220" b="1" dirty="0">
                 <a:solidFill>
                   <a:srgbClr val="0068B7"/>
                 </a:solidFill>
@@ -11693,7 +11699,7 @@
               </a:rPr>
               <a:t>Practice focus</a:t>
             </a:r>
-            <a:endParaRPr lang="en-US" sz="1300" dirty="0"/>
+            <a:endParaRPr lang="en-US" sz="1220" dirty="0"/>
           </a:p>
         </p:txBody>
       </p:sp>
@@ -11705,8 +11711,8 @@
         </p:nvSpPr>
         <p:spPr>
           <a:xfrm>
-            <a:off x="7799832" y="1801368"/>
-            <a:ext cx="3145536" cy="640080"/>
+            <a:off x="7708392" y="1764792"/>
+            <a:ext cx="3282696" cy="749808"/>
           </a:xfrm>
           <a:prstGeom prst="rect">
             <a:avLst/>
@@ -11724,7 +11730,7 @@
               <a:buNone/>
             </a:pPr>
             <a:r>
-              <a:rPr lang="en-US" sz="1320" dirty="0">
+              <a:rPr lang="en-US" sz="1220" dirty="0">
                 <a:solidFill>
                   <a:srgbClr val="17364A"/>
                 </a:solidFill>
@@ -11734,7 +11740,7 @@
               </a:rPr>
               <a:t>Anomaly detection review plan</a:t>
             </a:r>
-            <a:endParaRPr lang="en-US" sz="1320" dirty="0"/>
+            <a:endParaRPr lang="en-US" sz="1220" dirty="0"/>
           </a:p>
         </p:txBody>
       </p:sp>
@@ -11746,12 +11752,12 @@
         </p:nvSpPr>
         <p:spPr>
           <a:xfrm>
-            <a:off x="7635240" y="2670048"/>
-            <a:ext cx="3474720" cy="1377086"/>
+            <a:off x="7543800" y="2724912"/>
+            <a:ext cx="3611880" cy="1527048"/>
           </a:xfrm>
           <a:prstGeom prst="roundRect">
             <a:avLst>
-              <a:gd name="adj" fmla="val 7968"/>
+              <a:gd name="adj" fmla="val 7186"/>
             </a:avLst>
           </a:prstGeom>
           <a:solidFill>
@@ -11773,8 +11779,8 @@
         </p:nvSpPr>
         <p:spPr>
           <a:xfrm>
-            <a:off x="7799832" y="2816352"/>
-            <a:ext cx="3145536" cy="256032"/>
+            <a:off x="7708392" y="2852928"/>
+            <a:ext cx="3282696" cy="228600"/>
           </a:xfrm>
           <a:prstGeom prst="rect">
             <a:avLst/>
@@ -11790,7 +11796,7 @@
               <a:buNone/>
             </a:pPr>
             <a:r>
-              <a:rPr lang="en-US" sz="1300" b="1" dirty="0">
+              <a:rPr lang="en-US" sz="1220" b="1" dirty="0">
                 <a:solidFill>
                   <a:srgbClr val="0068B7"/>
                 </a:solidFill>
@@ -11800,7 +11806,7 @@
               </a:rPr>
               <a:t>Concept checkpoints</a:t>
             </a:r>
-            <a:endParaRPr lang="en-US" sz="1300" dirty="0"/>
+            <a:endParaRPr lang="en-US" sz="1220" dirty="0"/>
           </a:p>
         </p:txBody>
       </p:sp>
@@ -11812,8 +11818,8 @@
         </p:nvSpPr>
         <p:spPr>
           <a:xfrm>
-            <a:off x="7818120" y="3182112"/>
-            <a:ext cx="3090672" cy="718718"/>
+            <a:off x="7726680" y="3182112"/>
+            <a:ext cx="3227832" cy="960120"/>
           </a:xfrm>
           <a:prstGeom prst="rect">
             <a:avLst/>
@@ -11831,7 +11837,7 @@
               <a:buNone/>
             </a:pPr>
             <a:r>
-              <a:rPr lang="en-US" sz="1220" dirty="0">
+              <a:rPr lang="en-US" sz="1140" dirty="0">
                 <a:solidFill>
                   <a:srgbClr val="17364A"/>
                 </a:solidFill>
@@ -11841,14 +11847,14 @@
               </a:rPr>
               <a:t>Anomaly detection review plan</a:t>
             </a:r>
-            <a:endParaRPr lang="en-US" sz="1220" dirty="0"/>
-          </a:p>
-          <a:p>
-            <a:pPr indent="0" marL="0">
-              <a:buNone/>
-            </a:pPr>
-            <a:r>
-              <a:rPr lang="en-US" sz="1220" dirty="0">
+            <a:endParaRPr lang="en-US" sz="1140" dirty="0"/>
+          </a:p>
+          <a:p>
+            <a:pPr indent="0" marL="0">
+              <a:buNone/>
+            </a:pPr>
+            <a:r>
+              <a:rPr lang="en-US" sz="1140" dirty="0">
                 <a:solidFill>
                   <a:srgbClr val="17364A"/>
                 </a:solidFill>
@@ -11858,14 +11864,14 @@
               </a:rPr>
               <a:t>Baseline and threshold rationale</a:t>
             </a:r>
-            <a:endParaRPr lang="en-US" sz="1220" dirty="0"/>
-          </a:p>
-          <a:p>
-            <a:pPr indent="0" marL="0">
-              <a:buNone/>
-            </a:pPr>
-            <a:r>
-              <a:rPr lang="en-US" sz="1220" dirty="0">
+            <a:endParaRPr lang="en-US" sz="1140" dirty="0"/>
+          </a:p>
+          <a:p>
+            <a:pPr indent="0" marL="0">
+              <a:buNone/>
+            </a:pPr>
+            <a:r>
+              <a:rPr lang="en-US" sz="1140" dirty="0">
                 <a:solidFill>
                   <a:srgbClr val="17364A"/>
                 </a:solidFill>
@@ -11875,7 +11881,7 @@
               </a:rPr>
               <a:t>Alert review protocol</a:t>
             </a:r>
-            <a:endParaRPr lang="en-US" sz="1220" dirty="0"/>
+            <a:endParaRPr lang="en-US" sz="1140" dirty="0"/>
           </a:p>
         </p:txBody>
       </p:sp>
@@ -11887,12 +11893,12 @@
         </p:nvSpPr>
         <p:spPr>
           <a:xfrm>
-            <a:off x="7635240" y="4184294"/>
-            <a:ext cx="3474720" cy="1466698"/>
+            <a:off x="7543800" y="4389120"/>
+            <a:ext cx="3611880" cy="1261872"/>
           </a:xfrm>
           <a:prstGeom prst="roundRect">
             <a:avLst>
-              <a:gd name="adj" fmla="val 7481"/>
+              <a:gd name="adj" fmla="val 8696"/>
             </a:avLst>
           </a:prstGeom>
           <a:solidFill>
@@ -11914,8 +11920,8 @@
         </p:nvSpPr>
         <p:spPr>
           <a:xfrm>
-            <a:off x="7799832" y="4330598"/>
-            <a:ext cx="3145536" cy="256032"/>
+            <a:off x="7708392" y="4517136"/>
+            <a:ext cx="3282696" cy="228600"/>
           </a:xfrm>
           <a:prstGeom prst="rect">
             <a:avLst/>
@@ -11931,7 +11937,7 @@
               <a:buNone/>
             </a:pPr>
             <a:r>
-              <a:rPr lang="en-US" sz="1300" b="1" dirty="0">
+              <a:rPr lang="en-US" sz="1220" b="1" dirty="0">
                 <a:solidFill>
                   <a:srgbClr val="0068B7"/>
                 </a:solidFill>
@@ -11941,7 +11947,7 @@
               </a:rPr>
               <a:t>What to produce</a:t>
             </a:r>
-            <a:endParaRPr lang="en-US" sz="1300" dirty="0"/>
+            <a:endParaRPr lang="en-US" sz="1220" dirty="0"/>
           </a:p>
         </p:txBody>
       </p:sp>
@@ -11953,8 +11959,8 @@
         </p:nvSpPr>
         <p:spPr>
           <a:xfrm>
-            <a:off x="7799832" y="4659782"/>
-            <a:ext cx="3145536" cy="899770"/>
+            <a:off x="7708392" y="4828032"/>
+            <a:ext cx="3282696" cy="749808"/>
           </a:xfrm>
           <a:prstGeom prst="rect">
             <a:avLst/>
@@ -11972,7 +11978,7 @@
               <a:buNone/>
             </a:pPr>
             <a:r>
-              <a:rPr lang="en-US" sz="1320" dirty="0">
+              <a:rPr lang="en-US" sz="1220" dirty="0">
                 <a:solidFill>
                   <a:srgbClr val="17364A"/>
                 </a:solidFill>
@@ -11980,9 +11986,9 @@
                 <a:ea typeface="Aptos" pitchFamily="34" charset="-122"/>
                 <a:cs typeface="Aptos" pitchFamily="34" charset="-120"/>
               </a:rPr>
-              <a:t>Use the assignment to test whether you can explain the concept, apply it to a realistic public health situation, and identify what would need review before the work moves forward.</a:t>
-            </a:r>
-            <a:endParaRPr lang="en-US" sz="1320" dirty="0"/>
+              <a:t>Use the assignment to test whether you can explain the concept, apply it to a.</a:t>
+            </a:r>
+            <a:endParaRPr lang="en-US" sz="1220" dirty="0"/>
           </a:p>
         </p:txBody>
       </p:sp>
@@ -12273,8 +12279,8 @@
         </p:nvSpPr>
         <p:spPr>
           <a:xfrm>
-            <a:off x="868680" y="1508760"/>
-            <a:ext cx="6309360" cy="4160520"/>
+            <a:off x="822960" y="1463040"/>
+            <a:ext cx="6565392" cy="4343400"/>
           </a:xfrm>
           <a:prstGeom prst="rect">
             <a:avLst/>
@@ -12292,7 +12298,7 @@
               <a:buNone/>
             </a:pPr>
             <a:r>
-              <a:rPr lang="en-US" sz="2100" dirty="0">
+              <a:rPr lang="en-US" sz="1920" dirty="0">
                 <a:solidFill>
                   <a:srgbClr val="003A63"/>
                 </a:solidFill>
@@ -12302,14 +12308,14 @@
               </a:rPr>
               <a:t>• 1. What is an anomaly in a public health time series?</a:t>
             </a:r>
-            <a:endParaRPr lang="en-US" sz="2100" dirty="0"/>
-          </a:p>
-          <a:p>
-            <a:pPr indent="0" marL="0">
-              <a:buNone/>
-            </a:pPr>
-            <a:r>
-              <a:rPr lang="en-US" sz="2100" dirty="0">
+            <a:endParaRPr lang="en-US" sz="1920" dirty="0"/>
+          </a:p>
+          <a:p>
+            <a:pPr indent="0" marL="0">
+              <a:buNone/>
+            </a:pPr>
+            <a:r>
+              <a:rPr lang="en-US" sz="1920" dirty="0">
                 <a:solidFill>
                   <a:srgbClr val="003A63"/>
                 </a:solidFill>
@@ -12319,14 +12325,14 @@
               </a:rPr>
               <a:t>• 2. Why does seasonality matter?</a:t>
             </a:r>
-            <a:endParaRPr lang="en-US" sz="2100" dirty="0"/>
-          </a:p>
-          <a:p>
-            <a:pPr indent="0" marL="0">
-              <a:buNone/>
-            </a:pPr>
-            <a:r>
-              <a:rPr lang="en-US" sz="2100" dirty="0">
+            <a:endParaRPr lang="en-US" sz="1920" dirty="0"/>
+          </a:p>
+          <a:p>
+            <a:pPr indent="0" marL="0">
+              <a:buNone/>
+            </a:pPr>
+            <a:r>
+              <a:rPr lang="en-US" sz="1920" dirty="0">
                 <a:solidFill>
                   <a:srgbClr val="003A63"/>
                 </a:solidFill>
@@ -12336,7 +12342,7 @@
               </a:rPr>
               <a:t>• 3. What is a common risk of too many low-value alerts?</a:t>
             </a:r>
-            <a:endParaRPr lang="en-US" sz="2100" dirty="0"/>
+            <a:endParaRPr lang="en-US" sz="1920" dirty="0"/>
           </a:p>
         </p:txBody>
       </p:sp>
@@ -12348,12 +12354,12 @@
         </p:nvSpPr>
         <p:spPr>
           <a:xfrm>
-            <a:off x="7635240" y="1325880"/>
-            <a:ext cx="3474720" cy="1207008"/>
+            <a:off x="7543800" y="1325880"/>
+            <a:ext cx="3611880" cy="1261872"/>
           </a:xfrm>
           <a:prstGeom prst="roundRect">
             <a:avLst>
-              <a:gd name="adj" fmla="val 9091"/>
+              <a:gd name="adj" fmla="val 8696"/>
             </a:avLst>
           </a:prstGeom>
           <a:solidFill>
@@ -12375,8 +12381,8 @@
         </p:nvSpPr>
         <p:spPr>
           <a:xfrm>
-            <a:off x="7799832" y="1472184"/>
-            <a:ext cx="3145536" cy="256032"/>
+            <a:off x="7708392" y="1453896"/>
+            <a:ext cx="3282696" cy="228600"/>
           </a:xfrm>
           <a:prstGeom prst="rect">
             <a:avLst/>
@@ -12392,7 +12398,7 @@
               <a:buNone/>
             </a:pPr>
             <a:r>
-              <a:rPr lang="en-US" sz="1300" b="1" dirty="0">
+              <a:rPr lang="en-US" sz="1220" b="1" dirty="0">
                 <a:solidFill>
                   <a:srgbClr val="0068B7"/>
                 </a:solidFill>
@@ -12402,7 +12408,7 @@
               </a:rPr>
               <a:t>Practice focus</a:t>
             </a:r>
-            <a:endParaRPr lang="en-US" sz="1300" dirty="0"/>
+            <a:endParaRPr lang="en-US" sz="1220" dirty="0"/>
           </a:p>
         </p:txBody>
       </p:sp>
@@ -12414,8 +12420,8 @@
         </p:nvSpPr>
         <p:spPr>
           <a:xfrm>
-            <a:off x="7799832" y="1801368"/>
-            <a:ext cx="3145536" cy="640080"/>
+            <a:off x="7708392" y="1764792"/>
+            <a:ext cx="3282696" cy="749808"/>
           </a:xfrm>
           <a:prstGeom prst="rect">
             <a:avLst/>
@@ -12433,7 +12439,7 @@
               <a:buNone/>
             </a:pPr>
             <a:r>
-              <a:rPr lang="en-US" sz="1320" dirty="0">
+              <a:rPr lang="en-US" sz="1220" dirty="0">
                 <a:solidFill>
                   <a:srgbClr val="17364A"/>
                 </a:solidFill>
@@ -12443,7 +12449,7 @@
               </a:rPr>
               <a:t>1. What is an anomaly in a public health time series?</a:t>
             </a:r>
-            <a:endParaRPr lang="en-US" sz="1320" dirty="0"/>
+            <a:endParaRPr lang="en-US" sz="1220" dirty="0"/>
           </a:p>
         </p:txBody>
       </p:sp>
@@ -12455,12 +12461,12 @@
         </p:nvSpPr>
         <p:spPr>
           <a:xfrm>
-            <a:off x="7635240" y="2670048"/>
-            <a:ext cx="3474720" cy="1377086"/>
+            <a:off x="7543800" y="2724912"/>
+            <a:ext cx="3611880" cy="1527048"/>
           </a:xfrm>
           <a:prstGeom prst="roundRect">
             <a:avLst>
-              <a:gd name="adj" fmla="val 7968"/>
+              <a:gd name="adj" fmla="val 7186"/>
             </a:avLst>
           </a:prstGeom>
           <a:solidFill>
@@ -12482,8 +12488,8 @@
         </p:nvSpPr>
         <p:spPr>
           <a:xfrm>
-            <a:off x="7799832" y="2816352"/>
-            <a:ext cx="3145536" cy="256032"/>
+            <a:off x="7708392" y="2852928"/>
+            <a:ext cx="3282696" cy="228600"/>
           </a:xfrm>
           <a:prstGeom prst="rect">
             <a:avLst/>
@@ -12499,7 +12505,7 @@
               <a:buNone/>
             </a:pPr>
             <a:r>
-              <a:rPr lang="en-US" sz="1300" b="1" dirty="0">
+              <a:rPr lang="en-US" sz="1220" b="1" dirty="0">
                 <a:solidFill>
                   <a:srgbClr val="0068B7"/>
                 </a:solidFill>
@@ -12509,7 +12515,7 @@
               </a:rPr>
               <a:t>Concept checkpoints</a:t>
             </a:r>
-            <a:endParaRPr lang="en-US" sz="1300" dirty="0"/>
+            <a:endParaRPr lang="en-US" sz="1220" dirty="0"/>
           </a:p>
         </p:txBody>
       </p:sp>
@@ -12521,8 +12527,8 @@
         </p:nvSpPr>
         <p:spPr>
           <a:xfrm>
-            <a:off x="7818120" y="3182112"/>
-            <a:ext cx="3090672" cy="718718"/>
+            <a:off x="7726680" y="3182112"/>
+            <a:ext cx="3227832" cy="960120"/>
           </a:xfrm>
           <a:prstGeom prst="rect">
             <a:avLst/>
@@ -12540,7 +12546,7 @@
               <a:buNone/>
             </a:pPr>
             <a:r>
-              <a:rPr lang="en-US" sz="1220" dirty="0">
+              <a:rPr lang="en-US" sz="1140" dirty="0">
                 <a:solidFill>
                   <a:srgbClr val="17364A"/>
                 </a:solidFill>
@@ -12550,14 +12556,14 @@
               </a:rPr>
               <a:t>1.</a:t>
             </a:r>
-            <a:endParaRPr lang="en-US" sz="1220" dirty="0"/>
-          </a:p>
-          <a:p>
-            <a:pPr indent="0" marL="0">
-              <a:buNone/>
-            </a:pPr>
-            <a:r>
-              <a:rPr lang="en-US" sz="1220" dirty="0">
+            <a:endParaRPr lang="en-US" sz="1140" dirty="0"/>
+          </a:p>
+          <a:p>
+            <a:pPr indent="0" marL="0">
+              <a:buNone/>
+            </a:pPr>
+            <a:r>
+              <a:rPr lang="en-US" sz="1140" dirty="0">
                 <a:solidFill>
                   <a:srgbClr val="17364A"/>
                 </a:solidFill>
@@ -12567,14 +12573,14 @@
               </a:rPr>
               <a:t>What is an anomaly in a public health time series?</a:t>
             </a:r>
-            <a:endParaRPr lang="en-US" sz="1220" dirty="0"/>
-          </a:p>
-          <a:p>
-            <a:pPr indent="0" marL="0">
-              <a:buNone/>
-            </a:pPr>
-            <a:r>
-              <a:rPr lang="en-US" sz="1220" dirty="0">
+            <a:endParaRPr lang="en-US" sz="1140" dirty="0"/>
+          </a:p>
+          <a:p>
+            <a:pPr indent="0" marL="0">
+              <a:buNone/>
+            </a:pPr>
+            <a:r>
+              <a:rPr lang="en-US" sz="1140" dirty="0">
                 <a:solidFill>
                   <a:srgbClr val="17364A"/>
                 </a:solidFill>
@@ -12584,7 +12590,7 @@
               </a:rPr>
               <a:t>2.</a:t>
             </a:r>
-            <a:endParaRPr lang="en-US" sz="1220" dirty="0"/>
+            <a:endParaRPr lang="en-US" sz="1140" dirty="0"/>
           </a:p>
         </p:txBody>
       </p:sp>
@@ -12596,12 +12602,12 @@
         </p:nvSpPr>
         <p:spPr>
           <a:xfrm>
-            <a:off x="7635240" y="4184294"/>
-            <a:ext cx="3474720" cy="1466698"/>
+            <a:off x="7543800" y="4389120"/>
+            <a:ext cx="3611880" cy="1261872"/>
           </a:xfrm>
           <a:prstGeom prst="roundRect">
             <a:avLst>
-              <a:gd name="adj" fmla="val 7481"/>
+              <a:gd name="adj" fmla="val 8696"/>
             </a:avLst>
           </a:prstGeom>
           <a:solidFill>
@@ -12623,8 +12629,8 @@
         </p:nvSpPr>
         <p:spPr>
           <a:xfrm>
-            <a:off x="7799832" y="4330598"/>
-            <a:ext cx="3145536" cy="256032"/>
+            <a:off x="7708392" y="4517136"/>
+            <a:ext cx="3282696" cy="228600"/>
           </a:xfrm>
           <a:prstGeom prst="rect">
             <a:avLst/>
@@ -12640,7 +12646,7 @@
               <a:buNone/>
             </a:pPr>
             <a:r>
-              <a:rPr lang="en-US" sz="1300" b="1" dirty="0">
+              <a:rPr lang="en-US" sz="1220" b="1" dirty="0">
                 <a:solidFill>
                   <a:srgbClr val="0068B7"/>
                 </a:solidFill>
@@ -12650,7 +12656,7 @@
               </a:rPr>
               <a:t>What to produce</a:t>
             </a:r>
-            <a:endParaRPr lang="en-US" sz="1300" dirty="0"/>
+            <a:endParaRPr lang="en-US" sz="1220" dirty="0"/>
           </a:p>
         </p:txBody>
       </p:sp>
@@ -12662,8 +12668,8 @@
         </p:nvSpPr>
         <p:spPr>
           <a:xfrm>
-            <a:off x="7799832" y="4659782"/>
-            <a:ext cx="3145536" cy="899770"/>
+            <a:off x="7708392" y="4828032"/>
+            <a:ext cx="3282696" cy="749808"/>
           </a:xfrm>
           <a:prstGeom prst="rect">
             <a:avLst/>
@@ -12681,7 +12687,7 @@
               <a:buNone/>
             </a:pPr>
             <a:r>
-              <a:rPr lang="en-US" sz="1320" dirty="0">
+              <a:rPr lang="en-US" sz="1220" dirty="0">
                 <a:solidFill>
                   <a:srgbClr val="17364A"/>
                 </a:solidFill>
@@ -12689,9 +12695,9 @@
                 <a:ea typeface="Aptos" pitchFamily="34" charset="-122"/>
                 <a:cs typeface="Aptos" pitchFamily="34" charset="-120"/>
               </a:rPr>
-              <a:t>Use the assignment to test whether you can explain the concept, apply it to a realistic public health situation, and identify what would need review before the work moves forward.</a:t>
-            </a:r>
-            <a:endParaRPr lang="en-US" sz="1320" dirty="0"/>
+              <a:t>Use the assignment to test whether you can explain the concept, apply it to a.</a:t>
+            </a:r>
+            <a:endParaRPr lang="en-US" sz="1220" dirty="0"/>
           </a:p>
         </p:txBody>
       </p:sp>
@@ -12982,8 +12988,8 @@
         </p:nvSpPr>
         <p:spPr>
           <a:xfrm>
-            <a:off x="868680" y="1508760"/>
-            <a:ext cx="6309360" cy="4160520"/>
+            <a:off x="822960" y="1463040"/>
+            <a:ext cx="6565392" cy="4343400"/>
           </a:xfrm>
           <a:prstGeom prst="rect">
             <a:avLst/>
@@ -13001,7 +13007,7 @@
               <a:buNone/>
             </a:pPr>
             <a:r>
-              <a:rPr lang="en-US" sz="2100" dirty="0">
+              <a:rPr lang="en-US" sz="1920" dirty="0">
                 <a:solidFill>
                   <a:srgbClr val="003A63"/>
                 </a:solidFill>
@@ -13011,14 +13017,14 @@
               </a:rPr>
               <a:t>• CDC National Syndromic Surveillance Program: https://www.cdc.gov/nssp/</a:t>
             </a:r>
-            <a:endParaRPr lang="en-US" sz="2100" dirty="0"/>
-          </a:p>
-          <a:p>
-            <a:pPr indent="0" marL="0">
-              <a:buNone/>
-            </a:pPr>
-            <a:r>
-              <a:rPr lang="en-US" sz="2100" dirty="0">
+            <a:endParaRPr lang="en-US" sz="1920" dirty="0"/>
+          </a:p>
+          <a:p>
+            <a:pPr indent="0" marL="0">
+              <a:buNone/>
+            </a:pPr>
+            <a:r>
+              <a:rPr lang="en-US" sz="1920" dirty="0">
                 <a:solidFill>
                   <a:srgbClr val="003A63"/>
                 </a:solidFill>
@@ -13028,14 +13034,14 @@
               </a:rPr>
               <a:t>• CDC Evaluation Framework: https://www.cdc.gov/evaluation/</a:t>
             </a:r>
-            <a:endParaRPr lang="en-US" sz="2100" dirty="0"/>
-          </a:p>
-          <a:p>
-            <a:pPr indent="0" marL="0">
-              <a:buNone/>
-            </a:pPr>
-            <a:r>
-              <a:rPr lang="en-US" sz="2100" dirty="0">
+            <a:endParaRPr lang="en-US" sz="1920" dirty="0"/>
+          </a:p>
+          <a:p>
+            <a:pPr indent="0" marL="0">
+              <a:buNone/>
+            </a:pPr>
+            <a:r>
+              <a:rPr lang="en-US" sz="1920" dirty="0">
                 <a:solidFill>
                   <a:srgbClr val="003A63"/>
                 </a:solidFill>
@@ -13045,7 +13051,7 @@
               </a:rPr>
               <a:t>• NIST Artificial Intelligence Risk Management Framework:.</a:t>
             </a:r>
-            <a:endParaRPr lang="en-US" sz="2100" dirty="0"/>
+            <a:endParaRPr lang="en-US" sz="1920" dirty="0"/>
           </a:p>
         </p:txBody>
       </p:sp>
@@ -13057,12 +13063,12 @@
         </p:nvSpPr>
         <p:spPr>
           <a:xfrm>
-            <a:off x="7635240" y="1325880"/>
-            <a:ext cx="3474720" cy="1207008"/>
+            <a:off x="7543800" y="1325880"/>
+            <a:ext cx="3611880" cy="1261872"/>
           </a:xfrm>
           <a:prstGeom prst="roundRect">
             <a:avLst>
-              <a:gd name="adj" fmla="val 9091"/>
+              <a:gd name="adj" fmla="val 8696"/>
             </a:avLst>
           </a:prstGeom>
           <a:solidFill>
@@ -13084,8 +13090,8 @@
         </p:nvSpPr>
         <p:spPr>
           <a:xfrm>
-            <a:off x="7799832" y="1472184"/>
-            <a:ext cx="3145536" cy="256032"/>
+            <a:off x="7708392" y="1453896"/>
+            <a:ext cx="3282696" cy="228600"/>
           </a:xfrm>
           <a:prstGeom prst="rect">
             <a:avLst/>
@@ -13101,7 +13107,7 @@
               <a:buNone/>
             </a:pPr>
             <a:r>
-              <a:rPr lang="en-US" sz="1300" b="1" dirty="0">
+              <a:rPr lang="en-US" sz="1220" b="1" dirty="0">
                 <a:solidFill>
                   <a:srgbClr val="0068B7"/>
                 </a:solidFill>
@@ -13111,7 +13117,7 @@
               </a:rPr>
               <a:t>Core concept</a:t>
             </a:r>
-            <a:endParaRPr lang="en-US" sz="1300" dirty="0"/>
+            <a:endParaRPr lang="en-US" sz="1220" dirty="0"/>
           </a:p>
         </p:txBody>
       </p:sp>
@@ -13123,8 +13129,8 @@
         </p:nvSpPr>
         <p:spPr>
           <a:xfrm>
-            <a:off x="7799832" y="1801368"/>
-            <a:ext cx="3145536" cy="640080"/>
+            <a:off x="7708392" y="1764792"/>
+            <a:ext cx="3282696" cy="749808"/>
           </a:xfrm>
           <a:prstGeom prst="rect">
             <a:avLst/>
@@ -13142,7 +13148,7 @@
               <a:buNone/>
             </a:pPr>
             <a:r>
-              <a:rPr lang="en-US" sz="1320" dirty="0">
+              <a:rPr lang="en-US" sz="1220" dirty="0">
                 <a:solidFill>
                   <a:srgbClr val="17364A"/>
                 </a:solidFill>
@@ -13152,7 +13158,7 @@
               </a:rPr>
               <a:t>CDC National Syndromic Surveillance Program: https://www.cdc.gov/nssp/</a:t>
             </a:r>
-            <a:endParaRPr lang="en-US" sz="1320" dirty="0"/>
+            <a:endParaRPr lang="en-US" sz="1220" dirty="0"/>
           </a:p>
         </p:txBody>
       </p:sp>
@@ -13164,12 +13170,12 @@
         </p:nvSpPr>
         <p:spPr>
           <a:xfrm>
-            <a:off x="7635240" y="2670048"/>
-            <a:ext cx="3474720" cy="1377086"/>
+            <a:off x="7543800" y="2724912"/>
+            <a:ext cx="3611880" cy="1527048"/>
           </a:xfrm>
           <a:prstGeom prst="roundRect">
             <a:avLst>
-              <a:gd name="adj" fmla="val 7968"/>
+              <a:gd name="adj" fmla="val 7186"/>
             </a:avLst>
           </a:prstGeom>
           <a:solidFill>
@@ -13191,8 +13197,8 @@
         </p:nvSpPr>
         <p:spPr>
           <a:xfrm>
-            <a:off x="7799832" y="2816352"/>
-            <a:ext cx="3145536" cy="256032"/>
+            <a:off x="7708392" y="2852928"/>
+            <a:ext cx="3282696" cy="228600"/>
           </a:xfrm>
           <a:prstGeom prst="rect">
             <a:avLst/>
@@ -13208,7 +13214,7 @@
               <a:buNone/>
             </a:pPr>
             <a:r>
-              <a:rPr lang="en-US" sz="1300" b="1" dirty="0">
+              <a:rPr lang="en-US" sz="1220" b="1" dirty="0">
                 <a:solidFill>
                   <a:srgbClr val="0068B7"/>
                 </a:solidFill>
@@ -13218,7 +13224,7 @@
               </a:rPr>
               <a:t>Concept checkpoints</a:t>
             </a:r>
-            <a:endParaRPr lang="en-US" sz="1300" dirty="0"/>
+            <a:endParaRPr lang="en-US" sz="1220" dirty="0"/>
           </a:p>
         </p:txBody>
       </p:sp>
@@ -13230,8 +13236,8 @@
         </p:nvSpPr>
         <p:spPr>
           <a:xfrm>
-            <a:off x="7818120" y="3182112"/>
-            <a:ext cx="3090672" cy="718718"/>
+            <a:off x="7726680" y="3182112"/>
+            <a:ext cx="3227832" cy="960120"/>
           </a:xfrm>
           <a:prstGeom prst="rect">
             <a:avLst/>
@@ -13249,7 +13255,7 @@
               <a:buNone/>
             </a:pPr>
             <a:r>
-              <a:rPr lang="en-US" sz="1220" dirty="0">
+              <a:rPr lang="en-US" sz="1140" dirty="0">
                 <a:solidFill>
                   <a:srgbClr val="17364A"/>
                 </a:solidFill>
@@ -13257,16 +13263,16 @@
                 <a:ea typeface="Aptos" pitchFamily="34" charset="-122"/>
                 <a:cs typeface="Aptos" pitchFamily="34" charset="-120"/>
               </a:rPr>
-              <a:t>NIST Artificial Intelligence Risk Management Framework:.</a:t>
-            </a:r>
-            <a:endParaRPr lang="en-US" sz="1220" dirty="0"/>
-          </a:p>
-          <a:p>
-            <a:pPr indent="0" marL="0">
-              <a:buNone/>
-            </a:pPr>
-            <a:r>
-              <a:rPr lang="en-US" sz="1220" dirty="0">
+              <a:t>NIST Artificial Intelligence Risk Management.</a:t>
+            </a:r>
+            <a:endParaRPr lang="en-US" sz="1140" dirty="0"/>
+          </a:p>
+          <a:p>
+            <a:pPr indent="0" marL="0">
+              <a:buNone/>
+            </a:pPr>
+            <a:r>
+              <a:rPr lang="en-US" sz="1140" dirty="0">
                 <a:solidFill>
                   <a:srgbClr val="17364A"/>
                 </a:solidFill>
@@ -13276,7 +13282,7 @@
               </a:rPr>
               <a:t>CDC Public Health Data Strategy:.</a:t>
             </a:r>
-            <a:endParaRPr lang="en-US" sz="1220" dirty="0"/>
+            <a:endParaRPr lang="en-US" sz="1140" dirty="0"/>
           </a:p>
         </p:txBody>
       </p:sp>
@@ -13288,12 +13294,12 @@
         </p:nvSpPr>
         <p:spPr>
           <a:xfrm>
-            <a:off x="7635240" y="4184294"/>
-            <a:ext cx="3474720" cy="1466698"/>
+            <a:off x="7543800" y="4389120"/>
+            <a:ext cx="3611880" cy="1261872"/>
           </a:xfrm>
           <a:prstGeom prst="roundRect">
             <a:avLst>
-              <a:gd name="adj" fmla="val 7481"/>
+              <a:gd name="adj" fmla="val 8696"/>
             </a:avLst>
           </a:prstGeom>
           <a:solidFill>
@@ -13315,8 +13321,8 @@
         </p:nvSpPr>
         <p:spPr>
           <a:xfrm>
-            <a:off x="7799832" y="4330598"/>
-            <a:ext cx="3145536" cy="256032"/>
+            <a:off x="7708392" y="4517136"/>
+            <a:ext cx="3282696" cy="228600"/>
           </a:xfrm>
           <a:prstGeom prst="rect">
             <a:avLst/>
@@ -13332,7 +13338,7 @@
               <a:buNone/>
             </a:pPr>
             <a:r>
-              <a:rPr lang="en-US" sz="1300" b="1" dirty="0">
+              <a:rPr lang="en-US" sz="1220" b="1" dirty="0">
                 <a:solidFill>
                   <a:srgbClr val="0068B7"/>
                 </a:solidFill>
@@ -13342,7 +13348,7 @@
               </a:rPr>
               <a:t>Apply it</a:t>
             </a:r>
-            <a:endParaRPr lang="en-US" sz="1300" dirty="0"/>
+            <a:endParaRPr lang="en-US" sz="1220" dirty="0"/>
           </a:p>
         </p:txBody>
       </p:sp>
@@ -13354,8 +13360,8 @@
         </p:nvSpPr>
         <p:spPr>
           <a:xfrm>
-            <a:off x="7799832" y="4659782"/>
-            <a:ext cx="3145536" cy="899770"/>
+            <a:off x="7708392" y="4828032"/>
+            <a:ext cx="3282696" cy="749808"/>
           </a:xfrm>
           <a:prstGeom prst="rect">
             <a:avLst/>
@@ -13373,7 +13379,7 @@
               <a:buNone/>
             </a:pPr>
             <a:r>
-              <a:rPr lang="en-US" sz="1320" dirty="0">
+              <a:rPr lang="en-US" sz="1220" dirty="0">
                 <a:solidFill>
                   <a:srgbClr val="17364A"/>
                 </a:solidFill>
@@ -13381,9 +13387,9 @@
                 <a:ea typeface="Aptos" pitchFamily="34" charset="-122"/>
                 <a:cs typeface="Aptos" pitchFamily="34" charset="-120"/>
               </a:rPr>
-              <a:t>Connect the concept to public health purpose, responsible use, required safeguards, documentation, and the next action a department should take.</a:t>
-            </a:r>
-            <a:endParaRPr lang="en-US" sz="1320" dirty="0"/>
+              <a:t>Connect the concept to public health purpose, responsible use, required.</a:t>
+            </a:r>
+            <a:endParaRPr lang="en-US" sz="1220" dirty="0"/>
           </a:p>
         </p:txBody>
       </p:sp>
@@ -13701,7 +13707,7 @@
                 <a:ea typeface="Aptos" pitchFamily="34" charset="-122"/>
                 <a:cs typeface="Aptos" pitchFamily="34" charset="-120"/>
               </a:rPr>
-              <a:t>• Play 13: Monitor and Evaluate AI Systems - This lesson informs Play 13 by helping learners.</a:t>
+              <a:t>• Play 13: Monitor and Evaluate AI Systems - This lesson informs Play 13 by.</a:t>
             </a:r>
             <a:endParaRPr lang="en-US" sz="1900" dirty="0"/>
           </a:p>
@@ -13718,7 +13724,7 @@
                 <a:ea typeface="Aptos" pitchFamily="34" charset="-122"/>
                 <a:cs typeface="Aptos" pitchFamily="34" charset="-120"/>
               </a:rPr>
-              <a:t>• Play 12: Execute Governance and Oversight - This lesson informs Play 12 by helping learners.</a:t>
+              <a:t>• Play 12: Execute Governance and Oversight - This lesson informs Play 12 by.</a:t>
             </a:r>
             <a:endParaRPr lang="en-US" sz="1900" dirty="0"/>
           </a:p>
@@ -13735,7 +13741,7 @@
                 <a:ea typeface="Aptos" pitchFamily="34" charset="-122"/>
                 <a:cs typeface="Aptos" pitchFamily="34" charset="-120"/>
               </a:rPr>
-              <a:t>• Play 1: Vision &amp; Guardrails - This lesson informs Play 1 by helping learners connect the.</a:t>
+              <a:t>• Play 1: Vision &amp; Guardrails - This lesson informs Play 1 by helping learners.</a:t>
             </a:r>
             <a:endParaRPr lang="en-US" sz="1900" dirty="0"/>
           </a:p>
@@ -13752,7 +13758,7 @@
                 <a:ea typeface="Aptos" pitchFamily="34" charset="-122"/>
                 <a:cs typeface="Aptos" pitchFamily="34" charset="-120"/>
               </a:rPr>
-              <a:t>• Play 11: Build and Deploy AI Solutions - This lesson informs Play 11 by helping learners.</a:t>
+              <a:t>• Play 11: Build and Deploy AI Solutions - This lesson informs Play 11 by.</a:t>
             </a:r>
             <a:endParaRPr lang="en-US" sz="1900" dirty="0"/>
           </a:p>
@@ -13793,8 +13799,8 @@
         </p:nvSpPr>
         <p:spPr>
           <a:xfrm>
-            <a:off x="8211312" y="1563624"/>
-            <a:ext cx="2734056" cy="256032"/>
+            <a:off x="8211312" y="1545336"/>
+            <a:ext cx="2734056" cy="228600"/>
           </a:xfrm>
           <a:prstGeom prst="rect">
             <a:avLst/>
@@ -13810,7 +13816,7 @@
               <a:buNone/>
             </a:pPr>
             <a:r>
-              <a:rPr lang="en-US" sz="1300" b="1" dirty="0">
+              <a:rPr lang="en-US" sz="1220" b="1" dirty="0">
                 <a:solidFill>
                   <a:srgbClr val="0068B7"/>
                 </a:solidFill>
@@ -13820,7 +13826,7 @@
               </a:rPr>
               <a:t>Apply the lesson</a:t>
             </a:r>
-            <a:endParaRPr lang="en-US" sz="1300" dirty="0"/>
+            <a:endParaRPr lang="en-US" sz="1220" dirty="0"/>
           </a:p>
         </p:txBody>
       </p:sp>
@@ -13832,8 +13838,8 @@
         </p:nvSpPr>
         <p:spPr>
           <a:xfrm>
-            <a:off x="8211312" y="1892808"/>
-            <a:ext cx="2734056" cy="1536192"/>
+            <a:off x="8211312" y="1856232"/>
+            <a:ext cx="2734056" cy="1591056"/>
           </a:xfrm>
           <a:prstGeom prst="rect">
             <a:avLst/>
@@ -13851,7 +13857,7 @@
               <a:buNone/>
             </a:pPr>
             <a:r>
-              <a:rPr lang="en-US" sz="1320" dirty="0">
+              <a:rPr lang="en-US" sz="1220" dirty="0">
                 <a:solidFill>
                   <a:srgbClr val="17364A"/>
                 </a:solidFill>
@@ -13859,9 +13865,9 @@
                 <a:ea typeface="Aptos" pitchFamily="34" charset="-122"/>
                 <a:cs typeface="Aptos" pitchFamily="34" charset="-120"/>
               </a:rPr>
-              <a:t>Use the related plays to identify decisions, participants, timing, approvals, and documentation needed for responsible implementation.</a:t>
-            </a:r>
-            <a:endParaRPr lang="en-US" sz="1320" dirty="0"/>
+              <a:t>Use the related plays to identify decisions, participants, timing, approvals,.</a:t>
+            </a:r>
+            <a:endParaRPr lang="en-US" sz="1220" dirty="0"/>
           </a:p>
         </p:txBody>
       </p:sp>
@@ -13900,8 +13906,8 @@
         </p:nvSpPr>
         <p:spPr>
           <a:xfrm>
-            <a:off x="8211312" y="3941064"/>
-            <a:ext cx="2734056" cy="256032"/>
+            <a:off x="8211312" y="3922776"/>
+            <a:ext cx="2734056" cy="228600"/>
           </a:xfrm>
           <a:prstGeom prst="rect">
             <a:avLst/>
@@ -13917,7 +13923,7 @@
               <a:buNone/>
             </a:pPr>
             <a:r>
-              <a:rPr lang="en-US" sz="1300" b="1" dirty="0">
+              <a:rPr lang="en-US" sz="1220" b="1" dirty="0">
                 <a:solidFill>
                   <a:srgbClr val="0068B7"/>
                 </a:solidFill>
@@ -13927,7 +13933,7 @@
               </a:rPr>
               <a:t>Use the play links to</a:t>
             </a:r>
-            <a:endParaRPr lang="en-US" sz="1300" dirty="0"/>
+            <a:endParaRPr lang="en-US" sz="1220" dirty="0"/>
           </a:p>
         </p:txBody>
       </p:sp>
@@ -13939,8 +13945,8 @@
         </p:nvSpPr>
         <p:spPr>
           <a:xfrm>
-            <a:off x="8229600" y="4306824"/>
-            <a:ext cx="2679192" cy="941832"/>
+            <a:off x="8229600" y="4251960"/>
+            <a:ext cx="2679192" cy="1033272"/>
           </a:xfrm>
           <a:prstGeom prst="rect">
             <a:avLst/>
@@ -13958,7 +13964,7 @@
               <a:buNone/>
             </a:pPr>
             <a:r>
-              <a:rPr lang="en-US" sz="1220" dirty="0">
+              <a:rPr lang="en-US" sz="1140" dirty="0">
                 <a:solidFill>
                   <a:srgbClr val="17364A"/>
                 </a:solidFill>
@@ -13968,14 +13974,14 @@
               </a:rPr>
               <a:t>Locate the decision point in the playbook sequence.</a:t>
             </a:r>
-            <a:endParaRPr lang="en-US" sz="1220" dirty="0"/>
-          </a:p>
-          <a:p>
-            <a:pPr indent="0" marL="0">
-              <a:buNone/>
-            </a:pPr>
-            <a:r>
-              <a:rPr lang="en-US" sz="1220" dirty="0">
+            <a:endParaRPr lang="en-US" sz="1140" dirty="0"/>
+          </a:p>
+          <a:p>
+            <a:pPr indent="0" marL="0">
+              <a:buNone/>
+            </a:pPr>
+            <a:r>
+              <a:rPr lang="en-US" sz="1140" dirty="0">
                 <a:solidFill>
                   <a:srgbClr val="17364A"/>
                 </a:solidFill>
@@ -13985,14 +13991,14 @@
               </a:rPr>
               <a:t>Identify who should participate in the work.</a:t>
             </a:r>
-            <a:endParaRPr lang="en-US" sz="1220" dirty="0"/>
-          </a:p>
-          <a:p>
-            <a:pPr indent="0" marL="0">
-              <a:buNone/>
-            </a:pPr>
-            <a:r>
-              <a:rPr lang="en-US" sz="1220" dirty="0">
+            <a:endParaRPr lang="en-US" sz="1140" dirty="0"/>
+          </a:p>
+          <a:p>
+            <a:pPr indent="0" marL="0">
+              <a:buNone/>
+            </a:pPr>
+            <a:r>
+              <a:rPr lang="en-US" sz="1140" dirty="0">
                 <a:solidFill>
                   <a:srgbClr val="17364A"/>
                 </a:solidFill>
@@ -14000,9 +14006,9 @@
                 <a:ea typeface="Aptos" pitchFamily="34" charset="-122"/>
                 <a:cs typeface="Aptos" pitchFamily="34" charset="-120"/>
               </a:rPr>
-              <a:t>Document the review, approval, or implementation step.</a:t>
-            </a:r>
-            <a:endParaRPr lang="en-US" sz="1220" dirty="0"/>
+              <a:t>Document the review, approval, or implementation.</a:t>
+            </a:r>
+            <a:endParaRPr lang="en-US" sz="1140" dirty="0"/>
           </a:p>
         </p:txBody>
       </p:sp>
@@ -14320,7 +14326,7 @@
                 <a:ea typeface="Aptos" pitchFamily="34" charset="-122"/>
                 <a:cs typeface="Aptos" pitchFamily="34" charset="-120"/>
               </a:rPr>
-              <a:t>• Tool 44: Performance Monitoring Dashboard (Dashboard) - Use this tool to complete or.</a:t>
+              <a:t>• Tool 44: Performance Monitoring Dashboard (Dashboard) - Use this tool to.</a:t>
             </a:r>
             <a:endParaRPr lang="en-US" sz="1850" dirty="0"/>
           </a:p>
@@ -14337,7 +14343,7 @@
                 <a:ea typeface="Aptos" pitchFamily="34" charset="-122"/>
                 <a:cs typeface="Aptos" pitchFamily="34" charset="-120"/>
               </a:rPr>
-              <a:t>• Tool 45: Continuous Improvement Log (Log) - Use Continuous Improvement Log to translate this.</a:t>
+              <a:t>• Tool 45: Continuous Improvement Log (Log) - Use Continuous Improvement Log.</a:t>
             </a:r>
             <a:endParaRPr lang="en-US" sz="1850" dirty="0"/>
           </a:p>
@@ -14354,7 +14360,7 @@
                 <a:ea typeface="Aptos" pitchFamily="34" charset="-122"/>
                 <a:cs typeface="Aptos" pitchFamily="34" charset="-120"/>
               </a:rPr>
-              <a:t>• Tool 48: AI Evaluation &amp; Outcomes Reporting (Template) - Use this tool to complete or.</a:t>
+              <a:t>• Tool 48: AI Evaluation &amp; Outcomes Reporting (Template) - Use this tool to.</a:t>
             </a:r>
             <a:endParaRPr lang="en-US" sz="1850" dirty="0"/>
           </a:p>
@@ -14371,7 +14377,7 @@
                 <a:ea typeface="Aptos" pitchFamily="34" charset="-122"/>
                 <a:cs typeface="Aptos" pitchFamily="34" charset="-120"/>
               </a:rPr>
-              <a:t>• Tool 4: AI Policy Landscape Scan (Worksheet) - Use AI Policy Landscape Scan to translate this.</a:t>
+              <a:t>• Tool 4: AI Policy Landscape Scan (Worksheet) - Use AI Policy Landscape Scan.</a:t>
             </a:r>
             <a:endParaRPr lang="en-US" sz="1850" dirty="0"/>
           </a:p>
@@ -14412,8 +14418,8 @@
         </p:nvSpPr>
         <p:spPr>
           <a:xfrm>
-            <a:off x="8211312" y="1563624"/>
-            <a:ext cx="2734056" cy="256032"/>
+            <a:off x="8211312" y="1545336"/>
+            <a:ext cx="2734056" cy="228600"/>
           </a:xfrm>
           <a:prstGeom prst="rect">
             <a:avLst/>
@@ -14429,7 +14435,7 @@
               <a:buNone/>
             </a:pPr>
             <a:r>
-              <a:rPr lang="en-US" sz="1300" b="1" dirty="0">
+              <a:rPr lang="en-US" sz="1220" b="1" dirty="0">
                 <a:solidFill>
                   <a:srgbClr val="0068B7"/>
                 </a:solidFill>
@@ -14439,7 +14445,7 @@
               </a:rPr>
               <a:t>Use the tools</a:t>
             </a:r>
-            <a:endParaRPr lang="en-US" sz="1300" dirty="0"/>
+            <a:endParaRPr lang="en-US" sz="1220" dirty="0"/>
           </a:p>
         </p:txBody>
       </p:sp>
@@ -14451,8 +14457,8 @@
         </p:nvSpPr>
         <p:spPr>
           <a:xfrm>
-            <a:off x="8211312" y="1892808"/>
-            <a:ext cx="2734056" cy="1536192"/>
+            <a:off x="8211312" y="1856232"/>
+            <a:ext cx="2734056" cy="1591056"/>
           </a:xfrm>
           <a:prstGeom prst="rect">
             <a:avLst/>
@@ -14470,7 +14476,7 @@
               <a:buNone/>
             </a:pPr>
             <a:r>
-              <a:rPr lang="en-US" sz="1320" dirty="0">
+              <a:rPr lang="en-US" sz="1220" dirty="0">
                 <a:solidFill>
                   <a:srgbClr val="17364A"/>
                 </a:solidFill>
@@ -14478,9 +14484,9 @@
                 <a:ea typeface="Aptos" pitchFamily="34" charset="-122"/>
                 <a:cs typeface="Aptos" pitchFamily="34" charset="-120"/>
               </a:rPr>
-              <a:t>Use linked tools when your department needs a structured worksheet, template, checklist, review process, or documentation artifact.</a:t>
-            </a:r>
-            <a:endParaRPr lang="en-US" sz="1320" dirty="0"/>
+              <a:t>Use linked tools when your department needs a structured worksheet, template,.</a:t>
+            </a:r>
+            <a:endParaRPr lang="en-US" sz="1220" dirty="0"/>
           </a:p>
         </p:txBody>
       </p:sp>
@@ -14519,8 +14525,8 @@
         </p:nvSpPr>
         <p:spPr>
           <a:xfrm>
-            <a:off x="8211312" y="3941064"/>
-            <a:ext cx="2734056" cy="256032"/>
+            <a:off x="8211312" y="3922776"/>
+            <a:ext cx="2734056" cy="228600"/>
           </a:xfrm>
           <a:prstGeom prst="rect">
             <a:avLst/>
@@ -14536,7 +14542,7 @@
               <a:buNone/>
             </a:pPr>
             <a:r>
-              <a:rPr lang="en-US" sz="1300" b="1" dirty="0">
+              <a:rPr lang="en-US" sz="1220" b="1" dirty="0">
                 <a:solidFill>
                   <a:srgbClr val="0068B7"/>
                 </a:solidFill>
@@ -14546,7 +14552,7 @@
               </a:rPr>
               <a:t>Tool selection cues</a:t>
             </a:r>
-            <a:endParaRPr lang="en-US" sz="1300" dirty="0"/>
+            <a:endParaRPr lang="en-US" sz="1220" dirty="0"/>
           </a:p>
         </p:txBody>
       </p:sp>
@@ -14558,8 +14564,8 @@
         </p:nvSpPr>
         <p:spPr>
           <a:xfrm>
-            <a:off x="8229600" y="4306824"/>
-            <a:ext cx="2679192" cy="941832"/>
+            <a:off x="8229600" y="4251960"/>
+            <a:ext cx="2679192" cy="1033272"/>
           </a:xfrm>
           <a:prstGeom prst="rect">
             <a:avLst/>
@@ -14577,7 +14583,7 @@
               <a:buNone/>
             </a:pPr>
             <a:r>
-              <a:rPr lang="en-US" sz="1220" dirty="0">
+              <a:rPr lang="en-US" sz="1140" dirty="0">
                 <a:solidFill>
                   <a:srgbClr val="17364A"/>
                 </a:solidFill>
@@ -14587,14 +14593,14 @@
               </a:rPr>
               <a:t>Use a tool when no comparable local process exists.</a:t>
             </a:r>
-            <a:endParaRPr lang="en-US" sz="1220" dirty="0"/>
-          </a:p>
-          <a:p>
-            <a:pPr indent="0" marL="0">
-              <a:buNone/>
-            </a:pPr>
-            <a:r>
-              <a:rPr lang="en-US" sz="1220" dirty="0">
+            <a:endParaRPr lang="en-US" sz="1140" dirty="0"/>
+          </a:p>
+          <a:p>
+            <a:pPr indent="0" marL="0">
+              <a:buNone/>
+            </a:pPr>
+            <a:r>
+              <a:rPr lang="en-US" sz="1140" dirty="0">
                 <a:solidFill>
                   <a:srgbClr val="17364A"/>
                 </a:solidFill>
@@ -14602,16 +14608,16 @@
                 <a:ea typeface="Aptos" pitchFamily="34" charset="-122"/>
                 <a:cs typeface="Aptos" pitchFamily="34" charset="-120"/>
               </a:rPr>
-              <a:t>Adapt existing department templates when they already fit the.</a:t>
-            </a:r>
-            <a:endParaRPr lang="en-US" sz="1220" dirty="0"/>
-          </a:p>
-          <a:p>
-            <a:pPr indent="0" marL="0">
-              <a:buNone/>
-            </a:pPr>
-            <a:r>
-              <a:rPr lang="en-US" sz="1220" dirty="0">
+              <a:t>Adapt existing department templates when they.</a:t>
+            </a:r>
+            <a:endParaRPr lang="en-US" sz="1140" dirty="0"/>
+          </a:p>
+          <a:p>
+            <a:pPr indent="0" marL="0">
+              <a:buNone/>
+            </a:pPr>
+            <a:r>
+              <a:rPr lang="en-US" sz="1140" dirty="0">
                 <a:solidFill>
                   <a:srgbClr val="17364A"/>
                 </a:solidFill>
@@ -14619,9 +14625,9 @@
                 <a:ea typeface="Aptos" pitchFamily="34" charset="-122"/>
                 <a:cs typeface="Aptos" pitchFamily="34" charset="-120"/>
               </a:rPr>
-              <a:t>Save the completed artifact as evidence of the decision.</a:t>
-            </a:r>
-            <a:endParaRPr lang="en-US" sz="1220" dirty="0"/>
+              <a:t>Save the completed artifact as evidence of the.</a:t>
+            </a:r>
+            <a:endParaRPr lang="en-US" sz="1140" dirty="0"/>
           </a:p>
         </p:txBody>
       </p:sp>
@@ -14912,8 +14918,8 @@
         </p:nvSpPr>
         <p:spPr>
           <a:xfrm>
-            <a:off x="868680" y="1508760"/>
-            <a:ext cx="6309360" cy="4160520"/>
+            <a:off x="822960" y="1463040"/>
+            <a:ext cx="6565392" cy="4343400"/>
           </a:xfrm>
           <a:prstGeom prst="rect">
             <a:avLst/>
@@ -14931,7 +14937,7 @@
               <a:buNone/>
             </a:pPr>
             <a:r>
-              <a:rPr lang="en-US" sz="2100" dirty="0">
+              <a:rPr lang="en-US" sz="1920" dirty="0">
                 <a:solidFill>
                   <a:srgbClr val="003A63"/>
                 </a:solidFill>
@@ -14941,14 +14947,14 @@
               </a:rPr>
               <a:t>• Define time-series analysis and anomaly detection in public health terms.</a:t>
             </a:r>
-            <a:endParaRPr lang="en-US" sz="2100" dirty="0"/>
-          </a:p>
-          <a:p>
-            <a:pPr indent="0" marL="0">
-              <a:buNone/>
-            </a:pPr>
-            <a:r>
-              <a:rPr lang="en-US" sz="2100" dirty="0">
+            <a:endParaRPr lang="en-US" sz="1920" dirty="0"/>
+          </a:p>
+          <a:p>
+            <a:pPr indent="0" marL="0">
+              <a:buNone/>
+            </a:pPr>
+            <a:r>
+              <a:rPr lang="en-US" sz="1920" dirty="0">
                 <a:solidFill>
                   <a:srgbClr val="003A63"/>
                 </a:solidFill>
@@ -14958,14 +14964,14 @@
               </a:rPr>
               <a:t>• Explain baselines, seasonality, trends, reporting delays, and thresholds.</a:t>
             </a:r>
-            <a:endParaRPr lang="en-US" sz="2100" dirty="0"/>
-          </a:p>
-          <a:p>
-            <a:pPr indent="0" marL="0">
-              <a:buNone/>
-            </a:pPr>
-            <a:r>
-              <a:rPr lang="en-US" sz="2100" dirty="0">
+            <a:endParaRPr lang="en-US" sz="1920" dirty="0"/>
+          </a:p>
+          <a:p>
+            <a:pPr indent="0" marL="0">
+              <a:buNone/>
+            </a:pPr>
+            <a:r>
+              <a:rPr lang="en-US" sz="1920" dirty="0">
                 <a:solidFill>
                   <a:srgbClr val="003A63"/>
                 </a:solidFill>
@@ -14973,9 +14979,9 @@
                 <a:ea typeface="Aptos" pitchFamily="34" charset="-122"/>
                 <a:cs typeface="Aptos" pitchFamily="34" charset="-120"/>
               </a:rPr>
-              <a:t>• Distinguish statistical signals from confirmed outbreaks or public health events.</a:t>
-            </a:r>
-            <a:endParaRPr lang="en-US" sz="2100" dirty="0"/>
+              <a:t>• Distinguish statistical signals from confirmed outbreaks or public health.</a:t>
+            </a:r>
+            <a:endParaRPr lang="en-US" sz="1920" dirty="0"/>
           </a:p>
         </p:txBody>
       </p:sp>
@@ -14987,12 +14993,12 @@
         </p:nvSpPr>
         <p:spPr>
           <a:xfrm>
-            <a:off x="7635240" y="1325880"/>
-            <a:ext cx="3474720" cy="1207008"/>
+            <a:off x="7543800" y="1325880"/>
+            <a:ext cx="3611880" cy="1261872"/>
           </a:xfrm>
           <a:prstGeom prst="roundRect">
             <a:avLst>
-              <a:gd name="adj" fmla="val 9091"/>
+              <a:gd name="adj" fmla="val 8696"/>
             </a:avLst>
           </a:prstGeom>
           <a:solidFill>
@@ -15014,8 +15020,8 @@
         </p:nvSpPr>
         <p:spPr>
           <a:xfrm>
-            <a:off x="7799832" y="1472184"/>
-            <a:ext cx="3145536" cy="256032"/>
+            <a:off x="7708392" y="1453896"/>
+            <a:ext cx="3282696" cy="228600"/>
           </a:xfrm>
           <a:prstGeom prst="rect">
             <a:avLst/>
@@ -15031,7 +15037,7 @@
               <a:buNone/>
             </a:pPr>
             <a:r>
-              <a:rPr lang="en-US" sz="1300" b="1" dirty="0">
+              <a:rPr lang="en-US" sz="1220" b="1" dirty="0">
                 <a:solidFill>
                   <a:srgbClr val="0068B7"/>
                 </a:solidFill>
@@ -15041,7 +15047,7 @@
               </a:rPr>
               <a:t>Practice focus</a:t>
             </a:r>
-            <a:endParaRPr lang="en-US" sz="1300" dirty="0"/>
+            <a:endParaRPr lang="en-US" sz="1220" dirty="0"/>
           </a:p>
         </p:txBody>
       </p:sp>
@@ -15053,8 +15059,8 @@
         </p:nvSpPr>
         <p:spPr>
           <a:xfrm>
-            <a:off x="7799832" y="1801368"/>
-            <a:ext cx="3145536" cy="640080"/>
+            <a:off x="7708392" y="1764792"/>
+            <a:ext cx="3282696" cy="749808"/>
           </a:xfrm>
           <a:prstGeom prst="rect">
             <a:avLst/>
@@ -15072,7 +15078,7 @@
               <a:buNone/>
             </a:pPr>
             <a:r>
-              <a:rPr lang="en-US" sz="1320" dirty="0">
+              <a:rPr lang="en-US" sz="1220" dirty="0">
                 <a:solidFill>
                   <a:srgbClr val="17364A"/>
                 </a:solidFill>
@@ -15082,7 +15088,7 @@
               </a:rPr>
               <a:t>Define time-series analysis and anomaly detection in public health terms.</a:t>
             </a:r>
-            <a:endParaRPr lang="en-US" sz="1320" dirty="0"/>
+            <a:endParaRPr lang="en-US" sz="1220" dirty="0"/>
           </a:p>
         </p:txBody>
       </p:sp>
@@ -15094,12 +15100,12 @@
         </p:nvSpPr>
         <p:spPr>
           <a:xfrm>
-            <a:off x="7635240" y="2670048"/>
-            <a:ext cx="3474720" cy="1377086"/>
+            <a:off x="7543800" y="2724912"/>
+            <a:ext cx="3611880" cy="1527048"/>
           </a:xfrm>
           <a:prstGeom prst="roundRect">
             <a:avLst>
-              <a:gd name="adj" fmla="val 7968"/>
+              <a:gd name="adj" fmla="val 7186"/>
             </a:avLst>
           </a:prstGeom>
           <a:solidFill>
@@ -15121,8 +15127,8 @@
         </p:nvSpPr>
         <p:spPr>
           <a:xfrm>
-            <a:off x="7799832" y="2816352"/>
-            <a:ext cx="3145536" cy="256032"/>
+            <a:off x="7708392" y="2852928"/>
+            <a:ext cx="3282696" cy="228600"/>
           </a:xfrm>
           <a:prstGeom prst="rect">
             <a:avLst/>
@@ -15138,7 +15144,7 @@
               <a:buNone/>
             </a:pPr>
             <a:r>
-              <a:rPr lang="en-US" sz="1300" b="1" dirty="0">
+              <a:rPr lang="en-US" sz="1220" b="1" dirty="0">
                 <a:solidFill>
                   <a:srgbClr val="0068B7"/>
                 </a:solidFill>
@@ -15148,7 +15154,7 @@
               </a:rPr>
               <a:t>Concept checkpoints</a:t>
             </a:r>
-            <a:endParaRPr lang="en-US" sz="1300" dirty="0"/>
+            <a:endParaRPr lang="en-US" sz="1220" dirty="0"/>
           </a:p>
         </p:txBody>
       </p:sp>
@@ -15160,8 +15166,8 @@
         </p:nvSpPr>
         <p:spPr>
           <a:xfrm>
-            <a:off x="7818120" y="3182112"/>
-            <a:ext cx="3090672" cy="718718"/>
+            <a:off x="7726680" y="3182112"/>
+            <a:ext cx="3227832" cy="960120"/>
           </a:xfrm>
           <a:prstGeom prst="rect">
             <a:avLst/>
@@ -15179,7 +15185,7 @@
               <a:buNone/>
             </a:pPr>
             <a:r>
-              <a:rPr lang="en-US" sz="1220" dirty="0">
+              <a:rPr lang="en-US" sz="1140" dirty="0">
                 <a:solidFill>
                   <a:srgbClr val="17364A"/>
                 </a:solidFill>
@@ -15187,16 +15193,16 @@
                 <a:ea typeface="Aptos" pitchFamily="34" charset="-122"/>
                 <a:cs typeface="Aptos" pitchFamily="34" charset="-120"/>
               </a:rPr>
-              <a:t>Identify risks from alert fatigue, data artifacts, delayed.</a:t>
-            </a:r>
-            <a:endParaRPr lang="en-US" sz="1220" dirty="0"/>
-          </a:p>
-          <a:p>
-            <a:pPr indent="0" marL="0">
-              <a:buNone/>
-            </a:pPr>
-            <a:r>
-              <a:rPr lang="en-US" sz="1220" dirty="0">
+              <a:t>Identify risks from alert fatigue, data artifacts,.</a:t>
+            </a:r>
+            <a:endParaRPr lang="en-US" sz="1140" dirty="0"/>
+          </a:p>
+          <a:p>
+            <a:pPr indent="0" marL="0">
+              <a:buNone/>
+            </a:pPr>
+            <a:r>
+              <a:rPr lang="en-US" sz="1140" dirty="0">
                 <a:solidFill>
                   <a:srgbClr val="17364A"/>
                 </a:solidFill>
@@ -15204,9 +15210,9 @@
                 <a:ea typeface="Aptos" pitchFamily="34" charset="-122"/>
                 <a:cs typeface="Aptos" pitchFamily="34" charset="-120"/>
               </a:rPr>
-              <a:t>Design guardrails for AI-supported surveillance alerts.</a:t>
-            </a:r>
-            <a:endParaRPr lang="en-US" sz="1220" dirty="0"/>
+              <a:t>Design guardrails for AI-supported surveillance.</a:t>
+            </a:r>
+            <a:endParaRPr lang="en-US" sz="1140" dirty="0"/>
           </a:p>
         </p:txBody>
       </p:sp>
@@ -15218,12 +15224,12 @@
         </p:nvSpPr>
         <p:spPr>
           <a:xfrm>
-            <a:off x="7635240" y="4184294"/>
-            <a:ext cx="3474720" cy="1466698"/>
+            <a:off x="7543800" y="4389120"/>
+            <a:ext cx="3611880" cy="1261872"/>
           </a:xfrm>
           <a:prstGeom prst="roundRect">
             <a:avLst>
-              <a:gd name="adj" fmla="val 7481"/>
+              <a:gd name="adj" fmla="val 8696"/>
             </a:avLst>
           </a:prstGeom>
           <a:solidFill>
@@ -15245,8 +15251,8 @@
         </p:nvSpPr>
         <p:spPr>
           <a:xfrm>
-            <a:off x="7799832" y="4330598"/>
-            <a:ext cx="3145536" cy="256032"/>
+            <a:off x="7708392" y="4517136"/>
+            <a:ext cx="3282696" cy="228600"/>
           </a:xfrm>
           <a:prstGeom prst="rect">
             <a:avLst/>
@@ -15262,7 +15268,7 @@
               <a:buNone/>
             </a:pPr>
             <a:r>
-              <a:rPr lang="en-US" sz="1300" b="1" dirty="0">
+              <a:rPr lang="en-US" sz="1220" b="1" dirty="0">
                 <a:solidFill>
                   <a:srgbClr val="0068B7"/>
                 </a:solidFill>
@@ -15272,7 +15278,7 @@
               </a:rPr>
               <a:t>What to produce</a:t>
             </a:r>
-            <a:endParaRPr lang="en-US" sz="1300" dirty="0"/>
+            <a:endParaRPr lang="en-US" sz="1220" dirty="0"/>
           </a:p>
         </p:txBody>
       </p:sp>
@@ -15284,8 +15290,8 @@
         </p:nvSpPr>
         <p:spPr>
           <a:xfrm>
-            <a:off x="7799832" y="4659782"/>
-            <a:ext cx="3145536" cy="899770"/>
+            <a:off x="7708392" y="4828032"/>
+            <a:ext cx="3282696" cy="749808"/>
           </a:xfrm>
           <a:prstGeom prst="rect">
             <a:avLst/>
@@ -15303,7 +15309,7 @@
               <a:buNone/>
             </a:pPr>
             <a:r>
-              <a:rPr lang="en-US" sz="1320" dirty="0">
+              <a:rPr lang="en-US" sz="1220" dirty="0">
                 <a:solidFill>
                   <a:srgbClr val="17364A"/>
                 </a:solidFill>
@@ -15311,9 +15317,9 @@
                 <a:ea typeface="Aptos" pitchFamily="34" charset="-122"/>
                 <a:cs typeface="Aptos" pitchFamily="34" charset="-120"/>
               </a:rPr>
-              <a:t>Use the assignment to test whether you can explain the concept, apply it to a realistic public health situation, and identify what would need review before the work moves forward.</a:t>
-            </a:r>
-            <a:endParaRPr lang="en-US" sz="1320" dirty="0"/>
+              <a:t>Use the assignment to test whether you can explain the concept, apply it to a.</a:t>
+            </a:r>
+            <a:endParaRPr lang="en-US" sz="1220" dirty="0"/>
           </a:p>
         </p:txBody>
       </p:sp>
@@ -15604,8 +15610,8 @@
         </p:nvSpPr>
         <p:spPr>
           <a:xfrm>
-            <a:off x="868680" y="1508760"/>
-            <a:ext cx="6309360" cy="4160520"/>
+            <a:off x="822960" y="1463040"/>
+            <a:ext cx="6565392" cy="4343400"/>
           </a:xfrm>
           <a:prstGeom prst="rect">
             <a:avLst/>
@@ -15623,7 +15629,7 @@
               <a:buNone/>
             </a:pPr>
             <a:r>
-              <a:rPr lang="en-US" sz="2100" dirty="0">
+              <a:rPr lang="en-US" sz="1920" dirty="0">
                 <a:solidFill>
                   <a:srgbClr val="003A63"/>
                 </a:solidFill>
@@ -15633,7 +15639,7 @@
               </a:rPr>
               <a:t>• Produce an anomaly detection review plan for one public health data stream.</a:t>
             </a:r>
-            <a:endParaRPr lang="en-US" sz="2100" dirty="0"/>
+            <a:endParaRPr lang="en-US" sz="1920" dirty="0"/>
           </a:p>
         </p:txBody>
       </p:sp>
@@ -15645,12 +15651,12 @@
         </p:nvSpPr>
         <p:spPr>
           <a:xfrm>
-            <a:off x="7635240" y="1325880"/>
-            <a:ext cx="3474720" cy="1207008"/>
+            <a:off x="7543800" y="1325880"/>
+            <a:ext cx="3611880" cy="1261872"/>
           </a:xfrm>
           <a:prstGeom prst="roundRect">
             <a:avLst>
-              <a:gd name="adj" fmla="val 9091"/>
+              <a:gd name="adj" fmla="val 8696"/>
             </a:avLst>
           </a:prstGeom>
           <a:solidFill>
@@ -15672,8 +15678,8 @@
         </p:nvSpPr>
         <p:spPr>
           <a:xfrm>
-            <a:off x="7799832" y="1472184"/>
-            <a:ext cx="3145536" cy="256032"/>
+            <a:off x="7708392" y="1453896"/>
+            <a:ext cx="3282696" cy="228600"/>
           </a:xfrm>
           <a:prstGeom prst="rect">
             <a:avLst/>
@@ -15689,7 +15695,7 @@
               <a:buNone/>
             </a:pPr>
             <a:r>
-              <a:rPr lang="en-US" sz="1300" b="1" dirty="0">
+              <a:rPr lang="en-US" sz="1220" b="1" dirty="0">
                 <a:solidFill>
                   <a:srgbClr val="0068B7"/>
                 </a:solidFill>
@@ -15699,7 +15705,7 @@
               </a:rPr>
               <a:t>Practice focus</a:t>
             </a:r>
-            <a:endParaRPr lang="en-US" sz="1300" dirty="0"/>
+            <a:endParaRPr lang="en-US" sz="1220" dirty="0"/>
           </a:p>
         </p:txBody>
       </p:sp>
@@ -15711,8 +15717,8 @@
         </p:nvSpPr>
         <p:spPr>
           <a:xfrm>
-            <a:off x="7799832" y="1801368"/>
-            <a:ext cx="3145536" cy="640080"/>
+            <a:off x="7708392" y="1764792"/>
+            <a:ext cx="3282696" cy="749808"/>
           </a:xfrm>
           <a:prstGeom prst="rect">
             <a:avLst/>
@@ -15730,7 +15736,7 @@
               <a:buNone/>
             </a:pPr>
             <a:r>
-              <a:rPr lang="en-US" sz="1320" dirty="0">
+              <a:rPr lang="en-US" sz="1220" dirty="0">
                 <a:solidFill>
                   <a:srgbClr val="17364A"/>
                 </a:solidFill>
@@ -15740,7 +15746,7 @@
               </a:rPr>
               <a:t>Produce an anomaly detection review plan for one public health data stream.</a:t>
             </a:r>
-            <a:endParaRPr lang="en-US" sz="1320" dirty="0"/>
+            <a:endParaRPr lang="en-US" sz="1220" dirty="0"/>
           </a:p>
         </p:txBody>
       </p:sp>
@@ -15752,12 +15758,12 @@
         </p:nvSpPr>
         <p:spPr>
           <a:xfrm>
-            <a:off x="7635240" y="2670048"/>
-            <a:ext cx="3474720" cy="1377086"/>
+            <a:off x="7543800" y="2724912"/>
+            <a:ext cx="3611880" cy="1527048"/>
           </a:xfrm>
           <a:prstGeom prst="roundRect">
             <a:avLst>
-              <a:gd name="adj" fmla="val 7968"/>
+              <a:gd name="adj" fmla="val 7186"/>
             </a:avLst>
           </a:prstGeom>
           <a:solidFill>
@@ -15779,8 +15785,8 @@
         </p:nvSpPr>
         <p:spPr>
           <a:xfrm>
-            <a:off x="7799832" y="2816352"/>
-            <a:ext cx="3145536" cy="256032"/>
+            <a:off x="7708392" y="2852928"/>
+            <a:ext cx="3282696" cy="228600"/>
           </a:xfrm>
           <a:prstGeom prst="rect">
             <a:avLst/>
@@ -15796,7 +15802,7 @@
               <a:buNone/>
             </a:pPr>
             <a:r>
-              <a:rPr lang="en-US" sz="1300" b="1" dirty="0">
+              <a:rPr lang="en-US" sz="1220" b="1" dirty="0">
                 <a:solidFill>
                   <a:srgbClr val="0068B7"/>
                 </a:solidFill>
@@ -15806,7 +15812,7 @@
               </a:rPr>
               <a:t>Concept checkpoints</a:t>
             </a:r>
-            <a:endParaRPr lang="en-US" sz="1300" dirty="0"/>
+            <a:endParaRPr lang="en-US" sz="1220" dirty="0"/>
           </a:p>
         </p:txBody>
       </p:sp>
@@ -15818,8 +15824,8 @@
         </p:nvSpPr>
         <p:spPr>
           <a:xfrm>
-            <a:off x="7818120" y="3182112"/>
-            <a:ext cx="3090672" cy="718718"/>
+            <a:off x="7726680" y="3182112"/>
+            <a:ext cx="3227832" cy="960120"/>
           </a:xfrm>
           <a:prstGeom prst="rect">
             <a:avLst/>
@@ -15837,7 +15843,7 @@
               <a:buNone/>
             </a:pPr>
             <a:r>
-              <a:rPr lang="en-US" sz="1220" dirty="0">
+              <a:rPr lang="en-US" sz="1140" dirty="0">
                 <a:solidFill>
                   <a:srgbClr val="17364A"/>
                 </a:solidFill>
@@ -15845,9 +15851,9 @@
                 <a:ea typeface="Aptos" pitchFamily="34" charset="-122"/>
                 <a:cs typeface="Aptos" pitchFamily="34" charset="-120"/>
               </a:rPr>
-              <a:t>Produce an anomaly detection review plan for one public health.</a:t>
-            </a:r>
-            <a:endParaRPr lang="en-US" sz="1220" dirty="0"/>
+              <a:t>Produce an anomaly detection review plan for one.</a:t>
+            </a:r>
+            <a:endParaRPr lang="en-US" sz="1140" dirty="0"/>
           </a:p>
         </p:txBody>
       </p:sp>
@@ -15859,12 +15865,12 @@
         </p:nvSpPr>
         <p:spPr>
           <a:xfrm>
-            <a:off x="7635240" y="4184294"/>
-            <a:ext cx="3474720" cy="1466698"/>
+            <a:off x="7543800" y="4389120"/>
+            <a:ext cx="3611880" cy="1261872"/>
           </a:xfrm>
           <a:prstGeom prst="roundRect">
             <a:avLst>
-              <a:gd name="adj" fmla="val 7481"/>
+              <a:gd name="adj" fmla="val 8696"/>
             </a:avLst>
           </a:prstGeom>
           <a:solidFill>
@@ -15886,8 +15892,8 @@
         </p:nvSpPr>
         <p:spPr>
           <a:xfrm>
-            <a:off x="7799832" y="4330598"/>
-            <a:ext cx="3145536" cy="256032"/>
+            <a:off x="7708392" y="4517136"/>
+            <a:ext cx="3282696" cy="228600"/>
           </a:xfrm>
           <a:prstGeom prst="rect">
             <a:avLst/>
@@ -15903,7 +15909,7 @@
               <a:buNone/>
             </a:pPr>
             <a:r>
-              <a:rPr lang="en-US" sz="1300" b="1" dirty="0">
+              <a:rPr lang="en-US" sz="1220" b="1" dirty="0">
                 <a:solidFill>
                   <a:srgbClr val="0068B7"/>
                 </a:solidFill>
@@ -15913,7 +15919,7 @@
               </a:rPr>
               <a:t>What to produce</a:t>
             </a:r>
-            <a:endParaRPr lang="en-US" sz="1300" dirty="0"/>
+            <a:endParaRPr lang="en-US" sz="1220" dirty="0"/>
           </a:p>
         </p:txBody>
       </p:sp>
@@ -15925,8 +15931,8 @@
         </p:nvSpPr>
         <p:spPr>
           <a:xfrm>
-            <a:off x="7799832" y="4659782"/>
-            <a:ext cx="3145536" cy="899770"/>
+            <a:off x="7708392" y="4828032"/>
+            <a:ext cx="3282696" cy="749808"/>
           </a:xfrm>
           <a:prstGeom prst="rect">
             <a:avLst/>
@@ -15944,7 +15950,7 @@
               <a:buNone/>
             </a:pPr>
             <a:r>
-              <a:rPr lang="en-US" sz="1320" dirty="0">
+              <a:rPr lang="en-US" sz="1220" dirty="0">
                 <a:solidFill>
                   <a:srgbClr val="17364A"/>
                 </a:solidFill>
@@ -15952,9 +15958,9 @@
                 <a:ea typeface="Aptos" pitchFamily="34" charset="-122"/>
                 <a:cs typeface="Aptos" pitchFamily="34" charset="-120"/>
               </a:rPr>
-              <a:t>Use the assignment to test whether you can explain the concept, apply it to a realistic public health situation, and identify what would need review before the work moves forward.</a:t>
-            </a:r>
-            <a:endParaRPr lang="en-US" sz="1320" dirty="0"/>
+              <a:t>Use the assignment to test whether you can explain the concept, apply it to a.</a:t>
+            </a:r>
+            <a:endParaRPr lang="en-US" sz="1220" dirty="0"/>
           </a:p>
         </p:txBody>
       </p:sp>
@@ -16245,8 +16251,8 @@
         </p:nvSpPr>
         <p:spPr>
           <a:xfrm>
-            <a:off x="868680" y="1508760"/>
-            <a:ext cx="6309360" cy="4160520"/>
+            <a:off x="822960" y="1463040"/>
+            <a:ext cx="6565392" cy="4343400"/>
           </a:xfrm>
           <a:prstGeom prst="rect">
             <a:avLst/>
@@ -16264,7 +16270,7 @@
               <a:buNone/>
             </a:pPr>
             <a:r>
-              <a:rPr lang="en-US" sz="2100" dirty="0">
+              <a:rPr lang="en-US" sz="1920" dirty="0">
                 <a:solidFill>
                   <a:srgbClr val="003A63"/>
                 </a:solidFill>
@@ -16274,14 +16280,14 @@
               </a:rPr>
               <a:t>• Time-series analysis examines data collected over time.</a:t>
             </a:r>
-            <a:endParaRPr lang="en-US" sz="2100" dirty="0"/>
-          </a:p>
-          <a:p>
-            <a:pPr indent="0" marL="0">
-              <a:buNone/>
-            </a:pPr>
-            <a:r>
-              <a:rPr lang="en-US" sz="2100" dirty="0">
+            <a:endParaRPr lang="en-US" sz="1920" dirty="0"/>
+          </a:p>
+          <a:p>
+            <a:pPr indent="0" marL="0">
+              <a:buNone/>
+            </a:pPr>
+            <a:r>
+              <a:rPr lang="en-US" sz="1920" dirty="0">
                 <a:solidFill>
                   <a:srgbClr val="003A63"/>
                 </a:solidFill>
@@ -16289,16 +16295,16 @@
                 <a:ea typeface="Aptos" pitchFamily="34" charset="-122"/>
                 <a:cs typeface="Aptos" pitchFamily="34" charset="-120"/>
               </a:rPr>
-              <a:t>• In public health, time patterns are central to surveillance, outbreak detection, syndromic.</a:t>
-            </a:r>
-            <a:endParaRPr lang="en-US" sz="2100" dirty="0"/>
-          </a:p>
-          <a:p>
-            <a:pPr indent="0" marL="0">
-              <a:buNone/>
-            </a:pPr>
-            <a:r>
-              <a:rPr lang="en-US" sz="2100" dirty="0">
+              <a:t>• In public health, time patterns are central to surveillance, outbreak.</a:t>
+            </a:r>
+            <a:endParaRPr lang="en-US" sz="1920" dirty="0"/>
+          </a:p>
+          <a:p>
+            <a:pPr indent="0" marL="0">
+              <a:buNone/>
+            </a:pPr>
+            <a:r>
+              <a:rPr lang="en-US" sz="1920" dirty="0">
                 <a:solidFill>
                   <a:srgbClr val="003A63"/>
                 </a:solidFill>
@@ -16306,9 +16312,9 @@
                 <a:ea typeface="Aptos" pitchFamily="34" charset="-122"/>
                 <a:cs typeface="Aptos" pitchFamily="34" charset="-120"/>
               </a:rPr>
-              <a:t>• AI-supported anomaly detection can help identify unusual increases, decreases, or pattern.</a:t>
-            </a:r>
-            <a:endParaRPr lang="en-US" sz="2100" dirty="0"/>
+              <a:t>• AI-supported anomaly detection can help identify unusual increases,.</a:t>
+            </a:r>
+            <a:endParaRPr lang="en-US" sz="1920" dirty="0"/>
           </a:p>
         </p:txBody>
       </p:sp>
@@ -16320,12 +16326,12 @@
         </p:nvSpPr>
         <p:spPr>
           <a:xfrm>
-            <a:off x="7635240" y="1325880"/>
-            <a:ext cx="3474720" cy="1207008"/>
+            <a:off x="7543800" y="1325880"/>
+            <a:ext cx="3611880" cy="1261872"/>
           </a:xfrm>
           <a:prstGeom prst="roundRect">
             <a:avLst>
-              <a:gd name="adj" fmla="val 9091"/>
+              <a:gd name="adj" fmla="val 8696"/>
             </a:avLst>
           </a:prstGeom>
           <a:solidFill>
@@ -16347,8 +16353,8 @@
         </p:nvSpPr>
         <p:spPr>
           <a:xfrm>
-            <a:off x="7799832" y="1472184"/>
-            <a:ext cx="3145536" cy="256032"/>
+            <a:off x="7708392" y="1453896"/>
+            <a:ext cx="3282696" cy="228600"/>
           </a:xfrm>
           <a:prstGeom prst="rect">
             <a:avLst/>
@@ -16364,7 +16370,7 @@
               <a:buNone/>
             </a:pPr>
             <a:r>
-              <a:rPr lang="en-US" sz="1300" b="1" dirty="0">
+              <a:rPr lang="en-US" sz="1220" b="1" dirty="0">
                 <a:solidFill>
                   <a:srgbClr val="0068B7"/>
                 </a:solidFill>
@@ -16374,7 +16380,7 @@
               </a:rPr>
               <a:t>Core concept</a:t>
             </a:r>
-            <a:endParaRPr lang="en-US" sz="1300" dirty="0"/>
+            <a:endParaRPr lang="en-US" sz="1220" dirty="0"/>
           </a:p>
         </p:txBody>
       </p:sp>
@@ -16386,8 +16392,8 @@
         </p:nvSpPr>
         <p:spPr>
           <a:xfrm>
-            <a:off x="7799832" y="1801368"/>
-            <a:ext cx="3145536" cy="640080"/>
+            <a:off x="7708392" y="1764792"/>
+            <a:ext cx="3282696" cy="749808"/>
           </a:xfrm>
           <a:prstGeom prst="rect">
             <a:avLst/>
@@ -16405,7 +16411,7 @@
               <a:buNone/>
             </a:pPr>
             <a:r>
-              <a:rPr lang="en-US" sz="1320" dirty="0">
+              <a:rPr lang="en-US" sz="1220" dirty="0">
                 <a:solidFill>
                   <a:srgbClr val="17364A"/>
                 </a:solidFill>
@@ -16415,7 +16421,7 @@
               </a:rPr>
               <a:t>Time-series analysis examines data collected over time.</a:t>
             </a:r>
-            <a:endParaRPr lang="en-US" sz="1320" dirty="0"/>
+            <a:endParaRPr lang="en-US" sz="1220" dirty="0"/>
           </a:p>
         </p:txBody>
       </p:sp>
@@ -16427,12 +16433,12 @@
         </p:nvSpPr>
         <p:spPr>
           <a:xfrm>
-            <a:off x="7635240" y="2670048"/>
-            <a:ext cx="3474720" cy="1377086"/>
+            <a:off x="7543800" y="2724912"/>
+            <a:ext cx="3611880" cy="1527048"/>
           </a:xfrm>
           <a:prstGeom prst="roundRect">
             <a:avLst>
-              <a:gd name="adj" fmla="val 7968"/>
+              <a:gd name="adj" fmla="val 7186"/>
             </a:avLst>
           </a:prstGeom>
           <a:solidFill>
@@ -16454,8 +16460,8 @@
         </p:nvSpPr>
         <p:spPr>
           <a:xfrm>
-            <a:off x="7799832" y="2816352"/>
-            <a:ext cx="3145536" cy="256032"/>
+            <a:off x="7708392" y="2852928"/>
+            <a:ext cx="3282696" cy="228600"/>
           </a:xfrm>
           <a:prstGeom prst="rect">
             <a:avLst/>
@@ -16471,7 +16477,7 @@
               <a:buNone/>
             </a:pPr>
             <a:r>
-              <a:rPr lang="en-US" sz="1300" b="1" dirty="0">
+              <a:rPr lang="en-US" sz="1220" b="1" dirty="0">
                 <a:solidFill>
                   <a:srgbClr val="0068B7"/>
                 </a:solidFill>
@@ -16481,7 +16487,7 @@
               </a:rPr>
               <a:t>Concept checkpoints</a:t>
             </a:r>
-            <a:endParaRPr lang="en-US" sz="1300" dirty="0"/>
+            <a:endParaRPr lang="en-US" sz="1220" dirty="0"/>
           </a:p>
         </p:txBody>
       </p:sp>
@@ -16493,8 +16499,8 @@
         </p:nvSpPr>
         <p:spPr>
           <a:xfrm>
-            <a:off x="7818120" y="3182112"/>
-            <a:ext cx="3090672" cy="718718"/>
+            <a:off x="7726680" y="3182112"/>
+            <a:ext cx="3227832" cy="960120"/>
           </a:xfrm>
           <a:prstGeom prst="rect">
             <a:avLst/>
@@ -16512,7 +16518,7 @@
               <a:buNone/>
             </a:pPr>
             <a:r>
-              <a:rPr lang="en-US" sz="1220" dirty="0">
+              <a:rPr lang="en-US" sz="1140" dirty="0">
                 <a:solidFill>
                   <a:srgbClr val="17364A"/>
                 </a:solidFill>
@@ -16520,16 +16526,16 @@
                 <a:ea typeface="Aptos" pitchFamily="34" charset="-122"/>
                 <a:cs typeface="Aptos" pitchFamily="34" charset="-120"/>
               </a:rPr>
-              <a:t>In public health, time patterns are central to surveillance,.</a:t>
-            </a:r>
-            <a:endParaRPr lang="en-US" sz="1220" dirty="0"/>
-          </a:p>
-          <a:p>
-            <a:pPr indent="0" marL="0">
-              <a:buNone/>
-            </a:pPr>
-            <a:r>
-              <a:rPr lang="en-US" sz="1220" dirty="0">
+              <a:t>In public health, time patterns are central to.</a:t>
+            </a:r>
+            <a:endParaRPr lang="en-US" sz="1140" dirty="0"/>
+          </a:p>
+          <a:p>
+            <a:pPr indent="0" marL="0">
+              <a:buNone/>
+            </a:pPr>
+            <a:r>
+              <a:rPr lang="en-US" sz="1140" dirty="0">
                 <a:solidFill>
                   <a:srgbClr val="17364A"/>
                 </a:solidFill>
@@ -16537,16 +16543,16 @@
                 <a:ea typeface="Aptos" pitchFamily="34" charset="-122"/>
                 <a:cs typeface="Aptos" pitchFamily="34" charset="-120"/>
               </a:rPr>
-              <a:t>AI-supported anomaly detection can help identify unusual.</a:t>
-            </a:r>
-            <a:endParaRPr lang="en-US" sz="1220" dirty="0"/>
-          </a:p>
-          <a:p>
-            <a:pPr indent="0" marL="0">
-              <a:buNone/>
-            </a:pPr>
-            <a:r>
-              <a:rPr lang="en-US" sz="1220" dirty="0">
+              <a:t>AI-supported anomaly detection can help identify.</a:t>
+            </a:r>
+            <a:endParaRPr lang="en-US" sz="1140" dirty="0"/>
+          </a:p>
+          <a:p>
+            <a:pPr indent="0" marL="0">
+              <a:buNone/>
+            </a:pPr>
+            <a:r>
+              <a:rPr lang="en-US" sz="1140" dirty="0">
                 <a:solidFill>
                   <a:srgbClr val="17364A"/>
                 </a:solidFill>
@@ -16554,9 +16560,9 @@
                 <a:ea typeface="Aptos" pitchFamily="34" charset="-122"/>
                 <a:cs typeface="Aptos" pitchFamily="34" charset="-120"/>
               </a:rPr>
-              <a:t>This module explains how time-series and anomaly detection methods.</a:t>
-            </a:r>
-            <a:endParaRPr lang="en-US" sz="1220" dirty="0"/>
+              <a:t>This module explains how time-series and anomaly.</a:t>
+            </a:r>
+            <a:endParaRPr lang="en-US" sz="1140" dirty="0"/>
           </a:p>
         </p:txBody>
       </p:sp>
@@ -16568,12 +16574,12 @@
         </p:nvSpPr>
         <p:spPr>
           <a:xfrm>
-            <a:off x="7635240" y="4184294"/>
-            <a:ext cx="3474720" cy="1466698"/>
+            <a:off x="7543800" y="4389120"/>
+            <a:ext cx="3611880" cy="1261872"/>
           </a:xfrm>
           <a:prstGeom prst="roundRect">
             <a:avLst>
-              <a:gd name="adj" fmla="val 7481"/>
+              <a:gd name="adj" fmla="val 8696"/>
             </a:avLst>
           </a:prstGeom>
           <a:solidFill>
@@ -16595,8 +16601,8 @@
         </p:nvSpPr>
         <p:spPr>
           <a:xfrm>
-            <a:off x="7799832" y="4330598"/>
-            <a:ext cx="3145536" cy="256032"/>
+            <a:off x="7708392" y="4517136"/>
+            <a:ext cx="3282696" cy="228600"/>
           </a:xfrm>
           <a:prstGeom prst="rect">
             <a:avLst/>
@@ -16612,7 +16618,7 @@
               <a:buNone/>
             </a:pPr>
             <a:r>
-              <a:rPr lang="en-US" sz="1300" b="1" dirty="0">
+              <a:rPr lang="en-US" sz="1220" b="1" dirty="0">
                 <a:solidFill>
                   <a:srgbClr val="0068B7"/>
                 </a:solidFill>
@@ -16622,7 +16628,7 @@
               </a:rPr>
               <a:t>Apply it</a:t>
             </a:r>
-            <a:endParaRPr lang="en-US" sz="1300" dirty="0"/>
+            <a:endParaRPr lang="en-US" sz="1220" dirty="0"/>
           </a:p>
         </p:txBody>
       </p:sp>
@@ -16634,8 +16640,8 @@
         </p:nvSpPr>
         <p:spPr>
           <a:xfrm>
-            <a:off x="7799832" y="4659782"/>
-            <a:ext cx="3145536" cy="899770"/>
+            <a:off x="7708392" y="4828032"/>
+            <a:ext cx="3282696" cy="749808"/>
           </a:xfrm>
           <a:prstGeom prst="rect">
             <a:avLst/>
@@ -16653,7 +16659,7 @@
               <a:buNone/>
             </a:pPr>
             <a:r>
-              <a:rPr lang="en-US" sz="1320" dirty="0">
+              <a:rPr lang="en-US" sz="1220" dirty="0">
                 <a:solidFill>
                   <a:srgbClr val="17364A"/>
                 </a:solidFill>
@@ -16661,9 +16667,9 @@
                 <a:ea typeface="Aptos" pitchFamily="34" charset="-122"/>
                 <a:cs typeface="Aptos" pitchFamily="34" charset="-120"/>
               </a:rPr>
-              <a:t>Connect the concept to public health purpose, responsible use, required safeguards, documentation, and the next action a department should take.</a:t>
-            </a:r>
-            <a:endParaRPr lang="en-US" sz="1320" dirty="0"/>
+              <a:t>Connect the concept to public health purpose, responsible use, required.</a:t>
+            </a:r>
+            <a:endParaRPr lang="en-US" sz="1220" dirty="0"/>
           </a:p>
         </p:txBody>
       </p:sp>
@@ -16954,8 +16960,8 @@
         </p:nvSpPr>
         <p:spPr>
           <a:xfrm>
-            <a:off x="868680" y="1508760"/>
-            <a:ext cx="6309360" cy="4160520"/>
+            <a:off x="822960" y="1463040"/>
+            <a:ext cx="6565392" cy="4343400"/>
           </a:xfrm>
           <a:prstGeom prst="rect">
             <a:avLst/>
@@ -16973,7 +16979,7 @@
               <a:buNone/>
             </a:pPr>
             <a:r>
-              <a:rPr lang="en-US" sz="2100" dirty="0">
+              <a:rPr lang="en-US" sz="1920" dirty="0">
                 <a:solidFill>
                   <a:srgbClr val="003A63"/>
                 </a:solidFill>
@@ -16981,16 +16987,16 @@
                 <a:ea typeface="Aptos" pitchFamily="34" charset="-122"/>
                 <a:cs typeface="Aptos" pitchFamily="34" charset="-120"/>
               </a:rPr>
-              <a:t>• Time-series methods matter because public health surveillance is often about change.</a:t>
-            </a:r>
-            <a:endParaRPr lang="en-US" sz="2100" dirty="0"/>
-          </a:p>
-          <a:p>
-            <a:pPr indent="0" marL="0">
-              <a:buNone/>
-            </a:pPr>
-            <a:r>
-              <a:rPr lang="en-US" sz="2100" dirty="0">
+              <a:t>• Time-series methods matter because public health surveillance is often about.</a:t>
+            </a:r>
+            <a:endParaRPr lang="en-US" sz="1920" dirty="0"/>
+          </a:p>
+          <a:p>
+            <a:pPr indent="0" marL="0">
+              <a:buNone/>
+            </a:pPr>
+            <a:r>
+              <a:rPr lang="en-US" sz="1920" dirty="0">
                 <a:solidFill>
                   <a:srgbClr val="003A63"/>
                 </a:solidFill>
@@ -16998,16 +17004,16 @@
                 <a:ea typeface="Aptos" pitchFamily="34" charset="-122"/>
                 <a:cs typeface="Aptos" pitchFamily="34" charset="-120"/>
               </a:rPr>
-              <a:t>• A single count may be difficult to interpret without knowing whether it is higher than.</a:t>
-            </a:r>
-            <a:endParaRPr lang="en-US" sz="2100" dirty="0"/>
-          </a:p>
-          <a:p>
-            <a:pPr indent="0" marL="0">
-              <a:buNone/>
-            </a:pPr>
-            <a:r>
-              <a:rPr lang="en-US" sz="2100" dirty="0">
+              <a:t>• A single count may be difficult to interpret without knowing whether it is.</a:t>
+            </a:r>
+            <a:endParaRPr lang="en-US" sz="1920" dirty="0"/>
+          </a:p>
+          <a:p>
+            <a:pPr indent="0" marL="0">
+              <a:buNone/>
+            </a:pPr>
+            <a:r>
+              <a:rPr lang="en-US" sz="1920" dirty="0">
                 <a:solidFill>
                   <a:srgbClr val="003A63"/>
                 </a:solidFill>
@@ -17015,9 +17021,9 @@
                 <a:ea typeface="Aptos" pitchFamily="34" charset="-122"/>
                 <a:cs typeface="Aptos" pitchFamily="34" charset="-120"/>
               </a:rPr>
-              <a:t>• AI-supported anomaly detection can help staff review large volumes of data and prioritize.</a:t>
-            </a:r>
-            <a:endParaRPr lang="en-US" sz="2100" dirty="0"/>
+              <a:t>• AI-supported anomaly detection can help staff review large volumes of data.</a:t>
+            </a:r>
+            <a:endParaRPr lang="en-US" sz="1920" dirty="0"/>
           </a:p>
         </p:txBody>
       </p:sp>
@@ -17029,12 +17035,12 @@
         </p:nvSpPr>
         <p:spPr>
           <a:xfrm>
-            <a:off x="7635240" y="1325880"/>
-            <a:ext cx="3474720" cy="1207008"/>
+            <a:off x="7543800" y="1325880"/>
+            <a:ext cx="3611880" cy="1261872"/>
           </a:xfrm>
           <a:prstGeom prst="roundRect">
             <a:avLst>
-              <a:gd name="adj" fmla="val 9091"/>
+              <a:gd name="adj" fmla="val 8696"/>
             </a:avLst>
           </a:prstGeom>
           <a:solidFill>
@@ -17056,8 +17062,8 @@
         </p:nvSpPr>
         <p:spPr>
           <a:xfrm>
-            <a:off x="7799832" y="1472184"/>
-            <a:ext cx="3145536" cy="256032"/>
+            <a:off x="7708392" y="1453896"/>
+            <a:ext cx="3282696" cy="228600"/>
           </a:xfrm>
           <a:prstGeom prst="rect">
             <a:avLst/>
@@ -17073,7 +17079,7 @@
               <a:buNone/>
             </a:pPr>
             <a:r>
-              <a:rPr lang="en-US" sz="1300" b="1" dirty="0">
+              <a:rPr lang="en-US" sz="1220" b="1" dirty="0">
                 <a:solidFill>
                   <a:srgbClr val="0068B7"/>
                 </a:solidFill>
@@ -17083,7 +17089,7 @@
               </a:rPr>
               <a:t>Core concept</a:t>
             </a:r>
-            <a:endParaRPr lang="en-US" sz="1300" dirty="0"/>
+            <a:endParaRPr lang="en-US" sz="1220" dirty="0"/>
           </a:p>
         </p:txBody>
       </p:sp>
@@ -17095,8 +17101,8 @@
         </p:nvSpPr>
         <p:spPr>
           <a:xfrm>
-            <a:off x="7799832" y="1801368"/>
-            <a:ext cx="3145536" cy="640080"/>
+            <a:off x="7708392" y="1764792"/>
+            <a:ext cx="3282696" cy="749808"/>
           </a:xfrm>
           <a:prstGeom prst="rect">
             <a:avLst/>
@@ -17114,7 +17120,7 @@
               <a:buNone/>
             </a:pPr>
             <a:r>
-              <a:rPr lang="en-US" sz="1320" dirty="0">
+              <a:rPr lang="en-US" sz="1220" dirty="0">
                 <a:solidFill>
                   <a:srgbClr val="17364A"/>
                 </a:solidFill>
@@ -17122,9 +17128,9 @@
                 <a:ea typeface="Aptos" pitchFamily="34" charset="-122"/>
                 <a:cs typeface="Aptos" pitchFamily="34" charset="-120"/>
               </a:rPr>
-              <a:t>Time-series methods matter because public health surveillance is often about change.</a:t>
-            </a:r>
-            <a:endParaRPr lang="en-US" sz="1320" dirty="0"/>
+              <a:t>Time-series methods matter because public health surveillance is often about.</a:t>
+            </a:r>
+            <a:endParaRPr lang="en-US" sz="1220" dirty="0"/>
           </a:p>
         </p:txBody>
       </p:sp>
@@ -17136,12 +17142,12 @@
         </p:nvSpPr>
         <p:spPr>
           <a:xfrm>
-            <a:off x="7635240" y="2670048"/>
-            <a:ext cx="3474720" cy="1377086"/>
+            <a:off x="7543800" y="2724912"/>
+            <a:ext cx="3611880" cy="1527048"/>
           </a:xfrm>
           <a:prstGeom prst="roundRect">
             <a:avLst>
-              <a:gd name="adj" fmla="val 7968"/>
+              <a:gd name="adj" fmla="val 7186"/>
             </a:avLst>
           </a:prstGeom>
           <a:solidFill>
@@ -17163,8 +17169,8 @@
         </p:nvSpPr>
         <p:spPr>
           <a:xfrm>
-            <a:off x="7799832" y="2816352"/>
-            <a:ext cx="3145536" cy="256032"/>
+            <a:off x="7708392" y="2852928"/>
+            <a:ext cx="3282696" cy="228600"/>
           </a:xfrm>
           <a:prstGeom prst="rect">
             <a:avLst/>
@@ -17180,7 +17186,7 @@
               <a:buNone/>
             </a:pPr>
             <a:r>
-              <a:rPr lang="en-US" sz="1300" b="1" dirty="0">
+              <a:rPr lang="en-US" sz="1220" b="1" dirty="0">
                 <a:solidFill>
                   <a:srgbClr val="0068B7"/>
                 </a:solidFill>
@@ -17190,7 +17196,7 @@
               </a:rPr>
               <a:t>Concept checkpoints</a:t>
             </a:r>
-            <a:endParaRPr lang="en-US" sz="1300" dirty="0"/>
+            <a:endParaRPr lang="en-US" sz="1220" dirty="0"/>
           </a:p>
         </p:txBody>
       </p:sp>
@@ -17202,8 +17208,8 @@
         </p:nvSpPr>
         <p:spPr>
           <a:xfrm>
-            <a:off x="7818120" y="3182112"/>
-            <a:ext cx="3090672" cy="718718"/>
+            <a:off x="7726680" y="3182112"/>
+            <a:ext cx="3227832" cy="960120"/>
           </a:xfrm>
           <a:prstGeom prst="rect">
             <a:avLst/>
@@ -17221,7 +17227,7 @@
               <a:buNone/>
             </a:pPr>
             <a:r>
-              <a:rPr lang="en-US" sz="1220" dirty="0">
+              <a:rPr lang="en-US" sz="1140" dirty="0">
                 <a:solidFill>
                   <a:srgbClr val="17364A"/>
                 </a:solidFill>
@@ -17229,16 +17235,16 @@
                 <a:ea typeface="Aptos" pitchFamily="34" charset="-122"/>
                 <a:cs typeface="Aptos" pitchFamily="34" charset="-120"/>
               </a:rPr>
-              <a:t>A single count may be difficult to interpret without knowing.</a:t>
-            </a:r>
-            <a:endParaRPr lang="en-US" sz="1220" dirty="0"/>
-          </a:p>
-          <a:p>
-            <a:pPr indent="0" marL="0">
-              <a:buNone/>
-            </a:pPr>
-            <a:r>
-              <a:rPr lang="en-US" sz="1220" dirty="0">
+              <a:t>A single count may be difficult to interpret.</a:t>
+            </a:r>
+            <a:endParaRPr lang="en-US" sz="1140" dirty="0"/>
+          </a:p>
+          <a:p>
+            <a:pPr indent="0" marL="0">
+              <a:buNone/>
+            </a:pPr>
+            <a:r>
+              <a:rPr lang="en-US" sz="1140" dirty="0">
                 <a:solidFill>
                   <a:srgbClr val="17364A"/>
                 </a:solidFill>
@@ -17246,16 +17252,16 @@
                 <a:ea typeface="Aptos" pitchFamily="34" charset="-122"/>
                 <a:cs typeface="Aptos" pitchFamily="34" charset="-120"/>
               </a:rPr>
-              <a:t>AI-supported anomaly detection can help staff review large volumes.</a:t>
-            </a:r>
-            <a:endParaRPr lang="en-US" sz="1220" dirty="0"/>
-          </a:p>
-          <a:p>
-            <a:pPr indent="0" marL="0">
-              <a:buNone/>
-            </a:pPr>
-            <a:r>
-              <a:rPr lang="en-US" sz="1220" dirty="0">
+              <a:t>AI-supported anomaly detection can help staff.</a:t>
+            </a:r>
+            <a:endParaRPr lang="en-US" sz="1140" dirty="0"/>
+          </a:p>
+          <a:p>
+            <a:pPr indent="0" marL="0">
+              <a:buNone/>
+            </a:pPr>
+            <a:r>
+              <a:rPr lang="en-US" sz="1140" dirty="0">
                 <a:solidFill>
                   <a:srgbClr val="17364A"/>
                 </a:solidFill>
@@ -17263,9 +17269,9 @@
                 <a:ea typeface="Aptos" pitchFamily="34" charset="-122"/>
                 <a:cs typeface="Aptos" pitchFamily="34" charset="-120"/>
               </a:rPr>
-              <a:t>However, public health time-series data are shaped by reporting.</a:t>
-            </a:r>
-            <a:endParaRPr lang="en-US" sz="1220" dirty="0"/>
+              <a:t>However, public health time-series data are shaped.</a:t>
+            </a:r>
+            <a:endParaRPr lang="en-US" sz="1140" dirty="0"/>
           </a:p>
         </p:txBody>
       </p:sp>
@@ -17277,12 +17283,12 @@
         </p:nvSpPr>
         <p:spPr>
           <a:xfrm>
-            <a:off x="7635240" y="4184294"/>
-            <a:ext cx="3474720" cy="1466698"/>
+            <a:off x="7543800" y="4389120"/>
+            <a:ext cx="3611880" cy="1261872"/>
           </a:xfrm>
           <a:prstGeom prst="roundRect">
             <a:avLst>
-              <a:gd name="adj" fmla="val 7481"/>
+              <a:gd name="adj" fmla="val 8696"/>
             </a:avLst>
           </a:prstGeom>
           <a:solidFill>
@@ -17304,8 +17310,8 @@
         </p:nvSpPr>
         <p:spPr>
           <a:xfrm>
-            <a:off x="7799832" y="4330598"/>
-            <a:ext cx="3145536" cy="256032"/>
+            <a:off x="7708392" y="4517136"/>
+            <a:ext cx="3282696" cy="228600"/>
           </a:xfrm>
           <a:prstGeom prst="rect">
             <a:avLst/>
@@ -17321,7 +17327,7 @@
               <a:buNone/>
             </a:pPr>
             <a:r>
-              <a:rPr lang="en-US" sz="1300" b="1" dirty="0">
+              <a:rPr lang="en-US" sz="1220" b="1" dirty="0">
                 <a:solidFill>
                   <a:srgbClr val="0068B7"/>
                 </a:solidFill>
@@ -17331,7 +17337,7 @@
               </a:rPr>
               <a:t>Apply it</a:t>
             </a:r>
-            <a:endParaRPr lang="en-US" sz="1300" dirty="0"/>
+            <a:endParaRPr lang="en-US" sz="1220" dirty="0"/>
           </a:p>
         </p:txBody>
       </p:sp>
@@ -17343,8 +17349,8 @@
         </p:nvSpPr>
         <p:spPr>
           <a:xfrm>
-            <a:off x="7799832" y="4659782"/>
-            <a:ext cx="3145536" cy="899770"/>
+            <a:off x="7708392" y="4828032"/>
+            <a:ext cx="3282696" cy="749808"/>
           </a:xfrm>
           <a:prstGeom prst="rect">
             <a:avLst/>
@@ -17362,7 +17368,7 @@
               <a:buNone/>
             </a:pPr>
             <a:r>
-              <a:rPr lang="en-US" sz="1320" dirty="0">
+              <a:rPr lang="en-US" sz="1220" dirty="0">
                 <a:solidFill>
                   <a:srgbClr val="17364A"/>
                 </a:solidFill>
@@ -17370,9 +17376,9 @@
                 <a:ea typeface="Aptos" pitchFamily="34" charset="-122"/>
                 <a:cs typeface="Aptos" pitchFamily="34" charset="-120"/>
               </a:rPr>
-              <a:t>Connect the concept to public health purpose, responsible use, required safeguards, documentation, and the next action a department should take.</a:t>
-            </a:r>
-            <a:endParaRPr lang="en-US" sz="1320" dirty="0"/>
+              <a:t>Connect the concept to public health purpose, responsible use, required.</a:t>
+            </a:r>
+            <a:endParaRPr lang="en-US" sz="1220" dirty="0"/>
           </a:p>
         </p:txBody>
       </p:sp>
@@ -17663,8 +17669,8 @@
         </p:nvSpPr>
         <p:spPr>
           <a:xfrm>
-            <a:off x="868680" y="1508760"/>
-            <a:ext cx="6309360" cy="4160520"/>
+            <a:off x="822960" y="1463040"/>
+            <a:ext cx="6565392" cy="4343400"/>
           </a:xfrm>
           <a:prstGeom prst="rect">
             <a:avLst/>
@@ -17682,7 +17688,7 @@
               <a:buNone/>
             </a:pPr>
             <a:r>
-              <a:rPr lang="en-US" sz="2100" dirty="0">
+              <a:rPr lang="en-US" sz="1920" dirty="0">
                 <a:solidFill>
                   <a:srgbClr val="003A63"/>
                 </a:solidFill>
@@ -17690,16 +17696,16 @@
                 <a:ea typeface="Aptos" pitchFamily="34" charset="-122"/>
                 <a:cs typeface="Aptos" pitchFamily="34" charset="-120"/>
               </a:rPr>
-              <a:t>• A syndromic surveillance team may use anomaly detection to monitor emergency department visits.</a:t>
-            </a:r>
-            <a:endParaRPr lang="en-US" sz="2100" dirty="0"/>
-          </a:p>
-          <a:p>
-            <a:pPr indent="0" marL="0">
-              <a:buNone/>
-            </a:pPr>
-            <a:r>
-              <a:rPr lang="en-US" sz="2100" dirty="0">
+              <a:t>• A syndromic surveillance team may use anomaly detection to monitor emergency.</a:t>
+            </a:r>
+            <a:endParaRPr lang="en-US" sz="1920" dirty="0"/>
+          </a:p>
+          <a:p>
+            <a:pPr indent="0" marL="0">
+              <a:buNone/>
+            </a:pPr>
+            <a:r>
+              <a:rPr lang="en-US" sz="1920" dirty="0">
                 <a:solidFill>
                   <a:srgbClr val="003A63"/>
                 </a:solidFill>
@@ -17707,16 +17713,16 @@
                 <a:ea typeface="Aptos" pitchFamily="34" charset="-122"/>
                 <a:cs typeface="Aptos" pitchFamily="34" charset="-120"/>
               </a:rPr>
-              <a:t>• The system may flag a county when visits exceed the expected range for that day and season.</a:t>
-            </a:r>
-            <a:endParaRPr lang="en-US" sz="2100" dirty="0"/>
-          </a:p>
-          <a:p>
-            <a:pPr indent="0" marL="0">
-              <a:buNone/>
-            </a:pPr>
-            <a:r>
-              <a:rPr lang="en-US" sz="2100" dirty="0">
+              <a:t>• The system may flag a county when visits exceed the expected range for that.</a:t>
+            </a:r>
+            <a:endParaRPr lang="en-US" sz="1920" dirty="0"/>
+          </a:p>
+          <a:p>
+            <a:pPr indent="0" marL="0">
+              <a:buNone/>
+            </a:pPr>
+            <a:r>
+              <a:rPr lang="en-US" sz="1920" dirty="0">
                 <a:solidFill>
                   <a:srgbClr val="003A63"/>
                 </a:solidFill>
@@ -17724,9 +17730,9 @@
                 <a:ea typeface="Aptos" pitchFamily="34" charset="-122"/>
                 <a:cs typeface="Aptos" pitchFamily="34" charset="-120"/>
               </a:rPr>
-              <a:t>• The alert could prompt review of age groups, facilities, diagnosis text, lab data, school.</a:t>
-            </a:r>
-            <a:endParaRPr lang="en-US" sz="2100" dirty="0"/>
+              <a:t>• The alert could prompt review of age groups, facilities, diagnosis text, lab.</a:t>
+            </a:r>
+            <a:endParaRPr lang="en-US" sz="1920" dirty="0"/>
           </a:p>
         </p:txBody>
       </p:sp>
@@ -17738,12 +17744,12 @@
         </p:nvSpPr>
         <p:spPr>
           <a:xfrm>
-            <a:off x="7635240" y="1325880"/>
-            <a:ext cx="3474720" cy="1255471"/>
+            <a:off x="7543800" y="1325880"/>
+            <a:ext cx="3611880" cy="1261872"/>
           </a:xfrm>
           <a:prstGeom prst="roundRect">
             <a:avLst>
-              <a:gd name="adj" fmla="val 8740"/>
+              <a:gd name="adj" fmla="val 8696"/>
             </a:avLst>
           </a:prstGeom>
           <a:solidFill>
@@ -17765,8 +17771,8 @@
         </p:nvSpPr>
         <p:spPr>
           <a:xfrm>
-            <a:off x="7799832" y="1472184"/>
-            <a:ext cx="3145536" cy="256032"/>
+            <a:off x="7708392" y="1453896"/>
+            <a:ext cx="3282696" cy="228600"/>
           </a:xfrm>
           <a:prstGeom prst="rect">
             <a:avLst/>
@@ -17782,7 +17788,7 @@
               <a:buNone/>
             </a:pPr>
             <a:r>
-              <a:rPr lang="en-US" sz="1300" b="1" dirty="0">
+              <a:rPr lang="en-US" sz="1220" b="1" dirty="0">
                 <a:solidFill>
                   <a:srgbClr val="0068B7"/>
                 </a:solidFill>
@@ -17792,7 +17798,7 @@
               </a:rPr>
               <a:t>Core concept</a:t>
             </a:r>
-            <a:endParaRPr lang="en-US" sz="1300" dirty="0"/>
+            <a:endParaRPr lang="en-US" sz="1220" dirty="0"/>
           </a:p>
         </p:txBody>
       </p:sp>
@@ -17804,8 +17810,8 @@
         </p:nvSpPr>
         <p:spPr>
           <a:xfrm>
-            <a:off x="7799832" y="1801368"/>
-            <a:ext cx="3145536" cy="688543"/>
+            <a:off x="7708392" y="1764792"/>
+            <a:ext cx="3282696" cy="749808"/>
           </a:xfrm>
           <a:prstGeom prst="rect">
             <a:avLst/>
@@ -17823,7 +17829,7 @@
               <a:buNone/>
             </a:pPr>
             <a:r>
-              <a:rPr lang="en-US" sz="1320" dirty="0">
+              <a:rPr lang="en-US" sz="1220" dirty="0">
                 <a:solidFill>
                   <a:srgbClr val="17364A"/>
                 </a:solidFill>
@@ -17831,9 +17837,9 @@
                 <a:ea typeface="Aptos" pitchFamily="34" charset="-122"/>
                 <a:cs typeface="Aptos" pitchFamily="34" charset="-120"/>
               </a:rPr>
-              <a:t>A syndromic surveillance team may use anomaly detection to monitor emergency department visits for.</a:t>
-            </a:r>
-            <a:endParaRPr lang="en-US" sz="1320" dirty="0"/>
+              <a:t>A syndromic surveillance team may use anomaly detection to monitor emergency.</a:t>
+            </a:r>
+            <a:endParaRPr lang="en-US" sz="1220" dirty="0"/>
           </a:p>
         </p:txBody>
       </p:sp>
@@ -17845,12 +17851,12 @@
         </p:nvSpPr>
         <p:spPr>
           <a:xfrm>
-            <a:off x="7635240" y="2718511"/>
-            <a:ext cx="3474720" cy="1328623"/>
+            <a:off x="7543800" y="2724912"/>
+            <a:ext cx="3611880" cy="1527048"/>
           </a:xfrm>
           <a:prstGeom prst="roundRect">
             <a:avLst>
-              <a:gd name="adj" fmla="val 8259"/>
+              <a:gd name="adj" fmla="val 7186"/>
             </a:avLst>
           </a:prstGeom>
           <a:solidFill>
@@ -17872,8 +17878,8 @@
         </p:nvSpPr>
         <p:spPr>
           <a:xfrm>
-            <a:off x="7799832" y="2864815"/>
-            <a:ext cx="3145536" cy="256032"/>
+            <a:off x="7708392" y="2852928"/>
+            <a:ext cx="3282696" cy="228600"/>
           </a:xfrm>
           <a:prstGeom prst="rect">
             <a:avLst/>
@@ -17889,7 +17895,7 @@
               <a:buNone/>
             </a:pPr>
             <a:r>
-              <a:rPr lang="en-US" sz="1300" b="1" dirty="0">
+              <a:rPr lang="en-US" sz="1220" b="1" dirty="0">
                 <a:solidFill>
                   <a:srgbClr val="0068B7"/>
                 </a:solidFill>
@@ -17899,7 +17905,7 @@
               </a:rPr>
               <a:t>Concept checkpoints</a:t>
             </a:r>
-            <a:endParaRPr lang="en-US" sz="1300" dirty="0"/>
+            <a:endParaRPr lang="en-US" sz="1220" dirty="0"/>
           </a:p>
         </p:txBody>
       </p:sp>
@@ -17911,8 +17917,8 @@
         </p:nvSpPr>
         <p:spPr>
           <a:xfrm>
-            <a:off x="7818120" y="3230575"/>
-            <a:ext cx="3090672" cy="670255"/>
+            <a:off x="7726680" y="3182112"/>
+            <a:ext cx="3227832" cy="960120"/>
           </a:xfrm>
           <a:prstGeom prst="rect">
             <a:avLst/>
@@ -17930,7 +17936,7 @@
               <a:buNone/>
             </a:pPr>
             <a:r>
-              <a:rPr lang="en-US" sz="1220" dirty="0">
+              <a:rPr lang="en-US" sz="1140" dirty="0">
                 <a:solidFill>
                   <a:srgbClr val="17364A"/>
                 </a:solidFill>
@@ -17938,16 +17944,16 @@
                 <a:ea typeface="Aptos" pitchFamily="34" charset="-122"/>
                 <a:cs typeface="Aptos" pitchFamily="34" charset="-120"/>
               </a:rPr>
-              <a:t>A syndromic surveillance team may use anomaly detection to monitor.</a:t>
-            </a:r>
-            <a:endParaRPr lang="en-US" sz="1220" dirty="0"/>
-          </a:p>
-          <a:p>
-            <a:pPr indent="0" marL="0">
-              <a:buNone/>
-            </a:pPr>
-            <a:r>
-              <a:rPr lang="en-US" sz="1220" dirty="0">
+              <a:t>A syndromic surveillance team may use anomaly.</a:t>
+            </a:r>
+            <a:endParaRPr lang="en-US" sz="1140" dirty="0"/>
+          </a:p>
+          <a:p>
+            <a:pPr indent="0" marL="0">
+              <a:buNone/>
+            </a:pPr>
+            <a:r>
+              <a:rPr lang="en-US" sz="1140" dirty="0">
                 <a:solidFill>
                   <a:srgbClr val="17364A"/>
                 </a:solidFill>
@@ -17955,16 +17961,16 @@
                 <a:ea typeface="Aptos" pitchFamily="34" charset="-122"/>
                 <a:cs typeface="Aptos" pitchFamily="34" charset="-120"/>
               </a:rPr>
-              <a:t>The alert could prompt review of age groups, facilities, diagnosis.</a:t>
-            </a:r>
-            <a:endParaRPr lang="en-US" sz="1220" dirty="0"/>
-          </a:p>
-          <a:p>
-            <a:pPr indent="0" marL="0">
-              <a:buNone/>
-            </a:pPr>
-            <a:r>
-              <a:rPr lang="en-US" sz="1220" dirty="0">
+              <a:t>The alert could prompt review of age groups,.</a:t>
+            </a:r>
+            <a:endParaRPr lang="en-US" sz="1140" dirty="0"/>
+          </a:p>
+          <a:p>
+            <a:pPr indent="0" marL="0">
+              <a:buNone/>
+            </a:pPr>
+            <a:r>
+              <a:rPr lang="en-US" sz="1140" dirty="0">
                 <a:solidFill>
                   <a:srgbClr val="17364A"/>
                 </a:solidFill>
@@ -17972,9 +17978,9 @@
                 <a:ea typeface="Aptos" pitchFamily="34" charset="-122"/>
                 <a:cs typeface="Aptos" pitchFamily="34" charset="-120"/>
               </a:rPr>
-              <a:t>The alert is valuable only if it enters a disciplined review.</a:t>
-            </a:r>
-            <a:endParaRPr lang="en-US" sz="1220" dirty="0"/>
+              <a:t>The alert is valuable only if it enters a.</a:t>
+            </a:r>
+            <a:endParaRPr lang="en-US" sz="1140" dirty="0"/>
           </a:p>
         </p:txBody>
       </p:sp>
@@ -17986,12 +17992,12 @@
         </p:nvSpPr>
         <p:spPr>
           <a:xfrm>
-            <a:off x="7635240" y="4184294"/>
-            <a:ext cx="3474720" cy="1466698"/>
+            <a:off x="7543800" y="4389120"/>
+            <a:ext cx="3611880" cy="1261872"/>
           </a:xfrm>
           <a:prstGeom prst="roundRect">
             <a:avLst>
-              <a:gd name="adj" fmla="val 7481"/>
+              <a:gd name="adj" fmla="val 8696"/>
             </a:avLst>
           </a:prstGeom>
           <a:solidFill>
@@ -18013,8 +18019,8 @@
         </p:nvSpPr>
         <p:spPr>
           <a:xfrm>
-            <a:off x="7799832" y="4330598"/>
-            <a:ext cx="3145536" cy="256032"/>
+            <a:off x="7708392" y="4517136"/>
+            <a:ext cx="3282696" cy="228600"/>
           </a:xfrm>
           <a:prstGeom prst="rect">
             <a:avLst/>
@@ -18030,7 +18036,7 @@
               <a:buNone/>
             </a:pPr>
             <a:r>
-              <a:rPr lang="en-US" sz="1300" b="1" dirty="0">
+              <a:rPr lang="en-US" sz="1220" b="1" dirty="0">
                 <a:solidFill>
                   <a:srgbClr val="0068B7"/>
                 </a:solidFill>
@@ -18040,7 +18046,7 @@
               </a:rPr>
               <a:t>Apply it</a:t>
             </a:r>
-            <a:endParaRPr lang="en-US" sz="1300" dirty="0"/>
+            <a:endParaRPr lang="en-US" sz="1220" dirty="0"/>
           </a:p>
         </p:txBody>
       </p:sp>
@@ -18052,8 +18058,8 @@
         </p:nvSpPr>
         <p:spPr>
           <a:xfrm>
-            <a:off x="7799832" y="4659782"/>
-            <a:ext cx="3145536" cy="899770"/>
+            <a:off x="7708392" y="4828032"/>
+            <a:ext cx="3282696" cy="749808"/>
           </a:xfrm>
           <a:prstGeom prst="rect">
             <a:avLst/>
@@ -18071,7 +18077,7 @@
               <a:buNone/>
             </a:pPr>
             <a:r>
-              <a:rPr lang="en-US" sz="1320" dirty="0">
+              <a:rPr lang="en-US" sz="1220" dirty="0">
                 <a:solidFill>
                   <a:srgbClr val="17364A"/>
                 </a:solidFill>
@@ -18079,9 +18085,9 @@
                 <a:ea typeface="Aptos" pitchFamily="34" charset="-122"/>
                 <a:cs typeface="Aptos" pitchFamily="34" charset="-120"/>
               </a:rPr>
-              <a:t>Connect the concept to public health purpose, responsible use, required safeguards, documentation, and the next action a department should take.</a:t>
-            </a:r>
-            <a:endParaRPr lang="en-US" sz="1320" dirty="0"/>
+              <a:t>Connect the concept to public health purpose, responsible use, required.</a:t>
+            </a:r>
+            <a:endParaRPr lang="en-US" sz="1220" dirty="0"/>
           </a:p>
         </p:txBody>
       </p:sp>

--- a/downloads/presentations/modules/anl-240.pptx
+++ b/downloads/presentations/modules/anl-240.pptx
@@ -12306,7 +12306,7 @@
                 <a:ea typeface="Aptos" pitchFamily="34" charset="-122"/>
                 <a:cs typeface="Aptos" pitchFamily="34" charset="-120"/>
               </a:rPr>
-              <a:t>• 1. What is an anomaly in a public health time series?</a:t>
+              <a:t>1. What is an anomaly in a public health time series?</a:t>
             </a:r>
             <a:endParaRPr lang="en-US" sz="1920" dirty="0"/>
           </a:p>
@@ -12323,7 +12323,7 @@
                 <a:ea typeface="Aptos" pitchFamily="34" charset="-122"/>
                 <a:cs typeface="Aptos" pitchFamily="34" charset="-120"/>
               </a:rPr>
-              <a:t>• 2. Why does seasonality matter?</a:t>
+              <a:t>2. Why does seasonality matter?</a:t>
             </a:r>
             <a:endParaRPr lang="en-US" sz="1920" dirty="0"/>
           </a:p>
@@ -12340,7 +12340,7 @@
                 <a:ea typeface="Aptos" pitchFamily="34" charset="-122"/>
                 <a:cs typeface="Aptos" pitchFamily="34" charset="-120"/>
               </a:rPr>
-              <a:t>• 3. What is a common risk of too many low-value alerts?</a:t>
+              <a:t>3. What is a common risk of too many low-value alerts?</a:t>
             </a:r>
             <a:endParaRPr lang="en-US" sz="1920" dirty="0"/>
           </a:p>
@@ -12447,7 +12447,7 @@
                 <a:ea typeface="Aptos" pitchFamily="34" charset="-122"/>
                 <a:cs typeface="Aptos" pitchFamily="34" charset="-120"/>
               </a:rPr>
-              <a:t>1. What is an anomaly in a public health time series?</a:t>
+              <a:t>What is an anomaly in a public health time series?</a:t>
             </a:r>
             <a:endParaRPr lang="en-US" sz="1220" dirty="0"/>
           </a:p>
@@ -12554,41 +12554,7 @@
                 <a:ea typeface="Aptos" pitchFamily="34" charset="-122"/>
                 <a:cs typeface="Aptos" pitchFamily="34" charset="-120"/>
               </a:rPr>
-              <a:t>1.</a:t>
-            </a:r>
-            <a:endParaRPr lang="en-US" sz="1140" dirty="0"/>
-          </a:p>
-          <a:p>
-            <a:pPr indent="0" marL="0">
-              <a:buNone/>
-            </a:pPr>
-            <a:r>
-              <a:rPr lang="en-US" sz="1140" dirty="0">
-                <a:solidFill>
-                  <a:srgbClr val="17364A"/>
-                </a:solidFill>
-                <a:latin typeface="Aptos" pitchFamily="34" charset="0"/>
-                <a:ea typeface="Aptos" pitchFamily="34" charset="-122"/>
-                <a:cs typeface="Aptos" pitchFamily="34" charset="-120"/>
-              </a:rPr>
               <a:t>What is an anomaly in a public health time series?</a:t>
-            </a:r>
-            <a:endParaRPr lang="en-US" sz="1140" dirty="0"/>
-          </a:p>
-          <a:p>
-            <a:pPr indent="0" marL="0">
-              <a:buNone/>
-            </a:pPr>
-            <a:r>
-              <a:rPr lang="en-US" sz="1140" dirty="0">
-                <a:solidFill>
-                  <a:srgbClr val="17364A"/>
-                </a:solidFill>
-                <a:latin typeface="Aptos" pitchFamily="34" charset="0"/>
-                <a:ea typeface="Aptos" pitchFamily="34" charset="-122"/>
-                <a:cs typeface="Aptos" pitchFamily="34" charset="-120"/>
-              </a:rPr>
-              <a:t>2.</a:t>
             </a:r>
             <a:endParaRPr lang="en-US" sz="1140" dirty="0"/>
           </a:p>
